--- a/slides/Lecture_Chapter07.pptx
+++ b/slides/Lecture_Chapter07.pptx
@@ -296,7 +296,7 @@
           <a:p>
             <a:fld id="{3E22BF2E-04DA-469E-97C5-BB68A0368813}" type="datetimeFigureOut">
               <a:rPr lang="en-US" smtClean="0"/>
-              <a:t>10/21/2025</a:t>
+              <a:t>11/29/2025</a:t>
             </a:fld>
             <a:endParaRPr lang="en-US"/>
           </a:p>
@@ -494,7 +494,7 @@
           <a:p>
             <a:fld id="{3E22BF2E-04DA-469E-97C5-BB68A0368813}" type="datetimeFigureOut">
               <a:rPr lang="en-US" smtClean="0"/>
-              <a:t>10/21/2025</a:t>
+              <a:t>11/29/2025</a:t>
             </a:fld>
             <a:endParaRPr lang="en-US"/>
           </a:p>
@@ -702,7 +702,7 @@
           <a:p>
             <a:fld id="{3E22BF2E-04DA-469E-97C5-BB68A0368813}" type="datetimeFigureOut">
               <a:rPr lang="en-US" smtClean="0"/>
-              <a:t>10/21/2025</a:t>
+              <a:t>11/29/2025</a:t>
             </a:fld>
             <a:endParaRPr lang="en-US"/>
           </a:p>
@@ -910,7 +910,7 @@
           <a:p>
             <a:fld id="{3E22BF2E-04DA-469E-97C5-BB68A0368813}" type="datetimeFigureOut">
               <a:rPr lang="en-US" smtClean="0"/>
-              <a:t>10/21/2025</a:t>
+              <a:t>11/29/2025</a:t>
             </a:fld>
             <a:endParaRPr lang="en-US"/>
           </a:p>
@@ -1185,7 +1185,7 @@
           <a:p>
             <a:fld id="{3E22BF2E-04DA-469E-97C5-BB68A0368813}" type="datetimeFigureOut">
               <a:rPr lang="en-US" smtClean="0"/>
-              <a:t>10/21/2025</a:t>
+              <a:t>11/29/2025</a:t>
             </a:fld>
             <a:endParaRPr lang="en-US"/>
           </a:p>
@@ -1450,7 +1450,7 @@
           <a:p>
             <a:fld id="{3E22BF2E-04DA-469E-97C5-BB68A0368813}" type="datetimeFigureOut">
               <a:rPr lang="en-US" smtClean="0"/>
-              <a:t>10/21/2025</a:t>
+              <a:t>11/29/2025</a:t>
             </a:fld>
             <a:endParaRPr lang="en-US"/>
           </a:p>
@@ -1862,7 +1862,7 @@
           <a:p>
             <a:fld id="{3E22BF2E-04DA-469E-97C5-BB68A0368813}" type="datetimeFigureOut">
               <a:rPr lang="en-US" smtClean="0"/>
-              <a:t>10/21/2025</a:t>
+              <a:t>11/29/2025</a:t>
             </a:fld>
             <a:endParaRPr lang="en-US"/>
           </a:p>
@@ -2003,7 +2003,7 @@
           <a:p>
             <a:fld id="{3E22BF2E-04DA-469E-97C5-BB68A0368813}" type="datetimeFigureOut">
               <a:rPr lang="en-US" smtClean="0"/>
-              <a:t>10/21/2025</a:t>
+              <a:t>11/29/2025</a:t>
             </a:fld>
             <a:endParaRPr lang="en-US"/>
           </a:p>
@@ -2116,7 +2116,7 @@
           <a:p>
             <a:fld id="{3E22BF2E-04DA-469E-97C5-BB68A0368813}" type="datetimeFigureOut">
               <a:rPr lang="en-US" smtClean="0"/>
-              <a:t>10/21/2025</a:t>
+              <a:t>11/29/2025</a:t>
             </a:fld>
             <a:endParaRPr lang="en-US"/>
           </a:p>
@@ -2427,7 +2427,7 @@
           <a:p>
             <a:fld id="{3E22BF2E-04DA-469E-97C5-BB68A0368813}" type="datetimeFigureOut">
               <a:rPr lang="en-US" smtClean="0"/>
-              <a:t>10/21/2025</a:t>
+              <a:t>11/29/2025</a:t>
             </a:fld>
             <a:endParaRPr lang="en-US"/>
           </a:p>
@@ -2715,7 +2715,7 @@
           <a:p>
             <a:fld id="{3E22BF2E-04DA-469E-97C5-BB68A0368813}" type="datetimeFigureOut">
               <a:rPr lang="en-US" smtClean="0"/>
-              <a:t>10/21/2025</a:t>
+              <a:t>11/29/2025</a:t>
             </a:fld>
             <a:endParaRPr lang="en-US"/>
           </a:p>
@@ -2956,7 +2956,7 @@
           <a:p>
             <a:fld id="{3E22BF2E-04DA-469E-97C5-BB68A0368813}" type="datetimeFigureOut">
               <a:rPr lang="en-US" smtClean="0"/>
-              <a:t>10/21/2025</a:t>
+              <a:t>11/29/2025</a:t>
             </a:fld>
             <a:endParaRPr lang="en-US"/>
           </a:p>
@@ -3473,7 +3473,7 @@
         </p:blipFill>
         <p:spPr bwMode="auto">
           <a:xfrm>
-            <a:off x="3653200" y="-18278"/>
+            <a:off x="3523485" y="0"/>
             <a:ext cx="8668512" cy="6857990"/>
           </a:xfrm>
           <a:prstGeom prst="rect">
@@ -3993,6 +3993,53 @@
           </a:prstGeom>
         </p:spPr>
       </p:pic>
+      <p:pic>
+        <p:nvPicPr>
+          <p:cNvPr id="6" name="Picture 5">
+            <a:extLst>
+              <a:ext uri="{FF2B5EF4-FFF2-40B4-BE49-F238E27FC236}">
+                <a16:creationId xmlns:a16="http://schemas.microsoft.com/office/drawing/2014/main" id="{8AD28C7D-14A3-CFEB-3DEC-2E01272844F2}"/>
+              </a:ext>
+            </a:extLst>
+          </p:cNvPr>
+          <p:cNvPicPr>
+            <a:picLocks noChangeAspect="1" noChangeArrowheads="1"/>
+          </p:cNvPicPr>
+          <p:nvPr/>
+        </p:nvPicPr>
+        <p:blipFill>
+          <a:blip r:embed="rId6">
+            <a:extLst>
+              <a:ext uri="{28A0092B-C50C-407E-A947-70E740481C1C}">
+                <a14:useLocalDpi xmlns:a14="http://schemas.microsoft.com/office/drawing/2010/main" val="0"/>
+              </a:ext>
+            </a:extLst>
+          </a:blip>
+          <a:srcRect/>
+          <a:stretch>
+            <a:fillRect/>
+          </a:stretch>
+        </p:blipFill>
+        <p:spPr bwMode="auto">
+          <a:xfrm>
+            <a:off x="7857741" y="198362"/>
+            <a:ext cx="4182403" cy="1000945"/>
+          </a:xfrm>
+          <a:prstGeom prst="rect">
+            <a:avLst/>
+          </a:prstGeom>
+          <a:noFill/>
+          <a:extLst>
+            <a:ext uri="{909E8E84-426E-40DD-AFC4-6F175D3DCCD1}">
+              <a14:hiddenFill xmlns:a14="http://schemas.microsoft.com/office/drawing/2010/main">
+                <a:solidFill>
+                  <a:srgbClr val="FFFFFF"/>
+                </a:solidFill>
+              </a14:hiddenFill>
+            </a:ext>
+          </a:extLst>
+        </p:spPr>
+      </p:pic>
     </p:spTree>
     <p:extLst>
       <p:ext uri="{BB962C8B-B14F-4D97-AF65-F5344CB8AC3E}">
@@ -4263,8 +4310,8 @@
           <a:chExt cx="0" cy="0"/>
         </a:xfrm>
       </p:grpSpPr>
-      <mc:AlternateContent xmlns:mc="http://schemas.openxmlformats.org/markup-compatibility/2006">
-        <mc:Choice xmlns:a14="http://schemas.microsoft.com/office/drawing/2010/main" Requires="a14">
+      <mc:AlternateContent xmlns:mc="http://schemas.openxmlformats.org/markup-compatibility/2006" xmlns:a14="http://schemas.microsoft.com/office/drawing/2010/main">
+        <mc:Choice Requires="a14">
           <p:sp>
             <p:nvSpPr>
               <p:cNvPr id="2" name="Title 1">
@@ -4310,7 +4357,7 @@
             </p:txBody>
           </p:sp>
         </mc:Choice>
-        <mc:Fallback>
+        <mc:Fallback xmlns="">
           <p:sp>
             <p:nvSpPr>
               <p:cNvPr id="2" name="Title 1">
@@ -4432,8 +4479,8 @@
             </a:prstGeom>
           </p:spPr>
         </p:pic>
-        <mc:AlternateContent xmlns:mc="http://schemas.openxmlformats.org/markup-compatibility/2006">
-          <mc:Choice xmlns:a14="http://schemas.microsoft.com/office/drawing/2010/main" Requires="a14">
+        <mc:AlternateContent xmlns:mc="http://schemas.openxmlformats.org/markup-compatibility/2006" xmlns:a14="http://schemas.microsoft.com/office/drawing/2010/main">
+          <mc:Choice Requires="a14">
             <p:sp>
               <p:nvSpPr>
                 <p:cNvPr id="6" name="Speech Bubble: Rectangle with Corners Rounded 5">
@@ -4498,7 +4545,7 @@
               </p:txBody>
             </p:sp>
           </mc:Choice>
-          <mc:Fallback>
+          <mc:Fallback xmlns="">
             <p:sp>
               <p:nvSpPr>
                 <p:cNvPr id="6" name="Speech Bubble: Rectangle with Corners Rounded 5">
@@ -4547,8 +4594,8 @@
             </p:sp>
           </mc:Fallback>
         </mc:AlternateContent>
-        <mc:AlternateContent xmlns:mc="http://schemas.openxmlformats.org/markup-compatibility/2006">
-          <mc:Choice xmlns:a14="http://schemas.microsoft.com/office/drawing/2010/main" Requires="a14">
+        <mc:AlternateContent xmlns:mc="http://schemas.openxmlformats.org/markup-compatibility/2006" xmlns:a14="http://schemas.microsoft.com/office/drawing/2010/main">
+          <mc:Choice Requires="a14">
             <p:sp>
               <p:nvSpPr>
                 <p:cNvPr id="7" name="Speech Bubble: Rectangle with Corners Rounded 6">
@@ -4614,7 +4661,7 @@
               </p:txBody>
             </p:sp>
           </mc:Choice>
-          <mc:Fallback>
+          <mc:Fallback xmlns="">
             <p:sp>
               <p:nvSpPr>
                 <p:cNvPr id="7" name="Speech Bubble: Rectangle with Corners Rounded 6">
@@ -4730,8 +4777,8 @@
             <a:chExt cx="4478529" cy="4775368"/>
           </a:xfrm>
         </p:grpSpPr>
-        <mc:AlternateContent xmlns:mc="http://schemas.openxmlformats.org/markup-compatibility/2006">
-          <mc:Choice xmlns:a14="http://schemas.microsoft.com/office/drawing/2010/main" Requires="a14">
+        <mc:AlternateContent xmlns:mc="http://schemas.openxmlformats.org/markup-compatibility/2006" xmlns:a14="http://schemas.microsoft.com/office/drawing/2010/main">
+          <mc:Choice Requires="a14">
             <p:sp>
               <p:nvSpPr>
                 <p:cNvPr id="4" name="Speech Bubble: Rectangle with Corners Rounded 3">
@@ -4811,7 +4858,7 @@
               </p:txBody>
             </p:sp>
           </mc:Choice>
-          <mc:Fallback>
+          <mc:Fallback xmlns="">
             <p:sp>
               <p:nvSpPr>
                 <p:cNvPr id="4" name="Speech Bubble: Rectangle with Corners Rounded 3">
@@ -4860,8 +4907,8 @@
             </p:sp>
           </mc:Fallback>
         </mc:AlternateContent>
-        <mc:AlternateContent xmlns:mc="http://schemas.openxmlformats.org/markup-compatibility/2006">
-          <mc:Choice xmlns:a14="http://schemas.microsoft.com/office/drawing/2010/main" Requires="a14">
+        <mc:AlternateContent xmlns:mc="http://schemas.openxmlformats.org/markup-compatibility/2006" xmlns:a14="http://schemas.microsoft.com/office/drawing/2010/main">
+          <mc:Choice Requires="a14">
             <p:sp>
               <p:nvSpPr>
                 <p:cNvPr id="9" name="Speech Bubble: Rectangle with Corners Rounded 8">
@@ -4927,7 +4974,7 @@
               </p:txBody>
             </p:sp>
           </mc:Choice>
-          <mc:Fallback>
+          <mc:Fallback xmlns="">
             <p:sp>
               <p:nvSpPr>
                 <p:cNvPr id="9" name="Speech Bubble: Rectangle with Corners Rounded 8">
@@ -5271,8 +5318,8 @@
           </p:sp>
         </mc:Fallback>
       </mc:AlternateContent>
-      <mc:AlternateContent xmlns:mc="http://schemas.openxmlformats.org/markup-compatibility/2006">
-        <mc:Choice xmlns:a14="http://schemas.microsoft.com/office/drawing/2010/main" Requires="a14">
+      <mc:AlternateContent xmlns:mc="http://schemas.openxmlformats.org/markup-compatibility/2006" xmlns:a14="http://schemas.microsoft.com/office/drawing/2010/main">
+        <mc:Choice Requires="a14">
           <p:sp>
             <p:nvSpPr>
               <p:cNvPr id="3" name="Content Placeholder 2">
@@ -6107,7 +6154,7 @@
             </p:txBody>
           </p:sp>
         </mc:Choice>
-        <mc:Fallback>
+        <mc:Fallback xmlns="">
           <p:sp>
             <p:nvSpPr>
               <p:cNvPr id="3" name="Content Placeholder 2">
@@ -6821,8 +6868,8 @@
           </a:p>
         </p:txBody>
       </p:sp>
-      <mc:AlternateContent xmlns:mc="http://schemas.openxmlformats.org/markup-compatibility/2006">
-        <mc:Choice xmlns:a14="http://schemas.microsoft.com/office/drawing/2010/main" Requires="a14">
+      <mc:AlternateContent xmlns:mc="http://schemas.openxmlformats.org/markup-compatibility/2006" xmlns:a14="http://schemas.microsoft.com/office/drawing/2010/main">
+        <mc:Choice Requires="a14">
           <p:sp>
             <p:nvSpPr>
               <p:cNvPr id="3" name="Content Placeholder 2">
@@ -6923,7 +6970,7 @@
             </p:txBody>
           </p:sp>
         </mc:Choice>
-        <mc:Fallback>
+        <mc:Fallback xmlns="">
           <p:sp>
             <p:nvSpPr>
               <p:cNvPr id="3" name="Content Placeholder 2">
@@ -11305,8 +11352,8 @@
           <a:chExt cx="0" cy="0"/>
         </a:xfrm>
       </p:grpSpPr>
-      <mc:AlternateContent xmlns:mc="http://schemas.openxmlformats.org/markup-compatibility/2006">
-        <mc:Choice xmlns:a14="http://schemas.microsoft.com/office/drawing/2010/main" Requires="a14">
+      <mc:AlternateContent xmlns:mc="http://schemas.openxmlformats.org/markup-compatibility/2006" xmlns:a14="http://schemas.microsoft.com/office/drawing/2010/main">
+        <mc:Choice Requires="a14">
           <p:sp>
             <p:nvSpPr>
               <p:cNvPr id="4" name="Title 3">
@@ -11346,7 +11393,7 @@
             </p:txBody>
           </p:sp>
         </mc:Choice>
-        <mc:Fallback>
+        <mc:Fallback xmlns="">
           <p:sp>
             <p:nvSpPr>
               <p:cNvPr id="4" name="Title 3">
@@ -15376,8 +15423,8 @@
           <a:chExt cx="0" cy="0"/>
         </a:xfrm>
       </p:grpSpPr>
-      <mc:AlternateContent xmlns:mc="http://schemas.openxmlformats.org/markup-compatibility/2006">
-        <mc:Choice xmlns:a14="http://schemas.microsoft.com/office/drawing/2010/main" Requires="a14">
+      <mc:AlternateContent xmlns:mc="http://schemas.openxmlformats.org/markup-compatibility/2006" xmlns:a14="http://schemas.microsoft.com/office/drawing/2010/main">
+        <mc:Choice Requires="a14">
           <p:sp>
             <p:nvSpPr>
               <p:cNvPr id="4" name="Title 3">
@@ -15417,7 +15464,7 @@
             </p:txBody>
           </p:sp>
         </mc:Choice>
-        <mc:Fallback>
+        <mc:Fallback xmlns="">
           <p:sp>
             <p:nvSpPr>
               <p:cNvPr id="4" name="Title 3">
@@ -15596,8 +15643,8 @@
           </p:sp>
         </mc:Fallback>
       </mc:AlternateContent>
-      <mc:AlternateContent xmlns:mc="http://schemas.openxmlformats.org/markup-compatibility/2006">
-        <mc:Choice xmlns:a14="http://schemas.microsoft.com/office/drawing/2010/main" Requires="a14">
+      <mc:AlternateContent xmlns:mc="http://schemas.openxmlformats.org/markup-compatibility/2006" xmlns:a14="http://schemas.microsoft.com/office/drawing/2010/main">
+        <mc:Choice Requires="a14">
           <p:sp>
             <p:nvSpPr>
               <p:cNvPr id="3" name="Content Placeholder 2">
@@ -16449,7 +16496,7 @@
             </p:txBody>
           </p:sp>
         </mc:Choice>
-        <mc:Fallback>
+        <mc:Fallback xmlns="">
           <p:sp>
             <p:nvSpPr>
               <p:cNvPr id="3" name="Content Placeholder 2">

--- a/slides/Lecture_Chapter07.pptx
+++ b/slides/Lecture_Chapter07.pptx
@@ -8,18 +8,19 @@
     <p:sldId id="256" r:id="rId2"/>
     <p:sldId id="384" r:id="rId3"/>
     <p:sldId id="385" r:id="rId4"/>
-    <p:sldId id="396" r:id="rId5"/>
-    <p:sldId id="386" r:id="rId6"/>
-    <p:sldId id="387" r:id="rId7"/>
-    <p:sldId id="388" r:id="rId8"/>
-    <p:sldId id="392" r:id="rId9"/>
-    <p:sldId id="391" r:id="rId10"/>
-    <p:sldId id="394" r:id="rId11"/>
-    <p:sldId id="393" r:id="rId12"/>
-    <p:sldId id="389" r:id="rId13"/>
-    <p:sldId id="390" r:id="rId14"/>
-    <p:sldId id="395" r:id="rId15"/>
-    <p:sldId id="397" r:id="rId16"/>
+    <p:sldId id="398" r:id="rId5"/>
+    <p:sldId id="396" r:id="rId6"/>
+    <p:sldId id="386" r:id="rId7"/>
+    <p:sldId id="387" r:id="rId8"/>
+    <p:sldId id="388" r:id="rId9"/>
+    <p:sldId id="392" r:id="rId10"/>
+    <p:sldId id="391" r:id="rId11"/>
+    <p:sldId id="394" r:id="rId12"/>
+    <p:sldId id="393" r:id="rId13"/>
+    <p:sldId id="389" r:id="rId14"/>
+    <p:sldId id="390" r:id="rId15"/>
+    <p:sldId id="395" r:id="rId16"/>
+    <p:sldId id="397" r:id="rId17"/>
   </p:sldIdLst>
   <p:sldSz cx="12192000" cy="6858000"/>
   <p:notesSz cx="6858000" cy="9144000"/>
@@ -126,6 +127,7 @@
             <p14:sldId id="256"/>
             <p14:sldId id="384"/>
             <p14:sldId id="385"/>
+            <p14:sldId id="398"/>
             <p14:sldId id="396"/>
             <p14:sldId id="386"/>
             <p14:sldId id="387"/>
@@ -296,7 +298,7 @@
           <a:p>
             <a:fld id="{3E22BF2E-04DA-469E-97C5-BB68A0368813}" type="datetimeFigureOut">
               <a:rPr lang="en-US" smtClean="0"/>
-              <a:t>11/29/2025</a:t>
+              <a:t>1/10/2026</a:t>
             </a:fld>
             <a:endParaRPr lang="en-US"/>
           </a:p>
@@ -494,7 +496,7 @@
           <a:p>
             <a:fld id="{3E22BF2E-04DA-469E-97C5-BB68A0368813}" type="datetimeFigureOut">
               <a:rPr lang="en-US" smtClean="0"/>
-              <a:t>11/29/2025</a:t>
+              <a:t>1/10/2026</a:t>
             </a:fld>
             <a:endParaRPr lang="en-US"/>
           </a:p>
@@ -702,7 +704,7 @@
           <a:p>
             <a:fld id="{3E22BF2E-04DA-469E-97C5-BB68A0368813}" type="datetimeFigureOut">
               <a:rPr lang="en-US" smtClean="0"/>
-              <a:t>11/29/2025</a:t>
+              <a:t>1/10/2026</a:t>
             </a:fld>
             <a:endParaRPr lang="en-US"/>
           </a:p>
@@ -910,7 +912,7 @@
           <a:p>
             <a:fld id="{3E22BF2E-04DA-469E-97C5-BB68A0368813}" type="datetimeFigureOut">
               <a:rPr lang="en-US" smtClean="0"/>
-              <a:t>11/29/2025</a:t>
+              <a:t>1/10/2026</a:t>
             </a:fld>
             <a:endParaRPr lang="en-US"/>
           </a:p>
@@ -1185,7 +1187,7 @@
           <a:p>
             <a:fld id="{3E22BF2E-04DA-469E-97C5-BB68A0368813}" type="datetimeFigureOut">
               <a:rPr lang="en-US" smtClean="0"/>
-              <a:t>11/29/2025</a:t>
+              <a:t>1/10/2026</a:t>
             </a:fld>
             <a:endParaRPr lang="en-US"/>
           </a:p>
@@ -1450,7 +1452,7 @@
           <a:p>
             <a:fld id="{3E22BF2E-04DA-469E-97C5-BB68A0368813}" type="datetimeFigureOut">
               <a:rPr lang="en-US" smtClean="0"/>
-              <a:t>11/29/2025</a:t>
+              <a:t>1/10/2026</a:t>
             </a:fld>
             <a:endParaRPr lang="en-US"/>
           </a:p>
@@ -1862,7 +1864,7 @@
           <a:p>
             <a:fld id="{3E22BF2E-04DA-469E-97C5-BB68A0368813}" type="datetimeFigureOut">
               <a:rPr lang="en-US" smtClean="0"/>
-              <a:t>11/29/2025</a:t>
+              <a:t>1/10/2026</a:t>
             </a:fld>
             <a:endParaRPr lang="en-US"/>
           </a:p>
@@ -2003,7 +2005,7 @@
           <a:p>
             <a:fld id="{3E22BF2E-04DA-469E-97C5-BB68A0368813}" type="datetimeFigureOut">
               <a:rPr lang="en-US" smtClean="0"/>
-              <a:t>11/29/2025</a:t>
+              <a:t>1/10/2026</a:t>
             </a:fld>
             <a:endParaRPr lang="en-US"/>
           </a:p>
@@ -2116,7 +2118,7 @@
           <a:p>
             <a:fld id="{3E22BF2E-04DA-469E-97C5-BB68A0368813}" type="datetimeFigureOut">
               <a:rPr lang="en-US" smtClean="0"/>
-              <a:t>11/29/2025</a:t>
+              <a:t>1/10/2026</a:t>
             </a:fld>
             <a:endParaRPr lang="en-US"/>
           </a:p>
@@ -2427,7 +2429,7 @@
           <a:p>
             <a:fld id="{3E22BF2E-04DA-469E-97C5-BB68A0368813}" type="datetimeFigureOut">
               <a:rPr lang="en-US" smtClean="0"/>
-              <a:t>11/29/2025</a:t>
+              <a:t>1/10/2026</a:t>
             </a:fld>
             <a:endParaRPr lang="en-US"/>
           </a:p>
@@ -2715,7 +2717,7 @@
           <a:p>
             <a:fld id="{3E22BF2E-04DA-469E-97C5-BB68A0368813}" type="datetimeFigureOut">
               <a:rPr lang="en-US" smtClean="0"/>
-              <a:t>11/29/2025</a:t>
+              <a:t>1/10/2026</a:t>
             </a:fld>
             <a:endParaRPr lang="en-US"/>
           </a:p>
@@ -2956,7 +2958,7 @@
           <a:p>
             <a:fld id="{3E22BF2E-04DA-469E-97C5-BB68A0368813}" type="datetimeFigureOut">
               <a:rPr lang="en-US" smtClean="0"/>
-              <a:t>11/29/2025</a:t>
+              <a:t>1/10/2026</a:t>
             </a:fld>
             <a:endParaRPr lang="en-US"/>
           </a:p>
@@ -4077,6 +4079,1063 @@
               <p:cNvPr id="2" name="Title 1">
                 <a:extLst>
                   <a:ext uri="{FF2B5EF4-FFF2-40B4-BE49-F238E27FC236}">
+                    <a16:creationId xmlns:a16="http://schemas.microsoft.com/office/drawing/2014/main" id="{2FF0FE0E-E041-84BE-0F39-AE6BA8D28743}"/>
+                  </a:ext>
+                </a:extLst>
+              </p:cNvPr>
+              <p:cNvSpPr>
+                <a:spLocks noGrp="1"/>
+              </p:cNvSpPr>
+              <p:nvPr>
+                <p:ph type="title"/>
+              </p:nvPr>
+            </p:nvSpPr>
+            <p:spPr/>
+            <p:txBody>
+              <a:bodyPr/>
+              <a:lstStyle/>
+              <a:p>
+                <a14:m>
+                  <m:oMath xmlns:m="http://schemas.openxmlformats.org/officeDocument/2006/math">
+                    <m:r>
+                      <a:rPr lang="en-US" i="1" dirty="0">
+                        <a:latin typeface="Cambria Math" panose="02040503050406030204" pitchFamily="18" charset="0"/>
+                      </a:rPr>
+                      <m:t>𝑛</m:t>
+                    </m:r>
+                  </m:oMath>
+                </a14:m>
+                <a:r>
+                  <a:rPr lang="en-US" dirty="0"/>
+                  <a:t>-step Sarsa</a:t>
+                </a:r>
+              </a:p>
+            </p:txBody>
+          </p:sp>
+        </mc:Choice>
+        <mc:Fallback xmlns="">
+          <p:sp>
+            <p:nvSpPr>
+              <p:cNvPr id="2" name="Title 1">
+                <a:extLst>
+                  <a:ext uri="{FF2B5EF4-FFF2-40B4-BE49-F238E27FC236}">
+                    <a16:creationId xmlns:a16="http://schemas.microsoft.com/office/drawing/2014/main" id="{2FF0FE0E-E041-84BE-0F39-AE6BA8D28743}"/>
+                  </a:ext>
+                </a:extLst>
+              </p:cNvPr>
+              <p:cNvSpPr>
+                <a:spLocks noGrp="1" noRot="1" noChangeAspect="1" noMove="1" noResize="1" noEditPoints="1" noAdjustHandles="1" noChangeArrowheads="1" noChangeShapeType="1" noTextEdit="1"/>
+              </p:cNvSpPr>
+              <p:nvPr>
+                <p:ph type="title"/>
+              </p:nvPr>
+            </p:nvSpPr>
+            <p:spPr>
+              <a:blipFill>
+                <a:blip r:embed="rId2"/>
+                <a:stretch>
+                  <a:fillRect t="-20161" b="-35484"/>
+                </a:stretch>
+              </a:blipFill>
+            </p:spPr>
+            <p:txBody>
+              <a:bodyPr/>
+              <a:lstStyle/>
+              <a:p>
+                <a:r>
+                  <a:rPr lang="en-US">
+                    <a:noFill/>
+                  </a:rPr>
+                  <a:t> </a:t>
+                </a:r>
+              </a:p>
+            </p:txBody>
+          </p:sp>
+        </mc:Fallback>
+      </mc:AlternateContent>
+      <mc:AlternateContent xmlns:mc="http://schemas.openxmlformats.org/markup-compatibility/2006" xmlns:a14="http://schemas.microsoft.com/office/drawing/2010/main">
+        <mc:Choice Requires="a14">
+          <p:sp>
+            <p:nvSpPr>
+              <p:cNvPr id="3" name="Content Placeholder 2">
+                <a:extLst>
+                  <a:ext uri="{FF2B5EF4-FFF2-40B4-BE49-F238E27FC236}">
+                    <a16:creationId xmlns:a16="http://schemas.microsoft.com/office/drawing/2014/main" id="{9B66D976-5489-1CA0-FBD4-D8ED85B16899}"/>
+                  </a:ext>
+                </a:extLst>
+              </p:cNvPr>
+              <p:cNvSpPr>
+                <a:spLocks noGrp="1"/>
+              </p:cNvSpPr>
+              <p:nvPr>
+                <p:ph idx="1"/>
+              </p:nvPr>
+            </p:nvSpPr>
+            <p:spPr/>
+            <p:txBody>
+              <a:bodyPr>
+                <a:normAutofit fontScale="92500"/>
+              </a:bodyPr>
+              <a:lstStyle/>
+              <a:p>
+                <a:r>
+                  <a:rPr lang="en-US" dirty="0"/>
+                  <a:t>Original Sarsa is called one-step Sarsa or Sarsa(0)</a:t>
+                </a:r>
+              </a:p>
+              <a:p>
+                <a:endParaRPr lang="en-US" dirty="0"/>
+              </a:p>
+              <a:p>
+                <a:pPr marL="0" indent="0">
+                  <a:buNone/>
+                </a:pPr>
+                <a14:m>
+                  <m:oMath xmlns:m="http://schemas.openxmlformats.org/officeDocument/2006/math">
+                    <m:r>
+                      <a:rPr lang="en-US" b="1" i="1" dirty="0">
+                        <a:latin typeface="Cambria Math" panose="02040503050406030204" pitchFamily="18" charset="0"/>
+                      </a:rPr>
+                      <m:t>𝒏</m:t>
+                    </m:r>
+                  </m:oMath>
+                </a14:m>
+                <a:r>
+                  <a:rPr lang="en-US" b="1" dirty="0"/>
+                  <a:t>-step Sarsa</a:t>
+                </a:r>
+              </a:p>
+              <a:p>
+                <a:pPr lvl="1"/>
+                <a:r>
+                  <a:rPr lang="en-US" dirty="0"/>
+                  <a:t>On policy</a:t>
+                </a:r>
+              </a:p>
+              <a:p>
+                <a:pPr lvl="1"/>
+                <a:r>
+                  <a:rPr lang="en-US" dirty="0"/>
+                  <a:t>Remember: The policy needs to keep exploring so we learn an </a:t>
+                </a:r>
+                <a14:m>
+                  <m:oMath xmlns:m="http://schemas.openxmlformats.org/officeDocument/2006/math">
+                    <m:r>
+                      <a:rPr lang="en-US" i="1">
+                        <a:latin typeface="Cambria Math" panose="02040503050406030204" pitchFamily="18" charset="0"/>
+                      </a:rPr>
+                      <m:t>𝜖</m:t>
+                    </m:r>
+                  </m:oMath>
+                </a14:m>
+                <a:r>
+                  <a:rPr lang="en-US" dirty="0"/>
+                  <a:t>-greedy policy</a:t>
+                </a:r>
+              </a:p>
+              <a:p>
+                <a:pPr lvl="1"/>
+                <a:r>
+                  <a:rPr lang="en-US" dirty="0"/>
+                  <a:t>Use state-action pairs and learns </a:t>
+                </a:r>
+                <a14:m>
+                  <m:oMath xmlns:m="http://schemas.openxmlformats.org/officeDocument/2006/math">
+                    <m:r>
+                      <a:rPr lang="en-US" i="1" dirty="0" smtClean="0">
+                        <a:latin typeface="Cambria Math" panose="02040503050406030204" pitchFamily="18" charset="0"/>
+                      </a:rPr>
+                      <m:t>𝑄</m:t>
+                    </m:r>
+                  </m:oMath>
+                </a14:m>
+                <a:r>
+                  <a:rPr lang="en-US" dirty="0"/>
+                  <a:t> so we can find the </a:t>
+                </a:r>
+                <a14:m>
+                  <m:oMath xmlns:m="http://schemas.openxmlformats.org/officeDocument/2006/math">
+                    <m:r>
+                      <a:rPr lang="en-US" i="1">
+                        <a:latin typeface="Cambria Math" panose="02040503050406030204" pitchFamily="18" charset="0"/>
+                      </a:rPr>
+                      <m:t>𝜖</m:t>
+                    </m:r>
+                  </m:oMath>
+                </a14:m>
+                <a:r>
+                  <a:rPr lang="en-US" dirty="0"/>
+                  <a:t>-greedy policy</a:t>
+                </a:r>
+              </a:p>
+              <a:p>
+                <a:pPr marL="457200" lvl="1" indent="0">
+                  <a:buNone/>
+                </a:pPr>
+                <a:endParaRPr lang="en-US" dirty="0"/>
+              </a:p>
+              <a:p>
+                <a:r>
+                  <a:rPr lang="en-US" dirty="0"/>
+                  <a:t>Return (redefined using </a:t>
+                </a:r>
+                <a14:m>
+                  <m:oMath xmlns:m="http://schemas.openxmlformats.org/officeDocument/2006/math">
+                    <m:r>
+                      <a:rPr lang="en-US" i="1" dirty="0" smtClean="0">
+                        <a:latin typeface="Cambria Math" panose="02040503050406030204" pitchFamily="18" charset="0"/>
+                      </a:rPr>
+                      <m:t>𝑄</m:t>
+                    </m:r>
+                  </m:oMath>
+                </a14:m>
+                <a:r>
+                  <a:rPr lang="en-US" dirty="0"/>
+                  <a:t>):</a:t>
+                </a:r>
+              </a:p>
+              <a:p>
+                <a:pPr marL="0" indent="0">
+                  <a:buNone/>
+                </a:pPr>
+                <a14:m>
+                  <m:oMathPara xmlns:m="http://schemas.openxmlformats.org/officeDocument/2006/math">
+                    <m:oMathParaPr>
+                      <m:jc m:val="centerGroup"/>
+                    </m:oMathParaPr>
+                    <m:oMath xmlns:m="http://schemas.openxmlformats.org/officeDocument/2006/math">
+                      <m:sSub>
+                        <m:sSubPr>
+                          <m:ctrlPr>
+                            <a:rPr lang="en-US" i="1">
+                              <a:latin typeface="Cambria Math" panose="02040503050406030204" pitchFamily="18" charset="0"/>
+                            </a:rPr>
+                          </m:ctrlPr>
+                        </m:sSubPr>
+                        <m:e>
+                          <m:r>
+                            <a:rPr lang="en-US" i="1">
+                              <a:latin typeface="Cambria Math" panose="02040503050406030204" pitchFamily="18" charset="0"/>
+                            </a:rPr>
+                            <m:t>𝐺</m:t>
+                          </m:r>
+                        </m:e>
+                        <m:sub>
+                          <m:r>
+                            <a:rPr lang="en-US" i="1">
+                              <a:latin typeface="Cambria Math" panose="02040503050406030204" pitchFamily="18" charset="0"/>
+                            </a:rPr>
+                            <m:t>𝑡</m:t>
+                          </m:r>
+                          <m:r>
+                            <a:rPr lang="en-US" i="1">
+                              <a:latin typeface="Cambria Math" panose="02040503050406030204" pitchFamily="18" charset="0"/>
+                            </a:rPr>
+                            <m:t>:</m:t>
+                          </m:r>
+                          <m:r>
+                            <a:rPr lang="en-US" i="1">
+                              <a:latin typeface="Cambria Math" panose="02040503050406030204" pitchFamily="18" charset="0"/>
+                            </a:rPr>
+                            <m:t>𝑡</m:t>
+                          </m:r>
+                          <m:r>
+                            <a:rPr lang="en-US" i="1">
+                              <a:latin typeface="Cambria Math" panose="02040503050406030204" pitchFamily="18" charset="0"/>
+                            </a:rPr>
+                            <m:t>+</m:t>
+                          </m:r>
+                          <m:r>
+                            <a:rPr lang="en-US" i="1">
+                              <a:latin typeface="Cambria Math" panose="02040503050406030204" pitchFamily="18" charset="0"/>
+                            </a:rPr>
+                            <m:t>𝑛</m:t>
+                          </m:r>
+                        </m:sub>
+                      </m:sSub>
+                      <m:r>
+                        <a:rPr lang="en-US" i="1">
+                          <a:latin typeface="Cambria Math" panose="02040503050406030204" pitchFamily="18" charset="0"/>
+                        </a:rPr>
+                        <m:t>=</m:t>
+                      </m:r>
+                      <m:sSub>
+                        <m:sSubPr>
+                          <m:ctrlPr>
+                            <a:rPr lang="en-US" i="1">
+                              <a:latin typeface="Cambria Math" panose="02040503050406030204" pitchFamily="18" charset="0"/>
+                            </a:rPr>
+                          </m:ctrlPr>
+                        </m:sSubPr>
+                        <m:e>
+                          <m:r>
+                            <a:rPr lang="en-US" i="1">
+                              <a:latin typeface="Cambria Math" panose="02040503050406030204" pitchFamily="18" charset="0"/>
+                            </a:rPr>
+                            <m:t>𝑅</m:t>
+                          </m:r>
+                        </m:e>
+                        <m:sub>
+                          <m:r>
+                            <a:rPr lang="en-US" i="1">
+                              <a:latin typeface="Cambria Math" panose="02040503050406030204" pitchFamily="18" charset="0"/>
+                            </a:rPr>
+                            <m:t>𝑡</m:t>
+                          </m:r>
+                          <m:r>
+                            <a:rPr lang="en-US" i="1">
+                              <a:latin typeface="Cambria Math" panose="02040503050406030204" pitchFamily="18" charset="0"/>
+                            </a:rPr>
+                            <m:t>+1</m:t>
+                          </m:r>
+                        </m:sub>
+                      </m:sSub>
+                      <m:r>
+                        <a:rPr lang="en-US" i="1">
+                          <a:latin typeface="Cambria Math" panose="02040503050406030204" pitchFamily="18" charset="0"/>
+                        </a:rPr>
+                        <m:t>+</m:t>
+                      </m:r>
+                      <m:r>
+                        <a:rPr lang="en-US" i="1">
+                          <a:latin typeface="Cambria Math" panose="02040503050406030204" pitchFamily="18" charset="0"/>
+                        </a:rPr>
+                        <m:t>𝛾</m:t>
+                      </m:r>
+                      <m:sSub>
+                        <m:sSubPr>
+                          <m:ctrlPr>
+                            <a:rPr lang="en-US" i="1">
+                              <a:latin typeface="Cambria Math" panose="02040503050406030204" pitchFamily="18" charset="0"/>
+                            </a:rPr>
+                          </m:ctrlPr>
+                        </m:sSubPr>
+                        <m:e>
+                          <m:sSub>
+                            <m:sSubPr>
+                              <m:ctrlPr>
+                                <a:rPr lang="en-US" i="1">
+                                  <a:latin typeface="Cambria Math" panose="02040503050406030204" pitchFamily="18" charset="0"/>
+                                </a:rPr>
+                              </m:ctrlPr>
+                            </m:sSubPr>
+                            <m:e>
+                              <m:r>
+                                <a:rPr lang="en-US" i="1">
+                                  <a:latin typeface="Cambria Math" panose="02040503050406030204" pitchFamily="18" charset="0"/>
+                                </a:rPr>
+                                <m:t>𝑅</m:t>
+                              </m:r>
+                            </m:e>
+                            <m:sub>
+                              <m:r>
+                                <a:rPr lang="en-US" i="1">
+                                  <a:latin typeface="Cambria Math" panose="02040503050406030204" pitchFamily="18" charset="0"/>
+                                </a:rPr>
+                                <m:t>𝑡</m:t>
+                              </m:r>
+                              <m:r>
+                                <a:rPr lang="en-US" i="1">
+                                  <a:latin typeface="Cambria Math" panose="02040503050406030204" pitchFamily="18" charset="0"/>
+                                </a:rPr>
+                                <m:t>+2</m:t>
+                              </m:r>
+                            </m:sub>
+                          </m:sSub>
+                          <m:r>
+                            <a:rPr lang="en-US" i="1">
+                              <a:latin typeface="Cambria Math" panose="02040503050406030204" pitchFamily="18" charset="0"/>
+                            </a:rPr>
+                            <m:t>+…+</m:t>
+                          </m:r>
+                          <m:sSup>
+                            <m:sSupPr>
+                              <m:ctrlPr>
+                                <a:rPr lang="en-US" i="1">
+                                  <a:latin typeface="Cambria Math" panose="02040503050406030204" pitchFamily="18" charset="0"/>
+                                </a:rPr>
+                              </m:ctrlPr>
+                            </m:sSupPr>
+                            <m:e>
+                              <m:r>
+                                <a:rPr lang="en-US" i="1">
+                                  <a:latin typeface="Cambria Math" panose="02040503050406030204" pitchFamily="18" charset="0"/>
+                                </a:rPr>
+                                <m:t>𝛾</m:t>
+                              </m:r>
+                            </m:e>
+                            <m:sup>
+                              <m:r>
+                                <a:rPr lang="en-US" i="1">
+                                  <a:latin typeface="Cambria Math" panose="02040503050406030204" pitchFamily="18" charset="0"/>
+                                </a:rPr>
+                                <m:t>𝑛</m:t>
+                              </m:r>
+                              <m:r>
+                                <a:rPr lang="en-US" i="1">
+                                  <a:latin typeface="Cambria Math" panose="02040503050406030204" pitchFamily="18" charset="0"/>
+                                </a:rPr>
+                                <m:t>−1</m:t>
+                              </m:r>
+                            </m:sup>
+                          </m:sSup>
+                          <m:sSub>
+                            <m:sSubPr>
+                              <m:ctrlPr>
+                                <a:rPr lang="en-US" i="1">
+                                  <a:latin typeface="Cambria Math" panose="02040503050406030204" pitchFamily="18" charset="0"/>
+                                </a:rPr>
+                              </m:ctrlPr>
+                            </m:sSubPr>
+                            <m:e>
+                              <m:r>
+                                <a:rPr lang="en-US" i="1">
+                                  <a:latin typeface="Cambria Math" panose="02040503050406030204" pitchFamily="18" charset="0"/>
+                                </a:rPr>
+                                <m:t>𝑅</m:t>
+                              </m:r>
+                            </m:e>
+                            <m:sub>
+                              <m:r>
+                                <a:rPr lang="en-US" i="1">
+                                  <a:latin typeface="Cambria Math" panose="02040503050406030204" pitchFamily="18" charset="0"/>
+                                </a:rPr>
+                                <m:t>𝑡</m:t>
+                              </m:r>
+                              <m:r>
+                                <a:rPr lang="en-US" i="1">
+                                  <a:latin typeface="Cambria Math" panose="02040503050406030204" pitchFamily="18" charset="0"/>
+                                </a:rPr>
+                                <m:t>+</m:t>
+                              </m:r>
+                              <m:r>
+                                <a:rPr lang="en-US" i="1">
+                                  <a:latin typeface="Cambria Math" panose="02040503050406030204" pitchFamily="18" charset="0"/>
+                                </a:rPr>
+                                <m:t>𝑛</m:t>
+                              </m:r>
+                            </m:sub>
+                          </m:sSub>
+                          <m:r>
+                            <a:rPr lang="en-US" i="1">
+                              <a:latin typeface="Cambria Math" panose="02040503050406030204" pitchFamily="18" charset="0"/>
+                            </a:rPr>
+                            <m:t>+</m:t>
+                          </m:r>
+                          <m:sSup>
+                            <m:sSupPr>
+                              <m:ctrlPr>
+                                <a:rPr lang="en-US" i="1">
+                                  <a:latin typeface="Cambria Math" panose="02040503050406030204" pitchFamily="18" charset="0"/>
+                                </a:rPr>
+                              </m:ctrlPr>
+                            </m:sSupPr>
+                            <m:e>
+                              <m:r>
+                                <a:rPr lang="en-US" i="1">
+                                  <a:latin typeface="Cambria Math" panose="02040503050406030204" pitchFamily="18" charset="0"/>
+                                </a:rPr>
+                                <m:t>𝛾</m:t>
+                              </m:r>
+                            </m:e>
+                            <m:sup>
+                              <m:r>
+                                <a:rPr lang="en-US" i="1">
+                                  <a:latin typeface="Cambria Math" panose="02040503050406030204" pitchFamily="18" charset="0"/>
+                                </a:rPr>
+                                <m:t>𝑛</m:t>
+                              </m:r>
+                            </m:sup>
+                          </m:sSup>
+                          <m:r>
+                            <a:rPr lang="en-US" b="0" i="1" smtClean="0">
+                              <a:latin typeface="Cambria Math" panose="02040503050406030204" pitchFamily="18" charset="0"/>
+                            </a:rPr>
+                            <m:t>𝑄</m:t>
+                          </m:r>
+                        </m:e>
+                        <m:sub>
+                          <m:r>
+                            <a:rPr lang="en-US" i="1">
+                              <a:latin typeface="Cambria Math" panose="02040503050406030204" pitchFamily="18" charset="0"/>
+                            </a:rPr>
+                            <m:t>𝑡</m:t>
+                          </m:r>
+                          <m:r>
+                            <a:rPr lang="en-US" i="1">
+                              <a:latin typeface="Cambria Math" panose="02040503050406030204" pitchFamily="18" charset="0"/>
+                            </a:rPr>
+                            <m:t>+</m:t>
+                          </m:r>
+                          <m:r>
+                            <a:rPr lang="en-US" i="1">
+                              <a:latin typeface="Cambria Math" panose="02040503050406030204" pitchFamily="18" charset="0"/>
+                            </a:rPr>
+                            <m:t>𝑛</m:t>
+                          </m:r>
+                          <m:r>
+                            <a:rPr lang="en-US" i="1">
+                              <a:latin typeface="Cambria Math" panose="02040503050406030204" pitchFamily="18" charset="0"/>
+                            </a:rPr>
+                            <m:t>−1</m:t>
+                          </m:r>
+                        </m:sub>
+                      </m:sSub>
+                      <m:d>
+                        <m:dPr>
+                          <m:ctrlPr>
+                            <a:rPr lang="en-US" i="1">
+                              <a:latin typeface="Cambria Math" panose="02040503050406030204" pitchFamily="18" charset="0"/>
+                            </a:rPr>
+                          </m:ctrlPr>
+                        </m:dPr>
+                        <m:e>
+                          <m:sSub>
+                            <m:sSubPr>
+                              <m:ctrlPr>
+                                <a:rPr lang="en-US" i="1">
+                                  <a:latin typeface="Cambria Math" panose="02040503050406030204" pitchFamily="18" charset="0"/>
+                                </a:rPr>
+                              </m:ctrlPr>
+                            </m:sSubPr>
+                            <m:e>
+                              <m:r>
+                                <a:rPr lang="en-US" i="1">
+                                  <a:latin typeface="Cambria Math" panose="02040503050406030204" pitchFamily="18" charset="0"/>
+                                </a:rPr>
+                                <m:t>𝑆</m:t>
+                              </m:r>
+                            </m:e>
+                            <m:sub>
+                              <m:r>
+                                <a:rPr lang="en-US" i="1">
+                                  <a:latin typeface="Cambria Math" panose="02040503050406030204" pitchFamily="18" charset="0"/>
+                                </a:rPr>
+                                <m:t>𝑡</m:t>
+                              </m:r>
+                              <m:r>
+                                <a:rPr lang="en-US" i="1">
+                                  <a:latin typeface="Cambria Math" panose="02040503050406030204" pitchFamily="18" charset="0"/>
+                                </a:rPr>
+                                <m:t>+</m:t>
+                              </m:r>
+                              <m:r>
+                                <a:rPr lang="en-US" i="1">
+                                  <a:latin typeface="Cambria Math" panose="02040503050406030204" pitchFamily="18" charset="0"/>
+                                </a:rPr>
+                                <m:t>𝑛</m:t>
+                              </m:r>
+                            </m:sub>
+                          </m:sSub>
+                          <m:r>
+                            <a:rPr lang="en-US" b="0" i="1" smtClean="0">
+                              <a:latin typeface="Cambria Math" panose="02040503050406030204" pitchFamily="18" charset="0"/>
+                            </a:rPr>
+                            <m:t>,</m:t>
+                          </m:r>
+                          <m:sSub>
+                            <m:sSubPr>
+                              <m:ctrlPr>
+                                <a:rPr lang="en-US" b="0" i="1" smtClean="0">
+                                  <a:latin typeface="Cambria Math" panose="02040503050406030204" pitchFamily="18" charset="0"/>
+                                </a:rPr>
+                              </m:ctrlPr>
+                            </m:sSubPr>
+                            <m:e>
+                              <m:r>
+                                <a:rPr lang="en-US" b="0" i="1" smtClean="0">
+                                  <a:latin typeface="Cambria Math" panose="02040503050406030204" pitchFamily="18" charset="0"/>
+                                </a:rPr>
+                                <m:t>𝐴</m:t>
+                              </m:r>
+                            </m:e>
+                            <m:sub>
+                              <m:r>
+                                <a:rPr lang="en-US" b="0" i="1" smtClean="0">
+                                  <a:latin typeface="Cambria Math" panose="02040503050406030204" pitchFamily="18" charset="0"/>
+                                </a:rPr>
+                                <m:t>𝑡</m:t>
+                              </m:r>
+                              <m:r>
+                                <a:rPr lang="en-US" b="0" i="1" smtClean="0">
+                                  <a:latin typeface="Cambria Math" panose="02040503050406030204" pitchFamily="18" charset="0"/>
+                                </a:rPr>
+                                <m:t>+</m:t>
+                              </m:r>
+                              <m:r>
+                                <a:rPr lang="en-US" b="0" i="1" smtClean="0">
+                                  <a:latin typeface="Cambria Math" panose="02040503050406030204" pitchFamily="18" charset="0"/>
+                                </a:rPr>
+                                <m:t>𝑛</m:t>
+                              </m:r>
+                            </m:sub>
+                          </m:sSub>
+                        </m:e>
+                      </m:d>
+                    </m:oMath>
+                  </m:oMathPara>
+                </a14:m>
+                <a:endParaRPr lang="en-US" dirty="0"/>
+              </a:p>
+              <a:p>
+                <a:r>
+                  <a:rPr lang="en-US" dirty="0"/>
+                  <a:t>Update rule:</a:t>
+                </a:r>
+                <a:endParaRPr lang="en-US" baseline="-25000" dirty="0"/>
+              </a:p>
+              <a:p>
+                <a:pPr marL="0" indent="0">
+                  <a:buNone/>
+                </a:pPr>
+                <a14:m>
+                  <m:oMathPara xmlns:m="http://schemas.openxmlformats.org/officeDocument/2006/math">
+                    <m:oMathParaPr>
+                      <m:jc m:val="centerGroup"/>
+                    </m:oMathParaPr>
+                    <m:oMath xmlns:m="http://schemas.openxmlformats.org/officeDocument/2006/math">
+                      <m:r>
+                        <a:rPr lang="en-US" b="0" i="1" smtClean="0">
+                          <a:latin typeface="Cambria Math" panose="02040503050406030204" pitchFamily="18" charset="0"/>
+                        </a:rPr>
+                        <m:t>𝑄</m:t>
+                      </m:r>
+                      <m:d>
+                        <m:dPr>
+                          <m:ctrlPr>
+                            <a:rPr lang="en-US" b="0" i="1" smtClean="0">
+                              <a:latin typeface="Cambria Math" panose="02040503050406030204" pitchFamily="18" charset="0"/>
+                            </a:rPr>
+                          </m:ctrlPr>
+                        </m:dPr>
+                        <m:e>
+                          <m:sSub>
+                            <m:sSubPr>
+                              <m:ctrlPr>
+                                <a:rPr lang="en-US" b="0" i="1" smtClean="0">
+                                  <a:latin typeface="Cambria Math" panose="02040503050406030204" pitchFamily="18" charset="0"/>
+                                </a:rPr>
+                              </m:ctrlPr>
+                            </m:sSubPr>
+                            <m:e>
+                              <m:r>
+                                <a:rPr lang="en-US" b="0" i="1" smtClean="0">
+                                  <a:latin typeface="Cambria Math" panose="02040503050406030204" pitchFamily="18" charset="0"/>
+                                </a:rPr>
+                                <m:t>𝑆</m:t>
+                              </m:r>
+                            </m:e>
+                            <m:sub>
+                              <m:r>
+                                <a:rPr lang="en-US" b="0" i="1" smtClean="0">
+                                  <a:latin typeface="Cambria Math" panose="02040503050406030204" pitchFamily="18" charset="0"/>
+                                </a:rPr>
+                                <m:t>𝑡</m:t>
+                              </m:r>
+                            </m:sub>
+                          </m:sSub>
+                          <m:r>
+                            <a:rPr lang="en-US" b="0" i="1" smtClean="0">
+                              <a:latin typeface="Cambria Math" panose="02040503050406030204" pitchFamily="18" charset="0"/>
+                            </a:rPr>
+                            <m:t>,</m:t>
+                          </m:r>
+                          <m:sSub>
+                            <m:sSubPr>
+                              <m:ctrlPr>
+                                <a:rPr lang="en-US" b="0" i="1" smtClean="0">
+                                  <a:latin typeface="Cambria Math" panose="02040503050406030204" pitchFamily="18" charset="0"/>
+                                </a:rPr>
+                              </m:ctrlPr>
+                            </m:sSubPr>
+                            <m:e>
+                              <m:r>
+                                <a:rPr lang="en-US" b="0" i="1" smtClean="0">
+                                  <a:latin typeface="Cambria Math" panose="02040503050406030204" pitchFamily="18" charset="0"/>
+                                </a:rPr>
+                                <m:t>𝐴</m:t>
+                              </m:r>
+                            </m:e>
+                            <m:sub>
+                              <m:r>
+                                <a:rPr lang="en-US" b="0" i="1" smtClean="0">
+                                  <a:latin typeface="Cambria Math" panose="02040503050406030204" pitchFamily="18" charset="0"/>
+                                </a:rPr>
+                                <m:t>𝑡</m:t>
+                              </m:r>
+                            </m:sub>
+                          </m:sSub>
+                        </m:e>
+                      </m:d>
+                      <m:r>
+                        <a:rPr lang="en-US" b="0" i="1" smtClean="0">
+                          <a:latin typeface="Cambria Math" panose="02040503050406030204" pitchFamily="18" charset="0"/>
+                        </a:rPr>
+                        <m:t>←</m:t>
+                      </m:r>
+                      <m:r>
+                        <a:rPr lang="en-US" i="1">
+                          <a:latin typeface="Cambria Math" panose="02040503050406030204" pitchFamily="18" charset="0"/>
+                        </a:rPr>
+                        <m:t>𝑄</m:t>
+                      </m:r>
+                      <m:d>
+                        <m:dPr>
+                          <m:ctrlPr>
+                            <a:rPr lang="en-US" i="1">
+                              <a:latin typeface="Cambria Math" panose="02040503050406030204" pitchFamily="18" charset="0"/>
+                            </a:rPr>
+                          </m:ctrlPr>
+                        </m:dPr>
+                        <m:e>
+                          <m:sSub>
+                            <m:sSubPr>
+                              <m:ctrlPr>
+                                <a:rPr lang="en-US" i="1">
+                                  <a:latin typeface="Cambria Math" panose="02040503050406030204" pitchFamily="18" charset="0"/>
+                                </a:rPr>
+                              </m:ctrlPr>
+                            </m:sSubPr>
+                            <m:e>
+                              <m:r>
+                                <a:rPr lang="en-US" i="1">
+                                  <a:latin typeface="Cambria Math" panose="02040503050406030204" pitchFamily="18" charset="0"/>
+                                </a:rPr>
+                                <m:t>𝑆</m:t>
+                              </m:r>
+                            </m:e>
+                            <m:sub>
+                              <m:r>
+                                <a:rPr lang="en-US" i="1">
+                                  <a:latin typeface="Cambria Math" panose="02040503050406030204" pitchFamily="18" charset="0"/>
+                                </a:rPr>
+                                <m:t>𝑡</m:t>
+                              </m:r>
+                            </m:sub>
+                          </m:sSub>
+                          <m:r>
+                            <a:rPr lang="en-US" i="1">
+                              <a:latin typeface="Cambria Math" panose="02040503050406030204" pitchFamily="18" charset="0"/>
+                            </a:rPr>
+                            <m:t>,</m:t>
+                          </m:r>
+                          <m:sSub>
+                            <m:sSubPr>
+                              <m:ctrlPr>
+                                <a:rPr lang="en-US" i="1">
+                                  <a:latin typeface="Cambria Math" panose="02040503050406030204" pitchFamily="18" charset="0"/>
+                                </a:rPr>
+                              </m:ctrlPr>
+                            </m:sSubPr>
+                            <m:e>
+                              <m:r>
+                                <a:rPr lang="en-US" i="1">
+                                  <a:latin typeface="Cambria Math" panose="02040503050406030204" pitchFamily="18" charset="0"/>
+                                </a:rPr>
+                                <m:t>𝐴</m:t>
+                              </m:r>
+                            </m:e>
+                            <m:sub>
+                              <m:r>
+                                <a:rPr lang="en-US" i="1">
+                                  <a:latin typeface="Cambria Math" panose="02040503050406030204" pitchFamily="18" charset="0"/>
+                                </a:rPr>
+                                <m:t>𝑡</m:t>
+                              </m:r>
+                            </m:sub>
+                          </m:sSub>
+                        </m:e>
+                      </m:d>
+                      <m:r>
+                        <a:rPr lang="en-US">
+                          <a:latin typeface="Cambria Math" panose="02040503050406030204" pitchFamily="18" charset="0"/>
+                        </a:rPr>
+                        <m:t>+</m:t>
+                      </m:r>
+                      <m:r>
+                        <a:rPr lang="en-US" i="1">
+                          <a:latin typeface="Cambria Math" panose="02040503050406030204" pitchFamily="18" charset="0"/>
+                        </a:rPr>
+                        <m:t>𝛼</m:t>
+                      </m:r>
+                      <m:r>
+                        <a:rPr lang="en-US" i="1">
+                          <a:latin typeface="Cambria Math" panose="02040503050406030204" pitchFamily="18" charset="0"/>
+                        </a:rPr>
+                        <m:t>[</m:t>
+                      </m:r>
+                      <m:sSub>
+                        <m:sSubPr>
+                          <m:ctrlPr>
+                            <a:rPr lang="en-US" i="1">
+                              <a:latin typeface="Cambria Math" panose="02040503050406030204" pitchFamily="18" charset="0"/>
+                            </a:rPr>
+                          </m:ctrlPr>
+                        </m:sSubPr>
+                        <m:e>
+                          <m:r>
+                            <a:rPr lang="en-US" i="1">
+                              <a:latin typeface="Cambria Math" panose="02040503050406030204" pitchFamily="18" charset="0"/>
+                            </a:rPr>
+                            <m:t>𝐺</m:t>
+                          </m:r>
+                        </m:e>
+                        <m:sub>
+                          <m:r>
+                            <a:rPr lang="en-US" i="1">
+                              <a:latin typeface="Cambria Math" panose="02040503050406030204" pitchFamily="18" charset="0"/>
+                            </a:rPr>
+                            <m:t>𝑡</m:t>
+                          </m:r>
+                          <m:r>
+                            <a:rPr lang="en-US" i="1">
+                              <a:latin typeface="Cambria Math" panose="02040503050406030204" pitchFamily="18" charset="0"/>
+                            </a:rPr>
+                            <m:t>:</m:t>
+                          </m:r>
+                          <m:r>
+                            <a:rPr lang="en-US" i="1">
+                              <a:latin typeface="Cambria Math" panose="02040503050406030204" pitchFamily="18" charset="0"/>
+                            </a:rPr>
+                            <m:t>𝑡</m:t>
+                          </m:r>
+                          <m:r>
+                            <a:rPr lang="en-US" i="1">
+                              <a:latin typeface="Cambria Math" panose="02040503050406030204" pitchFamily="18" charset="0"/>
+                            </a:rPr>
+                            <m:t>+</m:t>
+                          </m:r>
+                          <m:r>
+                            <a:rPr lang="en-US" i="1">
+                              <a:latin typeface="Cambria Math" panose="02040503050406030204" pitchFamily="18" charset="0"/>
+                            </a:rPr>
+                            <m:t>𝑛</m:t>
+                          </m:r>
+                        </m:sub>
+                      </m:sSub>
+                      <m:r>
+                        <a:rPr lang="en-US" i="1">
+                          <a:latin typeface="Cambria Math" panose="02040503050406030204" pitchFamily="18" charset="0"/>
+                        </a:rPr>
+                        <m:t>−</m:t>
+                      </m:r>
+                      <m:r>
+                        <a:rPr lang="en-US" i="1">
+                          <a:latin typeface="Cambria Math" panose="02040503050406030204" pitchFamily="18" charset="0"/>
+                        </a:rPr>
+                        <m:t>𝑄</m:t>
+                      </m:r>
+                      <m:d>
+                        <m:dPr>
+                          <m:ctrlPr>
+                            <a:rPr lang="en-US" i="1">
+                              <a:latin typeface="Cambria Math" panose="02040503050406030204" pitchFamily="18" charset="0"/>
+                            </a:rPr>
+                          </m:ctrlPr>
+                        </m:dPr>
+                        <m:e>
+                          <m:sSub>
+                            <m:sSubPr>
+                              <m:ctrlPr>
+                                <a:rPr lang="en-US" i="1">
+                                  <a:latin typeface="Cambria Math" panose="02040503050406030204" pitchFamily="18" charset="0"/>
+                                </a:rPr>
+                              </m:ctrlPr>
+                            </m:sSubPr>
+                            <m:e>
+                              <m:r>
+                                <a:rPr lang="en-US" i="1">
+                                  <a:latin typeface="Cambria Math" panose="02040503050406030204" pitchFamily="18" charset="0"/>
+                                </a:rPr>
+                                <m:t>𝑆</m:t>
+                              </m:r>
+                            </m:e>
+                            <m:sub>
+                              <m:r>
+                                <a:rPr lang="en-US" i="1">
+                                  <a:latin typeface="Cambria Math" panose="02040503050406030204" pitchFamily="18" charset="0"/>
+                                </a:rPr>
+                                <m:t>𝑡</m:t>
+                              </m:r>
+                            </m:sub>
+                          </m:sSub>
+                          <m:r>
+                            <a:rPr lang="en-US" i="1">
+                              <a:latin typeface="Cambria Math" panose="02040503050406030204" pitchFamily="18" charset="0"/>
+                            </a:rPr>
+                            <m:t>,</m:t>
+                          </m:r>
+                          <m:sSub>
+                            <m:sSubPr>
+                              <m:ctrlPr>
+                                <a:rPr lang="en-US" i="1">
+                                  <a:latin typeface="Cambria Math" panose="02040503050406030204" pitchFamily="18" charset="0"/>
+                                </a:rPr>
+                              </m:ctrlPr>
+                            </m:sSubPr>
+                            <m:e>
+                              <m:r>
+                                <a:rPr lang="en-US" i="1">
+                                  <a:latin typeface="Cambria Math" panose="02040503050406030204" pitchFamily="18" charset="0"/>
+                                </a:rPr>
+                                <m:t>𝐴</m:t>
+                              </m:r>
+                            </m:e>
+                            <m:sub>
+                              <m:r>
+                                <a:rPr lang="en-US" i="1">
+                                  <a:latin typeface="Cambria Math" panose="02040503050406030204" pitchFamily="18" charset="0"/>
+                                </a:rPr>
+                                <m:t>𝑡</m:t>
+                              </m:r>
+                            </m:sub>
+                          </m:sSub>
+                        </m:e>
+                      </m:d>
+                      <m:r>
+                        <a:rPr lang="en-US" i="1">
+                          <a:latin typeface="Cambria Math" panose="02040503050406030204" pitchFamily="18" charset="0"/>
+                        </a:rPr>
+                        <m:t>]</m:t>
+                      </m:r>
+                    </m:oMath>
+                  </m:oMathPara>
+                </a14:m>
+                <a:endParaRPr lang="en-US" dirty="0"/>
+              </a:p>
+            </p:txBody>
+          </p:sp>
+        </mc:Choice>
+        <mc:Fallback xmlns="">
+          <p:sp>
+            <p:nvSpPr>
+              <p:cNvPr id="3" name="Content Placeholder 2">
+                <a:extLst>
+                  <a:ext uri="{FF2B5EF4-FFF2-40B4-BE49-F238E27FC236}">
+                    <a16:creationId xmlns:a16="http://schemas.microsoft.com/office/drawing/2014/main" id="{9B66D976-5489-1CA0-FBD4-D8ED85B16899}"/>
+                  </a:ext>
+                </a:extLst>
+              </p:cNvPr>
+              <p:cNvSpPr>
+                <a:spLocks noGrp="1" noRot="1" noChangeAspect="1" noMove="1" noResize="1" noEditPoints="1" noAdjustHandles="1" noChangeArrowheads="1" noChangeShapeType="1" noTextEdit="1"/>
+              </p:cNvSpPr>
+              <p:nvPr>
+                <p:ph idx="1"/>
+              </p:nvPr>
+            </p:nvSpPr>
+            <p:spPr>
+              <a:blipFill>
+                <a:blip r:embed="rId3"/>
+                <a:stretch>
+                  <a:fillRect l="-928" t="-1913"/>
+                </a:stretch>
+              </a:blipFill>
+            </p:spPr>
+            <p:txBody>
+              <a:bodyPr/>
+              <a:lstStyle/>
+              <a:p>
+                <a:r>
+                  <a:rPr lang="en-US">
+                    <a:noFill/>
+                  </a:rPr>
+                  <a:t> </a:t>
+                </a:r>
+              </a:p>
+            </p:txBody>
+          </p:sp>
+        </mc:Fallback>
+      </mc:AlternateContent>
+      <p:sp>
+        <p:nvSpPr>
+          <p:cNvPr id="4" name="Speech Bubble: Rectangle with Corners Rounded 3">
+            <a:extLst>
+              <a:ext uri="{FF2B5EF4-FFF2-40B4-BE49-F238E27FC236}">
+                <a16:creationId xmlns:a16="http://schemas.microsoft.com/office/drawing/2014/main" id="{FC23A07C-A168-39B7-4E5B-CB74A33475C0}"/>
+              </a:ext>
+            </a:extLst>
+          </p:cNvPr>
+          <p:cNvSpPr/>
+          <p:nvPr/>
+        </p:nvSpPr>
+        <p:spPr>
+          <a:xfrm>
+            <a:off x="8519020" y="578972"/>
+            <a:ext cx="1530991" cy="608202"/>
+          </a:xfrm>
+          <a:prstGeom prst="wedgeRoundRectCallout">
+            <a:avLst>
+              <a:gd name="adj1" fmla="val -42766"/>
+              <a:gd name="adj2" fmla="val 86346"/>
+              <a:gd name="adj3" fmla="val 16667"/>
+            </a:avLst>
+          </a:prstGeom>
+        </p:spPr>
+        <p:style>
+          <a:lnRef idx="2">
+            <a:schemeClr val="accent1">
+              <a:shade val="15000"/>
+            </a:schemeClr>
+          </a:lnRef>
+          <a:fillRef idx="1">
+            <a:schemeClr val="accent1"/>
+          </a:fillRef>
+          <a:effectRef idx="0">
+            <a:schemeClr val="accent1"/>
+          </a:effectRef>
+          <a:fontRef idx="minor">
+            <a:schemeClr val="lt1"/>
+          </a:fontRef>
+        </p:style>
+        <p:txBody>
+          <a:bodyPr rtlCol="0" anchor="ctr"/>
+          <a:lstStyle/>
+          <a:p>
+            <a:pPr algn="ctr"/>
+            <a:r>
+              <a:rPr lang="en-US" sz="1200" dirty="0"/>
+              <a:t>Note (0) has nothing to do with the steps!</a:t>
+            </a:r>
+          </a:p>
+        </p:txBody>
+      </p:sp>
+    </p:spTree>
+    <p:extLst>
+      <p:ext uri="{BB962C8B-B14F-4D97-AF65-F5344CB8AC3E}">
+        <p14:creationId xmlns:p14="http://schemas.microsoft.com/office/powerpoint/2010/main" val="2428545916"/>
+      </p:ext>
+    </p:extLst>
+  </p:cSld>
+  <p:clrMapOvr>
+    <a:masterClrMapping/>
+  </p:clrMapOvr>
+</p:sld>
+</file>
+
+<file path=ppt/slides/slide11.xml><?xml version="1.0" encoding="utf-8"?>
+<p:sld xmlns:a="http://schemas.openxmlformats.org/drawingml/2006/main" xmlns:r="http://schemas.openxmlformats.org/officeDocument/2006/relationships" xmlns:p="http://schemas.openxmlformats.org/presentationml/2006/main">
+  <p:cSld>
+    <p:spTree>
+      <p:nvGrpSpPr>
+        <p:cNvPr id="1" name=""/>
+        <p:cNvGrpSpPr/>
+        <p:nvPr/>
+      </p:nvGrpSpPr>
+      <p:grpSpPr>
+        <a:xfrm>
+          <a:off x="0" y="0"/>
+          <a:ext cx="0" cy="0"/>
+          <a:chOff x="0" y="0"/>
+          <a:chExt cx="0" cy="0"/>
+        </a:xfrm>
+      </p:grpSpPr>
+      <mc:AlternateContent xmlns:mc="http://schemas.openxmlformats.org/markup-compatibility/2006" xmlns:a14="http://schemas.microsoft.com/office/drawing/2010/main">
+        <mc:Choice Requires="a14">
+          <p:sp>
+            <p:nvSpPr>
+              <p:cNvPr id="2" name="Title 1">
+                <a:extLst>
+                  <a:ext uri="{FF2B5EF4-FFF2-40B4-BE49-F238E27FC236}">
                     <a16:creationId xmlns:a16="http://schemas.microsoft.com/office/drawing/2014/main" id="{83C4D17A-69EF-11E4-BED6-7D19667C9913}"/>
                   </a:ext>
                 </a:extLst>
@@ -4293,7 +5352,7 @@
 </p:sld>
 </file>
 
-<file path=ppt/slides/slide11.xml><?xml version="1.0" encoding="utf-8"?>
+<file path=ppt/slides/slide12.xml><?xml version="1.0" encoding="utf-8"?>
 <p:sld xmlns:a="http://schemas.openxmlformats.org/drawingml/2006/main" xmlns:r="http://schemas.openxmlformats.org/officeDocument/2006/relationships" xmlns:p="http://schemas.openxmlformats.org/presentationml/2006/main">
   <p:cSld>
     <p:spTree>
@@ -5084,7 +6143,7 @@
 </p:sld>
 </file>
 
-<file path=ppt/slides/slide12.xml><?xml version="1.0" encoding="utf-8"?>
+<file path=ppt/slides/slide13.xml><?xml version="1.0" encoding="utf-8"?>
 <p:sld xmlns:a="http://schemas.openxmlformats.org/drawingml/2006/main" xmlns:r="http://schemas.openxmlformats.org/officeDocument/2006/relationships" xmlns:p="http://schemas.openxmlformats.org/presentationml/2006/main">
   <p:cSld>
     <p:spTree>
@@ -5220,7 +6279,7 @@
 </p:sld>
 </file>
 
-<file path=ppt/slides/slide13.xml><?xml version="1.0" encoding="utf-8"?>
+<file path=ppt/slides/slide14.xml><?xml version="1.0" encoding="utf-8"?>
 <p:sld xmlns:a="http://schemas.openxmlformats.org/drawingml/2006/main" xmlns:r="http://schemas.openxmlformats.org/officeDocument/2006/relationships" xmlns:p="http://schemas.openxmlformats.org/presentationml/2006/main">
   <p:cSld>
     <p:spTree>
@@ -6260,7 +7319,7 @@
 </p:sld>
 </file>
 
-<file path=ppt/slides/slide14.xml><?xml version="1.0" encoding="utf-8"?>
+<file path=ppt/slides/slide15.xml><?xml version="1.0" encoding="utf-8"?>
 <p:sld xmlns:a="http://schemas.openxmlformats.org/drawingml/2006/main" xmlns:r="http://schemas.openxmlformats.org/officeDocument/2006/relationships" xmlns:p="http://schemas.openxmlformats.org/presentationml/2006/main">
   <p:cSld>
     <p:spTree>
@@ -6431,12 +7490,59 @@
           </a:p>
         </p:txBody>
       </p:sp>
+      <p:sp>
+        <p:nvSpPr>
+          <p:cNvPr id="14" name="Rectangle 13">
+            <a:extLst>
+              <a:ext uri="{FF2B5EF4-FFF2-40B4-BE49-F238E27FC236}">
+                <a16:creationId xmlns:a16="http://schemas.microsoft.com/office/drawing/2014/main" id="{C94EAF0B-5EB2-C808-EDCD-CB37308993D3}"/>
+              </a:ext>
+            </a:extLst>
+          </p:cNvPr>
+          <p:cNvSpPr/>
+          <p:nvPr/>
+        </p:nvSpPr>
+        <p:spPr>
+          <a:xfrm>
+            <a:off x="3345819" y="4316643"/>
+            <a:ext cx="581679" cy="203588"/>
+          </a:xfrm>
+          <a:prstGeom prst="rect">
+            <a:avLst/>
+          </a:prstGeom>
+          <a:noFill/>
+        </p:spPr>
+        <p:style>
+          <a:lnRef idx="2">
+            <a:schemeClr val="accent1">
+              <a:shade val="15000"/>
+            </a:schemeClr>
+          </a:lnRef>
+          <a:fillRef idx="1">
+            <a:schemeClr val="accent1"/>
+          </a:fillRef>
+          <a:effectRef idx="0">
+            <a:schemeClr val="accent1"/>
+          </a:effectRef>
+          <a:fontRef idx="minor">
+            <a:schemeClr val="lt1"/>
+          </a:fontRef>
+        </p:style>
+        <p:txBody>
+          <a:bodyPr rtlCol="0" anchor="ctr"/>
+          <a:lstStyle/>
+          <a:p>
+            <a:pPr algn="ctr"/>
+            <a:endParaRPr lang="en-US"/>
+          </a:p>
+        </p:txBody>
+      </p:sp>
       <p:grpSp>
         <p:nvGrpSpPr>
-          <p:cNvPr id="21" name="Group 20">
+          <p:cNvPr id="19" name="Group 18">
             <a:extLst>
               <a:ext uri="{FF2B5EF4-FFF2-40B4-BE49-F238E27FC236}">
-                <a16:creationId xmlns:a16="http://schemas.microsoft.com/office/drawing/2014/main" id="{5F49EE39-7243-4381-1C9D-C27904D7EFE1}"/>
+                <a16:creationId xmlns:a16="http://schemas.microsoft.com/office/drawing/2014/main" id="{9E409DA4-C9B0-9C34-A0E9-54BAD6DFE9B8}"/>
               </a:ext>
             </a:extLst>
           </p:cNvPr>
@@ -6451,42 +7557,345 @@
             <a:chExt cx="6430497" cy="5674134"/>
           </a:xfrm>
         </p:grpSpPr>
-        <p:pic>
-          <p:nvPicPr>
-            <p:cNvPr id="5" name="Picture 4">
+        <p:grpSp>
+          <p:nvGrpSpPr>
+            <p:cNvPr id="21" name="Group 20">
               <a:extLst>
                 <a:ext uri="{FF2B5EF4-FFF2-40B4-BE49-F238E27FC236}">
-                  <a16:creationId xmlns:a16="http://schemas.microsoft.com/office/drawing/2014/main" id="{2111ED8E-9F47-A0A6-34AD-6DCCED9317FD}"/>
+                  <a16:creationId xmlns:a16="http://schemas.microsoft.com/office/drawing/2014/main" id="{5F49EE39-7243-4381-1C9D-C27904D7EFE1}"/>
                 </a:ext>
               </a:extLst>
             </p:cNvPr>
-            <p:cNvPicPr>
-              <a:picLocks noChangeAspect="1"/>
-            </p:cNvPicPr>
+            <p:cNvGrpSpPr/>
             <p:nvPr/>
-          </p:nvPicPr>
-          <p:blipFill>
-            <a:blip r:embed="rId3"/>
-            <a:stretch>
-              <a:fillRect/>
-            </a:stretch>
-          </p:blipFill>
-          <p:spPr>
+          </p:nvGrpSpPr>
+          <p:grpSpPr>
             <a:xfrm>
-              <a:off x="5659709" y="1334660"/>
-              <a:ext cx="5945915" cy="4817456"/>
+              <a:off x="5659709" y="1062757"/>
+              <a:ext cx="6430497" cy="5674134"/>
+              <a:chOff x="5659709" y="1062757"/>
+              <a:chExt cx="6430497" cy="5674134"/>
             </a:xfrm>
-            <a:prstGeom prst="rect">
-              <a:avLst/>
-            </a:prstGeom>
-          </p:spPr>
-        </p:pic>
+          </p:grpSpPr>
+          <p:pic>
+            <p:nvPicPr>
+              <p:cNvPr id="5" name="Picture 4">
+                <a:extLst>
+                  <a:ext uri="{FF2B5EF4-FFF2-40B4-BE49-F238E27FC236}">
+                    <a16:creationId xmlns:a16="http://schemas.microsoft.com/office/drawing/2014/main" id="{2111ED8E-9F47-A0A6-34AD-6DCCED9317FD}"/>
+                  </a:ext>
+                </a:extLst>
+              </p:cNvPr>
+              <p:cNvPicPr>
+                <a:picLocks noChangeAspect="1"/>
+              </p:cNvPicPr>
+              <p:nvPr/>
+            </p:nvPicPr>
+            <p:blipFill>
+              <a:blip r:embed="rId3"/>
+              <a:stretch>
+                <a:fillRect/>
+              </a:stretch>
+            </p:blipFill>
+            <p:spPr>
+              <a:xfrm>
+                <a:off x="5659709" y="1334660"/>
+                <a:ext cx="5945915" cy="4817456"/>
+              </a:xfrm>
+              <a:prstGeom prst="rect">
+                <a:avLst/>
+              </a:prstGeom>
+            </p:spPr>
+          </p:pic>
+          <p:sp>
+            <p:nvSpPr>
+              <p:cNvPr id="3" name="Speech Bubble: Rectangle with Corners Rounded 2">
+                <a:extLst>
+                  <a:ext uri="{FF2B5EF4-FFF2-40B4-BE49-F238E27FC236}">
+                    <a16:creationId xmlns:a16="http://schemas.microsoft.com/office/drawing/2014/main" id="{7405347D-3A8C-817A-0198-FB46D428A08C}"/>
+                  </a:ext>
+                </a:extLst>
+              </p:cNvPr>
+              <p:cNvSpPr/>
+              <p:nvPr/>
+            </p:nvSpPr>
+            <p:spPr>
+              <a:xfrm>
+                <a:off x="9881525" y="1062757"/>
+                <a:ext cx="1724099" cy="543806"/>
+              </a:xfrm>
+              <a:prstGeom prst="wedgeRoundRectCallout">
+                <a:avLst>
+                  <a:gd name="adj1" fmla="val -75002"/>
+                  <a:gd name="adj2" fmla="val 68289"/>
+                  <a:gd name="adj3" fmla="val 16667"/>
+                </a:avLst>
+              </a:prstGeom>
+            </p:spPr>
+            <p:style>
+              <a:lnRef idx="2">
+                <a:schemeClr val="accent1">
+                  <a:shade val="15000"/>
+                </a:schemeClr>
+              </a:lnRef>
+              <a:fillRef idx="1">
+                <a:schemeClr val="accent1"/>
+              </a:fillRef>
+              <a:effectRef idx="0">
+                <a:schemeClr val="accent1"/>
+              </a:effectRef>
+              <a:fontRef idx="minor">
+                <a:schemeClr val="lt1"/>
+              </a:fontRef>
+            </p:style>
+            <p:txBody>
+              <a:bodyPr rtlCol="0" anchor="ctr"/>
+              <a:lstStyle/>
+              <a:p>
+                <a:pPr algn="ctr"/>
+                <a:r>
+                  <a:rPr lang="en-US" sz="1600" dirty="0"/>
+                  <a:t>Add behavior policy</a:t>
+                </a:r>
+              </a:p>
+            </p:txBody>
+          </p:sp>
+          <p:sp>
+            <p:nvSpPr>
+              <p:cNvPr id="4" name="Rectangle 3">
+                <a:extLst>
+                  <a:ext uri="{FF2B5EF4-FFF2-40B4-BE49-F238E27FC236}">
+                    <a16:creationId xmlns:a16="http://schemas.microsoft.com/office/drawing/2014/main" id="{B7CC600E-3AFD-2FD3-7283-4D46C25C5673}"/>
+                  </a:ext>
+                </a:extLst>
+              </p:cNvPr>
+              <p:cNvSpPr/>
+              <p:nvPr/>
+            </p:nvSpPr>
+            <p:spPr>
+              <a:xfrm>
+                <a:off x="8718211" y="4418437"/>
+                <a:ext cx="586333" cy="216384"/>
+              </a:xfrm>
+              <a:prstGeom prst="rect">
+                <a:avLst/>
+              </a:prstGeom>
+              <a:noFill/>
+            </p:spPr>
+            <p:style>
+              <a:lnRef idx="2">
+                <a:schemeClr val="accent1">
+                  <a:shade val="15000"/>
+                </a:schemeClr>
+              </a:lnRef>
+              <a:fillRef idx="1">
+                <a:schemeClr val="accent1"/>
+              </a:fillRef>
+              <a:effectRef idx="0">
+                <a:schemeClr val="accent1"/>
+              </a:effectRef>
+              <a:fontRef idx="minor">
+                <a:schemeClr val="lt1"/>
+              </a:fontRef>
+            </p:style>
+            <p:txBody>
+              <a:bodyPr rtlCol="0" anchor="ctr"/>
+              <a:lstStyle/>
+              <a:p>
+                <a:pPr algn="ctr"/>
+                <a:endParaRPr lang="en-US"/>
+              </a:p>
+            </p:txBody>
+          </p:sp>
+          <p:sp>
+            <p:nvSpPr>
+              <p:cNvPr id="7" name="Speech Bubble: Rectangle with Corners Rounded 6">
+                <a:extLst>
+                  <a:ext uri="{FF2B5EF4-FFF2-40B4-BE49-F238E27FC236}">
+                    <a16:creationId xmlns:a16="http://schemas.microsoft.com/office/drawing/2014/main" id="{D0AD5C9F-6D47-4621-45B9-9385077EF25E}"/>
+                  </a:ext>
+                </a:extLst>
+              </p:cNvPr>
+              <p:cNvSpPr/>
+              <p:nvPr/>
+            </p:nvSpPr>
+            <p:spPr>
+              <a:xfrm>
+                <a:off x="10366107" y="4418437"/>
+                <a:ext cx="1724099" cy="543806"/>
+              </a:xfrm>
+              <a:prstGeom prst="wedgeRoundRectCallout">
+                <a:avLst>
+                  <a:gd name="adj1" fmla="val -109818"/>
+                  <a:gd name="adj2" fmla="val 158139"/>
+                  <a:gd name="adj3" fmla="val 16667"/>
+                </a:avLst>
+              </a:prstGeom>
+            </p:spPr>
+            <p:style>
+              <a:lnRef idx="2">
+                <a:schemeClr val="accent1">
+                  <a:shade val="15000"/>
+                </a:schemeClr>
+              </a:lnRef>
+              <a:fillRef idx="1">
+                <a:schemeClr val="accent1"/>
+              </a:fillRef>
+              <a:effectRef idx="0">
+                <a:schemeClr val="accent1"/>
+              </a:effectRef>
+              <a:fontRef idx="minor">
+                <a:schemeClr val="lt1"/>
+              </a:fontRef>
+            </p:style>
+            <p:txBody>
+              <a:bodyPr rtlCol="0" anchor="ctr"/>
+              <a:lstStyle/>
+              <a:p>
+                <a:pPr algn="ctr"/>
+                <a:r>
+                  <a:rPr lang="en-US" sz="1600" dirty="0"/>
+                  <a:t>Importance sampling ratio</a:t>
+                </a:r>
+              </a:p>
+            </p:txBody>
+          </p:sp>
+          <p:sp>
+            <p:nvSpPr>
+              <p:cNvPr id="8" name="Rectangle 7">
+                <a:extLst>
+                  <a:ext uri="{FF2B5EF4-FFF2-40B4-BE49-F238E27FC236}">
+                    <a16:creationId xmlns:a16="http://schemas.microsoft.com/office/drawing/2014/main" id="{4F3B9A1D-1B3F-1708-DAD7-FA40CAA1493A}"/>
+                  </a:ext>
+                </a:extLst>
+              </p:cNvPr>
+              <p:cNvSpPr/>
+              <p:nvPr/>
+            </p:nvSpPr>
+            <p:spPr>
+              <a:xfrm>
+                <a:off x="6965029" y="2023082"/>
+                <a:ext cx="447893" cy="203587"/>
+              </a:xfrm>
+              <a:prstGeom prst="rect">
+                <a:avLst/>
+              </a:prstGeom>
+              <a:noFill/>
+            </p:spPr>
+            <p:style>
+              <a:lnRef idx="2">
+                <a:schemeClr val="accent1">
+                  <a:shade val="15000"/>
+                </a:schemeClr>
+              </a:lnRef>
+              <a:fillRef idx="1">
+                <a:schemeClr val="accent1"/>
+              </a:fillRef>
+              <a:effectRef idx="0">
+                <a:schemeClr val="accent1"/>
+              </a:effectRef>
+              <a:fontRef idx="minor">
+                <a:schemeClr val="lt1"/>
+              </a:fontRef>
+            </p:style>
+            <p:txBody>
+              <a:bodyPr rtlCol="0" anchor="ctr"/>
+              <a:lstStyle/>
+              <a:p>
+                <a:pPr algn="ctr"/>
+                <a:endParaRPr lang="en-US"/>
+              </a:p>
+            </p:txBody>
+          </p:sp>
+          <p:sp>
+            <p:nvSpPr>
+              <p:cNvPr id="11" name="Rectangle 10">
+                <a:extLst>
+                  <a:ext uri="{FF2B5EF4-FFF2-40B4-BE49-F238E27FC236}">
+                    <a16:creationId xmlns:a16="http://schemas.microsoft.com/office/drawing/2014/main" id="{8E169648-1DAF-B5A5-C80D-AEBC7295E489}"/>
+                  </a:ext>
+                </a:extLst>
+              </p:cNvPr>
+              <p:cNvSpPr/>
+              <p:nvPr/>
+            </p:nvSpPr>
+            <p:spPr>
+              <a:xfrm>
+                <a:off x="9433632" y="5673788"/>
+                <a:ext cx="447893" cy="203587"/>
+              </a:xfrm>
+              <a:prstGeom prst="rect">
+                <a:avLst/>
+              </a:prstGeom>
+              <a:noFill/>
+            </p:spPr>
+            <p:style>
+              <a:lnRef idx="2">
+                <a:schemeClr val="accent1">
+                  <a:shade val="15000"/>
+                </a:schemeClr>
+              </a:lnRef>
+              <a:fillRef idx="1">
+                <a:schemeClr val="accent1"/>
+              </a:fillRef>
+              <a:effectRef idx="0">
+                <a:schemeClr val="accent1"/>
+              </a:effectRef>
+              <a:fontRef idx="minor">
+                <a:schemeClr val="lt1"/>
+              </a:fontRef>
+            </p:style>
+            <p:txBody>
+              <a:bodyPr rtlCol="0" anchor="ctr"/>
+              <a:lstStyle/>
+              <a:p>
+                <a:pPr algn="ctr"/>
+                <a:endParaRPr lang="en-US"/>
+              </a:p>
+            </p:txBody>
+          </p:sp>
+          <p:sp>
+            <p:nvSpPr>
+              <p:cNvPr id="12" name="TextBox 11">
+                <a:extLst>
+                  <a:ext uri="{FF2B5EF4-FFF2-40B4-BE49-F238E27FC236}">
+                    <a16:creationId xmlns:a16="http://schemas.microsoft.com/office/drawing/2014/main" id="{62AEA7A5-93F3-FE1D-2FF9-E7F3208BA93C}"/>
+                  </a:ext>
+                </a:extLst>
+              </p:cNvPr>
+              <p:cNvSpPr txBox="1"/>
+              <p:nvPr/>
+            </p:nvSpPr>
+            <p:spPr>
+              <a:xfrm>
+                <a:off x="6685241" y="6152116"/>
+                <a:ext cx="4652271" cy="584775"/>
+              </a:xfrm>
+              <a:prstGeom prst="rect">
+                <a:avLst/>
+              </a:prstGeom>
+              <a:noFill/>
+            </p:spPr>
+            <p:txBody>
+              <a:bodyPr wrap="square" rtlCol="0">
+                <a:spAutoFit/>
+              </a:bodyPr>
+              <a:lstStyle/>
+              <a:p>
+                <a:r>
+                  <a:rPr lang="en-US" sz="1600" dirty="0"/>
+                  <a:t>The behavioral policy provides exploration do we can learn a greedy policy!</a:t>
+                </a:r>
+              </a:p>
+            </p:txBody>
+          </p:sp>
+        </p:grpSp>
         <p:sp>
           <p:nvSpPr>
-            <p:cNvPr id="3" name="Speech Bubble: Rectangle with Corners Rounded 2">
+            <p:cNvPr id="15" name="Rectangle 14">
               <a:extLst>
                 <a:ext uri="{FF2B5EF4-FFF2-40B4-BE49-F238E27FC236}">
-                  <a16:creationId xmlns:a16="http://schemas.microsoft.com/office/drawing/2014/main" id="{7405347D-3A8C-817A-0198-FB46D428A08C}"/>
+                  <a16:creationId xmlns:a16="http://schemas.microsoft.com/office/drawing/2014/main" id="{BEC83A1B-FFF7-CAE0-EFC3-59D9D3F791C3}"/>
                 </a:ext>
               </a:extLst>
             </p:cNvPr>
@@ -6495,61 +7904,8 @@
           </p:nvSpPr>
           <p:spPr>
             <a:xfrm>
-              <a:off x="9881525" y="1062757"/>
-              <a:ext cx="1724099" cy="543806"/>
-            </a:xfrm>
-            <a:prstGeom prst="wedgeRoundRectCallout">
-              <a:avLst>
-                <a:gd name="adj1" fmla="val -75002"/>
-                <a:gd name="adj2" fmla="val 68289"/>
-                <a:gd name="adj3" fmla="val 16667"/>
-              </a:avLst>
-            </a:prstGeom>
-          </p:spPr>
-          <p:style>
-            <a:lnRef idx="2">
-              <a:schemeClr val="accent1">
-                <a:shade val="15000"/>
-              </a:schemeClr>
-            </a:lnRef>
-            <a:fillRef idx="1">
-              <a:schemeClr val="accent1"/>
-            </a:fillRef>
-            <a:effectRef idx="0">
-              <a:schemeClr val="accent1"/>
-            </a:effectRef>
-            <a:fontRef idx="minor">
-              <a:schemeClr val="lt1"/>
-            </a:fontRef>
-          </p:style>
-          <p:txBody>
-            <a:bodyPr rtlCol="0" anchor="ctr"/>
-            <a:lstStyle/>
-            <a:p>
-              <a:pPr algn="ctr"/>
-              <a:r>
-                <a:rPr lang="en-US" sz="1600" dirty="0"/>
-                <a:t>Add behavior policy</a:t>
-              </a:r>
-            </a:p>
-          </p:txBody>
-        </p:sp>
-        <p:sp>
-          <p:nvSpPr>
-            <p:cNvPr id="4" name="Rectangle 3">
-              <a:extLst>
-                <a:ext uri="{FF2B5EF4-FFF2-40B4-BE49-F238E27FC236}">
-                  <a16:creationId xmlns:a16="http://schemas.microsoft.com/office/drawing/2014/main" id="{B7CC600E-3AFD-2FD3-7283-4D46C25C5673}"/>
-                </a:ext>
-              </a:extLst>
-            </p:cNvPr>
-            <p:cNvSpPr/>
-            <p:nvPr/>
-          </p:nvSpPr>
-          <p:spPr>
-            <a:xfrm>
-              <a:off x="8718211" y="4418437"/>
-              <a:ext cx="586333" cy="216384"/>
+              <a:off x="8154481" y="5490373"/>
+              <a:ext cx="1150063" cy="203587"/>
             </a:xfrm>
             <a:prstGeom prst="rect">
               <a:avLst/>
@@ -6583,10 +7939,10 @@
         </p:sp>
         <p:sp>
           <p:nvSpPr>
-            <p:cNvPr id="7" name="Speech Bubble: Rectangle with Corners Rounded 6">
+            <p:cNvPr id="16" name="Rectangle 15">
               <a:extLst>
                 <a:ext uri="{FF2B5EF4-FFF2-40B4-BE49-F238E27FC236}">
-                  <a16:creationId xmlns:a16="http://schemas.microsoft.com/office/drawing/2014/main" id="{D0AD5C9F-6D47-4621-45B9-9385077EF25E}"/>
+                  <a16:creationId xmlns:a16="http://schemas.microsoft.com/office/drawing/2014/main" id="{391ADFBD-CEF3-5E12-84F2-4276E80144D6}"/>
                 </a:ext>
               </a:extLst>
             </p:cNvPr>
@@ -6595,61 +7951,8 @@
           </p:nvSpPr>
           <p:spPr>
             <a:xfrm>
-              <a:off x="10366107" y="4418437"/>
-              <a:ext cx="1724099" cy="543806"/>
-            </a:xfrm>
-            <a:prstGeom prst="wedgeRoundRectCallout">
-              <a:avLst>
-                <a:gd name="adj1" fmla="val -119535"/>
-                <a:gd name="adj2" fmla="val 74707"/>
-                <a:gd name="adj3" fmla="val 16667"/>
-              </a:avLst>
-            </a:prstGeom>
-          </p:spPr>
-          <p:style>
-            <a:lnRef idx="2">
-              <a:schemeClr val="accent1">
-                <a:shade val="15000"/>
-              </a:schemeClr>
-            </a:lnRef>
-            <a:fillRef idx="1">
-              <a:schemeClr val="accent1"/>
-            </a:fillRef>
-            <a:effectRef idx="0">
-              <a:schemeClr val="accent1"/>
-            </a:effectRef>
-            <a:fontRef idx="minor">
-              <a:schemeClr val="lt1"/>
-            </a:fontRef>
-          </p:style>
-          <p:txBody>
-            <a:bodyPr rtlCol="0" anchor="ctr"/>
-            <a:lstStyle/>
-            <a:p>
-              <a:pPr algn="ctr"/>
-              <a:r>
-                <a:rPr lang="en-US" sz="1600" dirty="0"/>
-                <a:t>Importance sampling ratio</a:t>
-              </a:r>
-            </a:p>
-          </p:txBody>
-        </p:sp>
-        <p:sp>
-          <p:nvSpPr>
-            <p:cNvPr id="8" name="Rectangle 7">
-              <a:extLst>
-                <a:ext uri="{FF2B5EF4-FFF2-40B4-BE49-F238E27FC236}">
-                  <a16:creationId xmlns:a16="http://schemas.microsoft.com/office/drawing/2014/main" id="{4F3B9A1D-1B3F-1708-DAD7-FA40CAA1493A}"/>
-                </a:ext>
-              </a:extLst>
-            </p:cNvPr>
-            <p:cNvSpPr/>
-            <p:nvPr/>
-          </p:nvSpPr>
-          <p:spPr>
-            <a:xfrm>
-              <a:off x="6965029" y="2023082"/>
-              <a:ext cx="447893" cy="203587"/>
+              <a:off x="8823744" y="1695798"/>
+              <a:ext cx="675856" cy="203587"/>
             </a:xfrm>
             <a:prstGeom prst="rect">
               <a:avLst/>
@@ -6678,88 +7981,6 @@
             <a:p>
               <a:pPr algn="ctr"/>
               <a:endParaRPr lang="en-US"/>
-            </a:p>
-          </p:txBody>
-        </p:sp>
-        <p:sp>
-          <p:nvSpPr>
-            <p:cNvPr id="11" name="Rectangle 10">
-              <a:extLst>
-                <a:ext uri="{FF2B5EF4-FFF2-40B4-BE49-F238E27FC236}">
-                  <a16:creationId xmlns:a16="http://schemas.microsoft.com/office/drawing/2014/main" id="{8E169648-1DAF-B5A5-C80D-AEBC7295E489}"/>
-                </a:ext>
-              </a:extLst>
-            </p:cNvPr>
-            <p:cNvSpPr/>
-            <p:nvPr/>
-          </p:nvSpPr>
-          <p:spPr>
-            <a:xfrm>
-              <a:off x="9433632" y="5673788"/>
-              <a:ext cx="447893" cy="203587"/>
-            </a:xfrm>
-            <a:prstGeom prst="rect">
-              <a:avLst/>
-            </a:prstGeom>
-            <a:noFill/>
-          </p:spPr>
-          <p:style>
-            <a:lnRef idx="2">
-              <a:schemeClr val="accent1">
-                <a:shade val="15000"/>
-              </a:schemeClr>
-            </a:lnRef>
-            <a:fillRef idx="1">
-              <a:schemeClr val="accent1"/>
-            </a:fillRef>
-            <a:effectRef idx="0">
-              <a:schemeClr val="accent1"/>
-            </a:effectRef>
-            <a:fontRef idx="minor">
-              <a:schemeClr val="lt1"/>
-            </a:fontRef>
-          </p:style>
-          <p:txBody>
-            <a:bodyPr rtlCol="0" anchor="ctr"/>
-            <a:lstStyle/>
-            <a:p>
-              <a:pPr algn="ctr"/>
-              <a:endParaRPr lang="en-US"/>
-            </a:p>
-          </p:txBody>
-        </p:sp>
-        <p:sp>
-          <p:nvSpPr>
-            <p:cNvPr id="12" name="TextBox 11">
-              <a:extLst>
-                <a:ext uri="{FF2B5EF4-FFF2-40B4-BE49-F238E27FC236}">
-                  <a16:creationId xmlns:a16="http://schemas.microsoft.com/office/drawing/2014/main" id="{62AEA7A5-93F3-FE1D-2FF9-E7F3208BA93C}"/>
-                </a:ext>
-              </a:extLst>
-            </p:cNvPr>
-            <p:cNvSpPr txBox="1"/>
-            <p:nvPr/>
-          </p:nvSpPr>
-          <p:spPr>
-            <a:xfrm>
-              <a:off x="6685241" y="6152116"/>
-              <a:ext cx="4652271" cy="584775"/>
-            </a:xfrm>
-            <a:prstGeom prst="rect">
-              <a:avLst/>
-            </a:prstGeom>
-            <a:noFill/>
-          </p:spPr>
-          <p:txBody>
-            <a:bodyPr wrap="square" rtlCol="0">
-              <a:spAutoFit/>
-            </a:bodyPr>
-            <a:lstStyle/>
-            <a:p>
-              <a:r>
-                <a:rPr lang="en-US" sz="1600" dirty="0"/>
-                <a:t>The behavioral policy provides exploration do we can learn a greedy policy!</a:t>
-              </a:r>
             </a:p>
           </p:txBody>
         </p:sp>
@@ -6810,6 +8031,59 @@
           </a:p>
         </p:txBody>
       </p:sp>
+      <p:sp>
+        <p:nvSpPr>
+          <p:cNvPr id="20" name="Speech Bubble: Rectangle with Corners Rounded 19">
+            <a:extLst>
+              <a:ext uri="{FF2B5EF4-FFF2-40B4-BE49-F238E27FC236}">
+                <a16:creationId xmlns:a16="http://schemas.microsoft.com/office/drawing/2014/main" id="{3D719930-D8A7-468C-7B92-AAA575154DF9}"/>
+              </a:ext>
+            </a:extLst>
+          </p:cNvPr>
+          <p:cNvSpPr/>
+          <p:nvPr/>
+        </p:nvSpPr>
+        <p:spPr>
+          <a:xfrm>
+            <a:off x="10711542" y="1852972"/>
+            <a:ext cx="1378663" cy="543806"/>
+          </a:xfrm>
+          <a:prstGeom prst="wedgeRoundRectCallout">
+            <a:avLst>
+              <a:gd name="adj1" fmla="val -85843"/>
+              <a:gd name="adj2" fmla="val -2440"/>
+              <a:gd name="adj3" fmla="val 16667"/>
+            </a:avLst>
+          </a:prstGeom>
+        </p:spPr>
+        <p:style>
+          <a:lnRef idx="2">
+            <a:schemeClr val="accent1">
+              <a:shade val="15000"/>
+            </a:schemeClr>
+          </a:lnRef>
+          <a:fillRef idx="1">
+            <a:schemeClr val="accent1"/>
+          </a:fillRef>
+          <a:effectRef idx="0">
+            <a:schemeClr val="accent1"/>
+          </a:effectRef>
+          <a:fontRef idx="minor">
+            <a:schemeClr val="lt1"/>
+          </a:fontRef>
+        </p:style>
+        <p:txBody>
+          <a:bodyPr rtlCol="0" anchor="ctr"/>
+          <a:lstStyle/>
+          <a:p>
+            <a:pPr algn="ctr"/>
+            <a:r>
+              <a:rPr lang="en-US" sz="1600" dirty="0"/>
+              <a:t>Greedy target policy</a:t>
+            </a:r>
+          </a:p>
+        </p:txBody>
+      </p:sp>
     </p:spTree>
     <p:extLst>
       <p:ext uri="{BB962C8B-B14F-4D97-AF65-F5344CB8AC3E}">
@@ -6823,7 +8097,7 @@
 </p:sld>
 </file>
 
-<file path=ppt/slides/slide15.xml><?xml version="1.0" encoding="utf-8"?>
+<file path=ppt/slides/slide16.xml><?xml version="1.0" encoding="utf-8"?>
 <p:sld xmlns:a="http://schemas.openxmlformats.org/drawingml/2006/main" xmlns:r="http://schemas.openxmlformats.org/officeDocument/2006/relationships" xmlns:p="http://schemas.openxmlformats.org/presentationml/2006/main">
   <p:cSld>
     <p:spTree>
@@ -6863,13 +8137,13 @@
           <a:p>
             <a:r>
               <a:rPr lang="en-US" dirty="0"/>
-              <a:t>Summary</a:t>
+              <a:t>What you Need to Know</a:t>
             </a:r>
           </a:p>
         </p:txBody>
       </p:sp>
-      <mc:AlternateContent xmlns:mc="http://schemas.openxmlformats.org/markup-compatibility/2006" xmlns:a14="http://schemas.microsoft.com/office/drawing/2010/main">
-        <mc:Choice Requires="a14">
+      <mc:AlternateContent xmlns:mc="http://schemas.openxmlformats.org/markup-compatibility/2006">
+        <mc:Choice xmlns:a14="http://schemas.microsoft.com/office/drawing/2010/main" Requires="a14">
           <p:sp>
             <p:nvSpPr>
               <p:cNvPr id="3" name="Content Placeholder 2">
@@ -6889,7 +8163,7 @@
             <p:spPr/>
             <p:txBody>
               <a:bodyPr>
-                <a:normAutofit lnSpcReduction="10000"/>
+                <a:normAutofit fontScale="77500" lnSpcReduction="20000"/>
               </a:bodyPr>
               <a:lstStyle/>
               <a:p>
@@ -6905,13 +8179,7 @@
                 </a14:m>
                 <a:r>
                   <a:rPr lang="en-US" dirty="0"/>
-                  <a:t>-step methods bridge the gap between on-step DT methods and Monte Carlo Methods.</a:t>
-                </a:r>
-              </a:p>
-              <a:p>
-                <a:r>
-                  <a:rPr lang="en-US" dirty="0"/>
-                  <a:t> They perform an intermediate amount of bootstrapping and typically perform better than the extremes.</a:t>
+                  <a:t>-step methods let us vary the learning behavior between on-step DT methods and Monte Carlo Methods (whole episode).</a:t>
                 </a:r>
               </a:p>
               <a:p>
@@ -6920,35 +8188,84 @@
               <a:p>
                 <a:r>
                   <a:rPr lang="en-US" dirty="0"/>
-                  <a:t>Drawback:</a:t>
+                  <a:t>Advantage: </a:t>
                 </a:r>
               </a:p>
               <a:p>
                 <a:pPr lvl="1"/>
                 <a:r>
+                  <a:rPr lang="en-US" b="1" dirty="0"/>
+                  <a:t>Learning</a:t>
+                </a:r>
+                <a:r>
                   <a:rPr lang="en-US" dirty="0"/>
-                  <a:t>Updates are delayed </a:t>
-                </a:r>
-                <a14:m>
-                  <m:oMath xmlns:m="http://schemas.openxmlformats.org/officeDocument/2006/math">
-                    <m:r>
-                      <a:rPr lang="en-US" i="1">
-                        <a:latin typeface="Cambria Math" panose="02040503050406030204" pitchFamily="18" charset="0"/>
-                      </a:rPr>
-                      <m:t>𝑛</m:t>
-                    </m:r>
-                  </m:oMath>
-                </a14:m>
-                <a:r>
-                  <a:rPr lang="en-US" dirty="0"/>
-                  <a:t>-step since they need to know future events (actions and states).</a:t>
+                  <a:t>: Looking more steps ahead speeds up learning, especially for sparse rewards.</a:t>
                 </a:r>
               </a:p>
               <a:p>
                 <a:pPr lvl="1"/>
                 <a:r>
                   <a:rPr lang="en-US" dirty="0"/>
-                  <a:t>More computation per time step and higher memory needs than one-step methods.</a:t>
+                  <a:t>An intermediate amount of bootstrapping typically performs better than the one-step and MC extremes. </a:t>
+                </a:r>
+                <a14:m>
+                  <m:oMath xmlns:m="http://schemas.openxmlformats.org/officeDocument/2006/math">
+                    <m:r>
+                      <a:rPr lang="en-US" b="0" i="1" smtClean="0">
+                        <a:latin typeface="Cambria Math" panose="02040503050406030204" pitchFamily="18" charset="0"/>
+                      </a:rPr>
+                      <m:t>𝑛</m:t>
+                    </m:r>
+                  </m:oMath>
+                </a14:m>
+                <a:r>
+                  <a:rPr lang="en-US" dirty="0"/>
+                  <a:t> is application-dependent and can be tuned.</a:t>
+                </a:r>
+              </a:p>
+              <a:p>
+                <a:endParaRPr lang="en-US" dirty="0"/>
+              </a:p>
+              <a:p>
+                <a:r>
+                  <a:rPr lang="en-US" dirty="0"/>
+                  <a:t>Drawback:</a:t>
+                </a:r>
+              </a:p>
+              <a:p>
+                <a:pPr lvl="1"/>
+                <a:r>
+                  <a:rPr lang="en-US" b="1" dirty="0"/>
+                  <a:t>Delay</a:t>
+                </a:r>
+                <a:r>
+                  <a:rPr lang="en-US" dirty="0"/>
+                  <a:t>: Updates are delayed </a:t>
+                </a:r>
+                <a14:m>
+                  <m:oMath xmlns:m="http://schemas.openxmlformats.org/officeDocument/2006/math">
+                    <m:r>
+                      <a:rPr lang="en-US" i="1">
+                        <a:latin typeface="Cambria Math" panose="02040503050406030204" pitchFamily="18" charset="0"/>
+                      </a:rPr>
+                      <m:t>𝑛</m:t>
+                    </m:r>
+                  </m:oMath>
+                </a14:m>
+                <a:r>
+                  <a:rPr lang="en-US" dirty="0"/>
+                  <a:t>-step since they need to know future events (actions and states).</a:t>
+                </a:r>
+              </a:p>
+              <a:p>
+                <a:pPr lvl="1"/>
+                <a:r>
+                  <a:rPr lang="en-US" b="1" dirty="0"/>
+                  <a:t>Computation</a:t>
+                </a:r>
+                <a:r>
+                  <a:rPr lang="en-US" dirty="0"/>
+                  <a:t>: More computation per time step and higher memory needs than one-step methods.</a:t>
                 </a:r>
               </a:p>
               <a:p>
@@ -6960,8 +8277,12 @@
                   <a:buNone/>
                 </a:pPr>
                 <a:r>
+                  <a:rPr lang="en-US" b="1" dirty="0"/>
+                  <a:t>Eligibility traces </a:t>
+                </a:r>
+                <a:r>
                   <a:rPr lang="en-US" dirty="0"/>
-                  <a:t>We will later cover the related concept of eligibility traces.</a:t>
+                  <a:t>address the delay and computation drawbacks. We will cover these methods later.</a:t>
                 </a:r>
               </a:p>
               <a:p>
@@ -6970,7 +8291,7 @@
             </p:txBody>
           </p:sp>
         </mc:Choice>
-        <mc:Fallback xmlns="">
+        <mc:Fallback>
           <p:sp>
             <p:nvSpPr>
               <p:cNvPr id="3" name="Content Placeholder 2">
@@ -6991,7 +8312,7 @@
               <a:blipFill>
                 <a:blip r:embed="rId2"/>
                 <a:stretch>
-                  <a:fillRect l="-1217" t="-2806" r="-812" b="-1020"/>
+                  <a:fillRect l="-754" t="-2551" r="-696"/>
                 </a:stretch>
               </a:blipFill>
             </p:spPr>
@@ -10093,390 +11414,278 @@
           </p:sp>
         </mc:Fallback>
       </mc:AlternateContent>
-      <p:sp>
-        <p:nvSpPr>
-          <p:cNvPr id="3" name="Content Placeholder 2">
-            <a:extLst>
-              <a:ext uri="{FF2B5EF4-FFF2-40B4-BE49-F238E27FC236}">
-                <a16:creationId xmlns:a16="http://schemas.microsoft.com/office/drawing/2014/main" id="{885DA0A5-DD6E-AE51-3C17-167B058ECA97}"/>
-              </a:ext>
-            </a:extLst>
-          </p:cNvPr>
-          <p:cNvSpPr>
-            <a:spLocks noGrp="1"/>
-          </p:cNvSpPr>
-          <p:nvPr>
-            <p:ph idx="1"/>
-          </p:nvPr>
-        </p:nvSpPr>
-        <p:spPr>
-          <a:xfrm>
-            <a:off x="838200" y="1192292"/>
-            <a:ext cx="10515600" cy="1778026"/>
-          </a:xfrm>
-        </p:spPr>
-        <p:txBody>
-          <a:bodyPr>
-            <a:noAutofit/>
-          </a:bodyPr>
-          <a:lstStyle/>
-          <a:p>
-            <a:pPr marL="0" indent="0">
-              <a:buNone/>
-            </a:pPr>
-            <a:r>
-              <a:rPr lang="en-US" sz="1600" dirty="0"/>
-              <a:t>How far do we look in the sampled episode ahead to update the state value?</a:t>
-            </a:r>
-            <a:endParaRPr lang="en-US" sz="1600" b="1" dirty="0"/>
-          </a:p>
-          <a:p>
-            <a:pPr marL="0" indent="0">
-              <a:buNone/>
-            </a:pPr>
-            <a:endParaRPr lang="en-US" sz="1600" b="1" dirty="0"/>
-          </a:p>
-          <a:p>
-            <a:pPr marL="0" indent="0">
-              <a:buNone/>
-            </a:pPr>
-            <a:r>
-              <a:rPr lang="en-US" sz="1600" b="1" dirty="0"/>
-              <a:t>1-step DT</a:t>
-            </a:r>
-          </a:p>
-          <a:p>
-            <a:pPr lvl="1"/>
-            <a:r>
-              <a:rPr lang="en-US" sz="1600" dirty="0"/>
-              <a:t>We have already discussed 1-step TD: Q-Learning, Sarsa</a:t>
-            </a:r>
-          </a:p>
-          <a:p>
-            <a:pPr lvl="1"/>
-            <a:r>
-              <a:rPr lang="en-US" sz="1600" dirty="0"/>
-              <a:t>We only observe the next step and its reward. The remaining return is bootstrapped using the estimate of the next state’s value.</a:t>
-            </a:r>
-            <a:endParaRPr lang="en-US" sz="1600" i="1" dirty="0">
-              <a:latin typeface="Cambria Math" panose="02040503050406030204" pitchFamily="18" charset="0"/>
-            </a:endParaRPr>
-          </a:p>
-          <a:p>
-            <a:pPr marL="0" indent="0">
-              <a:buNone/>
-            </a:pPr>
-            <a:endParaRPr lang="en-US" sz="1600" b="1" i="1" dirty="0">
-              <a:latin typeface="Cambria Math" panose="02040503050406030204" pitchFamily="18" charset="0"/>
-            </a:endParaRPr>
-          </a:p>
-          <a:p>
-            <a:pPr marL="0" indent="0">
-              <a:buNone/>
-            </a:pPr>
-            <a:endParaRPr lang="en-US" sz="1600" b="1" i="1" dirty="0">
-              <a:latin typeface="Cambria Math" panose="02040503050406030204" pitchFamily="18" charset="0"/>
-            </a:endParaRPr>
-          </a:p>
-          <a:p>
-            <a:pPr marL="0" indent="0">
-              <a:buNone/>
-            </a:pPr>
-            <a:endParaRPr lang="en-US" sz="1600" b="1" i="1" dirty="0">
-              <a:latin typeface="Cambria Math" panose="02040503050406030204" pitchFamily="18" charset="0"/>
-            </a:endParaRPr>
-          </a:p>
-          <a:p>
-            <a:pPr marL="0" indent="0">
-              <a:buNone/>
-            </a:pPr>
-            <a:endParaRPr lang="en-US" sz="1600" b="1" i="1" dirty="0">
-              <a:latin typeface="Cambria Math" panose="02040503050406030204" pitchFamily="18" charset="0"/>
-            </a:endParaRPr>
-          </a:p>
-        </p:txBody>
-      </p:sp>
-      <p:grpSp>
-        <p:nvGrpSpPr>
-          <p:cNvPr id="12" name="Group 11">
-            <a:extLst>
-              <a:ext uri="{FF2B5EF4-FFF2-40B4-BE49-F238E27FC236}">
-                <a16:creationId xmlns:a16="http://schemas.microsoft.com/office/drawing/2014/main" id="{C25B38B9-8EEE-3230-C9A7-D1B5877AC90A}"/>
-              </a:ext>
-            </a:extLst>
-          </p:cNvPr>
-          <p:cNvGrpSpPr/>
-          <p:nvPr/>
-        </p:nvGrpSpPr>
-        <p:grpSpPr>
-          <a:xfrm>
-            <a:off x="3472518" y="5568363"/>
-            <a:ext cx="4920486" cy="666395"/>
-            <a:chOff x="2879313" y="2782204"/>
-            <a:chExt cx="5495707" cy="879847"/>
-          </a:xfrm>
-        </p:grpSpPr>
-        <p:grpSp>
-          <p:nvGrpSpPr>
-            <p:cNvPr id="10" name="Group 9">
-              <a:extLst>
-                <a:ext uri="{FF2B5EF4-FFF2-40B4-BE49-F238E27FC236}">
-                  <a16:creationId xmlns:a16="http://schemas.microsoft.com/office/drawing/2014/main" id="{E7470490-29F2-50C7-075E-7377CEFC4DB5}"/>
-                </a:ext>
-              </a:extLst>
-            </p:cNvPr>
-            <p:cNvGrpSpPr/>
-            <p:nvPr/>
-          </p:nvGrpSpPr>
-          <p:grpSpPr>
-            <a:xfrm>
-              <a:off x="2879313" y="2782204"/>
-              <a:ext cx="5495707" cy="631088"/>
-              <a:chOff x="2879313" y="2782204"/>
-              <a:chExt cx="5495707" cy="631088"/>
-            </a:xfrm>
-          </p:grpSpPr>
+      <mc:AlternateContent xmlns:mc="http://schemas.openxmlformats.org/markup-compatibility/2006">
+        <mc:Choice xmlns:a14="http://schemas.microsoft.com/office/drawing/2010/main" Requires="a14">
           <p:sp>
             <p:nvSpPr>
-              <p:cNvPr id="4" name="Oval 3">
+              <p:cNvPr id="3" name="Content Placeholder 2">
                 <a:extLst>
                   <a:ext uri="{FF2B5EF4-FFF2-40B4-BE49-F238E27FC236}">
-                    <a16:creationId xmlns:a16="http://schemas.microsoft.com/office/drawing/2014/main" id="{B94B77C9-C9AA-6F5D-D56B-315043DD70EF}"/>
+                    <a16:creationId xmlns:a16="http://schemas.microsoft.com/office/drawing/2014/main" id="{885DA0A5-DD6E-AE51-3C17-167B058ECA97}"/>
                   </a:ext>
                 </a:extLst>
               </p:cNvPr>
-              <p:cNvSpPr/>
-              <p:nvPr/>
+              <p:cNvSpPr>
+                <a:spLocks noGrp="1"/>
+              </p:cNvSpPr>
+              <p:nvPr>
+                <p:ph idx="1"/>
+              </p:nvPr>
             </p:nvSpPr>
             <p:spPr>
               <a:xfrm>
-                <a:off x="3378394" y="3224828"/>
-                <a:ext cx="174504" cy="188464"/>
+                <a:off x="838200" y="1192292"/>
+                <a:ext cx="10515600" cy="1778026"/>
               </a:xfrm>
-              <a:prstGeom prst="ellipse">
-                <a:avLst/>
-              </a:prstGeom>
             </p:spPr>
-            <p:style>
-              <a:lnRef idx="2">
-                <a:schemeClr val="accent1">
-                  <a:shade val="15000"/>
-                </a:schemeClr>
-              </a:lnRef>
-              <a:fillRef idx="1">
-                <a:schemeClr val="accent1"/>
-              </a:fillRef>
-              <a:effectRef idx="0">
-                <a:schemeClr val="accent1"/>
-              </a:effectRef>
-              <a:fontRef idx="minor">
-                <a:schemeClr val="lt1"/>
-              </a:fontRef>
-            </p:style>
             <p:txBody>
-              <a:bodyPr rtlCol="0" anchor="ctr"/>
+              <a:bodyPr>
+                <a:noAutofit/>
+              </a:bodyPr>
               <a:lstStyle/>
               <a:p>
-                <a:pPr algn="ctr"/>
-                <a:endParaRPr lang="en-US" sz="1400"/>
+                <a:pPr marL="0" indent="0">
+                  <a:buNone/>
+                </a:pPr>
+                <a:r>
+                  <a:rPr lang="en-US" sz="1600" dirty="0"/>
+                  <a:t>How far do we look in the sampled episode ahead to update the state value?</a:t>
+                </a:r>
+                <a:endParaRPr lang="en-US" sz="1600" b="1" dirty="0"/>
+              </a:p>
+              <a:p>
+                <a:pPr marL="0" indent="0">
+                  <a:buNone/>
+                </a:pPr>
+                <a:endParaRPr lang="en-US" sz="1600" b="1" dirty="0"/>
+              </a:p>
+              <a:p>
+                <a:pPr marL="0" indent="0">
+                  <a:buNone/>
+                </a:pPr>
+                <a:r>
+                  <a:rPr lang="en-US" sz="1600" b="1" dirty="0"/>
+                  <a:t>1-step DT</a:t>
+                </a:r>
+              </a:p>
+              <a:p>
+                <a:pPr lvl="1"/>
+                <a:r>
+                  <a:rPr lang="en-US" sz="1600" dirty="0"/>
+                  <a:t>We have already discussed 1-step TD: Q-Learning, Sarsa</a:t>
+                </a:r>
+              </a:p>
+              <a:p>
+                <a:pPr lvl="1"/>
+                <a:r>
+                  <a:rPr lang="en-US" sz="1600" dirty="0"/>
+                  <a:t>We only observe the next step and its reward. The remaining return is bootstrapped using the estimate of the next state’s value </a:t>
+                </a:r>
+                <a14:m>
+                  <m:oMath xmlns:m="http://schemas.openxmlformats.org/officeDocument/2006/math">
+                    <m:r>
+                      <a:rPr lang="en-US" sz="1600" i="1">
+                        <a:latin typeface="Cambria Math" panose="02040503050406030204" pitchFamily="18" charset="0"/>
+                      </a:rPr>
+                      <m:t>𝑉</m:t>
+                    </m:r>
+                    <m:r>
+                      <a:rPr lang="en-US" sz="1600" i="1">
+                        <a:latin typeface="Cambria Math" panose="02040503050406030204" pitchFamily="18" charset="0"/>
+                      </a:rPr>
+                      <m:t>(</m:t>
+                    </m:r>
+                    <m:sSub>
+                      <m:sSubPr>
+                        <m:ctrlPr>
+                          <a:rPr lang="en-US" sz="1600" i="1">
+                            <a:latin typeface="Cambria Math" panose="02040503050406030204" pitchFamily="18" charset="0"/>
+                          </a:rPr>
+                        </m:ctrlPr>
+                      </m:sSubPr>
+                      <m:e>
+                        <m:r>
+                          <a:rPr lang="en-US" sz="1600" i="1">
+                            <a:latin typeface="Cambria Math" panose="02040503050406030204" pitchFamily="18" charset="0"/>
+                          </a:rPr>
+                          <m:t>𝑆</m:t>
+                        </m:r>
+                      </m:e>
+                      <m:sub>
+                        <m:r>
+                          <a:rPr lang="en-US" sz="1600" i="1">
+                            <a:latin typeface="Cambria Math" panose="02040503050406030204" pitchFamily="18" charset="0"/>
+                          </a:rPr>
+                          <m:t>𝑡</m:t>
+                        </m:r>
+                        <m:r>
+                          <a:rPr lang="en-US" sz="1600" i="1">
+                            <a:latin typeface="Cambria Math" panose="02040503050406030204" pitchFamily="18" charset="0"/>
+                          </a:rPr>
+                          <m:t>+1</m:t>
+                        </m:r>
+                      </m:sub>
+                    </m:sSub>
+                    <m:r>
+                      <a:rPr lang="en-US" sz="1600" i="1">
+                        <a:latin typeface="Cambria Math" panose="02040503050406030204" pitchFamily="18" charset="0"/>
+                      </a:rPr>
+                      <m:t>)</m:t>
+                    </m:r>
+                  </m:oMath>
+                </a14:m>
+                <a:r>
+                  <a:rPr lang="en-US" sz="1600" dirty="0"/>
+                  <a:t> or action values </a:t>
+                </a:r>
+                <a14:m>
+                  <m:oMath xmlns:m="http://schemas.openxmlformats.org/officeDocument/2006/math">
+                    <m:r>
+                      <a:rPr lang="en-US" sz="1600" b="0" i="1" smtClean="0">
+                        <a:latin typeface="Cambria Math" panose="02040503050406030204" pitchFamily="18" charset="0"/>
+                      </a:rPr>
+                      <m:t>𝑄</m:t>
+                    </m:r>
+                    <m:r>
+                      <a:rPr lang="en-US" sz="1600" i="1">
+                        <a:latin typeface="Cambria Math" panose="02040503050406030204" pitchFamily="18" charset="0"/>
+                      </a:rPr>
+                      <m:t>(</m:t>
+                    </m:r>
+                    <m:sSub>
+                      <m:sSubPr>
+                        <m:ctrlPr>
+                          <a:rPr lang="en-US" sz="1600" i="1">
+                            <a:latin typeface="Cambria Math" panose="02040503050406030204" pitchFamily="18" charset="0"/>
+                          </a:rPr>
+                        </m:ctrlPr>
+                      </m:sSubPr>
+                      <m:e>
+                        <m:r>
+                          <a:rPr lang="en-US" sz="1600" i="1">
+                            <a:latin typeface="Cambria Math" panose="02040503050406030204" pitchFamily="18" charset="0"/>
+                          </a:rPr>
+                          <m:t>𝑆</m:t>
+                        </m:r>
+                      </m:e>
+                      <m:sub>
+                        <m:r>
+                          <a:rPr lang="en-US" sz="1600" i="1">
+                            <a:latin typeface="Cambria Math" panose="02040503050406030204" pitchFamily="18" charset="0"/>
+                          </a:rPr>
+                          <m:t>𝑡</m:t>
+                        </m:r>
+                        <m:r>
+                          <a:rPr lang="en-US" sz="1600" i="1">
+                            <a:latin typeface="Cambria Math" panose="02040503050406030204" pitchFamily="18" charset="0"/>
+                          </a:rPr>
+                          <m:t>+1</m:t>
+                        </m:r>
+                      </m:sub>
+                    </m:sSub>
+                    <m:r>
+                      <a:rPr lang="en-US" sz="1600" b="0" i="1" smtClean="0">
+                        <a:latin typeface="Cambria Math" panose="02040503050406030204" pitchFamily="18" charset="0"/>
+                      </a:rPr>
+                      <m:t>, ⋅</m:t>
+                    </m:r>
+                    <m:r>
+                      <a:rPr lang="en-US" sz="1600" i="1">
+                        <a:latin typeface="Cambria Math" panose="02040503050406030204" pitchFamily="18" charset="0"/>
+                      </a:rPr>
+                      <m:t>)</m:t>
+                    </m:r>
+                  </m:oMath>
+                </a14:m>
+                <a:r>
+                  <a:rPr lang="en-US" sz="1600" dirty="0"/>
+                  <a:t>.</a:t>
+                </a:r>
+                <a:endParaRPr lang="en-US" sz="1600" i="1" dirty="0">
+                  <a:latin typeface="Cambria Math" panose="02040503050406030204" pitchFamily="18" charset="0"/>
+                </a:endParaRPr>
+              </a:p>
+              <a:p>
+                <a:pPr marL="0" indent="0">
+                  <a:buNone/>
+                </a:pPr>
+                <a:endParaRPr lang="en-US" sz="1600" b="1" i="1" dirty="0">
+                  <a:latin typeface="Cambria Math" panose="02040503050406030204" pitchFamily="18" charset="0"/>
+                </a:endParaRPr>
+              </a:p>
+              <a:p>
+                <a:pPr marL="0" indent="0">
+                  <a:buNone/>
+                </a:pPr>
+                <a:endParaRPr lang="en-US" sz="1600" b="1" i="1" dirty="0">
+                  <a:latin typeface="Cambria Math" panose="02040503050406030204" pitchFamily="18" charset="0"/>
+                </a:endParaRPr>
+              </a:p>
+              <a:p>
+                <a:pPr marL="0" indent="0">
+                  <a:buNone/>
+                </a:pPr>
+                <a:endParaRPr lang="en-US" sz="1600" b="1" i="1" dirty="0">
+                  <a:latin typeface="Cambria Math" panose="02040503050406030204" pitchFamily="18" charset="0"/>
+                </a:endParaRPr>
+              </a:p>
+              <a:p>
+                <a:pPr marL="0" indent="0">
+                  <a:buNone/>
+                </a:pPr>
+                <a:endParaRPr lang="en-US" sz="1600" b="1" i="1" dirty="0">
+                  <a:latin typeface="Cambria Math" panose="02040503050406030204" pitchFamily="18" charset="0"/>
+                </a:endParaRPr>
               </a:p>
             </p:txBody>
           </p:sp>
+        </mc:Choice>
+        <mc:Fallback>
           <p:sp>
             <p:nvSpPr>
-              <p:cNvPr id="5" name="Oval 4">
+              <p:cNvPr id="3" name="Content Placeholder 2">
                 <a:extLst>
                   <a:ext uri="{FF2B5EF4-FFF2-40B4-BE49-F238E27FC236}">
-                    <a16:creationId xmlns:a16="http://schemas.microsoft.com/office/drawing/2014/main" id="{8EAB5D2C-C971-DEFC-52FE-D0987A0552AA}"/>
+                    <a16:creationId xmlns:a16="http://schemas.microsoft.com/office/drawing/2014/main" id="{885DA0A5-DD6E-AE51-3C17-167B058ECA97}"/>
                   </a:ext>
                 </a:extLst>
               </p:cNvPr>
-              <p:cNvSpPr/>
-              <p:nvPr/>
+              <p:cNvSpPr>
+                <a:spLocks noGrp="1" noRot="1" noChangeAspect="1" noMove="1" noResize="1" noEditPoints="1" noAdjustHandles="1" noChangeArrowheads="1" noChangeShapeType="1" noTextEdit="1"/>
+              </p:cNvSpPr>
+              <p:nvPr>
+                <p:ph idx="1"/>
+              </p:nvPr>
             </p:nvSpPr>
             <p:spPr>
               <a:xfrm>
-                <a:off x="7907350" y="3224828"/>
-                <a:ext cx="174504" cy="188464"/>
+                <a:off x="838200" y="1192292"/>
+                <a:ext cx="10515600" cy="1778026"/>
               </a:xfrm>
-              <a:prstGeom prst="ellipse">
-                <a:avLst/>
-              </a:prstGeom>
+              <a:blipFill>
+                <a:blip r:embed="rId3"/>
+                <a:stretch>
+                  <a:fillRect l="-348" t="-2405" b="-5498"/>
+                </a:stretch>
+              </a:blipFill>
             </p:spPr>
-            <p:style>
-              <a:lnRef idx="2">
-                <a:schemeClr val="accent1">
-                  <a:shade val="15000"/>
-                </a:schemeClr>
-              </a:lnRef>
-              <a:fillRef idx="1">
-                <a:schemeClr val="accent1"/>
-              </a:fillRef>
-              <a:effectRef idx="0">
-                <a:schemeClr val="accent1"/>
-              </a:effectRef>
-              <a:fontRef idx="minor">
-                <a:schemeClr val="lt1"/>
-              </a:fontRef>
-            </p:style>
             <p:txBody>
-              <a:bodyPr rtlCol="0" anchor="ctr"/>
+              <a:bodyPr/>
               <a:lstStyle/>
               <a:p>
-                <a:pPr algn="ctr"/>
-                <a:endParaRPr lang="en-US" sz="1400"/>
+                <a:r>
+                  <a:rPr lang="en-US">
+                    <a:noFill/>
+                  </a:rPr>
+                  <a:t> </a:t>
+                </a:r>
               </a:p>
             </p:txBody>
           </p:sp>
-          <p:cxnSp>
-            <p:nvCxnSpPr>
-              <p:cNvPr id="7" name="Straight Arrow Connector 6">
-                <a:extLst>
-                  <a:ext uri="{FF2B5EF4-FFF2-40B4-BE49-F238E27FC236}">
-                    <a16:creationId xmlns:a16="http://schemas.microsoft.com/office/drawing/2014/main" id="{0F54933B-23C4-19A8-0DB4-85CED3BAE1BB}"/>
-                  </a:ext>
-                </a:extLst>
-              </p:cNvPr>
-              <p:cNvCxnSpPr/>
-              <p:nvPr/>
-            </p:nvCxnSpPr>
-            <p:spPr>
-              <a:xfrm>
-                <a:off x="3664580" y="3319060"/>
-                <a:ext cx="4132251" cy="0"/>
-              </a:xfrm>
-              <a:prstGeom prst="straightConnector1">
-                <a:avLst/>
-              </a:prstGeom>
-              <a:ln w="57150">
-                <a:headEnd type="triangle" w="med" len="med"/>
-                <a:tailEnd type="triangle" w="med" len="med"/>
-              </a:ln>
-            </p:spPr>
-            <p:style>
-              <a:lnRef idx="2">
-                <a:schemeClr val="accent1"/>
-              </a:lnRef>
-              <a:fillRef idx="0">
-                <a:schemeClr val="accent1"/>
-              </a:fillRef>
-              <a:effectRef idx="1">
-                <a:schemeClr val="accent1"/>
-              </a:effectRef>
-              <a:fontRef idx="minor">
-                <a:schemeClr val="tx1"/>
-              </a:fontRef>
-            </p:style>
-          </p:cxnSp>
-          <p:sp>
-            <p:nvSpPr>
-              <p:cNvPr id="8" name="TextBox 7">
-                <a:extLst>
-                  <a:ext uri="{FF2B5EF4-FFF2-40B4-BE49-F238E27FC236}">
-                    <a16:creationId xmlns:a16="http://schemas.microsoft.com/office/drawing/2014/main" id="{141C27E2-D7A4-5F48-644A-B5DB89090844}"/>
-                  </a:ext>
-                </a:extLst>
-              </p:cNvPr>
-              <p:cNvSpPr txBox="1"/>
-              <p:nvPr/>
-            </p:nvSpPr>
-            <p:spPr>
-              <a:xfrm>
-                <a:off x="2879313" y="2782204"/>
-                <a:ext cx="1172665" cy="307777"/>
-              </a:xfrm>
-              <a:prstGeom prst="rect">
-                <a:avLst/>
-              </a:prstGeom>
-              <a:noFill/>
-            </p:spPr>
-            <p:txBody>
-              <a:bodyPr wrap="square" rtlCol="0">
-                <a:spAutoFit/>
-              </a:bodyPr>
-              <a:lstStyle/>
-              <a:p>
-                <a:r>
-                  <a:rPr lang="en-US" sz="1400" dirty="0"/>
-                  <a:t>1-step TD</a:t>
-                </a:r>
-              </a:p>
-            </p:txBody>
-          </p:sp>
-          <p:sp>
-            <p:nvSpPr>
-              <p:cNvPr id="9" name="TextBox 8">
-                <a:extLst>
-                  <a:ext uri="{FF2B5EF4-FFF2-40B4-BE49-F238E27FC236}">
-                    <a16:creationId xmlns:a16="http://schemas.microsoft.com/office/drawing/2014/main" id="{183257FD-880A-AF81-88C4-FE4114583699}"/>
-                  </a:ext>
-                </a:extLst>
-              </p:cNvPr>
-              <p:cNvSpPr txBox="1"/>
-              <p:nvPr/>
-            </p:nvSpPr>
-            <p:spPr>
-              <a:xfrm>
-                <a:off x="7788687" y="2803144"/>
-                <a:ext cx="586333" cy="307777"/>
-              </a:xfrm>
-              <a:prstGeom prst="rect">
-                <a:avLst/>
-              </a:prstGeom>
-              <a:noFill/>
-            </p:spPr>
-            <p:txBody>
-              <a:bodyPr wrap="square" rtlCol="0">
-                <a:spAutoFit/>
-              </a:bodyPr>
-              <a:lstStyle/>
-              <a:p>
-                <a:r>
-                  <a:rPr lang="en-US" sz="1400" dirty="0"/>
-                  <a:t>MC</a:t>
-                </a:r>
-              </a:p>
-            </p:txBody>
-          </p:sp>
-        </p:grpSp>
-        <p:sp>
-          <p:nvSpPr>
-            <p:cNvPr id="11" name="TextBox 10">
-              <a:extLst>
-                <a:ext uri="{FF2B5EF4-FFF2-40B4-BE49-F238E27FC236}">
-                  <a16:creationId xmlns:a16="http://schemas.microsoft.com/office/drawing/2014/main" id="{222D92CF-821B-F68A-10A5-9F501334710E}"/>
-                </a:ext>
-              </a:extLst>
-            </p:cNvPr>
-            <p:cNvSpPr txBox="1"/>
-            <p:nvPr/>
-          </p:nvSpPr>
-          <p:spPr>
-            <a:xfrm>
-              <a:off x="5090858" y="3354274"/>
-              <a:ext cx="1172665" cy="307777"/>
-            </a:xfrm>
-            <a:prstGeom prst="rect">
-              <a:avLst/>
-            </a:prstGeom>
-            <a:noFill/>
-          </p:spPr>
-          <p:txBody>
-            <a:bodyPr wrap="square" rtlCol="0">
-              <a:spAutoFit/>
-            </a:bodyPr>
-            <a:lstStyle/>
-            <a:p>
-              <a:r>
-                <a:rPr lang="en-US" sz="1400" dirty="0"/>
-                <a:t>Spectrum</a:t>
-              </a:r>
-            </a:p>
-          </p:txBody>
-        </p:sp>
-      </p:grpSp>
-      <mc:AlternateContent xmlns:mc="http://schemas.openxmlformats.org/markup-compatibility/2006" xmlns:a14="http://schemas.microsoft.com/office/drawing/2010/main">
-        <mc:Choice Requires="a14">
+        </mc:Fallback>
+      </mc:AlternateContent>
+      <mc:AlternateContent xmlns:mc="http://schemas.openxmlformats.org/markup-compatibility/2006">
+        <mc:Choice xmlns:a14="http://schemas.microsoft.com/office/drawing/2010/main" Requires="a14">
           <p:sp>
             <p:nvSpPr>
               <p:cNvPr id="32" name="TextBox 31">
@@ -10491,7 +11700,7 @@
             </p:nvSpPr>
             <p:spPr>
               <a:xfrm>
-                <a:off x="982561" y="4626649"/>
+                <a:off x="900218" y="4415277"/>
                 <a:ext cx="6096698" cy="861774"/>
               </a:xfrm>
               <a:prstGeom prst="rect">
@@ -10554,7 +11763,7 @@
             </p:txBody>
           </p:sp>
         </mc:Choice>
-        <mc:Fallback xmlns="">
+        <mc:Fallback>
           <p:sp>
             <p:nvSpPr>
               <p:cNvPr id="32" name="TextBox 31">
@@ -10571,16 +11780,16 @@
             </p:nvSpPr>
             <p:spPr>
               <a:xfrm>
-                <a:off x="982561" y="4626649"/>
+                <a:off x="900218" y="4415277"/>
                 <a:ext cx="6096698" cy="861774"/>
               </a:xfrm>
               <a:prstGeom prst="rect">
                 <a:avLst/>
               </a:prstGeom>
               <a:blipFill>
-                <a:blip r:embed="rId5"/>
+                <a:blip r:embed="rId4"/>
                 <a:stretch>
-                  <a:fillRect t="-2128" b="-4965"/>
+                  <a:fillRect t="-2113" b="-4225"/>
                 </a:stretch>
               </a:blipFill>
             </p:spPr>
@@ -10654,7 +11863,7 @@
               <p:nvPr/>
             </p:nvPicPr>
             <p:blipFill>
-              <a:blip r:embed="rId6"/>
+              <a:blip r:embed="rId5"/>
               <a:stretch>
                 <a:fillRect/>
               </a:stretch>
@@ -10832,7 +12041,7 @@
                     <a:avLst/>
                   </a:prstGeom>
                   <a:blipFill>
-                    <a:blip r:embed="rId3"/>
+                    <a:blip r:embed="rId6"/>
                     <a:stretch>
                       <a:fillRect b="-8889"/>
                     </a:stretch>
@@ -10971,7 +12180,7 @@
                     <a:avLst/>
                   </a:prstGeom>
                   <a:blipFill>
-                    <a:blip r:embed="rId4"/>
+                    <a:blip r:embed="rId7"/>
                     <a:stretch>
                       <a:fillRect b="-8889"/>
                     </a:stretch>
@@ -11294,7 +12503,7 @@
                   </a:avLst>
                 </a:prstGeom>
                 <a:blipFill>
-                  <a:blip r:embed="rId7"/>
+                  <a:blip r:embed="rId8"/>
                   <a:stretch>
                     <a:fillRect b="-8989"/>
                   </a:stretch>
@@ -11316,6 +12525,343 @@
           </mc:Fallback>
         </mc:AlternateContent>
       </p:grpSp>
+      <p:grpSp>
+        <p:nvGrpSpPr>
+          <p:cNvPr id="15" name="Group 14">
+            <a:extLst>
+              <a:ext uri="{FF2B5EF4-FFF2-40B4-BE49-F238E27FC236}">
+                <a16:creationId xmlns:a16="http://schemas.microsoft.com/office/drawing/2014/main" id="{EB9E5956-B033-E66C-9244-F254E34930E3}"/>
+              </a:ext>
+            </a:extLst>
+          </p:cNvPr>
+          <p:cNvGrpSpPr/>
+          <p:nvPr/>
+        </p:nvGrpSpPr>
+        <p:grpSpPr>
+          <a:xfrm>
+            <a:off x="3084949" y="5522208"/>
+            <a:ext cx="5403210" cy="832369"/>
+            <a:chOff x="3245492" y="5722123"/>
+            <a:chExt cx="5403210" cy="832369"/>
+          </a:xfrm>
+        </p:grpSpPr>
+        <p:grpSp>
+          <p:nvGrpSpPr>
+            <p:cNvPr id="12" name="Group 11">
+              <a:extLst>
+                <a:ext uri="{FF2B5EF4-FFF2-40B4-BE49-F238E27FC236}">
+                  <a16:creationId xmlns:a16="http://schemas.microsoft.com/office/drawing/2014/main" id="{C25B38B9-8EEE-3230-C9A7-D1B5877AC90A}"/>
+                </a:ext>
+              </a:extLst>
+            </p:cNvPr>
+            <p:cNvGrpSpPr/>
+            <p:nvPr/>
+          </p:nvGrpSpPr>
+          <p:grpSpPr>
+            <a:xfrm>
+              <a:off x="3245492" y="5722123"/>
+              <a:ext cx="4870596" cy="666396"/>
+              <a:chOff x="2879313" y="2782204"/>
+              <a:chExt cx="5439985" cy="879847"/>
+            </a:xfrm>
+          </p:grpSpPr>
+          <p:grpSp>
+            <p:nvGrpSpPr>
+              <p:cNvPr id="10" name="Group 9">
+                <a:extLst>
+                  <a:ext uri="{FF2B5EF4-FFF2-40B4-BE49-F238E27FC236}">
+                    <a16:creationId xmlns:a16="http://schemas.microsoft.com/office/drawing/2014/main" id="{E7470490-29F2-50C7-075E-7377CEFC4DB5}"/>
+                  </a:ext>
+                </a:extLst>
+              </p:cNvPr>
+              <p:cNvGrpSpPr/>
+              <p:nvPr/>
+            </p:nvGrpSpPr>
+            <p:grpSpPr>
+              <a:xfrm>
+                <a:off x="2879313" y="2782204"/>
+                <a:ext cx="5439985" cy="631088"/>
+                <a:chOff x="2879313" y="2782204"/>
+                <a:chExt cx="5439985" cy="631088"/>
+              </a:xfrm>
+            </p:grpSpPr>
+            <p:sp>
+              <p:nvSpPr>
+                <p:cNvPr id="4" name="Oval 3">
+                  <a:extLst>
+                    <a:ext uri="{FF2B5EF4-FFF2-40B4-BE49-F238E27FC236}">
+                      <a16:creationId xmlns:a16="http://schemas.microsoft.com/office/drawing/2014/main" id="{B94B77C9-C9AA-6F5D-D56B-315043DD70EF}"/>
+                    </a:ext>
+                  </a:extLst>
+                </p:cNvPr>
+                <p:cNvSpPr/>
+                <p:nvPr/>
+              </p:nvSpPr>
+              <p:spPr>
+                <a:xfrm>
+                  <a:off x="3378394" y="3224828"/>
+                  <a:ext cx="174504" cy="188464"/>
+                </a:xfrm>
+                <a:prstGeom prst="ellipse">
+                  <a:avLst/>
+                </a:prstGeom>
+              </p:spPr>
+              <p:style>
+                <a:lnRef idx="2">
+                  <a:schemeClr val="accent1">
+                    <a:shade val="15000"/>
+                  </a:schemeClr>
+                </a:lnRef>
+                <a:fillRef idx="1">
+                  <a:schemeClr val="accent1"/>
+                </a:fillRef>
+                <a:effectRef idx="0">
+                  <a:schemeClr val="accent1"/>
+                </a:effectRef>
+                <a:fontRef idx="minor">
+                  <a:schemeClr val="lt1"/>
+                </a:fontRef>
+              </p:style>
+              <p:txBody>
+                <a:bodyPr rtlCol="0" anchor="ctr"/>
+                <a:lstStyle/>
+                <a:p>
+                  <a:pPr algn="ctr"/>
+                  <a:endParaRPr lang="en-US" sz="1400"/>
+                </a:p>
+              </p:txBody>
+            </p:sp>
+            <p:sp>
+              <p:nvSpPr>
+                <p:cNvPr id="5" name="Oval 4">
+                  <a:extLst>
+                    <a:ext uri="{FF2B5EF4-FFF2-40B4-BE49-F238E27FC236}">
+                      <a16:creationId xmlns:a16="http://schemas.microsoft.com/office/drawing/2014/main" id="{8EAB5D2C-C971-DEFC-52FE-D0987A0552AA}"/>
+                    </a:ext>
+                  </a:extLst>
+                </p:cNvPr>
+                <p:cNvSpPr/>
+                <p:nvPr/>
+              </p:nvSpPr>
+              <p:spPr>
+                <a:xfrm>
+                  <a:off x="7907350" y="3224828"/>
+                  <a:ext cx="174504" cy="188464"/>
+                </a:xfrm>
+                <a:prstGeom prst="ellipse">
+                  <a:avLst/>
+                </a:prstGeom>
+              </p:spPr>
+              <p:style>
+                <a:lnRef idx="2">
+                  <a:schemeClr val="accent1">
+                    <a:shade val="15000"/>
+                  </a:schemeClr>
+                </a:lnRef>
+                <a:fillRef idx="1">
+                  <a:schemeClr val="accent1"/>
+                </a:fillRef>
+                <a:effectRef idx="0">
+                  <a:schemeClr val="accent1"/>
+                </a:effectRef>
+                <a:fontRef idx="minor">
+                  <a:schemeClr val="lt1"/>
+                </a:fontRef>
+              </p:style>
+              <p:txBody>
+                <a:bodyPr rtlCol="0" anchor="ctr"/>
+                <a:lstStyle/>
+                <a:p>
+                  <a:pPr algn="ctr"/>
+                  <a:endParaRPr lang="en-US" sz="1400"/>
+                </a:p>
+              </p:txBody>
+            </p:sp>
+            <p:cxnSp>
+              <p:nvCxnSpPr>
+                <p:cNvPr id="7" name="Straight Arrow Connector 6">
+                  <a:extLst>
+                    <a:ext uri="{FF2B5EF4-FFF2-40B4-BE49-F238E27FC236}">
+                      <a16:creationId xmlns:a16="http://schemas.microsoft.com/office/drawing/2014/main" id="{0F54933B-23C4-19A8-0DB4-85CED3BAE1BB}"/>
+                    </a:ext>
+                  </a:extLst>
+                </p:cNvPr>
+                <p:cNvCxnSpPr/>
+                <p:nvPr/>
+              </p:nvCxnSpPr>
+              <p:spPr>
+                <a:xfrm>
+                  <a:off x="3664580" y="3319060"/>
+                  <a:ext cx="4132251" cy="0"/>
+                </a:xfrm>
+                <a:prstGeom prst="straightConnector1">
+                  <a:avLst/>
+                </a:prstGeom>
+                <a:ln w="57150">
+                  <a:headEnd type="triangle" w="med" len="med"/>
+                  <a:tailEnd type="triangle" w="med" len="med"/>
+                </a:ln>
+              </p:spPr>
+              <p:style>
+                <a:lnRef idx="2">
+                  <a:schemeClr val="accent1"/>
+                </a:lnRef>
+                <a:fillRef idx="0">
+                  <a:schemeClr val="accent1"/>
+                </a:fillRef>
+                <a:effectRef idx="1">
+                  <a:schemeClr val="accent1"/>
+                </a:effectRef>
+                <a:fontRef idx="minor">
+                  <a:schemeClr val="tx1"/>
+                </a:fontRef>
+              </p:style>
+            </p:cxnSp>
+            <p:sp>
+              <p:nvSpPr>
+                <p:cNvPr id="8" name="TextBox 7">
+                  <a:extLst>
+                    <a:ext uri="{FF2B5EF4-FFF2-40B4-BE49-F238E27FC236}">
+                      <a16:creationId xmlns:a16="http://schemas.microsoft.com/office/drawing/2014/main" id="{141C27E2-D7A4-5F48-644A-B5DB89090844}"/>
+                    </a:ext>
+                  </a:extLst>
+                </p:cNvPr>
+                <p:cNvSpPr txBox="1"/>
+                <p:nvPr/>
+              </p:nvSpPr>
+              <p:spPr>
+                <a:xfrm>
+                  <a:off x="2879313" y="2782204"/>
+                  <a:ext cx="1172665" cy="307777"/>
+                </a:xfrm>
+                <a:prstGeom prst="rect">
+                  <a:avLst/>
+                </a:prstGeom>
+                <a:noFill/>
+              </p:spPr>
+              <p:txBody>
+                <a:bodyPr wrap="square" rtlCol="0">
+                  <a:spAutoFit/>
+                </a:bodyPr>
+                <a:lstStyle/>
+                <a:p>
+                  <a:r>
+                    <a:rPr lang="en-US" sz="1400" dirty="0"/>
+                    <a:t>1-step TD</a:t>
+                  </a:r>
+                </a:p>
+              </p:txBody>
+            </p:sp>
+            <p:sp>
+              <p:nvSpPr>
+                <p:cNvPr id="9" name="TextBox 8">
+                  <a:extLst>
+                    <a:ext uri="{FF2B5EF4-FFF2-40B4-BE49-F238E27FC236}">
+                      <a16:creationId xmlns:a16="http://schemas.microsoft.com/office/drawing/2014/main" id="{183257FD-880A-AF81-88C4-FE4114583699}"/>
+                    </a:ext>
+                  </a:extLst>
+                </p:cNvPr>
+                <p:cNvSpPr txBox="1"/>
+                <p:nvPr/>
+              </p:nvSpPr>
+              <p:spPr>
+                <a:xfrm>
+                  <a:off x="7669904" y="2798160"/>
+                  <a:ext cx="649394" cy="406360"/>
+                </a:xfrm>
+                <a:prstGeom prst="rect">
+                  <a:avLst/>
+                </a:prstGeom>
+                <a:noFill/>
+              </p:spPr>
+              <p:txBody>
+                <a:bodyPr wrap="square" rtlCol="0">
+                  <a:spAutoFit/>
+                </a:bodyPr>
+                <a:lstStyle/>
+                <a:p>
+                  <a:pPr algn="ctr"/>
+                  <a:r>
+                    <a:rPr lang="en-US" sz="1400" dirty="0"/>
+                    <a:t>MC </a:t>
+                  </a:r>
+                </a:p>
+              </p:txBody>
+            </p:sp>
+          </p:grpSp>
+          <p:sp>
+            <p:nvSpPr>
+              <p:cNvPr id="11" name="TextBox 10">
+                <a:extLst>
+                  <a:ext uri="{FF2B5EF4-FFF2-40B4-BE49-F238E27FC236}">
+                    <a16:creationId xmlns:a16="http://schemas.microsoft.com/office/drawing/2014/main" id="{222D92CF-821B-F68A-10A5-9F501334710E}"/>
+                  </a:ext>
+                </a:extLst>
+              </p:cNvPr>
+              <p:cNvSpPr txBox="1"/>
+              <p:nvPr/>
+            </p:nvSpPr>
+            <p:spPr>
+              <a:xfrm>
+                <a:off x="5090858" y="3354274"/>
+                <a:ext cx="1172665" cy="307777"/>
+              </a:xfrm>
+              <a:prstGeom prst="rect">
+                <a:avLst/>
+              </a:prstGeom>
+              <a:noFill/>
+            </p:spPr>
+            <p:txBody>
+              <a:bodyPr wrap="square" rtlCol="0">
+                <a:spAutoFit/>
+              </a:bodyPr>
+              <a:lstStyle/>
+              <a:p>
+                <a:r>
+                  <a:rPr lang="en-US" sz="1400" dirty="0"/>
+                  <a:t>Spectrum</a:t>
+                </a:r>
+              </a:p>
+            </p:txBody>
+          </p:sp>
+        </p:grpSp>
+        <p:sp>
+          <p:nvSpPr>
+            <p:cNvPr id="14" name="TextBox 13">
+              <a:extLst>
+                <a:ext uri="{FF2B5EF4-FFF2-40B4-BE49-F238E27FC236}">
+                  <a16:creationId xmlns:a16="http://schemas.microsoft.com/office/drawing/2014/main" id="{578BFD95-D1AF-D3B0-1498-24CDC947051F}"/>
+                </a:ext>
+              </a:extLst>
+            </p:cNvPr>
+            <p:cNvSpPr txBox="1"/>
+            <p:nvPr/>
+          </p:nvSpPr>
+          <p:spPr>
+            <a:xfrm>
+              <a:off x="7079259" y="6246715"/>
+              <a:ext cx="1569443" cy="307777"/>
+            </a:xfrm>
+            <a:prstGeom prst="rect">
+              <a:avLst/>
+            </a:prstGeom>
+            <a:noFill/>
+          </p:spPr>
+          <p:txBody>
+            <a:bodyPr wrap="square">
+              <a:spAutoFit/>
+            </a:bodyPr>
+            <a:lstStyle/>
+            <a:p>
+              <a:pPr algn="ctr"/>
+              <a:r>
+                <a:rPr lang="en-US" sz="1400" dirty="0"/>
+                <a:t>(whole episode)</a:t>
+              </a:r>
+            </a:p>
+          </p:txBody>
+        </p:sp>
+      </p:grpSp>
     </p:spTree>
     <p:extLst>
       <p:ext uri="{BB962C8B-B14F-4D97-AF65-F5344CB8AC3E}">
@@ -11330,6 +12876,320 @@
 </file>
 
 <file path=ppt/slides/slide4.xml><?xml version="1.0" encoding="utf-8"?>
+<p:sld xmlns:a="http://schemas.openxmlformats.org/drawingml/2006/main" xmlns:r="http://schemas.openxmlformats.org/officeDocument/2006/relationships" xmlns:p="http://schemas.openxmlformats.org/presentationml/2006/main">
+  <p:cSld>
+    <p:spTree>
+      <p:nvGrpSpPr>
+        <p:cNvPr id="1" name=""/>
+        <p:cNvGrpSpPr/>
+        <p:nvPr/>
+      </p:nvGrpSpPr>
+      <p:grpSpPr>
+        <a:xfrm>
+          <a:off x="0" y="0"/>
+          <a:ext cx="0" cy="0"/>
+          <a:chOff x="0" y="0"/>
+          <a:chExt cx="0" cy="0"/>
+        </a:xfrm>
+      </p:grpSpPr>
+      <p:sp>
+        <p:nvSpPr>
+          <p:cNvPr id="2" name="Title 1">
+            <a:extLst>
+              <a:ext uri="{FF2B5EF4-FFF2-40B4-BE49-F238E27FC236}">
+                <a16:creationId xmlns:a16="http://schemas.microsoft.com/office/drawing/2014/main" id="{E8D581FB-75E1-939B-1734-9A3A5E7DA477}"/>
+              </a:ext>
+            </a:extLst>
+          </p:cNvPr>
+          <p:cNvSpPr>
+            <a:spLocks noGrp="1"/>
+          </p:cNvSpPr>
+          <p:nvPr>
+            <p:ph type="title"/>
+          </p:nvPr>
+        </p:nvSpPr>
+        <p:spPr/>
+        <p:txBody>
+          <a:bodyPr/>
+          <a:lstStyle/>
+          <a:p>
+            <a:r>
+              <a:rPr lang="en-US" dirty="0"/>
+              <a:t>Why is a Longer Look-ahead Useful?</a:t>
+            </a:r>
+          </a:p>
+        </p:txBody>
+      </p:sp>
+      <p:sp>
+        <p:nvSpPr>
+          <p:cNvPr id="16" name="Content Placeholder 15">
+            <a:extLst>
+              <a:ext uri="{FF2B5EF4-FFF2-40B4-BE49-F238E27FC236}">
+                <a16:creationId xmlns:a16="http://schemas.microsoft.com/office/drawing/2014/main" id="{443D5A25-1072-1AD7-D8D1-460CD5D84720}"/>
+              </a:ext>
+            </a:extLst>
+          </p:cNvPr>
+          <p:cNvSpPr>
+            <a:spLocks noGrp="1"/>
+          </p:cNvSpPr>
+          <p:nvPr>
+            <p:ph idx="1"/>
+          </p:nvPr>
+        </p:nvSpPr>
+        <p:spPr>
+          <a:xfrm>
+            <a:off x="838200" y="1397330"/>
+            <a:ext cx="10515600" cy="816099"/>
+          </a:xfrm>
+        </p:spPr>
+        <p:txBody>
+          <a:bodyPr>
+            <a:normAutofit lnSpcReduction="10000"/>
+          </a:bodyPr>
+          <a:lstStyle/>
+          <a:p>
+            <a:r>
+              <a:rPr lang="en-US" b="1" dirty="0"/>
+              <a:t>Example</a:t>
+            </a:r>
+            <a:r>
+              <a:rPr lang="en-US" dirty="0"/>
+              <a:t>: Maze with only one final reward for reaching the goal. We learn from the first episode.</a:t>
+            </a:r>
+          </a:p>
+        </p:txBody>
+      </p:sp>
+      <p:pic>
+        <p:nvPicPr>
+          <p:cNvPr id="4" name="Content Placeholder 4">
+            <a:extLst>
+              <a:ext uri="{FF2B5EF4-FFF2-40B4-BE49-F238E27FC236}">
+                <a16:creationId xmlns:a16="http://schemas.microsoft.com/office/drawing/2014/main" id="{F54C7612-C89E-C0DD-842F-9EC0D68D64C6}"/>
+              </a:ext>
+            </a:extLst>
+          </p:cNvPr>
+          <p:cNvPicPr>
+            <a:picLocks noChangeAspect="1"/>
+          </p:cNvPicPr>
+          <p:nvPr/>
+        </p:nvPicPr>
+        <p:blipFill>
+          <a:blip r:embed="rId2"/>
+          <a:srcRect l="5891" t="13698" r="5202" b="44797"/>
+          <a:stretch>
+            <a:fillRect/>
+          </a:stretch>
+        </p:blipFill>
+        <p:spPr>
+          <a:xfrm>
+            <a:off x="747486" y="2663371"/>
+            <a:ext cx="10530259" cy="2684236"/>
+          </a:xfrm>
+          <a:prstGeom prst="rect">
+            <a:avLst/>
+          </a:prstGeom>
+        </p:spPr>
+      </p:pic>
+      <p:sp>
+        <p:nvSpPr>
+          <p:cNvPr id="5" name="TextBox 4">
+            <a:extLst>
+              <a:ext uri="{FF2B5EF4-FFF2-40B4-BE49-F238E27FC236}">
+                <a16:creationId xmlns:a16="http://schemas.microsoft.com/office/drawing/2014/main" id="{A5C7086F-4FE3-4B76-D2E3-6ED4B79424DB}"/>
+              </a:ext>
+            </a:extLst>
+          </p:cNvPr>
+          <p:cNvSpPr txBox="1"/>
+          <p:nvPr/>
+        </p:nvSpPr>
+        <p:spPr>
+          <a:xfrm>
+            <a:off x="4846864" y="2343189"/>
+            <a:ext cx="2498272" cy="369332"/>
+          </a:xfrm>
+          <a:prstGeom prst="rect">
+            <a:avLst/>
+          </a:prstGeom>
+          <a:noFill/>
+        </p:spPr>
+        <p:txBody>
+          <a:bodyPr wrap="square" rtlCol="0">
+            <a:spAutoFit/>
+          </a:bodyPr>
+          <a:lstStyle/>
+          <a:p>
+            <a:pPr algn="ctr"/>
+            <a:r>
+              <a:rPr lang="en-US" dirty="0"/>
+              <a:t>1-step look ahead</a:t>
+            </a:r>
+          </a:p>
+        </p:txBody>
+      </p:sp>
+      <p:sp>
+        <p:nvSpPr>
+          <p:cNvPr id="6" name="TextBox 5">
+            <a:extLst>
+              <a:ext uri="{FF2B5EF4-FFF2-40B4-BE49-F238E27FC236}">
+                <a16:creationId xmlns:a16="http://schemas.microsoft.com/office/drawing/2014/main" id="{D1BAAE08-C8A0-AF74-313E-B5C800716589}"/>
+              </a:ext>
+            </a:extLst>
+          </p:cNvPr>
+          <p:cNvSpPr txBox="1"/>
+          <p:nvPr/>
+        </p:nvSpPr>
+        <p:spPr>
+          <a:xfrm>
+            <a:off x="8260541" y="2343189"/>
+            <a:ext cx="2498272" cy="369332"/>
+          </a:xfrm>
+          <a:prstGeom prst="rect">
+            <a:avLst/>
+          </a:prstGeom>
+          <a:noFill/>
+        </p:spPr>
+        <p:txBody>
+          <a:bodyPr wrap="square" rtlCol="0">
+            <a:spAutoFit/>
+          </a:bodyPr>
+          <a:lstStyle/>
+          <a:p>
+            <a:pPr algn="ctr"/>
+            <a:r>
+              <a:rPr lang="en-US" dirty="0"/>
+              <a:t>10-step look ahead</a:t>
+            </a:r>
+          </a:p>
+        </p:txBody>
+      </p:sp>
+      <p:sp>
+        <p:nvSpPr>
+          <p:cNvPr id="7" name="TextBox 6">
+            <a:extLst>
+              <a:ext uri="{FF2B5EF4-FFF2-40B4-BE49-F238E27FC236}">
+                <a16:creationId xmlns:a16="http://schemas.microsoft.com/office/drawing/2014/main" id="{E6CA45E4-C211-7029-512E-B626F9027F51}"/>
+              </a:ext>
+            </a:extLst>
+          </p:cNvPr>
+          <p:cNvSpPr txBox="1"/>
+          <p:nvPr/>
+        </p:nvSpPr>
+        <p:spPr>
+          <a:xfrm>
+            <a:off x="1283608" y="2318614"/>
+            <a:ext cx="2498272" cy="369332"/>
+          </a:xfrm>
+          <a:prstGeom prst="rect">
+            <a:avLst/>
+          </a:prstGeom>
+          <a:noFill/>
+        </p:spPr>
+        <p:txBody>
+          <a:bodyPr wrap="square" rtlCol="0">
+            <a:spAutoFit/>
+          </a:bodyPr>
+          <a:lstStyle/>
+          <a:p>
+            <a:pPr algn="ctr"/>
+            <a:r>
+              <a:rPr lang="en-US" dirty="0"/>
+              <a:t>Episode (MC)</a:t>
+            </a:r>
+          </a:p>
+        </p:txBody>
+      </p:sp>
+      <p:sp>
+        <p:nvSpPr>
+          <p:cNvPr id="15" name="TextBox 14">
+            <a:extLst>
+              <a:ext uri="{FF2B5EF4-FFF2-40B4-BE49-F238E27FC236}">
+                <a16:creationId xmlns:a16="http://schemas.microsoft.com/office/drawing/2014/main" id="{FA36E2F7-F8B8-2A59-9E25-A531E0CB5822}"/>
+              </a:ext>
+            </a:extLst>
+          </p:cNvPr>
+          <p:cNvSpPr txBox="1"/>
+          <p:nvPr/>
+        </p:nvSpPr>
+        <p:spPr>
+          <a:xfrm>
+            <a:off x="8157028" y="5298457"/>
+            <a:ext cx="3069772" cy="923330"/>
+          </a:xfrm>
+          <a:prstGeom prst="rect">
+            <a:avLst/>
+          </a:prstGeom>
+          <a:noFill/>
+        </p:spPr>
+        <p:txBody>
+          <a:bodyPr wrap="square" rtlCol="0">
+            <a:spAutoFit/>
+          </a:bodyPr>
+          <a:lstStyle/>
+          <a:p>
+            <a:pPr algn="ctr"/>
+            <a:r>
+              <a:rPr lang="en-US" dirty="0"/>
+              <a:t>Updates 10 state values with the goal reward. </a:t>
+            </a:r>
+            <a:br>
+              <a:rPr lang="en-US" dirty="0"/>
+            </a:br>
+            <a:r>
+              <a:rPr lang="en-US" dirty="0"/>
+              <a:t>Learns faster.</a:t>
+            </a:r>
+          </a:p>
+        </p:txBody>
+      </p:sp>
+      <p:sp>
+        <p:nvSpPr>
+          <p:cNvPr id="17" name="TextBox 16">
+            <a:extLst>
+              <a:ext uri="{FF2B5EF4-FFF2-40B4-BE49-F238E27FC236}">
+                <a16:creationId xmlns:a16="http://schemas.microsoft.com/office/drawing/2014/main" id="{994153B3-450A-085C-3C96-299EB57D1465}"/>
+              </a:ext>
+            </a:extLst>
+          </p:cNvPr>
+          <p:cNvSpPr txBox="1"/>
+          <p:nvPr/>
+        </p:nvSpPr>
+        <p:spPr>
+          <a:xfrm>
+            <a:off x="1185636" y="3888565"/>
+            <a:ext cx="195943" cy="369332"/>
+          </a:xfrm>
+          <a:prstGeom prst="rect">
+            <a:avLst/>
+          </a:prstGeom>
+          <a:noFill/>
+        </p:spPr>
+        <p:txBody>
+          <a:bodyPr wrap="square" rtlCol="0">
+            <a:spAutoFit/>
+          </a:bodyPr>
+          <a:lstStyle/>
+          <a:p>
+            <a:r>
+              <a:rPr lang="en-US" dirty="0"/>
+              <a:t>S</a:t>
+            </a:r>
+          </a:p>
+        </p:txBody>
+      </p:sp>
+    </p:spTree>
+    <p:extLst>
+      <p:ext uri="{BB962C8B-B14F-4D97-AF65-F5344CB8AC3E}">
+        <p14:creationId xmlns:p14="http://schemas.microsoft.com/office/powerpoint/2010/main" val="834641991"/>
+      </p:ext>
+    </p:extLst>
+  </p:cSld>
+  <p:clrMapOvr>
+    <a:masterClrMapping/>
+  </p:clrMapOvr>
+</p:sld>
+</file>
+
+<file path=ppt/slides/slide5.xml><?xml version="1.0" encoding="utf-8"?>
 <p:sld xmlns:a="http://schemas.openxmlformats.org/drawingml/2006/main" xmlns:r="http://schemas.openxmlformats.org/officeDocument/2006/relationships" xmlns:p="http://schemas.openxmlformats.org/presentationml/2006/main">
   <p:cSld>
     <p:spTree>
@@ -11456,7 +13316,7 @@
           <a:p>
             <a:r>
               <a:rPr lang="en-US" dirty="0"/>
-              <a:t>Predict V-values for a given policy. </a:t>
+              <a:t>Estimate the value function for a given policy. </a:t>
             </a:r>
           </a:p>
         </p:txBody>
@@ -11474,7 +13334,7 @@
 </p:sld>
 </file>
 
-<file path=ppt/slides/slide5.xml><?xml version="1.0" encoding="utf-8"?>
+<file path=ppt/slides/slide6.xml><?xml version="1.0" encoding="utf-8"?>
 <p:sld xmlns:a="http://schemas.openxmlformats.org/drawingml/2006/main" xmlns:r="http://schemas.openxmlformats.org/officeDocument/2006/relationships" xmlns:p="http://schemas.openxmlformats.org/presentationml/2006/main">
   <p:cSld>
     <p:spTree>
@@ -14083,7 +15943,7 @@
 </p:sld>
 </file>
 
-<file path=ppt/slides/slide6.xml><?xml version="1.0" encoding="utf-8"?>
+<file path=ppt/slides/slide7.xml><?xml version="1.0" encoding="utf-8"?>
 <p:sld xmlns:a="http://schemas.openxmlformats.org/drawingml/2006/main" xmlns:r="http://schemas.openxmlformats.org/officeDocument/2006/relationships" xmlns:p="http://schemas.openxmlformats.org/presentationml/2006/main">
   <p:cSld>
     <p:spTree>
@@ -14550,7 +16410,7 @@
 </p:sld>
 </file>
 
-<file path=ppt/slides/slide7.xml><?xml version="1.0" encoding="utf-8"?>
+<file path=ppt/slides/slide8.xml><?xml version="1.0" encoding="utf-8"?>
 <p:sld xmlns:a="http://schemas.openxmlformats.org/drawingml/2006/main" xmlns:r="http://schemas.openxmlformats.org/officeDocument/2006/relationships" xmlns:p="http://schemas.openxmlformats.org/presentationml/2006/main">
   <p:cSld>
     <p:spTree>
@@ -15406,7 +17266,7 @@
 </p:sld>
 </file>
 
-<file path=ppt/slides/slide8.xml><?xml version="1.0" encoding="utf-8"?>
+<file path=ppt/slides/slide9.xml><?xml version="1.0" encoding="utf-8"?>
 <p:sld xmlns:a="http://schemas.openxmlformats.org/drawingml/2006/main" xmlns:r="http://schemas.openxmlformats.org/officeDocument/2006/relationships" xmlns:p="http://schemas.openxmlformats.org/presentationml/2006/main">
   <p:cSld>
     <p:spTree>
@@ -15536,1063 +17396,6 @@
     <p:extLst>
       <p:ext uri="{BB962C8B-B14F-4D97-AF65-F5344CB8AC3E}">
         <p14:creationId xmlns:p14="http://schemas.microsoft.com/office/powerpoint/2010/main" val="1836351049"/>
-      </p:ext>
-    </p:extLst>
-  </p:cSld>
-  <p:clrMapOvr>
-    <a:masterClrMapping/>
-  </p:clrMapOvr>
-</p:sld>
-</file>
-
-<file path=ppt/slides/slide9.xml><?xml version="1.0" encoding="utf-8"?>
-<p:sld xmlns:a="http://schemas.openxmlformats.org/drawingml/2006/main" xmlns:r="http://schemas.openxmlformats.org/officeDocument/2006/relationships" xmlns:p="http://schemas.openxmlformats.org/presentationml/2006/main">
-  <p:cSld>
-    <p:spTree>
-      <p:nvGrpSpPr>
-        <p:cNvPr id="1" name=""/>
-        <p:cNvGrpSpPr/>
-        <p:nvPr/>
-      </p:nvGrpSpPr>
-      <p:grpSpPr>
-        <a:xfrm>
-          <a:off x="0" y="0"/>
-          <a:ext cx="0" cy="0"/>
-          <a:chOff x="0" y="0"/>
-          <a:chExt cx="0" cy="0"/>
-        </a:xfrm>
-      </p:grpSpPr>
-      <mc:AlternateContent xmlns:mc="http://schemas.openxmlformats.org/markup-compatibility/2006" xmlns:a14="http://schemas.microsoft.com/office/drawing/2010/main">
-        <mc:Choice Requires="a14">
-          <p:sp>
-            <p:nvSpPr>
-              <p:cNvPr id="2" name="Title 1">
-                <a:extLst>
-                  <a:ext uri="{FF2B5EF4-FFF2-40B4-BE49-F238E27FC236}">
-                    <a16:creationId xmlns:a16="http://schemas.microsoft.com/office/drawing/2014/main" id="{2FF0FE0E-E041-84BE-0F39-AE6BA8D28743}"/>
-                  </a:ext>
-                </a:extLst>
-              </p:cNvPr>
-              <p:cNvSpPr>
-                <a:spLocks noGrp="1"/>
-              </p:cNvSpPr>
-              <p:nvPr>
-                <p:ph type="title"/>
-              </p:nvPr>
-            </p:nvSpPr>
-            <p:spPr/>
-            <p:txBody>
-              <a:bodyPr/>
-              <a:lstStyle/>
-              <a:p>
-                <a14:m>
-                  <m:oMath xmlns:m="http://schemas.openxmlformats.org/officeDocument/2006/math">
-                    <m:r>
-                      <a:rPr lang="en-US" i="1" dirty="0">
-                        <a:latin typeface="Cambria Math" panose="02040503050406030204" pitchFamily="18" charset="0"/>
-                      </a:rPr>
-                      <m:t>𝑛</m:t>
-                    </m:r>
-                  </m:oMath>
-                </a14:m>
-                <a:r>
-                  <a:rPr lang="en-US" dirty="0"/>
-                  <a:t>-step Sarsa</a:t>
-                </a:r>
-              </a:p>
-            </p:txBody>
-          </p:sp>
-        </mc:Choice>
-        <mc:Fallback xmlns="">
-          <p:sp>
-            <p:nvSpPr>
-              <p:cNvPr id="2" name="Title 1">
-                <a:extLst>
-                  <a:ext uri="{FF2B5EF4-FFF2-40B4-BE49-F238E27FC236}">
-                    <a16:creationId xmlns:a16="http://schemas.microsoft.com/office/drawing/2014/main" id="{2FF0FE0E-E041-84BE-0F39-AE6BA8D28743}"/>
-                  </a:ext>
-                </a:extLst>
-              </p:cNvPr>
-              <p:cNvSpPr>
-                <a:spLocks noGrp="1" noRot="1" noChangeAspect="1" noMove="1" noResize="1" noEditPoints="1" noAdjustHandles="1" noChangeArrowheads="1" noChangeShapeType="1" noTextEdit="1"/>
-              </p:cNvSpPr>
-              <p:nvPr>
-                <p:ph type="title"/>
-              </p:nvPr>
-            </p:nvSpPr>
-            <p:spPr>
-              <a:blipFill>
-                <a:blip r:embed="rId2"/>
-                <a:stretch>
-                  <a:fillRect t="-20161" b="-35484"/>
-                </a:stretch>
-              </a:blipFill>
-            </p:spPr>
-            <p:txBody>
-              <a:bodyPr/>
-              <a:lstStyle/>
-              <a:p>
-                <a:r>
-                  <a:rPr lang="en-US">
-                    <a:noFill/>
-                  </a:rPr>
-                  <a:t> </a:t>
-                </a:r>
-              </a:p>
-            </p:txBody>
-          </p:sp>
-        </mc:Fallback>
-      </mc:AlternateContent>
-      <mc:AlternateContent xmlns:mc="http://schemas.openxmlformats.org/markup-compatibility/2006" xmlns:a14="http://schemas.microsoft.com/office/drawing/2010/main">
-        <mc:Choice Requires="a14">
-          <p:sp>
-            <p:nvSpPr>
-              <p:cNvPr id="3" name="Content Placeholder 2">
-                <a:extLst>
-                  <a:ext uri="{FF2B5EF4-FFF2-40B4-BE49-F238E27FC236}">
-                    <a16:creationId xmlns:a16="http://schemas.microsoft.com/office/drawing/2014/main" id="{9B66D976-5489-1CA0-FBD4-D8ED85B16899}"/>
-                  </a:ext>
-                </a:extLst>
-              </p:cNvPr>
-              <p:cNvSpPr>
-                <a:spLocks noGrp="1"/>
-              </p:cNvSpPr>
-              <p:nvPr>
-                <p:ph idx="1"/>
-              </p:nvPr>
-            </p:nvSpPr>
-            <p:spPr/>
-            <p:txBody>
-              <a:bodyPr>
-                <a:normAutofit fontScale="92500"/>
-              </a:bodyPr>
-              <a:lstStyle/>
-              <a:p>
-                <a:r>
-                  <a:rPr lang="en-US" dirty="0"/>
-                  <a:t>Original Sarsa is called one-step Sarsa or Sarsa(0)</a:t>
-                </a:r>
-              </a:p>
-              <a:p>
-                <a:endParaRPr lang="en-US" dirty="0"/>
-              </a:p>
-              <a:p>
-                <a:pPr marL="0" indent="0">
-                  <a:buNone/>
-                </a:pPr>
-                <a14:m>
-                  <m:oMath xmlns:m="http://schemas.openxmlformats.org/officeDocument/2006/math">
-                    <m:r>
-                      <a:rPr lang="en-US" b="1" i="1" dirty="0">
-                        <a:latin typeface="Cambria Math" panose="02040503050406030204" pitchFamily="18" charset="0"/>
-                      </a:rPr>
-                      <m:t>𝒏</m:t>
-                    </m:r>
-                  </m:oMath>
-                </a14:m>
-                <a:r>
-                  <a:rPr lang="en-US" b="1" dirty="0"/>
-                  <a:t>-step Sarsa</a:t>
-                </a:r>
-              </a:p>
-              <a:p>
-                <a:pPr lvl="1"/>
-                <a:r>
-                  <a:rPr lang="en-US" dirty="0"/>
-                  <a:t>On policy</a:t>
-                </a:r>
-              </a:p>
-              <a:p>
-                <a:pPr lvl="1"/>
-                <a:r>
-                  <a:rPr lang="en-US" dirty="0"/>
-                  <a:t>Remember: The policy needs to keep exploring so we learn an </a:t>
-                </a:r>
-                <a14:m>
-                  <m:oMath xmlns:m="http://schemas.openxmlformats.org/officeDocument/2006/math">
-                    <m:r>
-                      <a:rPr lang="en-US" i="1">
-                        <a:latin typeface="Cambria Math" panose="02040503050406030204" pitchFamily="18" charset="0"/>
-                      </a:rPr>
-                      <m:t>𝜖</m:t>
-                    </m:r>
-                  </m:oMath>
-                </a14:m>
-                <a:r>
-                  <a:rPr lang="en-US" dirty="0"/>
-                  <a:t>-greedy policy</a:t>
-                </a:r>
-              </a:p>
-              <a:p>
-                <a:pPr lvl="1"/>
-                <a:r>
-                  <a:rPr lang="en-US" dirty="0"/>
-                  <a:t>Use state-action pairs and learns </a:t>
-                </a:r>
-                <a14:m>
-                  <m:oMath xmlns:m="http://schemas.openxmlformats.org/officeDocument/2006/math">
-                    <m:r>
-                      <a:rPr lang="en-US" i="1" dirty="0" smtClean="0">
-                        <a:latin typeface="Cambria Math" panose="02040503050406030204" pitchFamily="18" charset="0"/>
-                      </a:rPr>
-                      <m:t>𝑄</m:t>
-                    </m:r>
-                  </m:oMath>
-                </a14:m>
-                <a:r>
-                  <a:rPr lang="en-US" dirty="0"/>
-                  <a:t> so we can find the </a:t>
-                </a:r>
-                <a14:m>
-                  <m:oMath xmlns:m="http://schemas.openxmlformats.org/officeDocument/2006/math">
-                    <m:r>
-                      <a:rPr lang="en-US" i="1">
-                        <a:latin typeface="Cambria Math" panose="02040503050406030204" pitchFamily="18" charset="0"/>
-                      </a:rPr>
-                      <m:t>𝜖</m:t>
-                    </m:r>
-                  </m:oMath>
-                </a14:m>
-                <a:r>
-                  <a:rPr lang="en-US" dirty="0"/>
-                  <a:t>-greedy policy</a:t>
-                </a:r>
-              </a:p>
-              <a:p>
-                <a:pPr marL="457200" lvl="1" indent="0">
-                  <a:buNone/>
-                </a:pPr>
-                <a:endParaRPr lang="en-US" dirty="0"/>
-              </a:p>
-              <a:p>
-                <a:r>
-                  <a:rPr lang="en-US" dirty="0"/>
-                  <a:t>Return (redefined using </a:t>
-                </a:r>
-                <a14:m>
-                  <m:oMath xmlns:m="http://schemas.openxmlformats.org/officeDocument/2006/math">
-                    <m:r>
-                      <a:rPr lang="en-US" i="1" dirty="0" smtClean="0">
-                        <a:latin typeface="Cambria Math" panose="02040503050406030204" pitchFamily="18" charset="0"/>
-                      </a:rPr>
-                      <m:t>𝑄</m:t>
-                    </m:r>
-                  </m:oMath>
-                </a14:m>
-                <a:r>
-                  <a:rPr lang="en-US" dirty="0"/>
-                  <a:t>):</a:t>
-                </a:r>
-              </a:p>
-              <a:p>
-                <a:pPr marL="0" indent="0">
-                  <a:buNone/>
-                </a:pPr>
-                <a14:m>
-                  <m:oMathPara xmlns:m="http://schemas.openxmlformats.org/officeDocument/2006/math">
-                    <m:oMathParaPr>
-                      <m:jc m:val="centerGroup"/>
-                    </m:oMathParaPr>
-                    <m:oMath xmlns:m="http://schemas.openxmlformats.org/officeDocument/2006/math">
-                      <m:sSub>
-                        <m:sSubPr>
-                          <m:ctrlPr>
-                            <a:rPr lang="en-US" i="1">
-                              <a:latin typeface="Cambria Math" panose="02040503050406030204" pitchFamily="18" charset="0"/>
-                            </a:rPr>
-                          </m:ctrlPr>
-                        </m:sSubPr>
-                        <m:e>
-                          <m:r>
-                            <a:rPr lang="en-US" i="1">
-                              <a:latin typeface="Cambria Math" panose="02040503050406030204" pitchFamily="18" charset="0"/>
-                            </a:rPr>
-                            <m:t>𝐺</m:t>
-                          </m:r>
-                        </m:e>
-                        <m:sub>
-                          <m:r>
-                            <a:rPr lang="en-US" i="1">
-                              <a:latin typeface="Cambria Math" panose="02040503050406030204" pitchFamily="18" charset="0"/>
-                            </a:rPr>
-                            <m:t>𝑡</m:t>
-                          </m:r>
-                          <m:r>
-                            <a:rPr lang="en-US" i="1">
-                              <a:latin typeface="Cambria Math" panose="02040503050406030204" pitchFamily="18" charset="0"/>
-                            </a:rPr>
-                            <m:t>:</m:t>
-                          </m:r>
-                          <m:r>
-                            <a:rPr lang="en-US" i="1">
-                              <a:latin typeface="Cambria Math" panose="02040503050406030204" pitchFamily="18" charset="0"/>
-                            </a:rPr>
-                            <m:t>𝑡</m:t>
-                          </m:r>
-                          <m:r>
-                            <a:rPr lang="en-US" i="1">
-                              <a:latin typeface="Cambria Math" panose="02040503050406030204" pitchFamily="18" charset="0"/>
-                            </a:rPr>
-                            <m:t>+</m:t>
-                          </m:r>
-                          <m:r>
-                            <a:rPr lang="en-US" i="1">
-                              <a:latin typeface="Cambria Math" panose="02040503050406030204" pitchFamily="18" charset="0"/>
-                            </a:rPr>
-                            <m:t>𝑛</m:t>
-                          </m:r>
-                        </m:sub>
-                      </m:sSub>
-                      <m:r>
-                        <a:rPr lang="en-US" i="1">
-                          <a:latin typeface="Cambria Math" panose="02040503050406030204" pitchFamily="18" charset="0"/>
-                        </a:rPr>
-                        <m:t>=</m:t>
-                      </m:r>
-                      <m:sSub>
-                        <m:sSubPr>
-                          <m:ctrlPr>
-                            <a:rPr lang="en-US" i="1">
-                              <a:latin typeface="Cambria Math" panose="02040503050406030204" pitchFamily="18" charset="0"/>
-                            </a:rPr>
-                          </m:ctrlPr>
-                        </m:sSubPr>
-                        <m:e>
-                          <m:r>
-                            <a:rPr lang="en-US" i="1">
-                              <a:latin typeface="Cambria Math" panose="02040503050406030204" pitchFamily="18" charset="0"/>
-                            </a:rPr>
-                            <m:t>𝑅</m:t>
-                          </m:r>
-                        </m:e>
-                        <m:sub>
-                          <m:r>
-                            <a:rPr lang="en-US" i="1">
-                              <a:latin typeface="Cambria Math" panose="02040503050406030204" pitchFamily="18" charset="0"/>
-                            </a:rPr>
-                            <m:t>𝑡</m:t>
-                          </m:r>
-                          <m:r>
-                            <a:rPr lang="en-US" i="1">
-                              <a:latin typeface="Cambria Math" panose="02040503050406030204" pitchFamily="18" charset="0"/>
-                            </a:rPr>
-                            <m:t>+1</m:t>
-                          </m:r>
-                        </m:sub>
-                      </m:sSub>
-                      <m:r>
-                        <a:rPr lang="en-US" i="1">
-                          <a:latin typeface="Cambria Math" panose="02040503050406030204" pitchFamily="18" charset="0"/>
-                        </a:rPr>
-                        <m:t>+</m:t>
-                      </m:r>
-                      <m:r>
-                        <a:rPr lang="en-US" i="1">
-                          <a:latin typeface="Cambria Math" panose="02040503050406030204" pitchFamily="18" charset="0"/>
-                        </a:rPr>
-                        <m:t>𝛾</m:t>
-                      </m:r>
-                      <m:sSub>
-                        <m:sSubPr>
-                          <m:ctrlPr>
-                            <a:rPr lang="en-US" i="1">
-                              <a:latin typeface="Cambria Math" panose="02040503050406030204" pitchFamily="18" charset="0"/>
-                            </a:rPr>
-                          </m:ctrlPr>
-                        </m:sSubPr>
-                        <m:e>
-                          <m:sSub>
-                            <m:sSubPr>
-                              <m:ctrlPr>
-                                <a:rPr lang="en-US" i="1">
-                                  <a:latin typeface="Cambria Math" panose="02040503050406030204" pitchFamily="18" charset="0"/>
-                                </a:rPr>
-                              </m:ctrlPr>
-                            </m:sSubPr>
-                            <m:e>
-                              <m:r>
-                                <a:rPr lang="en-US" i="1">
-                                  <a:latin typeface="Cambria Math" panose="02040503050406030204" pitchFamily="18" charset="0"/>
-                                </a:rPr>
-                                <m:t>𝑅</m:t>
-                              </m:r>
-                            </m:e>
-                            <m:sub>
-                              <m:r>
-                                <a:rPr lang="en-US" i="1">
-                                  <a:latin typeface="Cambria Math" panose="02040503050406030204" pitchFamily="18" charset="0"/>
-                                </a:rPr>
-                                <m:t>𝑡</m:t>
-                              </m:r>
-                              <m:r>
-                                <a:rPr lang="en-US" i="1">
-                                  <a:latin typeface="Cambria Math" panose="02040503050406030204" pitchFamily="18" charset="0"/>
-                                </a:rPr>
-                                <m:t>+2</m:t>
-                              </m:r>
-                            </m:sub>
-                          </m:sSub>
-                          <m:r>
-                            <a:rPr lang="en-US" i="1">
-                              <a:latin typeface="Cambria Math" panose="02040503050406030204" pitchFamily="18" charset="0"/>
-                            </a:rPr>
-                            <m:t>+…+</m:t>
-                          </m:r>
-                          <m:sSup>
-                            <m:sSupPr>
-                              <m:ctrlPr>
-                                <a:rPr lang="en-US" i="1">
-                                  <a:latin typeface="Cambria Math" panose="02040503050406030204" pitchFamily="18" charset="0"/>
-                                </a:rPr>
-                              </m:ctrlPr>
-                            </m:sSupPr>
-                            <m:e>
-                              <m:r>
-                                <a:rPr lang="en-US" i="1">
-                                  <a:latin typeface="Cambria Math" panose="02040503050406030204" pitchFamily="18" charset="0"/>
-                                </a:rPr>
-                                <m:t>𝛾</m:t>
-                              </m:r>
-                            </m:e>
-                            <m:sup>
-                              <m:r>
-                                <a:rPr lang="en-US" i="1">
-                                  <a:latin typeface="Cambria Math" panose="02040503050406030204" pitchFamily="18" charset="0"/>
-                                </a:rPr>
-                                <m:t>𝑛</m:t>
-                              </m:r>
-                              <m:r>
-                                <a:rPr lang="en-US" i="1">
-                                  <a:latin typeface="Cambria Math" panose="02040503050406030204" pitchFamily="18" charset="0"/>
-                                </a:rPr>
-                                <m:t>−1</m:t>
-                              </m:r>
-                            </m:sup>
-                          </m:sSup>
-                          <m:sSub>
-                            <m:sSubPr>
-                              <m:ctrlPr>
-                                <a:rPr lang="en-US" i="1">
-                                  <a:latin typeface="Cambria Math" panose="02040503050406030204" pitchFamily="18" charset="0"/>
-                                </a:rPr>
-                              </m:ctrlPr>
-                            </m:sSubPr>
-                            <m:e>
-                              <m:r>
-                                <a:rPr lang="en-US" i="1">
-                                  <a:latin typeface="Cambria Math" panose="02040503050406030204" pitchFamily="18" charset="0"/>
-                                </a:rPr>
-                                <m:t>𝑅</m:t>
-                              </m:r>
-                            </m:e>
-                            <m:sub>
-                              <m:r>
-                                <a:rPr lang="en-US" i="1">
-                                  <a:latin typeface="Cambria Math" panose="02040503050406030204" pitchFamily="18" charset="0"/>
-                                </a:rPr>
-                                <m:t>𝑡</m:t>
-                              </m:r>
-                              <m:r>
-                                <a:rPr lang="en-US" i="1">
-                                  <a:latin typeface="Cambria Math" panose="02040503050406030204" pitchFamily="18" charset="0"/>
-                                </a:rPr>
-                                <m:t>+</m:t>
-                              </m:r>
-                              <m:r>
-                                <a:rPr lang="en-US" i="1">
-                                  <a:latin typeface="Cambria Math" panose="02040503050406030204" pitchFamily="18" charset="0"/>
-                                </a:rPr>
-                                <m:t>𝑛</m:t>
-                              </m:r>
-                            </m:sub>
-                          </m:sSub>
-                          <m:r>
-                            <a:rPr lang="en-US" i="1">
-                              <a:latin typeface="Cambria Math" panose="02040503050406030204" pitchFamily="18" charset="0"/>
-                            </a:rPr>
-                            <m:t>+</m:t>
-                          </m:r>
-                          <m:sSup>
-                            <m:sSupPr>
-                              <m:ctrlPr>
-                                <a:rPr lang="en-US" i="1">
-                                  <a:latin typeface="Cambria Math" panose="02040503050406030204" pitchFamily="18" charset="0"/>
-                                </a:rPr>
-                              </m:ctrlPr>
-                            </m:sSupPr>
-                            <m:e>
-                              <m:r>
-                                <a:rPr lang="en-US" i="1">
-                                  <a:latin typeface="Cambria Math" panose="02040503050406030204" pitchFamily="18" charset="0"/>
-                                </a:rPr>
-                                <m:t>𝛾</m:t>
-                              </m:r>
-                            </m:e>
-                            <m:sup>
-                              <m:r>
-                                <a:rPr lang="en-US" i="1">
-                                  <a:latin typeface="Cambria Math" panose="02040503050406030204" pitchFamily="18" charset="0"/>
-                                </a:rPr>
-                                <m:t>𝑛</m:t>
-                              </m:r>
-                            </m:sup>
-                          </m:sSup>
-                          <m:r>
-                            <a:rPr lang="en-US" b="0" i="1" smtClean="0">
-                              <a:latin typeface="Cambria Math" panose="02040503050406030204" pitchFamily="18" charset="0"/>
-                            </a:rPr>
-                            <m:t>𝑄</m:t>
-                          </m:r>
-                        </m:e>
-                        <m:sub>
-                          <m:r>
-                            <a:rPr lang="en-US" i="1">
-                              <a:latin typeface="Cambria Math" panose="02040503050406030204" pitchFamily="18" charset="0"/>
-                            </a:rPr>
-                            <m:t>𝑡</m:t>
-                          </m:r>
-                          <m:r>
-                            <a:rPr lang="en-US" i="1">
-                              <a:latin typeface="Cambria Math" panose="02040503050406030204" pitchFamily="18" charset="0"/>
-                            </a:rPr>
-                            <m:t>+</m:t>
-                          </m:r>
-                          <m:r>
-                            <a:rPr lang="en-US" i="1">
-                              <a:latin typeface="Cambria Math" panose="02040503050406030204" pitchFamily="18" charset="0"/>
-                            </a:rPr>
-                            <m:t>𝑛</m:t>
-                          </m:r>
-                          <m:r>
-                            <a:rPr lang="en-US" i="1">
-                              <a:latin typeface="Cambria Math" panose="02040503050406030204" pitchFamily="18" charset="0"/>
-                            </a:rPr>
-                            <m:t>−1</m:t>
-                          </m:r>
-                        </m:sub>
-                      </m:sSub>
-                      <m:d>
-                        <m:dPr>
-                          <m:ctrlPr>
-                            <a:rPr lang="en-US" i="1">
-                              <a:latin typeface="Cambria Math" panose="02040503050406030204" pitchFamily="18" charset="0"/>
-                            </a:rPr>
-                          </m:ctrlPr>
-                        </m:dPr>
-                        <m:e>
-                          <m:sSub>
-                            <m:sSubPr>
-                              <m:ctrlPr>
-                                <a:rPr lang="en-US" i="1">
-                                  <a:latin typeface="Cambria Math" panose="02040503050406030204" pitchFamily="18" charset="0"/>
-                                </a:rPr>
-                              </m:ctrlPr>
-                            </m:sSubPr>
-                            <m:e>
-                              <m:r>
-                                <a:rPr lang="en-US" i="1">
-                                  <a:latin typeface="Cambria Math" panose="02040503050406030204" pitchFamily="18" charset="0"/>
-                                </a:rPr>
-                                <m:t>𝑆</m:t>
-                              </m:r>
-                            </m:e>
-                            <m:sub>
-                              <m:r>
-                                <a:rPr lang="en-US" i="1">
-                                  <a:latin typeface="Cambria Math" panose="02040503050406030204" pitchFamily="18" charset="0"/>
-                                </a:rPr>
-                                <m:t>𝑡</m:t>
-                              </m:r>
-                              <m:r>
-                                <a:rPr lang="en-US" i="1">
-                                  <a:latin typeface="Cambria Math" panose="02040503050406030204" pitchFamily="18" charset="0"/>
-                                </a:rPr>
-                                <m:t>+</m:t>
-                              </m:r>
-                              <m:r>
-                                <a:rPr lang="en-US" i="1">
-                                  <a:latin typeface="Cambria Math" panose="02040503050406030204" pitchFamily="18" charset="0"/>
-                                </a:rPr>
-                                <m:t>𝑛</m:t>
-                              </m:r>
-                            </m:sub>
-                          </m:sSub>
-                          <m:r>
-                            <a:rPr lang="en-US" b="0" i="1" smtClean="0">
-                              <a:latin typeface="Cambria Math" panose="02040503050406030204" pitchFamily="18" charset="0"/>
-                            </a:rPr>
-                            <m:t>,</m:t>
-                          </m:r>
-                          <m:sSub>
-                            <m:sSubPr>
-                              <m:ctrlPr>
-                                <a:rPr lang="en-US" b="0" i="1" smtClean="0">
-                                  <a:latin typeface="Cambria Math" panose="02040503050406030204" pitchFamily="18" charset="0"/>
-                                </a:rPr>
-                              </m:ctrlPr>
-                            </m:sSubPr>
-                            <m:e>
-                              <m:r>
-                                <a:rPr lang="en-US" b="0" i="1" smtClean="0">
-                                  <a:latin typeface="Cambria Math" panose="02040503050406030204" pitchFamily="18" charset="0"/>
-                                </a:rPr>
-                                <m:t>𝐴</m:t>
-                              </m:r>
-                            </m:e>
-                            <m:sub>
-                              <m:r>
-                                <a:rPr lang="en-US" b="0" i="1" smtClean="0">
-                                  <a:latin typeface="Cambria Math" panose="02040503050406030204" pitchFamily="18" charset="0"/>
-                                </a:rPr>
-                                <m:t>𝑡</m:t>
-                              </m:r>
-                              <m:r>
-                                <a:rPr lang="en-US" b="0" i="1" smtClean="0">
-                                  <a:latin typeface="Cambria Math" panose="02040503050406030204" pitchFamily="18" charset="0"/>
-                                </a:rPr>
-                                <m:t>+</m:t>
-                              </m:r>
-                              <m:r>
-                                <a:rPr lang="en-US" b="0" i="1" smtClean="0">
-                                  <a:latin typeface="Cambria Math" panose="02040503050406030204" pitchFamily="18" charset="0"/>
-                                </a:rPr>
-                                <m:t>𝑛</m:t>
-                              </m:r>
-                            </m:sub>
-                          </m:sSub>
-                        </m:e>
-                      </m:d>
-                    </m:oMath>
-                  </m:oMathPara>
-                </a14:m>
-                <a:endParaRPr lang="en-US" dirty="0"/>
-              </a:p>
-              <a:p>
-                <a:r>
-                  <a:rPr lang="en-US" dirty="0"/>
-                  <a:t>Update rule:</a:t>
-                </a:r>
-                <a:endParaRPr lang="en-US" baseline="-25000" dirty="0"/>
-              </a:p>
-              <a:p>
-                <a:pPr marL="0" indent="0">
-                  <a:buNone/>
-                </a:pPr>
-                <a14:m>
-                  <m:oMathPara xmlns:m="http://schemas.openxmlformats.org/officeDocument/2006/math">
-                    <m:oMathParaPr>
-                      <m:jc m:val="centerGroup"/>
-                    </m:oMathParaPr>
-                    <m:oMath xmlns:m="http://schemas.openxmlformats.org/officeDocument/2006/math">
-                      <m:r>
-                        <a:rPr lang="en-US" b="0" i="1" smtClean="0">
-                          <a:latin typeface="Cambria Math" panose="02040503050406030204" pitchFamily="18" charset="0"/>
-                        </a:rPr>
-                        <m:t>𝑄</m:t>
-                      </m:r>
-                      <m:d>
-                        <m:dPr>
-                          <m:ctrlPr>
-                            <a:rPr lang="en-US" b="0" i="1" smtClean="0">
-                              <a:latin typeface="Cambria Math" panose="02040503050406030204" pitchFamily="18" charset="0"/>
-                            </a:rPr>
-                          </m:ctrlPr>
-                        </m:dPr>
-                        <m:e>
-                          <m:sSub>
-                            <m:sSubPr>
-                              <m:ctrlPr>
-                                <a:rPr lang="en-US" b="0" i="1" smtClean="0">
-                                  <a:latin typeface="Cambria Math" panose="02040503050406030204" pitchFamily="18" charset="0"/>
-                                </a:rPr>
-                              </m:ctrlPr>
-                            </m:sSubPr>
-                            <m:e>
-                              <m:r>
-                                <a:rPr lang="en-US" b="0" i="1" smtClean="0">
-                                  <a:latin typeface="Cambria Math" panose="02040503050406030204" pitchFamily="18" charset="0"/>
-                                </a:rPr>
-                                <m:t>𝑆</m:t>
-                              </m:r>
-                            </m:e>
-                            <m:sub>
-                              <m:r>
-                                <a:rPr lang="en-US" b="0" i="1" smtClean="0">
-                                  <a:latin typeface="Cambria Math" panose="02040503050406030204" pitchFamily="18" charset="0"/>
-                                </a:rPr>
-                                <m:t>𝑡</m:t>
-                              </m:r>
-                            </m:sub>
-                          </m:sSub>
-                          <m:r>
-                            <a:rPr lang="en-US" b="0" i="1" smtClean="0">
-                              <a:latin typeface="Cambria Math" panose="02040503050406030204" pitchFamily="18" charset="0"/>
-                            </a:rPr>
-                            <m:t>,</m:t>
-                          </m:r>
-                          <m:sSub>
-                            <m:sSubPr>
-                              <m:ctrlPr>
-                                <a:rPr lang="en-US" b="0" i="1" smtClean="0">
-                                  <a:latin typeface="Cambria Math" panose="02040503050406030204" pitchFamily="18" charset="0"/>
-                                </a:rPr>
-                              </m:ctrlPr>
-                            </m:sSubPr>
-                            <m:e>
-                              <m:r>
-                                <a:rPr lang="en-US" b="0" i="1" smtClean="0">
-                                  <a:latin typeface="Cambria Math" panose="02040503050406030204" pitchFamily="18" charset="0"/>
-                                </a:rPr>
-                                <m:t>𝐴</m:t>
-                              </m:r>
-                            </m:e>
-                            <m:sub>
-                              <m:r>
-                                <a:rPr lang="en-US" b="0" i="1" smtClean="0">
-                                  <a:latin typeface="Cambria Math" panose="02040503050406030204" pitchFamily="18" charset="0"/>
-                                </a:rPr>
-                                <m:t>𝑡</m:t>
-                              </m:r>
-                            </m:sub>
-                          </m:sSub>
-                        </m:e>
-                      </m:d>
-                      <m:r>
-                        <a:rPr lang="en-US" b="0" i="1" smtClean="0">
-                          <a:latin typeface="Cambria Math" panose="02040503050406030204" pitchFamily="18" charset="0"/>
-                        </a:rPr>
-                        <m:t>←</m:t>
-                      </m:r>
-                      <m:r>
-                        <a:rPr lang="en-US" i="1">
-                          <a:latin typeface="Cambria Math" panose="02040503050406030204" pitchFamily="18" charset="0"/>
-                        </a:rPr>
-                        <m:t>𝑄</m:t>
-                      </m:r>
-                      <m:d>
-                        <m:dPr>
-                          <m:ctrlPr>
-                            <a:rPr lang="en-US" i="1">
-                              <a:latin typeface="Cambria Math" panose="02040503050406030204" pitchFamily="18" charset="0"/>
-                            </a:rPr>
-                          </m:ctrlPr>
-                        </m:dPr>
-                        <m:e>
-                          <m:sSub>
-                            <m:sSubPr>
-                              <m:ctrlPr>
-                                <a:rPr lang="en-US" i="1">
-                                  <a:latin typeface="Cambria Math" panose="02040503050406030204" pitchFamily="18" charset="0"/>
-                                </a:rPr>
-                              </m:ctrlPr>
-                            </m:sSubPr>
-                            <m:e>
-                              <m:r>
-                                <a:rPr lang="en-US" i="1">
-                                  <a:latin typeface="Cambria Math" panose="02040503050406030204" pitchFamily="18" charset="0"/>
-                                </a:rPr>
-                                <m:t>𝑆</m:t>
-                              </m:r>
-                            </m:e>
-                            <m:sub>
-                              <m:r>
-                                <a:rPr lang="en-US" i="1">
-                                  <a:latin typeface="Cambria Math" panose="02040503050406030204" pitchFamily="18" charset="0"/>
-                                </a:rPr>
-                                <m:t>𝑡</m:t>
-                              </m:r>
-                            </m:sub>
-                          </m:sSub>
-                          <m:r>
-                            <a:rPr lang="en-US" i="1">
-                              <a:latin typeface="Cambria Math" panose="02040503050406030204" pitchFamily="18" charset="0"/>
-                            </a:rPr>
-                            <m:t>,</m:t>
-                          </m:r>
-                          <m:sSub>
-                            <m:sSubPr>
-                              <m:ctrlPr>
-                                <a:rPr lang="en-US" i="1">
-                                  <a:latin typeface="Cambria Math" panose="02040503050406030204" pitchFamily="18" charset="0"/>
-                                </a:rPr>
-                              </m:ctrlPr>
-                            </m:sSubPr>
-                            <m:e>
-                              <m:r>
-                                <a:rPr lang="en-US" i="1">
-                                  <a:latin typeface="Cambria Math" panose="02040503050406030204" pitchFamily="18" charset="0"/>
-                                </a:rPr>
-                                <m:t>𝐴</m:t>
-                              </m:r>
-                            </m:e>
-                            <m:sub>
-                              <m:r>
-                                <a:rPr lang="en-US" i="1">
-                                  <a:latin typeface="Cambria Math" panose="02040503050406030204" pitchFamily="18" charset="0"/>
-                                </a:rPr>
-                                <m:t>𝑡</m:t>
-                              </m:r>
-                            </m:sub>
-                          </m:sSub>
-                        </m:e>
-                      </m:d>
-                      <m:r>
-                        <a:rPr lang="en-US">
-                          <a:latin typeface="Cambria Math" panose="02040503050406030204" pitchFamily="18" charset="0"/>
-                        </a:rPr>
-                        <m:t>+</m:t>
-                      </m:r>
-                      <m:r>
-                        <a:rPr lang="en-US" i="1">
-                          <a:latin typeface="Cambria Math" panose="02040503050406030204" pitchFamily="18" charset="0"/>
-                        </a:rPr>
-                        <m:t>𝛼</m:t>
-                      </m:r>
-                      <m:r>
-                        <a:rPr lang="en-US" i="1">
-                          <a:latin typeface="Cambria Math" panose="02040503050406030204" pitchFamily="18" charset="0"/>
-                        </a:rPr>
-                        <m:t>[</m:t>
-                      </m:r>
-                      <m:sSub>
-                        <m:sSubPr>
-                          <m:ctrlPr>
-                            <a:rPr lang="en-US" i="1">
-                              <a:latin typeface="Cambria Math" panose="02040503050406030204" pitchFamily="18" charset="0"/>
-                            </a:rPr>
-                          </m:ctrlPr>
-                        </m:sSubPr>
-                        <m:e>
-                          <m:r>
-                            <a:rPr lang="en-US" i="1">
-                              <a:latin typeface="Cambria Math" panose="02040503050406030204" pitchFamily="18" charset="0"/>
-                            </a:rPr>
-                            <m:t>𝐺</m:t>
-                          </m:r>
-                        </m:e>
-                        <m:sub>
-                          <m:r>
-                            <a:rPr lang="en-US" i="1">
-                              <a:latin typeface="Cambria Math" panose="02040503050406030204" pitchFamily="18" charset="0"/>
-                            </a:rPr>
-                            <m:t>𝑡</m:t>
-                          </m:r>
-                          <m:r>
-                            <a:rPr lang="en-US" i="1">
-                              <a:latin typeface="Cambria Math" panose="02040503050406030204" pitchFamily="18" charset="0"/>
-                            </a:rPr>
-                            <m:t>:</m:t>
-                          </m:r>
-                          <m:r>
-                            <a:rPr lang="en-US" i="1">
-                              <a:latin typeface="Cambria Math" panose="02040503050406030204" pitchFamily="18" charset="0"/>
-                            </a:rPr>
-                            <m:t>𝑡</m:t>
-                          </m:r>
-                          <m:r>
-                            <a:rPr lang="en-US" i="1">
-                              <a:latin typeface="Cambria Math" panose="02040503050406030204" pitchFamily="18" charset="0"/>
-                            </a:rPr>
-                            <m:t>+</m:t>
-                          </m:r>
-                          <m:r>
-                            <a:rPr lang="en-US" i="1">
-                              <a:latin typeface="Cambria Math" panose="02040503050406030204" pitchFamily="18" charset="0"/>
-                            </a:rPr>
-                            <m:t>𝑛</m:t>
-                          </m:r>
-                        </m:sub>
-                      </m:sSub>
-                      <m:r>
-                        <a:rPr lang="en-US" i="1">
-                          <a:latin typeface="Cambria Math" panose="02040503050406030204" pitchFamily="18" charset="0"/>
-                        </a:rPr>
-                        <m:t>−</m:t>
-                      </m:r>
-                      <m:r>
-                        <a:rPr lang="en-US" i="1">
-                          <a:latin typeface="Cambria Math" panose="02040503050406030204" pitchFamily="18" charset="0"/>
-                        </a:rPr>
-                        <m:t>𝑄</m:t>
-                      </m:r>
-                      <m:d>
-                        <m:dPr>
-                          <m:ctrlPr>
-                            <a:rPr lang="en-US" i="1">
-                              <a:latin typeface="Cambria Math" panose="02040503050406030204" pitchFamily="18" charset="0"/>
-                            </a:rPr>
-                          </m:ctrlPr>
-                        </m:dPr>
-                        <m:e>
-                          <m:sSub>
-                            <m:sSubPr>
-                              <m:ctrlPr>
-                                <a:rPr lang="en-US" i="1">
-                                  <a:latin typeface="Cambria Math" panose="02040503050406030204" pitchFamily="18" charset="0"/>
-                                </a:rPr>
-                              </m:ctrlPr>
-                            </m:sSubPr>
-                            <m:e>
-                              <m:r>
-                                <a:rPr lang="en-US" i="1">
-                                  <a:latin typeface="Cambria Math" panose="02040503050406030204" pitchFamily="18" charset="0"/>
-                                </a:rPr>
-                                <m:t>𝑆</m:t>
-                              </m:r>
-                            </m:e>
-                            <m:sub>
-                              <m:r>
-                                <a:rPr lang="en-US" i="1">
-                                  <a:latin typeface="Cambria Math" panose="02040503050406030204" pitchFamily="18" charset="0"/>
-                                </a:rPr>
-                                <m:t>𝑡</m:t>
-                              </m:r>
-                            </m:sub>
-                          </m:sSub>
-                          <m:r>
-                            <a:rPr lang="en-US" i="1">
-                              <a:latin typeface="Cambria Math" panose="02040503050406030204" pitchFamily="18" charset="0"/>
-                            </a:rPr>
-                            <m:t>,</m:t>
-                          </m:r>
-                          <m:sSub>
-                            <m:sSubPr>
-                              <m:ctrlPr>
-                                <a:rPr lang="en-US" i="1">
-                                  <a:latin typeface="Cambria Math" panose="02040503050406030204" pitchFamily="18" charset="0"/>
-                                </a:rPr>
-                              </m:ctrlPr>
-                            </m:sSubPr>
-                            <m:e>
-                              <m:r>
-                                <a:rPr lang="en-US" i="1">
-                                  <a:latin typeface="Cambria Math" panose="02040503050406030204" pitchFamily="18" charset="0"/>
-                                </a:rPr>
-                                <m:t>𝐴</m:t>
-                              </m:r>
-                            </m:e>
-                            <m:sub>
-                              <m:r>
-                                <a:rPr lang="en-US" i="1">
-                                  <a:latin typeface="Cambria Math" panose="02040503050406030204" pitchFamily="18" charset="0"/>
-                                </a:rPr>
-                                <m:t>𝑡</m:t>
-                              </m:r>
-                            </m:sub>
-                          </m:sSub>
-                        </m:e>
-                      </m:d>
-                      <m:r>
-                        <a:rPr lang="en-US" i="1">
-                          <a:latin typeface="Cambria Math" panose="02040503050406030204" pitchFamily="18" charset="0"/>
-                        </a:rPr>
-                        <m:t>]</m:t>
-                      </m:r>
-                    </m:oMath>
-                  </m:oMathPara>
-                </a14:m>
-                <a:endParaRPr lang="en-US" dirty="0"/>
-              </a:p>
-            </p:txBody>
-          </p:sp>
-        </mc:Choice>
-        <mc:Fallback xmlns="">
-          <p:sp>
-            <p:nvSpPr>
-              <p:cNvPr id="3" name="Content Placeholder 2">
-                <a:extLst>
-                  <a:ext uri="{FF2B5EF4-FFF2-40B4-BE49-F238E27FC236}">
-                    <a16:creationId xmlns:a16="http://schemas.microsoft.com/office/drawing/2014/main" id="{9B66D976-5489-1CA0-FBD4-D8ED85B16899}"/>
-                  </a:ext>
-                </a:extLst>
-              </p:cNvPr>
-              <p:cNvSpPr>
-                <a:spLocks noGrp="1" noRot="1" noChangeAspect="1" noMove="1" noResize="1" noEditPoints="1" noAdjustHandles="1" noChangeArrowheads="1" noChangeShapeType="1" noTextEdit="1"/>
-              </p:cNvSpPr>
-              <p:nvPr>
-                <p:ph idx="1"/>
-              </p:nvPr>
-            </p:nvSpPr>
-            <p:spPr>
-              <a:blipFill>
-                <a:blip r:embed="rId3"/>
-                <a:stretch>
-                  <a:fillRect l="-928" t="-1913"/>
-                </a:stretch>
-              </a:blipFill>
-            </p:spPr>
-            <p:txBody>
-              <a:bodyPr/>
-              <a:lstStyle/>
-              <a:p>
-                <a:r>
-                  <a:rPr lang="en-US">
-                    <a:noFill/>
-                  </a:rPr>
-                  <a:t> </a:t>
-                </a:r>
-              </a:p>
-            </p:txBody>
-          </p:sp>
-        </mc:Fallback>
-      </mc:AlternateContent>
-      <p:sp>
-        <p:nvSpPr>
-          <p:cNvPr id="4" name="Speech Bubble: Rectangle with Corners Rounded 3">
-            <a:extLst>
-              <a:ext uri="{FF2B5EF4-FFF2-40B4-BE49-F238E27FC236}">
-                <a16:creationId xmlns:a16="http://schemas.microsoft.com/office/drawing/2014/main" id="{FC23A07C-A168-39B7-4E5B-CB74A33475C0}"/>
-              </a:ext>
-            </a:extLst>
-          </p:cNvPr>
-          <p:cNvSpPr/>
-          <p:nvPr/>
-        </p:nvSpPr>
-        <p:spPr>
-          <a:xfrm>
-            <a:off x="8519020" y="578972"/>
-            <a:ext cx="1530991" cy="608202"/>
-          </a:xfrm>
-          <a:prstGeom prst="wedgeRoundRectCallout">
-            <a:avLst>
-              <a:gd name="adj1" fmla="val -42766"/>
-              <a:gd name="adj2" fmla="val 86346"/>
-              <a:gd name="adj3" fmla="val 16667"/>
-            </a:avLst>
-          </a:prstGeom>
-        </p:spPr>
-        <p:style>
-          <a:lnRef idx="2">
-            <a:schemeClr val="accent1">
-              <a:shade val="15000"/>
-            </a:schemeClr>
-          </a:lnRef>
-          <a:fillRef idx="1">
-            <a:schemeClr val="accent1"/>
-          </a:fillRef>
-          <a:effectRef idx="0">
-            <a:schemeClr val="accent1"/>
-          </a:effectRef>
-          <a:fontRef idx="minor">
-            <a:schemeClr val="lt1"/>
-          </a:fontRef>
-        </p:style>
-        <p:txBody>
-          <a:bodyPr rtlCol="0" anchor="ctr"/>
-          <a:lstStyle/>
-          <a:p>
-            <a:pPr algn="ctr"/>
-            <a:r>
-              <a:rPr lang="en-US" sz="1200" dirty="0"/>
-              <a:t>Note (0) has nothing to do with the steps!</a:t>
-            </a:r>
-          </a:p>
-        </p:txBody>
-      </p:sp>
-    </p:spTree>
-    <p:extLst>
-      <p:ext uri="{BB962C8B-B14F-4D97-AF65-F5344CB8AC3E}">
-        <p14:creationId xmlns:p14="http://schemas.microsoft.com/office/powerpoint/2010/main" val="2428545916"/>
       </p:ext>
     </p:extLst>
   </p:cSld>

--- a/slides/Lecture_Chapter07.pptx
+++ b/slides/Lecture_Chapter07.pptx
@@ -6,7 +6,7 @@
   </p:sldMasterIdLst>
   <p:sldIdLst>
     <p:sldId id="256" r:id="rId2"/>
-    <p:sldId id="384" r:id="rId3"/>
+    <p:sldId id="478" r:id="rId3"/>
     <p:sldId id="385" r:id="rId4"/>
     <p:sldId id="398" r:id="rId5"/>
     <p:sldId id="396" r:id="rId6"/>
@@ -125,17 +125,33 @@
         <p14:section name="Default Section" id="{83286E67-F0F0-421C-8F74-7B93ABA17FBF}">
           <p14:sldIdLst>
             <p14:sldId id="256"/>
-            <p14:sldId id="384"/>
+            <p14:sldId id="478"/>
+          </p14:sldIdLst>
+        </p14:section>
+        <p14:section name="Introduction" id="{226A1DFA-741C-4500-8EC5-5BCBA926DBFB}">
+          <p14:sldIdLst>
             <p14:sldId id="385"/>
             <p14:sldId id="398"/>
+          </p14:sldIdLst>
+        </p14:section>
+        <p14:section name="Prediction" id="{EF7F6E9E-DC9D-4F07-AF20-87249B8EBE01}">
+          <p14:sldIdLst>
             <p14:sldId id="396"/>
             <p14:sldId id="386"/>
             <p14:sldId id="387"/>
             <p14:sldId id="388"/>
+          </p14:sldIdLst>
+        </p14:section>
+        <p14:section name="On-Policy Control" id="{6A91EB9B-FC66-4409-8B96-60AEBB5F5225}">
+          <p14:sldIdLst>
             <p14:sldId id="392"/>
             <p14:sldId id="391"/>
             <p14:sldId id="394"/>
             <p14:sldId id="393"/>
+          </p14:sldIdLst>
+        </p14:section>
+        <p14:section name="Off-Policy Learning" id="{17518668-3964-4791-B96A-2B49493E2477}">
+          <p14:sldIdLst>
             <p14:sldId id="389"/>
             <p14:sldId id="390"/>
             <p14:sldId id="395"/>
@@ -298,7 +314,7 @@
           <a:p>
             <a:fld id="{3E22BF2E-04DA-469E-97C5-BB68A0368813}" type="datetimeFigureOut">
               <a:rPr lang="en-US" smtClean="0"/>
-              <a:t>1/10/2026</a:t>
+              <a:t>2/4/2026</a:t>
             </a:fld>
             <a:endParaRPr lang="en-US"/>
           </a:p>
@@ -496,7 +512,7 @@
           <a:p>
             <a:fld id="{3E22BF2E-04DA-469E-97C5-BB68A0368813}" type="datetimeFigureOut">
               <a:rPr lang="en-US" smtClean="0"/>
-              <a:t>1/10/2026</a:t>
+              <a:t>2/4/2026</a:t>
             </a:fld>
             <a:endParaRPr lang="en-US"/>
           </a:p>
@@ -704,7 +720,7 @@
           <a:p>
             <a:fld id="{3E22BF2E-04DA-469E-97C5-BB68A0368813}" type="datetimeFigureOut">
               <a:rPr lang="en-US" smtClean="0"/>
-              <a:t>1/10/2026</a:t>
+              <a:t>2/4/2026</a:t>
             </a:fld>
             <a:endParaRPr lang="en-US"/>
           </a:p>
@@ -912,7 +928,7 @@
           <a:p>
             <a:fld id="{3E22BF2E-04DA-469E-97C5-BB68A0368813}" type="datetimeFigureOut">
               <a:rPr lang="en-US" smtClean="0"/>
-              <a:t>1/10/2026</a:t>
+              <a:t>2/4/2026</a:t>
             </a:fld>
             <a:endParaRPr lang="en-US"/>
           </a:p>
@@ -1187,7 +1203,7 @@
           <a:p>
             <a:fld id="{3E22BF2E-04DA-469E-97C5-BB68A0368813}" type="datetimeFigureOut">
               <a:rPr lang="en-US" smtClean="0"/>
-              <a:t>1/10/2026</a:t>
+              <a:t>2/4/2026</a:t>
             </a:fld>
             <a:endParaRPr lang="en-US"/>
           </a:p>
@@ -1452,7 +1468,7 @@
           <a:p>
             <a:fld id="{3E22BF2E-04DA-469E-97C5-BB68A0368813}" type="datetimeFigureOut">
               <a:rPr lang="en-US" smtClean="0"/>
-              <a:t>1/10/2026</a:t>
+              <a:t>2/4/2026</a:t>
             </a:fld>
             <a:endParaRPr lang="en-US"/>
           </a:p>
@@ -1864,7 +1880,7 @@
           <a:p>
             <a:fld id="{3E22BF2E-04DA-469E-97C5-BB68A0368813}" type="datetimeFigureOut">
               <a:rPr lang="en-US" smtClean="0"/>
-              <a:t>1/10/2026</a:t>
+              <a:t>2/4/2026</a:t>
             </a:fld>
             <a:endParaRPr lang="en-US"/>
           </a:p>
@@ -2005,7 +2021,7 @@
           <a:p>
             <a:fld id="{3E22BF2E-04DA-469E-97C5-BB68A0368813}" type="datetimeFigureOut">
               <a:rPr lang="en-US" smtClean="0"/>
-              <a:t>1/10/2026</a:t>
+              <a:t>2/4/2026</a:t>
             </a:fld>
             <a:endParaRPr lang="en-US"/>
           </a:p>
@@ -2118,7 +2134,7 @@
           <a:p>
             <a:fld id="{3E22BF2E-04DA-469E-97C5-BB68A0368813}" type="datetimeFigureOut">
               <a:rPr lang="en-US" smtClean="0"/>
-              <a:t>1/10/2026</a:t>
+              <a:t>2/4/2026</a:t>
             </a:fld>
             <a:endParaRPr lang="en-US"/>
           </a:p>
@@ -2429,7 +2445,7 @@
           <a:p>
             <a:fld id="{3E22BF2E-04DA-469E-97C5-BB68A0368813}" type="datetimeFigureOut">
               <a:rPr lang="en-US" smtClean="0"/>
-              <a:t>1/10/2026</a:t>
+              <a:t>2/4/2026</a:t>
             </a:fld>
             <a:endParaRPr lang="en-US"/>
           </a:p>
@@ -2717,7 +2733,7 @@
           <a:p>
             <a:fld id="{3E22BF2E-04DA-469E-97C5-BB68A0368813}" type="datetimeFigureOut">
               <a:rPr lang="en-US" smtClean="0"/>
-              <a:t>1/10/2026</a:t>
+              <a:t>2/4/2026</a:t>
             </a:fld>
             <a:endParaRPr lang="en-US"/>
           </a:p>
@@ -2958,7 +2974,7 @@
           <a:p>
             <a:fld id="{3E22BF2E-04DA-469E-97C5-BB68A0368813}" type="datetimeFigureOut">
               <a:rPr lang="en-US" smtClean="0"/>
-              <a:t>1/10/2026</a:t>
+              <a:t>2/4/2026</a:t>
             </a:fld>
             <a:endParaRPr lang="en-US"/>
           </a:p>
@@ -4174,10 +4190,13 @@
             <p:spPr/>
             <p:txBody>
               <a:bodyPr>
-                <a:normAutofit fontScale="92500"/>
+                <a:normAutofit fontScale="92500" lnSpcReduction="20000"/>
               </a:bodyPr>
               <a:lstStyle/>
               <a:p>
+                <a:pPr marL="0" indent="0">
+                  <a:buNone/>
+                </a:pPr>
                 <a:r>
                   <a:rPr lang="en-US" dirty="0"/>
                   <a:t>Original Sarsa is called one-step Sarsa or Sarsa(0)</a:t>
@@ -4215,8 +4234,12 @@
               <a:p>
                 <a:pPr lvl="1"/>
                 <a:r>
+                  <a:rPr lang="en-US" b="1" dirty="0"/>
+                  <a:t>Remember</a:t>
+                </a:r>
+                <a:r>
                   <a:rPr lang="en-US" dirty="0"/>
-                  <a:t>Remember: The policy needs to keep exploring so we learn an </a:t>
+                  <a:t>: The policy needs to keep exploring so we typically learn an </a:t>
                 </a:r>
                 <a14:m>
                   <m:oMath xmlns:m="http://schemas.openxmlformats.org/officeDocument/2006/math">
@@ -4277,7 +4300,7 @@
               <a:p>
                 <a:r>
                   <a:rPr lang="en-US" dirty="0"/>
-                  <a:t>Return (redefined using </a:t>
+                  <a:t>Return estimate (redefined using </a:t>
                 </a:r>
                 <a14:m>
                   <m:oMath xmlns:m="http://schemas.openxmlformats.org/officeDocument/2006/math">
@@ -4411,147 +4434,79 @@
                           </m:ctrlPr>
                         </m:sSubPr>
                         <m:e>
-                          <m:sSub>
-                            <m:sSubPr>
-                              <m:ctrlPr>
-                                <a:rPr lang="en-US" i="1">
-                                  <a:latin typeface="Cambria Math" panose="02040503050406030204" pitchFamily="18" charset="0"/>
-                                </a:rPr>
-                              </m:ctrlPr>
-                            </m:sSubPr>
-                            <m:e>
-                              <m:r>
-                                <a:rPr lang="en-US" i="1">
-                                  <a:latin typeface="Cambria Math" panose="02040503050406030204" pitchFamily="18" charset="0"/>
-                                </a:rPr>
-                                <m:t>𝑅</m:t>
-                              </m:r>
-                            </m:e>
-                            <m:sub>
-                              <m:r>
-                                <a:rPr lang="en-US" i="1">
-                                  <a:latin typeface="Cambria Math" panose="02040503050406030204" pitchFamily="18" charset="0"/>
-                                </a:rPr>
-                                <m:t>𝑡</m:t>
-                              </m:r>
-                              <m:r>
-                                <a:rPr lang="en-US" i="1">
-                                  <a:latin typeface="Cambria Math" panose="02040503050406030204" pitchFamily="18" charset="0"/>
-                                </a:rPr>
-                                <m:t>+2</m:t>
-                              </m:r>
-                            </m:sub>
-                          </m:sSub>
                           <m:r>
                             <a:rPr lang="en-US" i="1">
                               <a:latin typeface="Cambria Math" panose="02040503050406030204" pitchFamily="18" charset="0"/>
                             </a:rPr>
-                            <m:t>+…+</m:t>
+                            <m:t>𝑅</m:t>
                           </m:r>
-                          <m:sSup>
-                            <m:sSupPr>
-                              <m:ctrlPr>
-                                <a:rPr lang="en-US" i="1">
-                                  <a:latin typeface="Cambria Math" panose="02040503050406030204" pitchFamily="18" charset="0"/>
-                                </a:rPr>
-                              </m:ctrlPr>
-                            </m:sSupPr>
-                            <m:e>
-                              <m:r>
-                                <a:rPr lang="en-US" i="1">
-                                  <a:latin typeface="Cambria Math" panose="02040503050406030204" pitchFamily="18" charset="0"/>
-                                </a:rPr>
-                                <m:t>𝛾</m:t>
-                              </m:r>
-                            </m:e>
-                            <m:sup>
-                              <m:r>
-                                <a:rPr lang="en-US" i="1">
-                                  <a:latin typeface="Cambria Math" panose="02040503050406030204" pitchFamily="18" charset="0"/>
-                                </a:rPr>
-                                <m:t>𝑛</m:t>
-                              </m:r>
-                              <m:r>
-                                <a:rPr lang="en-US" i="1">
-                                  <a:latin typeface="Cambria Math" panose="02040503050406030204" pitchFamily="18" charset="0"/>
-                                </a:rPr>
-                                <m:t>−1</m:t>
-                              </m:r>
-                            </m:sup>
-                          </m:sSup>
-                          <m:sSub>
-                            <m:sSubPr>
-                              <m:ctrlPr>
-                                <a:rPr lang="en-US" i="1">
-                                  <a:latin typeface="Cambria Math" panose="02040503050406030204" pitchFamily="18" charset="0"/>
-                                </a:rPr>
-                              </m:ctrlPr>
-                            </m:sSubPr>
-                            <m:e>
-                              <m:r>
-                                <a:rPr lang="en-US" i="1">
-                                  <a:latin typeface="Cambria Math" panose="02040503050406030204" pitchFamily="18" charset="0"/>
-                                </a:rPr>
-                                <m:t>𝑅</m:t>
-                              </m:r>
-                            </m:e>
-                            <m:sub>
-                              <m:r>
-                                <a:rPr lang="en-US" i="1">
-                                  <a:latin typeface="Cambria Math" panose="02040503050406030204" pitchFamily="18" charset="0"/>
-                                </a:rPr>
-                                <m:t>𝑡</m:t>
-                              </m:r>
-                              <m:r>
-                                <a:rPr lang="en-US" i="1">
-                                  <a:latin typeface="Cambria Math" panose="02040503050406030204" pitchFamily="18" charset="0"/>
-                                </a:rPr>
-                                <m:t>+</m:t>
-                              </m:r>
-                              <m:r>
-                                <a:rPr lang="en-US" i="1">
-                                  <a:latin typeface="Cambria Math" panose="02040503050406030204" pitchFamily="18" charset="0"/>
-                                </a:rPr>
-                                <m:t>𝑛</m:t>
-                              </m:r>
-                            </m:sub>
-                          </m:sSub>
+                        </m:e>
+                        <m:sub>
                           <m:r>
                             <a:rPr lang="en-US" i="1">
                               <a:latin typeface="Cambria Math" panose="02040503050406030204" pitchFamily="18" charset="0"/>
                             </a:rPr>
-                            <m:t>+</m:t>
+                            <m:t>𝑡</m:t>
                           </m:r>
-                          <m:sSup>
-                            <m:sSupPr>
-                              <m:ctrlPr>
-                                <a:rPr lang="en-US" i="1">
-                                  <a:latin typeface="Cambria Math" panose="02040503050406030204" pitchFamily="18" charset="0"/>
-                                </a:rPr>
-                              </m:ctrlPr>
-                            </m:sSupPr>
-                            <m:e>
-                              <m:r>
-                                <a:rPr lang="en-US" i="1">
-                                  <a:latin typeface="Cambria Math" panose="02040503050406030204" pitchFamily="18" charset="0"/>
-                                </a:rPr>
-                                <m:t>𝛾</m:t>
-                              </m:r>
-                            </m:e>
-                            <m:sup>
-                              <m:r>
-                                <a:rPr lang="en-US" i="1">
-                                  <a:latin typeface="Cambria Math" panose="02040503050406030204" pitchFamily="18" charset="0"/>
-                                </a:rPr>
-                                <m:t>𝑛</m:t>
-                              </m:r>
-                            </m:sup>
-                          </m:sSup>
                           <m:r>
-                            <a:rPr lang="en-US" b="0" i="1" smtClean="0">
+                            <a:rPr lang="en-US" i="1">
                               <a:latin typeface="Cambria Math" panose="02040503050406030204" pitchFamily="18" charset="0"/>
                             </a:rPr>
-                            <m:t>𝑄</m:t>
+                            <m:t>+2</m:t>
+                          </m:r>
+                        </m:sub>
+                      </m:sSub>
+                      <m:r>
+                        <a:rPr lang="en-US" i="1">
+                          <a:latin typeface="Cambria Math" panose="02040503050406030204" pitchFamily="18" charset="0"/>
+                        </a:rPr>
+                        <m:t>+…+</m:t>
+                      </m:r>
+                      <m:sSup>
+                        <m:sSupPr>
+                          <m:ctrlPr>
+                            <a:rPr lang="en-US" i="1">
+                              <a:latin typeface="Cambria Math" panose="02040503050406030204" pitchFamily="18" charset="0"/>
+                            </a:rPr>
+                          </m:ctrlPr>
+                        </m:sSupPr>
+                        <m:e>
+                          <m:r>
+                            <a:rPr lang="en-US" i="1">
+                              <a:latin typeface="Cambria Math" panose="02040503050406030204" pitchFamily="18" charset="0"/>
+                            </a:rPr>
+                            <m:t>𝛾</m:t>
+                          </m:r>
+                        </m:e>
+                        <m:sup>
+                          <m:r>
+                            <a:rPr lang="en-US" i="1">
+                              <a:latin typeface="Cambria Math" panose="02040503050406030204" pitchFamily="18" charset="0"/>
+                            </a:rPr>
+                            <m:t>𝑛</m:t>
+                          </m:r>
+                          <m:r>
+                            <a:rPr lang="en-US" i="1">
+                              <a:latin typeface="Cambria Math" panose="02040503050406030204" pitchFamily="18" charset="0"/>
+                            </a:rPr>
+                            <m:t>−1</m:t>
+                          </m:r>
+                        </m:sup>
+                      </m:sSup>
+                      <m:sSub>
+                        <m:sSubPr>
+                          <m:ctrlPr>
+                            <a:rPr lang="en-US" i="1">
+                              <a:latin typeface="Cambria Math" panose="02040503050406030204" pitchFamily="18" charset="0"/>
+                            </a:rPr>
+                          </m:ctrlPr>
+                        </m:sSubPr>
+                        <m:e>
+                          <m:r>
+                            <a:rPr lang="en-US" i="1">
+                              <a:latin typeface="Cambria Math" panose="02040503050406030204" pitchFamily="18" charset="0"/>
+                            </a:rPr>
+                            <m:t>𝑅</m:t>
                           </m:r>
                         </m:e>
                         <m:sub>
@@ -4573,14 +4528,45 @@
                             </a:rPr>
                             <m:t>𝑛</m:t>
                           </m:r>
+                        </m:sub>
+                      </m:sSub>
+                      <m:r>
+                        <a:rPr lang="en-US" i="1">
+                          <a:latin typeface="Cambria Math" panose="02040503050406030204" pitchFamily="18" charset="0"/>
+                        </a:rPr>
+                        <m:t>+</m:t>
+                      </m:r>
+                      <m:sSup>
+                        <m:sSupPr>
+                          <m:ctrlPr>
+                            <a:rPr lang="en-US" i="1">
+                              <a:latin typeface="Cambria Math" panose="02040503050406030204" pitchFamily="18" charset="0"/>
+                            </a:rPr>
+                          </m:ctrlPr>
+                        </m:sSupPr>
+                        <m:e>
                           <m:r>
                             <a:rPr lang="en-US" i="1">
                               <a:latin typeface="Cambria Math" panose="02040503050406030204" pitchFamily="18" charset="0"/>
                             </a:rPr>
-                            <m:t>−1</m:t>
+                            <m:t>𝛾</m:t>
                           </m:r>
-                        </m:sub>
-                      </m:sSub>
+                        </m:e>
+                        <m:sup>
+                          <m:r>
+                            <a:rPr lang="en-US" i="1">
+                              <a:latin typeface="Cambria Math" panose="02040503050406030204" pitchFamily="18" charset="0"/>
+                            </a:rPr>
+                            <m:t>𝑛</m:t>
+                          </m:r>
+                        </m:sup>
+                      </m:sSup>
+                      <m:r>
+                        <a:rPr lang="en-US" i="1">
+                          <a:latin typeface="Cambria Math" panose="02040503050406030204" pitchFamily="18" charset="0"/>
+                        </a:rPr>
+                        <m:t>𝑄</m:t>
+                      </m:r>
                       <m:d>
                         <m:dPr>
                           <m:ctrlPr>
@@ -4675,6 +4661,9 @@
                     </m:oMath>
                   </m:oMathPara>
                 </a14:m>
+                <a:endParaRPr lang="en-US" dirty="0"/>
+              </a:p>
+              <a:p>
                 <a:endParaRPr lang="en-US" dirty="0"/>
               </a:p>
               <a:p>
@@ -5027,7 +5016,7 @@
               <a:blipFill>
                 <a:blip r:embed="rId3"/>
                 <a:stretch>
-                  <a:fillRect l="-928" t="-1913"/>
+                  <a:fillRect l="-1043" t="-3189" r="-870"/>
                 </a:stretch>
               </a:blipFill>
             </p:spPr>
@@ -5046,59 +5035,135 @@
           </p:sp>
         </mc:Fallback>
       </mc:AlternateContent>
-      <p:sp>
-        <p:nvSpPr>
-          <p:cNvPr id="4" name="Speech Bubble: Rectangle with Corners Rounded 3">
-            <a:extLst>
-              <a:ext uri="{FF2B5EF4-FFF2-40B4-BE49-F238E27FC236}">
-                <a16:creationId xmlns:a16="http://schemas.microsoft.com/office/drawing/2014/main" id="{FC23A07C-A168-39B7-4E5B-CB74A33475C0}"/>
-              </a:ext>
-            </a:extLst>
-          </p:cNvPr>
-          <p:cNvSpPr/>
-          <p:nvPr/>
-        </p:nvSpPr>
-        <p:spPr>
-          <a:xfrm>
-            <a:off x="8519020" y="578972"/>
-            <a:ext cx="1530991" cy="608202"/>
-          </a:xfrm>
-          <a:prstGeom prst="wedgeRoundRectCallout">
-            <a:avLst>
-              <a:gd name="adj1" fmla="val -42766"/>
-              <a:gd name="adj2" fmla="val 86346"/>
-              <a:gd name="adj3" fmla="val 16667"/>
-            </a:avLst>
-          </a:prstGeom>
-        </p:spPr>
-        <p:style>
-          <a:lnRef idx="2">
-            <a:schemeClr val="accent1">
-              <a:shade val="15000"/>
-            </a:schemeClr>
-          </a:lnRef>
-          <a:fillRef idx="1">
-            <a:schemeClr val="accent1"/>
-          </a:fillRef>
-          <a:effectRef idx="0">
-            <a:schemeClr val="accent1"/>
-          </a:effectRef>
-          <a:fontRef idx="minor">
-            <a:schemeClr val="lt1"/>
-          </a:fontRef>
-        </p:style>
-        <p:txBody>
-          <a:bodyPr rtlCol="0" anchor="ctr"/>
-          <a:lstStyle/>
-          <a:p>
-            <a:pPr algn="ctr"/>
-            <a:r>
-              <a:rPr lang="en-US" sz="1200" dirty="0"/>
-              <a:t>Note (0) has nothing to do with the steps!</a:t>
-            </a:r>
-          </a:p>
-        </p:txBody>
-      </p:sp>
+      <mc:AlternateContent xmlns:mc="http://schemas.openxmlformats.org/markup-compatibility/2006" xmlns:a14="http://schemas.microsoft.com/office/drawing/2010/main">
+        <mc:Choice Requires="a14">
+          <p:sp>
+            <p:nvSpPr>
+              <p:cNvPr id="4" name="Speech Bubble: Rectangle with Corners Rounded 3">
+                <a:extLst>
+                  <a:ext uri="{FF2B5EF4-FFF2-40B4-BE49-F238E27FC236}">
+                    <a16:creationId xmlns:a16="http://schemas.microsoft.com/office/drawing/2014/main" id="{FC23A07C-A168-39B7-4E5B-CB74A33475C0}"/>
+                  </a:ext>
+                </a:extLst>
+              </p:cNvPr>
+              <p:cNvSpPr/>
+              <p:nvPr/>
+            </p:nvSpPr>
+            <p:spPr>
+              <a:xfrm>
+                <a:off x="8462748" y="578972"/>
+                <a:ext cx="2327171" cy="818358"/>
+              </a:xfrm>
+              <a:prstGeom prst="wedgeRoundRectCallout">
+                <a:avLst>
+                  <a:gd name="adj1" fmla="val -58080"/>
+                  <a:gd name="adj2" fmla="val 74886"/>
+                  <a:gd name="adj3" fmla="val 16667"/>
+                </a:avLst>
+              </a:prstGeom>
+            </p:spPr>
+            <p:style>
+              <a:lnRef idx="2">
+                <a:schemeClr val="accent1">
+                  <a:shade val="15000"/>
+                </a:schemeClr>
+              </a:lnRef>
+              <a:fillRef idx="1">
+                <a:schemeClr val="accent1"/>
+              </a:fillRef>
+              <a:effectRef idx="0">
+                <a:schemeClr val="accent1"/>
+              </a:effectRef>
+              <a:fontRef idx="minor">
+                <a:schemeClr val="lt1"/>
+              </a:fontRef>
+            </p:style>
+            <p:txBody>
+              <a:bodyPr rtlCol="0" anchor="ctr"/>
+              <a:lstStyle/>
+              <a:p>
+                <a:pPr algn="ctr"/>
+                <a:r>
+                  <a:rPr lang="en-US" sz="1200" b="1" dirty="0"/>
+                  <a:t>Note</a:t>
+                </a:r>
+                <a:r>
+                  <a:rPr lang="en-US" sz="1200" dirty="0"/>
+                  <a:t>: (0) has nothing to do with the steps, but means that </a:t>
+                </a:r>
+                <a14:m>
+                  <m:oMath xmlns:m="http://schemas.openxmlformats.org/officeDocument/2006/math">
+                    <m:r>
+                      <a:rPr lang="en-US" sz="1200" b="0" i="1" smtClean="0">
+                        <a:latin typeface="Cambria Math" panose="02040503050406030204" pitchFamily="18" charset="0"/>
+                      </a:rPr>
+                      <m:t>𝜆</m:t>
+                    </m:r>
+                    <m:r>
+                      <a:rPr lang="en-US" sz="1200" b="0" i="1" smtClean="0">
+                        <a:latin typeface="Cambria Math" panose="02040503050406030204" pitchFamily="18" charset="0"/>
+                      </a:rPr>
+                      <m:t>=0</m:t>
+                    </m:r>
+                  </m:oMath>
+                </a14:m>
+                <a:r>
+                  <a:rPr lang="en-US" sz="1200" dirty="0"/>
+                  <a:t>. We will learn about eligibility traces later.</a:t>
+                </a:r>
+              </a:p>
+            </p:txBody>
+          </p:sp>
+        </mc:Choice>
+        <mc:Fallback xmlns="">
+          <p:sp>
+            <p:nvSpPr>
+              <p:cNvPr id="4" name="Speech Bubble: Rectangle with Corners Rounded 3">
+                <a:extLst>
+                  <a:ext uri="{FF2B5EF4-FFF2-40B4-BE49-F238E27FC236}">
+                    <a16:creationId xmlns:a16="http://schemas.microsoft.com/office/drawing/2014/main" id="{FC23A07C-A168-39B7-4E5B-CB74A33475C0}"/>
+                  </a:ext>
+                </a:extLst>
+              </p:cNvPr>
+              <p:cNvSpPr>
+                <a:spLocks noRot="1" noChangeAspect="1" noMove="1" noResize="1" noEditPoints="1" noAdjustHandles="1" noChangeArrowheads="1" noChangeShapeType="1" noTextEdit="1"/>
+              </p:cNvSpPr>
+              <p:nvPr/>
+            </p:nvSpPr>
+            <p:spPr>
+              <a:xfrm>
+                <a:off x="8462748" y="578972"/>
+                <a:ext cx="2327171" cy="818358"/>
+              </a:xfrm>
+              <a:prstGeom prst="wedgeRoundRectCallout">
+                <a:avLst>
+                  <a:gd name="adj1" fmla="val -58080"/>
+                  <a:gd name="adj2" fmla="val 74886"/>
+                  <a:gd name="adj3" fmla="val 16667"/>
+                </a:avLst>
+              </a:prstGeom>
+              <a:blipFill>
+                <a:blip r:embed="rId4"/>
+                <a:stretch>
+                  <a:fillRect/>
+                </a:stretch>
+              </a:blipFill>
+            </p:spPr>
+            <p:txBody>
+              <a:bodyPr/>
+              <a:lstStyle/>
+              <a:p>
+                <a:r>
+                  <a:rPr lang="en-US">
+                    <a:noFill/>
+                  </a:rPr>
+                  <a:t> </a:t>
+                </a:r>
+              </a:p>
+            </p:txBody>
+          </p:sp>
+        </mc:Fallback>
+      </mc:AlternateContent>
     </p:spTree>
     <p:extLst>
       <p:ext uri="{BB962C8B-B14F-4D97-AF65-F5344CB8AC3E}">
@@ -5784,8 +5849,8 @@
         </p:nvSpPr>
         <p:spPr>
           <a:xfrm>
-            <a:off x="6026200" y="3287652"/>
-            <a:ext cx="458363" cy="767817"/>
+            <a:off x="5866228" y="3287652"/>
+            <a:ext cx="618335" cy="767817"/>
           </a:xfrm>
           <a:prstGeom prst="rightArrow">
             <a:avLst/>
@@ -5831,9 +5896,9 @@
         <p:grpSpPr>
           <a:xfrm>
             <a:off x="7549272" y="1946300"/>
-            <a:ext cx="4478529" cy="4775368"/>
+            <a:ext cx="4572390" cy="4775368"/>
             <a:chOff x="7549272" y="1946300"/>
-            <a:chExt cx="4478529" cy="4775368"/>
+            <a:chExt cx="4572390" cy="4775368"/>
           </a:xfrm>
         </p:grpSpPr>
         <mc:AlternateContent xmlns:mc="http://schemas.openxmlformats.org/markup-compatibility/2006" xmlns:a14="http://schemas.microsoft.com/office/drawing/2010/main">
@@ -5982,13 +6047,13 @@
               </p:nvSpPr>
               <p:spPr>
                 <a:xfrm>
-                  <a:off x="10135182" y="4055469"/>
-                  <a:ext cx="1892619" cy="543806"/>
+                  <a:off x="9856838" y="4018671"/>
+                  <a:ext cx="2264824" cy="449306"/>
                 </a:xfrm>
                 <a:prstGeom prst="wedgeRoundRectCallout">
                   <a:avLst>
-                    <a:gd name="adj1" fmla="val -56378"/>
-                    <a:gd name="adj2" fmla="val 60588"/>
+                    <a:gd name="adj1" fmla="val -40849"/>
+                    <a:gd name="adj2" fmla="val 74156"/>
                     <a:gd name="adj3" fmla="val 16667"/>
                   </a:avLst>
                 </a:prstGeom>
@@ -6015,20 +6080,20 @@
                 <a:p>
                   <a:pPr algn="ctr"/>
                   <a:r>
-                    <a:rPr lang="en-US" sz="1600" dirty="0"/>
-                    <a:t>Select next action from the  current </a:t>
+                    <a:rPr lang="en-US" sz="1400" dirty="0"/>
+                    <a:t>On-policy: Select next action from the  current </a:t>
                   </a:r>
                   <a14:m>
                     <m:oMath xmlns:m="http://schemas.openxmlformats.org/officeDocument/2006/math">
                       <m:r>
-                        <a:rPr lang="en-US" sz="1600" b="0" i="1" smtClean="0">
+                        <a:rPr lang="en-US" sz="1400" b="0" i="1" smtClean="0">
                           <a:latin typeface="Cambria Math" panose="02040503050406030204" pitchFamily="18" charset="0"/>
                         </a:rPr>
                         <m:t>𝜋</m:t>
                       </m:r>
                     </m:oMath>
                   </a14:m>
-                  <a:endParaRPr lang="en-US" sz="1600" dirty="0"/>
+                  <a:endParaRPr lang="en-US" sz="1400" dirty="0"/>
                 </a:p>
               </p:txBody>
             </p:sp>
@@ -6050,20 +6115,20 @@
               </p:nvSpPr>
               <p:spPr>
                 <a:xfrm>
-                  <a:off x="10135182" y="4055469"/>
-                  <a:ext cx="1892619" cy="543806"/>
+                  <a:off x="9856838" y="4018671"/>
+                  <a:ext cx="2264824" cy="449306"/>
                 </a:xfrm>
                 <a:prstGeom prst="wedgeRoundRectCallout">
                   <a:avLst>
-                    <a:gd name="adj1" fmla="val -56378"/>
-                    <a:gd name="adj2" fmla="val 60588"/>
+                    <a:gd name="adj1" fmla="val -40849"/>
+                    <a:gd name="adj2" fmla="val 74156"/>
                     <a:gd name="adj3" fmla="val 16667"/>
                   </a:avLst>
                 </a:prstGeom>
                 <a:blipFill>
                   <a:blip r:embed="rId8"/>
                   <a:stretch>
-                    <a:fillRect t="-4854" b="-2913"/>
+                    <a:fillRect t="-6250"/>
                   </a:stretch>
                 </a:blipFill>
               </p:spPr>
@@ -6262,7 +6327,10 @@
           <a:bodyPr/>
           <a:lstStyle/>
           <a:p>
-            <a:endParaRPr lang="en-US"/>
+            <a:r>
+              <a:rPr lang="en-US" dirty="0"/>
+              <a:t>Add importance sampling ratios to prediction and control.</a:t>
+            </a:r>
           </a:p>
         </p:txBody>
       </p:sp>
@@ -6398,7 +6466,7 @@
             <p:spPr/>
             <p:txBody>
               <a:bodyPr>
-                <a:normAutofit fontScale="77500" lnSpcReduction="20000"/>
+                <a:normAutofit fontScale="70000" lnSpcReduction="20000"/>
               </a:bodyPr>
               <a:lstStyle/>
               <a:p>
@@ -6408,7 +6476,7 @@
                 </a:r>
                 <a:r>
                   <a:rPr lang="en-US" dirty="0"/>
-                  <a:t>: Learn target policy </a:t>
+                  <a:t>: Learn a deterministic target policy </a:t>
                 </a:r>
                 <a14:m>
                   <m:oMath xmlns:m="http://schemas.openxmlformats.org/officeDocument/2006/math">
@@ -6422,7 +6490,7 @@
                 </a14:m>
                 <a:r>
                   <a:rPr lang="en-US" dirty="0"/>
-                  <a:t> using behavioral policy </a:t>
+                  <a:t> using an exploring (soft) behavioral policy </a:t>
                 </a:r>
                 <a14:m>
                   <m:oMath xmlns:m="http://schemas.openxmlformats.org/officeDocument/2006/math">
@@ -6538,49 +6606,12 @@
                         </a:rPr>
                         <m:t>=</m:t>
                       </m:r>
-                      <m:sSub>
-                        <m:sSubPr>
-                          <m:ctrlPr>
-                            <a:rPr lang="en-US" i="1">
-                              <a:latin typeface="Cambria Math" panose="02040503050406030204" pitchFamily="18" charset="0"/>
-                            </a:rPr>
-                          </m:ctrlPr>
-                        </m:sSubPr>
-                        <m:e>
-                          <m:r>
-                            <a:rPr lang="en-US" i="1">
-                              <a:latin typeface="Cambria Math" panose="02040503050406030204" pitchFamily="18" charset="0"/>
-                            </a:rPr>
-                            <m:t>𝑉</m:t>
-                          </m:r>
-                        </m:e>
-                        <m:sub>
-                          <m:r>
-                            <a:rPr lang="en-US" i="1">
-                              <a:latin typeface="Cambria Math" panose="02040503050406030204" pitchFamily="18" charset="0"/>
-                            </a:rPr>
-                            <m:t>𝑡</m:t>
-                          </m:r>
-                          <m:r>
-                            <a:rPr lang="en-US" i="1">
-                              <a:latin typeface="Cambria Math" panose="02040503050406030204" pitchFamily="18" charset="0"/>
-                            </a:rPr>
-                            <m:t>+</m:t>
-                          </m:r>
-                          <m:r>
-                            <a:rPr lang="en-US" i="1">
-                              <a:latin typeface="Cambria Math" panose="02040503050406030204" pitchFamily="18" charset="0"/>
-                            </a:rPr>
-                            <m:t>𝑛</m:t>
-                          </m:r>
-                          <m:r>
-                            <a:rPr lang="en-US" i="1">
-                              <a:latin typeface="Cambria Math" panose="02040503050406030204" pitchFamily="18" charset="0"/>
-                            </a:rPr>
-                            <m:t>−1</m:t>
-                          </m:r>
-                        </m:sub>
-                      </m:sSub>
+                      <m:r>
+                        <a:rPr lang="en-US" b="0" i="1" smtClean="0">
+                          <a:latin typeface="Cambria Math" panose="02040503050406030204" pitchFamily="18" charset="0"/>
+                        </a:rPr>
+                        <m:t>𝑉</m:t>
+                      </m:r>
                       <m:d>
                         <m:dPr>
                           <m:ctrlPr>
@@ -6750,49 +6781,12 @@
                             </a:rPr>
                             <m:t>−</m:t>
                           </m:r>
-                          <m:sSub>
-                            <m:sSubPr>
-                              <m:ctrlPr>
-                                <a:rPr lang="en-US" i="1">
-                                  <a:latin typeface="Cambria Math" panose="02040503050406030204" pitchFamily="18" charset="0"/>
-                                </a:rPr>
-                              </m:ctrlPr>
-                            </m:sSubPr>
-                            <m:e>
-                              <m:r>
-                                <a:rPr lang="en-US" i="1">
-                                  <a:latin typeface="Cambria Math" panose="02040503050406030204" pitchFamily="18" charset="0"/>
-                                </a:rPr>
-                                <m:t>𝑉</m:t>
-                              </m:r>
-                            </m:e>
-                            <m:sub>
-                              <m:r>
-                                <a:rPr lang="en-US" i="1">
-                                  <a:latin typeface="Cambria Math" panose="02040503050406030204" pitchFamily="18" charset="0"/>
-                                </a:rPr>
-                                <m:t>𝑡</m:t>
-                              </m:r>
-                              <m:r>
-                                <a:rPr lang="en-US" i="1">
-                                  <a:latin typeface="Cambria Math" panose="02040503050406030204" pitchFamily="18" charset="0"/>
-                                </a:rPr>
-                                <m:t>+</m:t>
-                              </m:r>
-                              <m:r>
-                                <a:rPr lang="en-US" i="1">
-                                  <a:latin typeface="Cambria Math" panose="02040503050406030204" pitchFamily="18" charset="0"/>
-                                </a:rPr>
-                                <m:t>𝑛</m:t>
-                              </m:r>
-                              <m:r>
-                                <a:rPr lang="en-US" i="1">
-                                  <a:latin typeface="Cambria Math" panose="02040503050406030204" pitchFamily="18" charset="0"/>
-                                </a:rPr>
-                                <m:t>−1</m:t>
-                              </m:r>
-                            </m:sub>
-                          </m:sSub>
+                          <m:r>
+                            <a:rPr lang="en-US" b="0" i="1" smtClean="0">
+                              <a:latin typeface="Cambria Math" panose="02040503050406030204" pitchFamily="18" charset="0"/>
+                            </a:rPr>
+                            <m:t>𝑉</m:t>
+                          </m:r>
                           <m:d>
                             <m:dPr>
                               <m:ctrlPr>
@@ -7181,7 +7175,7 @@
                 </a14:m>
                 <a:r>
                   <a:rPr lang="en-US" dirty="0"/>
-                  <a:t>-step TD or </a:t>
+                  <a:t>-step TD for prediction or in </a:t>
                 </a:r>
                 <a14:m>
                   <m:oMath xmlns:m="http://schemas.openxmlformats.org/officeDocument/2006/math">
@@ -7195,13 +7189,20 @@
                 </a14:m>
                 <a:r>
                   <a:rPr lang="en-US" dirty="0"/>
-                  <a:t>-step Sarsa.</a:t>
+                  <a:t>-step Sarsa for control.</a:t>
                 </a:r>
               </a:p>
               <a:p>
+                <a:endParaRPr lang="en-US" dirty="0"/>
+              </a:p>
+              <a:p>
+                <a:r>
+                  <a:rPr lang="en-US" b="1" dirty="0"/>
+                  <a:t>Note</a:t>
+                </a:r>
                 <a:r>
                   <a:rPr lang="en-US" dirty="0"/>
-                  <a:t>Note: Since the behavioral policy provides exploration, we can learn the best (greedy) policy.</a:t>
+                  <a:t>: Since the soft behavioral policy provides exploration, we can learn the optimal deterministic policy!</a:t>
                 </a:r>
               </a:p>
               <a:p>
@@ -7234,7 +7235,7 @@
               <a:blipFill>
                 <a:blip r:embed="rId3"/>
                 <a:stretch>
-                  <a:fillRect l="-696" t="-2551"/>
+                  <a:fillRect l="-522" t="-2168"/>
                 </a:stretch>
               </a:blipFill>
             </p:spPr>
@@ -7253,59 +7254,125 @@
           </p:sp>
         </mc:Fallback>
       </mc:AlternateContent>
-      <p:sp>
-        <p:nvSpPr>
-          <p:cNvPr id="4" name="Speech Bubble: Rectangle with Corners Rounded 3">
-            <a:extLst>
-              <a:ext uri="{FF2B5EF4-FFF2-40B4-BE49-F238E27FC236}">
-                <a16:creationId xmlns:a16="http://schemas.microsoft.com/office/drawing/2014/main" id="{B552D126-208B-494D-2625-5FF1C93AC51E}"/>
-              </a:ext>
-            </a:extLst>
-          </p:cNvPr>
-          <p:cNvSpPr/>
-          <p:nvPr/>
-        </p:nvSpPr>
-        <p:spPr>
-          <a:xfrm>
-            <a:off x="8892330" y="3665989"/>
-            <a:ext cx="2118220" cy="1044429"/>
-          </a:xfrm>
-          <a:prstGeom prst="wedgeRoundRectCallout">
-            <a:avLst>
-              <a:gd name="adj1" fmla="val -100549"/>
-              <a:gd name="adj2" fmla="val 7530"/>
-              <a:gd name="adj3" fmla="val 16667"/>
-            </a:avLst>
-          </a:prstGeom>
-        </p:spPr>
-        <p:style>
-          <a:lnRef idx="2">
-            <a:schemeClr val="accent2">
-              <a:shade val="15000"/>
-            </a:schemeClr>
-          </a:lnRef>
-          <a:fillRef idx="1">
-            <a:schemeClr val="accent2"/>
-          </a:fillRef>
-          <a:effectRef idx="0">
-            <a:schemeClr val="accent2"/>
-          </a:effectRef>
-          <a:fontRef idx="minor">
-            <a:schemeClr val="lt1"/>
-          </a:fontRef>
-        </p:style>
-        <p:txBody>
-          <a:bodyPr rtlCol="0" anchor="ctr"/>
-          <a:lstStyle/>
-          <a:p>
-            <a:pPr algn="ctr"/>
-            <a:r>
-              <a:rPr lang="en-US" dirty="0"/>
-              <a:t>Probability that 𝑏 chooses the same actions as 𝜋</a:t>
-            </a:r>
-          </a:p>
-        </p:txBody>
-      </p:sp>
+      <mc:AlternateContent xmlns:mc="http://schemas.openxmlformats.org/markup-compatibility/2006" xmlns:a14="http://schemas.microsoft.com/office/drawing/2010/main">
+        <mc:Choice Requires="a14">
+          <p:sp>
+            <p:nvSpPr>
+              <p:cNvPr id="4" name="Speech Bubble: Rectangle with Corners Rounded 3">
+                <a:extLst>
+                  <a:ext uri="{FF2B5EF4-FFF2-40B4-BE49-F238E27FC236}">
+                    <a16:creationId xmlns:a16="http://schemas.microsoft.com/office/drawing/2014/main" id="{B552D126-208B-494D-2625-5FF1C93AC51E}"/>
+                  </a:ext>
+                </a:extLst>
+              </p:cNvPr>
+              <p:cNvSpPr/>
+              <p:nvPr/>
+            </p:nvSpPr>
+            <p:spPr>
+              <a:xfrm>
+                <a:off x="8690693" y="3478420"/>
+                <a:ext cx="2118220" cy="1044429"/>
+              </a:xfrm>
+              <a:prstGeom prst="wedgeRoundRectCallout">
+                <a:avLst>
+                  <a:gd name="adj1" fmla="val -100549"/>
+                  <a:gd name="adj2" fmla="val 7530"/>
+                  <a:gd name="adj3" fmla="val 16667"/>
+                </a:avLst>
+              </a:prstGeom>
+            </p:spPr>
+            <p:style>
+              <a:lnRef idx="2">
+                <a:schemeClr val="accent2">
+                  <a:shade val="15000"/>
+                </a:schemeClr>
+              </a:lnRef>
+              <a:fillRef idx="1">
+                <a:schemeClr val="accent2"/>
+              </a:fillRef>
+              <a:effectRef idx="0">
+                <a:schemeClr val="accent2"/>
+              </a:effectRef>
+              <a:fontRef idx="minor">
+                <a:schemeClr val="lt1"/>
+              </a:fontRef>
+            </p:style>
+            <p:txBody>
+              <a:bodyPr rtlCol="0" anchor="ctr"/>
+              <a:lstStyle/>
+              <a:p>
+                <a:pPr algn="ctr"/>
+                <a:r>
+                  <a:rPr lang="en-US" dirty="0"/>
+                  <a:t>How likely is 𝜋 to choose an action compared to </a:t>
+                </a:r>
+                <a14:m>
+                  <m:oMath xmlns:m="http://schemas.openxmlformats.org/officeDocument/2006/math">
+                    <m:r>
+                      <a:rPr lang="en-US" b="0" i="1" smtClean="0">
+                        <a:latin typeface="Cambria Math" panose="02040503050406030204" pitchFamily="18" charset="0"/>
+                      </a:rPr>
+                      <m:t>𝑏</m:t>
+                    </m:r>
+                  </m:oMath>
+                </a14:m>
+                <a:r>
+                  <a:rPr lang="en-US" dirty="0"/>
+                  <a:t>? </a:t>
+                </a:r>
+              </a:p>
+            </p:txBody>
+          </p:sp>
+        </mc:Choice>
+        <mc:Fallback xmlns="">
+          <p:sp>
+            <p:nvSpPr>
+              <p:cNvPr id="4" name="Speech Bubble: Rectangle with Corners Rounded 3">
+                <a:extLst>
+                  <a:ext uri="{FF2B5EF4-FFF2-40B4-BE49-F238E27FC236}">
+                    <a16:creationId xmlns:a16="http://schemas.microsoft.com/office/drawing/2014/main" id="{B552D126-208B-494D-2625-5FF1C93AC51E}"/>
+                  </a:ext>
+                </a:extLst>
+              </p:cNvPr>
+              <p:cNvSpPr>
+                <a:spLocks noRot="1" noChangeAspect="1" noMove="1" noResize="1" noEditPoints="1" noAdjustHandles="1" noChangeArrowheads="1" noChangeShapeType="1" noTextEdit="1"/>
+              </p:cNvSpPr>
+              <p:nvPr/>
+            </p:nvSpPr>
+            <p:spPr>
+              <a:xfrm>
+                <a:off x="8690693" y="3478420"/>
+                <a:ext cx="2118220" cy="1044429"/>
+              </a:xfrm>
+              <a:prstGeom prst="wedgeRoundRectCallout">
+                <a:avLst>
+                  <a:gd name="adj1" fmla="val -100549"/>
+                  <a:gd name="adj2" fmla="val 7530"/>
+                  <a:gd name="adj3" fmla="val 16667"/>
+                </a:avLst>
+              </a:prstGeom>
+              <a:blipFill>
+                <a:blip r:embed="rId4"/>
+                <a:stretch>
+                  <a:fillRect b="-2299"/>
+                </a:stretch>
+              </a:blipFill>
+            </p:spPr>
+            <p:txBody>
+              <a:bodyPr/>
+              <a:lstStyle/>
+              <a:p>
+                <a:r>
+                  <a:rPr lang="en-US">
+                    <a:noFill/>
+                  </a:rPr>
+                  <a:t> </a:t>
+                </a:r>
+              </a:p>
+            </p:txBody>
+          </p:sp>
+        </mc:Fallback>
+      </mc:AlternateContent>
     </p:spTree>
     <p:extLst>
       <p:ext uri="{BB962C8B-B14F-4D97-AF65-F5344CB8AC3E}">
@@ -7388,7 +7455,7 @@
         </p:blipFill>
         <p:spPr>
           <a:xfrm>
-            <a:off x="439429" y="1497795"/>
+            <a:off x="324622" y="1553598"/>
             <a:ext cx="5205999" cy="4379580"/>
           </a:xfrm>
           <a:prstGeom prst="rect">
@@ -7552,9 +7619,9 @@
         <p:grpSpPr>
           <a:xfrm>
             <a:off x="5659709" y="1062757"/>
-            <a:ext cx="6430497" cy="5674134"/>
+            <a:ext cx="6430497" cy="5673149"/>
             <a:chOff x="5659709" y="1062757"/>
-            <a:chExt cx="6430497" cy="5674134"/>
+            <a:chExt cx="6430497" cy="5673149"/>
           </a:xfrm>
         </p:grpSpPr>
         <p:grpSp>
@@ -7572,9 +7639,9 @@
           <p:grpSpPr>
             <a:xfrm>
               <a:off x="5659709" y="1062757"/>
-              <a:ext cx="6430497" cy="5674134"/>
+              <a:ext cx="6430497" cy="5673149"/>
               <a:chOff x="5659709" y="1062757"/>
-              <a:chExt cx="6430497" cy="5674134"/>
+              <a:chExt cx="6430497" cy="5673149"/>
             </a:xfrm>
           </p:grpSpPr>
           <p:pic>
@@ -7755,7 +7822,7 @@
                 <a:pPr algn="ctr"/>
                 <a:r>
                   <a:rPr lang="en-US" sz="1600" dirty="0"/>
-                  <a:t>Importance sampling ratio</a:t>
+                  <a:t>Use importance sampling ratio</a:t>
                 </a:r>
               </a:p>
             </p:txBody>
@@ -7868,23 +7935,39 @@
             </p:nvSpPr>
             <p:spPr>
               <a:xfrm>
-                <a:off x="6685241" y="6152116"/>
-                <a:ext cx="4652271" cy="584775"/>
+                <a:off x="5942112" y="6151131"/>
+                <a:ext cx="5458761" cy="584775"/>
               </a:xfrm>
               <a:prstGeom prst="rect">
                 <a:avLst/>
               </a:prstGeom>
-              <a:noFill/>
             </p:spPr>
+            <p:style>
+              <a:lnRef idx="2">
+                <a:schemeClr val="accent2">
+                  <a:shade val="15000"/>
+                </a:schemeClr>
+              </a:lnRef>
+              <a:fillRef idx="1">
+                <a:schemeClr val="accent2"/>
+              </a:fillRef>
+              <a:effectRef idx="0">
+                <a:schemeClr val="accent2"/>
+              </a:effectRef>
+              <a:fontRef idx="minor">
+                <a:schemeClr val="lt1"/>
+              </a:fontRef>
+            </p:style>
             <p:txBody>
               <a:bodyPr wrap="square" rtlCol="0">
                 <a:spAutoFit/>
               </a:bodyPr>
               <a:lstStyle/>
               <a:p>
+                <a:pPr algn="ctr"/>
                 <a:r>
                   <a:rPr lang="en-US" sz="1600" dirty="0"/>
-                  <a:t>The behavioral policy provides exploration do we can learn a greedy policy!</a:t>
+                  <a:t>Off-Policy: The behavioral policy provides exploration so we can learn a deterministic policy!</a:t>
                 </a:r>
               </a:p>
             </p:txBody>
@@ -7999,8 +8082,8 @@
         </p:nvSpPr>
         <p:spPr>
           <a:xfrm>
-            <a:off x="5430527" y="3245771"/>
-            <a:ext cx="458363" cy="767817"/>
+            <a:off x="5326967" y="3245771"/>
+            <a:ext cx="561924" cy="767817"/>
           </a:xfrm>
           <a:prstGeom prst="rightArrow">
             <a:avLst/>
@@ -8084,6 +8167,57 @@
           </a:p>
         </p:txBody>
       </p:sp>
+      <p:sp>
+        <p:nvSpPr>
+          <p:cNvPr id="17" name="TextBox 16">
+            <a:extLst>
+              <a:ext uri="{FF2B5EF4-FFF2-40B4-BE49-F238E27FC236}">
+                <a16:creationId xmlns:a16="http://schemas.microsoft.com/office/drawing/2014/main" id="{5CC12FB8-8201-418B-E7F3-1FC2FCBE894E}"/>
+              </a:ext>
+            </a:extLst>
+          </p:cNvPr>
+          <p:cNvSpPr txBox="1"/>
+          <p:nvPr/>
+        </p:nvSpPr>
+        <p:spPr>
+          <a:xfrm>
+            <a:off x="2355455" y="3244334"/>
+            <a:ext cx="1373945" cy="369332"/>
+          </a:xfrm>
+          <a:prstGeom prst="rect">
+            <a:avLst/>
+          </a:prstGeom>
+        </p:spPr>
+        <p:style>
+          <a:lnRef idx="2">
+            <a:schemeClr val="accent1">
+              <a:shade val="15000"/>
+            </a:schemeClr>
+          </a:lnRef>
+          <a:fillRef idx="1">
+            <a:schemeClr val="accent1"/>
+          </a:fillRef>
+          <a:effectRef idx="0">
+            <a:schemeClr val="accent1"/>
+          </a:effectRef>
+          <a:fontRef idx="minor">
+            <a:schemeClr val="lt1"/>
+          </a:fontRef>
+        </p:style>
+        <p:txBody>
+          <a:bodyPr wrap="square" rtlCol="0">
+            <a:spAutoFit/>
+          </a:bodyPr>
+          <a:lstStyle/>
+          <a:p>
+            <a:pPr algn="ctr"/>
+            <a:r>
+              <a:rPr lang="en-US" dirty="0"/>
+              <a:t>On-Policy</a:t>
+            </a:r>
+          </a:p>
+        </p:txBody>
+      </p:sp>
     </p:spTree>
     <p:extLst>
       <p:ext uri="{BB962C8B-B14F-4D97-AF65-F5344CB8AC3E}">
@@ -8100,6 +8234,14 @@
 <file path=ppt/slides/slide16.xml><?xml version="1.0" encoding="utf-8"?>
 <p:sld xmlns:a="http://schemas.openxmlformats.org/drawingml/2006/main" xmlns:r="http://schemas.openxmlformats.org/officeDocument/2006/relationships" xmlns:p="http://schemas.openxmlformats.org/presentationml/2006/main">
   <p:cSld>
+    <p:bg>
+      <p:bgPr>
+        <a:solidFill>
+          <a:schemeClr val="bg1"/>
+        </a:solidFill>
+        <a:effectLst/>
+      </p:bgPr>
+    </p:bg>
     <p:spTree>
       <p:nvGrpSpPr>
         <p:cNvPr id="1" name=""/>
@@ -8114,6 +8256,73 @@
           <a:chExt cx="0" cy="0"/>
         </a:xfrm>
       </p:grpSpPr>
+      <p:sp useBgFill="1">
+        <p:nvSpPr>
+          <p:cNvPr id="18" name="Rectangle 17">
+            <a:extLst>
+              <a:ext uri="{FF2B5EF4-FFF2-40B4-BE49-F238E27FC236}">
+                <a16:creationId xmlns:a16="http://schemas.microsoft.com/office/drawing/2014/main" id="{E81BF4F6-F2CF-4984-9D14-D6966D92F99F}"/>
+              </a:ext>
+              <a:ext uri="{C183D7F6-B498-43B3-948B-1728B52AA6E4}">
+                <adec:decorative xmlns:adec="http://schemas.microsoft.com/office/drawing/2017/decorative" val="1"/>
+              </a:ext>
+            </a:extLst>
+          </p:cNvPr>
+          <p:cNvSpPr>
+            <a:spLocks noGrp="1" noRot="1" noChangeAspect="1" noMove="1" noResize="1" noEditPoints="1" noAdjustHandles="1" noChangeArrowheads="1" noChangeShapeType="1" noTextEdit="1"/>
+          </p:cNvSpPr>
+          <p:nvPr>
+            <p:extLst>
+              <p:ext uri="{386F3935-93C4-4BCD-93E2-E3B085C9AB24}">
+                <p16:designElem xmlns:p16="http://schemas.microsoft.com/office/powerpoint/2015/main" val="1"/>
+              </p:ext>
+            </p:extLst>
+          </p:nvPr>
+        </p:nvSpPr>
+        <p:spPr>
+          <a:xfrm rot="16200000">
+            <a:off x="-380997" y="381001"/>
+            <a:ext cx="6858001" cy="6095995"/>
+          </a:xfrm>
+          <a:prstGeom prst="rect">
+            <a:avLst/>
+          </a:prstGeom>
+          <a:ln>
+            <a:noFill/>
+          </a:ln>
+          <a:effectLst>
+            <a:outerShdw blurRad="381000" dist="101600" sx="99000" sy="99000" algn="l" rotWithShape="0">
+              <a:prstClr val="black">
+                <a:alpha val="12000"/>
+              </a:prstClr>
+            </a:outerShdw>
+          </a:effectLst>
+        </p:spPr>
+        <p:style>
+          <a:lnRef idx="2">
+            <a:schemeClr val="accent1">
+              <a:shade val="50000"/>
+            </a:schemeClr>
+          </a:lnRef>
+          <a:fillRef idx="1">
+            <a:schemeClr val="accent1"/>
+          </a:fillRef>
+          <a:effectRef idx="0">
+            <a:schemeClr val="accent1"/>
+          </a:effectRef>
+          <a:fontRef idx="minor">
+            <a:schemeClr val="lt1"/>
+          </a:fontRef>
+        </p:style>
+        <p:txBody>
+          <a:bodyPr rtlCol="0" anchor="ctr"/>
+          <a:lstStyle/>
+          <a:p>
+            <a:pPr algn="ctr"/>
+            <a:endParaRPr lang="en-US"/>
+          </a:p>
+        </p:txBody>
+      </p:sp>
       <p:sp>
         <p:nvSpPr>
           <p:cNvPr id="2" name="Title 1">
@@ -8130,20 +8339,77 @@
             <p:ph type="title"/>
           </p:nvPr>
         </p:nvSpPr>
-        <p:spPr/>
+        <p:spPr>
+          <a:xfrm>
+            <a:off x="707413" y="4544704"/>
+            <a:ext cx="4792635" cy="1811645"/>
+          </a:xfrm>
+        </p:spPr>
         <p:txBody>
-          <a:bodyPr/>
+          <a:bodyPr anchor="ctr">
+            <a:normAutofit/>
+          </a:bodyPr>
           <a:lstStyle/>
           <a:p>
             <a:r>
-              <a:rPr lang="en-US" dirty="0"/>
+              <a:rPr lang="en-US" sz="3600" dirty="0"/>
               <a:t>What you Need to Know</a:t>
             </a:r>
           </a:p>
         </p:txBody>
       </p:sp>
-      <mc:AlternateContent xmlns:mc="http://schemas.openxmlformats.org/markup-compatibility/2006">
-        <mc:Choice xmlns:a14="http://schemas.microsoft.com/office/drawing/2010/main" Requires="a14">
+      <p:pic>
+        <p:nvPicPr>
+          <p:cNvPr id="4" name="Picture 3">
+            <a:extLst>
+              <a:ext uri="{FF2B5EF4-FFF2-40B4-BE49-F238E27FC236}">
+                <a16:creationId xmlns:a16="http://schemas.microsoft.com/office/drawing/2014/main" id="{0344F555-26B8-BE90-E588-B24F3A239A43}"/>
+              </a:ext>
+              <a:ext uri="{C183D7F6-B498-43B3-948B-1728B52AA6E4}">
+                <adec:decorative xmlns:adec="http://schemas.microsoft.com/office/drawing/2017/decorative" val="1"/>
+              </a:ext>
+            </a:extLst>
+          </p:cNvPr>
+          <p:cNvPicPr>
+            <a:picLocks noChangeAspect="1" noChangeArrowheads="1"/>
+          </p:cNvPicPr>
+          <p:nvPr/>
+        </p:nvPicPr>
+        <p:blipFill rotWithShape="1">
+          <a:blip r:embed="rId2">
+            <a:extLst>
+              <a:ext uri="{28A0092B-C50C-407E-A947-70E740481C1C}">
+                <a14:useLocalDpi xmlns:a14="http://schemas.microsoft.com/office/drawing/2010/main" val="0"/>
+              </a:ext>
+            </a:extLst>
+          </a:blip>
+          <a:srcRect r="1110" b="-1"/>
+          <a:stretch>
+            <a:fillRect/>
+          </a:stretch>
+        </p:blipFill>
+        <p:spPr bwMode="auto">
+          <a:xfrm>
+            <a:off x="-1" y="10"/>
+            <a:ext cx="6096001" cy="4114790"/>
+          </a:xfrm>
+          <a:prstGeom prst="rect">
+            <a:avLst/>
+          </a:prstGeom>
+          <a:noFill/>
+          <a:extLst>
+            <a:ext uri="{909E8E84-426E-40DD-AFC4-6F175D3DCCD1}">
+              <a14:hiddenFill xmlns:a14="http://schemas.microsoft.com/office/drawing/2010/main">
+                <a:solidFill>
+                  <a:srgbClr val="FFFFFF"/>
+                </a:solidFill>
+              </a14:hiddenFill>
+            </a:ext>
+          </a:extLst>
+        </p:spPr>
+      </p:pic>
+      <mc:AlternateContent xmlns:mc="http://schemas.openxmlformats.org/markup-compatibility/2006" xmlns:a14="http://schemas.microsoft.com/office/drawing/2010/main">
+        <mc:Choice Requires="a14">
           <p:sp>
             <p:nvSpPr>
               <p:cNvPr id="3" name="Content Placeholder 2">
@@ -8160,17 +8426,22 @@
                 <p:ph idx="1"/>
               </p:nvPr>
             </p:nvSpPr>
-            <p:spPr/>
+            <p:spPr>
+              <a:xfrm>
+                <a:off x="6289657" y="691912"/>
+                <a:ext cx="5506608" cy="5755780"/>
+              </a:xfrm>
+            </p:spPr>
             <p:txBody>
-              <a:bodyPr>
-                <a:normAutofit fontScale="77500" lnSpcReduction="20000"/>
+              <a:bodyPr anchor="ctr">
+                <a:normAutofit fontScale="92500" lnSpcReduction="10000"/>
               </a:bodyPr>
               <a:lstStyle/>
               <a:p>
                 <a14:m>
                   <m:oMath xmlns:m="http://schemas.openxmlformats.org/officeDocument/2006/math">
                     <m:r>
-                      <a:rPr lang="en-US" b="0" i="1" smtClean="0">
+                      <a:rPr lang="en-US" sz="1800" b="0" i="1">
                         <a:latin typeface="Cambria Math" panose="02040503050406030204" pitchFamily="18" charset="0"/>
                       </a:rPr>
                       <m:t>𝑛</m:t>
@@ -8178,40 +8449,48 @@
                   </m:oMath>
                 </a14:m>
                 <a:r>
-                  <a:rPr lang="en-US" dirty="0"/>
-                  <a:t>-step methods let us vary the learning behavior between on-step DT methods and Monte Carlo Methods (whole episode).</a:t>
+                  <a:rPr lang="en-US" sz="1800" dirty="0"/>
+                  <a:t>-step methods let us vary the learning behavior between one-step DT methods and Monte Carlo Methods (whole episode).</a:t>
                 </a:r>
               </a:p>
               <a:p>
-                <a:endParaRPr lang="en-US" dirty="0"/>
+                <a:endParaRPr lang="en-US" sz="1800" dirty="0"/>
               </a:p>
               <a:p>
                 <a:r>
-                  <a:rPr lang="en-US" dirty="0"/>
+                  <a:rPr lang="en-US" sz="1800" dirty="0"/>
                   <a:t>Advantage: </a:t>
                 </a:r>
               </a:p>
               <a:p>
                 <a:pPr lvl="1"/>
                 <a:r>
-                  <a:rPr lang="en-US" b="1" dirty="0"/>
+                  <a:rPr lang="en-US" sz="1800" b="1" dirty="0"/>
                   <a:t>Learning</a:t>
                 </a:r>
                 <a:r>
-                  <a:rPr lang="en-US" dirty="0"/>
+                  <a:rPr lang="en-US" sz="1800" dirty="0"/>
                   <a:t>: Looking more steps ahead speeds up learning, especially for sparse rewards.</a:t>
                 </a:r>
               </a:p>
               <a:p>
                 <a:pPr lvl="1"/>
                 <a:r>
-                  <a:rPr lang="en-US" dirty="0"/>
-                  <a:t>An intermediate amount of bootstrapping typically performs better than the one-step and MC extremes. </a:t>
+                  <a:rPr lang="en-US" sz="1800" dirty="0"/>
+                  <a:t>An intermediate amount of bootstrapping typically </a:t>
+                </a:r>
+                <a:r>
+                  <a:rPr lang="en-US" sz="1800" b="1" dirty="0"/>
+                  <a:t>performs better </a:t>
+                </a:r>
+                <a:r>
+                  <a:rPr lang="en-US" sz="1800" dirty="0"/>
+                  <a:t>than the one-step and MC extremes. </a:t>
                 </a:r>
                 <a14:m>
                   <m:oMath xmlns:m="http://schemas.openxmlformats.org/officeDocument/2006/math">
                     <m:r>
-                      <a:rPr lang="en-US" b="0" i="1" smtClean="0">
+                      <a:rPr lang="en-US" sz="1800" b="0" i="1">
                         <a:latin typeface="Cambria Math" panose="02040503050406030204" pitchFamily="18" charset="0"/>
                       </a:rPr>
                       <m:t>𝑛</m:t>
@@ -8219,33 +8498,33 @@
                   </m:oMath>
                 </a14:m>
                 <a:r>
-                  <a:rPr lang="en-US" dirty="0"/>
+                  <a:rPr lang="en-US" sz="1800" dirty="0"/>
                   <a:t> is application-dependent and can be tuned.</a:t>
                 </a:r>
               </a:p>
               <a:p>
-                <a:endParaRPr lang="en-US" dirty="0"/>
+                <a:endParaRPr lang="en-US" sz="1800" dirty="0"/>
               </a:p>
               <a:p>
                 <a:r>
-                  <a:rPr lang="en-US" dirty="0"/>
+                  <a:rPr lang="en-US" sz="1800" dirty="0"/>
                   <a:t>Drawback:</a:t>
                 </a:r>
               </a:p>
               <a:p>
                 <a:pPr lvl="1"/>
                 <a:r>
-                  <a:rPr lang="en-US" b="1" dirty="0"/>
+                  <a:rPr lang="en-US" sz="1800" b="1" dirty="0"/>
                   <a:t>Delay</a:t>
                 </a:r>
                 <a:r>
-                  <a:rPr lang="en-US" dirty="0"/>
+                  <a:rPr lang="en-US" sz="1800" dirty="0"/>
                   <a:t>: Updates are delayed </a:t>
                 </a:r>
                 <a14:m>
                   <m:oMath xmlns:m="http://schemas.openxmlformats.org/officeDocument/2006/math">
                     <m:r>
-                      <a:rPr lang="en-US" i="1">
+                      <a:rPr lang="en-US" sz="1800" i="1">
                         <a:latin typeface="Cambria Math" panose="02040503050406030204" pitchFamily="18" charset="0"/>
                       </a:rPr>
                       <m:t>𝑛</m:t>
@@ -8253,45 +8532,45 @@
                   </m:oMath>
                 </a14:m>
                 <a:r>
-                  <a:rPr lang="en-US" dirty="0"/>
-                  <a:t>-step since they need to know future events (actions and states).</a:t>
+                  <a:rPr lang="en-US" sz="1800" dirty="0"/>
+                  <a:t>-step since they need to know future events (rewards and states).</a:t>
                 </a:r>
               </a:p>
               <a:p>
                 <a:pPr lvl="1"/>
                 <a:r>
-                  <a:rPr lang="en-US" b="1" dirty="0"/>
+                  <a:rPr lang="en-US" sz="1800" b="1" dirty="0"/>
                   <a:t>Computation</a:t>
                 </a:r>
                 <a:r>
-                  <a:rPr lang="en-US" dirty="0"/>
+                  <a:rPr lang="en-US" sz="1800" dirty="0"/>
                   <a:t>: More computation per time step and higher memory needs than one-step methods.</a:t>
                 </a:r>
               </a:p>
               <a:p>
                 <a:pPr lvl="1"/>
-                <a:endParaRPr lang="en-US" dirty="0"/>
+                <a:endParaRPr lang="en-US" sz="1800" dirty="0"/>
               </a:p>
               <a:p>
                 <a:pPr marL="0" indent="0">
                   <a:buNone/>
                 </a:pPr>
                 <a:r>
-                  <a:rPr lang="en-US" b="1" dirty="0"/>
+                  <a:rPr lang="en-US" sz="1800" b="1" dirty="0"/>
                   <a:t>Eligibility traces </a:t>
                 </a:r>
                 <a:r>
-                  <a:rPr lang="en-US" dirty="0"/>
+                  <a:rPr lang="en-US" sz="1800" dirty="0"/>
                   <a:t>address the delay and computation drawbacks. We will cover these methods later.</a:t>
                 </a:r>
               </a:p>
               <a:p>
-                <a:endParaRPr lang="en-US" dirty="0"/>
+                <a:endParaRPr lang="en-US" sz="1400" dirty="0"/>
               </a:p>
             </p:txBody>
           </p:sp>
         </mc:Choice>
-        <mc:Fallback>
+        <mc:Fallback xmlns="">
           <p:sp>
             <p:nvSpPr>
               <p:cNvPr id="3" name="Content Placeholder 2">
@@ -8309,10 +8588,14 @@
               </p:nvPr>
             </p:nvSpPr>
             <p:spPr>
+              <a:xfrm>
+                <a:off x="6289657" y="691912"/>
+                <a:ext cx="5506608" cy="5755780"/>
+              </a:xfrm>
               <a:blipFill>
-                <a:blip r:embed="rId2"/>
+                <a:blip r:embed="rId3"/>
                 <a:stretch>
-                  <a:fillRect l="-754" t="-2551" r="-696"/>
+                  <a:fillRect l="-775" t="-424" r="-1218"/>
                 </a:stretch>
               </a:blipFill>
             </p:spPr>
@@ -8389,8 +8672,8 @@
           </a:p>
         </p:txBody>
       </p:sp>
-      <mc:AlternateContent xmlns:mc="http://schemas.openxmlformats.org/markup-compatibility/2006" xmlns:a14="http://schemas.microsoft.com/office/drawing/2010/main">
-        <mc:Choice Requires="a14">
+      <mc:AlternateContent xmlns:mc="http://schemas.openxmlformats.org/markup-compatibility/2006">
+        <mc:Choice xmlns:a14="http://schemas.microsoft.com/office/drawing/2010/main" Requires="a14">
           <p:sp>
             <p:nvSpPr>
               <p:cNvPr id="3" name="Content Placeholder 2">
@@ -8409,8 +8692,8 @@
             </p:nvSpPr>
             <p:spPr>
               <a:xfrm>
-                <a:off x="6211474" y="1140632"/>
-                <a:ext cx="5273179" cy="2049857"/>
+                <a:off x="822819" y="3658891"/>
+                <a:ext cx="5273179" cy="1902124"/>
               </a:xfrm>
             </p:spPr>
             <p:style>
@@ -8577,7 +8860,28 @@
                       <a:schemeClr val="tx1"/>
                     </a:solidFill>
                   </a:rPr>
-                  <a:t>	return from </a:t>
+                  <a:t>	</a:t>
+                </a:r>
+                <a14:m>
+                  <m:oMath xmlns:m="http://schemas.openxmlformats.org/officeDocument/2006/math">
+                    <m:r>
+                      <a:rPr lang="en-US" sz="1200" b="0" i="1" smtClean="0">
+                        <a:solidFill>
+                          <a:schemeClr val="tx1"/>
+                        </a:solidFill>
+                        <a:latin typeface="Cambria Math" panose="02040503050406030204" pitchFamily="18" charset="0"/>
+                      </a:rPr>
+                      <m:t>𝑛</m:t>
+                    </m:r>
+                  </m:oMath>
+                </a14:m>
+                <a:r>
+                  <a:rPr lang="en-US" sz="1200" dirty="0">
+                    <a:solidFill>
+                      <a:schemeClr val="tx1"/>
+                    </a:solidFill>
+                  </a:rPr>
+                  <a:t>-step return from </a:t>
                 </a:r>
                 <a14:m>
                   <m:oMath xmlns:m="http://schemas.openxmlformats.org/officeDocument/2006/math">
@@ -8622,6 +8926,20 @@
                   <a:t> (discounted and corrected)</a:t>
                 </a:r>
                 <a:endParaRPr lang="en-US" sz="1200" dirty="0"/>
+              </a:p>
+              <a:p>
+                <a:pPr marL="0" indent="0">
+                  <a:lnSpc>
+                    <a:spcPct val="100000"/>
+                  </a:lnSpc>
+                  <a:spcBef>
+                    <a:spcPts val="0"/>
+                  </a:spcBef>
+                  <a:buNone/>
+                </a:pPr>
+                <a:endParaRPr lang="en-US" sz="1200" i="1" dirty="0">
+                  <a:latin typeface="Cambria Math" panose="02040503050406030204" pitchFamily="18" charset="0"/>
+                </a:endParaRPr>
               </a:p>
               <a:p>
                 <a:pPr marL="0" indent="0">
@@ -9357,187 +9675,10 @@
                   </a:solidFill>
                 </a:endParaRPr>
               </a:p>
-              <a:p>
-                <a:pPr marL="0" indent="0">
-                  <a:spcBef>
-                    <a:spcPts val="0"/>
-                  </a:spcBef>
-                  <a:buNone/>
-                </a:pPr>
-                <a14:m>
-                  <m:oMath xmlns:m="http://schemas.openxmlformats.org/officeDocument/2006/math">
-                    <m:sSub>
-                      <m:sSubPr>
-                        <m:ctrlPr>
-                          <a:rPr lang="en-US" sz="1200" i="1" dirty="0">
-                            <a:solidFill>
-                              <a:schemeClr val="tx1"/>
-                            </a:solidFill>
-                            <a:latin typeface="Cambria Math" panose="02040503050406030204" pitchFamily="18" charset="0"/>
-                          </a:rPr>
-                        </m:ctrlPr>
-                      </m:sSubPr>
-                      <m:e>
-                        <m:acc>
-                          <m:accPr>
-                            <m:chr m:val="̅"/>
-                            <m:ctrlPr>
-                              <a:rPr lang="en-US" sz="1200" i="1" dirty="0">
-                                <a:solidFill>
-                                  <a:schemeClr val="tx1"/>
-                                </a:solidFill>
-                                <a:latin typeface="Cambria Math" panose="02040503050406030204" pitchFamily="18" charset="0"/>
-                              </a:rPr>
-                            </m:ctrlPr>
-                          </m:accPr>
-                          <m:e>
-                            <m:r>
-                              <a:rPr lang="en-US" sz="1200" i="1" dirty="0">
-                                <a:solidFill>
-                                  <a:schemeClr val="tx1"/>
-                                </a:solidFill>
-                                <a:latin typeface="Cambria Math" panose="02040503050406030204" pitchFamily="18" charset="0"/>
-                              </a:rPr>
-                              <m:t>𝑉</m:t>
-                            </m:r>
-                          </m:e>
-                        </m:acc>
-                      </m:e>
-                      <m:sub>
-                        <m:r>
-                          <a:rPr lang="en-US" sz="1200" i="1" dirty="0">
-                            <a:solidFill>
-                              <a:schemeClr val="tx1"/>
-                            </a:solidFill>
-                            <a:latin typeface="Cambria Math" panose="02040503050406030204" pitchFamily="18" charset="0"/>
-                          </a:rPr>
-                          <m:t>𝑡</m:t>
-                        </m:r>
-                      </m:sub>
-                    </m:sSub>
-                    <m:r>
-                      <a:rPr lang="en-US" sz="1200" i="1" dirty="0">
-                        <a:solidFill>
-                          <a:schemeClr val="tx1"/>
-                        </a:solidFill>
-                        <a:latin typeface="Cambria Math" panose="02040503050406030204" pitchFamily="18" charset="0"/>
-                      </a:rPr>
-                      <m:t>(</m:t>
-                    </m:r>
-                    <m:r>
-                      <a:rPr lang="en-US" sz="1200" i="1" dirty="0">
-                        <a:solidFill>
-                          <a:schemeClr val="tx1"/>
-                        </a:solidFill>
-                        <a:latin typeface="Cambria Math" panose="02040503050406030204" pitchFamily="18" charset="0"/>
-                      </a:rPr>
-                      <m:t>𝑠</m:t>
-                    </m:r>
-                    <m:r>
-                      <a:rPr lang="en-US" sz="1200" i="1" dirty="0">
-                        <a:solidFill>
-                          <a:schemeClr val="tx1"/>
-                        </a:solidFill>
-                        <a:latin typeface="Cambria Math" panose="02040503050406030204" pitchFamily="18" charset="0"/>
-                      </a:rPr>
-                      <m:t>) </m:t>
-                    </m:r>
-                  </m:oMath>
-                </a14:m>
-                <a:r>
-                  <a:rPr lang="en-US" sz="1200" dirty="0">
-                    <a:solidFill>
-                      <a:schemeClr val="tx1"/>
-                    </a:solidFill>
-                  </a:rPr>
-                  <a:t>	expected approximate action value</a:t>
-                </a:r>
-              </a:p>
-              <a:p>
-                <a:pPr marL="0" indent="0">
-                  <a:spcBef>
-                    <a:spcPts val="0"/>
-                  </a:spcBef>
-                  <a:buNone/>
-                </a:pPr>
-                <a14:m>
-                  <m:oMath xmlns:m="http://schemas.openxmlformats.org/officeDocument/2006/math">
-                    <m:sSub>
-                      <m:sSubPr>
-                        <m:ctrlPr>
-                          <a:rPr lang="en-US" sz="1200" i="1" dirty="0">
-                            <a:solidFill>
-                              <a:schemeClr val="tx1"/>
-                            </a:solidFill>
-                            <a:latin typeface="Cambria Math" panose="02040503050406030204" pitchFamily="18" charset="0"/>
-                          </a:rPr>
-                        </m:ctrlPr>
-                      </m:sSubPr>
-                      <m:e>
-                        <m:r>
-                          <a:rPr lang="en-US" sz="1200" i="1" dirty="0">
-                            <a:solidFill>
-                              <a:schemeClr val="tx1"/>
-                            </a:solidFill>
-                            <a:latin typeface="Cambria Math" panose="02040503050406030204" pitchFamily="18" charset="0"/>
-                          </a:rPr>
-                          <m:t>𝑈</m:t>
-                        </m:r>
-                      </m:e>
-                      <m:sub>
-                        <m:r>
-                          <a:rPr lang="en-US" sz="1200" i="1" dirty="0">
-                            <a:solidFill>
-                              <a:schemeClr val="tx1"/>
-                            </a:solidFill>
-                            <a:latin typeface="Cambria Math" panose="02040503050406030204" pitchFamily="18" charset="0"/>
-                          </a:rPr>
-                          <m:t>𝑡</m:t>
-                        </m:r>
-                      </m:sub>
-                    </m:sSub>
-                  </m:oMath>
-                </a14:m>
-                <a:r>
-                  <a:rPr lang="en-US" sz="1200" dirty="0">
-                    <a:solidFill>
-                      <a:schemeClr val="tx1"/>
-                    </a:solidFill>
-                  </a:rPr>
-                  <a:t>	target for estimate at time</a:t>
-                </a:r>
-                <a14:m>
-                  <m:oMath xmlns:m="http://schemas.openxmlformats.org/officeDocument/2006/math">
-                    <m:r>
-                      <a:rPr lang="en-US" sz="1200" i="1" dirty="0">
-                        <a:solidFill>
-                          <a:schemeClr val="tx1"/>
-                        </a:solidFill>
-                        <a:latin typeface="Cambria Math" panose="02040503050406030204" pitchFamily="18" charset="0"/>
-                      </a:rPr>
-                      <m:t> </m:t>
-                    </m:r>
-                    <m:r>
-                      <a:rPr lang="en-US" sz="1200" i="1" dirty="0">
-                        <a:solidFill>
-                          <a:schemeClr val="tx1"/>
-                        </a:solidFill>
-                        <a:latin typeface="Cambria Math" panose="02040503050406030204" pitchFamily="18" charset="0"/>
-                      </a:rPr>
-                      <m:t>𝑡</m:t>
-                    </m:r>
-                  </m:oMath>
-                </a14:m>
-                <a:endParaRPr lang="en-US" sz="1200" dirty="0">
-                  <a:solidFill>
-                    <a:schemeClr val="tx1"/>
-                  </a:solidFill>
-                </a:endParaRPr>
-              </a:p>
             </p:txBody>
           </p:sp>
         </mc:Choice>
-        <mc:Fallback xmlns="">
+        <mc:Fallback>
           <p:sp>
             <p:nvSpPr>
               <p:cNvPr id="3" name="Content Placeholder 2">
@@ -9556,13 +9697,13 @@
             </p:nvSpPr>
             <p:spPr>
               <a:xfrm>
-                <a:off x="6211474" y="1140632"/>
-                <a:ext cx="5273179" cy="2049857"/>
+                <a:off x="822819" y="3658891"/>
+                <a:ext cx="5273179" cy="1902124"/>
               </a:xfrm>
               <a:blipFill>
                 <a:blip r:embed="rId2"/>
                 <a:stretch>
-                  <a:fillRect b="-885"/>
+                  <a:fillRect b="-952"/>
                 </a:stretch>
               </a:blipFill>
             </p:spPr>
@@ -9850,7 +9991,7 @@
                 </a14:m>
                 <a:r>
                   <a:rPr lang="en-US" sz="1200" dirty="0"/>
-                  <a:t> selected from distribution</a:t>
+                  <a:t> selected from distribution </a:t>
                 </a:r>
                 <a14:m>
                   <m:oMath xmlns:m="http://schemas.openxmlformats.org/officeDocument/2006/math">
@@ -9975,7 +10116,7 @@
                 </a14:m>
                 <a:r>
                   <a:rPr lang="en-US" sz="1200" dirty="0"/>
-                  <a:t>, i.e.,</a:t>
+                  <a:t>, i.e., </a:t>
                 </a:r>
                 <a14:m>
                   <m:oMath xmlns:m="http://schemas.openxmlformats.org/officeDocument/2006/math">
@@ -10260,8 +10401,8 @@
             </p:nvSpPr>
             <p:spPr>
               <a:xfrm>
-                <a:off x="822819" y="3570646"/>
-                <a:ext cx="5273179" cy="2985823"/>
+                <a:off x="6267338" y="1124198"/>
+                <a:ext cx="5273179" cy="3693383"/>
               </a:xfrm>
               <a:prstGeom prst="rect">
                 <a:avLst/>
@@ -10282,7 +10423,7 @@
               </a:fontRef>
             </p:style>
             <p:txBody>
-              <a:bodyPr vert="horz" lIns="91440" tIns="45720" rIns="91440" bIns="45720" rtlCol="0">
+              <a:bodyPr vert="horz" wrap="square" lIns="91440" tIns="45720" rIns="91440" bIns="45720" rtlCol="0">
                 <a:spAutoFit/>
               </a:bodyPr>
               <a:lstStyle>
@@ -10891,6 +11032,20 @@
                   </a:spcBef>
                   <a:buNone/>
                 </a:pPr>
+                <a:endParaRPr lang="en-US" sz="1200" i="1" dirty="0">
+                  <a:latin typeface="Cambria Math" panose="02040503050406030204" pitchFamily="18" charset="0"/>
+                </a:endParaRPr>
+              </a:p>
+              <a:p>
+                <a:pPr marL="0" indent="0">
+                  <a:lnSpc>
+                    <a:spcPct val="100000"/>
+                  </a:lnSpc>
+                  <a:spcBef>
+                    <a:spcPts val="0"/>
+                  </a:spcBef>
+                  <a:buNone/>
+                </a:pPr>
                 <a14:m>
                   <m:oMath xmlns:m="http://schemas.openxmlformats.org/officeDocument/2006/math">
                     <m:r>
@@ -11049,7 +11204,10 @@
                     </m:r>
                   </m:oMath>
                 </a14:m>
-                <a:endParaRPr lang="en-US" sz="1200" dirty="0"/>
+                <a:r>
+                  <a:rPr lang="en-US" sz="1200" dirty="0"/>
+                  <a:t>.</a:t>
+                </a:r>
               </a:p>
               <a:p>
                 <a:pPr marL="0" indent="0">
@@ -11061,6 +11219,180 @@
                   </a:spcBef>
                   <a:buNone/>
                 </a:pPr>
+                <a14:m>
+                  <m:oMath xmlns:m="http://schemas.openxmlformats.org/officeDocument/2006/math">
+                    <m:r>
+                      <a:rPr lang="en-US" sz="1200" i="1" dirty="0">
+                        <a:latin typeface="Cambria Math" panose="02040503050406030204" pitchFamily="18" charset="0"/>
+                      </a:rPr>
+                      <m:t>𝑝</m:t>
+                    </m:r>
+                    <m:d>
+                      <m:dPr>
+                        <m:endChr m:val="|"/>
+                        <m:ctrlPr>
+                          <a:rPr lang="en-US" sz="1200" i="1" dirty="0">
+                            <a:latin typeface="Cambria Math" panose="02040503050406030204" pitchFamily="18" charset="0"/>
+                          </a:rPr>
+                        </m:ctrlPr>
+                      </m:dPr>
+                      <m:e>
+                        <m:sSup>
+                          <m:sSupPr>
+                            <m:ctrlPr>
+                              <a:rPr lang="en-US" sz="1200" i="1" dirty="0">
+                                <a:latin typeface="Cambria Math" panose="02040503050406030204" pitchFamily="18" charset="0"/>
+                              </a:rPr>
+                            </m:ctrlPr>
+                          </m:sSupPr>
+                          <m:e>
+                            <m:r>
+                              <a:rPr lang="en-US" sz="1200" i="1" dirty="0">
+                                <a:latin typeface="Cambria Math" panose="02040503050406030204" pitchFamily="18" charset="0"/>
+                              </a:rPr>
+                              <m:t>𝑠</m:t>
+                            </m:r>
+                          </m:e>
+                          <m:sup>
+                            <m:r>
+                              <a:rPr lang="en-US" sz="1200" i="1" dirty="0">
+                                <a:latin typeface="Cambria Math" panose="02040503050406030204" pitchFamily="18" charset="0"/>
+                              </a:rPr>
+                              <m:t>′</m:t>
+                            </m:r>
+                          </m:sup>
+                        </m:sSup>
+                      </m:e>
+                    </m:d>
+                    <m:r>
+                      <a:rPr lang="en-US" sz="1200" i="1" dirty="0">
+                        <a:latin typeface="Cambria Math" panose="02040503050406030204" pitchFamily="18" charset="0"/>
+                      </a:rPr>
+                      <m:t>𝑠</m:t>
+                    </m:r>
+                    <m:r>
+                      <a:rPr lang="en-US" sz="1200" i="1" dirty="0">
+                        <a:latin typeface="Cambria Math" panose="02040503050406030204" pitchFamily="18" charset="0"/>
+                      </a:rPr>
+                      <m:t>, </m:t>
+                    </m:r>
+                    <m:r>
+                      <a:rPr lang="en-US" sz="1200" i="1" dirty="0">
+                        <a:latin typeface="Cambria Math" panose="02040503050406030204" pitchFamily="18" charset="0"/>
+                      </a:rPr>
+                      <m:t>𝑎</m:t>
+                    </m:r>
+                    <m:r>
+                      <a:rPr lang="en-US" sz="1200" i="1" dirty="0">
+                        <a:latin typeface="Cambria Math" panose="02040503050406030204" pitchFamily="18" charset="0"/>
+                      </a:rPr>
+                      <m:t>)</m:t>
+                    </m:r>
+                  </m:oMath>
+                </a14:m>
+                <a:r>
+                  <a:rPr lang="en-US" sz="1200" dirty="0"/>
+                  <a:t> 	probability of transition to state </a:t>
+                </a:r>
+                <a14:m>
+                  <m:oMath xmlns:m="http://schemas.openxmlformats.org/officeDocument/2006/math">
+                    <m:r>
+                      <a:rPr lang="en-US" sz="1200" i="1" dirty="0">
+                        <a:latin typeface="Cambria Math" panose="02040503050406030204" pitchFamily="18" charset="0"/>
+                      </a:rPr>
+                      <m:t>𝑠</m:t>
+                    </m:r>
+                    <m:r>
+                      <a:rPr lang="en-US" sz="1200" i="1" dirty="0">
+                        <a:latin typeface="Cambria Math" panose="02040503050406030204" pitchFamily="18" charset="0"/>
+                      </a:rPr>
+                      <m:t>′</m:t>
+                    </m:r>
+                  </m:oMath>
+                </a14:m>
+                <a:r>
+                  <a:rPr lang="en-US" sz="1200" dirty="0"/>
+                  <a:t> fom state </a:t>
+                </a:r>
+                <a14:m>
+                  <m:oMath xmlns:m="http://schemas.openxmlformats.org/officeDocument/2006/math">
+                    <m:r>
+                      <a:rPr lang="en-US" sz="1200" i="1" dirty="0">
+                        <a:latin typeface="Cambria Math" panose="02040503050406030204" pitchFamily="18" charset="0"/>
+                      </a:rPr>
+                      <m:t>𝑠</m:t>
+                    </m:r>
+                  </m:oMath>
+                </a14:m>
+                <a:r>
+                  <a:rPr lang="en-US" sz="1200" dirty="0"/>
+                  <a:t> taking action </a:t>
+                </a:r>
+                <a14:m>
+                  <m:oMath xmlns:m="http://schemas.openxmlformats.org/officeDocument/2006/math">
+                    <m:r>
+                      <a:rPr lang="en-US" sz="1200" i="1" dirty="0">
+                        <a:latin typeface="Cambria Math" panose="02040503050406030204" pitchFamily="18" charset="0"/>
+                      </a:rPr>
+                      <m:t>𝑎</m:t>
+                    </m:r>
+                  </m:oMath>
+                </a14:m>
+                <a:r>
+                  <a:rPr lang="en-US" sz="1200" dirty="0"/>
+                  <a:t>.</a:t>
+                </a:r>
+              </a:p>
+              <a:p>
+                <a:pPr marL="0" indent="0">
+                  <a:lnSpc>
+                    <a:spcPct val="100000"/>
+                  </a:lnSpc>
+                  <a:spcBef>
+                    <a:spcPts val="0"/>
+                  </a:spcBef>
+                  <a:buNone/>
+                </a:pPr>
+                <a14:m>
+                  <m:oMath xmlns:m="http://schemas.openxmlformats.org/officeDocument/2006/math">
+                    <m:r>
+                      <a:rPr lang="en-US" sz="1200" b="0" i="1" smtClean="0">
+                        <a:latin typeface="Cambria Math" panose="02040503050406030204" pitchFamily="18" charset="0"/>
+                      </a:rPr>
+                      <m:t>𝑟</m:t>
+                    </m:r>
+                    <m:r>
+                      <a:rPr lang="en-US" sz="1200" b="0" i="1" smtClean="0">
+                        <a:latin typeface="Cambria Math" panose="02040503050406030204" pitchFamily="18" charset="0"/>
+                      </a:rPr>
+                      <m:t>(</m:t>
+                    </m:r>
+                    <m:r>
+                      <a:rPr lang="en-US" sz="1200" b="0" i="1" smtClean="0">
+                        <a:latin typeface="Cambria Math" panose="02040503050406030204" pitchFamily="18" charset="0"/>
+                      </a:rPr>
+                      <m:t>𝑠</m:t>
+                    </m:r>
+                    <m:r>
+                      <a:rPr lang="en-US" sz="1200" b="0" i="1" smtClean="0">
+                        <a:latin typeface="Cambria Math" panose="02040503050406030204" pitchFamily="18" charset="0"/>
+                      </a:rPr>
+                      <m:t>,</m:t>
+                    </m:r>
+                    <m:r>
+                      <a:rPr lang="en-US" sz="1200" b="0" i="1" smtClean="0">
+                        <a:latin typeface="Cambria Math" panose="02040503050406030204" pitchFamily="18" charset="0"/>
+                      </a:rPr>
+                      <m:t>𝑎</m:t>
+                    </m:r>
+                    <m:r>
+                      <a:rPr lang="en-US" sz="1200" b="0" i="1" smtClean="0">
+                        <a:latin typeface="Cambria Math" panose="02040503050406030204" pitchFamily="18" charset="0"/>
+                      </a:rPr>
+                      <m:t>)</m:t>
+                    </m:r>
+                  </m:oMath>
+                </a14:m>
                 <a:r>
                   <a:rPr lang="en-US" sz="1200" dirty="0"/>
                   <a:t>	expected immediate reward from state </a:t>
@@ -11087,8 +11419,156 @@
                       </a:rPr>
                       <m:t>𝑎</m:t>
                     </m:r>
+                    <m:r>
+                      <a:rPr lang="en-US" sz="1200" b="0" i="1" dirty="0" smtClean="0">
+                        <a:latin typeface="Cambria Math" panose="02040503050406030204" pitchFamily="18" charset="0"/>
+                      </a:rPr>
+                      <m:t>.</m:t>
+                    </m:r>
                   </m:oMath>
                 </a14:m>
+                <a:endParaRPr lang="en-US" sz="1200" b="0" dirty="0"/>
+              </a:p>
+              <a:p>
+                <a:pPr marL="0" indent="0">
+                  <a:lnSpc>
+                    <a:spcPct val="100000"/>
+                  </a:lnSpc>
+                  <a:spcBef>
+                    <a:spcPts val="0"/>
+                  </a:spcBef>
+                  <a:buNone/>
+                </a:pPr>
+                <a14:m>
+                  <m:oMath xmlns:m="http://schemas.openxmlformats.org/officeDocument/2006/math">
+                    <m:r>
+                      <a:rPr lang="en-US" sz="1200" i="1">
+                        <a:latin typeface="Cambria Math" panose="02040503050406030204" pitchFamily="18" charset="0"/>
+                      </a:rPr>
+                      <m:t>𝑟</m:t>
+                    </m:r>
+                    <m:r>
+                      <a:rPr lang="en-US" sz="1200" i="1">
+                        <a:latin typeface="Cambria Math" panose="02040503050406030204" pitchFamily="18" charset="0"/>
+                      </a:rPr>
+                      <m:t>(</m:t>
+                    </m:r>
+                    <m:r>
+                      <a:rPr lang="en-US" sz="1200" i="1">
+                        <a:latin typeface="Cambria Math" panose="02040503050406030204" pitchFamily="18" charset="0"/>
+                      </a:rPr>
+                      <m:t>𝑠</m:t>
+                    </m:r>
+                    <m:r>
+                      <a:rPr lang="en-US" sz="1200" i="1">
+                        <a:latin typeface="Cambria Math" panose="02040503050406030204" pitchFamily="18" charset="0"/>
+                      </a:rPr>
+                      <m:t>,</m:t>
+                    </m:r>
+                    <m:r>
+                      <a:rPr lang="en-US" sz="1200" i="1">
+                        <a:latin typeface="Cambria Math" panose="02040503050406030204" pitchFamily="18" charset="0"/>
+                      </a:rPr>
+                      <m:t>𝑎</m:t>
+                    </m:r>
+                    <m:r>
+                      <a:rPr lang="en-US" sz="1200" b="0" i="1" smtClean="0">
+                        <a:latin typeface="Cambria Math" panose="02040503050406030204" pitchFamily="18" charset="0"/>
+                      </a:rPr>
+                      <m:t>,</m:t>
+                    </m:r>
+                    <m:r>
+                      <a:rPr lang="en-US" sz="1200" b="0" i="1" smtClean="0">
+                        <a:latin typeface="Cambria Math" panose="02040503050406030204" pitchFamily="18" charset="0"/>
+                      </a:rPr>
+                      <m:t>𝑠</m:t>
+                    </m:r>
+                    <m:r>
+                      <a:rPr lang="en-US" sz="1200" b="0" i="1" smtClean="0">
+                        <a:latin typeface="Cambria Math" panose="02040503050406030204" pitchFamily="18" charset="0"/>
+                      </a:rPr>
+                      <m:t>′)</m:t>
+                    </m:r>
+                  </m:oMath>
+                </a14:m>
+                <a:r>
+                  <a:rPr lang="en-US" sz="1200" dirty="0"/>
+                  <a:t>	expected immediate reward from state </a:t>
+                </a:r>
+                <a14:m>
+                  <m:oMath xmlns:m="http://schemas.openxmlformats.org/officeDocument/2006/math">
+                    <m:r>
+                      <a:rPr lang="en-US" sz="1200" i="1" dirty="0">
+                        <a:latin typeface="Cambria Math" panose="02040503050406030204" pitchFamily="18" charset="0"/>
+                      </a:rPr>
+                      <m:t>𝑠</m:t>
+                    </m:r>
+                  </m:oMath>
+                </a14:m>
+                <a:r>
+                  <a:rPr lang="en-US" sz="1200" dirty="0"/>
+                  <a:t> to </a:t>
+                </a:r>
+                <a14:m>
+                  <m:oMath xmlns:m="http://schemas.openxmlformats.org/officeDocument/2006/math">
+                    <m:sSup>
+                      <m:sSupPr>
+                        <m:ctrlPr>
+                          <a:rPr lang="en-US" sz="1200" b="0" i="1" smtClean="0">
+                            <a:latin typeface="Cambria Math" panose="02040503050406030204" pitchFamily="18" charset="0"/>
+                          </a:rPr>
+                        </m:ctrlPr>
+                      </m:sSupPr>
+                      <m:e>
+                        <m:r>
+                          <a:rPr lang="en-US" sz="1200" b="0" i="1" smtClean="0">
+                            <a:latin typeface="Cambria Math" panose="02040503050406030204" pitchFamily="18" charset="0"/>
+                          </a:rPr>
+                          <m:t>𝑠</m:t>
+                        </m:r>
+                      </m:e>
+                      <m:sup>
+                        <m:r>
+                          <a:rPr lang="en-US" sz="1200" b="0" i="1" smtClean="0">
+                            <a:latin typeface="Cambria Math" panose="02040503050406030204" pitchFamily="18" charset="0"/>
+                          </a:rPr>
+                          <m:t>′</m:t>
+                        </m:r>
+                      </m:sup>
+                    </m:sSup>
+                  </m:oMath>
+                </a14:m>
+                <a:r>
+                  <a:rPr lang="en-US" sz="1200" dirty="0"/>
+                  <a:t> with action </a:t>
+                </a:r>
+                <a14:m>
+                  <m:oMath xmlns:m="http://schemas.openxmlformats.org/officeDocument/2006/math">
+                    <m:r>
+                      <a:rPr lang="en-US" sz="1200" i="1" dirty="0">
+                        <a:latin typeface="Cambria Math" panose="02040503050406030204" pitchFamily="18" charset="0"/>
+                      </a:rPr>
+                      <m:t>𝑎</m:t>
+                    </m:r>
+                    <m:r>
+                      <a:rPr lang="en-US" sz="1200" b="0" i="1" dirty="0" smtClean="0">
+                        <a:latin typeface="Cambria Math" panose="02040503050406030204" pitchFamily="18" charset="0"/>
+                      </a:rPr>
+                      <m:t>.</m:t>
+                    </m:r>
+                  </m:oMath>
+                </a14:m>
+                <a:endParaRPr lang="en-US" sz="1200" i="1" dirty="0">
+                  <a:latin typeface="Cambria Math" panose="02040503050406030204" pitchFamily="18" charset="0"/>
+                </a:endParaRPr>
+              </a:p>
+              <a:p>
+                <a:pPr marL="0" indent="0">
+                  <a:spcBef>
+                    <a:spcPts val="0"/>
+                  </a:spcBef>
+                  <a:buNone/>
+                </a:pPr>
                 <a:endParaRPr lang="en-US" sz="1200" i="1" dirty="0">
                   <a:latin typeface="Cambria Math" panose="02040503050406030204" pitchFamily="18" charset="0"/>
                 </a:endParaRPr>
@@ -11271,8 +11751,8 @@
             </p:nvSpPr>
             <p:spPr>
               <a:xfrm>
-                <a:off x="822819" y="3570646"/>
-                <a:ext cx="5273179" cy="2985823"/>
+                <a:off x="6267338" y="1124198"/>
+                <a:ext cx="5273179" cy="3693383"/>
               </a:xfrm>
               <a:prstGeom prst="rect">
                 <a:avLst/>
@@ -11280,7 +11760,7 @@
               <a:blipFill>
                 <a:blip r:embed="rId4"/>
                 <a:stretch>
-                  <a:fillRect t="-609"/>
+                  <a:fillRect t="-328"/>
                 </a:stretch>
               </a:blipFill>
             </p:spPr>
@@ -11302,7 +11782,7 @@
     </p:spTree>
     <p:extLst>
       <p:ext uri="{BB962C8B-B14F-4D97-AF65-F5344CB8AC3E}">
-        <p14:creationId xmlns:p14="http://schemas.microsoft.com/office/powerpoint/2010/main" val="920694018"/>
+        <p14:creationId xmlns:p14="http://schemas.microsoft.com/office/powerpoint/2010/main" val="594028250"/>
       </p:ext>
     </p:extLst>
   </p:cSld>
@@ -11414,8 +11894,8 @@
           </p:sp>
         </mc:Fallback>
       </mc:AlternateContent>
-      <mc:AlternateContent xmlns:mc="http://schemas.openxmlformats.org/markup-compatibility/2006">
-        <mc:Choice xmlns:a14="http://schemas.microsoft.com/office/drawing/2010/main" Requires="a14">
+      <mc:AlternateContent xmlns:mc="http://schemas.openxmlformats.org/markup-compatibility/2006" xmlns:a14="http://schemas.microsoft.com/office/drawing/2010/main">
+        <mc:Choice Requires="a14">
           <p:sp>
             <p:nvSpPr>
               <p:cNvPr id="3" name="Content Placeholder 2">
@@ -11448,8 +11928,25 @@
                   <a:buNone/>
                 </a:pPr>
                 <a:r>
+                  <a:rPr lang="en-US" sz="1600" b="1" dirty="0"/>
+                  <a:t>Remember</a:t>
+                </a:r>
+                <a:r>
                   <a:rPr lang="en-US" sz="1600" dirty="0"/>
-                  <a:t>How far do we look in the sampled episode ahead to update the state value?</a:t>
+                  <a:t>: The state value is the expected return. So we need a return estimate.</a:t>
+                </a:r>
+              </a:p>
+              <a:p>
+                <a:pPr marL="0" indent="0">
+                  <a:buNone/>
+                </a:pPr>
+                <a:r>
+                  <a:rPr lang="en-US" sz="1600" b="1" dirty="0"/>
+                  <a:t>Issue</a:t>
+                </a:r>
+                <a:r>
+                  <a:rPr lang="en-US" sz="1600" dirty="0"/>
+                  <a:t>: How far do we look ahead in the sampled episode to estimate the return?</a:t>
                 </a:r>
                 <a:endParaRPr lang="en-US" sz="1600" b="1" dirty="0"/>
               </a:p>
@@ -11479,7 +11976,15 @@
                 <a:pPr lvl="1"/>
                 <a:r>
                   <a:rPr lang="en-US" sz="1600" dirty="0"/>
-                  <a:t>We only observe the next step and its reward. The remaining return is bootstrapped using the estimate of the next state’s value </a:t>
+                  <a:t>We only observe the next step and its reward. The remaining return is </a:t>
+                </a:r>
+                <a:r>
+                  <a:rPr lang="en-US" sz="1600" b="1" dirty="0"/>
+                  <a:t>bootstrapped</a:t>
+                </a:r>
+                <a:r>
+                  <a:rPr lang="en-US" sz="1600" dirty="0"/>
+                  <a:t> using the estimate of the next state’s value </a:t>
                 </a:r>
                 <a14:m>
                   <m:oMath xmlns:m="http://schemas.openxmlformats.org/officeDocument/2006/math">
@@ -11599,7 +12104,15 @@
                 </a14:m>
                 <a:r>
                   <a:rPr lang="en-US" sz="1600" dirty="0"/>
-                  <a:t>.</a:t>
+                  <a:t>. This </a:t>
+                </a:r>
+                <a:r>
+                  <a:rPr lang="en-US" sz="1600" b="1" dirty="0"/>
+                  <a:t>propagates errors</a:t>
+                </a:r>
+                <a:r>
+                  <a:rPr lang="en-US" sz="1600" dirty="0"/>
+                  <a:t>!</a:t>
                 </a:r>
                 <a:endParaRPr lang="en-US" sz="1600" i="1" dirty="0">
                   <a:latin typeface="Cambria Math" panose="02040503050406030204" pitchFamily="18" charset="0"/>
@@ -11640,7 +12153,7 @@
             </p:txBody>
           </p:sp>
         </mc:Choice>
-        <mc:Fallback>
+        <mc:Fallback xmlns="">
           <p:sp>
             <p:nvSpPr>
               <p:cNvPr id="3" name="Content Placeholder 2">
@@ -11665,7 +12178,7 @@
               <a:blipFill>
                 <a:blip r:embed="rId3"/>
                 <a:stretch>
-                  <a:fillRect l="-348" t="-2405" b="-5498"/>
+                  <a:fillRect l="-348" t="-2405" b="-24742"/>
                 </a:stretch>
               </a:blipFill>
             </p:spPr>
@@ -11684,8 +12197,8 @@
           </p:sp>
         </mc:Fallback>
       </mc:AlternateContent>
-      <mc:AlternateContent xmlns:mc="http://schemas.openxmlformats.org/markup-compatibility/2006">
-        <mc:Choice xmlns:a14="http://schemas.microsoft.com/office/drawing/2010/main" Requires="a14">
+      <mc:AlternateContent xmlns:mc="http://schemas.openxmlformats.org/markup-compatibility/2006" xmlns:a14="http://schemas.microsoft.com/office/drawing/2010/main">
+        <mc:Choice Requires="a14">
           <p:sp>
             <p:nvSpPr>
               <p:cNvPr id="32" name="TextBox 31">
@@ -11700,8 +12213,8 @@
             </p:nvSpPr>
             <p:spPr>
               <a:xfrm>
-                <a:off x="900218" y="4415277"/>
-                <a:ext cx="6096698" cy="861774"/>
+                <a:off x="900218" y="4710701"/>
+                <a:ext cx="10610054" cy="830997"/>
               </a:xfrm>
               <a:prstGeom prst="rect">
                 <a:avLst/>
@@ -11733,7 +12246,10 @@
                 </a:r>
               </a:p>
               <a:p>
-                <a:pPr lvl="1"/>
+                <a:pPr marL="742950" lvl="1" indent="-285750">
+                  <a:buFont typeface="Arial" panose="020B0604020202020204" pitchFamily="34" charset="0"/>
+                  <a:buChar char="•"/>
+                </a:pPr>
                 <a:r>
                   <a:rPr lang="en-US" sz="1600" dirty="0"/>
                   <a:t>Looks </a:t>
@@ -11750,20 +12266,27 @@
                 </a14:m>
                 <a:r>
                   <a:rPr lang="en-US" sz="1600" dirty="0"/>
-                  <a:t> time steps ahead and bootstraps the rest.</a:t>
+                  <a:t> time steps ahead and bootstraps the rest. Observed rewards should </a:t>
+                </a:r>
+                <a:r>
+                  <a:rPr lang="en-US" sz="1600" b="1" dirty="0"/>
+                  <a:t>reduce the bootstrapping error.</a:t>
                 </a:r>
               </a:p>
               <a:p>
-                <a:pPr lvl="1"/>
+                <a:pPr marL="742950" lvl="1" indent="-285750">
+                  <a:buFont typeface="Arial" panose="020B0604020202020204" pitchFamily="34" charset="0"/>
+                  <a:buChar char="•"/>
+                </a:pPr>
                 <a:r>
                   <a:rPr lang="en-US" sz="1600" dirty="0"/>
-                  <a:t>TD unifies and generalizes MC and one-step TD</a:t>
+                  <a:t>TD unifies and generalizes MC and one-step TD.</a:t>
                 </a:r>
               </a:p>
             </p:txBody>
           </p:sp>
         </mc:Choice>
-        <mc:Fallback>
+        <mc:Fallback xmlns="">
           <p:sp>
             <p:nvSpPr>
               <p:cNvPr id="32" name="TextBox 31">
@@ -11780,8 +12303,8 @@
             </p:nvSpPr>
             <p:spPr>
               <a:xfrm>
-                <a:off x="900218" y="4415277"/>
-                <a:ext cx="6096698" cy="861774"/>
+                <a:off x="900218" y="4710701"/>
+                <a:ext cx="10610054" cy="830997"/>
               </a:xfrm>
               <a:prstGeom prst="rect">
                 <a:avLst/>
@@ -11789,7 +12312,7 @@
               <a:blipFill>
                 <a:blip r:embed="rId4"/>
                 <a:stretch>
-                  <a:fillRect t="-2113" b="-4225"/>
+                  <a:fillRect t="-2206" b="-8824"/>
                 </a:stretch>
               </a:blipFill>
             </p:spPr>
@@ -11822,7 +12345,7 @@
         </p:nvGrpSpPr>
         <p:grpSpPr>
           <a:xfrm>
-            <a:off x="2637816" y="2832616"/>
+            <a:off x="3008265" y="3179108"/>
             <a:ext cx="5965095" cy="1634099"/>
             <a:chOff x="2637816" y="2832616"/>
             <a:chExt cx="5965095" cy="1634099"/>
@@ -12399,8 +12922,8 @@
               </p:nvSpPr>
               <p:spPr>
                 <a:xfrm>
-                  <a:off x="5452586" y="4041516"/>
-                  <a:ext cx="1781788" cy="425199"/>
+                  <a:off x="5452585" y="4041516"/>
+                  <a:ext cx="2651371" cy="425199"/>
                 </a:xfrm>
                 <a:prstGeom prst="wedgeRoundRectCallout">
                   <a:avLst>
@@ -12433,7 +12956,7 @@
                   <a:pPr algn="ctr"/>
                   <a:r>
                     <a:rPr lang="en-US" sz="1200" dirty="0"/>
-                    <a:t>Used to bootstrap the remaining return </a:t>
+                    <a:t>Used to bootstrap estimate of the remaining return </a:t>
                   </a:r>
                   <a14:m>
                     <m:oMath xmlns:m="http://schemas.openxmlformats.org/officeDocument/2006/math">
@@ -12492,8 +13015,8 @@
               </p:nvSpPr>
               <p:spPr>
                 <a:xfrm>
-                  <a:off x="5452586" y="4041516"/>
-                  <a:ext cx="1781788" cy="425199"/>
+                  <a:off x="5452585" y="4041516"/>
+                  <a:ext cx="2651371" cy="425199"/>
                 </a:xfrm>
                 <a:prstGeom prst="wedgeRoundRectCallout">
                   <a:avLst>
@@ -12505,7 +13028,7 @@
                 <a:blipFill>
                   <a:blip r:embed="rId8"/>
                   <a:stretch>
-                    <a:fillRect b="-8989"/>
+                    <a:fillRect b="-9091"/>
                   </a:stretch>
                 </a:blipFill>
               </p:spPr>
@@ -12527,10 +13050,10 @@
       </p:grpSp>
       <p:grpSp>
         <p:nvGrpSpPr>
-          <p:cNvPr id="15" name="Group 14">
+          <p:cNvPr id="17" name="Group 16">
             <a:extLst>
               <a:ext uri="{FF2B5EF4-FFF2-40B4-BE49-F238E27FC236}">
-                <a16:creationId xmlns:a16="http://schemas.microsoft.com/office/drawing/2014/main" id="{EB9E5956-B033-E66C-9244-F254E34930E3}"/>
+                <a16:creationId xmlns:a16="http://schemas.microsoft.com/office/drawing/2014/main" id="{11C9C314-988F-0A98-1955-8D7377802AD9}"/>
               </a:ext>
             </a:extLst>
           </p:cNvPr>
@@ -12541,16 +13064,16 @@
           <a:xfrm>
             <a:off x="3084949" y="5522208"/>
             <a:ext cx="5403210" cy="832369"/>
-            <a:chOff x="3245492" y="5722123"/>
+            <a:chOff x="3084949" y="5522208"/>
             <a:chExt cx="5403210" cy="832369"/>
           </a:xfrm>
         </p:grpSpPr>
         <p:grpSp>
           <p:nvGrpSpPr>
-            <p:cNvPr id="12" name="Group 11">
+            <p:cNvPr id="15" name="Group 14">
               <a:extLst>
                 <a:ext uri="{FF2B5EF4-FFF2-40B4-BE49-F238E27FC236}">
-                  <a16:creationId xmlns:a16="http://schemas.microsoft.com/office/drawing/2014/main" id="{C25B38B9-8EEE-3230-C9A7-D1B5877AC90A}"/>
+                  <a16:creationId xmlns:a16="http://schemas.microsoft.com/office/drawing/2014/main" id="{EB9E5956-B033-E66C-9244-F254E34930E3}"/>
                 </a:ext>
               </a:extLst>
             </p:cNvPr>
@@ -12559,18 +13082,18 @@
           </p:nvGrpSpPr>
           <p:grpSpPr>
             <a:xfrm>
-              <a:off x="3245492" y="5722123"/>
-              <a:ext cx="4870596" cy="666396"/>
-              <a:chOff x="2879313" y="2782204"/>
-              <a:chExt cx="5439985" cy="879847"/>
+              <a:off x="3084949" y="5522208"/>
+              <a:ext cx="5403210" cy="832369"/>
+              <a:chOff x="3245492" y="5722123"/>
+              <a:chExt cx="5403210" cy="832369"/>
             </a:xfrm>
           </p:grpSpPr>
           <p:grpSp>
             <p:nvGrpSpPr>
-              <p:cNvPr id="10" name="Group 9">
+              <p:cNvPr id="12" name="Group 11">
                 <a:extLst>
                   <a:ext uri="{FF2B5EF4-FFF2-40B4-BE49-F238E27FC236}">
-                    <a16:creationId xmlns:a16="http://schemas.microsoft.com/office/drawing/2014/main" id="{E7470490-29F2-50C7-075E-7377CEFC4DB5}"/>
+                    <a16:creationId xmlns:a16="http://schemas.microsoft.com/office/drawing/2014/main" id="{C25B38B9-8EEE-3230-C9A7-D1B5877AC90A}"/>
                   </a:ext>
                 </a:extLst>
               </p:cNvPr>
@@ -12579,150 +13102,242 @@
             </p:nvGrpSpPr>
             <p:grpSpPr>
               <a:xfrm>
-                <a:off x="2879313" y="2782204"/>
-                <a:ext cx="5439985" cy="631088"/>
+                <a:off x="3245492" y="5722123"/>
+                <a:ext cx="4870596" cy="666396"/>
                 <a:chOff x="2879313" y="2782204"/>
-                <a:chExt cx="5439985" cy="631088"/>
+                <a:chExt cx="5439985" cy="879847"/>
               </a:xfrm>
             </p:grpSpPr>
-            <p:sp>
-              <p:nvSpPr>
-                <p:cNvPr id="4" name="Oval 3">
+            <p:grpSp>
+              <p:nvGrpSpPr>
+                <p:cNvPr id="10" name="Group 9">
                   <a:extLst>
                     <a:ext uri="{FF2B5EF4-FFF2-40B4-BE49-F238E27FC236}">
-                      <a16:creationId xmlns:a16="http://schemas.microsoft.com/office/drawing/2014/main" id="{B94B77C9-C9AA-6F5D-D56B-315043DD70EF}"/>
+                      <a16:creationId xmlns:a16="http://schemas.microsoft.com/office/drawing/2014/main" id="{E7470490-29F2-50C7-075E-7377CEFC4DB5}"/>
                     </a:ext>
                   </a:extLst>
                 </p:cNvPr>
-                <p:cNvSpPr/>
+                <p:cNvGrpSpPr/>
                 <p:nvPr/>
-              </p:nvSpPr>
-              <p:spPr>
+              </p:nvGrpSpPr>
+              <p:grpSpPr>
                 <a:xfrm>
-                  <a:off x="3378394" y="3224828"/>
-                  <a:ext cx="174504" cy="188464"/>
+                  <a:off x="2879313" y="2782204"/>
+                  <a:ext cx="5439985" cy="631088"/>
+                  <a:chOff x="2879313" y="2782204"/>
+                  <a:chExt cx="5439985" cy="631088"/>
                 </a:xfrm>
-                <a:prstGeom prst="ellipse">
-                  <a:avLst/>
-                </a:prstGeom>
-              </p:spPr>
-              <p:style>
-                <a:lnRef idx="2">
-                  <a:schemeClr val="accent1">
-                    <a:shade val="15000"/>
-                  </a:schemeClr>
-                </a:lnRef>
-                <a:fillRef idx="1">
-                  <a:schemeClr val="accent1"/>
-                </a:fillRef>
-                <a:effectRef idx="0">
-                  <a:schemeClr val="accent1"/>
-                </a:effectRef>
-                <a:fontRef idx="minor">
-                  <a:schemeClr val="lt1"/>
-                </a:fontRef>
-              </p:style>
-              <p:txBody>
-                <a:bodyPr rtlCol="0" anchor="ctr"/>
-                <a:lstStyle/>
-                <a:p>
-                  <a:pPr algn="ctr"/>
-                  <a:endParaRPr lang="en-US" sz="1400"/>
-                </a:p>
-              </p:txBody>
-            </p:sp>
+              </p:grpSpPr>
+              <p:sp>
+                <p:nvSpPr>
+                  <p:cNvPr id="4" name="Oval 3">
+                    <a:extLst>
+                      <a:ext uri="{FF2B5EF4-FFF2-40B4-BE49-F238E27FC236}">
+                        <a16:creationId xmlns:a16="http://schemas.microsoft.com/office/drawing/2014/main" id="{B94B77C9-C9AA-6F5D-D56B-315043DD70EF}"/>
+                      </a:ext>
+                    </a:extLst>
+                  </p:cNvPr>
+                  <p:cNvSpPr/>
+                  <p:nvPr/>
+                </p:nvSpPr>
+                <p:spPr>
+                  <a:xfrm>
+                    <a:off x="3378394" y="3224828"/>
+                    <a:ext cx="174504" cy="188464"/>
+                  </a:xfrm>
+                  <a:prstGeom prst="ellipse">
+                    <a:avLst/>
+                  </a:prstGeom>
+                </p:spPr>
+                <p:style>
+                  <a:lnRef idx="2">
+                    <a:schemeClr val="accent1">
+                      <a:shade val="15000"/>
+                    </a:schemeClr>
+                  </a:lnRef>
+                  <a:fillRef idx="1">
+                    <a:schemeClr val="accent1"/>
+                  </a:fillRef>
+                  <a:effectRef idx="0">
+                    <a:schemeClr val="accent1"/>
+                  </a:effectRef>
+                  <a:fontRef idx="minor">
+                    <a:schemeClr val="lt1"/>
+                  </a:fontRef>
+                </p:style>
+                <p:txBody>
+                  <a:bodyPr rtlCol="0" anchor="ctr"/>
+                  <a:lstStyle/>
+                  <a:p>
+                    <a:pPr algn="ctr"/>
+                    <a:endParaRPr lang="en-US" sz="1400"/>
+                  </a:p>
+                </p:txBody>
+              </p:sp>
+              <p:sp>
+                <p:nvSpPr>
+                  <p:cNvPr id="5" name="Oval 4">
+                    <a:extLst>
+                      <a:ext uri="{FF2B5EF4-FFF2-40B4-BE49-F238E27FC236}">
+                        <a16:creationId xmlns:a16="http://schemas.microsoft.com/office/drawing/2014/main" id="{8EAB5D2C-C971-DEFC-52FE-D0987A0552AA}"/>
+                      </a:ext>
+                    </a:extLst>
+                  </p:cNvPr>
+                  <p:cNvSpPr/>
+                  <p:nvPr/>
+                </p:nvSpPr>
+                <p:spPr>
+                  <a:xfrm>
+                    <a:off x="7907350" y="3224828"/>
+                    <a:ext cx="174504" cy="188464"/>
+                  </a:xfrm>
+                  <a:prstGeom prst="ellipse">
+                    <a:avLst/>
+                  </a:prstGeom>
+                </p:spPr>
+                <p:style>
+                  <a:lnRef idx="2">
+                    <a:schemeClr val="accent1">
+                      <a:shade val="15000"/>
+                    </a:schemeClr>
+                  </a:lnRef>
+                  <a:fillRef idx="1">
+                    <a:schemeClr val="accent1"/>
+                  </a:fillRef>
+                  <a:effectRef idx="0">
+                    <a:schemeClr val="accent1"/>
+                  </a:effectRef>
+                  <a:fontRef idx="minor">
+                    <a:schemeClr val="lt1"/>
+                  </a:fontRef>
+                </p:style>
+                <p:txBody>
+                  <a:bodyPr rtlCol="0" anchor="ctr"/>
+                  <a:lstStyle/>
+                  <a:p>
+                    <a:pPr algn="ctr"/>
+                    <a:endParaRPr lang="en-US" sz="1400"/>
+                  </a:p>
+                </p:txBody>
+              </p:sp>
+              <p:cxnSp>
+                <p:nvCxnSpPr>
+                  <p:cNvPr id="7" name="Straight Arrow Connector 6">
+                    <a:extLst>
+                      <a:ext uri="{FF2B5EF4-FFF2-40B4-BE49-F238E27FC236}">
+                        <a16:creationId xmlns:a16="http://schemas.microsoft.com/office/drawing/2014/main" id="{0F54933B-23C4-19A8-0DB4-85CED3BAE1BB}"/>
+                      </a:ext>
+                    </a:extLst>
+                  </p:cNvPr>
+                  <p:cNvCxnSpPr/>
+                  <p:nvPr/>
+                </p:nvCxnSpPr>
+                <p:spPr>
+                  <a:xfrm>
+                    <a:off x="3664580" y="3319060"/>
+                    <a:ext cx="4132251" cy="0"/>
+                  </a:xfrm>
+                  <a:prstGeom prst="straightConnector1">
+                    <a:avLst/>
+                  </a:prstGeom>
+                  <a:ln w="57150">
+                    <a:headEnd type="triangle" w="med" len="med"/>
+                    <a:tailEnd type="triangle" w="med" len="med"/>
+                  </a:ln>
+                </p:spPr>
+                <p:style>
+                  <a:lnRef idx="2">
+                    <a:schemeClr val="accent1"/>
+                  </a:lnRef>
+                  <a:fillRef idx="0">
+                    <a:schemeClr val="accent1"/>
+                  </a:fillRef>
+                  <a:effectRef idx="1">
+                    <a:schemeClr val="accent1"/>
+                  </a:effectRef>
+                  <a:fontRef idx="minor">
+                    <a:schemeClr val="tx1"/>
+                  </a:fontRef>
+                </p:style>
+              </p:cxnSp>
+              <p:sp>
+                <p:nvSpPr>
+                  <p:cNvPr id="8" name="TextBox 7">
+                    <a:extLst>
+                      <a:ext uri="{FF2B5EF4-FFF2-40B4-BE49-F238E27FC236}">
+                        <a16:creationId xmlns:a16="http://schemas.microsoft.com/office/drawing/2014/main" id="{141C27E2-D7A4-5F48-644A-B5DB89090844}"/>
+                      </a:ext>
+                    </a:extLst>
+                  </p:cNvPr>
+                  <p:cNvSpPr txBox="1"/>
+                  <p:nvPr/>
+                </p:nvSpPr>
+                <p:spPr>
+                  <a:xfrm>
+                    <a:off x="2879313" y="2782204"/>
+                    <a:ext cx="1172665" cy="307777"/>
+                  </a:xfrm>
+                  <a:prstGeom prst="rect">
+                    <a:avLst/>
+                  </a:prstGeom>
+                  <a:noFill/>
+                </p:spPr>
+                <p:txBody>
+                  <a:bodyPr wrap="square" rtlCol="0">
+                    <a:spAutoFit/>
+                  </a:bodyPr>
+                  <a:lstStyle/>
+                  <a:p>
+                    <a:r>
+                      <a:rPr lang="en-US" sz="1400" dirty="0"/>
+                      <a:t>1-step TD</a:t>
+                    </a:r>
+                  </a:p>
+                </p:txBody>
+              </p:sp>
+              <p:sp>
+                <p:nvSpPr>
+                  <p:cNvPr id="9" name="TextBox 8">
+                    <a:extLst>
+                      <a:ext uri="{FF2B5EF4-FFF2-40B4-BE49-F238E27FC236}">
+                        <a16:creationId xmlns:a16="http://schemas.microsoft.com/office/drawing/2014/main" id="{183257FD-880A-AF81-88C4-FE4114583699}"/>
+                      </a:ext>
+                    </a:extLst>
+                  </p:cNvPr>
+                  <p:cNvSpPr txBox="1"/>
+                  <p:nvPr/>
+                </p:nvSpPr>
+                <p:spPr>
+                  <a:xfrm>
+                    <a:off x="7669904" y="2798160"/>
+                    <a:ext cx="649394" cy="406360"/>
+                  </a:xfrm>
+                  <a:prstGeom prst="rect">
+                    <a:avLst/>
+                  </a:prstGeom>
+                  <a:noFill/>
+                </p:spPr>
+                <p:txBody>
+                  <a:bodyPr wrap="square" rtlCol="0">
+                    <a:spAutoFit/>
+                  </a:bodyPr>
+                  <a:lstStyle/>
+                  <a:p>
+                    <a:pPr algn="ctr"/>
+                    <a:r>
+                      <a:rPr lang="en-US" sz="1400" dirty="0"/>
+                      <a:t>MC </a:t>
+                    </a:r>
+                  </a:p>
+                </p:txBody>
+              </p:sp>
+            </p:grpSp>
             <p:sp>
               <p:nvSpPr>
-                <p:cNvPr id="5" name="Oval 4">
+                <p:cNvPr id="11" name="TextBox 10">
                   <a:extLst>
                     <a:ext uri="{FF2B5EF4-FFF2-40B4-BE49-F238E27FC236}">
-                      <a16:creationId xmlns:a16="http://schemas.microsoft.com/office/drawing/2014/main" id="{8EAB5D2C-C971-DEFC-52FE-D0987A0552AA}"/>
-                    </a:ext>
-                  </a:extLst>
-                </p:cNvPr>
-                <p:cNvSpPr/>
-                <p:nvPr/>
-              </p:nvSpPr>
-              <p:spPr>
-                <a:xfrm>
-                  <a:off x="7907350" y="3224828"/>
-                  <a:ext cx="174504" cy="188464"/>
-                </a:xfrm>
-                <a:prstGeom prst="ellipse">
-                  <a:avLst/>
-                </a:prstGeom>
-              </p:spPr>
-              <p:style>
-                <a:lnRef idx="2">
-                  <a:schemeClr val="accent1">
-                    <a:shade val="15000"/>
-                  </a:schemeClr>
-                </a:lnRef>
-                <a:fillRef idx="1">
-                  <a:schemeClr val="accent1"/>
-                </a:fillRef>
-                <a:effectRef idx="0">
-                  <a:schemeClr val="accent1"/>
-                </a:effectRef>
-                <a:fontRef idx="minor">
-                  <a:schemeClr val="lt1"/>
-                </a:fontRef>
-              </p:style>
-              <p:txBody>
-                <a:bodyPr rtlCol="0" anchor="ctr"/>
-                <a:lstStyle/>
-                <a:p>
-                  <a:pPr algn="ctr"/>
-                  <a:endParaRPr lang="en-US" sz="1400"/>
-                </a:p>
-              </p:txBody>
-            </p:sp>
-            <p:cxnSp>
-              <p:nvCxnSpPr>
-                <p:cNvPr id="7" name="Straight Arrow Connector 6">
-                  <a:extLst>
-                    <a:ext uri="{FF2B5EF4-FFF2-40B4-BE49-F238E27FC236}">
-                      <a16:creationId xmlns:a16="http://schemas.microsoft.com/office/drawing/2014/main" id="{0F54933B-23C4-19A8-0DB4-85CED3BAE1BB}"/>
-                    </a:ext>
-                  </a:extLst>
-                </p:cNvPr>
-                <p:cNvCxnSpPr/>
-                <p:nvPr/>
-              </p:nvCxnSpPr>
-              <p:spPr>
-                <a:xfrm>
-                  <a:off x="3664580" y="3319060"/>
-                  <a:ext cx="4132251" cy="0"/>
-                </a:xfrm>
-                <a:prstGeom prst="straightConnector1">
-                  <a:avLst/>
-                </a:prstGeom>
-                <a:ln w="57150">
-                  <a:headEnd type="triangle" w="med" len="med"/>
-                  <a:tailEnd type="triangle" w="med" len="med"/>
-                </a:ln>
-              </p:spPr>
-              <p:style>
-                <a:lnRef idx="2">
-                  <a:schemeClr val="accent1"/>
-                </a:lnRef>
-                <a:fillRef idx="0">
-                  <a:schemeClr val="accent1"/>
-                </a:fillRef>
-                <a:effectRef idx="1">
-                  <a:schemeClr val="accent1"/>
-                </a:effectRef>
-                <a:fontRef idx="minor">
-                  <a:schemeClr val="tx1"/>
-                </a:fontRef>
-              </p:style>
-            </p:cxnSp>
-            <p:sp>
-              <p:nvSpPr>
-                <p:cNvPr id="8" name="TextBox 7">
-                  <a:extLst>
-                    <a:ext uri="{FF2B5EF4-FFF2-40B4-BE49-F238E27FC236}">
-                      <a16:creationId xmlns:a16="http://schemas.microsoft.com/office/drawing/2014/main" id="{141C27E2-D7A4-5F48-644A-B5DB89090844}"/>
+                      <a16:creationId xmlns:a16="http://schemas.microsoft.com/office/drawing/2014/main" id="{222D92CF-821B-F68A-10A5-9F501334710E}"/>
                     </a:ext>
                   </a:extLst>
                 </p:cNvPr>
@@ -12731,7 +13346,7 @@
               </p:nvSpPr>
               <p:spPr>
                 <a:xfrm>
-                  <a:off x="2879313" y="2782204"/>
+                  <a:off x="5090858" y="3354274"/>
                   <a:ext cx="1172665" cy="307777"/>
                 </a:xfrm>
                 <a:prstGeom prst="rect">
@@ -12747,17 +13362,57 @@
                 <a:p>
                   <a:r>
                     <a:rPr lang="en-US" sz="1400" dirty="0"/>
-                    <a:t>1-step TD</a:t>
+                    <a:t>Spectrum</a:t>
                   </a:r>
                 </a:p>
               </p:txBody>
             </p:sp>
+          </p:grpSp>
+          <p:sp>
+            <p:nvSpPr>
+              <p:cNvPr id="14" name="TextBox 13">
+                <a:extLst>
+                  <a:ext uri="{FF2B5EF4-FFF2-40B4-BE49-F238E27FC236}">
+                    <a16:creationId xmlns:a16="http://schemas.microsoft.com/office/drawing/2014/main" id="{578BFD95-D1AF-D3B0-1498-24CDC947051F}"/>
+                  </a:ext>
+                </a:extLst>
+              </p:cNvPr>
+              <p:cNvSpPr txBox="1"/>
+              <p:nvPr/>
+            </p:nvSpPr>
+            <p:spPr>
+              <a:xfrm>
+                <a:off x="7079259" y="6246715"/>
+                <a:ext cx="1569443" cy="307777"/>
+              </a:xfrm>
+              <a:prstGeom prst="rect">
+                <a:avLst/>
+              </a:prstGeom>
+              <a:noFill/>
+            </p:spPr>
+            <p:txBody>
+              <a:bodyPr wrap="square">
+                <a:spAutoFit/>
+              </a:bodyPr>
+              <a:lstStyle/>
+              <a:p>
+                <a:pPr algn="ctr"/>
+                <a:r>
+                  <a:rPr lang="en-US" sz="1400" dirty="0"/>
+                  <a:t>(whole episode)</a:t>
+                </a:r>
+              </a:p>
+            </p:txBody>
+          </p:sp>
+        </p:grpSp>
+        <mc:AlternateContent xmlns:mc="http://schemas.openxmlformats.org/markup-compatibility/2006" xmlns:a14="http://schemas.microsoft.com/office/drawing/2010/main">
+          <mc:Choice Requires="a14">
             <p:sp>
               <p:nvSpPr>
-                <p:cNvPr id="9" name="TextBox 8">
+                <p:cNvPr id="16" name="TextBox 15">
                   <a:extLst>
                     <a:ext uri="{FF2B5EF4-FFF2-40B4-BE49-F238E27FC236}">
-                      <a16:creationId xmlns:a16="http://schemas.microsoft.com/office/drawing/2014/main" id="{183257FD-880A-AF81-88C4-FE4114583699}"/>
+                      <a16:creationId xmlns:a16="http://schemas.microsoft.com/office/drawing/2014/main" id="{5A8B58D0-D9D0-BAF2-8636-E6875C7D5815}"/>
                     </a:ext>
                   </a:extLst>
                 </p:cNvPr>
@@ -12766,8 +13421,8 @@
               </p:nvSpPr>
               <p:spPr>
                 <a:xfrm>
-                  <a:off x="7669904" y="2798160"/>
-                  <a:ext cx="649394" cy="406360"/>
+                  <a:off x="5171964" y="5534292"/>
+                  <a:ext cx="1246582" cy="307777"/>
                 </a:xfrm>
                 <a:prstGeom prst="rect">
                   <a:avLst/>
@@ -12775,92 +13430,74 @@
                 <a:noFill/>
               </p:spPr>
               <p:txBody>
-                <a:bodyPr wrap="square" rtlCol="0">
+                <a:bodyPr wrap="square">
                   <a:spAutoFit/>
                 </a:bodyPr>
                 <a:lstStyle/>
                 <a:p>
-                  <a:pPr algn="ctr"/>
+                  <a14:m>
+                    <m:oMath xmlns:m="http://schemas.openxmlformats.org/officeDocument/2006/math">
+                      <m:r>
+                        <a:rPr lang="en-US" sz="1400" i="1" dirty="0" smtClean="0">
+                          <a:latin typeface="Cambria Math" panose="02040503050406030204" pitchFamily="18" charset="0"/>
+                        </a:rPr>
+                        <m:t>𝑛</m:t>
+                      </m:r>
+                    </m:oMath>
+                  </a14:m>
                   <a:r>
                     <a:rPr lang="en-US" sz="1400" dirty="0"/>
-                    <a:t>MC </a:t>
+                    <a:t>-step TD </a:t>
                   </a:r>
                 </a:p>
               </p:txBody>
             </p:sp>
-          </p:grpSp>
-          <p:sp>
-            <p:nvSpPr>
-              <p:cNvPr id="11" name="TextBox 10">
-                <a:extLst>
-                  <a:ext uri="{FF2B5EF4-FFF2-40B4-BE49-F238E27FC236}">
-                    <a16:creationId xmlns:a16="http://schemas.microsoft.com/office/drawing/2014/main" id="{222D92CF-821B-F68A-10A5-9F501334710E}"/>
-                  </a:ext>
-                </a:extLst>
-              </p:cNvPr>
-              <p:cNvSpPr txBox="1"/>
-              <p:nvPr/>
-            </p:nvSpPr>
-            <p:spPr>
-              <a:xfrm>
-                <a:off x="5090858" y="3354274"/>
-                <a:ext cx="1172665" cy="307777"/>
-              </a:xfrm>
-              <a:prstGeom prst="rect">
-                <a:avLst/>
-              </a:prstGeom>
-              <a:noFill/>
-            </p:spPr>
-            <p:txBody>
-              <a:bodyPr wrap="square" rtlCol="0">
-                <a:spAutoFit/>
-              </a:bodyPr>
-              <a:lstStyle/>
-              <a:p>
-                <a:r>
-                  <a:rPr lang="en-US" sz="1400" dirty="0"/>
-                  <a:t>Spectrum</a:t>
-                </a:r>
-              </a:p>
-            </p:txBody>
-          </p:sp>
-        </p:grpSp>
-        <p:sp>
-          <p:nvSpPr>
-            <p:cNvPr id="14" name="TextBox 13">
-              <a:extLst>
-                <a:ext uri="{FF2B5EF4-FFF2-40B4-BE49-F238E27FC236}">
-                  <a16:creationId xmlns:a16="http://schemas.microsoft.com/office/drawing/2014/main" id="{578BFD95-D1AF-D3B0-1498-24CDC947051F}"/>
-                </a:ext>
-              </a:extLst>
-            </p:cNvPr>
-            <p:cNvSpPr txBox="1"/>
-            <p:nvPr/>
-          </p:nvSpPr>
-          <p:spPr>
-            <a:xfrm>
-              <a:off x="7079259" y="6246715"/>
-              <a:ext cx="1569443" cy="307777"/>
-            </a:xfrm>
-            <a:prstGeom prst="rect">
-              <a:avLst/>
-            </a:prstGeom>
-            <a:noFill/>
-          </p:spPr>
-          <p:txBody>
-            <a:bodyPr wrap="square">
-              <a:spAutoFit/>
-            </a:bodyPr>
-            <a:lstStyle/>
-            <a:p>
-              <a:pPr algn="ctr"/>
-              <a:r>
-                <a:rPr lang="en-US" sz="1400" dirty="0"/>
-                <a:t>(whole episode)</a:t>
-              </a:r>
-            </a:p>
-          </p:txBody>
-        </p:sp>
+          </mc:Choice>
+          <mc:Fallback xmlns="">
+            <p:sp>
+              <p:nvSpPr>
+                <p:cNvPr id="16" name="TextBox 15">
+                  <a:extLst>
+                    <a:ext uri="{FF2B5EF4-FFF2-40B4-BE49-F238E27FC236}">
+                      <a16:creationId xmlns:a16="http://schemas.microsoft.com/office/drawing/2014/main" id="{5A8B58D0-D9D0-BAF2-8636-E6875C7D5815}"/>
+                    </a:ext>
+                  </a:extLst>
+                </p:cNvPr>
+                <p:cNvSpPr txBox="1">
+                  <a:spLocks noRot="1" noChangeAspect="1" noMove="1" noResize="1" noEditPoints="1" noAdjustHandles="1" noChangeArrowheads="1" noChangeShapeType="1" noTextEdit="1"/>
+                </p:cNvSpPr>
+                <p:nvPr/>
+              </p:nvSpPr>
+              <p:spPr>
+                <a:xfrm>
+                  <a:off x="5171964" y="5534292"/>
+                  <a:ext cx="1246582" cy="307777"/>
+                </a:xfrm>
+                <a:prstGeom prst="rect">
+                  <a:avLst/>
+                </a:prstGeom>
+                <a:blipFill>
+                  <a:blip r:embed="rId9"/>
+                  <a:stretch>
+                    <a:fillRect t="-4000" b="-20000"/>
+                  </a:stretch>
+                </a:blipFill>
+              </p:spPr>
+              <p:txBody>
+                <a:bodyPr/>
+                <a:lstStyle/>
+                <a:p>
+                  <a:r>
+                    <a:rPr lang="en-US">
+                      <a:noFill/>
+                    </a:rPr>
+                    <a:t> </a:t>
+                  </a:r>
+                </a:p>
+              </p:txBody>
+            </p:sp>
+          </mc:Fallback>
+        </mc:AlternateContent>
       </p:grpSp>
     </p:spTree>
     <p:extLst>
@@ -12872,6 +13509,120 @@
   <p:clrMapOvr>
     <a:masterClrMapping/>
   </p:clrMapOvr>
+  <p:timing>
+    <p:tnLst>
+      <p:par>
+        <p:cTn id="1" dur="indefinite" restart="never" nodeType="tmRoot">
+          <p:childTnLst>
+            <p:seq concurrent="1" nextAc="seek">
+              <p:cTn id="2" dur="indefinite" nodeType="mainSeq">
+                <p:childTnLst>
+                  <p:par>
+                    <p:cTn id="3" fill="hold">
+                      <p:stCondLst>
+                        <p:cond delay="indefinite"/>
+                      </p:stCondLst>
+                      <p:childTnLst>
+                        <p:par>
+                          <p:cTn id="4" fill="hold">
+                            <p:stCondLst>
+                              <p:cond delay="0"/>
+                            </p:stCondLst>
+                            <p:childTnLst>
+                              <p:par>
+                                <p:cTn id="5" presetID="1" presetClass="entr" presetSubtype="0" fill="hold" grpId="0" nodeType="clickEffect">
+                                  <p:stCondLst>
+                                    <p:cond delay="0"/>
+                                  </p:stCondLst>
+                                  <p:childTnLst>
+                                    <p:set>
+                                      <p:cBhvr>
+                                        <p:cTn id="6" dur="1" fill="hold">
+                                          <p:stCondLst>
+                                            <p:cond delay="0"/>
+                                          </p:stCondLst>
+                                        </p:cTn>
+                                        <p:tgtEl>
+                                          <p:spTgt spid="32"/>
+                                        </p:tgtEl>
+                                        <p:attrNameLst>
+                                          <p:attrName>style.visibility</p:attrName>
+                                        </p:attrNameLst>
+                                      </p:cBhvr>
+                                      <p:to>
+                                        <p:strVal val="visible"/>
+                                      </p:to>
+                                    </p:set>
+                                  </p:childTnLst>
+                                </p:cTn>
+                              </p:par>
+                            </p:childTnLst>
+                          </p:cTn>
+                        </p:par>
+                        <p:par>
+                          <p:cTn id="7" fill="hold">
+                            <p:stCondLst>
+                              <p:cond delay="0"/>
+                            </p:stCondLst>
+                            <p:childTnLst>
+                              <p:par>
+                                <p:cTn id="8" presetID="1" presetClass="entr" presetSubtype="0" fill="hold" nodeType="afterEffect">
+                                  <p:stCondLst>
+                                    <p:cond delay="0"/>
+                                  </p:stCondLst>
+                                  <p:childTnLst>
+                                    <p:set>
+                                      <p:cBhvr>
+                                        <p:cTn id="9" dur="1" fill="hold">
+                                          <p:stCondLst>
+                                            <p:cond delay="0"/>
+                                          </p:stCondLst>
+                                        </p:cTn>
+                                        <p:tgtEl>
+                                          <p:spTgt spid="17"/>
+                                        </p:tgtEl>
+                                        <p:attrNameLst>
+                                          <p:attrName>style.visibility</p:attrName>
+                                        </p:attrNameLst>
+                                      </p:cBhvr>
+                                      <p:to>
+                                        <p:strVal val="visible"/>
+                                      </p:to>
+                                    </p:set>
+                                  </p:childTnLst>
+                                </p:cTn>
+                              </p:par>
+                            </p:childTnLst>
+                          </p:cTn>
+                        </p:par>
+                      </p:childTnLst>
+                    </p:cTn>
+                  </p:par>
+                </p:childTnLst>
+              </p:cTn>
+              <p:prevCondLst>
+                <p:cond evt="onPrev" delay="0">
+                  <p:tgtEl>
+                    <p:sldTgt/>
+                  </p:tgtEl>
+                </p:cond>
+              </p:prevCondLst>
+              <p:nextCondLst>
+                <p:cond evt="onNext" delay="0">
+                  <p:tgtEl>
+                    <p:sldTgt/>
+                  </p:tgtEl>
+                </p:cond>
+              </p:nextCondLst>
+            </p:seq>
+          </p:childTnLst>
+        </p:cTn>
+      </p:par>
+    </p:tnLst>
+    <p:bldLst>
+      <p:bldP spid="32" grpId="0"/>
+    </p:bldLst>
+  </p:timing>
 </p:sld>
 </file>
 
@@ -12954,7 +13705,15 @@
             </a:r>
             <a:r>
               <a:rPr lang="en-US" dirty="0"/>
-              <a:t>: Maze with only one final reward for reaching the goal. We learn from the first episode.</a:t>
+              <a:t>: Maze with only one final reward for reaching the goal. We learn from the </a:t>
+            </a:r>
+            <a:r>
+              <a:rPr lang="en-US" b="1" dirty="0"/>
+              <a:t>first episode</a:t>
+            </a:r>
+            <a:r>
+              <a:rPr lang="en-US" dirty="0"/>
+              <a:t>.</a:t>
             </a:r>
           </a:p>
         </p:txBody>
@@ -13112,8 +13871,8 @@
         </p:nvSpPr>
         <p:spPr>
           <a:xfrm>
-            <a:off x="8157028" y="5298457"/>
-            <a:ext cx="3069772" cy="923330"/>
+            <a:off x="7824751" y="5206124"/>
+            <a:ext cx="3452993" cy="1200329"/>
           </a:xfrm>
           <a:prstGeom prst="rect">
             <a:avLst/>
@@ -13129,14 +13888,14 @@
             <a:pPr algn="ctr"/>
             <a:r>
               <a:rPr lang="en-US" dirty="0"/>
-              <a:t>Updates 10 state values with the goal reward. </a:t>
+              <a:t>State value can be updated with the goal reward even if it is 10 states away.</a:t>
             </a:r>
             <a:br>
               <a:rPr lang="en-US" dirty="0"/>
             </a:br>
             <a:r>
               <a:rPr lang="en-US" dirty="0"/>
-              <a:t>Learns faster.</a:t>
+              <a:t>Learns faster than 1-step TD.</a:t>
             </a:r>
           </a:p>
         </p:txBody>
@@ -13176,6 +13935,78 @@
           </a:p>
         </p:txBody>
       </p:sp>
+      <p:sp>
+        <p:nvSpPr>
+          <p:cNvPr id="3" name="TextBox 2">
+            <a:extLst>
+              <a:ext uri="{FF2B5EF4-FFF2-40B4-BE49-F238E27FC236}">
+                <a16:creationId xmlns:a16="http://schemas.microsoft.com/office/drawing/2014/main" id="{D19468A7-5AC3-5A40-8933-972333C8F0BD}"/>
+              </a:ext>
+            </a:extLst>
+          </p:cNvPr>
+          <p:cNvSpPr txBox="1"/>
+          <p:nvPr/>
+        </p:nvSpPr>
+        <p:spPr>
+          <a:xfrm>
+            <a:off x="965200" y="5230699"/>
+            <a:ext cx="3069772" cy="646331"/>
+          </a:xfrm>
+          <a:prstGeom prst="rect">
+            <a:avLst/>
+          </a:prstGeom>
+          <a:noFill/>
+        </p:spPr>
+        <p:txBody>
+          <a:bodyPr wrap="square" rtlCol="0">
+            <a:spAutoFit/>
+          </a:bodyPr>
+          <a:lstStyle/>
+          <a:p>
+            <a:pPr algn="ctr"/>
+            <a:r>
+              <a:rPr lang="en-US" dirty="0"/>
+              <a:t>Updates in reverse order all state values on the path.</a:t>
+            </a:r>
+          </a:p>
+        </p:txBody>
+      </p:sp>
+      <p:sp>
+        <p:nvSpPr>
+          <p:cNvPr id="8" name="TextBox 7">
+            <a:extLst>
+              <a:ext uri="{FF2B5EF4-FFF2-40B4-BE49-F238E27FC236}">
+                <a16:creationId xmlns:a16="http://schemas.microsoft.com/office/drawing/2014/main" id="{7513F307-3E7B-8CE6-F229-F5A1E0C8CC21}"/>
+              </a:ext>
+            </a:extLst>
+          </p:cNvPr>
+          <p:cNvSpPr txBox="1"/>
+          <p:nvPr/>
+        </p:nvSpPr>
+        <p:spPr>
+          <a:xfrm>
+            <a:off x="4370352" y="5230698"/>
+            <a:ext cx="3069772" cy="646331"/>
+          </a:xfrm>
+          <a:prstGeom prst="rect">
+            <a:avLst/>
+          </a:prstGeom>
+          <a:noFill/>
+        </p:spPr>
+        <p:txBody>
+          <a:bodyPr wrap="square" rtlCol="0">
+            <a:spAutoFit/>
+          </a:bodyPr>
+          <a:lstStyle/>
+          <a:p>
+            <a:pPr algn="ctr"/>
+            <a:r>
+              <a:rPr lang="en-US" dirty="0"/>
+              <a:t>Can only updates one state value.</a:t>
+            </a:r>
+          </a:p>
+        </p:txBody>
+      </p:sp>
     </p:spTree>
     <p:extLst>
       <p:ext uri="{BB962C8B-B14F-4D97-AF65-F5344CB8AC3E}">
@@ -13186,6 +14017,176 @@
   <p:clrMapOvr>
     <a:masterClrMapping/>
   </p:clrMapOvr>
+  <p:timing>
+    <p:tnLst>
+      <p:par>
+        <p:cTn id="1" dur="indefinite" restart="never" nodeType="tmRoot">
+          <p:childTnLst>
+            <p:seq concurrent="1" nextAc="seek">
+              <p:cTn id="2" dur="indefinite" nodeType="mainSeq">
+                <p:childTnLst>
+                  <p:par>
+                    <p:cTn id="3" fill="hold">
+                      <p:stCondLst>
+                        <p:cond delay="indefinite"/>
+                      </p:stCondLst>
+                      <p:childTnLst>
+                        <p:par>
+                          <p:cTn id="4" fill="hold">
+                            <p:stCondLst>
+                              <p:cond delay="0"/>
+                            </p:stCondLst>
+                            <p:childTnLst>
+                              <p:par>
+                                <p:cTn id="5" presetID="1" presetClass="entr" presetSubtype="0" fill="hold" grpId="0" nodeType="clickEffect">
+                                  <p:stCondLst>
+                                    <p:cond delay="0"/>
+                                  </p:stCondLst>
+                                  <p:childTnLst>
+                                    <p:set>
+                                      <p:cBhvr>
+                                        <p:cTn id="6" dur="1" fill="hold">
+                                          <p:stCondLst>
+                                            <p:cond delay="0"/>
+                                          </p:stCondLst>
+                                        </p:cTn>
+                                        <p:tgtEl>
+                                          <p:spTgt spid="3"/>
+                                        </p:tgtEl>
+                                        <p:attrNameLst>
+                                          <p:attrName>style.visibility</p:attrName>
+                                        </p:attrNameLst>
+                                      </p:cBhvr>
+                                      <p:to>
+                                        <p:strVal val="visible"/>
+                                      </p:to>
+                                    </p:set>
+                                  </p:childTnLst>
+                                </p:cTn>
+                              </p:par>
+                            </p:childTnLst>
+                          </p:cTn>
+                        </p:par>
+                      </p:childTnLst>
+                    </p:cTn>
+                  </p:par>
+                  <p:par>
+                    <p:cTn id="7" fill="hold">
+                      <p:stCondLst>
+                        <p:cond delay="indefinite"/>
+                      </p:stCondLst>
+                      <p:childTnLst>
+                        <p:par>
+                          <p:cTn id="8" fill="hold">
+                            <p:stCondLst>
+                              <p:cond delay="0"/>
+                            </p:stCondLst>
+                            <p:childTnLst>
+                              <p:par>
+                                <p:cTn id="9" presetID="1" presetClass="entr" presetSubtype="0" fill="hold" grpId="0" nodeType="clickEffect">
+                                  <p:stCondLst>
+                                    <p:cond delay="0"/>
+                                  </p:stCondLst>
+                                  <p:childTnLst>
+                                    <p:set>
+                                      <p:cBhvr>
+                                        <p:cTn id="10" dur="1" fill="hold">
+                                          <p:stCondLst>
+                                            <p:cond delay="0"/>
+                                          </p:stCondLst>
+                                        </p:cTn>
+                                        <p:tgtEl>
+                                          <p:spTgt spid="8"/>
+                                        </p:tgtEl>
+                                        <p:attrNameLst>
+                                          <p:attrName>style.visibility</p:attrName>
+                                        </p:attrNameLst>
+                                      </p:cBhvr>
+                                      <p:to>
+                                        <p:strVal val="visible"/>
+                                      </p:to>
+                                    </p:set>
+                                  </p:childTnLst>
+                                </p:cTn>
+                              </p:par>
+                            </p:childTnLst>
+                          </p:cTn>
+                        </p:par>
+                      </p:childTnLst>
+                    </p:cTn>
+                  </p:par>
+                  <p:par>
+                    <p:cTn id="11" fill="hold">
+                      <p:stCondLst>
+                        <p:cond delay="indefinite"/>
+                      </p:stCondLst>
+                      <p:childTnLst>
+                        <p:par>
+                          <p:cTn id="12" fill="hold">
+                            <p:stCondLst>
+                              <p:cond delay="0"/>
+                            </p:stCondLst>
+                            <p:childTnLst>
+                              <p:par>
+                                <p:cTn id="13" presetID="1" presetClass="entr" presetSubtype="0" fill="hold" grpId="0" nodeType="clickEffect">
+                                  <p:stCondLst>
+                                    <p:cond delay="0"/>
+                                  </p:stCondLst>
+                                  <p:childTnLst>
+                                    <p:set>
+                                      <p:cBhvr>
+                                        <p:cTn id="14" dur="1" fill="hold">
+                                          <p:stCondLst>
+                                            <p:cond delay="0"/>
+                                          </p:stCondLst>
+                                        </p:cTn>
+                                        <p:tgtEl>
+                                          <p:spTgt spid="15"/>
+                                        </p:tgtEl>
+                                        <p:attrNameLst>
+                                          <p:attrName>style.visibility</p:attrName>
+                                        </p:attrNameLst>
+                                      </p:cBhvr>
+                                      <p:to>
+                                        <p:strVal val="visible"/>
+                                      </p:to>
+                                    </p:set>
+                                  </p:childTnLst>
+                                </p:cTn>
+                              </p:par>
+                            </p:childTnLst>
+                          </p:cTn>
+                        </p:par>
+                      </p:childTnLst>
+                    </p:cTn>
+                  </p:par>
+                </p:childTnLst>
+              </p:cTn>
+              <p:prevCondLst>
+                <p:cond evt="onPrev" delay="0">
+                  <p:tgtEl>
+                    <p:sldTgt/>
+                  </p:tgtEl>
+                </p:cond>
+              </p:prevCondLst>
+              <p:nextCondLst>
+                <p:cond evt="onNext" delay="0">
+                  <p:tgtEl>
+                    <p:sldTgt/>
+                  </p:tgtEl>
+                </p:cond>
+              </p:nextCondLst>
+            </p:seq>
+          </p:childTnLst>
+        </p:cTn>
+      </p:par>
+    </p:tnLst>
+    <p:bldLst>
+      <p:bldP spid="15" grpId="0"/>
+      <p:bldP spid="3" grpId="0"/>
+      <p:bldP spid="8" grpId="0"/>
+    </p:bldLst>
+  </p:timing>
 </p:sld>
 </file>
 
@@ -13964,7 +14965,46 @@
                 </a14:m>
                 <a:r>
                   <a:rPr lang="en-US" sz="1400" dirty="0"/>
-                  <a:t> + bootstrap the remaining return by the value of the next state </a:t>
+                  <a:t> + bootstrap the remaining return </a:t>
+                </a:r>
+                <a14:m>
+                  <m:oMath xmlns:m="http://schemas.openxmlformats.org/officeDocument/2006/math">
+                    <m:sSub>
+                      <m:sSubPr>
+                        <m:ctrlPr>
+                          <a:rPr lang="en-US" sz="1400" b="0" i="1" smtClean="0">
+                            <a:latin typeface="Cambria Math" panose="02040503050406030204" pitchFamily="18" charset="0"/>
+                          </a:rPr>
+                        </m:ctrlPr>
+                      </m:sSubPr>
+                      <m:e>
+                        <m:r>
+                          <a:rPr lang="en-US" sz="1400" b="0" i="1" smtClean="0">
+                            <a:latin typeface="Cambria Math" panose="02040503050406030204" pitchFamily="18" charset="0"/>
+                          </a:rPr>
+                          <m:t>𝐺</m:t>
+                        </m:r>
+                      </m:e>
+                      <m:sub>
+                        <m:r>
+                          <a:rPr lang="en-US" sz="1400" b="0" i="1" smtClean="0">
+                            <a:latin typeface="Cambria Math" panose="02040503050406030204" pitchFamily="18" charset="0"/>
+                          </a:rPr>
+                          <m:t>𝑡</m:t>
+                        </m:r>
+                        <m:r>
+                          <a:rPr lang="en-US" sz="1400" b="0" i="1" smtClean="0">
+                            <a:latin typeface="Cambria Math" panose="02040503050406030204" pitchFamily="18" charset="0"/>
+                          </a:rPr>
+                          <m:t>+1</m:t>
+                        </m:r>
+                      </m:sub>
+                    </m:sSub>
+                  </m:oMath>
+                </a14:m>
+                <a:r>
+                  <a:rPr lang="en-US" sz="1400" dirty="0"/>
+                  <a:t> by the value of the next state </a:t>
                 </a:r>
                 <a14:m>
                   <m:oMath xmlns:m="http://schemas.openxmlformats.org/officeDocument/2006/math">
@@ -14076,168 +15116,189 @@
           </p:sp>
         </mc:Fallback>
       </mc:AlternateContent>
-      <mc:AlternateContent xmlns:mc="http://schemas.openxmlformats.org/markup-compatibility/2006" xmlns:a14="http://schemas.microsoft.com/office/drawing/2010/main">
-        <mc:Choice Requires="a14">
-          <p:sp>
-            <p:nvSpPr>
-              <p:cNvPr id="15" name="Speech Bubble: Rectangle with Corners Rounded 14">
-                <a:extLst>
-                  <a:ext uri="{FF2B5EF4-FFF2-40B4-BE49-F238E27FC236}">
-                    <a16:creationId xmlns:a16="http://schemas.microsoft.com/office/drawing/2014/main" id="{28550480-EEED-F900-3E4A-FF07C3F8AB94}"/>
-                  </a:ext>
-                </a:extLst>
-              </p:cNvPr>
-              <p:cNvSpPr/>
-              <p:nvPr/>
-            </p:nvSpPr>
-            <p:spPr>
-              <a:xfrm>
-                <a:off x="8721949" y="2299895"/>
-                <a:ext cx="2536077" cy="894587"/>
-              </a:xfrm>
-              <a:prstGeom prst="wedgeRoundRectCallout">
-                <a:avLst>
-                  <a:gd name="adj1" fmla="val -68504"/>
-                  <a:gd name="adj2" fmla="val 79718"/>
-                  <a:gd name="adj3" fmla="val 16667"/>
-                </a:avLst>
-              </a:prstGeom>
-            </p:spPr>
-            <p:style>
-              <a:lnRef idx="2">
-                <a:schemeClr val="accent1">
-                  <a:shade val="15000"/>
-                </a:schemeClr>
-              </a:lnRef>
-              <a:fillRef idx="1">
-                <a:schemeClr val="accent1"/>
-              </a:fillRef>
-              <a:effectRef idx="0">
-                <a:schemeClr val="accent1"/>
-              </a:effectRef>
-              <a:fontRef idx="minor">
-                <a:schemeClr val="lt1"/>
-              </a:fontRef>
-            </p:style>
-            <p:txBody>
-              <a:bodyPr rtlCol="0" anchor="ctr"/>
-              <a:lstStyle/>
-              <a:p>
-                <a:r>
-                  <a:rPr lang="en-US" sz="1400" dirty="0"/>
-                  <a:t>Update with the whole sequence of observed rewards </a:t>
-                </a:r>
-                <a14:m>
-                  <m:oMath xmlns:m="http://schemas.openxmlformats.org/officeDocument/2006/math">
-                    <m:r>
-                      <a:rPr lang="en-US" sz="1400" b="0" i="1" smtClean="0">
-                        <a:latin typeface="Cambria Math" panose="02040503050406030204" pitchFamily="18" charset="0"/>
-                      </a:rPr>
-                      <m:t>→</m:t>
-                    </m:r>
-                  </m:oMath>
-                </a14:m>
-                <a:r>
-                  <a:rPr lang="en-US" sz="1400" dirty="0"/>
-                  <a:t> no bootstrapping.</a:t>
-                </a:r>
-              </a:p>
-            </p:txBody>
-          </p:sp>
-        </mc:Choice>
-        <mc:Fallback xmlns="">
-          <p:sp>
-            <p:nvSpPr>
-              <p:cNvPr id="15" name="Speech Bubble: Rectangle with Corners Rounded 14">
-                <a:extLst>
-                  <a:ext uri="{FF2B5EF4-FFF2-40B4-BE49-F238E27FC236}">
-                    <a16:creationId xmlns:a16="http://schemas.microsoft.com/office/drawing/2014/main" id="{28550480-EEED-F900-3E4A-FF07C3F8AB94}"/>
-                  </a:ext>
-                </a:extLst>
-              </p:cNvPr>
-              <p:cNvSpPr>
-                <a:spLocks noRot="1" noChangeAspect="1" noMove="1" noResize="1" noEditPoints="1" noAdjustHandles="1" noChangeArrowheads="1" noChangeShapeType="1" noTextEdit="1"/>
-              </p:cNvSpPr>
-              <p:nvPr/>
-            </p:nvSpPr>
-            <p:spPr>
-              <a:xfrm>
-                <a:off x="8721949" y="2299895"/>
-                <a:ext cx="2536077" cy="894587"/>
-              </a:xfrm>
-              <a:prstGeom prst="wedgeRoundRectCallout">
-                <a:avLst>
-                  <a:gd name="adj1" fmla="val -68504"/>
-                  <a:gd name="adj2" fmla="val 79718"/>
-                  <a:gd name="adj3" fmla="val 16667"/>
-                </a:avLst>
-              </a:prstGeom>
-              <a:blipFill>
-                <a:blip r:embed="rId8"/>
-                <a:stretch>
-                  <a:fillRect/>
-                </a:stretch>
-              </a:blipFill>
-            </p:spPr>
-            <p:txBody>
-              <a:bodyPr/>
-              <a:lstStyle/>
-              <a:p>
-                <a:r>
-                  <a:rPr lang="en-US">
-                    <a:noFill/>
-                  </a:rPr>
-                  <a:t> </a:t>
-                </a:r>
-              </a:p>
-            </p:txBody>
-          </p:sp>
-        </mc:Fallback>
-      </mc:AlternateContent>
-      <p:sp>
-        <p:nvSpPr>
-          <p:cNvPr id="18" name="Right Brace 17">
+      <p:grpSp>
+        <p:nvGrpSpPr>
+          <p:cNvPr id="4" name="Group 3">
             <a:extLst>
               <a:ext uri="{FF2B5EF4-FFF2-40B4-BE49-F238E27FC236}">
-                <a16:creationId xmlns:a16="http://schemas.microsoft.com/office/drawing/2014/main" id="{E3545678-D718-8AC1-2DDE-65A2B43393C2}"/>
+                <a16:creationId xmlns:a16="http://schemas.microsoft.com/office/drawing/2014/main" id="{A19657BF-07EC-5E16-0F8F-213FF5972E5E}"/>
               </a:ext>
             </a:extLst>
           </p:cNvPr>
-          <p:cNvSpPr/>
+          <p:cNvGrpSpPr/>
           <p:nvPr/>
-        </p:nvSpPr>
-        <p:spPr>
+        </p:nvGrpSpPr>
+        <p:grpSpPr>
           <a:xfrm>
             <a:off x="7967513" y="1750393"/>
-            <a:ext cx="199063" cy="3460070"/>
+            <a:ext cx="3290513" cy="3460070"/>
+            <a:chOff x="7967513" y="1750393"/>
+            <a:chExt cx="3290513" cy="3460070"/>
           </a:xfrm>
-          <a:prstGeom prst="rightBrace">
-            <a:avLst/>
-          </a:prstGeom>
-        </p:spPr>
-        <p:style>
-          <a:lnRef idx="2">
-            <a:schemeClr val="accent1"/>
-          </a:lnRef>
-          <a:fillRef idx="0">
-            <a:schemeClr val="accent1"/>
-          </a:fillRef>
-          <a:effectRef idx="1">
-            <a:schemeClr val="accent1"/>
-          </a:effectRef>
-          <a:fontRef idx="minor">
-            <a:schemeClr val="tx1"/>
-          </a:fontRef>
-        </p:style>
-        <p:txBody>
-          <a:bodyPr rtlCol="0" anchor="ctr"/>
-          <a:lstStyle/>
-          <a:p>
-            <a:pPr algn="ctr"/>
-            <a:endParaRPr lang="en-US"/>
-          </a:p>
-        </p:txBody>
-      </p:sp>
+        </p:grpSpPr>
+        <mc:AlternateContent xmlns:mc="http://schemas.openxmlformats.org/markup-compatibility/2006" xmlns:a14="http://schemas.microsoft.com/office/drawing/2010/main">
+          <mc:Choice Requires="a14">
+            <p:sp>
+              <p:nvSpPr>
+                <p:cNvPr id="15" name="Speech Bubble: Rectangle with Corners Rounded 14">
+                  <a:extLst>
+                    <a:ext uri="{FF2B5EF4-FFF2-40B4-BE49-F238E27FC236}">
+                      <a16:creationId xmlns:a16="http://schemas.microsoft.com/office/drawing/2014/main" id="{28550480-EEED-F900-3E4A-FF07C3F8AB94}"/>
+                    </a:ext>
+                  </a:extLst>
+                </p:cNvPr>
+                <p:cNvSpPr/>
+                <p:nvPr/>
+              </p:nvSpPr>
+              <p:spPr>
+                <a:xfrm>
+                  <a:off x="8721949" y="2299895"/>
+                  <a:ext cx="2536077" cy="894587"/>
+                </a:xfrm>
+                <a:prstGeom prst="wedgeRoundRectCallout">
+                  <a:avLst>
+                    <a:gd name="adj1" fmla="val -68504"/>
+                    <a:gd name="adj2" fmla="val 79718"/>
+                    <a:gd name="adj3" fmla="val 16667"/>
+                  </a:avLst>
+                </a:prstGeom>
+              </p:spPr>
+              <p:style>
+                <a:lnRef idx="2">
+                  <a:schemeClr val="accent1">
+                    <a:shade val="15000"/>
+                  </a:schemeClr>
+                </a:lnRef>
+                <a:fillRef idx="1">
+                  <a:schemeClr val="accent1"/>
+                </a:fillRef>
+                <a:effectRef idx="0">
+                  <a:schemeClr val="accent1"/>
+                </a:effectRef>
+                <a:fontRef idx="minor">
+                  <a:schemeClr val="lt1"/>
+                </a:fontRef>
+              </p:style>
+              <p:txBody>
+                <a:bodyPr rtlCol="0" anchor="ctr"/>
+                <a:lstStyle/>
+                <a:p>
+                  <a:r>
+                    <a:rPr lang="en-US" sz="1400" dirty="0"/>
+                    <a:t>Update with the whole sequence of observed rewards </a:t>
+                  </a:r>
+                  <a14:m>
+                    <m:oMath xmlns:m="http://schemas.openxmlformats.org/officeDocument/2006/math">
+                      <m:r>
+                        <a:rPr lang="en-US" sz="1400" b="0" i="1" smtClean="0">
+                          <a:latin typeface="Cambria Math" panose="02040503050406030204" pitchFamily="18" charset="0"/>
+                        </a:rPr>
+                        <m:t>→</m:t>
+                      </m:r>
+                    </m:oMath>
+                  </a14:m>
+                  <a:r>
+                    <a:rPr lang="en-US" sz="1400" dirty="0"/>
+                    <a:t> no bootstrapping.</a:t>
+                  </a:r>
+                </a:p>
+              </p:txBody>
+            </p:sp>
+          </mc:Choice>
+          <mc:Fallback xmlns="">
+            <p:sp>
+              <p:nvSpPr>
+                <p:cNvPr id="15" name="Speech Bubble: Rectangle with Corners Rounded 14">
+                  <a:extLst>
+                    <a:ext uri="{FF2B5EF4-FFF2-40B4-BE49-F238E27FC236}">
+                      <a16:creationId xmlns:a16="http://schemas.microsoft.com/office/drawing/2014/main" id="{28550480-EEED-F900-3E4A-FF07C3F8AB94}"/>
+                    </a:ext>
+                  </a:extLst>
+                </p:cNvPr>
+                <p:cNvSpPr>
+                  <a:spLocks noRot="1" noChangeAspect="1" noMove="1" noResize="1" noEditPoints="1" noAdjustHandles="1" noChangeArrowheads="1" noChangeShapeType="1" noTextEdit="1"/>
+                </p:cNvSpPr>
+                <p:nvPr/>
+              </p:nvSpPr>
+              <p:spPr>
+                <a:xfrm>
+                  <a:off x="8721949" y="2299895"/>
+                  <a:ext cx="2536077" cy="894587"/>
+                </a:xfrm>
+                <a:prstGeom prst="wedgeRoundRectCallout">
+                  <a:avLst>
+                    <a:gd name="adj1" fmla="val -68504"/>
+                    <a:gd name="adj2" fmla="val 79718"/>
+                    <a:gd name="adj3" fmla="val 16667"/>
+                  </a:avLst>
+                </a:prstGeom>
+                <a:blipFill>
+                  <a:blip r:embed="rId8"/>
+                  <a:stretch>
+                    <a:fillRect/>
+                  </a:stretch>
+                </a:blipFill>
+              </p:spPr>
+              <p:txBody>
+                <a:bodyPr/>
+                <a:lstStyle/>
+                <a:p>
+                  <a:r>
+                    <a:rPr lang="en-US">
+                      <a:noFill/>
+                    </a:rPr>
+                    <a:t> </a:t>
+                  </a:r>
+                </a:p>
+              </p:txBody>
+            </p:sp>
+          </mc:Fallback>
+        </mc:AlternateContent>
+        <p:sp>
+          <p:nvSpPr>
+            <p:cNvPr id="18" name="Right Brace 17">
+              <a:extLst>
+                <a:ext uri="{FF2B5EF4-FFF2-40B4-BE49-F238E27FC236}">
+                  <a16:creationId xmlns:a16="http://schemas.microsoft.com/office/drawing/2014/main" id="{E3545678-D718-8AC1-2DDE-65A2B43393C2}"/>
+                </a:ext>
+              </a:extLst>
+            </p:cNvPr>
+            <p:cNvSpPr/>
+            <p:nvPr/>
+          </p:nvSpPr>
+          <p:spPr>
+            <a:xfrm>
+              <a:off x="7967513" y="1750393"/>
+              <a:ext cx="199063" cy="3460070"/>
+            </a:xfrm>
+            <a:prstGeom prst="rightBrace">
+              <a:avLst/>
+            </a:prstGeom>
+          </p:spPr>
+          <p:style>
+            <a:lnRef idx="2">
+              <a:schemeClr val="accent1"/>
+            </a:lnRef>
+            <a:fillRef idx="0">
+              <a:schemeClr val="accent1"/>
+            </a:fillRef>
+            <a:effectRef idx="1">
+              <a:schemeClr val="accent1"/>
+            </a:effectRef>
+            <a:fontRef idx="minor">
+              <a:schemeClr val="tx1"/>
+            </a:fontRef>
+          </p:style>
+          <p:txBody>
+            <a:bodyPr rtlCol="0" anchor="ctr"/>
+            <a:lstStyle/>
+            <a:p>
+              <a:pPr algn="ctr"/>
+              <a:endParaRPr lang="en-US"/>
+            </a:p>
+          </p:txBody>
+        </p:sp>
+      </p:grpSp>
       <mc:AlternateContent xmlns:mc="http://schemas.openxmlformats.org/markup-compatibility/2006" xmlns:a14="http://schemas.microsoft.com/office/drawing/2010/main">
         <mc:Choice Requires="a14">
           <p:sp>
@@ -14270,7 +15331,7 @@
               <a:p>
                 <a:r>
                   <a:rPr lang="en-US" sz="1600" b="1" dirty="0"/>
-                  <a:t>Return</a:t>
+                  <a:t>Return Estimate</a:t>
                 </a:r>
               </a:p>
               <a:p>
@@ -14372,31 +15433,12 @@
                       </a:rPr>
                       <m:t>𝛾</m:t>
                     </m:r>
-                    <m:sSub>
-                      <m:sSubPr>
-                        <m:ctrlPr>
-                          <a:rPr lang="en-US" sz="1600" b="0" i="1" smtClean="0">
-                            <a:latin typeface="Cambria Math" panose="02040503050406030204" pitchFamily="18" charset="0"/>
-                          </a:rPr>
-                        </m:ctrlPr>
-                      </m:sSubPr>
-                      <m:e>
-                        <m:r>
-                          <a:rPr lang="en-US" sz="1600" b="0" i="1" smtClean="0">
-                            <a:latin typeface="Cambria Math" panose="02040503050406030204" pitchFamily="18" charset="0"/>
-                          </a:rPr>
-                          <m:t>𝑉</m:t>
-                        </m:r>
-                      </m:e>
-                      <m:sub>
-                        <m:r>
-                          <a:rPr lang="en-US" sz="1600" b="0" i="1" smtClean="0">
-                            <a:latin typeface="Cambria Math" panose="02040503050406030204" pitchFamily="18" charset="0"/>
-                          </a:rPr>
-                          <m:t>𝑡</m:t>
-                        </m:r>
-                      </m:sub>
-                    </m:sSub>
+                    <m:r>
+                      <a:rPr lang="en-US" sz="1600" b="0" i="1" smtClean="0">
+                        <a:latin typeface="Cambria Math" panose="02040503050406030204" pitchFamily="18" charset="0"/>
+                      </a:rPr>
+                      <m:t>𝑉</m:t>
+                    </m:r>
                     <m:r>
                       <a:rPr lang="en-US" sz="1600" b="0" i="1" smtClean="0">
                         <a:latin typeface="Cambria Math" panose="02040503050406030204" pitchFamily="18" charset="0"/>
@@ -14552,73 +15594,11 @@
                         </m:ctrlPr>
                       </m:sSubPr>
                       <m:e>
-                        <m:sSub>
-                          <m:sSubPr>
-                            <m:ctrlPr>
-                              <a:rPr lang="en-US" sz="1600" b="0" i="1" smtClean="0">
-                                <a:latin typeface="Cambria Math" panose="02040503050406030204" pitchFamily="18" charset="0"/>
-                              </a:rPr>
-                            </m:ctrlPr>
-                          </m:sSubPr>
-                          <m:e>
-                            <m:r>
-                              <a:rPr lang="en-US" sz="1600" b="0" i="1" smtClean="0">
-                                <a:latin typeface="Cambria Math" panose="02040503050406030204" pitchFamily="18" charset="0"/>
-                              </a:rPr>
-                              <m:t>𝑅</m:t>
-                            </m:r>
-                          </m:e>
-                          <m:sub>
-                            <m:r>
-                              <a:rPr lang="en-US" sz="1600" b="0" i="1" smtClean="0">
-                                <a:latin typeface="Cambria Math" panose="02040503050406030204" pitchFamily="18" charset="0"/>
-                              </a:rPr>
-                              <m:t>𝑡</m:t>
-                            </m:r>
-                            <m:r>
-                              <a:rPr lang="en-US" sz="1600" b="0" i="1" smtClean="0">
-                                <a:latin typeface="Cambria Math" panose="02040503050406030204" pitchFamily="18" charset="0"/>
-                              </a:rPr>
-                              <m:t>+2</m:t>
-                            </m:r>
-                          </m:sub>
-                        </m:sSub>
-                        <m:r>
-                          <a:rPr lang="en-US" sz="1600" b="0" i="1" smtClean="0">
-                            <a:latin typeface="Cambria Math" panose="02040503050406030204" pitchFamily="18" charset="0"/>
-                          </a:rPr>
-                          <m:t>+</m:t>
-                        </m:r>
-                        <m:sSup>
-                          <m:sSupPr>
-                            <m:ctrlPr>
-                              <a:rPr lang="en-US" sz="1600" b="0" i="1" smtClean="0">
-                                <a:latin typeface="Cambria Math" panose="02040503050406030204" pitchFamily="18" charset="0"/>
-                              </a:rPr>
-                            </m:ctrlPr>
-                          </m:sSupPr>
-                          <m:e>
-                            <m:r>
-                              <a:rPr lang="en-US" sz="1600" b="0" i="1" smtClean="0">
-                                <a:latin typeface="Cambria Math" panose="02040503050406030204" pitchFamily="18" charset="0"/>
-                              </a:rPr>
-                              <m:t>𝛾</m:t>
-                            </m:r>
-                          </m:e>
-                          <m:sup>
-                            <m:r>
-                              <a:rPr lang="en-US" sz="1600" b="0" i="1" smtClean="0">
-                                <a:latin typeface="Cambria Math" panose="02040503050406030204" pitchFamily="18" charset="0"/>
-                              </a:rPr>
-                              <m:t>2</m:t>
-                            </m:r>
-                          </m:sup>
-                        </m:sSup>
                         <m:r>
                           <a:rPr lang="en-US" sz="1600" i="1">
                             <a:latin typeface="Cambria Math" panose="02040503050406030204" pitchFamily="18" charset="0"/>
                           </a:rPr>
-                          <m:t>𝑉</m:t>
+                          <m:t>𝑅</m:t>
                         </m:r>
                       </m:e>
                       <m:sub>
@@ -14629,13 +15609,50 @@
                           <m:t>𝑡</m:t>
                         </m:r>
                         <m:r>
-                          <a:rPr lang="en-US" sz="1600" b="0" i="1" smtClean="0">
-                            <a:latin typeface="Cambria Math" panose="02040503050406030204" pitchFamily="18" charset="0"/>
-                          </a:rPr>
-                          <m:t>+1</m:t>
+                          <a:rPr lang="en-US" sz="1600" i="1">
+                            <a:latin typeface="Cambria Math" panose="02040503050406030204" pitchFamily="18" charset="0"/>
+                          </a:rPr>
+                          <m:t>+2</m:t>
                         </m:r>
                       </m:sub>
                     </m:sSub>
+                    <m:r>
+                      <a:rPr lang="en-US" sz="1600" i="1">
+                        <a:latin typeface="Cambria Math" panose="02040503050406030204" pitchFamily="18" charset="0"/>
+                      </a:rPr>
+                      <m:t>+</m:t>
+                    </m:r>
+                    <m:sSup>
+                      <m:sSupPr>
+                        <m:ctrlPr>
+                          <a:rPr lang="en-US" sz="1600" i="1">
+                            <a:latin typeface="Cambria Math" panose="02040503050406030204" pitchFamily="18" charset="0"/>
+                          </a:rPr>
+                        </m:ctrlPr>
+                      </m:sSupPr>
+                      <m:e>
+                        <m:r>
+                          <a:rPr lang="en-US" sz="1600" i="1">
+                            <a:latin typeface="Cambria Math" panose="02040503050406030204" pitchFamily="18" charset="0"/>
+                          </a:rPr>
+                          <m:t>𝛾</m:t>
+                        </m:r>
+                      </m:e>
+                      <m:sup>
+                        <m:r>
+                          <a:rPr lang="en-US" sz="1600" i="1">
+                            <a:latin typeface="Cambria Math" panose="02040503050406030204" pitchFamily="18" charset="0"/>
+                          </a:rPr>
+                          <m:t>2</m:t>
+                        </m:r>
+                      </m:sup>
+                    </m:sSup>
+                    <m:r>
+                      <a:rPr lang="en-US" sz="1600" i="1">
+                        <a:latin typeface="Cambria Math" panose="02040503050406030204" pitchFamily="18" charset="0"/>
+                      </a:rPr>
+                      <m:t>𝑉</m:t>
+                    </m:r>
                     <m:r>
                       <a:rPr lang="en-US" sz="1600" i="1">
                         <a:latin typeface="Cambria Math" panose="02040503050406030204" pitchFamily="18" charset="0"/>
@@ -14813,153 +15830,11 @@
                         </m:ctrlPr>
                       </m:sSubPr>
                       <m:e>
-                        <m:sSub>
-                          <m:sSubPr>
-                            <m:ctrlPr>
-                              <a:rPr lang="en-US" sz="1600" i="1">
-                                <a:latin typeface="Cambria Math" panose="02040503050406030204" pitchFamily="18" charset="0"/>
-                              </a:rPr>
-                            </m:ctrlPr>
-                          </m:sSubPr>
-                          <m:e>
-                            <m:r>
-                              <a:rPr lang="en-US" sz="1600" i="1">
-                                <a:latin typeface="Cambria Math" panose="02040503050406030204" pitchFamily="18" charset="0"/>
-                              </a:rPr>
-                              <m:t>𝑅</m:t>
-                            </m:r>
-                          </m:e>
-                          <m:sub>
-                            <m:r>
-                              <a:rPr lang="en-US" sz="1600" i="1">
-                                <a:latin typeface="Cambria Math" panose="02040503050406030204" pitchFamily="18" charset="0"/>
-                              </a:rPr>
-                              <m:t>𝑡</m:t>
-                            </m:r>
-                            <m:r>
-                              <a:rPr lang="en-US" sz="1600" i="1">
-                                <a:latin typeface="Cambria Math" panose="02040503050406030204" pitchFamily="18" charset="0"/>
-                              </a:rPr>
-                              <m:t>+2</m:t>
-                            </m:r>
-                          </m:sub>
-                        </m:sSub>
                         <m:r>
                           <a:rPr lang="en-US" sz="1600" i="1">
                             <a:latin typeface="Cambria Math" panose="02040503050406030204" pitchFamily="18" charset="0"/>
                           </a:rPr>
-                          <m:t>+</m:t>
-                        </m:r>
-                        <m:r>
-                          <a:rPr lang="en-US" sz="1600" b="0" i="1" smtClean="0">
-                            <a:latin typeface="Cambria Math" panose="02040503050406030204" pitchFamily="18" charset="0"/>
-                          </a:rPr>
-                          <m:t>…+</m:t>
-                        </m:r>
-                        <m:sSup>
-                          <m:sSupPr>
-                            <m:ctrlPr>
-                              <a:rPr lang="en-US" sz="1600" i="1">
-                                <a:latin typeface="Cambria Math" panose="02040503050406030204" pitchFamily="18" charset="0"/>
-                              </a:rPr>
-                            </m:ctrlPr>
-                          </m:sSupPr>
-                          <m:e>
-                            <m:r>
-                              <a:rPr lang="en-US" sz="1600" i="1">
-                                <a:latin typeface="Cambria Math" panose="02040503050406030204" pitchFamily="18" charset="0"/>
-                              </a:rPr>
-                              <m:t>𝛾</m:t>
-                            </m:r>
-                          </m:e>
-                          <m:sup>
-                            <m:r>
-                              <a:rPr lang="en-US" sz="1600" b="0" i="1" smtClean="0">
-                                <a:latin typeface="Cambria Math" panose="02040503050406030204" pitchFamily="18" charset="0"/>
-                              </a:rPr>
-                              <m:t>𝑛</m:t>
-                            </m:r>
-                            <m:r>
-                              <a:rPr lang="en-US" sz="1600" b="0" i="1" smtClean="0">
-                                <a:latin typeface="Cambria Math" panose="02040503050406030204" pitchFamily="18" charset="0"/>
-                              </a:rPr>
-                              <m:t>−1</m:t>
-                            </m:r>
-                          </m:sup>
-                        </m:sSup>
-                        <m:sSub>
-                          <m:sSubPr>
-                            <m:ctrlPr>
-                              <a:rPr lang="en-US" sz="1600" b="0" i="1" smtClean="0">
-                                <a:latin typeface="Cambria Math" panose="02040503050406030204" pitchFamily="18" charset="0"/>
-                              </a:rPr>
-                            </m:ctrlPr>
-                          </m:sSubPr>
-                          <m:e>
-                            <m:r>
-                              <a:rPr lang="en-US" sz="1600" b="0" i="1" smtClean="0">
-                                <a:latin typeface="Cambria Math" panose="02040503050406030204" pitchFamily="18" charset="0"/>
-                              </a:rPr>
-                              <m:t>𝑅</m:t>
-                            </m:r>
-                          </m:e>
-                          <m:sub>
-                            <m:r>
-                              <a:rPr lang="en-US" sz="1600" b="0" i="1" smtClean="0">
-                                <a:latin typeface="Cambria Math" panose="02040503050406030204" pitchFamily="18" charset="0"/>
-                              </a:rPr>
-                              <m:t>𝑡</m:t>
-                            </m:r>
-                            <m:r>
-                              <a:rPr lang="en-US" sz="1600" b="0" i="1" smtClean="0">
-                                <a:latin typeface="Cambria Math" panose="02040503050406030204" pitchFamily="18" charset="0"/>
-                              </a:rPr>
-                              <m:t>+</m:t>
-                            </m:r>
-                            <m:r>
-                              <a:rPr lang="en-US" sz="1600" b="0" i="1" smtClean="0">
-                                <a:latin typeface="Cambria Math" panose="02040503050406030204" pitchFamily="18" charset="0"/>
-                              </a:rPr>
-                              <m:t>𝑛</m:t>
-                            </m:r>
-                          </m:sub>
-                        </m:sSub>
-                        <m:r>
-                          <a:rPr lang="en-US" sz="1600" b="0" i="1" smtClean="0">
-                            <a:latin typeface="Cambria Math" panose="02040503050406030204" pitchFamily="18" charset="0"/>
-                          </a:rPr>
-                          <m:t>+</m:t>
-                        </m:r>
-                        <m:sSup>
-                          <m:sSupPr>
-                            <m:ctrlPr>
-                              <a:rPr lang="en-US" sz="1600" b="0" i="1" smtClean="0">
-                                <a:latin typeface="Cambria Math" panose="02040503050406030204" pitchFamily="18" charset="0"/>
-                              </a:rPr>
-                            </m:ctrlPr>
-                          </m:sSupPr>
-                          <m:e>
-                            <m:r>
-                              <a:rPr lang="en-US" sz="1600" b="0" i="1" smtClean="0">
-                                <a:latin typeface="Cambria Math" panose="02040503050406030204" pitchFamily="18" charset="0"/>
-                              </a:rPr>
-                              <m:t>𝛾</m:t>
-                            </m:r>
-                          </m:e>
-                          <m:sup>
-                            <m:r>
-                              <a:rPr lang="en-US" sz="1600" b="0" i="1" smtClean="0">
-                                <a:latin typeface="Cambria Math" panose="02040503050406030204" pitchFamily="18" charset="0"/>
-                              </a:rPr>
-                              <m:t>𝑛</m:t>
-                            </m:r>
-                          </m:sup>
-                        </m:sSup>
-                        <m:r>
-                          <a:rPr lang="en-US" sz="1600" i="1">
-                            <a:latin typeface="Cambria Math" panose="02040503050406030204" pitchFamily="18" charset="0"/>
-                          </a:rPr>
-                          <m:t>𝑉</m:t>
+                          <m:t>𝑅</m:t>
                         </m:r>
                       </m:e>
                       <m:sub>
@@ -14973,22 +15848,121 @@
                           <a:rPr lang="en-US" sz="1600" i="1">
                             <a:latin typeface="Cambria Math" panose="02040503050406030204" pitchFamily="18" charset="0"/>
                           </a:rPr>
+                          <m:t>+2</m:t>
+                        </m:r>
+                      </m:sub>
+                    </m:sSub>
+                    <m:r>
+                      <a:rPr lang="en-US" sz="1600" i="1">
+                        <a:latin typeface="Cambria Math" panose="02040503050406030204" pitchFamily="18" charset="0"/>
+                      </a:rPr>
+                      <m:t>+…+</m:t>
+                    </m:r>
+                    <m:sSup>
+                      <m:sSupPr>
+                        <m:ctrlPr>
+                          <a:rPr lang="en-US" sz="1600" i="1">
+                            <a:latin typeface="Cambria Math" panose="02040503050406030204" pitchFamily="18" charset="0"/>
+                          </a:rPr>
+                        </m:ctrlPr>
+                      </m:sSupPr>
+                      <m:e>
+                        <m:r>
+                          <a:rPr lang="en-US" sz="1600" i="1">
+                            <a:latin typeface="Cambria Math" panose="02040503050406030204" pitchFamily="18" charset="0"/>
+                          </a:rPr>
+                          <m:t>𝛾</m:t>
+                        </m:r>
+                      </m:e>
+                      <m:sup>
+                        <m:r>
+                          <a:rPr lang="en-US" sz="1600" i="1">
+                            <a:latin typeface="Cambria Math" panose="02040503050406030204" pitchFamily="18" charset="0"/>
+                          </a:rPr>
+                          <m:t>𝑛</m:t>
+                        </m:r>
+                        <m:r>
+                          <a:rPr lang="en-US" sz="1600" i="1">
+                            <a:latin typeface="Cambria Math" panose="02040503050406030204" pitchFamily="18" charset="0"/>
+                          </a:rPr>
+                          <m:t>−1</m:t>
+                        </m:r>
+                      </m:sup>
+                    </m:sSup>
+                    <m:sSub>
+                      <m:sSubPr>
+                        <m:ctrlPr>
+                          <a:rPr lang="en-US" sz="1600" i="1">
+                            <a:latin typeface="Cambria Math" panose="02040503050406030204" pitchFamily="18" charset="0"/>
+                          </a:rPr>
+                        </m:ctrlPr>
+                      </m:sSubPr>
+                      <m:e>
+                        <m:r>
+                          <a:rPr lang="en-US" sz="1600" i="1">
+                            <a:latin typeface="Cambria Math" panose="02040503050406030204" pitchFamily="18" charset="0"/>
+                          </a:rPr>
+                          <m:t>𝑅</m:t>
+                        </m:r>
+                      </m:e>
+                      <m:sub>
+                        <m:r>
+                          <a:rPr lang="en-US" sz="1600" i="1">
+                            <a:latin typeface="Cambria Math" panose="02040503050406030204" pitchFamily="18" charset="0"/>
+                          </a:rPr>
+                          <m:t>𝑡</m:t>
+                        </m:r>
+                        <m:r>
+                          <a:rPr lang="en-US" sz="1600" i="1">
+                            <a:latin typeface="Cambria Math" panose="02040503050406030204" pitchFamily="18" charset="0"/>
+                          </a:rPr>
                           <m:t>+</m:t>
                         </m:r>
                         <m:r>
-                          <a:rPr lang="en-US" sz="1600" b="0" i="1" smtClean="0">
+                          <a:rPr lang="en-US" sz="1600" i="1">
                             <a:latin typeface="Cambria Math" panose="02040503050406030204" pitchFamily="18" charset="0"/>
                           </a:rPr>
                           <m:t>𝑛</m:t>
-                        </m:r>
-                        <m:r>
-                          <a:rPr lang="en-US" sz="1600" b="0" i="1" smtClean="0">
-                            <a:latin typeface="Cambria Math" panose="02040503050406030204" pitchFamily="18" charset="0"/>
-                          </a:rPr>
-                          <m:t>−1</m:t>
                         </m:r>
                       </m:sub>
                     </m:sSub>
+                    <m:r>
+                      <a:rPr lang="en-US" sz="1600" i="1">
+                        <a:latin typeface="Cambria Math" panose="02040503050406030204" pitchFamily="18" charset="0"/>
+                      </a:rPr>
+                      <m:t>+</m:t>
+                    </m:r>
+                    <m:sSup>
+                      <m:sSupPr>
+                        <m:ctrlPr>
+                          <a:rPr lang="en-US" sz="1600" i="1">
+                            <a:latin typeface="Cambria Math" panose="02040503050406030204" pitchFamily="18" charset="0"/>
+                          </a:rPr>
+                        </m:ctrlPr>
+                      </m:sSupPr>
+                      <m:e>
+                        <m:r>
+                          <a:rPr lang="en-US" sz="1600" i="1">
+                            <a:latin typeface="Cambria Math" panose="02040503050406030204" pitchFamily="18" charset="0"/>
+                          </a:rPr>
+                          <m:t>𝛾</m:t>
+                        </m:r>
+                      </m:e>
+                      <m:sup>
+                        <m:r>
+                          <a:rPr lang="en-US" sz="1600" i="1">
+                            <a:latin typeface="Cambria Math" panose="02040503050406030204" pitchFamily="18" charset="0"/>
+                          </a:rPr>
+                          <m:t>𝑛</m:t>
+                        </m:r>
+                      </m:sup>
+                    </m:sSup>
+                    <m:r>
+                      <a:rPr lang="en-US" sz="1600" i="1">
+                        <a:latin typeface="Cambria Math" panose="02040503050406030204" pitchFamily="18" charset="0"/>
+                      </a:rPr>
+                      <m:t>𝑉</m:t>
+                    </m:r>
                     <m:d>
                       <m:dPr>
                         <m:ctrlPr>
@@ -15533,7 +16507,7 @@
             </p:nvSpPr>
             <p:spPr>
               <a:xfrm>
-                <a:off x="9192610" y="4517965"/>
+                <a:off x="8837705" y="4141820"/>
                 <a:ext cx="2362349" cy="1384995"/>
               </a:xfrm>
               <a:prstGeom prst="rect">
@@ -15673,7 +16647,7 @@
             </p:nvSpPr>
             <p:spPr>
               <a:xfrm>
-                <a:off x="9192610" y="4517965"/>
+                <a:off x="8837705" y="4141820"/>
                 <a:ext cx="2362349" cy="1384995"/>
               </a:xfrm>
               <a:prstGeom prst="rect">
@@ -15682,7 +16656,7 @@
               <a:blipFill>
                 <a:blip r:embed="rId10"/>
                 <a:stretch>
-                  <a:fillRect l="-513" t="-435" r="-769" b="-3043"/>
+                  <a:fillRect l="-513" r="-769" b="-2597"/>
                 </a:stretch>
               </a:blipFill>
             </p:spPr>
@@ -15882,54 +16856,6 @@
           </p:sp>
         </mc:Fallback>
       </mc:AlternateContent>
-      <p:sp>
-        <p:nvSpPr>
-          <p:cNvPr id="3" name="TextBox 2">
-            <a:extLst>
-              <a:ext uri="{FF2B5EF4-FFF2-40B4-BE49-F238E27FC236}">
-                <a16:creationId xmlns:a16="http://schemas.microsoft.com/office/drawing/2014/main" id="{B30B7AFA-5070-0761-161B-A2191BB26B52}"/>
-              </a:ext>
-            </a:extLst>
-          </p:cNvPr>
-          <p:cNvSpPr txBox="1"/>
-          <p:nvPr/>
-        </p:nvSpPr>
-        <p:spPr>
-          <a:xfrm>
-            <a:off x="6772386" y="5462862"/>
-            <a:ext cx="2185332" cy="1200329"/>
-          </a:xfrm>
-          <a:prstGeom prst="rect">
-            <a:avLst/>
-          </a:prstGeom>
-        </p:spPr>
-        <p:style>
-          <a:lnRef idx="3">
-            <a:schemeClr val="lt1"/>
-          </a:lnRef>
-          <a:fillRef idx="1">
-            <a:schemeClr val="accent5"/>
-          </a:fillRef>
-          <a:effectRef idx="1">
-            <a:schemeClr val="accent5"/>
-          </a:effectRef>
-          <a:fontRef idx="minor">
-            <a:schemeClr val="lt1"/>
-          </a:fontRef>
-        </p:style>
-        <p:txBody>
-          <a:bodyPr wrap="square" rtlCol="0">
-            <a:spAutoFit/>
-          </a:bodyPr>
-          <a:lstStyle/>
-          <a:p>
-            <a:r>
-              <a:rPr lang="en-US" dirty="0"/>
-              <a:t>Question: The implementation drops the subscript for V!</a:t>
-            </a:r>
-          </a:p>
-        </p:txBody>
-      </p:sp>
     </p:spTree>
     <p:extLst>
       <p:ext uri="{BB962C8B-B14F-4D97-AF65-F5344CB8AC3E}">
@@ -15940,6 +16866,206 @@
   <p:clrMapOvr>
     <a:masterClrMapping/>
   </p:clrMapOvr>
+  <p:timing>
+    <p:tnLst>
+      <p:par>
+        <p:cTn id="1" dur="indefinite" restart="never" nodeType="tmRoot">
+          <p:childTnLst>
+            <p:seq concurrent="1" nextAc="seek">
+              <p:cTn id="2" dur="indefinite" nodeType="mainSeq">
+                <p:childTnLst>
+                  <p:par>
+                    <p:cTn id="3" fill="hold">
+                      <p:stCondLst>
+                        <p:cond delay="indefinite"/>
+                      </p:stCondLst>
+                      <p:childTnLst>
+                        <p:par>
+                          <p:cTn id="4" fill="hold">
+                            <p:stCondLst>
+                              <p:cond delay="0"/>
+                            </p:stCondLst>
+                            <p:childTnLst>
+                              <p:par>
+                                <p:cTn id="5" presetID="1" presetClass="entr" presetSubtype="0" fill="hold" grpId="0" nodeType="clickEffect">
+                                  <p:stCondLst>
+                                    <p:cond delay="0"/>
+                                  </p:stCondLst>
+                                  <p:childTnLst>
+                                    <p:set>
+                                      <p:cBhvr>
+                                        <p:cTn id="6" dur="1" fill="hold">
+                                          <p:stCondLst>
+                                            <p:cond delay="0"/>
+                                          </p:stCondLst>
+                                        </p:cTn>
+                                        <p:tgtEl>
+                                          <p:spTgt spid="14"/>
+                                        </p:tgtEl>
+                                        <p:attrNameLst>
+                                          <p:attrName>style.visibility</p:attrName>
+                                        </p:attrNameLst>
+                                      </p:cBhvr>
+                                      <p:to>
+                                        <p:strVal val="visible"/>
+                                      </p:to>
+                                    </p:set>
+                                  </p:childTnLst>
+                                </p:cTn>
+                              </p:par>
+                            </p:childTnLst>
+                          </p:cTn>
+                        </p:par>
+                      </p:childTnLst>
+                    </p:cTn>
+                  </p:par>
+                  <p:par>
+                    <p:cTn id="7" fill="hold">
+                      <p:stCondLst>
+                        <p:cond delay="indefinite"/>
+                      </p:stCondLst>
+                      <p:childTnLst>
+                        <p:par>
+                          <p:cTn id="8" fill="hold">
+                            <p:stCondLst>
+                              <p:cond delay="0"/>
+                            </p:stCondLst>
+                            <p:childTnLst>
+                              <p:par>
+                                <p:cTn id="9" presetID="1" presetClass="entr" presetSubtype="0" fill="hold" nodeType="clickEffect">
+                                  <p:stCondLst>
+                                    <p:cond delay="0"/>
+                                  </p:stCondLst>
+                                  <p:childTnLst>
+                                    <p:set>
+                                      <p:cBhvr>
+                                        <p:cTn id="10" dur="1" fill="hold">
+                                          <p:stCondLst>
+                                            <p:cond delay="0"/>
+                                          </p:stCondLst>
+                                        </p:cTn>
+                                        <p:tgtEl>
+                                          <p:spTgt spid="4"/>
+                                        </p:tgtEl>
+                                        <p:attrNameLst>
+                                          <p:attrName>style.visibility</p:attrName>
+                                        </p:attrNameLst>
+                                      </p:cBhvr>
+                                      <p:to>
+                                        <p:strVal val="visible"/>
+                                      </p:to>
+                                    </p:set>
+                                  </p:childTnLst>
+                                </p:cTn>
+                              </p:par>
+                            </p:childTnLst>
+                          </p:cTn>
+                        </p:par>
+                      </p:childTnLst>
+                    </p:cTn>
+                  </p:par>
+                  <p:par>
+                    <p:cTn id="11" fill="hold">
+                      <p:stCondLst>
+                        <p:cond delay="indefinite"/>
+                      </p:stCondLst>
+                      <p:childTnLst>
+                        <p:par>
+                          <p:cTn id="12" fill="hold">
+                            <p:stCondLst>
+                              <p:cond delay="0"/>
+                            </p:stCondLst>
+                            <p:childTnLst>
+                              <p:par>
+                                <p:cTn id="13" presetID="1" presetClass="entr" presetSubtype="0" fill="hold" grpId="0" nodeType="clickEffect">
+                                  <p:stCondLst>
+                                    <p:cond delay="0"/>
+                                  </p:stCondLst>
+                                  <p:childTnLst>
+                                    <p:set>
+                                      <p:cBhvr>
+                                        <p:cTn id="14" dur="1" fill="hold">
+                                          <p:stCondLst>
+                                            <p:cond delay="0"/>
+                                          </p:stCondLst>
+                                        </p:cTn>
+                                        <p:tgtEl>
+                                          <p:spTgt spid="27"/>
+                                        </p:tgtEl>
+                                        <p:attrNameLst>
+                                          <p:attrName>style.visibility</p:attrName>
+                                        </p:attrNameLst>
+                                      </p:cBhvr>
+                                      <p:to>
+                                        <p:strVal val="visible"/>
+                                      </p:to>
+                                    </p:set>
+                                  </p:childTnLst>
+                                </p:cTn>
+                              </p:par>
+                              <p:par>
+                                <p:cTn id="15" presetID="1" presetClass="entr" presetSubtype="0" fill="hold" nodeType="withEffect">
+                                  <p:stCondLst>
+                                    <p:cond delay="0"/>
+                                  </p:stCondLst>
+                                  <p:childTnLst>
+                                    <p:set>
+                                      <p:cBhvr>
+                                        <p:cTn id="16" dur="1" fill="hold">
+                                          <p:stCondLst>
+                                            <p:cond delay="0"/>
+                                          </p:stCondLst>
+                                        </p:cTn>
+                                        <p:tgtEl>
+                                          <p:spTgt spid="24">
+                                            <p:txEl>
+                                              <p:pRg st="7" end="7"/>
+                                            </p:txEl>
+                                          </p:spTgt>
+                                        </p:tgtEl>
+                                        <p:attrNameLst>
+                                          <p:attrName>style.visibility</p:attrName>
+                                        </p:attrNameLst>
+                                      </p:cBhvr>
+                                      <p:to>
+                                        <p:strVal val="visible"/>
+                                      </p:to>
+                                    </p:set>
+                                  </p:childTnLst>
+                                </p:cTn>
+                              </p:par>
+                            </p:childTnLst>
+                          </p:cTn>
+                        </p:par>
+                      </p:childTnLst>
+                    </p:cTn>
+                  </p:par>
+                </p:childTnLst>
+              </p:cTn>
+              <p:prevCondLst>
+                <p:cond evt="onPrev" delay="0">
+                  <p:tgtEl>
+                    <p:sldTgt/>
+                  </p:tgtEl>
+                </p:cond>
+              </p:prevCondLst>
+              <p:nextCondLst>
+                <p:cond evt="onNext" delay="0">
+                  <p:tgtEl>
+                    <p:sldTgt/>
+                  </p:tgtEl>
+                </p:cond>
+              </p:nextCondLst>
+            </p:seq>
+          </p:childTnLst>
+        </p:cTn>
+      </p:par>
+    </p:tnLst>
+    <p:bldLst>
+      <p:bldP spid="14" grpId="0" animBg="1"/>
+      <p:bldP spid="27" grpId="0" animBg="1"/>
+    </p:bldLst>
+  </p:timing>
 </p:sld>
 </file>
 
@@ -16124,13 +17250,13 @@
         </p:nvSpPr>
         <p:spPr>
           <a:xfrm>
-            <a:off x="383153" y="3166218"/>
+            <a:off x="383152" y="3720372"/>
             <a:ext cx="1829957" cy="588954"/>
           </a:xfrm>
           <a:prstGeom prst="wedgeRoundRectCallout">
             <a:avLst>
-              <a:gd name="adj1" fmla="val 76684"/>
-              <a:gd name="adj2" fmla="val 1389"/>
+              <a:gd name="adj1" fmla="val 107580"/>
+              <a:gd name="adj2" fmla="val 112796"/>
               <a:gd name="adj3" fmla="val 16667"/>
             </a:avLst>
           </a:prstGeom>
@@ -16158,7 +17284,7 @@
             <a:pPr algn="ctr"/>
             <a:r>
               <a:rPr lang="en-US" sz="1600" dirty="0"/>
-              <a:t>end of episode is detected below</a:t>
+              <a:t>Detect the end of the episode</a:t>
             </a:r>
           </a:p>
         </p:txBody>
@@ -16179,8 +17305,8 @@
             </p:nvSpPr>
             <p:spPr>
               <a:xfrm>
-                <a:off x="312056" y="4760687"/>
-                <a:ext cx="1901053" cy="786244"/>
+                <a:off x="209406" y="4760687"/>
+                <a:ext cx="2003704" cy="786244"/>
               </a:xfrm>
               <a:prstGeom prst="wedgeRoundRectCallout">
                 <a:avLst>
@@ -16213,7 +17339,7 @@
                 <a:pPr algn="ctr"/>
                 <a:r>
                   <a:rPr lang="en-US" sz="1600" dirty="0"/>
-                  <a:t>start only when we can update </a:t>
+                  <a:t>Start only when we can update </a:t>
                 </a:r>
                 <a14:m>
                   <m:oMath xmlns:m="http://schemas.openxmlformats.org/officeDocument/2006/math">
@@ -16259,8 +17385,8 @@
             </p:nvSpPr>
             <p:spPr>
               <a:xfrm>
-                <a:off x="312056" y="4760687"/>
-                <a:ext cx="1901053" cy="786244"/>
+                <a:off x="209406" y="4760687"/>
+                <a:ext cx="2003704" cy="786244"/>
               </a:xfrm>
               <a:prstGeom prst="wedgeRoundRectCallout">
                 <a:avLst>
@@ -16291,59 +17417,251 @@
           </p:sp>
         </mc:Fallback>
       </mc:AlternateContent>
-      <p:sp>
-        <p:nvSpPr>
-          <p:cNvPr id="13" name="Speech Bubble: Rectangle with Corners Rounded 12">
-            <a:extLst>
-              <a:ext uri="{FF2B5EF4-FFF2-40B4-BE49-F238E27FC236}">
-                <a16:creationId xmlns:a16="http://schemas.microsoft.com/office/drawing/2014/main" id="{F26C6334-EC59-8CC4-D349-78BE5FEC6E3F}"/>
-              </a:ext>
-            </a:extLst>
-          </p:cNvPr>
-          <p:cNvSpPr/>
-          <p:nvPr/>
-        </p:nvSpPr>
-        <p:spPr>
-          <a:xfrm>
-            <a:off x="7425988" y="5293300"/>
-            <a:ext cx="2329544" cy="543806"/>
-          </a:xfrm>
-          <a:prstGeom prst="wedgeRoundRectCallout">
-            <a:avLst>
-              <a:gd name="adj1" fmla="val -70920"/>
-              <a:gd name="adj2" fmla="val 19033"/>
-              <a:gd name="adj3" fmla="val 16667"/>
-            </a:avLst>
-          </a:prstGeom>
-        </p:spPr>
-        <p:style>
-          <a:lnRef idx="2">
-            <a:schemeClr val="accent1">
-              <a:shade val="15000"/>
-            </a:schemeClr>
-          </a:lnRef>
-          <a:fillRef idx="1">
-            <a:schemeClr val="accent1"/>
-          </a:fillRef>
-          <a:effectRef idx="0">
-            <a:schemeClr val="accent1"/>
-          </a:effectRef>
-          <a:fontRef idx="minor">
-            <a:schemeClr val="lt1"/>
-          </a:fontRef>
-        </p:style>
-        <p:txBody>
-          <a:bodyPr rtlCol="0" anchor="ctr"/>
-          <a:lstStyle/>
-          <a:p>
-            <a:pPr algn="ctr"/>
-            <a:r>
-              <a:rPr lang="en-US" sz="1600" dirty="0"/>
-              <a:t>Use bootstrapping if the episode is not over</a:t>
-            </a:r>
-          </a:p>
-        </p:txBody>
-      </p:sp>
+      <mc:AlternateContent xmlns:mc="http://schemas.openxmlformats.org/markup-compatibility/2006" xmlns:a14="http://schemas.microsoft.com/office/drawing/2010/main">
+        <mc:Choice Requires="a14">
+          <p:sp>
+            <p:nvSpPr>
+              <p:cNvPr id="13" name="Speech Bubble: Rectangle with Corners Rounded 12">
+                <a:extLst>
+                  <a:ext uri="{FF2B5EF4-FFF2-40B4-BE49-F238E27FC236}">
+                    <a16:creationId xmlns:a16="http://schemas.microsoft.com/office/drawing/2014/main" id="{F26C6334-EC59-8CC4-D349-78BE5FEC6E3F}"/>
+                  </a:ext>
+                </a:extLst>
+              </p:cNvPr>
+              <p:cNvSpPr/>
+              <p:nvPr/>
+            </p:nvSpPr>
+            <p:spPr>
+              <a:xfrm>
+                <a:off x="7425988" y="5293300"/>
+                <a:ext cx="2329544" cy="1258502"/>
+              </a:xfrm>
+              <a:prstGeom prst="wedgeRoundRectCallout">
+                <a:avLst>
+                  <a:gd name="adj1" fmla="val -73081"/>
+                  <a:gd name="adj2" fmla="val -20962"/>
+                  <a:gd name="adj3" fmla="val 16667"/>
+                </a:avLst>
+              </a:prstGeom>
+            </p:spPr>
+            <p:style>
+              <a:lnRef idx="2">
+                <a:schemeClr val="accent1">
+                  <a:shade val="15000"/>
+                </a:schemeClr>
+              </a:lnRef>
+              <a:fillRef idx="1">
+                <a:schemeClr val="accent1"/>
+              </a:fillRef>
+              <a:effectRef idx="0">
+                <a:schemeClr val="accent1"/>
+              </a:effectRef>
+              <a:fontRef idx="minor">
+                <a:schemeClr val="lt1"/>
+              </a:fontRef>
+            </p:style>
+            <p:txBody>
+              <a:bodyPr rtlCol="0" anchor="ctr"/>
+              <a:lstStyle/>
+              <a:p>
+                <a:pPr algn="ctr"/>
+                <a:r>
+                  <a:rPr lang="en-US" sz="1600" dirty="0"/>
+                  <a:t>Use bootstrapping if the episode is not over. </a:t>
+                </a:r>
+                <a:r>
+                  <a:rPr lang="en-US" sz="1600" b="1" dirty="0"/>
+                  <a:t>Note</a:t>
+                </a:r>
+                <a:r>
+                  <a:rPr lang="en-US" sz="1600" dirty="0"/>
+                  <a:t>: </a:t>
+                </a:r>
+                <a14:m>
+                  <m:oMath xmlns:m="http://schemas.openxmlformats.org/officeDocument/2006/math">
+                    <m:r>
+                      <a:rPr lang="en-US" sz="1600" i="1">
+                        <a:latin typeface="Cambria Math" panose="02040503050406030204" pitchFamily="18" charset="0"/>
+                      </a:rPr>
+                      <m:t>𝑉</m:t>
+                    </m:r>
+                    <m:r>
+                      <a:rPr lang="en-US" sz="1600" i="1">
+                        <a:latin typeface="Cambria Math" panose="02040503050406030204" pitchFamily="18" charset="0"/>
+                      </a:rPr>
+                      <m:t>(</m:t>
+                    </m:r>
+                    <m:sSub>
+                      <m:sSubPr>
+                        <m:ctrlPr>
+                          <a:rPr lang="en-US" sz="1600" i="1">
+                            <a:latin typeface="Cambria Math" panose="02040503050406030204" pitchFamily="18" charset="0"/>
+                          </a:rPr>
+                        </m:ctrlPr>
+                      </m:sSubPr>
+                      <m:e>
+                        <m:r>
+                          <a:rPr lang="en-US" sz="1600" i="1">
+                            <a:latin typeface="Cambria Math" panose="02040503050406030204" pitchFamily="18" charset="0"/>
+                          </a:rPr>
+                          <m:t>𝑆</m:t>
+                        </m:r>
+                      </m:e>
+                      <m:sub>
+                        <m:r>
+                          <a:rPr lang="en-US" sz="1600" i="1">
+                            <a:latin typeface="Cambria Math" panose="02040503050406030204" pitchFamily="18" charset="0"/>
+                          </a:rPr>
+                          <m:t>𝜏</m:t>
+                        </m:r>
+                        <m:r>
+                          <a:rPr lang="en-US" sz="1600" i="1">
+                            <a:latin typeface="Cambria Math" panose="02040503050406030204" pitchFamily="18" charset="0"/>
+                          </a:rPr>
+                          <m:t>+</m:t>
+                        </m:r>
+                        <m:r>
+                          <a:rPr lang="en-US" sz="1600" i="1">
+                            <a:latin typeface="Cambria Math" panose="02040503050406030204" pitchFamily="18" charset="0"/>
+                          </a:rPr>
+                          <m:t>𝑛</m:t>
+                        </m:r>
+                      </m:sub>
+                    </m:sSub>
+                    <m:r>
+                      <a:rPr lang="en-US" sz="1600" i="1">
+                        <a:latin typeface="Cambria Math" panose="02040503050406030204" pitchFamily="18" charset="0"/>
+                      </a:rPr>
+                      <m:t>)</m:t>
+                    </m:r>
+                  </m:oMath>
+                </a14:m>
+                <a:r>
+                  <a:rPr lang="en-US" sz="1600" dirty="0"/>
+                  <a:t>  is called </a:t>
+                </a:r>
+                <a14:m>
+                  <m:oMath xmlns:m="http://schemas.openxmlformats.org/officeDocument/2006/math">
+                    <m:r>
+                      <a:rPr lang="en-US" sz="1600" b="0" i="1" smtClean="0">
+                        <a:latin typeface="Cambria Math" panose="02040503050406030204" pitchFamily="18" charset="0"/>
+                        <a:ea typeface="Cambria Math" panose="02040503050406030204" pitchFamily="18" charset="0"/>
+                      </a:rPr>
+                      <m:t>𝑉</m:t>
+                    </m:r>
+                    <m:d>
+                      <m:dPr>
+                        <m:ctrlPr>
+                          <a:rPr lang="en-US" sz="1600" i="1">
+                            <a:latin typeface="Cambria Math" panose="02040503050406030204" pitchFamily="18" charset="0"/>
+                            <a:ea typeface="Cambria Math" panose="02040503050406030204" pitchFamily="18" charset="0"/>
+                          </a:rPr>
+                        </m:ctrlPr>
+                      </m:dPr>
+                      <m:e>
+                        <m:sSub>
+                          <m:sSubPr>
+                            <m:ctrlPr>
+                              <a:rPr lang="en-US" sz="1600" i="1">
+                                <a:latin typeface="Cambria Math" panose="02040503050406030204" pitchFamily="18" charset="0"/>
+                                <a:ea typeface="Cambria Math" panose="02040503050406030204" pitchFamily="18" charset="0"/>
+                              </a:rPr>
+                            </m:ctrlPr>
+                          </m:sSubPr>
+                          <m:e>
+                            <m:r>
+                              <a:rPr lang="en-US" sz="1600" i="1">
+                                <a:latin typeface="Cambria Math" panose="02040503050406030204" pitchFamily="18" charset="0"/>
+                                <a:ea typeface="Cambria Math" panose="02040503050406030204" pitchFamily="18" charset="0"/>
+                              </a:rPr>
+                              <m:t>𝑆</m:t>
+                            </m:r>
+                          </m:e>
+                          <m:sub>
+                            <m:r>
+                              <a:rPr lang="en-US" sz="1600" i="1">
+                                <a:latin typeface="Cambria Math" panose="02040503050406030204" pitchFamily="18" charset="0"/>
+                                <a:ea typeface="Cambria Math" panose="02040503050406030204" pitchFamily="18" charset="0"/>
+                              </a:rPr>
+                              <m:t>𝑡</m:t>
+                            </m:r>
+                            <m:r>
+                              <a:rPr lang="en-US" sz="1600" i="1">
+                                <a:latin typeface="Cambria Math" panose="02040503050406030204" pitchFamily="18" charset="0"/>
+                                <a:ea typeface="Cambria Math" panose="02040503050406030204" pitchFamily="18" charset="0"/>
+                              </a:rPr>
+                              <m:t>+</m:t>
+                            </m:r>
+                            <m:r>
+                              <a:rPr lang="en-US" sz="1600" i="1">
+                                <a:latin typeface="Cambria Math" panose="02040503050406030204" pitchFamily="18" charset="0"/>
+                                <a:ea typeface="Cambria Math" panose="02040503050406030204" pitchFamily="18" charset="0"/>
+                              </a:rPr>
+                              <m:t>𝑛</m:t>
+                            </m:r>
+                          </m:sub>
+                        </m:sSub>
+                      </m:e>
+                    </m:d>
+                  </m:oMath>
+                </a14:m>
+                <a:r>
+                  <a:rPr lang="en-US" sz="1600" dirty="0"/>
+                  <a:t> in the equations! </a:t>
+                </a:r>
+              </a:p>
+            </p:txBody>
+          </p:sp>
+        </mc:Choice>
+        <mc:Fallback xmlns="">
+          <p:sp>
+            <p:nvSpPr>
+              <p:cNvPr id="13" name="Speech Bubble: Rectangle with Corners Rounded 12">
+                <a:extLst>
+                  <a:ext uri="{FF2B5EF4-FFF2-40B4-BE49-F238E27FC236}">
+                    <a16:creationId xmlns:a16="http://schemas.microsoft.com/office/drawing/2014/main" id="{F26C6334-EC59-8CC4-D349-78BE5FEC6E3F}"/>
+                  </a:ext>
+                </a:extLst>
+              </p:cNvPr>
+              <p:cNvSpPr>
+                <a:spLocks noRot="1" noChangeAspect="1" noMove="1" noResize="1" noEditPoints="1" noAdjustHandles="1" noChangeArrowheads="1" noChangeShapeType="1" noTextEdit="1"/>
+              </p:cNvSpPr>
+              <p:nvPr/>
+            </p:nvSpPr>
+            <p:spPr>
+              <a:xfrm>
+                <a:off x="7425988" y="5293300"/>
+                <a:ext cx="2329544" cy="1258502"/>
+              </a:xfrm>
+              <a:prstGeom prst="wedgeRoundRectCallout">
+                <a:avLst>
+                  <a:gd name="adj1" fmla="val -73081"/>
+                  <a:gd name="adj2" fmla="val -20962"/>
+                  <a:gd name="adj3" fmla="val 16667"/>
+                </a:avLst>
+              </a:prstGeom>
+              <a:blipFill>
+                <a:blip r:embed="rId5"/>
+                <a:stretch>
+                  <a:fillRect t="-2857" b="-7143"/>
+                </a:stretch>
+              </a:blipFill>
+            </p:spPr>
+            <p:txBody>
+              <a:bodyPr/>
+              <a:lstStyle/>
+              <a:p>
+                <a:r>
+                  <a:rPr lang="en-US">
+                    <a:noFill/>
+                  </a:rPr>
+                  <a:t> </a:t>
+                </a:r>
+              </a:p>
+            </p:txBody>
+          </p:sp>
+        </mc:Fallback>
+      </mc:AlternateContent>
       <p:sp>
         <p:nvSpPr>
           <p:cNvPr id="14" name="Speech Bubble: Rectangle with Corners Rounded 13">
@@ -16397,6 +17715,571 @@
           </a:p>
         </p:txBody>
       </p:sp>
+      <p:grpSp>
+        <p:nvGrpSpPr>
+          <p:cNvPr id="20" name="Group 19">
+            <a:extLst>
+              <a:ext uri="{FF2B5EF4-FFF2-40B4-BE49-F238E27FC236}">
+                <a16:creationId xmlns:a16="http://schemas.microsoft.com/office/drawing/2014/main" id="{DE859F95-A5C2-CE37-B3D7-5DC8E7DDC4E6}"/>
+              </a:ext>
+            </a:extLst>
+          </p:cNvPr>
+          <p:cNvGrpSpPr/>
+          <p:nvPr/>
+        </p:nvGrpSpPr>
+        <p:grpSpPr>
+          <a:xfrm>
+            <a:off x="9986271" y="4309326"/>
+            <a:ext cx="2365690" cy="1216727"/>
+            <a:chOff x="9986271" y="4309326"/>
+            <a:chExt cx="2365690" cy="1216727"/>
+          </a:xfrm>
+        </p:grpSpPr>
+        <p:grpSp>
+          <p:nvGrpSpPr>
+            <p:cNvPr id="18" name="Group 17">
+              <a:extLst>
+                <a:ext uri="{FF2B5EF4-FFF2-40B4-BE49-F238E27FC236}">
+                  <a16:creationId xmlns:a16="http://schemas.microsoft.com/office/drawing/2014/main" id="{6BD81C03-2FFC-3430-6A96-CC215F8CB002}"/>
+                </a:ext>
+              </a:extLst>
+            </p:cNvPr>
+            <p:cNvGrpSpPr/>
+            <p:nvPr/>
+          </p:nvGrpSpPr>
+          <p:grpSpPr>
+            <a:xfrm>
+              <a:off x="9986271" y="4309326"/>
+              <a:ext cx="1996323" cy="913879"/>
+              <a:chOff x="10044440" y="1032968"/>
+              <a:chExt cx="1996323" cy="913879"/>
+            </a:xfrm>
+          </p:grpSpPr>
+          <p:cxnSp>
+            <p:nvCxnSpPr>
+              <p:cNvPr id="7" name="Straight Connector 6">
+                <a:extLst>
+                  <a:ext uri="{FF2B5EF4-FFF2-40B4-BE49-F238E27FC236}">
+                    <a16:creationId xmlns:a16="http://schemas.microsoft.com/office/drawing/2014/main" id="{D8B9856B-B3C4-5BCC-42AC-811D84A88D50}"/>
+                  </a:ext>
+                </a:extLst>
+              </p:cNvPr>
+              <p:cNvCxnSpPr>
+                <a:cxnSpLocks/>
+              </p:cNvCxnSpPr>
+              <p:nvPr/>
+            </p:nvCxnSpPr>
+            <p:spPr>
+              <a:xfrm flipH="1">
+                <a:off x="10044440" y="1577515"/>
+                <a:ext cx="1996323" cy="0"/>
+              </a:xfrm>
+              <a:prstGeom prst="line">
+                <a:avLst/>
+              </a:prstGeom>
+              <a:ln>
+                <a:headEnd type="triangle" w="med" len="med"/>
+                <a:tailEnd type="none" w="med" len="med"/>
+              </a:ln>
+            </p:spPr>
+            <p:style>
+              <a:lnRef idx="2">
+                <a:schemeClr val="accent1"/>
+              </a:lnRef>
+              <a:fillRef idx="0">
+                <a:schemeClr val="accent1"/>
+              </a:fillRef>
+              <a:effectRef idx="1">
+                <a:schemeClr val="accent1"/>
+              </a:effectRef>
+              <a:fontRef idx="minor">
+                <a:schemeClr val="tx1"/>
+              </a:fontRef>
+            </p:style>
+          </p:cxnSp>
+          <mc:AlternateContent xmlns:mc="http://schemas.openxmlformats.org/markup-compatibility/2006" xmlns:a14="http://schemas.microsoft.com/office/drawing/2010/main">
+            <mc:Choice Requires="a14">
+              <p:sp>
+                <p:nvSpPr>
+                  <p:cNvPr id="8" name="TextBox 7">
+                    <a:extLst>
+                      <a:ext uri="{FF2B5EF4-FFF2-40B4-BE49-F238E27FC236}">
+                        <a16:creationId xmlns:a16="http://schemas.microsoft.com/office/drawing/2014/main" id="{44A9B8B8-C293-91A1-01EB-1F759EBE74C9}"/>
+                      </a:ext>
+                    </a:extLst>
+                  </p:cNvPr>
+                  <p:cNvSpPr txBox="1"/>
+                  <p:nvPr/>
+                </p:nvSpPr>
+                <p:spPr>
+                  <a:xfrm>
+                    <a:off x="11437576" y="1577515"/>
+                    <a:ext cx="376929" cy="369332"/>
+                  </a:xfrm>
+                  <a:prstGeom prst="rect">
+                    <a:avLst/>
+                  </a:prstGeom>
+                  <a:noFill/>
+                </p:spPr>
+                <p:txBody>
+                  <a:bodyPr wrap="square" rtlCol="0">
+                    <a:spAutoFit/>
+                  </a:bodyPr>
+                  <a:lstStyle/>
+                  <a:p>
+                    <a:pPr/>
+                    <a14:m>
+                      <m:oMathPara xmlns:m="http://schemas.openxmlformats.org/officeDocument/2006/math">
+                        <m:oMathParaPr>
+                          <m:jc m:val="centerGroup"/>
+                        </m:oMathParaPr>
+                        <m:oMath xmlns:m="http://schemas.openxmlformats.org/officeDocument/2006/math">
+                          <m:r>
+                            <a:rPr lang="en-US" b="0" i="1" smtClean="0">
+                              <a:latin typeface="Cambria Math" panose="02040503050406030204" pitchFamily="18" charset="0"/>
+                            </a:rPr>
+                            <m:t>𝑡</m:t>
+                          </m:r>
+                        </m:oMath>
+                      </m:oMathPara>
+                    </a14:m>
+                    <a:endParaRPr lang="en-US" dirty="0"/>
+                  </a:p>
+                </p:txBody>
+              </p:sp>
+            </mc:Choice>
+            <mc:Fallback xmlns="">
+              <p:sp>
+                <p:nvSpPr>
+                  <p:cNvPr id="8" name="TextBox 7">
+                    <a:extLst>
+                      <a:ext uri="{FF2B5EF4-FFF2-40B4-BE49-F238E27FC236}">
+                        <a16:creationId xmlns:a16="http://schemas.microsoft.com/office/drawing/2014/main" id="{44A9B8B8-C293-91A1-01EB-1F759EBE74C9}"/>
+                      </a:ext>
+                    </a:extLst>
+                  </p:cNvPr>
+                  <p:cNvSpPr txBox="1">
+                    <a:spLocks noRot="1" noChangeAspect="1" noMove="1" noResize="1" noEditPoints="1" noAdjustHandles="1" noChangeArrowheads="1" noChangeShapeType="1" noTextEdit="1"/>
+                  </p:cNvSpPr>
+                  <p:nvPr/>
+                </p:nvSpPr>
+                <p:spPr>
+                  <a:xfrm>
+                    <a:off x="11437576" y="1577515"/>
+                    <a:ext cx="376929" cy="369332"/>
+                  </a:xfrm>
+                  <a:prstGeom prst="rect">
+                    <a:avLst/>
+                  </a:prstGeom>
+                  <a:blipFill>
+                    <a:blip r:embed="rId6"/>
+                    <a:stretch>
+                      <a:fillRect/>
+                    </a:stretch>
+                  </a:blipFill>
+                </p:spPr>
+                <p:txBody>
+                  <a:bodyPr/>
+                  <a:lstStyle/>
+                  <a:p>
+                    <a:r>
+                      <a:rPr lang="en-US">
+                        <a:noFill/>
+                      </a:rPr>
+                      <a:t> </a:t>
+                    </a:r>
+                  </a:p>
+                </p:txBody>
+              </p:sp>
+            </mc:Fallback>
+          </mc:AlternateContent>
+          <mc:AlternateContent xmlns:mc="http://schemas.openxmlformats.org/markup-compatibility/2006" xmlns:a14="http://schemas.microsoft.com/office/drawing/2010/main">
+            <mc:Choice Requires="a14">
+              <p:sp>
+                <p:nvSpPr>
+                  <p:cNvPr id="11" name="TextBox 10">
+                    <a:extLst>
+                      <a:ext uri="{FF2B5EF4-FFF2-40B4-BE49-F238E27FC236}">
+                        <a16:creationId xmlns:a16="http://schemas.microsoft.com/office/drawing/2014/main" id="{D60D0466-EF57-5F71-0C88-02AB91FDD90D}"/>
+                      </a:ext>
+                    </a:extLst>
+                  </p:cNvPr>
+                  <p:cNvSpPr txBox="1"/>
+                  <p:nvPr/>
+                </p:nvSpPr>
+                <p:spPr>
+                  <a:xfrm>
+                    <a:off x="10044440" y="1577515"/>
+                    <a:ext cx="376929" cy="369332"/>
+                  </a:xfrm>
+                  <a:prstGeom prst="rect">
+                    <a:avLst/>
+                  </a:prstGeom>
+                  <a:noFill/>
+                </p:spPr>
+                <p:txBody>
+                  <a:bodyPr wrap="square" rtlCol="0">
+                    <a:spAutoFit/>
+                  </a:bodyPr>
+                  <a:lstStyle/>
+                  <a:p>
+                    <a:pPr/>
+                    <a14:m>
+                      <m:oMathPara xmlns:m="http://schemas.openxmlformats.org/officeDocument/2006/math">
+                        <m:oMathParaPr>
+                          <m:jc m:val="centerGroup"/>
+                        </m:oMathParaPr>
+                        <m:oMath xmlns:m="http://schemas.openxmlformats.org/officeDocument/2006/math">
+                          <m:r>
+                            <a:rPr lang="en-US" b="0" i="1" smtClean="0">
+                              <a:latin typeface="Cambria Math" panose="02040503050406030204" pitchFamily="18" charset="0"/>
+                            </a:rPr>
+                            <m:t>𝜏</m:t>
+                          </m:r>
+                        </m:oMath>
+                      </m:oMathPara>
+                    </a14:m>
+                    <a:endParaRPr lang="en-US" dirty="0"/>
+                  </a:p>
+                </p:txBody>
+              </p:sp>
+            </mc:Choice>
+            <mc:Fallback xmlns="">
+              <p:sp>
+                <p:nvSpPr>
+                  <p:cNvPr id="11" name="TextBox 10">
+                    <a:extLst>
+                      <a:ext uri="{FF2B5EF4-FFF2-40B4-BE49-F238E27FC236}">
+                        <a16:creationId xmlns:a16="http://schemas.microsoft.com/office/drawing/2014/main" id="{D60D0466-EF57-5F71-0C88-02AB91FDD90D}"/>
+                      </a:ext>
+                    </a:extLst>
+                  </p:cNvPr>
+                  <p:cNvSpPr txBox="1">
+                    <a:spLocks noRot="1" noChangeAspect="1" noMove="1" noResize="1" noEditPoints="1" noAdjustHandles="1" noChangeArrowheads="1" noChangeShapeType="1" noTextEdit="1"/>
+                  </p:cNvSpPr>
+                  <p:nvPr/>
+                </p:nvSpPr>
+                <p:spPr>
+                  <a:xfrm>
+                    <a:off x="10044440" y="1577515"/>
+                    <a:ext cx="376929" cy="369332"/>
+                  </a:xfrm>
+                  <a:prstGeom prst="rect">
+                    <a:avLst/>
+                  </a:prstGeom>
+                  <a:blipFill>
+                    <a:blip r:embed="rId7"/>
+                    <a:stretch>
+                      <a:fillRect/>
+                    </a:stretch>
+                  </a:blipFill>
+                </p:spPr>
+                <p:txBody>
+                  <a:bodyPr/>
+                  <a:lstStyle/>
+                  <a:p>
+                    <a:r>
+                      <a:rPr lang="en-US">
+                        <a:noFill/>
+                      </a:rPr>
+                      <a:t> </a:t>
+                    </a:r>
+                  </a:p>
+                </p:txBody>
+              </p:sp>
+            </mc:Fallback>
+          </mc:AlternateContent>
+          <mc:AlternateContent xmlns:mc="http://schemas.openxmlformats.org/markup-compatibility/2006" xmlns:a14="http://schemas.microsoft.com/office/drawing/2010/main">
+            <mc:Choice Requires="a14">
+              <p:sp>
+                <p:nvSpPr>
+                  <p:cNvPr id="15" name="TextBox 14">
+                    <a:extLst>
+                      <a:ext uri="{FF2B5EF4-FFF2-40B4-BE49-F238E27FC236}">
+                        <a16:creationId xmlns:a16="http://schemas.microsoft.com/office/drawing/2014/main" id="{CA6A7031-056F-EB6D-642F-809EE4320E9D}"/>
+                      </a:ext>
+                    </a:extLst>
+                  </p:cNvPr>
+                  <p:cNvSpPr txBox="1"/>
+                  <p:nvPr/>
+                </p:nvSpPr>
+                <p:spPr>
+                  <a:xfrm>
+                    <a:off x="10416206" y="1032968"/>
+                    <a:ext cx="1111291" cy="369332"/>
+                  </a:xfrm>
+                  <a:prstGeom prst="rect">
+                    <a:avLst/>
+                  </a:prstGeom>
+                  <a:noFill/>
+                </p:spPr>
+                <p:txBody>
+                  <a:bodyPr wrap="square" rtlCol="0">
+                    <a:spAutoFit/>
+                  </a:bodyPr>
+                  <a:lstStyle/>
+                  <a:p>
+                    <a14:m>
+                      <m:oMath xmlns:m="http://schemas.openxmlformats.org/officeDocument/2006/math">
+                        <m:r>
+                          <a:rPr lang="en-US" b="0" i="1" smtClean="0">
+                            <a:latin typeface="Cambria Math" panose="02040503050406030204" pitchFamily="18" charset="0"/>
+                          </a:rPr>
+                          <m:t>𝑛</m:t>
+                        </m:r>
+                      </m:oMath>
+                    </a14:m>
+                    <a:r>
+                      <a:rPr lang="en-US" dirty="0"/>
+                      <a:t> steps</a:t>
+                    </a:r>
+                  </a:p>
+                </p:txBody>
+              </p:sp>
+            </mc:Choice>
+            <mc:Fallback xmlns="">
+              <p:sp>
+                <p:nvSpPr>
+                  <p:cNvPr id="15" name="TextBox 14">
+                    <a:extLst>
+                      <a:ext uri="{FF2B5EF4-FFF2-40B4-BE49-F238E27FC236}">
+                        <a16:creationId xmlns:a16="http://schemas.microsoft.com/office/drawing/2014/main" id="{CA6A7031-056F-EB6D-642F-809EE4320E9D}"/>
+                      </a:ext>
+                    </a:extLst>
+                  </p:cNvPr>
+                  <p:cNvSpPr txBox="1">
+                    <a:spLocks noRot="1" noChangeAspect="1" noMove="1" noResize="1" noEditPoints="1" noAdjustHandles="1" noChangeArrowheads="1" noChangeShapeType="1" noTextEdit="1"/>
+                  </p:cNvSpPr>
+                  <p:nvPr/>
+                </p:nvSpPr>
+                <p:spPr>
+                  <a:xfrm>
+                    <a:off x="10416206" y="1032968"/>
+                    <a:ext cx="1111291" cy="369332"/>
+                  </a:xfrm>
+                  <a:prstGeom prst="rect">
+                    <a:avLst/>
+                  </a:prstGeom>
+                  <a:blipFill>
+                    <a:blip r:embed="rId8"/>
+                    <a:stretch>
+                      <a:fillRect t="-8333" b="-28333"/>
+                    </a:stretch>
+                  </a:blipFill>
+                </p:spPr>
+                <p:txBody>
+                  <a:bodyPr/>
+                  <a:lstStyle/>
+                  <a:p>
+                    <a:r>
+                      <a:rPr lang="en-US">
+                        <a:noFill/>
+                      </a:rPr>
+                      <a:t> </a:t>
+                    </a:r>
+                  </a:p>
+                </p:txBody>
+              </p:sp>
+            </mc:Fallback>
+          </mc:AlternateContent>
+          <p:sp>
+            <p:nvSpPr>
+              <p:cNvPr id="16" name="Right Brace 15">
+                <a:extLst>
+                  <a:ext uri="{FF2B5EF4-FFF2-40B4-BE49-F238E27FC236}">
+                    <a16:creationId xmlns:a16="http://schemas.microsoft.com/office/drawing/2014/main" id="{DF1F0B09-177D-1C23-8922-13B60D4726FE}"/>
+                  </a:ext>
+                </a:extLst>
+              </p:cNvPr>
+              <p:cNvSpPr/>
+              <p:nvPr/>
+            </p:nvSpPr>
+            <p:spPr>
+              <a:xfrm rot="16200000">
+                <a:off x="10847163" y="722444"/>
+                <a:ext cx="146575" cy="1416969"/>
+              </a:xfrm>
+              <a:prstGeom prst="rightBrace">
+                <a:avLst/>
+              </a:prstGeom>
+            </p:spPr>
+            <p:style>
+              <a:lnRef idx="2">
+                <a:schemeClr val="accent1"/>
+              </a:lnRef>
+              <a:fillRef idx="0">
+                <a:schemeClr val="accent1"/>
+              </a:fillRef>
+              <a:effectRef idx="1">
+                <a:schemeClr val="accent1"/>
+              </a:effectRef>
+              <a:fontRef idx="minor">
+                <a:schemeClr val="tx1"/>
+              </a:fontRef>
+            </p:style>
+            <p:txBody>
+              <a:bodyPr rtlCol="0" anchor="ctr"/>
+              <a:lstStyle/>
+              <a:p>
+                <a:pPr algn="ctr"/>
+                <a:endParaRPr lang="en-US"/>
+              </a:p>
+            </p:txBody>
+          </p:sp>
+        </p:grpSp>
+        <mc:AlternateContent xmlns:mc="http://schemas.openxmlformats.org/markup-compatibility/2006" xmlns:a14="http://schemas.microsoft.com/office/drawing/2010/main">
+          <mc:Choice Requires="a14">
+            <p:sp>
+              <p:nvSpPr>
+                <p:cNvPr id="19" name="TextBox 18">
+                  <a:extLst>
+                    <a:ext uri="{FF2B5EF4-FFF2-40B4-BE49-F238E27FC236}">
+                      <a16:creationId xmlns:a16="http://schemas.microsoft.com/office/drawing/2014/main" id="{ABD183B9-C0A7-1967-D463-484C00285B8B}"/>
+                    </a:ext>
+                  </a:extLst>
+                </p:cNvPr>
+                <p:cNvSpPr txBox="1"/>
+                <p:nvPr/>
+              </p:nvSpPr>
+              <p:spPr>
+                <a:xfrm>
+                  <a:off x="10355638" y="5218276"/>
+                  <a:ext cx="1996323" cy="307777"/>
+                </a:xfrm>
+                <a:prstGeom prst="rect">
+                  <a:avLst/>
+                </a:prstGeom>
+                <a:noFill/>
+              </p:spPr>
+              <p:txBody>
+                <a:bodyPr wrap="square" rtlCol="0">
+                  <a:spAutoFit/>
+                </a:bodyPr>
+                <a:lstStyle/>
+                <a:p>
+                  <a:r>
+                    <a:rPr lang="en-US" sz="1400" dirty="0"/>
+                    <a:t>Observed </a:t>
+                  </a:r>
+                  <a14:m>
+                    <m:oMath xmlns:m="http://schemas.openxmlformats.org/officeDocument/2006/math">
+                      <m:r>
+                        <a:rPr lang="en-US" sz="1400" b="0" i="1" smtClean="0">
+                          <a:latin typeface="Cambria Math" panose="02040503050406030204" pitchFamily="18" charset="0"/>
+                        </a:rPr>
+                        <m:t>𝑅</m:t>
+                      </m:r>
+                      <m:r>
+                        <m:rPr>
+                          <m:sty m:val="p"/>
+                        </m:rPr>
+                        <a:rPr lang="en-US" sz="1400" b="0" i="0" smtClean="0">
+                          <a:latin typeface="Cambria Math" panose="02040503050406030204" pitchFamily="18" charset="0"/>
+                        </a:rPr>
+                        <m:t>s</m:t>
+                      </m:r>
+                      <m:r>
+                        <a:rPr lang="en-US" sz="1400" b="0" i="1" smtClean="0">
+                          <a:latin typeface="Cambria Math" panose="02040503050406030204" pitchFamily="18" charset="0"/>
+                        </a:rPr>
+                        <m:t>+</m:t>
+                      </m:r>
+                      <m:r>
+                        <a:rPr lang="en-US" sz="1400" b="0" i="1" smtClean="0">
+                          <a:latin typeface="Cambria Math" panose="02040503050406030204" pitchFamily="18" charset="0"/>
+                        </a:rPr>
+                        <m:t>𝑉</m:t>
+                      </m:r>
+                      <m:r>
+                        <a:rPr lang="en-US" sz="1400" b="0" i="1" smtClean="0">
+                          <a:latin typeface="Cambria Math" panose="02040503050406030204" pitchFamily="18" charset="0"/>
+                        </a:rPr>
+                        <m:t>(</m:t>
+                      </m:r>
+                      <m:sSub>
+                        <m:sSubPr>
+                          <m:ctrlPr>
+                            <a:rPr lang="en-US" sz="1400" b="0" i="1" smtClean="0">
+                              <a:latin typeface="Cambria Math" panose="02040503050406030204" pitchFamily="18" charset="0"/>
+                            </a:rPr>
+                          </m:ctrlPr>
+                        </m:sSubPr>
+                        <m:e>
+                          <m:r>
+                            <a:rPr lang="en-US" sz="1400" b="0" i="1" smtClean="0">
+                              <a:latin typeface="Cambria Math" panose="02040503050406030204" pitchFamily="18" charset="0"/>
+                            </a:rPr>
+                            <m:t>𝑆</m:t>
+                          </m:r>
+                        </m:e>
+                        <m:sub>
+                          <m:r>
+                            <a:rPr lang="en-US" sz="1400" b="0" i="1" smtClean="0">
+                              <a:latin typeface="Cambria Math" panose="02040503050406030204" pitchFamily="18" charset="0"/>
+                            </a:rPr>
+                            <m:t>𝑡</m:t>
+                          </m:r>
+                        </m:sub>
+                      </m:sSub>
+                      <m:r>
+                        <a:rPr lang="en-US" sz="1400" b="0" i="1" smtClean="0">
+                          <a:latin typeface="Cambria Math" panose="02040503050406030204" pitchFamily="18" charset="0"/>
+                        </a:rPr>
+                        <m:t>)</m:t>
+                      </m:r>
+                    </m:oMath>
+                  </a14:m>
+                  <a:endParaRPr lang="en-US" sz="1400" dirty="0"/>
+                </a:p>
+              </p:txBody>
+            </p:sp>
+          </mc:Choice>
+          <mc:Fallback xmlns="">
+            <p:sp>
+              <p:nvSpPr>
+                <p:cNvPr id="19" name="TextBox 18">
+                  <a:extLst>
+                    <a:ext uri="{FF2B5EF4-FFF2-40B4-BE49-F238E27FC236}">
+                      <a16:creationId xmlns:a16="http://schemas.microsoft.com/office/drawing/2014/main" id="{ABD183B9-C0A7-1967-D463-484C00285B8B}"/>
+                    </a:ext>
+                  </a:extLst>
+                </p:cNvPr>
+                <p:cNvSpPr txBox="1">
+                  <a:spLocks noRot="1" noChangeAspect="1" noMove="1" noResize="1" noEditPoints="1" noAdjustHandles="1" noChangeArrowheads="1" noChangeShapeType="1" noTextEdit="1"/>
+                </p:cNvSpPr>
+                <p:nvPr/>
+              </p:nvSpPr>
+              <p:spPr>
+                <a:xfrm>
+                  <a:off x="10355638" y="5218276"/>
+                  <a:ext cx="1996323" cy="307777"/>
+                </a:xfrm>
+                <a:prstGeom prst="rect">
+                  <a:avLst/>
+                </a:prstGeom>
+                <a:blipFill>
+                  <a:blip r:embed="rId9"/>
+                  <a:stretch>
+                    <a:fillRect l="-917" t="-3922" b="-19608"/>
+                  </a:stretch>
+                </a:blipFill>
+              </p:spPr>
+              <p:txBody>
+                <a:bodyPr/>
+                <a:lstStyle/>
+                <a:p>
+                  <a:r>
+                    <a:rPr lang="en-US">
+                      <a:noFill/>
+                    </a:rPr>
+                    <a:t> </a:t>
+                  </a:r>
+                </a:p>
+              </p:txBody>
+            </p:sp>
+          </mc:Fallback>
+        </mc:AlternateContent>
+      </p:grpSp>
     </p:spTree>
     <p:extLst>
       <p:ext uri="{BB962C8B-B14F-4D97-AF65-F5344CB8AC3E}">
@@ -16450,13 +18333,13 @@
           <a:p>
             <a:r>
               <a:rPr lang="en-US" dirty="0"/>
-              <a:t>Convergence</a:t>
+              <a:t>Convergence Guarantee</a:t>
             </a:r>
           </a:p>
         </p:txBody>
       </p:sp>
-      <mc:AlternateContent xmlns:mc="http://schemas.openxmlformats.org/markup-compatibility/2006" xmlns:a14="http://schemas.microsoft.com/office/drawing/2010/main">
-        <mc:Choice Requires="a14">
+      <mc:AlternateContent xmlns:mc="http://schemas.openxmlformats.org/markup-compatibility/2006">
+        <mc:Choice xmlns:a14="http://schemas.microsoft.com/office/drawing/2010/main" Requires="a14">
           <p:sp>
             <p:nvSpPr>
               <p:cNvPr id="3" name="Content Placeholder 2">
@@ -16473,9 +18356,16 @@
                 <p:ph idx="1"/>
               </p:nvPr>
             </p:nvSpPr>
-            <p:spPr/>
+            <p:spPr>
+              <a:xfrm>
+                <a:off x="838200" y="3770851"/>
+                <a:ext cx="10515600" cy="2406112"/>
+              </a:xfrm>
+            </p:spPr>
             <p:txBody>
-              <a:bodyPr/>
+              <a:bodyPr>
+                <a:normAutofit fontScale="85000" lnSpcReduction="10000"/>
+              </a:bodyPr>
               <a:lstStyle/>
               <a:p>
                 <a:pPr marL="0" indent="0">
@@ -16483,211 +18373,16 @@
                 </a:pPr>
                 <a:r>
                   <a:rPr lang="en-US" b="1" dirty="0"/>
-                  <a:t>Error Reduction Property of </a:t>
-                </a:r>
-                <a14:m>
-                  <m:oMath xmlns:m="http://schemas.openxmlformats.org/officeDocument/2006/math">
-                    <m:r>
-                      <a:rPr lang="en-US" b="1" i="1" dirty="0">
-                        <a:latin typeface="Cambria Math" panose="02040503050406030204" pitchFamily="18" charset="0"/>
-                      </a:rPr>
-                      <m:t>𝒏</m:t>
-                    </m:r>
-                  </m:oMath>
-                </a14:m>
-                <a:r>
-                  <a:rPr lang="en-US" b="1" dirty="0"/>
-                  <a:t>-step Returns </a:t>
-                </a:r>
-              </a:p>
-              <a:p>
+                  <a:t>Explanation</a:t>
+                </a:r>
                 <a:r>
                   <a:rPr lang="en-US" dirty="0"/>
-                  <a:t>Uses </a:t>
-                </a:r>
-                <a14:m>
-                  <m:oMath xmlns:m="http://schemas.openxmlformats.org/officeDocument/2006/math">
-                    <m:sSub>
-                      <m:sSubPr>
-                        <m:ctrlPr>
-                          <a:rPr lang="en-US" i="1">
-                            <a:latin typeface="Cambria Math" panose="02040503050406030204" pitchFamily="18" charset="0"/>
-                            <a:ea typeface="Cambria Math" panose="02040503050406030204" pitchFamily="18" charset="0"/>
-                          </a:rPr>
-                        </m:ctrlPr>
-                      </m:sSubPr>
-                      <m:e>
-                        <m:r>
-                          <a:rPr lang="en-US" i="1">
-                            <a:latin typeface="Cambria Math" panose="02040503050406030204" pitchFamily="18" charset="0"/>
-                            <a:ea typeface="Cambria Math" panose="02040503050406030204" pitchFamily="18" charset="0"/>
-                          </a:rPr>
-                          <m:t>𝑉</m:t>
-                        </m:r>
-                      </m:e>
-                      <m:sub>
-                        <m:r>
-                          <a:rPr lang="en-US" i="1">
-                            <a:latin typeface="Cambria Math" panose="02040503050406030204" pitchFamily="18" charset="0"/>
-                            <a:ea typeface="Cambria Math" panose="02040503050406030204" pitchFamily="18" charset="0"/>
-                          </a:rPr>
-                          <m:t>𝑡</m:t>
-                        </m:r>
-                        <m:r>
-                          <a:rPr lang="en-US" i="1">
-                            <a:latin typeface="Cambria Math" panose="02040503050406030204" pitchFamily="18" charset="0"/>
-                            <a:ea typeface="Cambria Math" panose="02040503050406030204" pitchFamily="18" charset="0"/>
-                          </a:rPr>
-                          <m:t>+</m:t>
-                        </m:r>
-                        <m:r>
-                          <a:rPr lang="en-US" i="1">
-                            <a:latin typeface="Cambria Math" panose="02040503050406030204" pitchFamily="18" charset="0"/>
-                            <a:ea typeface="Cambria Math" panose="02040503050406030204" pitchFamily="18" charset="0"/>
-                          </a:rPr>
-                          <m:t>𝑛</m:t>
-                        </m:r>
-                        <m:r>
-                          <a:rPr lang="en-US" i="1">
-                            <a:latin typeface="Cambria Math" panose="02040503050406030204" pitchFamily="18" charset="0"/>
-                            <a:ea typeface="Cambria Math" panose="02040503050406030204" pitchFamily="18" charset="0"/>
-                          </a:rPr>
-                          <m:t>−1</m:t>
-                        </m:r>
-                      </m:sub>
-                    </m:sSub>
-                  </m:oMath>
-                </a14:m>
-                <a:r>
-                  <a:rPr lang="en-US" dirty="0"/>
-                  <a:t> to correct for the missing rewards after </a:t>
-                </a:r>
-                <a14:m>
-                  <m:oMath xmlns:m="http://schemas.openxmlformats.org/officeDocument/2006/math">
-                    <m:sSub>
-                      <m:sSubPr>
-                        <m:ctrlPr>
-                          <a:rPr lang="en-US" b="0" i="1" smtClean="0">
-                            <a:latin typeface="Cambria Math" panose="02040503050406030204" pitchFamily="18" charset="0"/>
-                          </a:rPr>
-                        </m:ctrlPr>
-                      </m:sSubPr>
-                      <m:e>
-                        <m:r>
-                          <a:rPr lang="en-US" b="0" i="1" smtClean="0">
-                            <a:latin typeface="Cambria Math" panose="02040503050406030204" pitchFamily="18" charset="0"/>
-                          </a:rPr>
-                          <m:t>𝑅</m:t>
-                        </m:r>
-                      </m:e>
-                      <m:sub>
-                        <m:r>
-                          <a:rPr lang="en-US" b="0" i="1" smtClean="0">
-                            <a:latin typeface="Cambria Math" panose="02040503050406030204" pitchFamily="18" charset="0"/>
-                          </a:rPr>
-                          <m:t>𝑡</m:t>
-                        </m:r>
-                        <m:r>
-                          <a:rPr lang="en-US" b="0" i="1" smtClean="0">
-                            <a:latin typeface="Cambria Math" panose="02040503050406030204" pitchFamily="18" charset="0"/>
-                          </a:rPr>
-                          <m:t>+</m:t>
-                        </m:r>
-                        <m:r>
-                          <a:rPr lang="en-US" b="0" i="1" smtClean="0">
-                            <a:latin typeface="Cambria Math" panose="02040503050406030204" pitchFamily="18" charset="0"/>
-                          </a:rPr>
-                          <m:t>𝑛</m:t>
-                        </m:r>
-                      </m:sub>
-                    </m:sSub>
-                  </m:oMath>
-                </a14:m>
-                <a:endParaRPr lang="en-US" dirty="0"/>
-              </a:p>
-              <a:p>
-                <a:r>
-                  <a:rPr lang="en-US" dirty="0"/>
-                  <a:t>The worst error of the expected </a:t>
-                </a:r>
-                <a14:m>
-                  <m:oMath xmlns:m="http://schemas.openxmlformats.org/officeDocument/2006/math">
-                    <m:r>
-                      <a:rPr lang="en-US" i="1" dirty="0" smtClean="0">
-                        <a:latin typeface="Cambria Math" panose="02040503050406030204" pitchFamily="18" charset="0"/>
-                      </a:rPr>
-                      <m:t>𝑛</m:t>
-                    </m:r>
-                  </m:oMath>
-                </a14:m>
-                <a:r>
-                  <a:rPr lang="en-US" dirty="0"/>
-                  <a:t>-step return is guaranteed to be less than or equal to the discounted the worst error under </a:t>
-                </a:r>
-                <a14:m>
-                  <m:oMath xmlns:m="http://schemas.openxmlformats.org/officeDocument/2006/math">
-                    <m:sSub>
-                      <m:sSubPr>
-                        <m:ctrlPr>
-                          <a:rPr lang="en-US" i="1">
-                            <a:latin typeface="Cambria Math" panose="02040503050406030204" pitchFamily="18" charset="0"/>
-                            <a:ea typeface="Cambria Math" panose="02040503050406030204" pitchFamily="18" charset="0"/>
-                          </a:rPr>
-                        </m:ctrlPr>
-                      </m:sSubPr>
-                      <m:e>
-                        <m:r>
-                          <a:rPr lang="en-US" i="1">
-                            <a:latin typeface="Cambria Math" panose="02040503050406030204" pitchFamily="18" charset="0"/>
-                            <a:ea typeface="Cambria Math" panose="02040503050406030204" pitchFamily="18" charset="0"/>
-                          </a:rPr>
-                          <m:t>𝑉</m:t>
-                        </m:r>
-                      </m:e>
-                      <m:sub>
-                        <m:r>
-                          <a:rPr lang="en-US" i="1">
-                            <a:latin typeface="Cambria Math" panose="02040503050406030204" pitchFamily="18" charset="0"/>
-                            <a:ea typeface="Cambria Math" panose="02040503050406030204" pitchFamily="18" charset="0"/>
-                          </a:rPr>
-                          <m:t>𝑡</m:t>
-                        </m:r>
-                        <m:r>
-                          <a:rPr lang="en-US" i="1">
-                            <a:latin typeface="Cambria Math" panose="02040503050406030204" pitchFamily="18" charset="0"/>
-                            <a:ea typeface="Cambria Math" panose="02040503050406030204" pitchFamily="18" charset="0"/>
-                          </a:rPr>
-                          <m:t>+</m:t>
-                        </m:r>
-                        <m:r>
-                          <a:rPr lang="en-US" i="1">
-                            <a:latin typeface="Cambria Math" panose="02040503050406030204" pitchFamily="18" charset="0"/>
-                            <a:ea typeface="Cambria Math" panose="02040503050406030204" pitchFamily="18" charset="0"/>
-                          </a:rPr>
-                          <m:t>𝑛</m:t>
-                        </m:r>
-                        <m:r>
-                          <a:rPr lang="en-US" i="1">
-                            <a:latin typeface="Cambria Math" panose="02040503050406030204" pitchFamily="18" charset="0"/>
-                            <a:ea typeface="Cambria Math" panose="02040503050406030204" pitchFamily="18" charset="0"/>
-                          </a:rPr>
-                          <m:t>−1</m:t>
-                        </m:r>
-                      </m:sub>
-                    </m:sSub>
-                    <m:r>
-                      <a:rPr lang="en-US" i="1">
-                        <a:latin typeface="Cambria Math" panose="02040503050406030204" pitchFamily="18" charset="0"/>
-                        <a:ea typeface="Cambria Math" panose="02040503050406030204" pitchFamily="18" charset="0"/>
-                      </a:rPr>
-                      <m:t> </m:t>
-                    </m:r>
-                  </m:oMath>
-                </a14:m>
-                <a:endParaRPr lang="en-US" dirty="0"/>
-              </a:p>
-              <a:p>
-                <a:endParaRPr lang="en-US" dirty="0"/>
+                  <a:t>: Using observed rewards (which have in expectation no error) in </a:t>
+                </a:r>
+                <a:endParaRPr lang="en-US" i="1" dirty="0">
+                  <a:latin typeface="Cambria Math" panose="02040503050406030204" pitchFamily="18" charset="0"/>
+                  <a:ea typeface="Cambria Math" panose="02040503050406030204" pitchFamily="18" charset="0"/>
+                </a:endParaRPr>
               </a:p>
               <a:p>
                 <a:pPr marL="0" indent="0">
@@ -16699,465 +18394,301 @@
                       <m:jc m:val="centerGroup"/>
                     </m:oMathParaPr>
                     <m:oMath xmlns:m="http://schemas.openxmlformats.org/officeDocument/2006/math">
-                      <m:func>
-                        <m:funcPr>
+                      <m:sSub>
+                        <m:sSubPr>
                           <m:ctrlPr>
-                            <a:rPr lang="en-US" i="1" smtClean="0">
+                            <a:rPr lang="en-US" i="1">
+                              <a:latin typeface="Cambria Math" panose="02040503050406030204" pitchFamily="18" charset="0"/>
+                              <a:ea typeface="Cambria Math" panose="02040503050406030204" pitchFamily="18" charset="0"/>
+                            </a:rPr>
+                          </m:ctrlPr>
+                        </m:sSubPr>
+                        <m:e>
+                          <m:r>
+                            <a:rPr lang="en-US" i="1">
+                              <a:latin typeface="Cambria Math" panose="02040503050406030204" pitchFamily="18" charset="0"/>
+                              <a:ea typeface="Cambria Math" panose="02040503050406030204" pitchFamily="18" charset="0"/>
+                            </a:rPr>
+                            <m:t>𝐺</m:t>
+                          </m:r>
+                        </m:e>
+                        <m:sub>
+                          <m:r>
+                            <a:rPr lang="en-US" i="1">
+                              <a:latin typeface="Cambria Math" panose="02040503050406030204" pitchFamily="18" charset="0"/>
+                              <a:ea typeface="Cambria Math" panose="02040503050406030204" pitchFamily="18" charset="0"/>
+                            </a:rPr>
+                            <m:t>𝑡</m:t>
+                          </m:r>
+                          <m:r>
+                            <a:rPr lang="en-US" i="1">
+                              <a:latin typeface="Cambria Math" panose="02040503050406030204" pitchFamily="18" charset="0"/>
+                              <a:ea typeface="Cambria Math" panose="02040503050406030204" pitchFamily="18" charset="0"/>
+                            </a:rPr>
+                            <m:t>:</m:t>
+                          </m:r>
+                          <m:r>
+                            <a:rPr lang="en-US" i="1">
+                              <a:latin typeface="Cambria Math" panose="02040503050406030204" pitchFamily="18" charset="0"/>
+                              <a:ea typeface="Cambria Math" panose="02040503050406030204" pitchFamily="18" charset="0"/>
+                            </a:rPr>
+                            <m:t>𝑡</m:t>
+                          </m:r>
+                          <m:r>
+                            <a:rPr lang="en-US" i="1">
+                              <a:latin typeface="Cambria Math" panose="02040503050406030204" pitchFamily="18" charset="0"/>
+                              <a:ea typeface="Cambria Math" panose="02040503050406030204" pitchFamily="18" charset="0"/>
+                            </a:rPr>
+                            <m:t>+</m:t>
+                          </m:r>
+                          <m:r>
+                            <a:rPr lang="en-US" i="1">
+                              <a:latin typeface="Cambria Math" panose="02040503050406030204" pitchFamily="18" charset="0"/>
+                              <a:ea typeface="Cambria Math" panose="02040503050406030204" pitchFamily="18" charset="0"/>
+                            </a:rPr>
+                            <m:t>𝑛</m:t>
+                          </m:r>
+                        </m:sub>
+                      </m:sSub>
+                      <m:r>
+                        <a:rPr lang="en-US" i="1">
+                          <a:latin typeface="Cambria Math" panose="02040503050406030204" pitchFamily="18" charset="0"/>
+                        </a:rPr>
+                        <m:t>=</m:t>
+                      </m:r>
+                      <m:sSub>
+                        <m:sSubPr>
+                          <m:ctrlPr>
+                            <a:rPr lang="en-US" i="1">
                               <a:latin typeface="Cambria Math" panose="02040503050406030204" pitchFamily="18" charset="0"/>
                             </a:rPr>
                           </m:ctrlPr>
-                        </m:funcPr>
-                        <m:fName>
-                          <m:limLow>
-                            <m:limLowPr>
-                              <m:ctrlPr>
-                                <a:rPr lang="en-US" i="1" smtClean="0">
-                                  <a:latin typeface="Cambria Math" panose="02040503050406030204" pitchFamily="18" charset="0"/>
-                                </a:rPr>
-                              </m:ctrlPr>
-                            </m:limLowPr>
-                            <m:e>
-                              <m:r>
-                                <m:rPr>
-                                  <m:sty m:val="p"/>
-                                </m:rPr>
-                                <a:rPr lang="en-US" i="0" smtClean="0">
-                                  <a:latin typeface="Cambria Math" panose="02040503050406030204" pitchFamily="18" charset="0"/>
-                                </a:rPr>
-                                <m:t>max</m:t>
-                              </m:r>
-                            </m:e>
-                            <m:lim>
-                              <m:r>
-                                <a:rPr lang="en-US" b="0" i="1" smtClean="0">
-                                  <a:latin typeface="Cambria Math" panose="02040503050406030204" pitchFamily="18" charset="0"/>
-                                </a:rPr>
-                                <m:t>𝑠</m:t>
-                              </m:r>
-                            </m:lim>
-                          </m:limLow>
-                        </m:fName>
+                        </m:sSubPr>
                         <m:e>
-                          <m:d>
-                            <m:dPr>
-                              <m:begChr m:val="|"/>
-                              <m:endChr m:val="|"/>
-                              <m:ctrlPr>
-                                <a:rPr lang="en-US" i="1" smtClean="0">
-                                  <a:latin typeface="Cambria Math" panose="02040503050406030204" pitchFamily="18" charset="0"/>
-                                </a:rPr>
-                              </m:ctrlPr>
-                            </m:dPr>
-                            <m:e>
-                              <m:sSub>
-                                <m:sSubPr>
-                                  <m:ctrlPr>
-                                    <a:rPr lang="en-US" b="0" i="1" smtClean="0">
-                                      <a:latin typeface="Cambria Math" panose="02040503050406030204" pitchFamily="18" charset="0"/>
-                                      <a:ea typeface="Cambria Math" panose="02040503050406030204" pitchFamily="18" charset="0"/>
-                                    </a:rPr>
-                                  </m:ctrlPr>
-                                </m:sSubPr>
-                                <m:e>
-                                  <m:r>
-                                    <a:rPr lang="en-US" i="1" smtClean="0">
-                                      <a:latin typeface="Cambria Math" panose="02040503050406030204" pitchFamily="18" charset="0"/>
-                                      <a:ea typeface="Cambria Math" panose="02040503050406030204" pitchFamily="18" charset="0"/>
-                                    </a:rPr>
-                                    <m:t>𝔼</m:t>
-                                  </m:r>
-                                </m:e>
-                                <m:sub>
-                                  <m:r>
-                                    <a:rPr lang="en-US" b="0" i="1" smtClean="0">
-                                      <a:latin typeface="Cambria Math" panose="02040503050406030204" pitchFamily="18" charset="0"/>
-                                      <a:ea typeface="Cambria Math" panose="02040503050406030204" pitchFamily="18" charset="0"/>
-                                    </a:rPr>
-                                    <m:t>𝜋</m:t>
-                                  </m:r>
-                                </m:sub>
-                              </m:sSub>
-                              <m:r>
-                                <a:rPr lang="en-US" b="0" i="1" smtClean="0">
-                                  <a:latin typeface="Cambria Math" panose="02040503050406030204" pitchFamily="18" charset="0"/>
-                                  <a:ea typeface="Cambria Math" panose="02040503050406030204" pitchFamily="18" charset="0"/>
-                                </a:rPr>
-                                <m:t>[</m:t>
-                              </m:r>
-                              <m:sSub>
-                                <m:sSubPr>
-                                  <m:ctrlPr>
-                                    <a:rPr lang="en-US" b="0" i="1" smtClean="0">
-                                      <a:latin typeface="Cambria Math" panose="02040503050406030204" pitchFamily="18" charset="0"/>
-                                      <a:ea typeface="Cambria Math" panose="02040503050406030204" pitchFamily="18" charset="0"/>
-                                    </a:rPr>
-                                  </m:ctrlPr>
-                                </m:sSubPr>
-                                <m:e>
-                                  <m:r>
-                                    <a:rPr lang="en-US" b="0" i="1" smtClean="0">
-                                      <a:latin typeface="Cambria Math" panose="02040503050406030204" pitchFamily="18" charset="0"/>
-                                      <a:ea typeface="Cambria Math" panose="02040503050406030204" pitchFamily="18" charset="0"/>
-                                    </a:rPr>
-                                    <m:t>𝐺</m:t>
-                                  </m:r>
-                                </m:e>
-                                <m:sub>
-                                  <m:r>
-                                    <a:rPr lang="en-US" b="0" i="1" smtClean="0">
-                                      <a:latin typeface="Cambria Math" panose="02040503050406030204" pitchFamily="18" charset="0"/>
-                                      <a:ea typeface="Cambria Math" panose="02040503050406030204" pitchFamily="18" charset="0"/>
-                                    </a:rPr>
-                                    <m:t>𝑡</m:t>
-                                  </m:r>
-                                  <m:r>
-                                    <a:rPr lang="en-US" b="0" i="1" smtClean="0">
-                                      <a:latin typeface="Cambria Math" panose="02040503050406030204" pitchFamily="18" charset="0"/>
-                                      <a:ea typeface="Cambria Math" panose="02040503050406030204" pitchFamily="18" charset="0"/>
-                                    </a:rPr>
-                                    <m:t>:</m:t>
-                                  </m:r>
-                                  <m:r>
-                                    <a:rPr lang="en-US" b="0" i="1" smtClean="0">
-                                      <a:latin typeface="Cambria Math" panose="02040503050406030204" pitchFamily="18" charset="0"/>
-                                      <a:ea typeface="Cambria Math" panose="02040503050406030204" pitchFamily="18" charset="0"/>
-                                    </a:rPr>
-                                    <m:t>𝑡</m:t>
-                                  </m:r>
-                                  <m:r>
-                                    <a:rPr lang="en-US" b="0" i="1" smtClean="0">
-                                      <a:latin typeface="Cambria Math" panose="02040503050406030204" pitchFamily="18" charset="0"/>
-                                      <a:ea typeface="Cambria Math" panose="02040503050406030204" pitchFamily="18" charset="0"/>
-                                    </a:rPr>
-                                    <m:t>+</m:t>
-                                  </m:r>
-                                  <m:r>
-                                    <a:rPr lang="en-US" b="0" i="1" smtClean="0">
-                                      <a:latin typeface="Cambria Math" panose="02040503050406030204" pitchFamily="18" charset="0"/>
-                                      <a:ea typeface="Cambria Math" panose="02040503050406030204" pitchFamily="18" charset="0"/>
-                                    </a:rPr>
-                                    <m:t>𝑛</m:t>
-                                  </m:r>
-                                </m:sub>
-                              </m:sSub>
-                              <m:r>
-                                <a:rPr lang="en-US" b="0" i="1" smtClean="0">
-                                  <a:latin typeface="Cambria Math" panose="02040503050406030204" pitchFamily="18" charset="0"/>
-                                  <a:ea typeface="Cambria Math" panose="02040503050406030204" pitchFamily="18" charset="0"/>
-                                </a:rPr>
-                                <m:t>|</m:t>
-                              </m:r>
-                              <m:sSub>
-                                <m:sSubPr>
-                                  <m:ctrlPr>
-                                    <a:rPr lang="en-US" b="0" i="1" smtClean="0">
-                                      <a:latin typeface="Cambria Math" panose="02040503050406030204" pitchFamily="18" charset="0"/>
-                                      <a:ea typeface="Cambria Math" panose="02040503050406030204" pitchFamily="18" charset="0"/>
-                                    </a:rPr>
-                                  </m:ctrlPr>
-                                </m:sSubPr>
-                                <m:e>
-                                  <m:r>
-                                    <a:rPr lang="en-US" b="0" i="1" smtClean="0">
-                                      <a:latin typeface="Cambria Math" panose="02040503050406030204" pitchFamily="18" charset="0"/>
-                                      <a:ea typeface="Cambria Math" panose="02040503050406030204" pitchFamily="18" charset="0"/>
-                                    </a:rPr>
-                                    <m:t>𝑆</m:t>
-                                  </m:r>
-                                </m:e>
-                                <m:sub>
-                                  <m:r>
-                                    <a:rPr lang="en-US" b="0" i="1" smtClean="0">
-                                      <a:latin typeface="Cambria Math" panose="02040503050406030204" pitchFamily="18" charset="0"/>
-                                      <a:ea typeface="Cambria Math" panose="02040503050406030204" pitchFamily="18" charset="0"/>
-                                    </a:rPr>
-                                    <m:t>𝑡</m:t>
-                                  </m:r>
-                                </m:sub>
-                              </m:sSub>
-                              <m:r>
-                                <a:rPr lang="en-US" i="1">
-                                  <a:latin typeface="Cambria Math" panose="02040503050406030204" pitchFamily="18" charset="0"/>
-                                  <a:ea typeface="Cambria Math" panose="02040503050406030204" pitchFamily="18" charset="0"/>
-                                </a:rPr>
-                                <m:t>=</m:t>
-                              </m:r>
-                              <m:r>
-                                <a:rPr lang="en-US" i="1">
-                                  <a:latin typeface="Cambria Math" panose="02040503050406030204" pitchFamily="18" charset="0"/>
-                                  <a:ea typeface="Cambria Math" panose="02040503050406030204" pitchFamily="18" charset="0"/>
-                                </a:rPr>
-                                <m:t>𝑠</m:t>
-                              </m:r>
-                              <m:r>
-                                <a:rPr lang="en-US" i="1">
-                                  <a:latin typeface="Cambria Math" panose="02040503050406030204" pitchFamily="18" charset="0"/>
-                                  <a:ea typeface="Cambria Math" panose="02040503050406030204" pitchFamily="18" charset="0"/>
-                                </a:rPr>
-                                <m:t>]−</m:t>
-                              </m:r>
-                              <m:sSub>
-                                <m:sSubPr>
-                                  <m:ctrlPr>
-                                    <a:rPr lang="en-US" i="1">
-                                      <a:latin typeface="Cambria Math" panose="02040503050406030204" pitchFamily="18" charset="0"/>
-                                      <a:ea typeface="Cambria Math" panose="02040503050406030204" pitchFamily="18" charset="0"/>
-                                    </a:rPr>
-                                  </m:ctrlPr>
-                                </m:sSubPr>
-                                <m:e>
-                                  <m:r>
-                                    <a:rPr lang="en-US" i="1">
-                                      <a:latin typeface="Cambria Math" panose="02040503050406030204" pitchFamily="18" charset="0"/>
-                                      <a:ea typeface="Cambria Math" panose="02040503050406030204" pitchFamily="18" charset="0"/>
-                                    </a:rPr>
-                                    <m:t>𝑣</m:t>
-                                  </m:r>
-                                </m:e>
-                                <m:sub>
-                                  <m:r>
-                                    <a:rPr lang="en-US" i="1">
-                                      <a:latin typeface="Cambria Math" panose="02040503050406030204" pitchFamily="18" charset="0"/>
-                                      <a:ea typeface="Cambria Math" panose="02040503050406030204" pitchFamily="18" charset="0"/>
-                                    </a:rPr>
-                                    <m:t>𝜋</m:t>
-                                  </m:r>
-                                </m:sub>
-                              </m:sSub>
-                              <m:r>
-                                <a:rPr lang="en-US" i="1">
-                                  <a:latin typeface="Cambria Math" panose="02040503050406030204" pitchFamily="18" charset="0"/>
-                                  <a:ea typeface="Cambria Math" panose="02040503050406030204" pitchFamily="18" charset="0"/>
-                                </a:rPr>
-                                <m:t>(</m:t>
-                              </m:r>
-                              <m:r>
-                                <a:rPr lang="en-US" i="1">
-                                  <a:latin typeface="Cambria Math" panose="02040503050406030204" pitchFamily="18" charset="0"/>
-                                  <a:ea typeface="Cambria Math" panose="02040503050406030204" pitchFamily="18" charset="0"/>
-                                </a:rPr>
-                                <m:t>𝑠</m:t>
-                              </m:r>
-                              <m:r>
-                                <a:rPr lang="en-US" b="0" i="1" smtClean="0">
-                                  <a:latin typeface="Cambria Math" panose="02040503050406030204" pitchFamily="18" charset="0"/>
-                                  <a:ea typeface="Cambria Math" panose="02040503050406030204" pitchFamily="18" charset="0"/>
-                                </a:rPr>
-                                <m:t>)</m:t>
-                              </m:r>
-                            </m:e>
-                          </m:d>
                           <m:r>
-                            <a:rPr lang="en-US" b="0" i="1" smtClean="0">
+                            <a:rPr lang="en-US" i="1">
                               <a:latin typeface="Cambria Math" panose="02040503050406030204" pitchFamily="18" charset="0"/>
                             </a:rPr>
-                            <m:t>≤</m:t>
+                            <m:t>𝑅</m:t>
                           </m:r>
-                          <m:sSup>
-                            <m:sSupPr>
-                              <m:ctrlPr>
-                                <a:rPr lang="en-US" b="0" i="1" smtClean="0">
-                                  <a:latin typeface="Cambria Math" panose="02040503050406030204" pitchFamily="18" charset="0"/>
-                                </a:rPr>
-                              </m:ctrlPr>
-                            </m:sSupPr>
-                            <m:e>
-                              <m:r>
-                                <a:rPr lang="en-US" b="0" i="1" smtClean="0">
-                                  <a:latin typeface="Cambria Math" panose="02040503050406030204" pitchFamily="18" charset="0"/>
-                                </a:rPr>
-                                <m:t>𝛾</m:t>
-                              </m:r>
-                            </m:e>
-                            <m:sup>
-                              <m:r>
-                                <a:rPr lang="en-US" b="0" i="1" smtClean="0">
-                                  <a:latin typeface="Cambria Math" panose="02040503050406030204" pitchFamily="18" charset="0"/>
-                                </a:rPr>
-                                <m:t>𝑛</m:t>
-                              </m:r>
-                            </m:sup>
-                          </m:sSup>
-                          <m:func>
-                            <m:funcPr>
+                        </m:e>
+                        <m:sub>
+                          <m:r>
+                            <a:rPr lang="en-US" i="1">
+                              <a:latin typeface="Cambria Math" panose="02040503050406030204" pitchFamily="18" charset="0"/>
+                            </a:rPr>
+                            <m:t>𝑡</m:t>
+                          </m:r>
+                          <m:r>
+                            <a:rPr lang="en-US" i="1">
+                              <a:latin typeface="Cambria Math" panose="02040503050406030204" pitchFamily="18" charset="0"/>
+                            </a:rPr>
+                            <m:t>+1</m:t>
+                          </m:r>
+                        </m:sub>
+                      </m:sSub>
+                      <m:r>
+                        <a:rPr lang="en-US" i="1">
+                          <a:latin typeface="Cambria Math" panose="02040503050406030204" pitchFamily="18" charset="0"/>
+                        </a:rPr>
+                        <m:t>+</m:t>
+                      </m:r>
+                      <m:r>
+                        <a:rPr lang="en-US" i="1">
+                          <a:latin typeface="Cambria Math" panose="02040503050406030204" pitchFamily="18" charset="0"/>
+                        </a:rPr>
+                        <m:t>𝛾</m:t>
+                      </m:r>
+                      <m:sSub>
+                        <m:sSubPr>
+                          <m:ctrlPr>
+                            <a:rPr lang="en-US" i="1">
+                              <a:latin typeface="Cambria Math" panose="02040503050406030204" pitchFamily="18" charset="0"/>
+                            </a:rPr>
+                          </m:ctrlPr>
+                        </m:sSubPr>
+                        <m:e>
+                          <m:r>
+                            <a:rPr lang="en-US" i="1">
+                              <a:latin typeface="Cambria Math" panose="02040503050406030204" pitchFamily="18" charset="0"/>
+                            </a:rPr>
+                            <m:t>𝑅</m:t>
+                          </m:r>
+                        </m:e>
+                        <m:sub>
+                          <m:r>
+                            <a:rPr lang="en-US" i="1">
+                              <a:latin typeface="Cambria Math" panose="02040503050406030204" pitchFamily="18" charset="0"/>
+                            </a:rPr>
+                            <m:t>𝑡</m:t>
+                          </m:r>
+                          <m:r>
+                            <a:rPr lang="en-US" i="1">
+                              <a:latin typeface="Cambria Math" panose="02040503050406030204" pitchFamily="18" charset="0"/>
+                            </a:rPr>
+                            <m:t>+2</m:t>
+                          </m:r>
+                        </m:sub>
+                      </m:sSub>
+                      <m:r>
+                        <a:rPr lang="en-US" i="1">
+                          <a:latin typeface="Cambria Math" panose="02040503050406030204" pitchFamily="18" charset="0"/>
+                        </a:rPr>
+                        <m:t>+…+</m:t>
+                      </m:r>
+                      <m:sSup>
+                        <m:sSupPr>
+                          <m:ctrlPr>
+                            <a:rPr lang="en-US" i="1">
+                              <a:latin typeface="Cambria Math" panose="02040503050406030204" pitchFamily="18" charset="0"/>
+                            </a:rPr>
+                          </m:ctrlPr>
+                        </m:sSupPr>
+                        <m:e>
+                          <m:r>
+                            <a:rPr lang="en-US" i="1">
+                              <a:latin typeface="Cambria Math" panose="02040503050406030204" pitchFamily="18" charset="0"/>
+                            </a:rPr>
+                            <m:t>𝛾</m:t>
+                          </m:r>
+                        </m:e>
+                        <m:sup>
+                          <m:r>
+                            <a:rPr lang="en-US" i="1">
+                              <a:latin typeface="Cambria Math" panose="02040503050406030204" pitchFamily="18" charset="0"/>
+                            </a:rPr>
+                            <m:t>𝑛</m:t>
+                          </m:r>
+                          <m:r>
+                            <a:rPr lang="en-US" i="1">
+                              <a:latin typeface="Cambria Math" panose="02040503050406030204" pitchFamily="18" charset="0"/>
+                            </a:rPr>
+                            <m:t>−1</m:t>
+                          </m:r>
+                        </m:sup>
+                      </m:sSup>
+                      <m:sSub>
+                        <m:sSubPr>
+                          <m:ctrlPr>
+                            <a:rPr lang="en-US" i="1">
+                              <a:latin typeface="Cambria Math" panose="02040503050406030204" pitchFamily="18" charset="0"/>
+                            </a:rPr>
+                          </m:ctrlPr>
+                        </m:sSubPr>
+                        <m:e>
+                          <m:r>
+                            <a:rPr lang="en-US" i="1">
+                              <a:latin typeface="Cambria Math" panose="02040503050406030204" pitchFamily="18" charset="0"/>
+                            </a:rPr>
+                            <m:t>𝑅</m:t>
+                          </m:r>
+                        </m:e>
+                        <m:sub>
+                          <m:r>
+                            <a:rPr lang="en-US" i="1">
+                              <a:latin typeface="Cambria Math" panose="02040503050406030204" pitchFamily="18" charset="0"/>
+                            </a:rPr>
+                            <m:t>𝑡</m:t>
+                          </m:r>
+                          <m:r>
+                            <a:rPr lang="en-US" i="1">
+                              <a:latin typeface="Cambria Math" panose="02040503050406030204" pitchFamily="18" charset="0"/>
+                            </a:rPr>
+                            <m:t>+</m:t>
+                          </m:r>
+                          <m:r>
+                            <a:rPr lang="en-US" i="1">
+                              <a:latin typeface="Cambria Math" panose="02040503050406030204" pitchFamily="18" charset="0"/>
+                            </a:rPr>
+                            <m:t>𝑛</m:t>
+                          </m:r>
+                        </m:sub>
+                      </m:sSub>
+                      <m:r>
+                        <a:rPr lang="en-US" i="1">
+                          <a:latin typeface="Cambria Math" panose="02040503050406030204" pitchFamily="18" charset="0"/>
+                        </a:rPr>
+                        <m:t>+</m:t>
+                      </m:r>
+                      <m:sSup>
+                        <m:sSupPr>
+                          <m:ctrlPr>
+                            <a:rPr lang="en-US" i="1">
+                              <a:latin typeface="Cambria Math" panose="02040503050406030204" pitchFamily="18" charset="0"/>
+                            </a:rPr>
+                          </m:ctrlPr>
+                        </m:sSupPr>
+                        <m:e>
+                          <m:r>
+                            <a:rPr lang="en-US" i="1">
+                              <a:latin typeface="Cambria Math" panose="02040503050406030204" pitchFamily="18" charset="0"/>
+                            </a:rPr>
+                            <m:t>𝛾</m:t>
+                          </m:r>
+                        </m:e>
+                        <m:sup>
+                          <m:r>
+                            <a:rPr lang="en-US" i="1">
+                              <a:latin typeface="Cambria Math" panose="02040503050406030204" pitchFamily="18" charset="0"/>
+                            </a:rPr>
+                            <m:t>𝑛</m:t>
+                          </m:r>
+                        </m:sup>
+                      </m:sSup>
+                      <m:r>
+                        <a:rPr lang="en-US" i="1">
+                          <a:latin typeface="Cambria Math" panose="02040503050406030204" pitchFamily="18" charset="0"/>
+                        </a:rPr>
+                        <m:t>𝑉</m:t>
+                      </m:r>
+                      <m:d>
+                        <m:dPr>
+                          <m:ctrlPr>
+                            <a:rPr lang="en-US" i="1">
+                              <a:latin typeface="Cambria Math" panose="02040503050406030204" pitchFamily="18" charset="0"/>
+                            </a:rPr>
+                          </m:ctrlPr>
+                        </m:dPr>
+                        <m:e>
+                          <m:sSub>
+                            <m:sSubPr>
                               <m:ctrlPr>
                                 <a:rPr lang="en-US" i="1">
                                   <a:latin typeface="Cambria Math" panose="02040503050406030204" pitchFamily="18" charset="0"/>
                                 </a:rPr>
                               </m:ctrlPr>
-                            </m:funcPr>
-                            <m:fName>
-                              <m:limLow>
-                                <m:limLowPr>
-                                  <m:ctrlPr>
-                                    <a:rPr lang="en-US" i="1">
-                                      <a:latin typeface="Cambria Math" panose="02040503050406030204" pitchFamily="18" charset="0"/>
-                                    </a:rPr>
-                                  </m:ctrlPr>
-                                </m:limLowPr>
-                                <m:e>
-                                  <m:r>
-                                    <m:rPr>
-                                      <m:sty m:val="p"/>
-                                    </m:rPr>
-                                    <a:rPr lang="en-US">
-                                      <a:latin typeface="Cambria Math" panose="02040503050406030204" pitchFamily="18" charset="0"/>
-                                    </a:rPr>
-                                    <m:t>max</m:t>
-                                  </m:r>
-                                </m:e>
-                                <m:lim>
-                                  <m:r>
-                                    <a:rPr lang="en-US" i="1">
-                                      <a:latin typeface="Cambria Math" panose="02040503050406030204" pitchFamily="18" charset="0"/>
-                                    </a:rPr>
-                                    <m:t>𝑠</m:t>
-                                  </m:r>
-                                </m:lim>
-                              </m:limLow>
-                            </m:fName>
+                            </m:sSubPr>
                             <m:e>
-                              <m:d>
-                                <m:dPr>
-                                  <m:begChr m:val="|"/>
-                                  <m:endChr m:val="|"/>
-                                  <m:ctrlPr>
-                                    <a:rPr lang="en-US" i="1">
-                                      <a:latin typeface="Cambria Math" panose="02040503050406030204" pitchFamily="18" charset="0"/>
-                                    </a:rPr>
-                                  </m:ctrlPr>
-                                </m:dPr>
-                                <m:e>
-                                  <m:sSub>
-                                    <m:sSubPr>
-                                      <m:ctrlPr>
-                                        <a:rPr lang="en-US" b="0" i="1" smtClean="0">
-                                          <a:latin typeface="Cambria Math" panose="02040503050406030204" pitchFamily="18" charset="0"/>
-                                          <a:ea typeface="Cambria Math" panose="02040503050406030204" pitchFamily="18" charset="0"/>
-                                        </a:rPr>
-                                      </m:ctrlPr>
-                                    </m:sSubPr>
-                                    <m:e>
-                                      <m:r>
-                                        <a:rPr lang="en-US" b="0" i="1" smtClean="0">
-                                          <a:latin typeface="Cambria Math" panose="02040503050406030204" pitchFamily="18" charset="0"/>
-                                          <a:ea typeface="Cambria Math" panose="02040503050406030204" pitchFamily="18" charset="0"/>
-                                        </a:rPr>
-                                        <m:t>𝑉</m:t>
-                                      </m:r>
-                                    </m:e>
-                                    <m:sub>
-                                      <m:r>
-                                        <a:rPr lang="en-US" b="0" i="1" smtClean="0">
-                                          <a:latin typeface="Cambria Math" panose="02040503050406030204" pitchFamily="18" charset="0"/>
-                                          <a:ea typeface="Cambria Math" panose="02040503050406030204" pitchFamily="18" charset="0"/>
-                                        </a:rPr>
-                                        <m:t>𝑡</m:t>
-                                      </m:r>
-                                      <m:r>
-                                        <a:rPr lang="en-US" b="0" i="1" smtClean="0">
-                                          <a:latin typeface="Cambria Math" panose="02040503050406030204" pitchFamily="18" charset="0"/>
-                                          <a:ea typeface="Cambria Math" panose="02040503050406030204" pitchFamily="18" charset="0"/>
-                                        </a:rPr>
-                                        <m:t>+</m:t>
-                                      </m:r>
-                                      <m:r>
-                                        <a:rPr lang="en-US" b="0" i="1" smtClean="0">
-                                          <a:latin typeface="Cambria Math" panose="02040503050406030204" pitchFamily="18" charset="0"/>
-                                          <a:ea typeface="Cambria Math" panose="02040503050406030204" pitchFamily="18" charset="0"/>
-                                        </a:rPr>
-                                        <m:t>𝑛</m:t>
-                                      </m:r>
-                                      <m:r>
-                                        <a:rPr lang="en-US" b="0" i="1" smtClean="0">
-                                          <a:latin typeface="Cambria Math" panose="02040503050406030204" pitchFamily="18" charset="0"/>
-                                          <a:ea typeface="Cambria Math" panose="02040503050406030204" pitchFamily="18" charset="0"/>
-                                        </a:rPr>
-                                        <m:t>−1</m:t>
-                                      </m:r>
-                                    </m:sub>
-                                  </m:sSub>
-                                  <m:d>
-                                    <m:dPr>
-                                      <m:ctrlPr>
-                                        <a:rPr lang="en-US" b="0" i="1" smtClean="0">
-                                          <a:latin typeface="Cambria Math" panose="02040503050406030204" pitchFamily="18" charset="0"/>
-                                          <a:ea typeface="Cambria Math" panose="02040503050406030204" pitchFamily="18" charset="0"/>
-                                        </a:rPr>
-                                      </m:ctrlPr>
-                                    </m:dPr>
-                                    <m:e>
-                                      <m:r>
-                                        <a:rPr lang="en-US" b="0" i="1" smtClean="0">
-                                          <a:latin typeface="Cambria Math" panose="02040503050406030204" pitchFamily="18" charset="0"/>
-                                          <a:ea typeface="Cambria Math" panose="02040503050406030204" pitchFamily="18" charset="0"/>
-                                        </a:rPr>
-                                        <m:t>𝑠</m:t>
-                                      </m:r>
-                                    </m:e>
-                                  </m:d>
-                                  <m:r>
-                                    <a:rPr lang="en-US" b="0" i="1" smtClean="0">
-                                      <a:latin typeface="Cambria Math" panose="02040503050406030204" pitchFamily="18" charset="0"/>
-                                      <a:ea typeface="Cambria Math" panose="02040503050406030204" pitchFamily="18" charset="0"/>
-                                    </a:rPr>
-                                    <m:t>−</m:t>
-                                  </m:r>
-                                  <m:sSub>
-                                    <m:sSubPr>
-                                      <m:ctrlPr>
-                                        <a:rPr lang="en-US" b="0" i="1" smtClean="0">
-                                          <a:latin typeface="Cambria Math" panose="02040503050406030204" pitchFamily="18" charset="0"/>
-                                          <a:ea typeface="Cambria Math" panose="02040503050406030204" pitchFamily="18" charset="0"/>
-                                        </a:rPr>
-                                      </m:ctrlPr>
-                                    </m:sSubPr>
-                                    <m:e>
-                                      <m:r>
-                                        <a:rPr lang="en-US" b="0" i="1" smtClean="0">
-                                          <a:latin typeface="Cambria Math" panose="02040503050406030204" pitchFamily="18" charset="0"/>
-                                          <a:ea typeface="Cambria Math" panose="02040503050406030204" pitchFamily="18" charset="0"/>
-                                        </a:rPr>
-                                        <m:t>𝑣</m:t>
-                                      </m:r>
-                                    </m:e>
-                                    <m:sub>
-                                      <m:r>
-                                        <a:rPr lang="en-US" b="0" i="1" smtClean="0">
-                                          <a:latin typeface="Cambria Math" panose="02040503050406030204" pitchFamily="18" charset="0"/>
-                                          <a:ea typeface="Cambria Math" panose="02040503050406030204" pitchFamily="18" charset="0"/>
-                                        </a:rPr>
-                                        <m:t>𝜋</m:t>
-                                      </m:r>
-                                    </m:sub>
-                                  </m:sSub>
-                                  <m:r>
-                                    <a:rPr lang="en-US" b="0" i="1" smtClean="0">
-                                      <a:latin typeface="Cambria Math" panose="02040503050406030204" pitchFamily="18" charset="0"/>
-                                      <a:ea typeface="Cambria Math" panose="02040503050406030204" pitchFamily="18" charset="0"/>
-                                    </a:rPr>
-                                    <m:t>(</m:t>
-                                  </m:r>
-                                  <m:r>
-                                    <a:rPr lang="en-US" b="0" i="1" smtClean="0">
-                                      <a:latin typeface="Cambria Math" panose="02040503050406030204" pitchFamily="18" charset="0"/>
-                                      <a:ea typeface="Cambria Math" panose="02040503050406030204" pitchFamily="18" charset="0"/>
-                                    </a:rPr>
-                                    <m:t>𝑠</m:t>
-                                  </m:r>
-                                  <m:r>
-                                    <a:rPr lang="en-US" b="0" i="1" smtClean="0">
-                                      <a:latin typeface="Cambria Math" panose="02040503050406030204" pitchFamily="18" charset="0"/>
-                                      <a:ea typeface="Cambria Math" panose="02040503050406030204" pitchFamily="18" charset="0"/>
-                                    </a:rPr>
-                                    <m:t>)</m:t>
-                                  </m:r>
-                                </m:e>
-                              </m:d>
+                              <m:r>
+                                <a:rPr lang="en-US" i="1">
+                                  <a:latin typeface="Cambria Math" panose="02040503050406030204" pitchFamily="18" charset="0"/>
+                                </a:rPr>
+                                <m:t>𝑆</m:t>
+                              </m:r>
                             </m:e>
-                          </m:func>
+                            <m:sub>
+                              <m:r>
+                                <a:rPr lang="en-US" i="1">
+                                  <a:latin typeface="Cambria Math" panose="02040503050406030204" pitchFamily="18" charset="0"/>
+                                </a:rPr>
+                                <m:t>𝑡</m:t>
+                              </m:r>
+                              <m:r>
+                                <a:rPr lang="en-US" i="1">
+                                  <a:latin typeface="Cambria Math" panose="02040503050406030204" pitchFamily="18" charset="0"/>
+                                </a:rPr>
+                                <m:t>+</m:t>
+                              </m:r>
+                              <m:r>
+                                <a:rPr lang="en-US" i="1">
+                                  <a:latin typeface="Cambria Math" panose="02040503050406030204" pitchFamily="18" charset="0"/>
+                                </a:rPr>
+                                <m:t>𝑛</m:t>
+                              </m:r>
+                            </m:sub>
+                          </m:sSub>
                         </m:e>
-                      </m:func>
+                      </m:d>
                     </m:oMath>
                   </m:oMathPara>
                 </a14:m>
@@ -17167,12 +18698,72 @@
                 <a:pPr marL="0" indent="0">
                   <a:buNone/>
                 </a:pPr>
-                <a:endParaRPr lang="en-US" dirty="0"/>
+                <a:r>
+                  <a:rPr lang="en-US" dirty="0"/>
+                  <a:t>reduces the error compared to using </a:t>
+                </a:r>
+                <a14:m>
+                  <m:oMath xmlns:m="http://schemas.openxmlformats.org/officeDocument/2006/math">
+                    <m:r>
+                      <a:rPr lang="en-US" b="0" i="1" smtClean="0">
+                        <a:latin typeface="Cambria Math" panose="02040503050406030204" pitchFamily="18" charset="0"/>
+                      </a:rPr>
+                      <m:t>𝑉</m:t>
+                    </m:r>
+                    <m:r>
+                      <a:rPr lang="en-US" b="0" i="1" smtClean="0">
+                        <a:latin typeface="Cambria Math" panose="02040503050406030204" pitchFamily="18" charset="0"/>
+                      </a:rPr>
+                      <m:t>(</m:t>
+                    </m:r>
+                    <m:sSub>
+                      <m:sSubPr>
+                        <m:ctrlPr>
+                          <a:rPr lang="en-US" b="0" i="1" smtClean="0">
+                            <a:latin typeface="Cambria Math" panose="02040503050406030204" pitchFamily="18" charset="0"/>
+                          </a:rPr>
+                        </m:ctrlPr>
+                      </m:sSubPr>
+                      <m:e>
+                        <m:r>
+                          <a:rPr lang="en-US" b="0" i="1" smtClean="0">
+                            <a:latin typeface="Cambria Math" panose="02040503050406030204" pitchFamily="18" charset="0"/>
+                          </a:rPr>
+                          <m:t>𝑆</m:t>
+                        </m:r>
+                      </m:e>
+                      <m:sub>
+                        <m:r>
+                          <a:rPr lang="en-US" b="0" i="1" smtClean="0">
+                            <a:latin typeface="Cambria Math" panose="02040503050406030204" pitchFamily="18" charset="0"/>
+                          </a:rPr>
+                          <m:t>𝑡</m:t>
+                        </m:r>
+                      </m:sub>
+                    </m:sSub>
+                    <m:r>
+                      <a:rPr lang="en-US" b="0" i="1" smtClean="0">
+                        <a:latin typeface="Cambria Math" panose="02040503050406030204" pitchFamily="18" charset="0"/>
+                      </a:rPr>
+                      <m:t>)</m:t>
+                    </m:r>
+                  </m:oMath>
+                </a14:m>
+                <a:r>
+                  <a:rPr lang="en-US" dirty="0"/>
+                  <a:t> as a return estimate.</a:t>
+                </a:r>
               </a:p>
               <a:p>
                 <a:pPr marL="0" indent="0">
                   <a:buNone/>
                 </a:pPr>
+                <a:endParaRPr lang="en-US" dirty="0"/>
+              </a:p>
+              <a:p>
+                <a:pPr marL="0" indent="0" algn="ctr">
+                  <a:buNone/>
+                </a:pPr>
                 <a14:m>
                   <m:oMath xmlns:m="http://schemas.openxmlformats.org/officeDocument/2006/math">
                     <m:r>
@@ -17185,25 +18776,28 @@
                 </a14:m>
                 <a:r>
                   <a:rPr lang="en-US" dirty="0"/>
-                  <a:t> the update is guaranteed to reduce the error meaning that all </a:t>
+                  <a:t> every update is guaranteed to reduce the expected error. </a:t>
+                </a:r>
+                <a:br>
+                  <a:rPr lang="en-US" dirty="0"/>
+                </a:br>
+                <a:r>
+                  <a:rPr lang="en-US" b="1" dirty="0"/>
+                  <a:t>All </a:t>
                 </a:r>
                 <a14:m>
                   <m:oMath xmlns:m="http://schemas.openxmlformats.org/officeDocument/2006/math">
                     <m:r>
-                      <a:rPr lang="en-US" i="1" dirty="0">
-                        <a:latin typeface="Cambria Math" panose="02040503050406030204" pitchFamily="18" charset="0"/>
-                      </a:rPr>
-                      <m:t>𝑛</m:t>
+                      <a:rPr lang="en-US" b="1" i="1" dirty="0">
+                        <a:latin typeface="Cambria Math" panose="02040503050406030204" pitchFamily="18" charset="0"/>
+                      </a:rPr>
+                      <m:t>𝒏</m:t>
                     </m:r>
                   </m:oMath>
                 </a14:m>
                 <a:r>
-                  <a:rPr lang="en-US" dirty="0"/>
-                  <a:t>-step methods (including 1-step and MC) </a:t>
-                </a:r>
-                <a:r>
                   <a:rPr lang="en-US" b="1" dirty="0"/>
-                  <a:t>converge</a:t>
+                  <a:t>-step methods (including 1-step and MC) converge</a:t>
                 </a:r>
                 <a:r>
                   <a:rPr lang="en-US" dirty="0"/>
@@ -17213,7 +18807,7 @@
             </p:txBody>
           </p:sp>
         </mc:Choice>
-        <mc:Fallback xmlns="">
+        <mc:Fallback>
           <p:sp>
             <p:nvSpPr>
               <p:cNvPr id="3" name="Content Placeholder 2">
@@ -17231,10 +18825,688 @@
               </p:nvPr>
             </p:nvSpPr>
             <p:spPr>
+              <a:xfrm>
+                <a:off x="838200" y="3770851"/>
+                <a:ext cx="10515600" cy="2406112"/>
+              </a:xfrm>
               <a:blipFill>
                 <a:blip r:embed="rId2"/>
                 <a:stretch>
-                  <a:fillRect l="-1217" t="-2168"/>
+                  <a:fillRect l="-928" t="-4569" b="-761"/>
+                </a:stretch>
+              </a:blipFill>
+            </p:spPr>
+            <p:txBody>
+              <a:bodyPr/>
+              <a:lstStyle/>
+              <a:p>
+                <a:r>
+                  <a:rPr lang="en-US">
+                    <a:noFill/>
+                  </a:rPr>
+                  <a:t> </a:t>
+                </a:r>
+              </a:p>
+            </p:txBody>
+          </p:sp>
+        </mc:Fallback>
+      </mc:AlternateContent>
+      <mc:AlternateContent xmlns:mc="http://schemas.openxmlformats.org/markup-compatibility/2006">
+        <mc:Choice xmlns:a14="http://schemas.microsoft.com/office/drawing/2010/main" Requires="a14">
+          <p:sp>
+            <p:nvSpPr>
+              <p:cNvPr id="5" name="TextBox 4">
+                <a:extLst>
+                  <a:ext uri="{FF2B5EF4-FFF2-40B4-BE49-F238E27FC236}">
+                    <a16:creationId xmlns:a16="http://schemas.microsoft.com/office/drawing/2014/main" id="{35D9954E-8BC2-1D59-59D7-361BEEF7AC40}"/>
+                  </a:ext>
+                </a:extLst>
+              </p:cNvPr>
+              <p:cNvSpPr txBox="1"/>
+              <p:nvPr/>
+            </p:nvSpPr>
+            <p:spPr>
+              <a:xfrm>
+                <a:off x="2382473" y="1392572"/>
+                <a:ext cx="7231310" cy="2033827"/>
+              </a:xfrm>
+              <a:prstGeom prst="rect">
+                <a:avLst/>
+              </a:prstGeom>
+            </p:spPr>
+            <p:style>
+              <a:lnRef idx="2">
+                <a:schemeClr val="accent2"/>
+              </a:lnRef>
+              <a:fillRef idx="1">
+                <a:schemeClr val="lt1"/>
+              </a:fillRef>
+              <a:effectRef idx="0">
+                <a:schemeClr val="accent2"/>
+              </a:effectRef>
+              <a:fontRef idx="minor">
+                <a:schemeClr val="dk1"/>
+              </a:fontRef>
+            </p:style>
+            <p:txBody>
+              <a:bodyPr wrap="square">
+                <a:spAutoFit/>
+              </a:bodyPr>
+              <a:lstStyle/>
+              <a:p>
+                <a:pPr marL="0" indent="0" algn="ctr">
+                  <a:buNone/>
+                </a:pPr>
+                <a:r>
+                  <a:rPr lang="en-US" sz="2000" b="1" dirty="0"/>
+                  <a:t>Error Reduction Property of </a:t>
+                </a:r>
+                <a14:m>
+                  <m:oMath xmlns:m="http://schemas.openxmlformats.org/officeDocument/2006/math">
+                    <m:r>
+                      <a:rPr lang="en-US" sz="2000" b="1" i="1" dirty="0">
+                        <a:latin typeface="Cambria Math" panose="02040503050406030204" pitchFamily="18" charset="0"/>
+                      </a:rPr>
+                      <m:t>𝒏</m:t>
+                    </m:r>
+                  </m:oMath>
+                </a14:m>
+                <a:r>
+                  <a:rPr lang="en-US" sz="2000" b="1" dirty="0"/>
+                  <a:t>-step Returns </a:t>
+                </a:r>
+              </a:p>
+              <a:p>
+                <a:endParaRPr lang="en-US" sz="2000" dirty="0"/>
+              </a:p>
+              <a:p>
+                <a:r>
+                  <a:rPr lang="en-US" sz="2000" dirty="0"/>
+                  <a:t>The worst error of the expected </a:t>
+                </a:r>
+                <a14:m>
+                  <m:oMath xmlns:m="http://schemas.openxmlformats.org/officeDocument/2006/math">
+                    <m:r>
+                      <a:rPr lang="en-US" sz="2000" i="1" dirty="0" smtClean="0">
+                        <a:latin typeface="Cambria Math" panose="02040503050406030204" pitchFamily="18" charset="0"/>
+                      </a:rPr>
+                      <m:t>𝑛</m:t>
+                    </m:r>
+                  </m:oMath>
+                </a14:m>
+                <a:r>
+                  <a:rPr lang="en-US" sz="2000" dirty="0"/>
+                  <a:t>-step return is guaranteed to be less than or equal to the discounted worst error of using </a:t>
+                </a:r>
+                <a14:m>
+                  <m:oMath xmlns:m="http://schemas.openxmlformats.org/officeDocument/2006/math">
+                    <m:sSub>
+                      <m:sSubPr>
+                        <m:ctrlPr>
+                          <a:rPr lang="en-US" sz="2000" i="1">
+                            <a:latin typeface="Cambria Math" panose="02040503050406030204" pitchFamily="18" charset="0"/>
+                            <a:ea typeface="Cambria Math" panose="02040503050406030204" pitchFamily="18" charset="0"/>
+                          </a:rPr>
+                        </m:ctrlPr>
+                      </m:sSubPr>
+                      <m:e>
+                        <m:r>
+                          <a:rPr lang="en-US" sz="2000" i="1">
+                            <a:latin typeface="Cambria Math" panose="02040503050406030204" pitchFamily="18" charset="0"/>
+                            <a:ea typeface="Cambria Math" panose="02040503050406030204" pitchFamily="18" charset="0"/>
+                          </a:rPr>
+                          <m:t>𝑉</m:t>
+                        </m:r>
+                      </m:e>
+                      <m:sub>
+                        <m:r>
+                          <a:rPr lang="en-US" sz="2000" i="1">
+                            <a:latin typeface="Cambria Math" panose="02040503050406030204" pitchFamily="18" charset="0"/>
+                            <a:ea typeface="Cambria Math" panose="02040503050406030204" pitchFamily="18" charset="0"/>
+                          </a:rPr>
+                          <m:t>𝑡</m:t>
+                        </m:r>
+                        <m:r>
+                          <a:rPr lang="en-US" sz="2000" i="1">
+                            <a:latin typeface="Cambria Math" panose="02040503050406030204" pitchFamily="18" charset="0"/>
+                            <a:ea typeface="Cambria Math" panose="02040503050406030204" pitchFamily="18" charset="0"/>
+                          </a:rPr>
+                          <m:t>+</m:t>
+                        </m:r>
+                        <m:r>
+                          <a:rPr lang="en-US" sz="2000" i="1">
+                            <a:latin typeface="Cambria Math" panose="02040503050406030204" pitchFamily="18" charset="0"/>
+                            <a:ea typeface="Cambria Math" panose="02040503050406030204" pitchFamily="18" charset="0"/>
+                          </a:rPr>
+                          <m:t>𝑛</m:t>
+                        </m:r>
+                        <m:r>
+                          <a:rPr lang="en-US" sz="2000" i="1">
+                            <a:latin typeface="Cambria Math" panose="02040503050406030204" pitchFamily="18" charset="0"/>
+                            <a:ea typeface="Cambria Math" panose="02040503050406030204" pitchFamily="18" charset="0"/>
+                          </a:rPr>
+                          <m:t>−1</m:t>
+                        </m:r>
+                      </m:sub>
+                    </m:sSub>
+                    <m:r>
+                      <a:rPr lang="en-US" sz="2000" i="1">
+                        <a:latin typeface="Cambria Math" panose="02040503050406030204" pitchFamily="18" charset="0"/>
+                        <a:ea typeface="Cambria Math" panose="02040503050406030204" pitchFamily="18" charset="0"/>
+                      </a:rPr>
+                      <m:t> </m:t>
+                    </m:r>
+                  </m:oMath>
+                </a14:m>
+                <a:endParaRPr lang="en-US" sz="2000" dirty="0"/>
+              </a:p>
+              <a:p>
+                <a:endParaRPr lang="en-US" sz="2000" dirty="0"/>
+              </a:p>
+              <a:p>
+                <a:pPr marL="0" indent="0">
+                  <a:buNone/>
+                </a:pPr>
+                <a14:m>
+                  <m:oMathPara xmlns:m="http://schemas.openxmlformats.org/officeDocument/2006/math">
+                    <m:oMathParaPr>
+                      <m:jc m:val="centerGroup"/>
+                    </m:oMathParaPr>
+                    <m:oMath xmlns:m="http://schemas.openxmlformats.org/officeDocument/2006/math">
+                      <m:func>
+                        <m:funcPr>
+                          <m:ctrlPr>
+                            <a:rPr lang="en-US" sz="2000" i="1" smtClean="0">
+                              <a:latin typeface="Cambria Math" panose="02040503050406030204" pitchFamily="18" charset="0"/>
+                            </a:rPr>
+                          </m:ctrlPr>
+                        </m:funcPr>
+                        <m:fName>
+                          <m:limLow>
+                            <m:limLowPr>
+                              <m:ctrlPr>
+                                <a:rPr lang="en-US" sz="2000" i="1" smtClean="0">
+                                  <a:latin typeface="Cambria Math" panose="02040503050406030204" pitchFamily="18" charset="0"/>
+                                </a:rPr>
+                              </m:ctrlPr>
+                            </m:limLowPr>
+                            <m:e>
+                              <m:r>
+                                <m:rPr>
+                                  <m:sty m:val="p"/>
+                                </m:rPr>
+                                <a:rPr lang="en-US" sz="2000" i="0" smtClean="0">
+                                  <a:latin typeface="Cambria Math" panose="02040503050406030204" pitchFamily="18" charset="0"/>
+                                </a:rPr>
+                                <m:t>max</m:t>
+                              </m:r>
+                            </m:e>
+                            <m:lim>
+                              <m:r>
+                                <a:rPr lang="en-US" sz="2000" b="0" i="1" smtClean="0">
+                                  <a:latin typeface="Cambria Math" panose="02040503050406030204" pitchFamily="18" charset="0"/>
+                                </a:rPr>
+                                <m:t>𝑠</m:t>
+                              </m:r>
+                            </m:lim>
+                          </m:limLow>
+                        </m:fName>
+                        <m:e>
+                          <m:d>
+                            <m:dPr>
+                              <m:begChr m:val="|"/>
+                              <m:endChr m:val="|"/>
+                              <m:ctrlPr>
+                                <a:rPr lang="en-US" sz="2000" i="1" smtClean="0">
+                                  <a:latin typeface="Cambria Math" panose="02040503050406030204" pitchFamily="18" charset="0"/>
+                                </a:rPr>
+                              </m:ctrlPr>
+                            </m:dPr>
+                            <m:e>
+                              <m:sSub>
+                                <m:sSubPr>
+                                  <m:ctrlPr>
+                                    <a:rPr lang="en-US" sz="2000" b="0" i="1" smtClean="0">
+                                      <a:latin typeface="Cambria Math" panose="02040503050406030204" pitchFamily="18" charset="0"/>
+                                      <a:ea typeface="Cambria Math" panose="02040503050406030204" pitchFamily="18" charset="0"/>
+                                    </a:rPr>
+                                  </m:ctrlPr>
+                                </m:sSubPr>
+                                <m:e>
+                                  <m:r>
+                                    <a:rPr lang="en-US" sz="2000" i="1" smtClean="0">
+                                      <a:latin typeface="Cambria Math" panose="02040503050406030204" pitchFamily="18" charset="0"/>
+                                      <a:ea typeface="Cambria Math" panose="02040503050406030204" pitchFamily="18" charset="0"/>
+                                    </a:rPr>
+                                    <m:t>𝔼</m:t>
+                                  </m:r>
+                                </m:e>
+                                <m:sub>
+                                  <m:r>
+                                    <a:rPr lang="en-US" sz="2000" b="0" i="1" smtClean="0">
+                                      <a:latin typeface="Cambria Math" panose="02040503050406030204" pitchFamily="18" charset="0"/>
+                                      <a:ea typeface="Cambria Math" panose="02040503050406030204" pitchFamily="18" charset="0"/>
+                                    </a:rPr>
+                                    <m:t>𝜋</m:t>
+                                  </m:r>
+                                </m:sub>
+                              </m:sSub>
+                              <m:r>
+                                <a:rPr lang="en-US" sz="2000" b="0" i="1" smtClean="0">
+                                  <a:latin typeface="Cambria Math" panose="02040503050406030204" pitchFamily="18" charset="0"/>
+                                  <a:ea typeface="Cambria Math" panose="02040503050406030204" pitchFamily="18" charset="0"/>
+                                </a:rPr>
+                                <m:t>[</m:t>
+                              </m:r>
+                              <m:sSub>
+                                <m:sSubPr>
+                                  <m:ctrlPr>
+                                    <a:rPr lang="en-US" sz="2000" b="0" i="1" smtClean="0">
+                                      <a:latin typeface="Cambria Math" panose="02040503050406030204" pitchFamily="18" charset="0"/>
+                                      <a:ea typeface="Cambria Math" panose="02040503050406030204" pitchFamily="18" charset="0"/>
+                                    </a:rPr>
+                                  </m:ctrlPr>
+                                </m:sSubPr>
+                                <m:e>
+                                  <m:r>
+                                    <a:rPr lang="en-US" sz="2000" b="0" i="1" smtClean="0">
+                                      <a:latin typeface="Cambria Math" panose="02040503050406030204" pitchFamily="18" charset="0"/>
+                                      <a:ea typeface="Cambria Math" panose="02040503050406030204" pitchFamily="18" charset="0"/>
+                                    </a:rPr>
+                                    <m:t>𝐺</m:t>
+                                  </m:r>
+                                </m:e>
+                                <m:sub>
+                                  <m:r>
+                                    <a:rPr lang="en-US" sz="2000" b="0" i="1" smtClean="0">
+                                      <a:latin typeface="Cambria Math" panose="02040503050406030204" pitchFamily="18" charset="0"/>
+                                      <a:ea typeface="Cambria Math" panose="02040503050406030204" pitchFamily="18" charset="0"/>
+                                    </a:rPr>
+                                    <m:t>𝑡</m:t>
+                                  </m:r>
+                                  <m:r>
+                                    <a:rPr lang="en-US" sz="2000" b="0" i="1" smtClean="0">
+                                      <a:latin typeface="Cambria Math" panose="02040503050406030204" pitchFamily="18" charset="0"/>
+                                      <a:ea typeface="Cambria Math" panose="02040503050406030204" pitchFamily="18" charset="0"/>
+                                    </a:rPr>
+                                    <m:t>:</m:t>
+                                  </m:r>
+                                  <m:r>
+                                    <a:rPr lang="en-US" sz="2000" b="0" i="1" smtClean="0">
+                                      <a:latin typeface="Cambria Math" panose="02040503050406030204" pitchFamily="18" charset="0"/>
+                                      <a:ea typeface="Cambria Math" panose="02040503050406030204" pitchFamily="18" charset="0"/>
+                                    </a:rPr>
+                                    <m:t>𝑡</m:t>
+                                  </m:r>
+                                  <m:r>
+                                    <a:rPr lang="en-US" sz="2000" b="0" i="1" smtClean="0">
+                                      <a:latin typeface="Cambria Math" panose="02040503050406030204" pitchFamily="18" charset="0"/>
+                                      <a:ea typeface="Cambria Math" panose="02040503050406030204" pitchFamily="18" charset="0"/>
+                                    </a:rPr>
+                                    <m:t>+</m:t>
+                                  </m:r>
+                                  <m:r>
+                                    <a:rPr lang="en-US" sz="2000" b="0" i="1" smtClean="0">
+                                      <a:latin typeface="Cambria Math" panose="02040503050406030204" pitchFamily="18" charset="0"/>
+                                      <a:ea typeface="Cambria Math" panose="02040503050406030204" pitchFamily="18" charset="0"/>
+                                    </a:rPr>
+                                    <m:t>𝑛</m:t>
+                                  </m:r>
+                                </m:sub>
+                              </m:sSub>
+                              <m:r>
+                                <a:rPr lang="en-US" sz="2000" b="0" i="1" smtClean="0">
+                                  <a:latin typeface="Cambria Math" panose="02040503050406030204" pitchFamily="18" charset="0"/>
+                                  <a:ea typeface="Cambria Math" panose="02040503050406030204" pitchFamily="18" charset="0"/>
+                                </a:rPr>
+                                <m:t>|</m:t>
+                              </m:r>
+                              <m:sSub>
+                                <m:sSubPr>
+                                  <m:ctrlPr>
+                                    <a:rPr lang="en-US" sz="2000" b="0" i="1" smtClean="0">
+                                      <a:latin typeface="Cambria Math" panose="02040503050406030204" pitchFamily="18" charset="0"/>
+                                      <a:ea typeface="Cambria Math" panose="02040503050406030204" pitchFamily="18" charset="0"/>
+                                    </a:rPr>
+                                  </m:ctrlPr>
+                                </m:sSubPr>
+                                <m:e>
+                                  <m:r>
+                                    <a:rPr lang="en-US" sz="2000" b="0" i="1" smtClean="0">
+                                      <a:latin typeface="Cambria Math" panose="02040503050406030204" pitchFamily="18" charset="0"/>
+                                      <a:ea typeface="Cambria Math" panose="02040503050406030204" pitchFamily="18" charset="0"/>
+                                    </a:rPr>
+                                    <m:t>𝑆</m:t>
+                                  </m:r>
+                                </m:e>
+                                <m:sub>
+                                  <m:r>
+                                    <a:rPr lang="en-US" sz="2000" b="0" i="1" smtClean="0">
+                                      <a:latin typeface="Cambria Math" panose="02040503050406030204" pitchFamily="18" charset="0"/>
+                                      <a:ea typeface="Cambria Math" panose="02040503050406030204" pitchFamily="18" charset="0"/>
+                                    </a:rPr>
+                                    <m:t>𝑡</m:t>
+                                  </m:r>
+                                </m:sub>
+                              </m:sSub>
+                              <m:r>
+                                <a:rPr lang="en-US" sz="2000" i="1">
+                                  <a:latin typeface="Cambria Math" panose="02040503050406030204" pitchFamily="18" charset="0"/>
+                                  <a:ea typeface="Cambria Math" panose="02040503050406030204" pitchFamily="18" charset="0"/>
+                                </a:rPr>
+                                <m:t>=</m:t>
+                              </m:r>
+                              <m:r>
+                                <a:rPr lang="en-US" sz="2000" i="1">
+                                  <a:latin typeface="Cambria Math" panose="02040503050406030204" pitchFamily="18" charset="0"/>
+                                  <a:ea typeface="Cambria Math" panose="02040503050406030204" pitchFamily="18" charset="0"/>
+                                </a:rPr>
+                                <m:t>𝑠</m:t>
+                              </m:r>
+                              <m:r>
+                                <a:rPr lang="en-US" sz="2000" i="1">
+                                  <a:latin typeface="Cambria Math" panose="02040503050406030204" pitchFamily="18" charset="0"/>
+                                  <a:ea typeface="Cambria Math" panose="02040503050406030204" pitchFamily="18" charset="0"/>
+                                </a:rPr>
+                                <m:t>]−</m:t>
+                              </m:r>
+                              <m:sSub>
+                                <m:sSubPr>
+                                  <m:ctrlPr>
+                                    <a:rPr lang="en-US" sz="2000" i="1">
+                                      <a:latin typeface="Cambria Math" panose="02040503050406030204" pitchFamily="18" charset="0"/>
+                                      <a:ea typeface="Cambria Math" panose="02040503050406030204" pitchFamily="18" charset="0"/>
+                                    </a:rPr>
+                                  </m:ctrlPr>
+                                </m:sSubPr>
+                                <m:e>
+                                  <m:r>
+                                    <a:rPr lang="en-US" sz="2000" i="1">
+                                      <a:latin typeface="Cambria Math" panose="02040503050406030204" pitchFamily="18" charset="0"/>
+                                      <a:ea typeface="Cambria Math" panose="02040503050406030204" pitchFamily="18" charset="0"/>
+                                    </a:rPr>
+                                    <m:t>𝑣</m:t>
+                                  </m:r>
+                                </m:e>
+                                <m:sub>
+                                  <m:r>
+                                    <a:rPr lang="en-US" sz="2000" i="1">
+                                      <a:latin typeface="Cambria Math" panose="02040503050406030204" pitchFamily="18" charset="0"/>
+                                      <a:ea typeface="Cambria Math" panose="02040503050406030204" pitchFamily="18" charset="0"/>
+                                    </a:rPr>
+                                    <m:t>𝜋</m:t>
+                                  </m:r>
+                                </m:sub>
+                              </m:sSub>
+                              <m:r>
+                                <a:rPr lang="en-US" sz="2000" i="1">
+                                  <a:latin typeface="Cambria Math" panose="02040503050406030204" pitchFamily="18" charset="0"/>
+                                  <a:ea typeface="Cambria Math" panose="02040503050406030204" pitchFamily="18" charset="0"/>
+                                </a:rPr>
+                                <m:t>(</m:t>
+                              </m:r>
+                              <m:r>
+                                <a:rPr lang="en-US" sz="2000" i="1">
+                                  <a:latin typeface="Cambria Math" panose="02040503050406030204" pitchFamily="18" charset="0"/>
+                                  <a:ea typeface="Cambria Math" panose="02040503050406030204" pitchFamily="18" charset="0"/>
+                                </a:rPr>
+                                <m:t>𝑠</m:t>
+                              </m:r>
+                              <m:r>
+                                <a:rPr lang="en-US" sz="2000" b="0" i="1" smtClean="0">
+                                  <a:latin typeface="Cambria Math" panose="02040503050406030204" pitchFamily="18" charset="0"/>
+                                  <a:ea typeface="Cambria Math" panose="02040503050406030204" pitchFamily="18" charset="0"/>
+                                </a:rPr>
+                                <m:t>)</m:t>
+                              </m:r>
+                            </m:e>
+                          </m:d>
+                          <m:r>
+                            <a:rPr lang="en-US" sz="2000" b="0" i="1" smtClean="0">
+                              <a:latin typeface="Cambria Math" panose="02040503050406030204" pitchFamily="18" charset="0"/>
+                            </a:rPr>
+                            <m:t>≤</m:t>
+                          </m:r>
+                          <m:sSup>
+                            <m:sSupPr>
+                              <m:ctrlPr>
+                                <a:rPr lang="en-US" sz="2000" b="0" i="1" smtClean="0">
+                                  <a:latin typeface="Cambria Math" panose="02040503050406030204" pitchFamily="18" charset="0"/>
+                                </a:rPr>
+                              </m:ctrlPr>
+                            </m:sSupPr>
+                            <m:e>
+                              <m:r>
+                                <a:rPr lang="en-US" sz="2000" b="0" i="1" smtClean="0">
+                                  <a:latin typeface="Cambria Math" panose="02040503050406030204" pitchFamily="18" charset="0"/>
+                                </a:rPr>
+                                <m:t>𝛾</m:t>
+                              </m:r>
+                            </m:e>
+                            <m:sup>
+                              <m:r>
+                                <a:rPr lang="en-US" sz="2000" b="0" i="1" smtClean="0">
+                                  <a:latin typeface="Cambria Math" panose="02040503050406030204" pitchFamily="18" charset="0"/>
+                                </a:rPr>
+                                <m:t>𝑛</m:t>
+                              </m:r>
+                            </m:sup>
+                          </m:sSup>
+                          <m:func>
+                            <m:funcPr>
+                              <m:ctrlPr>
+                                <a:rPr lang="en-US" sz="2000" i="1">
+                                  <a:latin typeface="Cambria Math" panose="02040503050406030204" pitchFamily="18" charset="0"/>
+                                </a:rPr>
+                              </m:ctrlPr>
+                            </m:funcPr>
+                            <m:fName>
+                              <m:limLow>
+                                <m:limLowPr>
+                                  <m:ctrlPr>
+                                    <a:rPr lang="en-US" sz="2000" i="1">
+                                      <a:latin typeface="Cambria Math" panose="02040503050406030204" pitchFamily="18" charset="0"/>
+                                    </a:rPr>
+                                  </m:ctrlPr>
+                                </m:limLowPr>
+                                <m:e>
+                                  <m:r>
+                                    <m:rPr>
+                                      <m:sty m:val="p"/>
+                                    </m:rPr>
+                                    <a:rPr lang="en-US" sz="2000">
+                                      <a:latin typeface="Cambria Math" panose="02040503050406030204" pitchFamily="18" charset="0"/>
+                                    </a:rPr>
+                                    <m:t>max</m:t>
+                                  </m:r>
+                                </m:e>
+                                <m:lim>
+                                  <m:r>
+                                    <a:rPr lang="en-US" sz="2000" i="1">
+                                      <a:latin typeface="Cambria Math" panose="02040503050406030204" pitchFamily="18" charset="0"/>
+                                    </a:rPr>
+                                    <m:t>𝑠</m:t>
+                                  </m:r>
+                                </m:lim>
+                              </m:limLow>
+                            </m:fName>
+                            <m:e>
+                              <m:d>
+                                <m:dPr>
+                                  <m:begChr m:val="|"/>
+                                  <m:endChr m:val="|"/>
+                                  <m:ctrlPr>
+                                    <a:rPr lang="en-US" sz="2000" i="1">
+                                      <a:latin typeface="Cambria Math" panose="02040503050406030204" pitchFamily="18" charset="0"/>
+                                    </a:rPr>
+                                  </m:ctrlPr>
+                                </m:dPr>
+                                <m:e>
+                                  <m:sSub>
+                                    <m:sSubPr>
+                                      <m:ctrlPr>
+                                        <a:rPr lang="en-US" sz="2000" b="0" i="1" smtClean="0">
+                                          <a:latin typeface="Cambria Math" panose="02040503050406030204" pitchFamily="18" charset="0"/>
+                                          <a:ea typeface="Cambria Math" panose="02040503050406030204" pitchFamily="18" charset="0"/>
+                                        </a:rPr>
+                                      </m:ctrlPr>
+                                    </m:sSubPr>
+                                    <m:e>
+                                      <m:r>
+                                        <a:rPr lang="en-US" sz="2000" b="0" i="1" smtClean="0">
+                                          <a:latin typeface="Cambria Math" panose="02040503050406030204" pitchFamily="18" charset="0"/>
+                                          <a:ea typeface="Cambria Math" panose="02040503050406030204" pitchFamily="18" charset="0"/>
+                                        </a:rPr>
+                                        <m:t>𝑉</m:t>
+                                      </m:r>
+                                    </m:e>
+                                    <m:sub>
+                                      <m:r>
+                                        <a:rPr lang="en-US" sz="2000" b="0" i="1" smtClean="0">
+                                          <a:latin typeface="Cambria Math" panose="02040503050406030204" pitchFamily="18" charset="0"/>
+                                          <a:ea typeface="Cambria Math" panose="02040503050406030204" pitchFamily="18" charset="0"/>
+                                        </a:rPr>
+                                        <m:t>𝑡</m:t>
+                                      </m:r>
+                                      <m:r>
+                                        <a:rPr lang="en-US" sz="2000" b="0" i="1" smtClean="0">
+                                          <a:latin typeface="Cambria Math" panose="02040503050406030204" pitchFamily="18" charset="0"/>
+                                          <a:ea typeface="Cambria Math" panose="02040503050406030204" pitchFamily="18" charset="0"/>
+                                        </a:rPr>
+                                        <m:t>+</m:t>
+                                      </m:r>
+                                      <m:r>
+                                        <a:rPr lang="en-US" sz="2000" b="0" i="1" smtClean="0">
+                                          <a:latin typeface="Cambria Math" panose="02040503050406030204" pitchFamily="18" charset="0"/>
+                                          <a:ea typeface="Cambria Math" panose="02040503050406030204" pitchFamily="18" charset="0"/>
+                                        </a:rPr>
+                                        <m:t>𝑛</m:t>
+                                      </m:r>
+                                      <m:r>
+                                        <a:rPr lang="en-US" sz="2000" b="0" i="1" smtClean="0">
+                                          <a:latin typeface="Cambria Math" panose="02040503050406030204" pitchFamily="18" charset="0"/>
+                                          <a:ea typeface="Cambria Math" panose="02040503050406030204" pitchFamily="18" charset="0"/>
+                                        </a:rPr>
+                                        <m:t>−1</m:t>
+                                      </m:r>
+                                    </m:sub>
+                                  </m:sSub>
+                                  <m:d>
+                                    <m:dPr>
+                                      <m:ctrlPr>
+                                        <a:rPr lang="en-US" sz="2000" b="0" i="1" smtClean="0">
+                                          <a:latin typeface="Cambria Math" panose="02040503050406030204" pitchFamily="18" charset="0"/>
+                                          <a:ea typeface="Cambria Math" panose="02040503050406030204" pitchFamily="18" charset="0"/>
+                                        </a:rPr>
+                                      </m:ctrlPr>
+                                    </m:dPr>
+                                    <m:e>
+                                      <m:r>
+                                        <a:rPr lang="en-US" sz="2000" b="0" i="1" smtClean="0">
+                                          <a:latin typeface="Cambria Math" panose="02040503050406030204" pitchFamily="18" charset="0"/>
+                                          <a:ea typeface="Cambria Math" panose="02040503050406030204" pitchFamily="18" charset="0"/>
+                                        </a:rPr>
+                                        <m:t>𝑠</m:t>
+                                      </m:r>
+                                    </m:e>
+                                  </m:d>
+                                  <m:r>
+                                    <a:rPr lang="en-US" sz="2000" b="0" i="1" smtClean="0">
+                                      <a:latin typeface="Cambria Math" panose="02040503050406030204" pitchFamily="18" charset="0"/>
+                                      <a:ea typeface="Cambria Math" panose="02040503050406030204" pitchFamily="18" charset="0"/>
+                                    </a:rPr>
+                                    <m:t>−</m:t>
+                                  </m:r>
+                                  <m:sSub>
+                                    <m:sSubPr>
+                                      <m:ctrlPr>
+                                        <a:rPr lang="en-US" sz="2000" b="0" i="1" smtClean="0">
+                                          <a:latin typeface="Cambria Math" panose="02040503050406030204" pitchFamily="18" charset="0"/>
+                                          <a:ea typeface="Cambria Math" panose="02040503050406030204" pitchFamily="18" charset="0"/>
+                                        </a:rPr>
+                                      </m:ctrlPr>
+                                    </m:sSubPr>
+                                    <m:e>
+                                      <m:r>
+                                        <a:rPr lang="en-US" sz="2000" b="0" i="1" smtClean="0">
+                                          <a:latin typeface="Cambria Math" panose="02040503050406030204" pitchFamily="18" charset="0"/>
+                                          <a:ea typeface="Cambria Math" panose="02040503050406030204" pitchFamily="18" charset="0"/>
+                                        </a:rPr>
+                                        <m:t>𝑣</m:t>
+                                      </m:r>
+                                    </m:e>
+                                    <m:sub>
+                                      <m:r>
+                                        <a:rPr lang="en-US" sz="2000" b="0" i="1" smtClean="0">
+                                          <a:latin typeface="Cambria Math" panose="02040503050406030204" pitchFamily="18" charset="0"/>
+                                          <a:ea typeface="Cambria Math" panose="02040503050406030204" pitchFamily="18" charset="0"/>
+                                        </a:rPr>
+                                        <m:t>𝜋</m:t>
+                                      </m:r>
+                                    </m:sub>
+                                  </m:sSub>
+                                  <m:r>
+                                    <a:rPr lang="en-US" sz="2000" b="0" i="1" smtClean="0">
+                                      <a:latin typeface="Cambria Math" panose="02040503050406030204" pitchFamily="18" charset="0"/>
+                                      <a:ea typeface="Cambria Math" panose="02040503050406030204" pitchFamily="18" charset="0"/>
+                                    </a:rPr>
+                                    <m:t>(</m:t>
+                                  </m:r>
+                                  <m:r>
+                                    <a:rPr lang="en-US" sz="2000" b="0" i="1" smtClean="0">
+                                      <a:latin typeface="Cambria Math" panose="02040503050406030204" pitchFamily="18" charset="0"/>
+                                      <a:ea typeface="Cambria Math" panose="02040503050406030204" pitchFamily="18" charset="0"/>
+                                    </a:rPr>
+                                    <m:t>𝑠</m:t>
+                                  </m:r>
+                                  <m:r>
+                                    <a:rPr lang="en-US" sz="2000" b="0" i="1" smtClean="0">
+                                      <a:latin typeface="Cambria Math" panose="02040503050406030204" pitchFamily="18" charset="0"/>
+                                      <a:ea typeface="Cambria Math" panose="02040503050406030204" pitchFamily="18" charset="0"/>
+                                    </a:rPr>
+                                    <m:t>)</m:t>
+                                  </m:r>
+                                </m:e>
+                              </m:d>
+                            </m:e>
+                          </m:func>
+                        </m:e>
+                      </m:func>
+                    </m:oMath>
+                  </m:oMathPara>
+                </a14:m>
+                <a:endParaRPr lang="en-US" sz="2000" dirty="0"/>
+              </a:p>
+            </p:txBody>
+          </p:sp>
+        </mc:Choice>
+        <mc:Fallback>
+          <p:sp>
+            <p:nvSpPr>
+              <p:cNvPr id="5" name="TextBox 4">
+                <a:extLst>
+                  <a:ext uri="{FF2B5EF4-FFF2-40B4-BE49-F238E27FC236}">
+                    <a16:creationId xmlns:a16="http://schemas.microsoft.com/office/drawing/2014/main" id="{35D9954E-8BC2-1D59-59D7-361BEEF7AC40}"/>
+                  </a:ext>
+                </a:extLst>
+              </p:cNvPr>
+              <p:cNvSpPr txBox="1">
+                <a:spLocks noRot="1" noChangeAspect="1" noMove="1" noResize="1" noEditPoints="1" noAdjustHandles="1" noChangeArrowheads="1" noChangeShapeType="1" noTextEdit="1"/>
+              </p:cNvSpPr>
+              <p:nvPr/>
+            </p:nvSpPr>
+            <p:spPr>
+              <a:xfrm>
+                <a:off x="2382473" y="1392572"/>
+                <a:ext cx="7231310" cy="2033827"/>
+              </a:xfrm>
+              <a:prstGeom prst="rect">
+                <a:avLst/>
+              </a:prstGeom>
+              <a:blipFill>
+                <a:blip r:embed="rId3"/>
+                <a:stretch>
+                  <a:fillRect l="-841" t="-890" r="-673"/>
                 </a:stretch>
               </a:blipFill>
             </p:spPr>
@@ -17318,7 +19590,7 @@
                 </a14:m>
                 <a:r>
                   <a:rPr lang="en-US" dirty="0"/>
-                  <a:t>-step Control (Sarsa)</a:t>
+                  <a:t>-step Control: Sarsa</a:t>
                 </a:r>
               </a:p>
             </p:txBody>
@@ -17364,34 +19636,91 @@
           </p:sp>
         </mc:Fallback>
       </mc:AlternateContent>
-      <p:sp>
-        <p:nvSpPr>
-          <p:cNvPr id="5" name="Text Placeholder 4">
-            <a:extLst>
-              <a:ext uri="{FF2B5EF4-FFF2-40B4-BE49-F238E27FC236}">
-                <a16:creationId xmlns:a16="http://schemas.microsoft.com/office/drawing/2014/main" id="{D8BFD2D0-399A-1A99-8CB8-AA18E396C959}"/>
-              </a:ext>
-            </a:extLst>
-          </p:cNvPr>
-          <p:cNvSpPr>
-            <a:spLocks noGrp="1"/>
-          </p:cNvSpPr>
-          <p:nvPr>
-            <p:ph type="body" idx="1"/>
-          </p:nvPr>
-        </p:nvSpPr>
-        <p:spPr/>
-        <p:txBody>
-          <a:bodyPr/>
-          <a:lstStyle/>
-          <a:p>
-            <a:r>
-              <a:rPr lang="en-US" dirty="0"/>
-              <a:t>Learn a policy. This is done by estimating Q-values instead of V-values. </a:t>
-            </a:r>
-          </a:p>
-        </p:txBody>
-      </p:sp>
+      <mc:AlternateContent xmlns:mc="http://schemas.openxmlformats.org/markup-compatibility/2006" xmlns:a14="http://schemas.microsoft.com/office/drawing/2010/main">
+        <mc:Choice Requires="a14">
+          <p:sp>
+            <p:nvSpPr>
+              <p:cNvPr id="5" name="Text Placeholder 4">
+                <a:extLst>
+                  <a:ext uri="{FF2B5EF4-FFF2-40B4-BE49-F238E27FC236}">
+                    <a16:creationId xmlns:a16="http://schemas.microsoft.com/office/drawing/2014/main" id="{D8BFD2D0-399A-1A99-8CB8-AA18E396C959}"/>
+                  </a:ext>
+                </a:extLst>
+              </p:cNvPr>
+              <p:cNvSpPr>
+                <a:spLocks noGrp="1"/>
+              </p:cNvSpPr>
+              <p:nvPr>
+                <p:ph type="body" idx="1"/>
+              </p:nvPr>
+            </p:nvSpPr>
+            <p:spPr/>
+            <p:txBody>
+              <a:bodyPr/>
+              <a:lstStyle/>
+              <a:p>
+                <a:r>
+                  <a:rPr lang="en-US" dirty="0"/>
+                  <a:t>On-Policy learning using </a:t>
+                </a:r>
+                <a14:m>
+                  <m:oMath xmlns:m="http://schemas.openxmlformats.org/officeDocument/2006/math">
+                    <m:r>
+                      <a:rPr lang="en-US" b="0" i="1" smtClean="0">
+                        <a:latin typeface="Cambria Math" panose="02040503050406030204" pitchFamily="18" charset="0"/>
+                      </a:rPr>
+                      <m:t>𝑛</m:t>
+                    </m:r>
+                  </m:oMath>
+                </a14:m>
+                <a:r>
+                  <a:rPr lang="en-US" dirty="0"/>
+                  <a:t>-step return estimates.</a:t>
+                </a:r>
+              </a:p>
+            </p:txBody>
+          </p:sp>
+        </mc:Choice>
+        <mc:Fallback xmlns="">
+          <p:sp>
+            <p:nvSpPr>
+              <p:cNvPr id="5" name="Text Placeholder 4">
+                <a:extLst>
+                  <a:ext uri="{FF2B5EF4-FFF2-40B4-BE49-F238E27FC236}">
+                    <a16:creationId xmlns:a16="http://schemas.microsoft.com/office/drawing/2014/main" id="{D8BFD2D0-399A-1A99-8CB8-AA18E396C959}"/>
+                  </a:ext>
+                </a:extLst>
+              </p:cNvPr>
+              <p:cNvSpPr>
+                <a:spLocks noGrp="1" noRot="1" noChangeAspect="1" noMove="1" noResize="1" noEditPoints="1" noAdjustHandles="1" noChangeArrowheads="1" noChangeShapeType="1" noTextEdit="1"/>
+              </p:cNvSpPr>
+              <p:nvPr>
+                <p:ph type="body" idx="1"/>
+              </p:nvPr>
+            </p:nvSpPr>
+            <p:spPr>
+              <a:blipFill>
+                <a:blip r:embed="rId3"/>
+                <a:stretch>
+                  <a:fillRect l="-870" t="-5285"/>
+                </a:stretch>
+              </a:blipFill>
+            </p:spPr>
+            <p:txBody>
+              <a:bodyPr/>
+              <a:lstStyle/>
+              <a:p>
+                <a:r>
+                  <a:rPr lang="en-US">
+                    <a:noFill/>
+                  </a:rPr>
+                  <a:t> </a:t>
+                </a:r>
+              </a:p>
+            </p:txBody>
+          </p:sp>
+        </mc:Fallback>
+      </mc:AlternateContent>
     </p:spTree>
     <p:extLst>
       <p:ext uri="{BB962C8B-B14F-4D97-AF65-F5344CB8AC3E}">

--- a/slides/Lecture_Chapter07.pptx
+++ b/slides/Lecture_Chapter07.pptx
@@ -6,21 +6,22 @@
   </p:sldMasterIdLst>
   <p:sldIdLst>
     <p:sldId id="256" r:id="rId2"/>
-    <p:sldId id="478" r:id="rId3"/>
-    <p:sldId id="385" r:id="rId4"/>
-    <p:sldId id="398" r:id="rId5"/>
-    <p:sldId id="396" r:id="rId6"/>
-    <p:sldId id="386" r:id="rId7"/>
-    <p:sldId id="387" r:id="rId8"/>
-    <p:sldId id="388" r:id="rId9"/>
-    <p:sldId id="392" r:id="rId10"/>
-    <p:sldId id="391" r:id="rId11"/>
-    <p:sldId id="394" r:id="rId12"/>
-    <p:sldId id="393" r:id="rId13"/>
-    <p:sldId id="389" r:id="rId14"/>
-    <p:sldId id="390" r:id="rId15"/>
-    <p:sldId id="395" r:id="rId16"/>
-    <p:sldId id="397" r:id="rId17"/>
+    <p:sldId id="313" r:id="rId3"/>
+    <p:sldId id="478" r:id="rId4"/>
+    <p:sldId id="385" r:id="rId5"/>
+    <p:sldId id="398" r:id="rId6"/>
+    <p:sldId id="396" r:id="rId7"/>
+    <p:sldId id="386" r:id="rId8"/>
+    <p:sldId id="387" r:id="rId9"/>
+    <p:sldId id="388" r:id="rId10"/>
+    <p:sldId id="392" r:id="rId11"/>
+    <p:sldId id="391" r:id="rId12"/>
+    <p:sldId id="394" r:id="rId13"/>
+    <p:sldId id="393" r:id="rId14"/>
+    <p:sldId id="389" r:id="rId15"/>
+    <p:sldId id="390" r:id="rId16"/>
+    <p:sldId id="395" r:id="rId17"/>
+    <p:sldId id="397" r:id="rId18"/>
   </p:sldIdLst>
   <p:sldSz cx="12192000" cy="6858000"/>
   <p:notesSz cx="6858000" cy="9144000"/>
@@ -125,6 +126,7 @@
         <p14:section name="Default Section" id="{83286E67-F0F0-421C-8F74-7B93ABA17FBF}">
           <p14:sldIdLst>
             <p14:sldId id="256"/>
+            <p14:sldId id="313"/>
             <p14:sldId id="478"/>
           </p14:sldIdLst>
         </p14:section>
@@ -314,7 +316,7 @@
           <a:p>
             <a:fld id="{3E22BF2E-04DA-469E-97C5-BB68A0368813}" type="datetimeFigureOut">
               <a:rPr lang="en-US" smtClean="0"/>
-              <a:t>2/4/2026</a:t>
+              <a:t>2/6/2026</a:t>
             </a:fld>
             <a:endParaRPr lang="en-US"/>
           </a:p>
@@ -512,7 +514,7 @@
           <a:p>
             <a:fld id="{3E22BF2E-04DA-469E-97C5-BB68A0368813}" type="datetimeFigureOut">
               <a:rPr lang="en-US" smtClean="0"/>
-              <a:t>2/4/2026</a:t>
+              <a:t>2/6/2026</a:t>
             </a:fld>
             <a:endParaRPr lang="en-US"/>
           </a:p>
@@ -720,7 +722,7 @@
           <a:p>
             <a:fld id="{3E22BF2E-04DA-469E-97C5-BB68A0368813}" type="datetimeFigureOut">
               <a:rPr lang="en-US" smtClean="0"/>
-              <a:t>2/4/2026</a:t>
+              <a:t>2/6/2026</a:t>
             </a:fld>
             <a:endParaRPr lang="en-US"/>
           </a:p>
@@ -928,7 +930,7 @@
           <a:p>
             <a:fld id="{3E22BF2E-04DA-469E-97C5-BB68A0368813}" type="datetimeFigureOut">
               <a:rPr lang="en-US" smtClean="0"/>
-              <a:t>2/4/2026</a:t>
+              <a:t>2/6/2026</a:t>
             </a:fld>
             <a:endParaRPr lang="en-US"/>
           </a:p>
@@ -1203,7 +1205,7 @@
           <a:p>
             <a:fld id="{3E22BF2E-04DA-469E-97C5-BB68A0368813}" type="datetimeFigureOut">
               <a:rPr lang="en-US" smtClean="0"/>
-              <a:t>2/4/2026</a:t>
+              <a:t>2/6/2026</a:t>
             </a:fld>
             <a:endParaRPr lang="en-US"/>
           </a:p>
@@ -1468,7 +1470,7 @@
           <a:p>
             <a:fld id="{3E22BF2E-04DA-469E-97C5-BB68A0368813}" type="datetimeFigureOut">
               <a:rPr lang="en-US" smtClean="0"/>
-              <a:t>2/4/2026</a:t>
+              <a:t>2/6/2026</a:t>
             </a:fld>
             <a:endParaRPr lang="en-US"/>
           </a:p>
@@ -1880,7 +1882,7 @@
           <a:p>
             <a:fld id="{3E22BF2E-04DA-469E-97C5-BB68A0368813}" type="datetimeFigureOut">
               <a:rPr lang="en-US" smtClean="0"/>
-              <a:t>2/4/2026</a:t>
+              <a:t>2/6/2026</a:t>
             </a:fld>
             <a:endParaRPr lang="en-US"/>
           </a:p>
@@ -2021,7 +2023,7 @@
           <a:p>
             <a:fld id="{3E22BF2E-04DA-469E-97C5-BB68A0368813}" type="datetimeFigureOut">
               <a:rPr lang="en-US" smtClean="0"/>
-              <a:t>2/4/2026</a:t>
+              <a:t>2/6/2026</a:t>
             </a:fld>
             <a:endParaRPr lang="en-US"/>
           </a:p>
@@ -2134,7 +2136,7 @@
           <a:p>
             <a:fld id="{3E22BF2E-04DA-469E-97C5-BB68A0368813}" type="datetimeFigureOut">
               <a:rPr lang="en-US" smtClean="0"/>
-              <a:t>2/4/2026</a:t>
+              <a:t>2/6/2026</a:t>
             </a:fld>
             <a:endParaRPr lang="en-US"/>
           </a:p>
@@ -2445,7 +2447,7 @@
           <a:p>
             <a:fld id="{3E22BF2E-04DA-469E-97C5-BB68A0368813}" type="datetimeFigureOut">
               <a:rPr lang="en-US" smtClean="0"/>
-              <a:t>2/4/2026</a:t>
+              <a:t>2/6/2026</a:t>
             </a:fld>
             <a:endParaRPr lang="en-US"/>
           </a:p>
@@ -2733,7 +2735,7 @@
           <a:p>
             <a:fld id="{3E22BF2E-04DA-469E-97C5-BB68A0368813}" type="datetimeFigureOut">
               <a:rPr lang="en-US" smtClean="0"/>
-              <a:t>2/4/2026</a:t>
+              <a:t>2/6/2026</a:t>
             </a:fld>
             <a:endParaRPr lang="en-US"/>
           </a:p>
@@ -2974,7 +2976,7 @@
           <a:p>
             <a:fld id="{3E22BF2E-04DA-469E-97C5-BB68A0368813}" type="datetimeFigureOut">
               <a:rPr lang="en-US" smtClean="0"/>
-              <a:t>2/4/2026</a:t>
+              <a:t>2/6/2026</a:t>
             </a:fld>
             <a:endParaRPr lang="en-US"/>
           </a:p>
@@ -4092,6 +4094,202 @@
         <mc:Choice Requires="a14">
           <p:sp>
             <p:nvSpPr>
+              <p:cNvPr id="4" name="Title 3">
+                <a:extLst>
+                  <a:ext uri="{FF2B5EF4-FFF2-40B4-BE49-F238E27FC236}">
+                    <a16:creationId xmlns:a16="http://schemas.microsoft.com/office/drawing/2014/main" id="{C0944D32-5F67-3759-0E01-9E6ED1636AF0}"/>
+                  </a:ext>
+                </a:extLst>
+              </p:cNvPr>
+              <p:cNvSpPr>
+                <a:spLocks noGrp="1"/>
+              </p:cNvSpPr>
+              <p:nvPr>
+                <p:ph type="title"/>
+              </p:nvPr>
+            </p:nvSpPr>
+            <p:spPr/>
+            <p:txBody>
+              <a:bodyPr/>
+              <a:lstStyle/>
+              <a:p>
+                <a14:m>
+                  <m:oMath xmlns:m="http://schemas.openxmlformats.org/officeDocument/2006/math">
+                    <m:r>
+                      <a:rPr lang="en-US" i="1" dirty="0" smtClean="0">
+                        <a:latin typeface="Cambria Math" panose="02040503050406030204" pitchFamily="18" charset="0"/>
+                      </a:rPr>
+                      <m:t>𝑛</m:t>
+                    </m:r>
+                  </m:oMath>
+                </a14:m>
+                <a:r>
+                  <a:rPr lang="en-US" dirty="0"/>
+                  <a:t>-step Control: Sarsa</a:t>
+                </a:r>
+              </a:p>
+            </p:txBody>
+          </p:sp>
+        </mc:Choice>
+        <mc:Fallback xmlns="">
+          <p:sp>
+            <p:nvSpPr>
+              <p:cNvPr id="4" name="Title 3">
+                <a:extLst>
+                  <a:ext uri="{FF2B5EF4-FFF2-40B4-BE49-F238E27FC236}">
+                    <a16:creationId xmlns:a16="http://schemas.microsoft.com/office/drawing/2014/main" id="{C0944D32-5F67-3759-0E01-9E6ED1636AF0}"/>
+                  </a:ext>
+                </a:extLst>
+              </p:cNvPr>
+              <p:cNvSpPr>
+                <a:spLocks noGrp="1" noRot="1" noChangeAspect="1" noMove="1" noResize="1" noEditPoints="1" noAdjustHandles="1" noChangeArrowheads="1" noChangeShapeType="1" noTextEdit="1"/>
+              </p:cNvSpPr>
+              <p:nvPr>
+                <p:ph type="title"/>
+              </p:nvPr>
+            </p:nvSpPr>
+            <p:spPr>
+              <a:blipFill>
+                <a:blip r:embed="rId2"/>
+                <a:stretch>
+                  <a:fillRect b="-14744"/>
+                </a:stretch>
+              </a:blipFill>
+            </p:spPr>
+            <p:txBody>
+              <a:bodyPr/>
+              <a:lstStyle/>
+              <a:p>
+                <a:r>
+                  <a:rPr lang="en-US">
+                    <a:noFill/>
+                  </a:rPr>
+                  <a:t> </a:t>
+                </a:r>
+              </a:p>
+            </p:txBody>
+          </p:sp>
+        </mc:Fallback>
+      </mc:AlternateContent>
+      <mc:AlternateContent xmlns:mc="http://schemas.openxmlformats.org/markup-compatibility/2006" xmlns:a14="http://schemas.microsoft.com/office/drawing/2010/main">
+        <mc:Choice Requires="a14">
+          <p:sp>
+            <p:nvSpPr>
+              <p:cNvPr id="5" name="Text Placeholder 4">
+                <a:extLst>
+                  <a:ext uri="{FF2B5EF4-FFF2-40B4-BE49-F238E27FC236}">
+                    <a16:creationId xmlns:a16="http://schemas.microsoft.com/office/drawing/2014/main" id="{D8BFD2D0-399A-1A99-8CB8-AA18E396C959}"/>
+                  </a:ext>
+                </a:extLst>
+              </p:cNvPr>
+              <p:cNvSpPr>
+                <a:spLocks noGrp="1"/>
+              </p:cNvSpPr>
+              <p:nvPr>
+                <p:ph type="body" idx="1"/>
+              </p:nvPr>
+            </p:nvSpPr>
+            <p:spPr/>
+            <p:txBody>
+              <a:bodyPr/>
+              <a:lstStyle/>
+              <a:p>
+                <a:r>
+                  <a:rPr lang="en-US" dirty="0"/>
+                  <a:t>On-Policy learning using </a:t>
+                </a:r>
+                <a14:m>
+                  <m:oMath xmlns:m="http://schemas.openxmlformats.org/officeDocument/2006/math">
+                    <m:r>
+                      <a:rPr lang="en-US" b="0" i="1" smtClean="0">
+                        <a:latin typeface="Cambria Math" panose="02040503050406030204" pitchFamily="18" charset="0"/>
+                      </a:rPr>
+                      <m:t>𝑛</m:t>
+                    </m:r>
+                  </m:oMath>
+                </a14:m>
+                <a:r>
+                  <a:rPr lang="en-US" dirty="0"/>
+                  <a:t>-step return estimates.</a:t>
+                </a:r>
+              </a:p>
+            </p:txBody>
+          </p:sp>
+        </mc:Choice>
+        <mc:Fallback xmlns="">
+          <p:sp>
+            <p:nvSpPr>
+              <p:cNvPr id="5" name="Text Placeholder 4">
+                <a:extLst>
+                  <a:ext uri="{FF2B5EF4-FFF2-40B4-BE49-F238E27FC236}">
+                    <a16:creationId xmlns:a16="http://schemas.microsoft.com/office/drawing/2014/main" id="{D8BFD2D0-399A-1A99-8CB8-AA18E396C959}"/>
+                  </a:ext>
+                </a:extLst>
+              </p:cNvPr>
+              <p:cNvSpPr>
+                <a:spLocks noGrp="1" noRot="1" noChangeAspect="1" noMove="1" noResize="1" noEditPoints="1" noAdjustHandles="1" noChangeArrowheads="1" noChangeShapeType="1" noTextEdit="1"/>
+              </p:cNvSpPr>
+              <p:nvPr>
+                <p:ph type="body" idx="1"/>
+              </p:nvPr>
+            </p:nvSpPr>
+            <p:spPr>
+              <a:blipFill>
+                <a:blip r:embed="rId3"/>
+                <a:stretch>
+                  <a:fillRect l="-870" t="-5285"/>
+                </a:stretch>
+              </a:blipFill>
+            </p:spPr>
+            <p:txBody>
+              <a:bodyPr/>
+              <a:lstStyle/>
+              <a:p>
+                <a:r>
+                  <a:rPr lang="en-US">
+                    <a:noFill/>
+                  </a:rPr>
+                  <a:t> </a:t>
+                </a:r>
+              </a:p>
+            </p:txBody>
+          </p:sp>
+        </mc:Fallback>
+      </mc:AlternateContent>
+    </p:spTree>
+    <p:extLst>
+      <p:ext uri="{BB962C8B-B14F-4D97-AF65-F5344CB8AC3E}">
+        <p14:creationId xmlns:p14="http://schemas.microsoft.com/office/powerpoint/2010/main" val="1836351049"/>
+      </p:ext>
+    </p:extLst>
+  </p:cSld>
+  <p:clrMapOvr>
+    <a:masterClrMapping/>
+  </p:clrMapOvr>
+</p:sld>
+</file>
+
+<file path=ppt/slides/slide11.xml><?xml version="1.0" encoding="utf-8"?>
+<p:sld xmlns:a="http://schemas.openxmlformats.org/drawingml/2006/main" xmlns:r="http://schemas.openxmlformats.org/officeDocument/2006/relationships" xmlns:p="http://schemas.openxmlformats.org/presentationml/2006/main">
+  <p:cSld>
+    <p:spTree>
+      <p:nvGrpSpPr>
+        <p:cNvPr id="1" name=""/>
+        <p:cNvGrpSpPr/>
+        <p:nvPr/>
+      </p:nvGrpSpPr>
+      <p:grpSpPr>
+        <a:xfrm>
+          <a:off x="0" y="0"/>
+          <a:ext cx="0" cy="0"/>
+          <a:chOff x="0" y="0"/>
+          <a:chExt cx="0" cy="0"/>
+        </a:xfrm>
+      </p:grpSpPr>
+      <mc:AlternateContent xmlns:mc="http://schemas.openxmlformats.org/markup-compatibility/2006" xmlns:a14="http://schemas.microsoft.com/office/drawing/2010/main">
+        <mc:Choice Requires="a14">
+          <p:sp>
+            <p:nvSpPr>
               <p:cNvPr id="2" name="Title 1">
                 <a:extLst>
                   <a:ext uri="{FF2B5EF4-FFF2-40B4-BE49-F238E27FC236}">
@@ -5177,7 +5375,7 @@
 </p:sld>
 </file>
 
-<file path=ppt/slides/slide11.xml><?xml version="1.0" encoding="utf-8"?>
+<file path=ppt/slides/slide12.xml><?xml version="1.0" encoding="utf-8"?>
 <p:sld xmlns:a="http://schemas.openxmlformats.org/drawingml/2006/main" xmlns:r="http://schemas.openxmlformats.org/officeDocument/2006/relationships" xmlns:p="http://schemas.openxmlformats.org/presentationml/2006/main">
   <p:cSld>
     <p:spTree>
@@ -5417,7 +5615,7 @@
 </p:sld>
 </file>
 
-<file path=ppt/slides/slide12.xml><?xml version="1.0" encoding="utf-8"?>
+<file path=ppt/slides/slide13.xml><?xml version="1.0" encoding="utf-8"?>
 <p:sld xmlns:a="http://schemas.openxmlformats.org/drawingml/2006/main" xmlns:r="http://schemas.openxmlformats.org/officeDocument/2006/relationships" xmlns:p="http://schemas.openxmlformats.org/presentationml/2006/main">
   <p:cSld>
     <p:spTree>
@@ -6208,7 +6406,7 @@
 </p:sld>
 </file>
 
-<file path=ppt/slides/slide13.xml><?xml version="1.0" encoding="utf-8"?>
+<file path=ppt/slides/slide14.xml><?xml version="1.0" encoding="utf-8"?>
 <p:sld xmlns:a="http://schemas.openxmlformats.org/drawingml/2006/main" xmlns:r="http://schemas.openxmlformats.org/officeDocument/2006/relationships" xmlns:p="http://schemas.openxmlformats.org/presentationml/2006/main">
   <p:cSld>
     <p:spTree>
@@ -6347,7 +6545,7 @@
 </p:sld>
 </file>
 
-<file path=ppt/slides/slide14.xml><?xml version="1.0" encoding="utf-8"?>
+<file path=ppt/slides/slide15.xml><?xml version="1.0" encoding="utf-8"?>
 <p:sld xmlns:a="http://schemas.openxmlformats.org/drawingml/2006/main" xmlns:r="http://schemas.openxmlformats.org/officeDocument/2006/relationships" xmlns:p="http://schemas.openxmlformats.org/presentationml/2006/main">
   <p:cSld>
     <p:spTree>
@@ -7386,7 +7584,7 @@
 </p:sld>
 </file>
 
-<file path=ppt/slides/slide15.xml><?xml version="1.0" encoding="utf-8"?>
+<file path=ppt/slides/slide16.xml><?xml version="1.0" encoding="utf-8"?>
 <p:sld xmlns:a="http://schemas.openxmlformats.org/drawingml/2006/main" xmlns:r="http://schemas.openxmlformats.org/officeDocument/2006/relationships" xmlns:p="http://schemas.openxmlformats.org/presentationml/2006/main">
   <p:cSld>
     <p:spTree>
@@ -8231,7 +8429,7 @@
 </p:sld>
 </file>
 
-<file path=ppt/slides/slide16.xml><?xml version="1.0" encoding="utf-8"?>
+<file path=ppt/slides/slide17.xml><?xml version="1.0" encoding="utf-8"?>
 <p:sld xmlns:a="http://schemas.openxmlformats.org/drawingml/2006/main" xmlns:r="http://schemas.openxmlformats.org/officeDocument/2006/relationships" xmlns:p="http://schemas.openxmlformats.org/presentationml/2006/main">
   <p:cSld>
     <p:bg>
@@ -8649,6 +8847,188 @@
           <p:cNvPr id="2" name="Title 1">
             <a:extLst>
               <a:ext uri="{FF2B5EF4-FFF2-40B4-BE49-F238E27FC236}">
+                <a16:creationId xmlns:a16="http://schemas.microsoft.com/office/drawing/2014/main" id="{9E7A3493-2ED6-DF09-F569-7F3DCA81AB18}"/>
+              </a:ext>
+            </a:extLst>
+          </p:cNvPr>
+          <p:cNvSpPr>
+            <a:spLocks noGrp="1"/>
+          </p:cNvSpPr>
+          <p:nvPr>
+            <p:ph type="title"/>
+          </p:nvPr>
+        </p:nvSpPr>
+        <p:spPr/>
+        <p:txBody>
+          <a:bodyPr/>
+          <a:lstStyle/>
+          <a:p>
+            <a:r>
+              <a:rPr lang="en-US" dirty="0"/>
+              <a:t>Topics of this Course</a:t>
+            </a:r>
+          </a:p>
+        </p:txBody>
+      </p:sp>
+      <p:sp>
+        <p:nvSpPr>
+          <p:cNvPr id="3" name="Content Placeholder 2">
+            <a:extLst>
+              <a:ext uri="{FF2B5EF4-FFF2-40B4-BE49-F238E27FC236}">
+                <a16:creationId xmlns:a16="http://schemas.microsoft.com/office/drawing/2014/main" id="{8F95E019-92A5-79AC-D777-59B4926F61AA}"/>
+              </a:ext>
+            </a:extLst>
+          </p:cNvPr>
+          <p:cNvSpPr>
+            <a:spLocks noGrp="1"/>
+          </p:cNvSpPr>
+          <p:nvPr>
+            <p:ph idx="1"/>
+          </p:nvPr>
+        </p:nvSpPr>
+        <p:spPr/>
+        <p:txBody>
+          <a:bodyPr>
+            <a:normAutofit fontScale="85000" lnSpcReduction="20000"/>
+          </a:bodyPr>
+          <a:lstStyle/>
+          <a:p>
+            <a:r>
+              <a:rPr lang="en-US" dirty="0"/>
+              <a:t>Introduction to reinforcement learning</a:t>
+            </a:r>
+          </a:p>
+          <a:p>
+            <a:r>
+              <a:rPr lang="en-US" dirty="0"/>
+              <a:t>Markov decision processes</a:t>
+            </a:r>
+          </a:p>
+          <a:p>
+            <a:r>
+              <a:rPr lang="en-US" b="1" dirty="0"/>
+              <a:t>Part I: Tabular Methods</a:t>
+            </a:r>
+          </a:p>
+          <a:p>
+            <a:pPr lvl="1"/>
+            <a:r>
+              <a:rPr lang="en-US" dirty="0"/>
+              <a:t>Dynamic programming</a:t>
+            </a:r>
+          </a:p>
+          <a:p>
+            <a:pPr lvl="1"/>
+            <a:r>
+              <a:rPr lang="en-US" dirty="0"/>
+              <a:t>Monte Carlo methods</a:t>
+            </a:r>
+          </a:p>
+          <a:p>
+            <a:pPr lvl="1"/>
+            <a:r>
+              <a:rPr lang="en-US" dirty="0"/>
+              <a:t>Temporal-difference learning</a:t>
+            </a:r>
+          </a:p>
+          <a:p>
+            <a:pPr lvl="1"/>
+            <a:r>
+              <a:rPr lang="en-US" b="1" dirty="0"/>
+              <a:t>Multi-step bootstrapping</a:t>
+            </a:r>
+          </a:p>
+          <a:p>
+            <a:pPr lvl="1"/>
+            <a:r>
+              <a:rPr lang="en-US" dirty="0"/>
+              <a:t>Planning and learning with tabular methods</a:t>
+            </a:r>
+          </a:p>
+          <a:p>
+            <a:r>
+              <a:rPr lang="en-US" dirty="0"/>
+              <a:t>Part II: Approximate Solution Methods</a:t>
+            </a:r>
+          </a:p>
+          <a:p>
+            <a:pPr lvl="1"/>
+            <a:r>
+              <a:rPr lang="en-US" dirty="0"/>
+              <a:t>Prediction and Control using Approximation</a:t>
+            </a:r>
+          </a:p>
+          <a:p>
+            <a:pPr lvl="1"/>
+            <a:r>
+              <a:rPr lang="en-US" dirty="0"/>
+              <a:t>Eligibility Traces</a:t>
+            </a:r>
+          </a:p>
+          <a:p>
+            <a:pPr lvl="1"/>
+            <a:r>
+              <a:rPr lang="en-US" dirty="0"/>
+              <a:t>Policy Gradient Methods</a:t>
+            </a:r>
+          </a:p>
+          <a:p>
+            <a:r>
+              <a:rPr lang="en-US" dirty="0"/>
+              <a:t>Part III: Modern RL Methods</a:t>
+            </a:r>
+          </a:p>
+          <a:p>
+            <a:pPr lvl="1"/>
+            <a:r>
+              <a:rPr lang="en-US" dirty="0"/>
+              <a:t>Deep Reinforcement Learning</a:t>
+            </a:r>
+          </a:p>
+          <a:p>
+            <a:pPr lvl="1"/>
+            <a:r>
+              <a:rPr lang="en-US" dirty="0"/>
+              <a:t>Current Applications</a:t>
+            </a:r>
+          </a:p>
+        </p:txBody>
+      </p:sp>
+    </p:spTree>
+    <p:extLst>
+      <p:ext uri="{BB962C8B-B14F-4D97-AF65-F5344CB8AC3E}">
+        <p14:creationId xmlns:p14="http://schemas.microsoft.com/office/powerpoint/2010/main" val="3653367536"/>
+      </p:ext>
+    </p:extLst>
+  </p:cSld>
+  <p:clrMapOvr>
+    <a:masterClrMapping/>
+  </p:clrMapOvr>
+</p:sld>
+</file>
+
+<file path=ppt/slides/slide3.xml><?xml version="1.0" encoding="utf-8"?>
+<p:sld xmlns:a="http://schemas.openxmlformats.org/drawingml/2006/main" xmlns:r="http://schemas.openxmlformats.org/officeDocument/2006/relationships" xmlns:p="http://schemas.openxmlformats.org/presentationml/2006/main">
+  <p:cSld>
+    <p:spTree>
+      <p:nvGrpSpPr>
+        <p:cNvPr id="1" name=""/>
+        <p:cNvGrpSpPr/>
+        <p:nvPr/>
+      </p:nvGrpSpPr>
+      <p:grpSpPr>
+        <a:xfrm>
+          <a:off x="0" y="0"/>
+          <a:ext cx="0" cy="0"/>
+          <a:chOff x="0" y="0"/>
+          <a:chExt cx="0" cy="0"/>
+        </a:xfrm>
+      </p:grpSpPr>
+      <p:sp>
+        <p:nvSpPr>
+          <p:cNvPr id="2" name="Title 1">
+            <a:extLst>
+              <a:ext uri="{FF2B5EF4-FFF2-40B4-BE49-F238E27FC236}">
                 <a16:creationId xmlns:a16="http://schemas.microsoft.com/office/drawing/2014/main" id="{5BA4E1A2-75E3-3C9C-6C10-EE078C5AD54A}"/>
               </a:ext>
             </a:extLst>
@@ -8672,8 +9052,8 @@
           </a:p>
         </p:txBody>
       </p:sp>
-      <mc:AlternateContent xmlns:mc="http://schemas.openxmlformats.org/markup-compatibility/2006">
-        <mc:Choice xmlns:a14="http://schemas.microsoft.com/office/drawing/2010/main" Requires="a14">
+      <mc:AlternateContent xmlns:mc="http://schemas.openxmlformats.org/markup-compatibility/2006" xmlns:a14="http://schemas.microsoft.com/office/drawing/2010/main">
+        <mc:Choice Requires="a14">
           <p:sp>
             <p:nvSpPr>
               <p:cNvPr id="3" name="Content Placeholder 2">
@@ -9678,7 +10058,7 @@
             </p:txBody>
           </p:sp>
         </mc:Choice>
-        <mc:Fallback>
+        <mc:Fallback xmlns="">
           <p:sp>
             <p:nvSpPr>
               <p:cNvPr id="3" name="Content Placeholder 2">
@@ -11792,7 +12172,7 @@
 </p:sld>
 </file>
 
-<file path=ppt/slides/slide3.xml><?xml version="1.0" encoding="utf-8"?>
+<file path=ppt/slides/slide4.xml><?xml version="1.0" encoding="utf-8"?>
 <p:sld xmlns:a="http://schemas.openxmlformats.org/drawingml/2006/main" xmlns:r="http://schemas.openxmlformats.org/officeDocument/2006/relationships" xmlns:p="http://schemas.openxmlformats.org/presentationml/2006/main">
   <p:cSld>
     <p:spTree>
@@ -13626,7 +14006,7 @@
 </p:sld>
 </file>
 
-<file path=ppt/slides/slide4.xml><?xml version="1.0" encoding="utf-8"?>
+<file path=ppt/slides/slide5.xml><?xml version="1.0" encoding="utf-8"?>
 <p:sld xmlns:a="http://schemas.openxmlformats.org/drawingml/2006/main" xmlns:r="http://schemas.openxmlformats.org/officeDocument/2006/relationships" xmlns:p="http://schemas.openxmlformats.org/presentationml/2006/main">
   <p:cSld>
     <p:spTree>
@@ -14190,7 +14570,7 @@
 </p:sld>
 </file>
 
-<file path=ppt/slides/slide5.xml><?xml version="1.0" encoding="utf-8"?>
+<file path=ppt/slides/slide6.xml><?xml version="1.0" encoding="utf-8"?>
 <p:sld xmlns:a="http://schemas.openxmlformats.org/drawingml/2006/main" xmlns:r="http://schemas.openxmlformats.org/officeDocument/2006/relationships" xmlns:p="http://schemas.openxmlformats.org/presentationml/2006/main">
   <p:cSld>
     <p:spTree>
@@ -14335,7 +14715,7 @@
 </p:sld>
 </file>
 
-<file path=ppt/slides/slide6.xml><?xml version="1.0" encoding="utf-8"?>
+<file path=ppt/slides/slide7.xml><?xml version="1.0" encoding="utf-8"?>
 <p:sld xmlns:a="http://schemas.openxmlformats.org/drawingml/2006/main" xmlns:r="http://schemas.openxmlformats.org/officeDocument/2006/relationships" xmlns:p="http://schemas.openxmlformats.org/presentationml/2006/main">
   <p:cSld>
     <p:spTree>
@@ -17069,7 +17449,7 @@
 </p:sld>
 </file>
 
-<file path=ppt/slides/slide7.xml><?xml version="1.0" encoding="utf-8"?>
+<file path=ppt/slides/slide8.xml><?xml version="1.0" encoding="utf-8"?>
 <p:sld xmlns:a="http://schemas.openxmlformats.org/drawingml/2006/main" xmlns:r="http://schemas.openxmlformats.org/officeDocument/2006/relationships" xmlns:p="http://schemas.openxmlformats.org/presentationml/2006/main">
   <p:cSld>
     <p:spTree>
@@ -18293,7 +18673,7 @@
 </p:sld>
 </file>
 
-<file path=ppt/slides/slide8.xml><?xml version="1.0" encoding="utf-8"?>
+<file path=ppt/slides/slide9.xml><?xml version="1.0" encoding="utf-8"?>
 <p:sld xmlns:a="http://schemas.openxmlformats.org/drawingml/2006/main" xmlns:r="http://schemas.openxmlformats.org/officeDocument/2006/relationships" xmlns:p="http://schemas.openxmlformats.org/presentationml/2006/main">
   <p:cSld>
     <p:spTree>
@@ -18338,8 +18718,8 @@
           </a:p>
         </p:txBody>
       </p:sp>
-      <mc:AlternateContent xmlns:mc="http://schemas.openxmlformats.org/markup-compatibility/2006">
-        <mc:Choice xmlns:a14="http://schemas.microsoft.com/office/drawing/2010/main" Requires="a14">
+      <mc:AlternateContent xmlns:mc="http://schemas.openxmlformats.org/markup-compatibility/2006" xmlns:a14="http://schemas.microsoft.com/office/drawing/2010/main">
+        <mc:Choice Requires="a14">
           <p:sp>
             <p:nvSpPr>
               <p:cNvPr id="3" name="Content Placeholder 2">
@@ -18807,7 +19187,7 @@
             </p:txBody>
           </p:sp>
         </mc:Choice>
-        <mc:Fallback>
+        <mc:Fallback xmlns="">
           <p:sp>
             <p:nvSpPr>
               <p:cNvPr id="3" name="Content Placeholder 2">
@@ -18851,8 +19231,8 @@
           </p:sp>
         </mc:Fallback>
       </mc:AlternateContent>
-      <mc:AlternateContent xmlns:mc="http://schemas.openxmlformats.org/markup-compatibility/2006">
-        <mc:Choice xmlns:a14="http://schemas.microsoft.com/office/drawing/2010/main" Requires="a14">
+      <mc:AlternateContent xmlns:mc="http://schemas.openxmlformats.org/markup-compatibility/2006" xmlns:a14="http://schemas.microsoft.com/office/drawing/2010/main">
+        <mc:Choice Requires="a14">
           <p:sp>
             <p:nvSpPr>
               <p:cNvPr id="5" name="TextBox 4">
@@ -19480,7 +19860,7 @@
             </p:txBody>
           </p:sp>
         </mc:Choice>
-        <mc:Fallback>
+        <mc:Fallback xmlns="">
           <p:sp>
             <p:nvSpPr>
               <p:cNvPr id="5" name="TextBox 4">
@@ -19529,202 +19909,6 @@
     <p:extLst>
       <p:ext uri="{BB962C8B-B14F-4D97-AF65-F5344CB8AC3E}">
         <p14:creationId xmlns:p14="http://schemas.microsoft.com/office/powerpoint/2010/main" val="971412349"/>
-      </p:ext>
-    </p:extLst>
-  </p:cSld>
-  <p:clrMapOvr>
-    <a:masterClrMapping/>
-  </p:clrMapOvr>
-</p:sld>
-</file>
-
-<file path=ppt/slides/slide9.xml><?xml version="1.0" encoding="utf-8"?>
-<p:sld xmlns:a="http://schemas.openxmlformats.org/drawingml/2006/main" xmlns:r="http://schemas.openxmlformats.org/officeDocument/2006/relationships" xmlns:p="http://schemas.openxmlformats.org/presentationml/2006/main">
-  <p:cSld>
-    <p:spTree>
-      <p:nvGrpSpPr>
-        <p:cNvPr id="1" name=""/>
-        <p:cNvGrpSpPr/>
-        <p:nvPr/>
-      </p:nvGrpSpPr>
-      <p:grpSpPr>
-        <a:xfrm>
-          <a:off x="0" y="0"/>
-          <a:ext cx="0" cy="0"/>
-          <a:chOff x="0" y="0"/>
-          <a:chExt cx="0" cy="0"/>
-        </a:xfrm>
-      </p:grpSpPr>
-      <mc:AlternateContent xmlns:mc="http://schemas.openxmlformats.org/markup-compatibility/2006" xmlns:a14="http://schemas.microsoft.com/office/drawing/2010/main">
-        <mc:Choice Requires="a14">
-          <p:sp>
-            <p:nvSpPr>
-              <p:cNvPr id="4" name="Title 3">
-                <a:extLst>
-                  <a:ext uri="{FF2B5EF4-FFF2-40B4-BE49-F238E27FC236}">
-                    <a16:creationId xmlns:a16="http://schemas.microsoft.com/office/drawing/2014/main" id="{C0944D32-5F67-3759-0E01-9E6ED1636AF0}"/>
-                  </a:ext>
-                </a:extLst>
-              </p:cNvPr>
-              <p:cNvSpPr>
-                <a:spLocks noGrp="1"/>
-              </p:cNvSpPr>
-              <p:nvPr>
-                <p:ph type="title"/>
-              </p:nvPr>
-            </p:nvSpPr>
-            <p:spPr/>
-            <p:txBody>
-              <a:bodyPr/>
-              <a:lstStyle/>
-              <a:p>
-                <a14:m>
-                  <m:oMath xmlns:m="http://schemas.openxmlformats.org/officeDocument/2006/math">
-                    <m:r>
-                      <a:rPr lang="en-US" i="1" dirty="0" smtClean="0">
-                        <a:latin typeface="Cambria Math" panose="02040503050406030204" pitchFamily="18" charset="0"/>
-                      </a:rPr>
-                      <m:t>𝑛</m:t>
-                    </m:r>
-                  </m:oMath>
-                </a14:m>
-                <a:r>
-                  <a:rPr lang="en-US" dirty="0"/>
-                  <a:t>-step Control: Sarsa</a:t>
-                </a:r>
-              </a:p>
-            </p:txBody>
-          </p:sp>
-        </mc:Choice>
-        <mc:Fallback xmlns="">
-          <p:sp>
-            <p:nvSpPr>
-              <p:cNvPr id="4" name="Title 3">
-                <a:extLst>
-                  <a:ext uri="{FF2B5EF4-FFF2-40B4-BE49-F238E27FC236}">
-                    <a16:creationId xmlns:a16="http://schemas.microsoft.com/office/drawing/2014/main" id="{C0944D32-5F67-3759-0E01-9E6ED1636AF0}"/>
-                  </a:ext>
-                </a:extLst>
-              </p:cNvPr>
-              <p:cNvSpPr>
-                <a:spLocks noGrp="1" noRot="1" noChangeAspect="1" noMove="1" noResize="1" noEditPoints="1" noAdjustHandles="1" noChangeArrowheads="1" noChangeShapeType="1" noTextEdit="1"/>
-              </p:cNvSpPr>
-              <p:nvPr>
-                <p:ph type="title"/>
-              </p:nvPr>
-            </p:nvSpPr>
-            <p:spPr>
-              <a:blipFill>
-                <a:blip r:embed="rId2"/>
-                <a:stretch>
-                  <a:fillRect b="-14744"/>
-                </a:stretch>
-              </a:blipFill>
-            </p:spPr>
-            <p:txBody>
-              <a:bodyPr/>
-              <a:lstStyle/>
-              <a:p>
-                <a:r>
-                  <a:rPr lang="en-US">
-                    <a:noFill/>
-                  </a:rPr>
-                  <a:t> </a:t>
-                </a:r>
-              </a:p>
-            </p:txBody>
-          </p:sp>
-        </mc:Fallback>
-      </mc:AlternateContent>
-      <mc:AlternateContent xmlns:mc="http://schemas.openxmlformats.org/markup-compatibility/2006" xmlns:a14="http://schemas.microsoft.com/office/drawing/2010/main">
-        <mc:Choice Requires="a14">
-          <p:sp>
-            <p:nvSpPr>
-              <p:cNvPr id="5" name="Text Placeholder 4">
-                <a:extLst>
-                  <a:ext uri="{FF2B5EF4-FFF2-40B4-BE49-F238E27FC236}">
-                    <a16:creationId xmlns:a16="http://schemas.microsoft.com/office/drawing/2014/main" id="{D8BFD2D0-399A-1A99-8CB8-AA18E396C959}"/>
-                  </a:ext>
-                </a:extLst>
-              </p:cNvPr>
-              <p:cNvSpPr>
-                <a:spLocks noGrp="1"/>
-              </p:cNvSpPr>
-              <p:nvPr>
-                <p:ph type="body" idx="1"/>
-              </p:nvPr>
-            </p:nvSpPr>
-            <p:spPr/>
-            <p:txBody>
-              <a:bodyPr/>
-              <a:lstStyle/>
-              <a:p>
-                <a:r>
-                  <a:rPr lang="en-US" dirty="0"/>
-                  <a:t>On-Policy learning using </a:t>
-                </a:r>
-                <a14:m>
-                  <m:oMath xmlns:m="http://schemas.openxmlformats.org/officeDocument/2006/math">
-                    <m:r>
-                      <a:rPr lang="en-US" b="0" i="1" smtClean="0">
-                        <a:latin typeface="Cambria Math" panose="02040503050406030204" pitchFamily="18" charset="0"/>
-                      </a:rPr>
-                      <m:t>𝑛</m:t>
-                    </m:r>
-                  </m:oMath>
-                </a14:m>
-                <a:r>
-                  <a:rPr lang="en-US" dirty="0"/>
-                  <a:t>-step return estimates.</a:t>
-                </a:r>
-              </a:p>
-            </p:txBody>
-          </p:sp>
-        </mc:Choice>
-        <mc:Fallback xmlns="">
-          <p:sp>
-            <p:nvSpPr>
-              <p:cNvPr id="5" name="Text Placeholder 4">
-                <a:extLst>
-                  <a:ext uri="{FF2B5EF4-FFF2-40B4-BE49-F238E27FC236}">
-                    <a16:creationId xmlns:a16="http://schemas.microsoft.com/office/drawing/2014/main" id="{D8BFD2D0-399A-1A99-8CB8-AA18E396C959}"/>
-                  </a:ext>
-                </a:extLst>
-              </p:cNvPr>
-              <p:cNvSpPr>
-                <a:spLocks noGrp="1" noRot="1" noChangeAspect="1" noMove="1" noResize="1" noEditPoints="1" noAdjustHandles="1" noChangeArrowheads="1" noChangeShapeType="1" noTextEdit="1"/>
-              </p:cNvSpPr>
-              <p:nvPr>
-                <p:ph type="body" idx="1"/>
-              </p:nvPr>
-            </p:nvSpPr>
-            <p:spPr>
-              <a:blipFill>
-                <a:blip r:embed="rId3"/>
-                <a:stretch>
-                  <a:fillRect l="-870" t="-5285"/>
-                </a:stretch>
-              </a:blipFill>
-            </p:spPr>
-            <p:txBody>
-              <a:bodyPr/>
-              <a:lstStyle/>
-              <a:p>
-                <a:r>
-                  <a:rPr lang="en-US">
-                    <a:noFill/>
-                  </a:rPr>
-                  <a:t> </a:t>
-                </a:r>
-              </a:p>
-            </p:txBody>
-          </p:sp>
-        </mc:Fallback>
-      </mc:AlternateContent>
-    </p:spTree>
-    <p:extLst>
-      <p:ext uri="{BB962C8B-B14F-4D97-AF65-F5344CB8AC3E}">
-        <p14:creationId xmlns:p14="http://schemas.microsoft.com/office/powerpoint/2010/main" val="1836351049"/>
       </p:ext>
     </p:extLst>
   </p:cSld>

--- a/slides/Lecture_Chapter07.pptx
+++ b/slides/Lecture_Chapter07.pptx
@@ -7,7 +7,7 @@
   <p:sldIdLst>
     <p:sldId id="256" r:id="rId2"/>
     <p:sldId id="313" r:id="rId3"/>
-    <p:sldId id="478" r:id="rId4"/>
+    <p:sldId id="479" r:id="rId4"/>
     <p:sldId id="385" r:id="rId5"/>
     <p:sldId id="398" r:id="rId6"/>
     <p:sldId id="396" r:id="rId7"/>
@@ -127,7 +127,7 @@
           <p14:sldIdLst>
             <p14:sldId id="256"/>
             <p14:sldId id="313"/>
-            <p14:sldId id="478"/>
+            <p14:sldId id="479"/>
           </p14:sldIdLst>
         </p14:section>
         <p14:section name="Introduction" id="{226A1DFA-741C-4500-8EC5-5BCBA926DBFB}">
@@ -316,7 +316,7 @@
           <a:p>
             <a:fld id="{3E22BF2E-04DA-469E-97C5-BB68A0368813}" type="datetimeFigureOut">
               <a:rPr lang="en-US" smtClean="0"/>
-              <a:t>2/6/2026</a:t>
+              <a:t>2/19/2026</a:t>
             </a:fld>
             <a:endParaRPr lang="en-US"/>
           </a:p>
@@ -514,7 +514,7 @@
           <a:p>
             <a:fld id="{3E22BF2E-04DA-469E-97C5-BB68A0368813}" type="datetimeFigureOut">
               <a:rPr lang="en-US" smtClean="0"/>
-              <a:t>2/6/2026</a:t>
+              <a:t>2/19/2026</a:t>
             </a:fld>
             <a:endParaRPr lang="en-US"/>
           </a:p>
@@ -722,7 +722,7 @@
           <a:p>
             <a:fld id="{3E22BF2E-04DA-469E-97C5-BB68A0368813}" type="datetimeFigureOut">
               <a:rPr lang="en-US" smtClean="0"/>
-              <a:t>2/6/2026</a:t>
+              <a:t>2/19/2026</a:t>
             </a:fld>
             <a:endParaRPr lang="en-US"/>
           </a:p>
@@ -930,7 +930,7 @@
           <a:p>
             <a:fld id="{3E22BF2E-04DA-469E-97C5-BB68A0368813}" type="datetimeFigureOut">
               <a:rPr lang="en-US" smtClean="0"/>
-              <a:t>2/6/2026</a:t>
+              <a:t>2/19/2026</a:t>
             </a:fld>
             <a:endParaRPr lang="en-US"/>
           </a:p>
@@ -1205,7 +1205,7 @@
           <a:p>
             <a:fld id="{3E22BF2E-04DA-469E-97C5-BB68A0368813}" type="datetimeFigureOut">
               <a:rPr lang="en-US" smtClean="0"/>
-              <a:t>2/6/2026</a:t>
+              <a:t>2/19/2026</a:t>
             </a:fld>
             <a:endParaRPr lang="en-US"/>
           </a:p>
@@ -1470,7 +1470,7 @@
           <a:p>
             <a:fld id="{3E22BF2E-04DA-469E-97C5-BB68A0368813}" type="datetimeFigureOut">
               <a:rPr lang="en-US" smtClean="0"/>
-              <a:t>2/6/2026</a:t>
+              <a:t>2/19/2026</a:t>
             </a:fld>
             <a:endParaRPr lang="en-US"/>
           </a:p>
@@ -1882,7 +1882,7 @@
           <a:p>
             <a:fld id="{3E22BF2E-04DA-469E-97C5-BB68A0368813}" type="datetimeFigureOut">
               <a:rPr lang="en-US" smtClean="0"/>
-              <a:t>2/6/2026</a:t>
+              <a:t>2/19/2026</a:t>
             </a:fld>
             <a:endParaRPr lang="en-US"/>
           </a:p>
@@ -2023,7 +2023,7 @@
           <a:p>
             <a:fld id="{3E22BF2E-04DA-469E-97C5-BB68A0368813}" type="datetimeFigureOut">
               <a:rPr lang="en-US" smtClean="0"/>
-              <a:t>2/6/2026</a:t>
+              <a:t>2/19/2026</a:t>
             </a:fld>
             <a:endParaRPr lang="en-US"/>
           </a:p>
@@ -2136,7 +2136,7 @@
           <a:p>
             <a:fld id="{3E22BF2E-04DA-469E-97C5-BB68A0368813}" type="datetimeFigureOut">
               <a:rPr lang="en-US" smtClean="0"/>
-              <a:t>2/6/2026</a:t>
+              <a:t>2/19/2026</a:t>
             </a:fld>
             <a:endParaRPr lang="en-US"/>
           </a:p>
@@ -2447,7 +2447,7 @@
           <a:p>
             <a:fld id="{3E22BF2E-04DA-469E-97C5-BB68A0368813}" type="datetimeFigureOut">
               <a:rPr lang="en-US" smtClean="0"/>
-              <a:t>2/6/2026</a:t>
+              <a:t>2/19/2026</a:t>
             </a:fld>
             <a:endParaRPr lang="en-US"/>
           </a:p>
@@ -2735,7 +2735,7 @@
           <a:p>
             <a:fld id="{3E22BF2E-04DA-469E-97C5-BB68A0368813}" type="datetimeFigureOut">
               <a:rPr lang="en-US" smtClean="0"/>
-              <a:t>2/6/2026</a:t>
+              <a:t>2/19/2026</a:t>
             </a:fld>
             <a:endParaRPr lang="en-US"/>
           </a:p>
@@ -2976,7 +2976,7 @@
           <a:p>
             <a:fld id="{3E22BF2E-04DA-469E-97C5-BB68A0368813}" type="datetimeFigureOut">
               <a:rPr lang="en-US" smtClean="0"/>
-              <a:t>2/6/2026</a:t>
+              <a:t>2/19/2026</a:t>
             </a:fld>
             <a:endParaRPr lang="en-US"/>
           </a:p>
@@ -4367,8 +4367,8 @@
           </p:sp>
         </mc:Fallback>
       </mc:AlternateContent>
-      <mc:AlternateContent xmlns:mc="http://schemas.openxmlformats.org/markup-compatibility/2006" xmlns:a14="http://schemas.microsoft.com/office/drawing/2010/main">
-        <mc:Choice Requires="a14">
+      <mc:AlternateContent xmlns:mc="http://schemas.openxmlformats.org/markup-compatibility/2006">
+        <mc:Choice xmlns:a14="http://schemas.microsoft.com/office/drawing/2010/main" Requires="a14">
           <p:sp>
             <p:nvSpPr>
               <p:cNvPr id="3" name="Content Placeholder 2">
@@ -4385,10 +4385,15 @@
                 <p:ph idx="1"/>
               </p:nvPr>
             </p:nvSpPr>
-            <p:spPr/>
+            <p:spPr>
+              <a:xfrm>
+                <a:off x="838200" y="1397331"/>
+                <a:ext cx="10515600" cy="4561260"/>
+              </a:xfrm>
+            </p:spPr>
             <p:txBody>
               <a:bodyPr>
-                <a:normAutofit fontScale="92500" lnSpcReduction="20000"/>
+                <a:normAutofit lnSpcReduction="10000"/>
               </a:bodyPr>
               <a:lstStyle/>
               <a:p>
@@ -4425,80 +4430,97 @@
               <a:p>
                 <a:pPr lvl="1"/>
                 <a:r>
+                  <a:rPr lang="en-US" b="1" dirty="0"/>
+                  <a:t>On policy</a:t>
+                </a:r>
+                <a:r>
                   <a:rPr lang="en-US" dirty="0"/>
-                  <a:t>On policy</a:t>
+                  <a:t>: The policy needs to keep exploring (e.g., an </a:t>
+                </a:r>
+                <a14:m>
+                  <m:oMath xmlns:m="http://schemas.openxmlformats.org/officeDocument/2006/math">
+                    <m:r>
+                      <a:rPr lang="en-US" i="1">
+                        <a:latin typeface="Cambria Math" panose="02040503050406030204" pitchFamily="18" charset="0"/>
+                      </a:rPr>
+                      <m:t>𝜖</m:t>
+                    </m:r>
+                  </m:oMath>
+                </a14:m>
+                <a:r>
+                  <a:rPr lang="en-US" dirty="0"/>
+                  <a:t>-greedy policy)</a:t>
                 </a:r>
               </a:p>
               <a:p>
                 <a:pPr lvl="1"/>
                 <a:r>
-                  <a:rPr lang="en-US" b="1" dirty="0"/>
-                  <a:t>Remember</a:t>
-                </a:r>
-                <a:r>
                   <a:rPr lang="en-US" dirty="0"/>
-                  <a:t>: The policy needs to keep exploring so we typically learn an </a:t>
+                  <a:t>Should probably be called </a:t>
+                </a:r>
+                <a:r>
+                  <a:rPr lang="en-US" dirty="0" err="1"/>
+                  <a:t>Sarrrrr</a:t>
+                </a:r>
+                <a:r>
+                  <a:rPr lang="en-US" dirty="0"/>
+                  <a:t>...</a:t>
+                </a:r>
+                <a:r>
+                  <a:rPr lang="en-US" dirty="0" err="1"/>
+                  <a:t>rsa</a:t>
+                </a:r>
+                <a:r>
+                  <a:rPr lang="en-US" dirty="0"/>
+                  <a:t> with </a:t>
                 </a:r>
                 <a14:m>
                   <m:oMath xmlns:m="http://schemas.openxmlformats.org/officeDocument/2006/math">
                     <m:r>
-                      <a:rPr lang="en-US" i="1">
-                        <a:latin typeface="Cambria Math" panose="02040503050406030204" pitchFamily="18" charset="0"/>
-                      </a:rPr>
-                      <m:t>𝜖</m:t>
+                      <a:rPr lang="en-US" b="0" i="1" smtClean="0">
+                        <a:latin typeface="Cambria Math" panose="02040503050406030204" pitchFamily="18" charset="0"/>
+                      </a:rPr>
+                      <m:t>𝑛</m:t>
                     </m:r>
                   </m:oMath>
                 </a14:m>
                 <a:r>
                   <a:rPr lang="en-US" dirty="0"/>
-                  <a:t>-greedy policy</a:t>
-                </a:r>
-              </a:p>
-              <a:p>
-                <a:pPr lvl="1"/>
+                  <a:t> </a:t>
+                </a:r>
+                <a:r>
+                  <a:rPr lang="en-US" dirty="0" err="1"/>
+                  <a:t>rs</a:t>
+                </a:r>
                 <a:r>
                   <a:rPr lang="en-US" dirty="0"/>
-                  <a:t>Use state-action pairs and learns </a:t>
-                </a:r>
-                <a14:m>
-                  <m:oMath xmlns:m="http://schemas.openxmlformats.org/officeDocument/2006/math">
-                    <m:r>
-                      <a:rPr lang="en-US" i="1" dirty="0" smtClean="0">
-                        <a:latin typeface="Cambria Math" panose="02040503050406030204" pitchFamily="18" charset="0"/>
-                      </a:rPr>
-                      <m:t>𝑄</m:t>
-                    </m:r>
-                  </m:oMath>
-                </a14:m>
-                <a:r>
-                  <a:rPr lang="en-US" dirty="0"/>
-                  <a:t> so we can find the </a:t>
-                </a:r>
-                <a14:m>
-                  <m:oMath xmlns:m="http://schemas.openxmlformats.org/officeDocument/2006/math">
-                    <m:r>
-                      <a:rPr lang="en-US" i="1">
-                        <a:latin typeface="Cambria Math" panose="02040503050406030204" pitchFamily="18" charset="0"/>
-                      </a:rPr>
-                      <m:t>𝜖</m:t>
-                    </m:r>
-                  </m:oMath>
-                </a14:m>
-                <a:r>
-                  <a:rPr lang="en-US" dirty="0"/>
-                  <a:t>-greedy policy</a:t>
+                  <a:t>.</a:t>
                 </a:r>
               </a:p>
               <a:p>
                 <a:pPr marL="457200" lvl="1" indent="0">
                   <a:buNone/>
                 </a:pPr>
-                <a:endParaRPr lang="en-US" dirty="0"/>
+                <a:r>
+                  <a:rPr lang="en-US" dirty="0"/>
+                  <a:t> </a:t>
+                </a:r>
               </a:p>
               <a:p>
+                <a:pPr lvl="1"/>
+                <a14:m>
+                  <m:oMath xmlns:m="http://schemas.openxmlformats.org/officeDocument/2006/math">
+                    <m:r>
+                      <a:rPr lang="en-US" b="0" i="1" dirty="0">
+                        <a:latin typeface="Cambria Math" panose="02040503050406030204" pitchFamily="18" charset="0"/>
+                      </a:rPr>
+                      <m:t>𝑛</m:t>
+                    </m:r>
+                  </m:oMath>
+                </a14:m>
                 <a:r>
                   <a:rPr lang="en-US" dirty="0"/>
-                  <a:t>Return estimate (redefined using </a:t>
+                  <a:t>-step return estimate used as the target (redefined using </a:t>
                 </a:r>
                 <a14:m>
                   <m:oMath xmlns:m="http://schemas.openxmlformats.org/officeDocument/2006/math">
@@ -4865,6 +4887,7 @@
                 <a:endParaRPr lang="en-US" dirty="0"/>
               </a:p>
               <a:p>
+                <a:pPr lvl="1"/>
                 <a:r>
                   <a:rPr lang="en-US" dirty="0"/>
                   <a:t>Update rule:</a:t>
@@ -5193,7 +5216,7 @@
             </p:txBody>
           </p:sp>
         </mc:Choice>
-        <mc:Fallback xmlns="">
+        <mc:Fallback>
           <p:sp>
             <p:nvSpPr>
               <p:cNvPr id="3" name="Content Placeholder 2">
@@ -5211,10 +5234,14 @@
               </p:nvPr>
             </p:nvSpPr>
             <p:spPr>
+              <a:xfrm>
+                <a:off x="838200" y="1397331"/>
+                <a:ext cx="10515600" cy="4561260"/>
+              </a:xfrm>
               <a:blipFill>
                 <a:blip r:embed="rId3"/>
                 <a:stretch>
-                  <a:fillRect l="-1043" t="-3189" r="-870"/>
+                  <a:fillRect l="-1217" t="-2941"/>
                 </a:stretch>
               </a:blipFill>
             </p:spPr>
@@ -5233,8 +5260,8 @@
           </p:sp>
         </mc:Fallback>
       </mc:AlternateContent>
-      <mc:AlternateContent xmlns:mc="http://schemas.openxmlformats.org/markup-compatibility/2006" xmlns:a14="http://schemas.microsoft.com/office/drawing/2010/main">
-        <mc:Choice Requires="a14">
+      <mc:AlternateContent xmlns:mc="http://schemas.openxmlformats.org/markup-compatibility/2006">
+        <mc:Choice xmlns:a14="http://schemas.microsoft.com/office/drawing/2010/main" Requires="a14">
           <p:sp>
             <p:nvSpPr>
               <p:cNvPr id="4" name="Speech Bubble: Rectangle with Corners Rounded 3">
@@ -5249,13 +5276,13 @@
             </p:nvSpPr>
             <p:spPr>
               <a:xfrm>
-                <a:off x="8462748" y="578972"/>
+                <a:off x="5554656" y="321312"/>
                 <a:ext cx="2327171" cy="818358"/>
               </a:xfrm>
               <a:prstGeom prst="wedgeRoundRectCallout">
                 <a:avLst>
-                  <a:gd name="adj1" fmla="val -58080"/>
-                  <a:gd name="adj2" fmla="val 74886"/>
+                  <a:gd name="adj1" fmla="val 44338"/>
+                  <a:gd name="adj2" fmla="val 81297"/>
                   <a:gd name="adj3" fmla="val 16667"/>
                 </a:avLst>
               </a:prstGeom>
@@ -5287,7 +5314,7 @@
                 </a:r>
                 <a:r>
                   <a:rPr lang="en-US" sz="1200" dirty="0"/>
-                  <a:t>: (0) has nothing to do with the steps, but means that </a:t>
+                  <a:t>: (0) is not the number of steps but means that </a:t>
                 </a:r>
                 <a14:m>
                   <m:oMath xmlns:m="http://schemas.openxmlformats.org/officeDocument/2006/math">
@@ -5313,7 +5340,7 @@
             </p:txBody>
           </p:sp>
         </mc:Choice>
-        <mc:Fallback xmlns="">
+        <mc:Fallback>
           <p:sp>
             <p:nvSpPr>
               <p:cNvPr id="4" name="Speech Bubble: Rectangle with Corners Rounded 3">
@@ -5330,13 +5357,13 @@
             </p:nvSpPr>
             <p:spPr>
               <a:xfrm>
-                <a:off x="8462748" y="578972"/>
+                <a:off x="5554656" y="321312"/>
                 <a:ext cx="2327171" cy="818358"/>
               </a:xfrm>
               <a:prstGeom prst="wedgeRoundRectCallout">
                 <a:avLst>
-                  <a:gd name="adj1" fmla="val -58080"/>
-                  <a:gd name="adj2" fmla="val 74886"/>
+                  <a:gd name="adj1" fmla="val 44338"/>
+                  <a:gd name="adj2" fmla="val 81297"/>
                   <a:gd name="adj3" fmla="val 16667"/>
                 </a:avLst>
               </a:prstGeom>
@@ -5362,6 +5389,608 @@
           </p:sp>
         </mc:Fallback>
       </mc:AlternateContent>
+      <p:grpSp>
+        <p:nvGrpSpPr>
+          <p:cNvPr id="5" name="Group 4">
+            <a:extLst>
+              <a:ext uri="{FF2B5EF4-FFF2-40B4-BE49-F238E27FC236}">
+                <a16:creationId xmlns:a16="http://schemas.microsoft.com/office/drawing/2014/main" id="{720993E9-4E86-02DE-66E1-B419B2709FF9}"/>
+              </a:ext>
+            </a:extLst>
+          </p:cNvPr>
+          <p:cNvGrpSpPr/>
+          <p:nvPr/>
+        </p:nvGrpSpPr>
+        <p:grpSpPr>
+          <a:xfrm>
+            <a:off x="9576769" y="176093"/>
+            <a:ext cx="2420910" cy="2140608"/>
+            <a:chOff x="9576769" y="176093"/>
+            <a:chExt cx="2420910" cy="2140608"/>
+          </a:xfrm>
+        </p:grpSpPr>
+        <p:grpSp>
+          <p:nvGrpSpPr>
+            <p:cNvPr id="6" name="Group 5">
+              <a:extLst>
+                <a:ext uri="{FF2B5EF4-FFF2-40B4-BE49-F238E27FC236}">
+                  <a16:creationId xmlns:a16="http://schemas.microsoft.com/office/drawing/2014/main" id="{9B1A94A5-7EE7-37CC-E728-AF66A80A33AA}"/>
+                </a:ext>
+              </a:extLst>
+            </p:cNvPr>
+            <p:cNvGrpSpPr/>
+            <p:nvPr/>
+          </p:nvGrpSpPr>
+          <p:grpSpPr>
+            <a:xfrm>
+              <a:off x="9576769" y="204828"/>
+              <a:ext cx="2310430" cy="2111873"/>
+              <a:chOff x="8990601" y="218543"/>
+              <a:chExt cx="3001301" cy="2828670"/>
+            </a:xfrm>
+          </p:grpSpPr>
+          <p:pic>
+            <p:nvPicPr>
+              <p:cNvPr id="11" name="Content Placeholder 4">
+                <a:extLst>
+                  <a:ext uri="{FF2B5EF4-FFF2-40B4-BE49-F238E27FC236}">
+                    <a16:creationId xmlns:a16="http://schemas.microsoft.com/office/drawing/2014/main" id="{BF760BA3-F830-BA0D-4894-05F51EBE69B0}"/>
+                  </a:ext>
+                </a:extLst>
+              </p:cNvPr>
+              <p:cNvPicPr>
+                <a:picLocks noChangeAspect="1"/>
+              </p:cNvPicPr>
+              <p:nvPr/>
+            </p:nvPicPr>
+            <p:blipFill>
+              <a:blip r:embed="rId5"/>
+              <a:stretch>
+                <a:fillRect/>
+              </a:stretch>
+            </p:blipFill>
+            <p:spPr>
+              <a:xfrm>
+                <a:off x="8990601" y="218543"/>
+                <a:ext cx="2936007" cy="2828670"/>
+              </a:xfrm>
+              <a:prstGeom prst="rect">
+                <a:avLst/>
+              </a:prstGeom>
+            </p:spPr>
+          </p:pic>
+          <p:sp>
+            <p:nvSpPr>
+              <p:cNvPr id="12" name="TextBox 11">
+                <a:extLst>
+                  <a:ext uri="{FF2B5EF4-FFF2-40B4-BE49-F238E27FC236}">
+                    <a16:creationId xmlns:a16="http://schemas.microsoft.com/office/drawing/2014/main" id="{936AB597-F7B2-20CF-B4CE-D97C11B92DBA}"/>
+                  </a:ext>
+                </a:extLst>
+              </p:cNvPr>
+              <p:cNvSpPr txBox="1"/>
+              <p:nvPr/>
+            </p:nvSpPr>
+            <p:spPr>
+              <a:xfrm>
+                <a:off x="10107262" y="1309193"/>
+                <a:ext cx="687748" cy="453464"/>
+              </a:xfrm>
+              <a:prstGeom prst="rect">
+                <a:avLst/>
+              </a:prstGeom>
+            </p:spPr>
+            <p:style>
+              <a:lnRef idx="3">
+                <a:schemeClr val="lt1"/>
+              </a:lnRef>
+              <a:fillRef idx="1">
+                <a:schemeClr val="accent2"/>
+              </a:fillRef>
+              <a:effectRef idx="1">
+                <a:schemeClr val="accent2"/>
+              </a:effectRef>
+              <a:fontRef idx="minor">
+                <a:schemeClr val="lt1"/>
+              </a:fontRef>
+            </p:style>
+            <p:txBody>
+              <a:bodyPr wrap="square" rtlCol="0">
+                <a:spAutoFit/>
+              </a:bodyPr>
+              <a:lstStyle/>
+              <a:p>
+                <a:pPr algn="ctr"/>
+                <a:r>
+                  <a:rPr lang="en-US" sz="1600" dirty="0"/>
+                  <a:t>GPI</a:t>
+                </a:r>
+              </a:p>
+            </p:txBody>
+          </p:sp>
+          <p:sp>
+            <p:nvSpPr>
+              <p:cNvPr id="13" name="Rectangle 12">
+                <a:extLst>
+                  <a:ext uri="{FF2B5EF4-FFF2-40B4-BE49-F238E27FC236}">
+                    <a16:creationId xmlns:a16="http://schemas.microsoft.com/office/drawing/2014/main" id="{7EF051C9-DDCC-7485-1E4C-E964BDF6ACEF}"/>
+                  </a:ext>
+                </a:extLst>
+              </p:cNvPr>
+              <p:cNvSpPr/>
+              <p:nvPr/>
+            </p:nvSpPr>
+            <p:spPr>
+              <a:xfrm>
+                <a:off x="8990601" y="218543"/>
+                <a:ext cx="3001301" cy="2727081"/>
+              </a:xfrm>
+              <a:prstGeom prst="rect">
+                <a:avLst/>
+              </a:prstGeom>
+              <a:noFill/>
+              <a:ln w="28575" cap="flat" cmpd="sng" algn="ctr">
+                <a:solidFill>
+                  <a:schemeClr val="accent2"/>
+                </a:solidFill>
+                <a:prstDash val="solid"/>
+                <a:round/>
+                <a:headEnd type="none" w="med" len="med"/>
+                <a:tailEnd type="none" w="med" len="med"/>
+              </a:ln>
+            </p:spPr>
+            <p:style>
+              <a:lnRef idx="0">
+                <a:scrgbClr r="0" g="0" b="0"/>
+              </a:lnRef>
+              <a:fillRef idx="0">
+                <a:scrgbClr r="0" g="0" b="0"/>
+              </a:fillRef>
+              <a:effectRef idx="0">
+                <a:scrgbClr r="0" g="0" b="0"/>
+              </a:effectRef>
+              <a:fontRef idx="minor">
+                <a:schemeClr val="accent2"/>
+              </a:fontRef>
+            </p:style>
+            <p:txBody>
+              <a:bodyPr rtlCol="0" anchor="ctr"/>
+              <a:lstStyle/>
+              <a:p>
+                <a:pPr algn="ctr"/>
+                <a:endParaRPr lang="en-US"/>
+              </a:p>
+            </p:txBody>
+          </p:sp>
+        </p:grpSp>
+        <p:sp>
+          <p:nvSpPr>
+            <p:cNvPr id="7" name="Rectangle 6">
+              <a:extLst>
+                <a:ext uri="{FF2B5EF4-FFF2-40B4-BE49-F238E27FC236}">
+                  <a16:creationId xmlns:a16="http://schemas.microsoft.com/office/drawing/2014/main" id="{C1555E4A-A866-1530-A9FD-F8FF4073B977}"/>
+                </a:ext>
+              </a:extLst>
+            </p:cNvPr>
+            <p:cNvSpPr/>
+            <p:nvPr/>
+          </p:nvSpPr>
+          <p:spPr>
+            <a:xfrm>
+              <a:off x="10088381" y="242303"/>
+              <a:ext cx="1304144" cy="188963"/>
+            </a:xfrm>
+            <a:prstGeom prst="rect">
+              <a:avLst/>
+            </a:prstGeom>
+            <a:solidFill>
+              <a:schemeClr val="bg1"/>
+            </a:solidFill>
+            <a:ln>
+              <a:noFill/>
+            </a:ln>
+          </p:spPr>
+          <p:style>
+            <a:lnRef idx="2">
+              <a:schemeClr val="accent1">
+                <a:shade val="15000"/>
+              </a:schemeClr>
+            </a:lnRef>
+            <a:fillRef idx="1">
+              <a:schemeClr val="accent1"/>
+            </a:fillRef>
+            <a:effectRef idx="0">
+              <a:schemeClr val="accent1"/>
+            </a:effectRef>
+            <a:fontRef idx="minor">
+              <a:schemeClr val="lt1"/>
+            </a:fontRef>
+          </p:style>
+          <p:txBody>
+            <a:bodyPr rtlCol="0" anchor="ctr"/>
+            <a:lstStyle/>
+            <a:p>
+              <a:pPr algn="ctr"/>
+              <a:endParaRPr lang="en-US"/>
+            </a:p>
+          </p:txBody>
+        </p:sp>
+        <p:cxnSp>
+          <p:nvCxnSpPr>
+            <p:cNvPr id="8" name="Straight Connector 7">
+              <a:extLst>
+                <a:ext uri="{FF2B5EF4-FFF2-40B4-BE49-F238E27FC236}">
+                  <a16:creationId xmlns:a16="http://schemas.microsoft.com/office/drawing/2014/main" id="{599A1598-3094-4269-64F8-0D5E916C2192}"/>
+                </a:ext>
+              </a:extLst>
+            </p:cNvPr>
+            <p:cNvCxnSpPr>
+              <a:cxnSpLocks/>
+            </p:cNvCxnSpPr>
+            <p:nvPr/>
+          </p:nvCxnSpPr>
+          <p:spPr>
+            <a:xfrm flipH="1">
+              <a:off x="10196205" y="1556334"/>
+              <a:ext cx="978962" cy="171999"/>
+            </a:xfrm>
+            <a:prstGeom prst="line">
+              <a:avLst/>
+            </a:prstGeom>
+            <a:ln>
+              <a:solidFill>
+                <a:schemeClr val="accent3"/>
+              </a:solidFill>
+            </a:ln>
+          </p:spPr>
+          <p:style>
+            <a:lnRef idx="2">
+              <a:schemeClr val="dk1"/>
+            </a:lnRef>
+            <a:fillRef idx="0">
+              <a:schemeClr val="dk1"/>
+            </a:fillRef>
+            <a:effectRef idx="1">
+              <a:schemeClr val="dk1"/>
+            </a:effectRef>
+            <a:fontRef idx="minor">
+              <a:schemeClr val="tx1"/>
+            </a:fontRef>
+          </p:style>
+        </p:cxnSp>
+        <mc:AlternateContent xmlns:mc="http://schemas.openxmlformats.org/markup-compatibility/2006">
+          <mc:Choice xmlns:a14="http://schemas.microsoft.com/office/drawing/2010/main" Requires="a14">
+            <p:sp>
+              <p:nvSpPr>
+                <p:cNvPr id="9" name="TextBox 8">
+                  <a:extLst>
+                    <a:ext uri="{FF2B5EF4-FFF2-40B4-BE49-F238E27FC236}">
+                      <a16:creationId xmlns:a16="http://schemas.microsoft.com/office/drawing/2014/main" id="{267EF7DE-A275-31E2-A378-8EF79253A2DA}"/>
+                    </a:ext>
+                  </a:extLst>
+                </p:cNvPr>
+                <p:cNvSpPr txBox="1"/>
+                <p:nvPr/>
+              </p:nvSpPr>
+              <p:spPr>
+                <a:xfrm>
+                  <a:off x="9777369" y="1338544"/>
+                  <a:ext cx="1733565" cy="276999"/>
+                </a:xfrm>
+                <a:prstGeom prst="rect">
+                  <a:avLst/>
+                </a:prstGeom>
+                <a:noFill/>
+              </p:spPr>
+              <p:txBody>
+                <a:bodyPr wrap="square" rtlCol="0">
+                  <a:spAutoFit/>
+                </a:bodyPr>
+                <a:lstStyle/>
+                <a:p>
+                  <a:pPr/>
+                  <a14:m>
+                    <m:oMathPara xmlns:m="http://schemas.openxmlformats.org/officeDocument/2006/math">
+                      <m:oMathParaPr>
+                        <m:jc m:val="centerGroup"/>
+                      </m:oMathParaPr>
+                      <m:oMath xmlns:m="http://schemas.openxmlformats.org/officeDocument/2006/math">
+                        <m:r>
+                          <m:rPr>
+                            <m:sty m:val="p"/>
+                          </m:rPr>
+                          <a:rPr lang="en-US" sz="1200" b="0" i="1" smtClean="0">
+                            <a:solidFill>
+                              <a:schemeClr val="accent3"/>
+                            </a:solidFill>
+                            <a:latin typeface="Cambria Math" panose="02040503050406030204" pitchFamily="18" charset="0"/>
+                          </a:rPr>
+                          <m:t>π</m:t>
+                        </m:r>
+                        <m:r>
+                          <a:rPr lang="en-US" sz="1200" b="0" i="1" smtClean="0">
+                            <a:solidFill>
+                              <a:schemeClr val="accent3"/>
+                            </a:solidFill>
+                            <a:latin typeface="Cambria Math" panose="02040503050406030204" pitchFamily="18" charset="0"/>
+                            <a:ea typeface="Cambria Math" panose="02040503050406030204" pitchFamily="18" charset="0"/>
+                          </a:rPr>
+                          <m:t>⇝</m:t>
+                        </m:r>
+                        <m:r>
+                          <m:rPr>
+                            <m:sty m:val="p"/>
+                          </m:rPr>
+                          <a:rPr lang="en-US" sz="1200" b="0" i="1" smtClean="0">
+                            <a:solidFill>
+                              <a:schemeClr val="accent3"/>
+                            </a:solidFill>
+                            <a:latin typeface="Cambria Math" panose="02040503050406030204" pitchFamily="18" charset="0"/>
+                          </a:rPr>
+                          <m:t>ϵ</m:t>
+                        </m:r>
+                        <m:r>
+                          <m:rPr>
+                            <m:nor/>
+                          </m:rPr>
+                          <a:rPr lang="en-US" sz="1200" b="0" i="0" smtClean="0">
+                            <a:solidFill>
+                              <a:schemeClr val="accent3"/>
+                            </a:solidFill>
+                            <a:latin typeface="Cambria Math" panose="02040503050406030204" pitchFamily="18" charset="0"/>
+                          </a:rPr>
+                          <m:t>-</m:t>
+                        </m:r>
+                        <m:r>
+                          <m:rPr>
+                            <m:nor/>
+                          </m:rPr>
+                          <a:rPr lang="en-US" sz="1200" b="0" i="0" smtClean="0">
+                            <a:solidFill>
+                              <a:schemeClr val="accent3"/>
+                            </a:solidFill>
+                            <a:latin typeface="Cambria Math" panose="02040503050406030204" pitchFamily="18" charset="0"/>
+                          </a:rPr>
+                          <m:t>greedy</m:t>
+                        </m:r>
+                        <m:r>
+                          <a:rPr lang="en-US" sz="1200" b="0" i="1" smtClean="0">
+                            <a:solidFill>
+                              <a:schemeClr val="accent3"/>
+                            </a:solidFill>
+                            <a:latin typeface="Cambria Math" panose="02040503050406030204" pitchFamily="18" charset="0"/>
+                          </a:rPr>
+                          <m:t>(</m:t>
+                        </m:r>
+                        <m:r>
+                          <a:rPr lang="en-US" sz="1200" b="0" i="1" smtClean="0">
+                            <a:solidFill>
+                              <a:schemeClr val="accent3"/>
+                            </a:solidFill>
+                            <a:latin typeface="Cambria Math" panose="02040503050406030204" pitchFamily="18" charset="0"/>
+                          </a:rPr>
+                          <m:t>𝑄</m:t>
+                        </m:r>
+                        <m:r>
+                          <a:rPr lang="en-US" sz="1200" b="0" i="1" smtClean="0">
+                            <a:solidFill>
+                              <a:schemeClr val="accent3"/>
+                            </a:solidFill>
+                            <a:latin typeface="Cambria Math" panose="02040503050406030204" pitchFamily="18" charset="0"/>
+                          </a:rPr>
+                          <m:t>)</m:t>
+                        </m:r>
+                      </m:oMath>
+                    </m:oMathPara>
+                  </a14:m>
+                  <a:endParaRPr lang="en-US" sz="1200" dirty="0">
+                    <a:solidFill>
+                      <a:schemeClr val="accent3"/>
+                    </a:solidFill>
+                  </a:endParaRPr>
+                </a:p>
+              </p:txBody>
+            </p:sp>
+          </mc:Choice>
+          <mc:Fallback>
+            <p:sp>
+              <p:nvSpPr>
+                <p:cNvPr id="9" name="TextBox 8">
+                  <a:extLst>
+                    <a:ext uri="{FF2B5EF4-FFF2-40B4-BE49-F238E27FC236}">
+                      <a16:creationId xmlns:a16="http://schemas.microsoft.com/office/drawing/2014/main" id="{267EF7DE-A275-31E2-A378-8EF79253A2DA}"/>
+                    </a:ext>
+                  </a:extLst>
+                </p:cNvPr>
+                <p:cNvSpPr txBox="1">
+                  <a:spLocks noRot="1" noChangeAspect="1" noMove="1" noResize="1" noEditPoints="1" noAdjustHandles="1" noChangeArrowheads="1" noChangeShapeType="1" noTextEdit="1"/>
+                </p:cNvSpPr>
+                <p:nvPr/>
+              </p:nvSpPr>
+              <p:spPr>
+                <a:xfrm>
+                  <a:off x="9777369" y="1338544"/>
+                  <a:ext cx="1733565" cy="276999"/>
+                </a:xfrm>
+                <a:prstGeom prst="rect">
+                  <a:avLst/>
+                </a:prstGeom>
+                <a:blipFill>
+                  <a:blip r:embed="rId6"/>
+                  <a:stretch>
+                    <a:fillRect b="-8889"/>
+                  </a:stretch>
+                </a:blipFill>
+              </p:spPr>
+              <p:txBody>
+                <a:bodyPr/>
+                <a:lstStyle/>
+                <a:p>
+                  <a:r>
+                    <a:rPr lang="en-US">
+                      <a:noFill/>
+                    </a:rPr>
+                    <a:t> </a:t>
+                  </a:r>
+                </a:p>
+              </p:txBody>
+            </p:sp>
+          </mc:Fallback>
+        </mc:AlternateContent>
+        <mc:AlternateContent xmlns:mc="http://schemas.openxmlformats.org/markup-compatibility/2006">
+          <mc:Choice xmlns:a14="http://schemas.microsoft.com/office/drawing/2010/main" Requires="a14">
+            <p:sp>
+              <p:nvSpPr>
+                <p:cNvPr id="10" name="TextBox 9">
+                  <a:extLst>
+                    <a:ext uri="{FF2B5EF4-FFF2-40B4-BE49-F238E27FC236}">
+                      <a16:creationId xmlns:a16="http://schemas.microsoft.com/office/drawing/2014/main" id="{B1529777-63A6-40DE-C0AC-7D83854B3AD2}"/>
+                    </a:ext>
+                  </a:extLst>
+                </p:cNvPr>
+                <p:cNvSpPr txBox="1"/>
+                <p:nvPr/>
+              </p:nvSpPr>
+              <p:spPr>
+                <a:xfrm>
+                  <a:off x="9576769" y="176093"/>
+                  <a:ext cx="2420910" cy="369332"/>
+                </a:xfrm>
+                <a:prstGeom prst="rect">
+                  <a:avLst/>
+                </a:prstGeom>
+                <a:noFill/>
+              </p:spPr>
+              <p:txBody>
+                <a:bodyPr wrap="square" rtlCol="0">
+                  <a:spAutoFit/>
+                </a:bodyPr>
+                <a:lstStyle/>
+                <a:p>
+                  <a14:m>
+                    <m:oMath xmlns:m="http://schemas.openxmlformats.org/officeDocument/2006/math">
+                      <m:r>
+                        <a:rPr lang="en-US" b="1" i="1" smtClean="0">
+                          <a:solidFill>
+                            <a:schemeClr val="accent3"/>
+                          </a:solidFill>
+                          <a:latin typeface="Cambria Math" panose="02040503050406030204" pitchFamily="18" charset="0"/>
+                        </a:rPr>
+                        <m:t>𝒏</m:t>
+                      </m:r>
+                    </m:oMath>
+                  </a14:m>
+                  <a:r>
+                    <a:rPr lang="en-US" b="1" dirty="0">
+                      <a:solidFill>
+                        <a:schemeClr val="accent3"/>
+                      </a:solidFill>
+                    </a:rPr>
+                    <a:t>-step TD prediction</a:t>
+                  </a:r>
+                </a:p>
+              </p:txBody>
+            </p:sp>
+          </mc:Choice>
+          <mc:Fallback>
+            <p:sp>
+              <p:nvSpPr>
+                <p:cNvPr id="10" name="TextBox 9">
+                  <a:extLst>
+                    <a:ext uri="{FF2B5EF4-FFF2-40B4-BE49-F238E27FC236}">
+                      <a16:creationId xmlns:a16="http://schemas.microsoft.com/office/drawing/2014/main" id="{B1529777-63A6-40DE-C0AC-7D83854B3AD2}"/>
+                    </a:ext>
+                  </a:extLst>
+                </p:cNvPr>
+                <p:cNvSpPr txBox="1">
+                  <a:spLocks noRot="1" noChangeAspect="1" noMove="1" noResize="1" noEditPoints="1" noAdjustHandles="1" noChangeArrowheads="1" noChangeShapeType="1" noTextEdit="1"/>
+                </p:cNvSpPr>
+                <p:nvPr/>
+              </p:nvSpPr>
+              <p:spPr>
+                <a:xfrm>
+                  <a:off x="9576769" y="176093"/>
+                  <a:ext cx="2420910" cy="369332"/>
+                </a:xfrm>
+                <a:prstGeom prst="rect">
+                  <a:avLst/>
+                </a:prstGeom>
+                <a:blipFill>
+                  <a:blip r:embed="rId7"/>
+                  <a:stretch>
+                    <a:fillRect t="-8333" b="-28333"/>
+                  </a:stretch>
+                </a:blipFill>
+              </p:spPr>
+              <p:txBody>
+                <a:bodyPr/>
+                <a:lstStyle/>
+                <a:p>
+                  <a:r>
+                    <a:rPr lang="en-US">
+                      <a:noFill/>
+                    </a:rPr>
+                    <a:t> </a:t>
+                  </a:r>
+                </a:p>
+              </p:txBody>
+            </p:sp>
+          </mc:Fallback>
+        </mc:AlternateContent>
+      </p:grpSp>
+      <p:sp>
+        <p:nvSpPr>
+          <p:cNvPr id="14" name="Speech Bubble: Rectangle with Corners Rounded 13">
+            <a:extLst>
+              <a:ext uri="{FF2B5EF4-FFF2-40B4-BE49-F238E27FC236}">
+                <a16:creationId xmlns:a16="http://schemas.microsoft.com/office/drawing/2014/main" id="{BF7655E7-BCC7-BD82-23F6-1FC9C85D7D3D}"/>
+              </a:ext>
+            </a:extLst>
+          </p:cNvPr>
+          <p:cNvSpPr/>
+          <p:nvPr/>
+        </p:nvSpPr>
+        <p:spPr>
+          <a:xfrm>
+            <a:off x="9644917" y="3367331"/>
+            <a:ext cx="2260166" cy="621260"/>
+          </a:xfrm>
+          <a:prstGeom prst="wedgeRoundRectCallout">
+            <a:avLst>
+              <a:gd name="adj1" fmla="val -29738"/>
+              <a:gd name="adj2" fmla="val 75802"/>
+              <a:gd name="adj3" fmla="val 16667"/>
+            </a:avLst>
+          </a:prstGeom>
+        </p:spPr>
+        <p:style>
+          <a:lnRef idx="2">
+            <a:schemeClr val="accent1">
+              <a:shade val="15000"/>
+            </a:schemeClr>
+          </a:lnRef>
+          <a:fillRef idx="1">
+            <a:schemeClr val="accent1"/>
+          </a:fillRef>
+          <a:effectRef idx="0">
+            <a:schemeClr val="accent1"/>
+          </a:effectRef>
+          <a:fontRef idx="minor">
+            <a:schemeClr val="lt1"/>
+          </a:fontRef>
+        </p:style>
+        <p:txBody>
+          <a:bodyPr rtlCol="0" anchor="ctr"/>
+          <a:lstStyle/>
+          <a:p>
+            <a:pPr algn="ctr"/>
+            <a:r>
+              <a:rPr lang="en-US" sz="1400" dirty="0"/>
+              <a:t>This is the extra action Sarsa need.</a:t>
+            </a:r>
+          </a:p>
+        </p:txBody>
+      </p:sp>
     </p:spTree>
     <p:extLst>
       <p:ext uri="{BB962C8B-B14F-4D97-AF65-F5344CB8AC3E}">
@@ -6093,10 +6722,10 @@
         </p:nvGrpSpPr>
         <p:grpSpPr>
           <a:xfrm>
-            <a:off x="7549272" y="1946300"/>
-            <a:ext cx="4572390" cy="4775368"/>
-            <a:chOff x="7549272" y="1946300"/>
-            <a:chExt cx="4572390" cy="4775368"/>
+            <a:off x="9856838" y="4018671"/>
+            <a:ext cx="2264824" cy="2702997"/>
+            <a:chOff x="9856838" y="4018671"/>
+            <a:chExt cx="2264824" cy="2702997"/>
           </a:xfrm>
         </p:grpSpPr>
         <mc:AlternateContent xmlns:mc="http://schemas.openxmlformats.org/markup-compatibility/2006" xmlns:a14="http://schemas.microsoft.com/office/drawing/2010/main">
@@ -6345,54 +6974,169 @@
             </p:sp>
           </mc:Fallback>
         </mc:AlternateContent>
-        <p:sp>
-          <p:nvSpPr>
-            <p:cNvPr id="10" name="Rectangle 9">
-              <a:extLst>
-                <a:ext uri="{FF2B5EF4-FFF2-40B4-BE49-F238E27FC236}">
-                  <a16:creationId xmlns:a16="http://schemas.microsoft.com/office/drawing/2014/main" id="{6C5221A8-2300-AE4C-B12E-E7B10DAE2C2B}"/>
-                </a:ext>
-              </a:extLst>
-            </p:cNvPr>
-            <p:cNvSpPr/>
-            <p:nvPr/>
-          </p:nvSpPr>
-          <p:spPr>
-            <a:xfrm>
-              <a:off x="7549272" y="1946300"/>
-              <a:ext cx="589586" cy="196607"/>
-            </a:xfrm>
-            <a:prstGeom prst="rect">
-              <a:avLst/>
-            </a:prstGeom>
-            <a:noFill/>
-          </p:spPr>
-          <p:style>
-            <a:lnRef idx="2">
-              <a:schemeClr val="accent1">
-                <a:shade val="15000"/>
-              </a:schemeClr>
-            </a:lnRef>
-            <a:fillRef idx="1">
-              <a:schemeClr val="accent1"/>
-            </a:fillRef>
-            <a:effectRef idx="0">
-              <a:schemeClr val="accent1"/>
-            </a:effectRef>
-            <a:fontRef idx="minor">
-              <a:schemeClr val="lt1"/>
-            </a:fontRef>
-          </p:style>
-          <p:txBody>
-            <a:bodyPr rtlCol="0" anchor="ctr"/>
-            <a:lstStyle/>
-            <a:p>
-              <a:pPr algn="ctr"/>
-              <a:endParaRPr lang="en-US"/>
-            </a:p>
-          </p:txBody>
-        </p:sp>
       </p:grpSp>
+      <p:sp>
+        <p:nvSpPr>
+          <p:cNvPr id="13" name="Rectangle 12">
+            <a:extLst>
+              <a:ext uri="{FF2B5EF4-FFF2-40B4-BE49-F238E27FC236}">
+                <a16:creationId xmlns:a16="http://schemas.microsoft.com/office/drawing/2014/main" id="{DBADE3BE-9FC4-3EC0-53D9-BC827C4B6355}"/>
+              </a:ext>
+            </a:extLst>
+          </p:cNvPr>
+          <p:cNvSpPr/>
+          <p:nvPr/>
+        </p:nvSpPr>
+        <p:spPr>
+          <a:xfrm>
+            <a:off x="7157803" y="4497050"/>
+            <a:ext cx="2872675" cy="188064"/>
+          </a:xfrm>
+          <a:prstGeom prst="rect">
+            <a:avLst/>
+          </a:prstGeom>
+          <a:noFill/>
+          <a:ln w="19050" cap="flat" cmpd="sng" algn="ctr">
+            <a:solidFill>
+              <a:schemeClr val="accent2"/>
+            </a:solidFill>
+            <a:prstDash val="solid"/>
+            <a:round/>
+            <a:headEnd type="none" w="med" len="med"/>
+            <a:tailEnd type="none" w="med" len="med"/>
+          </a:ln>
+        </p:spPr>
+        <p:style>
+          <a:lnRef idx="0">
+            <a:scrgbClr r="0" g="0" b="0"/>
+          </a:lnRef>
+          <a:fillRef idx="0">
+            <a:scrgbClr r="0" g="0" b="0"/>
+          </a:fillRef>
+          <a:effectRef idx="0">
+            <a:scrgbClr r="0" g="0" b="0"/>
+          </a:effectRef>
+          <a:fontRef idx="minor">
+            <a:schemeClr val="accent2"/>
+          </a:fontRef>
+        </p:style>
+        <p:txBody>
+          <a:bodyPr rtlCol="0" anchor="ctr"/>
+          <a:lstStyle/>
+          <a:p>
+            <a:pPr algn="ctr"/>
+            <a:endParaRPr lang="en-US"/>
+          </a:p>
+        </p:txBody>
+      </p:sp>
+      <p:sp>
+        <p:nvSpPr>
+          <p:cNvPr id="14" name="Rectangle 13">
+            <a:extLst>
+              <a:ext uri="{FF2B5EF4-FFF2-40B4-BE49-F238E27FC236}">
+                <a16:creationId xmlns:a16="http://schemas.microsoft.com/office/drawing/2014/main" id="{D635E902-CEE1-CAFD-7C9B-B4E443036866}"/>
+              </a:ext>
+            </a:extLst>
+          </p:cNvPr>
+          <p:cNvSpPr/>
+          <p:nvPr/>
+        </p:nvSpPr>
+        <p:spPr>
+          <a:xfrm>
+            <a:off x="8694038" y="5573658"/>
+            <a:ext cx="2466140" cy="188064"/>
+          </a:xfrm>
+          <a:prstGeom prst="rect">
+            <a:avLst/>
+          </a:prstGeom>
+          <a:noFill/>
+          <a:ln w="19050" cap="flat" cmpd="sng" algn="ctr">
+            <a:solidFill>
+              <a:schemeClr val="accent2"/>
+            </a:solidFill>
+            <a:prstDash val="solid"/>
+            <a:round/>
+            <a:headEnd type="none" w="med" len="med"/>
+            <a:tailEnd type="none" w="med" len="med"/>
+          </a:ln>
+        </p:spPr>
+        <p:style>
+          <a:lnRef idx="0">
+            <a:scrgbClr r="0" g="0" b="0"/>
+          </a:lnRef>
+          <a:fillRef idx="0">
+            <a:scrgbClr r="0" g="0" b="0"/>
+          </a:fillRef>
+          <a:effectRef idx="0">
+            <a:scrgbClr r="0" g="0" b="0"/>
+          </a:effectRef>
+          <a:fontRef idx="minor">
+            <a:schemeClr val="accent2"/>
+          </a:fontRef>
+        </p:style>
+        <p:txBody>
+          <a:bodyPr rtlCol="0" anchor="ctr"/>
+          <a:lstStyle/>
+          <a:p>
+            <a:pPr algn="ctr"/>
+            <a:endParaRPr lang="en-US"/>
+          </a:p>
+        </p:txBody>
+      </p:sp>
+      <p:sp>
+        <p:nvSpPr>
+          <p:cNvPr id="15" name="Rectangle 14">
+            <a:extLst>
+              <a:ext uri="{FF2B5EF4-FFF2-40B4-BE49-F238E27FC236}">
+                <a16:creationId xmlns:a16="http://schemas.microsoft.com/office/drawing/2014/main" id="{AB634D9E-4B5B-8B5B-7737-CE731552CD3F}"/>
+              </a:ext>
+            </a:extLst>
+          </p:cNvPr>
+          <p:cNvSpPr/>
+          <p:nvPr/>
+        </p:nvSpPr>
+        <p:spPr>
+          <a:xfrm>
+            <a:off x="7029133" y="1960277"/>
+            <a:ext cx="2264769" cy="188064"/>
+          </a:xfrm>
+          <a:prstGeom prst="rect">
+            <a:avLst/>
+          </a:prstGeom>
+          <a:noFill/>
+          <a:ln w="19050" cap="flat" cmpd="sng" algn="ctr">
+            <a:solidFill>
+              <a:schemeClr val="accent2"/>
+            </a:solidFill>
+            <a:prstDash val="solid"/>
+            <a:round/>
+            <a:headEnd type="none" w="med" len="med"/>
+            <a:tailEnd type="none" w="med" len="med"/>
+          </a:ln>
+        </p:spPr>
+        <p:style>
+          <a:lnRef idx="0">
+            <a:scrgbClr r="0" g="0" b="0"/>
+          </a:lnRef>
+          <a:fillRef idx="0">
+            <a:scrgbClr r="0" g="0" b="0"/>
+          </a:fillRef>
+          <a:effectRef idx="0">
+            <a:scrgbClr r="0" g="0" b="0"/>
+          </a:effectRef>
+          <a:fontRef idx="minor">
+            <a:schemeClr val="accent2"/>
+          </a:fontRef>
+        </p:style>
+        <p:txBody>
+          <a:bodyPr rtlCol="0" anchor="ctr"/>
+          <a:lstStyle/>
+          <a:p>
+            <a:pPr algn="ctr"/>
+            <a:endParaRPr lang="en-US"/>
+          </a:p>
+        </p:txBody>
+      </p:sp>
     </p:spTree>
     <p:extLst>
       <p:ext uri="{BB962C8B-B14F-4D97-AF65-F5344CB8AC3E}">
@@ -6423,8 +7167,8 @@
           <a:chExt cx="0" cy="0"/>
         </a:xfrm>
       </p:grpSpPr>
-      <mc:AlternateContent xmlns:mc="http://schemas.openxmlformats.org/markup-compatibility/2006" xmlns:a14="http://schemas.microsoft.com/office/drawing/2010/main">
-        <mc:Choice Requires="a14">
+      <mc:AlternateContent xmlns:mc="http://schemas.openxmlformats.org/markup-compatibility/2006">
+        <mc:Choice xmlns:a14="http://schemas.microsoft.com/office/drawing/2010/main" Requires="a14">
           <p:sp>
             <p:nvSpPr>
               <p:cNvPr id="4" name="Title 3">
@@ -6458,13 +7202,13 @@
                 </a14:m>
                 <a:r>
                   <a:rPr lang="en-US" dirty="0"/>
-                  <a:t>-step Off-Policy Learning</a:t>
+                  <a:t>-step Off-Policy Control</a:t>
                 </a:r>
               </a:p>
             </p:txBody>
           </p:sp>
         </mc:Choice>
-        <mc:Fallback xmlns="">
+        <mc:Fallback>
           <p:sp>
             <p:nvSpPr>
               <p:cNvPr id="4" name="Title 3">
@@ -6562,8 +7306,8 @@
           <a:chExt cx="0" cy="0"/>
         </a:xfrm>
       </p:grpSpPr>
-      <mc:AlternateContent xmlns:mc="http://schemas.openxmlformats.org/markup-compatibility/2006" xmlns:a14="http://schemas.microsoft.com/office/drawing/2010/main">
-        <mc:Choice Requires="a14">
+      <mc:AlternateContent xmlns:mc="http://schemas.openxmlformats.org/markup-compatibility/2006">
+        <mc:Choice xmlns:a14="http://schemas.microsoft.com/office/drawing/2010/main" Requires="a14">
           <p:sp>
             <p:nvSpPr>
               <p:cNvPr id="2" name="Title 1">
@@ -6597,13 +7341,13 @@
                 </a14:m>
                 <a:r>
                   <a:rPr lang="en-US" dirty="0"/>
-                  <a:t>-step Off-Policy Learning</a:t>
+                  <a:t>-step Off-Policy Control</a:t>
                 </a:r>
               </a:p>
             </p:txBody>
           </p:sp>
         </mc:Choice>
-        <mc:Fallback xmlns="">
+        <mc:Fallback>
           <p:sp>
             <p:nvSpPr>
               <p:cNvPr id="2" name="Title 1">
@@ -6643,8 +7387,8 @@
           </p:sp>
         </mc:Fallback>
       </mc:AlternateContent>
-      <mc:AlternateContent xmlns:mc="http://schemas.openxmlformats.org/markup-compatibility/2006" xmlns:a14="http://schemas.microsoft.com/office/drawing/2010/main">
-        <mc:Choice Requires="a14">
+      <mc:AlternateContent xmlns:mc="http://schemas.openxmlformats.org/markup-compatibility/2006">
+        <mc:Choice xmlns:a14="http://schemas.microsoft.com/office/drawing/2010/main" Requires="a14">
           <p:sp>
             <p:nvSpPr>
               <p:cNvPr id="3" name="Content Placeholder 2">
@@ -6664,7 +7408,7 @@
             <p:spPr/>
             <p:txBody>
               <a:bodyPr>
-                <a:normAutofit fontScale="70000" lnSpcReduction="20000"/>
+                <a:normAutofit fontScale="62500" lnSpcReduction="20000"/>
               </a:bodyPr>
               <a:lstStyle/>
               <a:p>
@@ -7396,11 +8140,139 @@
               <a:p>
                 <a:r>
                   <a:rPr lang="en-US" b="1" dirty="0"/>
-                  <a:t>Note</a:t>
+                  <a:t>Notes</a:t>
                 </a:r>
                 <a:r>
                   <a:rPr lang="en-US" dirty="0"/>
-                  <a:t>: Since the soft behavioral policy provides exploration, we can learn the optimal deterministic policy!</a:t>
+                  <a:t>: </a:t>
+                </a:r>
+              </a:p>
+              <a:p>
+                <a:pPr lvl="1"/>
+                <a:r>
+                  <a:rPr lang="en-US" dirty="0"/>
+                  <a:t>Since the soft behavioral policy provides exploration, we can learn the optimal deterministic policy!</a:t>
+                </a:r>
+              </a:p>
+              <a:p>
+                <a:pPr lvl="1"/>
+                <a:r>
+                  <a:rPr lang="en-US" b="1" dirty="0"/>
+                  <a:t>Sample efficiency</a:t>
+                </a:r>
+                <a:r>
+                  <a:rPr lang="en-US" dirty="0"/>
+                  <a:t>: Can only learn from data where the sampled actions for the </a:t>
+                </a:r>
+                <a14:m>
+                  <m:oMath xmlns:m="http://schemas.openxmlformats.org/officeDocument/2006/math">
+                    <m:r>
+                      <a:rPr lang="en-US" b="0" i="1" smtClean="0">
+                        <a:latin typeface="Cambria Math" panose="02040503050406030204" pitchFamily="18" charset="0"/>
+                      </a:rPr>
+                      <m:t>𝑛</m:t>
+                    </m:r>
+                  </m:oMath>
+                </a14:m>
+                <a:r>
+                  <a:rPr lang="en-US" dirty="0"/>
+                  <a:t>-steps are compatible with </a:t>
+                </a:r>
+                <a14:m>
+                  <m:oMath xmlns:m="http://schemas.openxmlformats.org/officeDocument/2006/math">
+                    <m:r>
+                      <a:rPr lang="en-US" b="0" i="1" smtClean="0">
+                        <a:latin typeface="Cambria Math" panose="02040503050406030204" pitchFamily="18" charset="0"/>
+                      </a:rPr>
+                      <m:t>𝜋</m:t>
+                    </m:r>
+                  </m:oMath>
+                </a14:m>
+                <a:r>
+                  <a:rPr lang="en-US" dirty="0"/>
+                  <a:t>. Updating the behaviot policy </a:t>
+                </a:r>
+                <a14:m>
+                  <m:oMath xmlns:m="http://schemas.openxmlformats.org/officeDocument/2006/math">
+                    <m:r>
+                      <a:rPr lang="en-US" b="0" i="0" smtClean="0">
+                        <a:latin typeface="Cambria Math" panose="02040503050406030204" pitchFamily="18" charset="0"/>
+                      </a:rPr>
+                      <m:t> </m:t>
+                    </m:r>
+                    <m:r>
+                      <a:rPr lang="en-US" b="0" i="1" smtClean="0">
+                        <a:latin typeface="Cambria Math" panose="02040503050406030204" pitchFamily="18" charset="0"/>
+                      </a:rPr>
+                      <m:t>𝑏</m:t>
+                    </m:r>
+                    <m:r>
+                      <a:rPr lang="en-US" b="0" i="1" smtClean="0">
+                        <a:latin typeface="Cambria Math" panose="02040503050406030204" pitchFamily="18" charset="0"/>
+                      </a:rPr>
+                      <m:t>=</m:t>
+                    </m:r>
+                    <m:r>
+                      <a:rPr lang="en-US" b="0" i="1" smtClean="0">
+                        <a:latin typeface="Cambria Math" panose="02040503050406030204" pitchFamily="18" charset="0"/>
+                      </a:rPr>
+                      <m:t>𝜖</m:t>
+                    </m:r>
+                    <m:r>
+                      <m:rPr>
+                        <m:nor/>
+                      </m:rPr>
+                      <a:rPr lang="en-US" b="0" i="0" smtClean="0">
+                        <a:latin typeface="Cambria Math" panose="02040503050406030204" pitchFamily="18" charset="0"/>
+                      </a:rPr>
+                      <m:t>-</m:t>
+                    </m:r>
+                    <m:r>
+                      <m:rPr>
+                        <m:nor/>
+                      </m:rPr>
+                      <a:rPr lang="en-US" b="0" i="0" smtClean="0">
+                        <a:latin typeface="Cambria Math" panose="02040503050406030204" pitchFamily="18" charset="0"/>
+                      </a:rPr>
+                      <m:t>greedy</m:t>
+                    </m:r>
+                    <m:r>
+                      <a:rPr lang="en-US" b="0" i="1" smtClean="0">
+                        <a:latin typeface="Cambria Math" panose="02040503050406030204" pitchFamily="18" charset="0"/>
+                      </a:rPr>
+                      <m:t>(</m:t>
+                    </m:r>
+                    <m:r>
+                      <a:rPr lang="en-US" b="0" i="1" smtClean="0">
+                        <a:latin typeface="Cambria Math" panose="02040503050406030204" pitchFamily="18" charset="0"/>
+                      </a:rPr>
+                      <m:t>𝜋</m:t>
+                    </m:r>
+                    <m:r>
+                      <a:rPr lang="en-US" b="0" i="1" smtClean="0">
+                        <a:latin typeface="Cambria Math" panose="02040503050406030204" pitchFamily="18" charset="0"/>
+                      </a:rPr>
+                      <m:t>)</m:t>
+                    </m:r>
+                  </m:oMath>
+                </a14:m>
+                <a:r>
+                  <a:rPr lang="en-US" dirty="0"/>
+                  <a:t> with a small </a:t>
+                </a:r>
+                <a14:m>
+                  <m:oMath xmlns:m="http://schemas.openxmlformats.org/officeDocument/2006/math">
+                    <m:r>
+                      <a:rPr lang="en-US" b="0" i="1" smtClean="0">
+                        <a:latin typeface="Cambria Math" panose="02040503050406030204" pitchFamily="18" charset="0"/>
+                      </a:rPr>
+                      <m:t>𝜖</m:t>
+                    </m:r>
+                  </m:oMath>
+                </a14:m>
+                <a:r>
+                  <a:rPr lang="en-US" dirty="0"/>
+                  <a:t> helps.</a:t>
                 </a:r>
               </a:p>
               <a:p>
@@ -7412,7 +8284,7 @@
             </p:txBody>
           </p:sp>
         </mc:Choice>
-        <mc:Fallback xmlns="">
+        <mc:Fallback>
           <p:sp>
             <p:nvSpPr>
               <p:cNvPr id="3" name="Content Placeholder 2">
@@ -7433,7 +8305,7 @@
               <a:blipFill>
                 <a:blip r:embed="rId3"/>
                 <a:stretch>
-                  <a:fillRect l="-522" t="-2168"/>
+                  <a:fillRect l="-406" t="-1913" b="-510"/>
                 </a:stretch>
               </a:blipFill>
             </p:spPr>
@@ -7675,7 +8547,7 @@
         </p:nvSpPr>
         <p:spPr>
           <a:xfrm>
-            <a:off x="1644990" y="2023081"/>
+            <a:off x="1525070" y="2045566"/>
             <a:ext cx="581679" cy="203588"/>
           </a:xfrm>
           <a:prstGeom prst="rect">
@@ -7722,7 +8594,7 @@
         </p:nvSpPr>
         <p:spPr>
           <a:xfrm>
-            <a:off x="3989157" y="5300291"/>
+            <a:off x="3854247" y="5360251"/>
             <a:ext cx="581679" cy="203588"/>
           </a:xfrm>
           <a:prstGeom prst="rect">
@@ -7769,7 +8641,7 @@
         </p:nvSpPr>
         <p:spPr>
           <a:xfrm>
-            <a:off x="3345819" y="4316643"/>
+            <a:off x="3240889" y="4369108"/>
             <a:ext cx="581679" cy="203588"/>
           </a:xfrm>
           <a:prstGeom prst="rect">
@@ -8416,6 +9288,170 @@
           </a:p>
         </p:txBody>
       </p:sp>
+      <mc:AlternateContent xmlns:mc="http://schemas.openxmlformats.org/markup-compatibility/2006">
+        <mc:Choice xmlns:a14="http://schemas.microsoft.com/office/drawing/2010/main" Requires="a14">
+          <p:sp>
+            <p:nvSpPr>
+              <p:cNvPr id="22" name="Speech Bubble: Rectangle with Corners Rounded 21">
+                <a:extLst>
+                  <a:ext uri="{FF2B5EF4-FFF2-40B4-BE49-F238E27FC236}">
+                    <a16:creationId xmlns:a16="http://schemas.microsoft.com/office/drawing/2014/main" id="{324AC46D-52E7-570E-865E-DECAECC4DF6B}"/>
+                  </a:ext>
+                </a:extLst>
+              </p:cNvPr>
+              <p:cNvSpPr/>
+              <p:nvPr/>
+            </p:nvSpPr>
+            <p:spPr>
+              <a:xfrm>
+                <a:off x="10193311" y="2655934"/>
+                <a:ext cx="1896894" cy="670576"/>
+              </a:xfrm>
+              <a:prstGeom prst="wedgeRoundRectCallout">
+                <a:avLst>
+                  <a:gd name="adj1" fmla="val -193450"/>
+                  <a:gd name="adj2" fmla="val -31317"/>
+                  <a:gd name="adj3" fmla="val 16667"/>
+                </a:avLst>
+              </a:prstGeom>
+            </p:spPr>
+            <p:style>
+              <a:lnRef idx="2">
+                <a:schemeClr val="accent1">
+                  <a:shade val="15000"/>
+                </a:schemeClr>
+              </a:lnRef>
+              <a:fillRef idx="1">
+                <a:schemeClr val="accent1"/>
+              </a:fillRef>
+              <a:effectRef idx="0">
+                <a:schemeClr val="accent1"/>
+              </a:effectRef>
+              <a:fontRef idx="minor">
+                <a:schemeClr val="lt1"/>
+              </a:fontRef>
+            </p:style>
+            <p:txBody>
+              <a:bodyPr rtlCol="0" anchor="ctr"/>
+              <a:lstStyle/>
+              <a:p>
+                <a:pPr algn="ctr"/>
+                <a:r>
+                  <a:rPr lang="en-US" sz="1600" dirty="0"/>
+                  <a:t>We could update </a:t>
+                </a:r>
+                <a14:m>
+                  <m:oMath xmlns:m="http://schemas.openxmlformats.org/officeDocument/2006/math">
+                    <m:r>
+                      <a:rPr lang="en-US" sz="1600" b="0" i="1" smtClean="0">
+                        <a:latin typeface="Cambria Math" panose="02040503050406030204" pitchFamily="18" charset="0"/>
+                      </a:rPr>
+                      <m:t>𝑏</m:t>
+                    </m:r>
+                    <m:r>
+                      <a:rPr lang="en-US" sz="1600" b="0" i="1" smtClean="0">
+                        <a:latin typeface="Cambria Math" panose="02040503050406030204" pitchFamily="18" charset="0"/>
+                      </a:rPr>
+                      <m:t>=</m:t>
+                    </m:r>
+                    <m:r>
+                      <a:rPr lang="en-US" sz="1600" b="0" i="1" smtClean="0">
+                        <a:latin typeface="Cambria Math" panose="02040503050406030204" pitchFamily="18" charset="0"/>
+                      </a:rPr>
+                      <m:t>𝜖</m:t>
+                    </m:r>
+                    <m:r>
+                      <m:rPr>
+                        <m:nor/>
+                      </m:rPr>
+                      <a:rPr lang="en-US" sz="1600" b="0" i="0" smtClean="0">
+                        <a:latin typeface="Cambria Math" panose="02040503050406030204" pitchFamily="18" charset="0"/>
+                      </a:rPr>
+                      <m:t>-</m:t>
+                    </m:r>
+                    <m:r>
+                      <m:rPr>
+                        <m:nor/>
+                      </m:rPr>
+                      <a:rPr lang="en-US" sz="1600" b="0" i="0" smtClean="0">
+                        <a:latin typeface="Cambria Math" panose="02040503050406030204" pitchFamily="18" charset="0"/>
+                      </a:rPr>
+                      <m:t>greedy</m:t>
+                    </m:r>
+                    <m:r>
+                      <a:rPr lang="en-US" sz="1600" b="0" i="1" smtClean="0">
+                        <a:latin typeface="Cambria Math" panose="02040503050406030204" pitchFamily="18" charset="0"/>
+                      </a:rPr>
+                      <m:t>(</m:t>
+                    </m:r>
+                    <m:r>
+                      <a:rPr lang="en-US" sz="1600" b="0" i="1" smtClean="0">
+                        <a:latin typeface="Cambria Math" panose="02040503050406030204" pitchFamily="18" charset="0"/>
+                      </a:rPr>
+                      <m:t>𝜋</m:t>
+                    </m:r>
+                    <m:r>
+                      <a:rPr lang="en-US" sz="1600" b="0" i="1" smtClean="0">
+                        <a:latin typeface="Cambria Math" panose="02040503050406030204" pitchFamily="18" charset="0"/>
+                      </a:rPr>
+                      <m:t>)</m:t>
+                    </m:r>
+                  </m:oMath>
+                </a14:m>
+                <a:endParaRPr lang="en-US" sz="1600" dirty="0"/>
+              </a:p>
+            </p:txBody>
+          </p:sp>
+        </mc:Choice>
+        <mc:Fallback>
+          <p:sp>
+            <p:nvSpPr>
+              <p:cNvPr id="22" name="Speech Bubble: Rectangle with Corners Rounded 21">
+                <a:extLst>
+                  <a:ext uri="{FF2B5EF4-FFF2-40B4-BE49-F238E27FC236}">
+                    <a16:creationId xmlns:a16="http://schemas.microsoft.com/office/drawing/2014/main" id="{324AC46D-52E7-570E-865E-DECAECC4DF6B}"/>
+                  </a:ext>
+                </a:extLst>
+              </p:cNvPr>
+              <p:cNvSpPr>
+                <a:spLocks noRot="1" noChangeAspect="1" noMove="1" noResize="1" noEditPoints="1" noAdjustHandles="1" noChangeArrowheads="1" noChangeShapeType="1" noTextEdit="1"/>
+              </p:cNvSpPr>
+              <p:nvPr/>
+            </p:nvSpPr>
+            <p:spPr>
+              <a:xfrm>
+                <a:off x="10193311" y="2655934"/>
+                <a:ext cx="1896894" cy="670576"/>
+              </a:xfrm>
+              <a:prstGeom prst="wedgeRoundRectCallout">
+                <a:avLst>
+                  <a:gd name="adj1" fmla="val -193450"/>
+                  <a:gd name="adj2" fmla="val -31317"/>
+                  <a:gd name="adj3" fmla="val 16667"/>
+                </a:avLst>
+              </a:prstGeom>
+              <a:blipFill>
+                <a:blip r:embed="rId4"/>
+                <a:stretch>
+                  <a:fillRect/>
+                </a:stretch>
+              </a:blipFill>
+            </p:spPr>
+            <p:txBody>
+              <a:bodyPr/>
+              <a:lstStyle/>
+              <a:p>
+                <a:r>
+                  <a:rPr lang="en-US">
+                    <a:noFill/>
+                  </a:rPr>
+                  <a:t> </a:t>
+                </a:r>
+              </a:p>
+            </p:txBody>
+          </p:sp>
+        </mc:Fallback>
+      </mc:AlternateContent>
     </p:spTree>
     <p:extLst>
       <p:ext uri="{BB962C8B-B14F-4D97-AF65-F5344CB8AC3E}">
@@ -8606,8 +9642,8 @@
           </a:extLst>
         </p:spPr>
       </p:pic>
-      <mc:AlternateContent xmlns:mc="http://schemas.openxmlformats.org/markup-compatibility/2006" xmlns:a14="http://schemas.microsoft.com/office/drawing/2010/main">
-        <mc:Choice Requires="a14">
+      <mc:AlternateContent xmlns:mc="http://schemas.openxmlformats.org/markup-compatibility/2006">
+        <mc:Choice xmlns:a14="http://schemas.microsoft.com/office/drawing/2010/main" Requires="a14">
           <p:sp>
             <p:nvSpPr>
               <p:cNvPr id="3" name="Content Placeholder 2">
@@ -8648,7 +9684,7 @@
                 </a14:m>
                 <a:r>
                   <a:rPr lang="en-US" sz="1800" dirty="0"/>
-                  <a:t>-step methods let us vary the learning behavior between one-step DT methods and Monte Carlo Methods (whole episode).</a:t>
+                  <a:t>-step methods let us choose the amount of bootstrapping from 1-step to no bootstrapping (MC).</a:t>
                 </a:r>
               </a:p>
               <a:p>
@@ -8674,6 +9710,17 @@
               <a:p>
                 <a:pPr lvl="1"/>
                 <a:r>
+                  <a:rPr lang="en-US" sz="1800" b="1" dirty="0"/>
+                  <a:t>Error reduction</a:t>
+                </a:r>
+                <a:r>
+                  <a:rPr lang="en-US" sz="1800" dirty="0"/>
+                  <a:t>: Significantly reduces the bootstrapping error.</a:t>
+                </a:r>
+              </a:p>
+              <a:p>
+                <a:pPr lvl="1"/>
+                <a:r>
                   <a:rPr lang="en-US" sz="1800" dirty="0"/>
                   <a:t>An intermediate amount of bootstrapping typically </a:t>
                 </a:r>
@@ -8731,7 +9778,7 @@
                 </a14:m>
                 <a:r>
                   <a:rPr lang="en-US" sz="1800" dirty="0"/>
-                  <a:t>-step since they need to know future events (rewards and states).</a:t>
+                  <a:t>-step since future events (rewards and states) are needed.</a:t>
                 </a:r>
               </a:p>
               <a:p>
@@ -8768,7 +9815,7 @@
             </p:txBody>
           </p:sp>
         </mc:Choice>
-        <mc:Fallback xmlns="">
+        <mc:Fallback>
           <p:sp>
             <p:nvSpPr>
               <p:cNvPr id="3" name="Content Placeholder 2">
@@ -8793,7 +9840,7 @@
               <a:blipFill>
                 <a:blip r:embed="rId3"/>
                 <a:stretch>
-                  <a:fillRect l="-775" t="-424" r="-1218"/>
+                  <a:fillRect l="-775" t="-2860" r="-1218"/>
                 </a:stretch>
               </a:blipFill>
             </p:spPr>
@@ -8822,6 +9869,338 @@
   <p:clrMapOvr>
     <a:masterClrMapping/>
   </p:clrMapOvr>
+  <p:timing>
+    <p:tnLst>
+      <p:par>
+        <p:cTn id="1" dur="indefinite" restart="never" nodeType="tmRoot">
+          <p:childTnLst>
+            <p:seq concurrent="1" nextAc="seek">
+              <p:cTn id="2" dur="indefinite" nodeType="mainSeq">
+                <p:childTnLst>
+                  <p:par>
+                    <p:cTn id="3" fill="hold">
+                      <p:stCondLst>
+                        <p:cond delay="indefinite"/>
+                      </p:stCondLst>
+                      <p:childTnLst>
+                        <p:par>
+                          <p:cTn id="4" fill="hold">
+                            <p:stCondLst>
+                              <p:cond delay="0"/>
+                            </p:stCondLst>
+                            <p:childTnLst>
+                              <p:par>
+                                <p:cTn id="5" presetID="1" presetClass="entr" presetSubtype="0" fill="hold" nodeType="clickEffect">
+                                  <p:stCondLst>
+                                    <p:cond delay="0"/>
+                                  </p:stCondLst>
+                                  <p:childTnLst>
+                                    <p:set>
+                                      <p:cBhvr>
+                                        <p:cTn id="6" dur="1" fill="hold">
+                                          <p:stCondLst>
+                                            <p:cond delay="0"/>
+                                          </p:stCondLst>
+                                        </p:cTn>
+                                        <p:tgtEl>
+                                          <p:spTgt spid="3">
+                                            <p:txEl>
+                                              <p:pRg st="2" end="2"/>
+                                            </p:txEl>
+                                          </p:spTgt>
+                                        </p:tgtEl>
+                                        <p:attrNameLst>
+                                          <p:attrName>style.visibility</p:attrName>
+                                        </p:attrNameLst>
+                                      </p:cBhvr>
+                                      <p:to>
+                                        <p:strVal val="visible"/>
+                                      </p:to>
+                                    </p:set>
+                                  </p:childTnLst>
+                                </p:cTn>
+                              </p:par>
+                              <p:par>
+                                <p:cTn id="7" presetID="1" presetClass="entr" presetSubtype="0" fill="hold" nodeType="withEffect">
+                                  <p:stCondLst>
+                                    <p:cond delay="0"/>
+                                  </p:stCondLst>
+                                  <p:childTnLst>
+                                    <p:set>
+                                      <p:cBhvr>
+                                        <p:cTn id="8" dur="1" fill="hold">
+                                          <p:stCondLst>
+                                            <p:cond delay="0"/>
+                                          </p:stCondLst>
+                                        </p:cTn>
+                                        <p:tgtEl>
+                                          <p:spTgt spid="3">
+                                            <p:txEl>
+                                              <p:pRg st="3" end="3"/>
+                                            </p:txEl>
+                                          </p:spTgt>
+                                        </p:tgtEl>
+                                        <p:attrNameLst>
+                                          <p:attrName>style.visibility</p:attrName>
+                                        </p:attrNameLst>
+                                      </p:cBhvr>
+                                      <p:to>
+                                        <p:strVal val="visible"/>
+                                      </p:to>
+                                    </p:set>
+                                  </p:childTnLst>
+                                </p:cTn>
+                              </p:par>
+                              <p:par>
+                                <p:cTn id="9" presetID="1" presetClass="entr" presetSubtype="0" fill="hold" nodeType="withEffect">
+                                  <p:stCondLst>
+                                    <p:cond delay="0"/>
+                                  </p:stCondLst>
+                                  <p:childTnLst>
+                                    <p:set>
+                                      <p:cBhvr>
+                                        <p:cTn id="10" dur="1" fill="hold">
+                                          <p:stCondLst>
+                                            <p:cond delay="0"/>
+                                          </p:stCondLst>
+                                        </p:cTn>
+                                        <p:tgtEl>
+                                          <p:spTgt spid="3">
+                                            <p:txEl>
+                                              <p:pRg st="4" end="4"/>
+                                            </p:txEl>
+                                          </p:spTgt>
+                                        </p:tgtEl>
+                                        <p:attrNameLst>
+                                          <p:attrName>style.visibility</p:attrName>
+                                        </p:attrNameLst>
+                                      </p:cBhvr>
+                                      <p:to>
+                                        <p:strVal val="visible"/>
+                                      </p:to>
+                                    </p:set>
+                                  </p:childTnLst>
+                                </p:cTn>
+                              </p:par>
+                              <p:par>
+                                <p:cTn id="11" presetID="1" presetClass="entr" presetSubtype="0" fill="hold" nodeType="withEffect">
+                                  <p:stCondLst>
+                                    <p:cond delay="0"/>
+                                  </p:stCondLst>
+                                  <p:childTnLst>
+                                    <p:set>
+                                      <p:cBhvr>
+                                        <p:cTn id="12" dur="1" fill="hold">
+                                          <p:stCondLst>
+                                            <p:cond delay="0"/>
+                                          </p:stCondLst>
+                                        </p:cTn>
+                                        <p:tgtEl>
+                                          <p:spTgt spid="3">
+                                            <p:txEl>
+                                              <p:pRg st="5" end="5"/>
+                                            </p:txEl>
+                                          </p:spTgt>
+                                        </p:tgtEl>
+                                        <p:attrNameLst>
+                                          <p:attrName>style.visibility</p:attrName>
+                                        </p:attrNameLst>
+                                      </p:cBhvr>
+                                      <p:to>
+                                        <p:strVal val="visible"/>
+                                      </p:to>
+                                    </p:set>
+                                  </p:childTnLst>
+                                </p:cTn>
+                              </p:par>
+                            </p:childTnLst>
+                          </p:cTn>
+                        </p:par>
+                      </p:childTnLst>
+                    </p:cTn>
+                  </p:par>
+                  <p:par>
+                    <p:cTn id="13" fill="hold">
+                      <p:stCondLst>
+                        <p:cond delay="indefinite"/>
+                      </p:stCondLst>
+                      <p:childTnLst>
+                        <p:par>
+                          <p:cTn id="14" fill="hold">
+                            <p:stCondLst>
+                              <p:cond delay="0"/>
+                            </p:stCondLst>
+                            <p:childTnLst>
+                              <p:par>
+                                <p:cTn id="15" presetID="1" presetClass="entr" presetSubtype="0" fill="hold" nodeType="clickEffect">
+                                  <p:stCondLst>
+                                    <p:cond delay="0"/>
+                                  </p:stCondLst>
+                                  <p:childTnLst>
+                                    <p:set>
+                                      <p:cBhvr>
+                                        <p:cTn id="16" dur="1" fill="hold">
+                                          <p:stCondLst>
+                                            <p:cond delay="0"/>
+                                          </p:stCondLst>
+                                        </p:cTn>
+                                        <p:tgtEl>
+                                          <p:spTgt spid="3">
+                                            <p:txEl>
+                                              <p:pRg st="7" end="7"/>
+                                            </p:txEl>
+                                          </p:spTgt>
+                                        </p:tgtEl>
+                                        <p:attrNameLst>
+                                          <p:attrName>style.visibility</p:attrName>
+                                        </p:attrNameLst>
+                                      </p:cBhvr>
+                                      <p:to>
+                                        <p:strVal val="visible"/>
+                                      </p:to>
+                                    </p:set>
+                                  </p:childTnLst>
+                                </p:cTn>
+                              </p:par>
+                              <p:par>
+                                <p:cTn id="17" presetID="1" presetClass="entr" presetSubtype="0" fill="hold" nodeType="withEffect">
+                                  <p:stCondLst>
+                                    <p:cond delay="0"/>
+                                  </p:stCondLst>
+                                  <p:childTnLst>
+                                    <p:set>
+                                      <p:cBhvr>
+                                        <p:cTn id="18" dur="1" fill="hold">
+                                          <p:stCondLst>
+                                            <p:cond delay="0"/>
+                                          </p:stCondLst>
+                                        </p:cTn>
+                                        <p:tgtEl>
+                                          <p:spTgt spid="3">
+                                            <p:txEl>
+                                              <p:pRg st="8" end="8"/>
+                                            </p:txEl>
+                                          </p:spTgt>
+                                        </p:tgtEl>
+                                        <p:attrNameLst>
+                                          <p:attrName>style.visibility</p:attrName>
+                                        </p:attrNameLst>
+                                      </p:cBhvr>
+                                      <p:to>
+                                        <p:strVal val="visible"/>
+                                      </p:to>
+                                    </p:set>
+                                  </p:childTnLst>
+                                </p:cTn>
+                              </p:par>
+                              <p:par>
+                                <p:cTn id="19" presetID="1" presetClass="entr" presetSubtype="0" fill="hold" nodeType="withEffect">
+                                  <p:stCondLst>
+                                    <p:cond delay="0"/>
+                                  </p:stCondLst>
+                                  <p:childTnLst>
+                                    <p:set>
+                                      <p:cBhvr>
+                                        <p:cTn id="20" dur="1" fill="hold">
+                                          <p:stCondLst>
+                                            <p:cond delay="0"/>
+                                          </p:stCondLst>
+                                        </p:cTn>
+                                        <p:tgtEl>
+                                          <p:spTgt spid="3">
+                                            <p:txEl>
+                                              <p:pRg st="9" end="9"/>
+                                            </p:txEl>
+                                          </p:spTgt>
+                                        </p:tgtEl>
+                                        <p:attrNameLst>
+                                          <p:attrName>style.visibility</p:attrName>
+                                        </p:attrNameLst>
+                                      </p:cBhvr>
+                                      <p:to>
+                                        <p:strVal val="visible"/>
+                                      </p:to>
+                                    </p:set>
+                                  </p:childTnLst>
+                                </p:cTn>
+                              </p:par>
+                            </p:childTnLst>
+                          </p:cTn>
+                        </p:par>
+                      </p:childTnLst>
+                    </p:cTn>
+                  </p:par>
+                  <p:par>
+                    <p:cTn id="21" fill="hold">
+                      <p:stCondLst>
+                        <p:cond delay="indefinite"/>
+                      </p:stCondLst>
+                      <p:childTnLst>
+                        <p:par>
+                          <p:cTn id="22" fill="hold">
+                            <p:stCondLst>
+                              <p:cond delay="0"/>
+                            </p:stCondLst>
+                            <p:childTnLst>
+                              <p:par>
+                                <p:cTn id="23" presetID="1" presetClass="entr" presetSubtype="0" fill="hold" nodeType="clickEffect">
+                                  <p:stCondLst>
+                                    <p:cond delay="0"/>
+                                  </p:stCondLst>
+                                  <p:childTnLst>
+                                    <p:set>
+                                      <p:cBhvr>
+                                        <p:cTn id="24" dur="1" fill="hold">
+                                          <p:stCondLst>
+                                            <p:cond delay="0"/>
+                                          </p:stCondLst>
+                                        </p:cTn>
+                                        <p:tgtEl>
+                                          <p:spTgt spid="3">
+                                            <p:txEl>
+                                              <p:pRg st="11" end="11"/>
+                                            </p:txEl>
+                                          </p:spTgt>
+                                        </p:tgtEl>
+                                        <p:attrNameLst>
+                                          <p:attrName>style.visibility</p:attrName>
+                                        </p:attrNameLst>
+                                      </p:cBhvr>
+                                      <p:to>
+                                        <p:strVal val="visible"/>
+                                      </p:to>
+                                    </p:set>
+                                  </p:childTnLst>
+                                </p:cTn>
+                              </p:par>
+                            </p:childTnLst>
+                          </p:cTn>
+                        </p:par>
+                      </p:childTnLst>
+                    </p:cTn>
+                  </p:par>
+                </p:childTnLst>
+              </p:cTn>
+              <p:prevCondLst>
+                <p:cond evt="onPrev" delay="0">
+                  <p:tgtEl>
+                    <p:sldTgt/>
+                  </p:tgtEl>
+                </p:cond>
+              </p:prevCondLst>
+              <p:nextCondLst>
+                <p:cond evt="onNext" delay="0">
+                  <p:tgtEl>
+                    <p:sldTgt/>
+                  </p:tgtEl>
+                </p:cond>
+              </p:nextCondLst>
+            </p:seq>
+          </p:childTnLst>
+        </p:cTn>
+      </p:par>
+    </p:tnLst>
+  </p:timing>
 </p:sld>
 </file>
 
@@ -9072,7 +10451,7 @@
             </p:nvSpPr>
             <p:spPr>
               <a:xfrm>
-                <a:off x="822819" y="3658891"/>
+                <a:off x="822819" y="3700831"/>
                 <a:ext cx="5273179" cy="1902124"/>
               </a:xfrm>
             </p:spPr>
@@ -9240,28 +10619,7 @@
                       <a:schemeClr val="tx1"/>
                     </a:solidFill>
                   </a:rPr>
-                  <a:t>	</a:t>
-                </a:r>
-                <a14:m>
-                  <m:oMath xmlns:m="http://schemas.openxmlformats.org/officeDocument/2006/math">
-                    <m:r>
-                      <a:rPr lang="en-US" sz="1200" b="0" i="1" smtClean="0">
-                        <a:solidFill>
-                          <a:schemeClr val="tx1"/>
-                        </a:solidFill>
-                        <a:latin typeface="Cambria Math" panose="02040503050406030204" pitchFamily="18" charset="0"/>
-                      </a:rPr>
-                      <m:t>𝑛</m:t>
-                    </m:r>
-                  </m:oMath>
-                </a14:m>
-                <a:r>
-                  <a:rPr lang="en-US" sz="1200" dirty="0">
-                    <a:solidFill>
-                      <a:schemeClr val="tx1"/>
-                    </a:solidFill>
-                  </a:rPr>
-                  <a:t>-step return from </a:t>
+                  <a:t>	return from </a:t>
                 </a:r>
                 <a14:m>
                   <m:oMath xmlns:m="http://schemas.openxmlformats.org/officeDocument/2006/math">
@@ -10077,7 +11435,7 @@
             </p:nvSpPr>
             <p:spPr>
               <a:xfrm>
-                <a:off x="822819" y="3658891"/>
+                <a:off x="822819" y="3700831"/>
                 <a:ext cx="5273179" cy="1902124"/>
               </a:xfrm>
               <a:blipFill>
@@ -12159,10 +13517,611 @@
           </p:sp>
         </mc:Fallback>
       </mc:AlternateContent>
+      <mc:AlternateContent xmlns:mc="http://schemas.openxmlformats.org/markup-compatibility/2006">
+        <mc:Choice xmlns:a14="http://schemas.microsoft.com/office/drawing/2010/main" Requires="a14">
+          <p:sp>
+            <p:nvSpPr>
+              <p:cNvPr id="4" name="Content Placeholder 2">
+                <a:extLst>
+                  <a:ext uri="{FF2B5EF4-FFF2-40B4-BE49-F238E27FC236}">
+                    <a16:creationId xmlns:a16="http://schemas.microsoft.com/office/drawing/2014/main" id="{4C5E539A-F9A7-F959-ACD3-4ADE5900F587}"/>
+                  </a:ext>
+                </a:extLst>
+              </p:cNvPr>
+              <p:cNvSpPr txBox="1">
+                <a:spLocks/>
+              </p:cNvSpPr>
+              <p:nvPr/>
+            </p:nvSpPr>
+            <p:spPr>
+              <a:xfrm>
+                <a:off x="6267338" y="4947712"/>
+                <a:ext cx="5273179" cy="1015663"/>
+              </a:xfrm>
+              <a:prstGeom prst="rect">
+                <a:avLst/>
+              </a:prstGeom>
+            </p:spPr>
+            <p:style>
+              <a:lnRef idx="2">
+                <a:schemeClr val="accent2"/>
+              </a:lnRef>
+              <a:fillRef idx="1">
+                <a:schemeClr val="lt1"/>
+              </a:fillRef>
+              <a:effectRef idx="0">
+                <a:schemeClr val="accent2"/>
+              </a:effectRef>
+              <a:fontRef idx="minor">
+                <a:schemeClr val="dk1"/>
+              </a:fontRef>
+            </p:style>
+            <p:txBody>
+              <a:bodyPr vert="horz" lIns="91440" tIns="45720" rIns="91440" bIns="45720" rtlCol="0">
+                <a:spAutoFit/>
+              </a:bodyPr>
+              <a:lstStyle>
+                <a:lvl1pPr marL="228600" indent="-228600" algn="l" defTabSz="914400" rtl="0" eaLnBrk="1" latinLnBrk="0" hangingPunct="1">
+                  <a:lnSpc>
+                    <a:spcPct val="90000"/>
+                  </a:lnSpc>
+                  <a:spcBef>
+                    <a:spcPts val="1000"/>
+                  </a:spcBef>
+                  <a:buFont typeface="Arial" panose="020B0604020202020204" pitchFamily="34" charset="0"/>
+                  <a:buChar char="•"/>
+                  <a:defRPr sz="2800" kern="1200">
+                    <a:solidFill>
+                      <a:schemeClr val="dk1"/>
+                    </a:solidFill>
+                    <a:latin typeface="+mn-lt"/>
+                    <a:ea typeface="+mn-ea"/>
+                    <a:cs typeface="+mn-cs"/>
+                  </a:defRPr>
+                </a:lvl1pPr>
+                <a:lvl2pPr marL="685800" indent="-228600" algn="l" defTabSz="914400" rtl="0" eaLnBrk="1" latinLnBrk="0" hangingPunct="1">
+                  <a:lnSpc>
+                    <a:spcPct val="90000"/>
+                  </a:lnSpc>
+                  <a:spcBef>
+                    <a:spcPts val="500"/>
+                  </a:spcBef>
+                  <a:buFont typeface="Arial" panose="020B0604020202020204" pitchFamily="34" charset="0"/>
+                  <a:buChar char="•"/>
+                  <a:defRPr sz="2400" kern="1200">
+                    <a:solidFill>
+                      <a:schemeClr val="dk1"/>
+                    </a:solidFill>
+                    <a:latin typeface="+mn-lt"/>
+                    <a:ea typeface="+mn-ea"/>
+                    <a:cs typeface="+mn-cs"/>
+                  </a:defRPr>
+                </a:lvl2pPr>
+                <a:lvl3pPr marL="1143000" indent="-228600" algn="l" defTabSz="914400" rtl="0" eaLnBrk="1" latinLnBrk="0" hangingPunct="1">
+                  <a:lnSpc>
+                    <a:spcPct val="90000"/>
+                  </a:lnSpc>
+                  <a:spcBef>
+                    <a:spcPts val="500"/>
+                  </a:spcBef>
+                  <a:buFont typeface="Arial" panose="020B0604020202020204" pitchFamily="34" charset="0"/>
+                  <a:buChar char="•"/>
+                  <a:defRPr sz="2000" kern="1200">
+                    <a:solidFill>
+                      <a:schemeClr val="dk1"/>
+                    </a:solidFill>
+                    <a:latin typeface="+mn-lt"/>
+                    <a:ea typeface="+mn-ea"/>
+                    <a:cs typeface="+mn-cs"/>
+                  </a:defRPr>
+                </a:lvl3pPr>
+                <a:lvl4pPr marL="1600200" indent="-228600" algn="l" defTabSz="914400" rtl="0" eaLnBrk="1" latinLnBrk="0" hangingPunct="1">
+                  <a:lnSpc>
+                    <a:spcPct val="90000"/>
+                  </a:lnSpc>
+                  <a:spcBef>
+                    <a:spcPts val="500"/>
+                  </a:spcBef>
+                  <a:buFont typeface="Arial" panose="020B0604020202020204" pitchFamily="34" charset="0"/>
+                  <a:buChar char="•"/>
+                  <a:defRPr sz="1800" kern="1200">
+                    <a:solidFill>
+                      <a:schemeClr val="dk1"/>
+                    </a:solidFill>
+                    <a:latin typeface="+mn-lt"/>
+                    <a:ea typeface="+mn-ea"/>
+                    <a:cs typeface="+mn-cs"/>
+                  </a:defRPr>
+                </a:lvl4pPr>
+                <a:lvl5pPr marL="2057400" indent="-228600" algn="l" defTabSz="914400" rtl="0" eaLnBrk="1" latinLnBrk="0" hangingPunct="1">
+                  <a:lnSpc>
+                    <a:spcPct val="90000"/>
+                  </a:lnSpc>
+                  <a:spcBef>
+                    <a:spcPts val="500"/>
+                  </a:spcBef>
+                  <a:buFont typeface="Arial" panose="020B0604020202020204" pitchFamily="34" charset="0"/>
+                  <a:buChar char="•"/>
+                  <a:defRPr sz="1800" kern="1200">
+                    <a:solidFill>
+                      <a:schemeClr val="dk1"/>
+                    </a:solidFill>
+                    <a:latin typeface="+mn-lt"/>
+                    <a:ea typeface="+mn-ea"/>
+                    <a:cs typeface="+mn-cs"/>
+                  </a:defRPr>
+                </a:lvl5pPr>
+                <a:lvl6pPr marL="2514600" indent="-228600" algn="l" defTabSz="914400" rtl="0" eaLnBrk="1" latinLnBrk="0" hangingPunct="1">
+                  <a:lnSpc>
+                    <a:spcPct val="90000"/>
+                  </a:lnSpc>
+                  <a:spcBef>
+                    <a:spcPts val="500"/>
+                  </a:spcBef>
+                  <a:buFont typeface="Arial" panose="020B0604020202020204" pitchFamily="34" charset="0"/>
+                  <a:buChar char="•"/>
+                  <a:defRPr sz="1800" kern="1200">
+                    <a:solidFill>
+                      <a:schemeClr val="dk1"/>
+                    </a:solidFill>
+                    <a:latin typeface="+mn-lt"/>
+                    <a:ea typeface="+mn-ea"/>
+                    <a:cs typeface="+mn-cs"/>
+                  </a:defRPr>
+                </a:lvl6pPr>
+                <a:lvl7pPr marL="2971800" indent="-228600" algn="l" defTabSz="914400" rtl="0" eaLnBrk="1" latinLnBrk="0" hangingPunct="1">
+                  <a:lnSpc>
+                    <a:spcPct val="90000"/>
+                  </a:lnSpc>
+                  <a:spcBef>
+                    <a:spcPts val="500"/>
+                  </a:spcBef>
+                  <a:buFont typeface="Arial" panose="020B0604020202020204" pitchFamily="34" charset="0"/>
+                  <a:buChar char="•"/>
+                  <a:defRPr sz="1800" kern="1200">
+                    <a:solidFill>
+                      <a:schemeClr val="dk1"/>
+                    </a:solidFill>
+                    <a:latin typeface="+mn-lt"/>
+                    <a:ea typeface="+mn-ea"/>
+                    <a:cs typeface="+mn-cs"/>
+                  </a:defRPr>
+                </a:lvl7pPr>
+                <a:lvl8pPr marL="3429000" indent="-228600" algn="l" defTabSz="914400" rtl="0" eaLnBrk="1" latinLnBrk="0" hangingPunct="1">
+                  <a:lnSpc>
+                    <a:spcPct val="90000"/>
+                  </a:lnSpc>
+                  <a:spcBef>
+                    <a:spcPts val="500"/>
+                  </a:spcBef>
+                  <a:buFont typeface="Arial" panose="020B0604020202020204" pitchFamily="34" charset="0"/>
+                  <a:buChar char="•"/>
+                  <a:defRPr sz="1800" kern="1200">
+                    <a:solidFill>
+                      <a:schemeClr val="dk1"/>
+                    </a:solidFill>
+                    <a:latin typeface="+mn-lt"/>
+                    <a:ea typeface="+mn-ea"/>
+                    <a:cs typeface="+mn-cs"/>
+                  </a:defRPr>
+                </a:lvl8pPr>
+                <a:lvl9pPr marL="3886200" indent="-228600" algn="l" defTabSz="914400" rtl="0" eaLnBrk="1" latinLnBrk="0" hangingPunct="1">
+                  <a:lnSpc>
+                    <a:spcPct val="90000"/>
+                  </a:lnSpc>
+                  <a:spcBef>
+                    <a:spcPts val="500"/>
+                  </a:spcBef>
+                  <a:buFont typeface="Arial" panose="020B0604020202020204" pitchFamily="34" charset="0"/>
+                  <a:buChar char="•"/>
+                  <a:defRPr sz="1800" kern="1200">
+                    <a:solidFill>
+                      <a:schemeClr val="dk1"/>
+                    </a:solidFill>
+                    <a:latin typeface="+mn-lt"/>
+                    <a:ea typeface="+mn-ea"/>
+                    <a:cs typeface="+mn-cs"/>
+                  </a:defRPr>
+                </a:lvl9pPr>
+              </a:lstStyle>
+              <a:p>
+                <a:pPr marL="0" indent="0">
+                  <a:lnSpc>
+                    <a:spcPct val="100000"/>
+                  </a:lnSpc>
+                  <a:spcBef>
+                    <a:spcPts val="0"/>
+                  </a:spcBef>
+                  <a:buFont typeface="Arial" panose="020B0604020202020204" pitchFamily="34" charset="0"/>
+                  <a:buNone/>
+                </a:pPr>
+                <a:r>
+                  <a:rPr lang="en-US" sz="1200" b="1" dirty="0"/>
+                  <a:t>Temporal Difference Learning</a:t>
+                </a:r>
+                <a:endParaRPr lang="en-US" sz="1200" i="1" dirty="0">
+                  <a:latin typeface="Cambria Math" panose="02040503050406030204" pitchFamily="18" charset="0"/>
+                </a:endParaRPr>
+              </a:p>
+              <a:p>
+                <a:pPr marL="0" indent="0">
+                  <a:lnSpc>
+                    <a:spcPct val="100000"/>
+                  </a:lnSpc>
+                  <a:spcBef>
+                    <a:spcPts val="0"/>
+                  </a:spcBef>
+                  <a:buNone/>
+                </a:pPr>
+                <a14:m>
+                  <m:oMath xmlns:m="http://schemas.openxmlformats.org/officeDocument/2006/math">
+                    <m:sSub>
+                      <m:sSubPr>
+                        <m:ctrlPr>
+                          <a:rPr lang="en-US" sz="1200" i="1" dirty="0">
+                            <a:solidFill>
+                              <a:schemeClr val="tx1"/>
+                            </a:solidFill>
+                            <a:latin typeface="Cambria Math" panose="02040503050406030204" pitchFamily="18" charset="0"/>
+                          </a:rPr>
+                        </m:ctrlPr>
+                      </m:sSubPr>
+                      <m:e>
+                        <m:r>
+                          <a:rPr lang="en-US" sz="1200" i="1" dirty="0">
+                            <a:solidFill>
+                              <a:schemeClr val="tx1"/>
+                            </a:solidFill>
+                            <a:latin typeface="Cambria Math" panose="02040503050406030204" pitchFamily="18" charset="0"/>
+                          </a:rPr>
+                          <m:t>𝑈</m:t>
+                        </m:r>
+                      </m:e>
+                      <m:sub>
+                        <m:r>
+                          <a:rPr lang="en-US" sz="1200" i="1" dirty="0">
+                            <a:solidFill>
+                              <a:schemeClr val="tx1"/>
+                            </a:solidFill>
+                            <a:latin typeface="Cambria Math" panose="02040503050406030204" pitchFamily="18" charset="0"/>
+                          </a:rPr>
+                          <m:t>𝑡</m:t>
+                        </m:r>
+                      </m:sub>
+                    </m:sSub>
+                  </m:oMath>
+                </a14:m>
+                <a:r>
+                  <a:rPr lang="en-US" sz="1200" dirty="0">
+                    <a:solidFill>
+                      <a:schemeClr val="tx1"/>
+                    </a:solidFill>
+                  </a:rPr>
+                  <a:t>	target for estimate at time</a:t>
+                </a:r>
+                <a14:m>
+                  <m:oMath xmlns:m="http://schemas.openxmlformats.org/officeDocument/2006/math">
+                    <m:r>
+                      <a:rPr lang="en-US" sz="1200" i="1" dirty="0">
+                        <a:solidFill>
+                          <a:schemeClr val="tx1"/>
+                        </a:solidFill>
+                        <a:latin typeface="Cambria Math" panose="02040503050406030204" pitchFamily="18" charset="0"/>
+                      </a:rPr>
+                      <m:t> </m:t>
+                    </m:r>
+                    <m:r>
+                      <a:rPr lang="en-US" sz="1200" i="1" dirty="0">
+                        <a:solidFill>
+                          <a:schemeClr val="tx1"/>
+                        </a:solidFill>
+                        <a:latin typeface="Cambria Math" panose="02040503050406030204" pitchFamily="18" charset="0"/>
+                      </a:rPr>
+                      <m:t>𝑡</m:t>
+                    </m:r>
+                  </m:oMath>
+                </a14:m>
+                <a:endParaRPr lang="en-US" sz="1200" dirty="0">
+                  <a:solidFill>
+                    <a:schemeClr val="tx1"/>
+                  </a:solidFill>
+                </a:endParaRPr>
+              </a:p>
+              <a:p>
+                <a:pPr marL="0" indent="0">
+                  <a:lnSpc>
+                    <a:spcPct val="100000"/>
+                  </a:lnSpc>
+                  <a:spcBef>
+                    <a:spcPts val="0"/>
+                  </a:spcBef>
+                  <a:buNone/>
+                </a:pPr>
+                <a14:m>
+                  <m:oMath xmlns:m="http://schemas.openxmlformats.org/officeDocument/2006/math">
+                    <m:sSub>
+                      <m:sSubPr>
+                        <m:ctrlPr>
+                          <a:rPr lang="en-US" sz="1200" i="1" dirty="0">
+                            <a:solidFill>
+                              <a:schemeClr val="tx1"/>
+                            </a:solidFill>
+                            <a:latin typeface="Cambria Math" panose="02040503050406030204" pitchFamily="18" charset="0"/>
+                          </a:rPr>
+                        </m:ctrlPr>
+                      </m:sSubPr>
+                      <m:e>
+                        <m:r>
+                          <a:rPr lang="en-US" sz="1200" b="0" i="1" dirty="0" smtClean="0">
+                            <a:solidFill>
+                              <a:schemeClr val="tx1"/>
+                            </a:solidFill>
+                            <a:latin typeface="Cambria Math" panose="02040503050406030204" pitchFamily="18" charset="0"/>
+                          </a:rPr>
+                          <m:t>𝛿</m:t>
+                        </m:r>
+                      </m:e>
+                      <m:sub>
+                        <m:r>
+                          <a:rPr lang="en-US" sz="1200" i="1" dirty="0">
+                            <a:solidFill>
+                              <a:schemeClr val="tx1"/>
+                            </a:solidFill>
+                            <a:latin typeface="Cambria Math" panose="02040503050406030204" pitchFamily="18" charset="0"/>
+                          </a:rPr>
+                          <m:t>𝑡</m:t>
+                        </m:r>
+                      </m:sub>
+                    </m:sSub>
+                  </m:oMath>
+                </a14:m>
+                <a:r>
+                  <a:rPr lang="en-US" sz="1200" dirty="0">
+                    <a:solidFill>
+                      <a:schemeClr val="tx1"/>
+                    </a:solidFill>
+                  </a:rPr>
+                  <a:t>	TD error</a:t>
+                </a:r>
+              </a:p>
+              <a:p>
+                <a:pPr marL="0" indent="0">
+                  <a:lnSpc>
+                    <a:spcPct val="100000"/>
+                  </a:lnSpc>
+                  <a:spcBef>
+                    <a:spcPts val="0"/>
+                  </a:spcBef>
+                  <a:buNone/>
+                </a:pPr>
+                <a14:m>
+                  <m:oMath xmlns:m="http://schemas.openxmlformats.org/officeDocument/2006/math">
+                    <m:sSub>
+                      <m:sSubPr>
+                        <m:ctrlPr>
+                          <a:rPr lang="en-US" sz="1200" i="1">
+                            <a:latin typeface="Cambria Math" panose="02040503050406030204" pitchFamily="18" charset="0"/>
+                          </a:rPr>
+                        </m:ctrlPr>
+                      </m:sSubPr>
+                      <m:e>
+                        <m:r>
+                          <a:rPr lang="en-US" sz="1200" i="1">
+                            <a:latin typeface="Cambria Math" panose="02040503050406030204" pitchFamily="18" charset="0"/>
+                          </a:rPr>
+                          <m:t>𝐺</m:t>
+                        </m:r>
+                      </m:e>
+                      <m:sub>
+                        <m:r>
+                          <a:rPr lang="en-US" sz="1200" i="1">
+                            <a:latin typeface="Cambria Math" panose="02040503050406030204" pitchFamily="18" charset="0"/>
+                          </a:rPr>
+                          <m:t>𝑡</m:t>
+                        </m:r>
+                        <m:r>
+                          <a:rPr lang="en-US" sz="1200" i="1">
+                            <a:latin typeface="Cambria Math" panose="02040503050406030204" pitchFamily="18" charset="0"/>
+                          </a:rPr>
+                          <m:t>:</m:t>
+                        </m:r>
+                        <m:r>
+                          <a:rPr lang="en-US" sz="1200" i="1">
+                            <a:latin typeface="Cambria Math" panose="02040503050406030204" pitchFamily="18" charset="0"/>
+                          </a:rPr>
+                          <m:t>𝑡</m:t>
+                        </m:r>
+                        <m:r>
+                          <a:rPr lang="en-US" sz="1200" i="1">
+                            <a:latin typeface="Cambria Math" panose="02040503050406030204" pitchFamily="18" charset="0"/>
+                          </a:rPr>
+                          <m:t>+</m:t>
+                        </m:r>
+                        <m:r>
+                          <a:rPr lang="en-US" sz="1200" b="0" i="1" smtClean="0">
+                            <a:latin typeface="Cambria Math" panose="02040503050406030204" pitchFamily="18" charset="0"/>
+                          </a:rPr>
+                          <m:t>𝑛</m:t>
+                        </m:r>
+                      </m:sub>
+                    </m:sSub>
+                  </m:oMath>
+                </a14:m>
+                <a:r>
+                  <a:rPr lang="en-US" sz="1200" dirty="0">
+                    <a:solidFill>
+                      <a:schemeClr val="tx1"/>
+                    </a:solidFill>
+                  </a:rPr>
+                  <a:t> 	</a:t>
+                </a:r>
+                <a14:m>
+                  <m:oMath xmlns:m="http://schemas.openxmlformats.org/officeDocument/2006/math">
+                    <m:r>
+                      <a:rPr lang="en-US" sz="1200" i="1" dirty="0" smtClean="0">
+                        <a:solidFill>
+                          <a:schemeClr val="tx1"/>
+                        </a:solidFill>
+                        <a:latin typeface="Cambria Math" panose="02040503050406030204" pitchFamily="18" charset="0"/>
+                      </a:rPr>
+                      <m:t>𝑛</m:t>
+                    </m:r>
+                  </m:oMath>
+                </a14:m>
+                <a:r>
+                  <a:rPr lang="en-US" sz="1200" dirty="0">
+                    <a:solidFill>
+                      <a:schemeClr val="tx1"/>
+                    </a:solidFill>
+                  </a:rPr>
+                  <a:t>-step return using rewards from</a:t>
+                </a:r>
+                <a14:m>
+                  <m:oMath xmlns:m="http://schemas.openxmlformats.org/officeDocument/2006/math">
+                    <m:r>
+                      <a:rPr lang="en-US" sz="1200" i="1" dirty="0" smtClean="0">
+                        <a:solidFill>
+                          <a:schemeClr val="tx1"/>
+                        </a:solidFill>
+                        <a:latin typeface="Cambria Math" panose="02040503050406030204" pitchFamily="18" charset="0"/>
+                      </a:rPr>
+                      <m:t> </m:t>
+                    </m:r>
+                    <m:r>
+                      <a:rPr lang="en-US" sz="1200" i="1" dirty="0" smtClean="0">
+                        <a:solidFill>
+                          <a:schemeClr val="tx1"/>
+                        </a:solidFill>
+                        <a:latin typeface="Cambria Math" panose="02040503050406030204" pitchFamily="18" charset="0"/>
+                      </a:rPr>
+                      <m:t>𝑡</m:t>
+                    </m:r>
+                    <m:r>
+                      <a:rPr lang="en-US" sz="1200" i="1" dirty="0" smtClean="0">
+                        <a:solidFill>
+                          <a:schemeClr val="tx1"/>
+                        </a:solidFill>
+                        <a:latin typeface="Cambria Math" panose="02040503050406030204" pitchFamily="18" charset="0"/>
+                      </a:rPr>
+                      <m:t>+1 </m:t>
+                    </m:r>
+                  </m:oMath>
+                </a14:m>
+                <a:r>
+                  <a:rPr lang="en-US" sz="1200" dirty="0">
+                    <a:solidFill>
+                      <a:schemeClr val="tx1"/>
+                    </a:solidFill>
+                  </a:rPr>
+                  <a:t>to </a:t>
+                </a:r>
+                <a14:m>
+                  <m:oMath xmlns:m="http://schemas.openxmlformats.org/officeDocument/2006/math">
+                    <m:r>
+                      <a:rPr lang="en-US" sz="1200" i="1" dirty="0" smtClean="0">
+                        <a:solidFill>
+                          <a:schemeClr val="tx1"/>
+                        </a:solidFill>
+                        <a:latin typeface="Cambria Math" panose="02040503050406030204" pitchFamily="18" charset="0"/>
+                      </a:rPr>
+                      <m:t>𝑡</m:t>
+                    </m:r>
+                    <m:r>
+                      <a:rPr lang="en-US" sz="1200" i="1" dirty="0" smtClean="0">
+                        <a:solidFill>
+                          <a:schemeClr val="tx1"/>
+                        </a:solidFill>
+                        <a:latin typeface="Cambria Math" panose="02040503050406030204" pitchFamily="18" charset="0"/>
+                      </a:rPr>
+                      <m:t>+</m:t>
+                    </m:r>
+                    <m:r>
+                      <a:rPr lang="en-US" sz="1200" i="1" dirty="0" smtClean="0">
+                        <a:solidFill>
+                          <a:schemeClr val="tx1"/>
+                        </a:solidFill>
+                        <a:latin typeface="Cambria Math" panose="02040503050406030204" pitchFamily="18" charset="0"/>
+                      </a:rPr>
+                      <m:t>𝑛</m:t>
+                    </m:r>
+                  </m:oMath>
+                </a14:m>
+                <a:r>
+                  <a:rPr lang="en-US" sz="1200" dirty="0">
+                    <a:solidFill>
+                      <a:schemeClr val="tx1"/>
+                    </a:solidFill>
+                  </a:rPr>
+                  <a:t> and </a:t>
+                </a:r>
+                <a:br>
+                  <a:rPr lang="en-US" sz="1200" dirty="0">
+                    <a:solidFill>
+                      <a:schemeClr val="tx1"/>
+                    </a:solidFill>
+                  </a:rPr>
+                </a:br>
+                <a:r>
+                  <a:rPr lang="en-US" sz="1200" dirty="0">
+                    <a:solidFill>
+                      <a:schemeClr val="tx1"/>
+                    </a:solidFill>
+                  </a:rPr>
+                  <a:t>	bootstrap the rest</a:t>
+                </a:r>
+              </a:p>
+            </p:txBody>
+          </p:sp>
+        </mc:Choice>
+        <mc:Fallback>
+          <p:sp>
+            <p:nvSpPr>
+              <p:cNvPr id="4" name="Content Placeholder 2">
+                <a:extLst>
+                  <a:ext uri="{FF2B5EF4-FFF2-40B4-BE49-F238E27FC236}">
+                    <a16:creationId xmlns:a16="http://schemas.microsoft.com/office/drawing/2014/main" id="{4C5E539A-F9A7-F959-ACD3-4ADE5900F587}"/>
+                  </a:ext>
+                </a:extLst>
+              </p:cNvPr>
+              <p:cNvSpPr txBox="1">
+                <a:spLocks noRot="1" noChangeAspect="1" noMove="1" noResize="1" noEditPoints="1" noAdjustHandles="1" noChangeArrowheads="1" noChangeShapeType="1" noTextEdit="1"/>
+              </p:cNvSpPr>
+              <p:nvPr/>
+            </p:nvSpPr>
+            <p:spPr>
+              <a:xfrm>
+                <a:off x="6267338" y="4947712"/>
+                <a:ext cx="5273179" cy="1015663"/>
+              </a:xfrm>
+              <a:prstGeom prst="rect">
+                <a:avLst/>
+              </a:prstGeom>
+              <a:blipFill>
+                <a:blip r:embed="rId5"/>
+                <a:stretch>
+                  <a:fillRect b="-2959"/>
+                </a:stretch>
+              </a:blipFill>
+            </p:spPr>
+            <p:txBody>
+              <a:bodyPr/>
+              <a:lstStyle/>
+              <a:p>
+                <a:r>
+                  <a:rPr lang="en-US">
+                    <a:noFill/>
+                  </a:rPr>
+                  <a:t> </a:t>
+                </a:r>
+              </a:p>
+            </p:txBody>
+          </p:sp>
+        </mc:Fallback>
+      </mc:AlternateContent>
     </p:spTree>
     <p:extLst>
       <p:ext uri="{BB962C8B-B14F-4D97-AF65-F5344CB8AC3E}">
-        <p14:creationId xmlns:p14="http://schemas.microsoft.com/office/powerpoint/2010/main" val="594028250"/>
+        <p14:creationId xmlns:p14="http://schemas.microsoft.com/office/powerpoint/2010/main" val="920694018"/>
       </p:ext>
     </p:extLst>
   </p:cSld>
@@ -12189,8 +14148,8 @@
           <a:chExt cx="0" cy="0"/>
         </a:xfrm>
       </p:grpSpPr>
-      <mc:AlternateContent xmlns:mc="http://schemas.openxmlformats.org/markup-compatibility/2006" xmlns:a14="http://schemas.microsoft.com/office/drawing/2010/main">
-        <mc:Choice Requires="a14">
+      <mc:AlternateContent xmlns:mc="http://schemas.openxmlformats.org/markup-compatibility/2006">
+        <mc:Choice xmlns:a14="http://schemas.microsoft.com/office/drawing/2010/main" Requires="a14">
           <p:sp>
             <p:nvSpPr>
               <p:cNvPr id="2" name="Title 1">
@@ -12209,12 +14168,14 @@
             </p:nvSpPr>
             <p:spPr/>
             <p:txBody>
-              <a:bodyPr/>
+              <a:bodyPr>
+                <a:normAutofit fontScale="90000"/>
+              </a:bodyPr>
               <a:lstStyle/>
               <a:p>
                 <a:r>
                   <a:rPr lang="en-US" dirty="0"/>
-                  <a:t>1-step TD vs. </a:t>
+                  <a:t>Policy Evaluation: 1-step TD vs. </a:t>
                 </a:r>
                 <a14:m>
                   <m:oMath xmlns:m="http://schemas.openxmlformats.org/officeDocument/2006/math">
@@ -12234,7 +14195,7 @@
             </p:txBody>
           </p:sp>
         </mc:Choice>
-        <mc:Fallback xmlns="">
+        <mc:Fallback>
           <p:sp>
             <p:nvSpPr>
               <p:cNvPr id="2" name="Title 1">
@@ -12255,7 +14216,7 @@
               <a:blipFill>
                 <a:blip r:embed="rId2"/>
                 <a:stretch>
-                  <a:fillRect l="-2377" t="-20161" b="-35484"/>
+                  <a:fillRect l="-2087" t="-13710" b="-28226"/>
                 </a:stretch>
               </a:blipFill>
             </p:spPr>
@@ -12274,8 +14235,8 @@
           </p:sp>
         </mc:Fallback>
       </mc:AlternateContent>
-      <mc:AlternateContent xmlns:mc="http://schemas.openxmlformats.org/markup-compatibility/2006" xmlns:a14="http://schemas.microsoft.com/office/drawing/2010/main">
-        <mc:Choice Requires="a14">
+      <mc:AlternateContent xmlns:mc="http://schemas.openxmlformats.org/markup-compatibility/2006">
+        <mc:Choice xmlns:a14="http://schemas.microsoft.com/office/drawing/2010/main" Requires="a14">
           <p:sp>
             <p:nvSpPr>
               <p:cNvPr id="3" name="Content Placeholder 2">
@@ -12295,7 +14256,7 @@
             <p:spPr>
               <a:xfrm>
                 <a:off x="838200" y="1192292"/>
-                <a:ext cx="10515600" cy="1778026"/>
+                <a:ext cx="10515600" cy="2129036"/>
               </a:xfrm>
             </p:spPr>
             <p:txBody>
@@ -12308,12 +14269,19 @@
                   <a:buNone/>
                 </a:pPr>
                 <a:r>
-                  <a:rPr lang="en-US" sz="1600" b="1" dirty="0"/>
+                  <a:rPr lang="en-US" sz="1400" b="1" dirty="0"/>
                   <a:t>Remember</a:t>
                 </a:r>
                 <a:r>
-                  <a:rPr lang="en-US" sz="1600" dirty="0"/>
-                  <a:t>: The state value is the expected return. So we need a return estimate.</a:t>
+                  <a:rPr lang="en-US" sz="1400" dirty="0"/>
+                  <a:t>: Policy evaluation estimates the value function. </a:t>
+                </a:r>
+                <a:br>
+                  <a:rPr lang="en-US" sz="1400" dirty="0"/>
+                </a:br>
+                <a:r>
+                  <a:rPr lang="en-US" sz="1400" dirty="0"/>
+                  <a:t>The state value is the expected return from following the policy from a state.</a:t>
                 </a:r>
               </a:p>
               <a:p>
@@ -12321,180 +14289,122 @@
                   <a:buNone/>
                 </a:pPr>
                 <a:r>
-                  <a:rPr lang="en-US" sz="1600" b="1" dirty="0"/>
-                  <a:t>Issue</a:t>
-                </a:r>
-                <a:r>
-                  <a:rPr lang="en-US" sz="1600" dirty="0"/>
+                  <a:rPr lang="en-US" sz="1400" b="1" dirty="0"/>
+                  <a:t>Question</a:t>
+                </a:r>
+                <a:r>
+                  <a:rPr lang="en-US" sz="1400" dirty="0"/>
                   <a:t>: How far do we look ahead in the sampled episode to estimate the return?</a:t>
                 </a:r>
-                <a:endParaRPr lang="en-US" sz="1600" b="1" dirty="0"/>
+                <a:endParaRPr lang="en-US" sz="1400" b="1" dirty="0"/>
               </a:p>
               <a:p>
                 <a:pPr marL="0" indent="0">
                   <a:buNone/>
                 </a:pPr>
-                <a:endParaRPr lang="en-US" sz="1600" b="1" dirty="0"/>
+                <a:endParaRPr lang="en-US" sz="1400" b="1" dirty="0"/>
               </a:p>
               <a:p>
                 <a:pPr marL="0" indent="0">
                   <a:buNone/>
                 </a:pPr>
                 <a:r>
-                  <a:rPr lang="en-US" sz="1600" b="1" dirty="0"/>
+                  <a:rPr lang="en-US" sz="1400" b="1" dirty="0"/>
                   <a:t>1-step DT</a:t>
                 </a:r>
               </a:p>
               <a:p>
                 <a:pPr lvl="1"/>
                 <a:r>
-                  <a:rPr lang="en-US" sz="1600" dirty="0"/>
-                  <a:t>We have already discussed 1-step TD: Q-Learning, Sarsa</a:t>
+                  <a:rPr lang="en-US" sz="1400" dirty="0"/>
+                  <a:t>We have already discussed 1-step TD in TD(0) and control algorithms like Q-Learning, Sarsa</a:t>
                 </a:r>
               </a:p>
               <a:p>
                 <a:pPr lvl="1"/>
                 <a:r>
-                  <a:rPr lang="en-US" sz="1600" dirty="0"/>
+                  <a:rPr lang="en-US" sz="1400" dirty="0"/>
                   <a:t>We only observe the next step and its reward. The remaining return is </a:t>
                 </a:r>
                 <a:r>
-                  <a:rPr lang="en-US" sz="1600" b="1" dirty="0"/>
+                  <a:rPr lang="en-US" sz="1400" b="1" dirty="0"/>
                   <a:t>bootstrapped</a:t>
                 </a:r>
                 <a:r>
-                  <a:rPr lang="en-US" sz="1600" dirty="0"/>
+                  <a:rPr lang="en-US" sz="1400" dirty="0"/>
                   <a:t> using the estimate of the next state’s value </a:t>
                 </a:r>
                 <a14:m>
                   <m:oMath xmlns:m="http://schemas.openxmlformats.org/officeDocument/2006/math">
                     <m:r>
-                      <a:rPr lang="en-US" sz="1600" i="1">
+                      <a:rPr lang="en-US" sz="1400" i="1">
                         <a:latin typeface="Cambria Math" panose="02040503050406030204" pitchFamily="18" charset="0"/>
                       </a:rPr>
                       <m:t>𝑉</m:t>
                     </m:r>
-                    <m:r>
-                      <a:rPr lang="en-US" sz="1600" i="1">
-                        <a:latin typeface="Cambria Math" panose="02040503050406030204" pitchFamily="18" charset="0"/>
-                      </a:rPr>
-                      <m:t>(</m:t>
-                    </m:r>
-                    <m:sSub>
-                      <m:sSubPr>
+                    <m:d>
+                      <m:dPr>
                         <m:ctrlPr>
-                          <a:rPr lang="en-US" sz="1600" i="1">
+                          <a:rPr lang="en-US" sz="1400" i="1">
                             <a:latin typeface="Cambria Math" panose="02040503050406030204" pitchFamily="18" charset="0"/>
                           </a:rPr>
                         </m:ctrlPr>
-                      </m:sSubPr>
+                      </m:dPr>
                       <m:e>
-                        <m:r>
-                          <a:rPr lang="en-US" sz="1600" i="1">
-                            <a:latin typeface="Cambria Math" panose="02040503050406030204" pitchFamily="18" charset="0"/>
-                          </a:rPr>
-                          <m:t>𝑆</m:t>
-                        </m:r>
+                        <m:sSub>
+                          <m:sSubPr>
+                            <m:ctrlPr>
+                              <a:rPr lang="en-US" sz="1400" i="1">
+                                <a:latin typeface="Cambria Math" panose="02040503050406030204" pitchFamily="18" charset="0"/>
+                              </a:rPr>
+                            </m:ctrlPr>
+                          </m:sSubPr>
+                          <m:e>
+                            <m:r>
+                              <a:rPr lang="en-US" sz="1400" i="1">
+                                <a:latin typeface="Cambria Math" panose="02040503050406030204" pitchFamily="18" charset="0"/>
+                              </a:rPr>
+                              <m:t>𝑆</m:t>
+                            </m:r>
+                          </m:e>
+                          <m:sub>
+                            <m:r>
+                              <a:rPr lang="en-US" sz="1400" i="1">
+                                <a:latin typeface="Cambria Math" panose="02040503050406030204" pitchFamily="18" charset="0"/>
+                              </a:rPr>
+                              <m:t>𝑡</m:t>
+                            </m:r>
+                            <m:r>
+                              <a:rPr lang="en-US" sz="1400" i="1">
+                                <a:latin typeface="Cambria Math" panose="02040503050406030204" pitchFamily="18" charset="0"/>
+                              </a:rPr>
+                              <m:t>+1</m:t>
+                            </m:r>
+                          </m:sub>
+                        </m:sSub>
                       </m:e>
-                      <m:sub>
-                        <m:r>
-                          <a:rPr lang="en-US" sz="1600" i="1">
-                            <a:latin typeface="Cambria Math" panose="02040503050406030204" pitchFamily="18" charset="0"/>
-                          </a:rPr>
-                          <m:t>𝑡</m:t>
-                        </m:r>
-                        <m:r>
-                          <a:rPr lang="en-US" sz="1600" i="1">
-                            <a:latin typeface="Cambria Math" panose="02040503050406030204" pitchFamily="18" charset="0"/>
-                          </a:rPr>
-                          <m:t>+1</m:t>
-                        </m:r>
-                      </m:sub>
-                    </m:sSub>
-                    <m:r>
-                      <a:rPr lang="en-US" sz="1600" i="1">
-                        <a:latin typeface="Cambria Math" panose="02040503050406030204" pitchFamily="18" charset="0"/>
-                      </a:rPr>
-                      <m:t>)</m:t>
+                    </m:d>
+                    <m:r>
+                      <a:rPr lang="en-US" sz="1400" b="0" i="0" smtClean="0">
+                        <a:latin typeface="Cambria Math" panose="02040503050406030204" pitchFamily="18" charset="0"/>
+                      </a:rPr>
+                      <m:t>.</m:t>
                     </m:r>
                   </m:oMath>
                 </a14:m>
                 <a:r>
-                  <a:rPr lang="en-US" sz="1600" dirty="0"/>
-                  <a:t> or action values </a:t>
-                </a:r>
-                <a14:m>
-                  <m:oMath xmlns:m="http://schemas.openxmlformats.org/officeDocument/2006/math">
-                    <m:r>
-                      <a:rPr lang="en-US" sz="1600" b="0" i="1" smtClean="0">
-                        <a:latin typeface="Cambria Math" panose="02040503050406030204" pitchFamily="18" charset="0"/>
-                      </a:rPr>
-                      <m:t>𝑄</m:t>
-                    </m:r>
-                    <m:r>
-                      <a:rPr lang="en-US" sz="1600" i="1">
-                        <a:latin typeface="Cambria Math" panose="02040503050406030204" pitchFamily="18" charset="0"/>
-                      </a:rPr>
-                      <m:t>(</m:t>
-                    </m:r>
-                    <m:sSub>
-                      <m:sSubPr>
-                        <m:ctrlPr>
-                          <a:rPr lang="en-US" sz="1600" i="1">
-                            <a:latin typeface="Cambria Math" panose="02040503050406030204" pitchFamily="18" charset="0"/>
-                          </a:rPr>
-                        </m:ctrlPr>
-                      </m:sSubPr>
-                      <m:e>
-                        <m:r>
-                          <a:rPr lang="en-US" sz="1600" i="1">
-                            <a:latin typeface="Cambria Math" panose="02040503050406030204" pitchFamily="18" charset="0"/>
-                          </a:rPr>
-                          <m:t>𝑆</m:t>
-                        </m:r>
-                      </m:e>
-                      <m:sub>
-                        <m:r>
-                          <a:rPr lang="en-US" sz="1600" i="1">
-                            <a:latin typeface="Cambria Math" panose="02040503050406030204" pitchFamily="18" charset="0"/>
-                          </a:rPr>
-                          <m:t>𝑡</m:t>
-                        </m:r>
-                        <m:r>
-                          <a:rPr lang="en-US" sz="1600" i="1">
-                            <a:latin typeface="Cambria Math" panose="02040503050406030204" pitchFamily="18" charset="0"/>
-                          </a:rPr>
-                          <m:t>+1</m:t>
-                        </m:r>
-                      </m:sub>
-                    </m:sSub>
-                    <m:r>
-                      <a:rPr lang="en-US" sz="1600" b="0" i="1" smtClean="0">
-                        <a:latin typeface="Cambria Math" panose="02040503050406030204" pitchFamily="18" charset="0"/>
-                      </a:rPr>
-                      <m:t>, ⋅</m:t>
-                    </m:r>
-                    <m:r>
-                      <a:rPr lang="en-US" sz="1600" i="1">
-                        <a:latin typeface="Cambria Math" panose="02040503050406030204" pitchFamily="18" charset="0"/>
-                      </a:rPr>
-                      <m:t>)</m:t>
-                    </m:r>
-                  </m:oMath>
-                </a14:m>
-                <a:r>
-                  <a:rPr lang="en-US" sz="1600" dirty="0"/>
-                  <a:t>. This </a:t>
-                </a:r>
-                <a:r>
-                  <a:rPr lang="en-US" sz="1600" b="1" dirty="0"/>
-                  <a:t>propagates errors</a:t>
-                </a:r>
-                <a:r>
-                  <a:rPr lang="en-US" sz="1600" dirty="0"/>
+                  <a:rPr lang="en-US" sz="1400" dirty="0"/>
+                  <a:t> This </a:t>
+                </a:r>
+                <a:r>
+                  <a:rPr lang="en-US" sz="1400" b="1" dirty="0"/>
+                  <a:t>propagates state value errors</a:t>
+                </a:r>
+                <a:r>
+                  <a:rPr lang="en-US" sz="1400" dirty="0"/>
                   <a:t>!</a:t>
                 </a:r>
-                <a:endParaRPr lang="en-US" sz="1600" i="1" dirty="0">
+                <a:endParaRPr lang="en-US" sz="1400" i="1" dirty="0">
                   <a:latin typeface="Cambria Math" panose="02040503050406030204" pitchFamily="18" charset="0"/>
                 </a:endParaRPr>
               </a:p>
@@ -12502,7 +14412,7 @@
                 <a:pPr marL="0" indent="0">
                   <a:buNone/>
                 </a:pPr>
-                <a:endParaRPr lang="en-US" sz="1600" b="1" i="1" dirty="0">
+                <a:endParaRPr lang="en-US" sz="1400" b="1" i="1" dirty="0">
                   <a:latin typeface="Cambria Math" panose="02040503050406030204" pitchFamily="18" charset="0"/>
                 </a:endParaRPr>
               </a:p>
@@ -12510,7 +14420,7 @@
                 <a:pPr marL="0" indent="0">
                   <a:buNone/>
                 </a:pPr>
-                <a:endParaRPr lang="en-US" sz="1600" b="1" i="1" dirty="0">
+                <a:endParaRPr lang="en-US" sz="1400" b="1" i="1" dirty="0">
                   <a:latin typeface="Cambria Math" panose="02040503050406030204" pitchFamily="18" charset="0"/>
                 </a:endParaRPr>
               </a:p>
@@ -12518,7 +14428,7 @@
                 <a:pPr marL="0" indent="0">
                   <a:buNone/>
                 </a:pPr>
-                <a:endParaRPr lang="en-US" sz="1600" b="1" i="1" dirty="0">
+                <a:endParaRPr lang="en-US" sz="1400" b="1" i="1" dirty="0">
                   <a:latin typeface="Cambria Math" panose="02040503050406030204" pitchFamily="18" charset="0"/>
                 </a:endParaRPr>
               </a:p>
@@ -12526,14 +14436,14 @@
                 <a:pPr marL="0" indent="0">
                   <a:buNone/>
                 </a:pPr>
-                <a:endParaRPr lang="en-US" sz="1600" b="1" i="1" dirty="0">
+                <a:endParaRPr lang="en-US" sz="1400" b="1" i="1" dirty="0">
                   <a:latin typeface="Cambria Math" panose="02040503050406030204" pitchFamily="18" charset="0"/>
                 </a:endParaRPr>
               </a:p>
             </p:txBody>
           </p:sp>
         </mc:Choice>
-        <mc:Fallback xmlns="">
+        <mc:Fallback>
           <p:sp>
             <p:nvSpPr>
               <p:cNvPr id="3" name="Content Placeholder 2">
@@ -12553,12 +14463,12 @@
             <p:spPr>
               <a:xfrm>
                 <a:off x="838200" y="1192292"/>
-                <a:ext cx="10515600" cy="1778026"/>
+                <a:ext cx="10515600" cy="2129036"/>
               </a:xfrm>
               <a:blipFill>
                 <a:blip r:embed="rId3"/>
                 <a:stretch>
-                  <a:fillRect l="-348" t="-2405" b="-24742"/>
+                  <a:fillRect l="-174" t="-1433" r="-406" b="-3438"/>
                 </a:stretch>
               </a:blipFill>
             </p:spPr>
@@ -12577,8 +14487,8 @@
           </p:sp>
         </mc:Fallback>
       </mc:AlternateContent>
-      <mc:AlternateContent xmlns:mc="http://schemas.openxmlformats.org/markup-compatibility/2006" xmlns:a14="http://schemas.microsoft.com/office/drawing/2010/main">
-        <mc:Choice Requires="a14">
+      <mc:AlternateContent xmlns:mc="http://schemas.openxmlformats.org/markup-compatibility/2006">
+        <mc:Choice xmlns:a14="http://schemas.microsoft.com/office/drawing/2010/main" Requires="a14">
           <p:sp>
             <p:nvSpPr>
               <p:cNvPr id="32" name="TextBox 31">
@@ -12593,8 +14503,8 @@
             </p:nvSpPr>
             <p:spPr>
               <a:xfrm>
-                <a:off x="900218" y="4710701"/>
-                <a:ext cx="10610054" cy="830997"/>
+                <a:off x="893238" y="4851304"/>
+                <a:ext cx="10610054" cy="954107"/>
               </a:xfrm>
               <a:prstGeom prst="rect">
                 <a:avLst/>
@@ -12613,7 +14523,7 @@
                 <a14:m>
                   <m:oMath xmlns:m="http://schemas.openxmlformats.org/officeDocument/2006/math">
                     <m:r>
-                      <a:rPr lang="en-US" sz="1600" b="1" i="1" smtClean="0">
+                      <a:rPr lang="en-US" sz="1400" b="1" i="1" smtClean="0">
                         <a:latin typeface="Cambria Math" panose="02040503050406030204" pitchFamily="18" charset="0"/>
                       </a:rPr>
                       <m:t>𝒏</m:t>
@@ -12621,7 +14531,7 @@
                   </m:oMath>
                 </a14:m>
                 <a:r>
-                  <a:rPr lang="en-US" sz="1600" b="1" dirty="0"/>
+                  <a:rPr lang="en-US" sz="1400" b="1" dirty="0"/>
                   <a:t>-step DT</a:t>
                 </a:r>
               </a:p>
@@ -12631,13 +14541,13 @@
                   <a:buChar char="•"/>
                 </a:pPr>
                 <a:r>
-                  <a:rPr lang="en-US" sz="1600" dirty="0"/>
+                  <a:rPr lang="en-US" sz="1400" dirty="0"/>
                   <a:t>Looks </a:t>
                 </a:r>
                 <a14:m>
                   <m:oMath xmlns:m="http://schemas.openxmlformats.org/officeDocument/2006/math">
                     <m:r>
-                      <a:rPr lang="en-US" sz="1600" b="0" i="1" smtClean="0">
+                      <a:rPr lang="en-US" sz="1400" b="0" i="1" smtClean="0">
                         <a:latin typeface="Cambria Math" panose="02040503050406030204" pitchFamily="18" charset="0"/>
                       </a:rPr>
                       <m:t>𝑛</m:t>
@@ -12645,11 +14555,11 @@
                   </m:oMath>
                 </a14:m>
                 <a:r>
-                  <a:rPr lang="en-US" sz="1600" dirty="0"/>
-                  <a:t> time steps ahead and bootstraps the rest. Observed rewards should </a:t>
-                </a:r>
-                <a:r>
-                  <a:rPr lang="en-US" sz="1600" b="1" dirty="0"/>
+                  <a:rPr lang="en-US" sz="1400" dirty="0"/>
+                  <a:t> time steps ahead and bootstraps the rest. Using more observed rewards should help to </a:t>
+                </a:r>
+                <a:r>
+                  <a:rPr lang="en-US" sz="1400" b="1" dirty="0"/>
                   <a:t>reduce the bootstrapping error.</a:t>
                 </a:r>
               </a:p>
@@ -12659,14 +14569,14 @@
                   <a:buChar char="•"/>
                 </a:pPr>
                 <a:r>
-                  <a:rPr lang="en-US" sz="1600" dirty="0"/>
+                  <a:rPr lang="en-US" sz="1400" dirty="0"/>
                   <a:t>TD unifies and generalizes MC and one-step TD.</a:t>
                 </a:r>
               </a:p>
             </p:txBody>
           </p:sp>
         </mc:Choice>
-        <mc:Fallback xmlns="">
+        <mc:Fallback>
           <p:sp>
             <p:nvSpPr>
               <p:cNvPr id="32" name="TextBox 31">
@@ -12683,8 +14593,8 @@
             </p:nvSpPr>
             <p:spPr>
               <a:xfrm>
-                <a:off x="900218" y="4710701"/>
-                <a:ext cx="10610054" cy="830997"/>
+                <a:off x="893238" y="4851304"/>
+                <a:ext cx="10610054" cy="954107"/>
               </a:xfrm>
               <a:prstGeom prst="rect">
                 <a:avLst/>
@@ -12692,7 +14602,7 @@
               <a:blipFill>
                 <a:blip r:embed="rId4"/>
                 <a:stretch>
-                  <a:fillRect t="-2206" b="-8824"/>
+                  <a:fillRect t="-1282" b="-5769"/>
                 </a:stretch>
               </a:blipFill>
             </p:spPr>
@@ -12725,7 +14635,7 @@
         </p:nvGrpSpPr>
         <p:grpSpPr>
           <a:xfrm>
-            <a:off x="3008265" y="3179108"/>
+            <a:off x="1468447" y="3291395"/>
             <a:ext cx="5965095" cy="1634099"/>
             <a:chOff x="2637816" y="2832616"/>
             <a:chExt cx="5965095" cy="1634099"/>
@@ -13442,7 +15352,7 @@
         </p:nvGrpSpPr>
         <p:grpSpPr>
           <a:xfrm>
-            <a:off x="3084949" y="5522208"/>
+            <a:off x="5842341" y="5539571"/>
             <a:ext cx="5403210" cy="832369"/>
             <a:chOff x="3084949" y="5522208"/>
             <a:chExt cx="5403210" cy="832369"/>
@@ -13879,6 +15789,237 @@
           </mc:Fallback>
         </mc:AlternateContent>
       </p:grpSp>
+      <mc:AlternateContent xmlns:mc="http://schemas.openxmlformats.org/markup-compatibility/2006">
+        <mc:Choice xmlns:a14="http://schemas.microsoft.com/office/drawing/2010/main" Requires="a14">
+          <p:sp>
+            <p:nvSpPr>
+              <p:cNvPr id="18" name="TextBox 17">
+                <a:extLst>
+                  <a:ext uri="{FF2B5EF4-FFF2-40B4-BE49-F238E27FC236}">
+                    <a16:creationId xmlns:a16="http://schemas.microsoft.com/office/drawing/2014/main" id="{2FE06CAD-D1C8-994B-C32F-E08E4BB15968}"/>
+                  </a:ext>
+                </a:extLst>
+              </p:cNvPr>
+              <p:cNvSpPr txBox="1"/>
+              <p:nvPr/>
+            </p:nvSpPr>
+            <p:spPr>
+              <a:xfrm>
+                <a:off x="7516908" y="3782654"/>
+                <a:ext cx="2849647" cy="369332"/>
+              </a:xfrm>
+              <a:prstGeom prst="rect">
+                <a:avLst/>
+              </a:prstGeom>
+              <a:noFill/>
+            </p:spPr>
+            <p:txBody>
+              <a:bodyPr wrap="square">
+                <a:spAutoFit/>
+              </a:bodyPr>
+              <a:lstStyle/>
+              <a:p>
+                <a:pPr/>
+                <a14:m>
+                  <m:oMathPara xmlns:m="http://schemas.openxmlformats.org/officeDocument/2006/math">
+                    <m:oMathParaPr>
+                      <m:jc m:val="centerGroup"/>
+                    </m:oMathParaPr>
+                    <m:oMath xmlns:m="http://schemas.openxmlformats.org/officeDocument/2006/math">
+                      <m:sSub>
+                        <m:sSubPr>
+                          <m:ctrlPr>
+                            <a:rPr lang="en-US" sz="1800" b="0" i="1" smtClean="0">
+                              <a:latin typeface="Cambria Math" panose="02040503050406030204" pitchFamily="18" charset="0"/>
+                            </a:rPr>
+                          </m:ctrlPr>
+                        </m:sSubPr>
+                        <m:e>
+                          <m:r>
+                            <a:rPr lang="en-US" sz="1800" b="0" i="1" smtClean="0">
+                              <a:latin typeface="Cambria Math" panose="02040503050406030204" pitchFamily="18" charset="0"/>
+                            </a:rPr>
+                            <m:t>𝐺</m:t>
+                          </m:r>
+                        </m:e>
+                        <m:sub>
+                          <m:r>
+                            <a:rPr lang="en-US" sz="1800" b="0" i="1" smtClean="0">
+                              <a:latin typeface="Cambria Math" panose="02040503050406030204" pitchFamily="18" charset="0"/>
+                            </a:rPr>
+                            <m:t>𝑡</m:t>
+                          </m:r>
+                          <m:r>
+                            <a:rPr lang="en-US" sz="1800" b="0" i="1" smtClean="0">
+                              <a:latin typeface="Cambria Math" panose="02040503050406030204" pitchFamily="18" charset="0"/>
+                            </a:rPr>
+                            <m:t>:</m:t>
+                          </m:r>
+                          <m:r>
+                            <a:rPr lang="en-US" sz="1800" b="0" i="1" smtClean="0">
+                              <a:latin typeface="Cambria Math" panose="02040503050406030204" pitchFamily="18" charset="0"/>
+                            </a:rPr>
+                            <m:t>𝑡</m:t>
+                          </m:r>
+                          <m:r>
+                            <a:rPr lang="en-US" sz="1800" b="0" i="1" smtClean="0">
+                              <a:latin typeface="Cambria Math" panose="02040503050406030204" pitchFamily="18" charset="0"/>
+                            </a:rPr>
+                            <m:t>+1</m:t>
+                          </m:r>
+                        </m:sub>
+                      </m:sSub>
+                      <m:r>
+                        <a:rPr lang="en-US" sz="1800" b="0" i="1" smtClean="0">
+                          <a:latin typeface="Cambria Math" panose="02040503050406030204" pitchFamily="18" charset="0"/>
+                        </a:rPr>
+                        <m:t>=</m:t>
+                      </m:r>
+                      <m:sSub>
+                        <m:sSubPr>
+                          <m:ctrlPr>
+                            <a:rPr lang="en-US" sz="1800" b="0" i="1" smtClean="0">
+                              <a:latin typeface="Cambria Math" panose="02040503050406030204" pitchFamily="18" charset="0"/>
+                            </a:rPr>
+                          </m:ctrlPr>
+                        </m:sSubPr>
+                        <m:e>
+                          <m:r>
+                            <a:rPr lang="en-US" sz="1800" b="0" i="1" smtClean="0">
+                              <a:latin typeface="Cambria Math" panose="02040503050406030204" pitchFamily="18" charset="0"/>
+                            </a:rPr>
+                            <m:t>𝑅</m:t>
+                          </m:r>
+                        </m:e>
+                        <m:sub>
+                          <m:r>
+                            <a:rPr lang="en-US" sz="1800" b="0" i="1" smtClean="0">
+                              <a:latin typeface="Cambria Math" panose="02040503050406030204" pitchFamily="18" charset="0"/>
+                            </a:rPr>
+                            <m:t>𝑡</m:t>
+                          </m:r>
+                          <m:r>
+                            <a:rPr lang="en-US" sz="1800" b="0" i="1" smtClean="0">
+                              <a:latin typeface="Cambria Math" panose="02040503050406030204" pitchFamily="18" charset="0"/>
+                            </a:rPr>
+                            <m:t>+1</m:t>
+                          </m:r>
+                        </m:sub>
+                      </m:sSub>
+                      <m:r>
+                        <a:rPr lang="en-US" sz="1800" b="0" i="1" smtClean="0">
+                          <a:latin typeface="Cambria Math" panose="02040503050406030204" pitchFamily="18" charset="0"/>
+                        </a:rPr>
+                        <m:t>+</m:t>
+                      </m:r>
+                      <m:r>
+                        <a:rPr lang="en-US" sz="1800" b="0" i="1" smtClean="0">
+                          <a:latin typeface="Cambria Math" panose="02040503050406030204" pitchFamily="18" charset="0"/>
+                        </a:rPr>
+                        <m:t>𝛾</m:t>
+                      </m:r>
+                      <m:r>
+                        <a:rPr lang="en-US" sz="1800" b="0" i="1" smtClean="0">
+                          <a:latin typeface="Cambria Math" panose="02040503050406030204" pitchFamily="18" charset="0"/>
+                        </a:rPr>
+                        <m:t>𝑉</m:t>
+                      </m:r>
+                      <m:r>
+                        <a:rPr lang="en-US" sz="1800" b="0" i="1" smtClean="0">
+                          <a:latin typeface="Cambria Math" panose="02040503050406030204" pitchFamily="18" charset="0"/>
+                        </a:rPr>
+                        <m:t>(</m:t>
+                      </m:r>
+                      <m:sSub>
+                        <m:sSubPr>
+                          <m:ctrlPr>
+                            <a:rPr lang="en-US" sz="1800" b="0" i="1" smtClean="0">
+                              <a:latin typeface="Cambria Math" panose="02040503050406030204" pitchFamily="18" charset="0"/>
+                            </a:rPr>
+                          </m:ctrlPr>
+                        </m:sSubPr>
+                        <m:e>
+                          <m:r>
+                            <a:rPr lang="en-US" sz="1800" b="0" i="1" smtClean="0">
+                              <a:latin typeface="Cambria Math" panose="02040503050406030204" pitchFamily="18" charset="0"/>
+                            </a:rPr>
+                            <m:t>𝑆</m:t>
+                          </m:r>
+                        </m:e>
+                        <m:sub>
+                          <m:r>
+                            <a:rPr lang="en-US" sz="1800" b="0" i="1" smtClean="0">
+                              <a:latin typeface="Cambria Math" panose="02040503050406030204" pitchFamily="18" charset="0"/>
+                            </a:rPr>
+                            <m:t>𝑡</m:t>
+                          </m:r>
+                          <m:r>
+                            <a:rPr lang="en-US" sz="1800" b="0" i="1" smtClean="0">
+                              <a:latin typeface="Cambria Math" panose="02040503050406030204" pitchFamily="18" charset="0"/>
+                            </a:rPr>
+                            <m:t>+1</m:t>
+                          </m:r>
+                        </m:sub>
+                      </m:sSub>
+                      <m:r>
+                        <a:rPr lang="en-US" sz="1800" b="0" i="1" smtClean="0">
+                          <a:latin typeface="Cambria Math" panose="02040503050406030204" pitchFamily="18" charset="0"/>
+                        </a:rPr>
+                        <m:t>)</m:t>
+                      </m:r>
+                    </m:oMath>
+                  </m:oMathPara>
+                </a14:m>
+                <a:endParaRPr lang="en-US" sz="1800" dirty="0"/>
+              </a:p>
+            </p:txBody>
+          </p:sp>
+        </mc:Choice>
+        <mc:Fallback>
+          <p:sp>
+            <p:nvSpPr>
+              <p:cNvPr id="18" name="TextBox 17">
+                <a:extLst>
+                  <a:ext uri="{FF2B5EF4-FFF2-40B4-BE49-F238E27FC236}">
+                    <a16:creationId xmlns:a16="http://schemas.microsoft.com/office/drawing/2014/main" id="{2FE06CAD-D1C8-994B-C32F-E08E4BB15968}"/>
+                  </a:ext>
+                </a:extLst>
+              </p:cNvPr>
+              <p:cNvSpPr txBox="1">
+                <a:spLocks noRot="1" noChangeAspect="1" noMove="1" noResize="1" noEditPoints="1" noAdjustHandles="1" noChangeArrowheads="1" noChangeShapeType="1" noTextEdit="1"/>
+              </p:cNvSpPr>
+              <p:nvPr/>
+            </p:nvSpPr>
+            <p:spPr>
+              <a:xfrm>
+                <a:off x="7516908" y="3782654"/>
+                <a:ext cx="2849647" cy="369332"/>
+              </a:xfrm>
+              <a:prstGeom prst="rect">
+                <a:avLst/>
+              </a:prstGeom>
+              <a:blipFill>
+                <a:blip r:embed="rId10"/>
+                <a:stretch>
+                  <a:fillRect b="-13333"/>
+                </a:stretch>
+              </a:blipFill>
+            </p:spPr>
+            <p:txBody>
+              <a:bodyPr/>
+              <a:lstStyle/>
+              <a:p>
+                <a:r>
+                  <a:rPr lang="en-US">
+                    <a:noFill/>
+                  </a:rPr>
+                  <a:t> </a:t>
+                </a:r>
+              </a:p>
+            </p:txBody>
+          </p:sp>
+        </mc:Fallback>
+      </mc:AlternateContent>
     </p:spTree>
     <p:extLst>
       <p:ext uri="{BB962C8B-B14F-4D97-AF65-F5344CB8AC3E}">
@@ -13910,7 +16051,7 @@
                             </p:stCondLst>
                             <p:childTnLst>
                               <p:par>
-                                <p:cTn id="5" presetID="1" presetClass="entr" presetSubtype="0" fill="hold" grpId="0" nodeType="clickEffect">
+                                <p:cTn id="5" presetID="1" presetClass="entr" presetSubtype="0" fill="hold" nodeType="clickEffect">
                                   <p:stCondLst>
                                     <p:cond delay="0"/>
                                   </p:stCondLst>
@@ -13923,7 +16064,42 @@
                                           </p:stCondLst>
                                         </p:cTn>
                                         <p:tgtEl>
-                                          <p:spTgt spid="32"/>
+                                          <p:spTgt spid="3">
+                                            <p:txEl>
+                                              <p:pRg st="0" end="0"/>
+                                            </p:txEl>
+                                          </p:spTgt>
+                                        </p:tgtEl>
+                                        <p:attrNameLst>
+                                          <p:attrName>style.visibility</p:attrName>
+                                        </p:attrNameLst>
+                                      </p:cBhvr>
+                                      <p:to>
+                                        <p:strVal val="visible"/>
+                                      </p:to>
+                                    </p:set>
+                                  </p:childTnLst>
+                                </p:cTn>
+                              </p:par>
+                              <p:par>
+                                <p:cTn id="7" presetID="1" presetClass="entr" presetSubtype="0" fill="hold" nodeType="withEffect">
+                                  <p:stCondLst>
+                                    <p:cond delay="0"/>
+                                  </p:stCondLst>
+                                  <p:childTnLst>
+                                    <p:set>
+                                      <p:cBhvr>
+                                        <p:cTn id="8" dur="1" fill="hold">
+                                          <p:stCondLst>
+                                            <p:cond delay="0"/>
+                                          </p:stCondLst>
+                                        </p:cTn>
+                                        <p:tgtEl>
+                                          <p:spTgt spid="3">
+                                            <p:txEl>
+                                              <p:pRg st="1" end="1"/>
+                                            </p:txEl>
+                                          </p:spTgt>
                                         </p:tgtEl>
                                         <p:attrNameLst>
                                           <p:attrName>style.visibility</p:attrName>
@@ -13939,21 +16115,288 @@
                             </p:childTnLst>
                           </p:cTn>
                         </p:par>
+                      </p:childTnLst>
+                    </p:cTn>
+                  </p:par>
+                  <p:par>
+                    <p:cTn id="9" fill="hold">
+                      <p:stCondLst>
+                        <p:cond delay="indefinite"/>
+                      </p:stCondLst>
+                      <p:childTnLst>
                         <p:par>
-                          <p:cTn id="7" fill="hold">
+                          <p:cTn id="10" fill="hold">
                             <p:stCondLst>
                               <p:cond delay="0"/>
                             </p:stCondLst>
                             <p:childTnLst>
                               <p:par>
-                                <p:cTn id="8" presetID="1" presetClass="entr" presetSubtype="0" fill="hold" nodeType="afterEffect">
+                                <p:cTn id="11" presetID="1" presetClass="entr" presetSubtype="0" fill="hold" nodeType="clickEffect">
                                   <p:stCondLst>
                                     <p:cond delay="0"/>
                                   </p:stCondLst>
                                   <p:childTnLst>
                                     <p:set>
                                       <p:cBhvr>
-                                        <p:cTn id="9" dur="1" fill="hold">
+                                        <p:cTn id="12" dur="1" fill="hold">
+                                          <p:stCondLst>
+                                            <p:cond delay="0"/>
+                                          </p:stCondLst>
+                                        </p:cTn>
+                                        <p:tgtEl>
+                                          <p:spTgt spid="3">
+                                            <p:txEl>
+                                              <p:pRg st="3" end="3"/>
+                                            </p:txEl>
+                                          </p:spTgt>
+                                        </p:tgtEl>
+                                        <p:attrNameLst>
+                                          <p:attrName>style.visibility</p:attrName>
+                                        </p:attrNameLst>
+                                      </p:cBhvr>
+                                      <p:to>
+                                        <p:strVal val="visible"/>
+                                      </p:to>
+                                    </p:set>
+                                  </p:childTnLst>
+                                </p:cTn>
+                              </p:par>
+                              <p:par>
+                                <p:cTn id="13" presetID="1" presetClass="entr" presetSubtype="0" fill="hold" nodeType="withEffect">
+                                  <p:stCondLst>
+                                    <p:cond delay="0"/>
+                                  </p:stCondLst>
+                                  <p:childTnLst>
+                                    <p:set>
+                                      <p:cBhvr>
+                                        <p:cTn id="14" dur="1" fill="hold">
+                                          <p:stCondLst>
+                                            <p:cond delay="0"/>
+                                          </p:stCondLst>
+                                        </p:cTn>
+                                        <p:tgtEl>
+                                          <p:spTgt spid="3">
+                                            <p:txEl>
+                                              <p:pRg st="4" end="4"/>
+                                            </p:txEl>
+                                          </p:spTgt>
+                                        </p:tgtEl>
+                                        <p:attrNameLst>
+                                          <p:attrName>style.visibility</p:attrName>
+                                        </p:attrNameLst>
+                                      </p:cBhvr>
+                                      <p:to>
+                                        <p:strVal val="visible"/>
+                                      </p:to>
+                                    </p:set>
+                                  </p:childTnLst>
+                                </p:cTn>
+                              </p:par>
+                              <p:par>
+                                <p:cTn id="15" presetID="1" presetClass="entr" presetSubtype="0" fill="hold" nodeType="withEffect">
+                                  <p:stCondLst>
+                                    <p:cond delay="0"/>
+                                  </p:stCondLst>
+                                  <p:childTnLst>
+                                    <p:set>
+                                      <p:cBhvr>
+                                        <p:cTn id="16" dur="1" fill="hold">
+                                          <p:stCondLst>
+                                            <p:cond delay="0"/>
+                                          </p:stCondLst>
+                                        </p:cTn>
+                                        <p:tgtEl>
+                                          <p:spTgt spid="3">
+                                            <p:txEl>
+                                              <p:pRg st="5" end="5"/>
+                                            </p:txEl>
+                                          </p:spTgt>
+                                        </p:tgtEl>
+                                        <p:attrNameLst>
+                                          <p:attrName>style.visibility</p:attrName>
+                                        </p:attrNameLst>
+                                      </p:cBhvr>
+                                      <p:to>
+                                        <p:strVal val="visible"/>
+                                      </p:to>
+                                    </p:set>
+                                  </p:childTnLst>
+                                </p:cTn>
+                              </p:par>
+                              <p:par>
+                                <p:cTn id="17" presetID="1" presetClass="entr" presetSubtype="0" fill="hold" nodeType="withEffect">
+                                  <p:stCondLst>
+                                    <p:cond delay="0"/>
+                                  </p:stCondLst>
+                                  <p:childTnLst>
+                                    <p:set>
+                                      <p:cBhvr>
+                                        <p:cTn id="18" dur="1" fill="hold">
+                                          <p:stCondLst>
+                                            <p:cond delay="0"/>
+                                          </p:stCondLst>
+                                        </p:cTn>
+                                        <p:tgtEl>
+                                          <p:spTgt spid="6"/>
+                                        </p:tgtEl>
+                                        <p:attrNameLst>
+                                          <p:attrName>style.visibility</p:attrName>
+                                        </p:attrNameLst>
+                                      </p:cBhvr>
+                                      <p:to>
+                                        <p:strVal val="visible"/>
+                                      </p:to>
+                                    </p:set>
+                                  </p:childTnLst>
+                                </p:cTn>
+                              </p:par>
+                              <p:par>
+                                <p:cTn id="19" presetID="1" presetClass="entr" presetSubtype="0" fill="hold" grpId="0" nodeType="withEffect">
+                                  <p:stCondLst>
+                                    <p:cond delay="0"/>
+                                  </p:stCondLst>
+                                  <p:childTnLst>
+                                    <p:set>
+                                      <p:cBhvr>
+                                        <p:cTn id="20" dur="1" fill="hold">
+                                          <p:stCondLst>
+                                            <p:cond delay="0"/>
+                                          </p:stCondLst>
+                                        </p:cTn>
+                                        <p:tgtEl>
+                                          <p:spTgt spid="18"/>
+                                        </p:tgtEl>
+                                        <p:attrNameLst>
+                                          <p:attrName>style.visibility</p:attrName>
+                                        </p:attrNameLst>
+                                      </p:cBhvr>
+                                      <p:to>
+                                        <p:strVal val="visible"/>
+                                      </p:to>
+                                    </p:set>
+                                  </p:childTnLst>
+                                </p:cTn>
+                              </p:par>
+                            </p:childTnLst>
+                          </p:cTn>
+                        </p:par>
+                      </p:childTnLst>
+                    </p:cTn>
+                  </p:par>
+                  <p:par>
+                    <p:cTn id="21" fill="hold">
+                      <p:stCondLst>
+                        <p:cond delay="indefinite"/>
+                      </p:stCondLst>
+                      <p:childTnLst>
+                        <p:par>
+                          <p:cTn id="22" fill="hold">
+                            <p:stCondLst>
+                              <p:cond delay="0"/>
+                            </p:stCondLst>
+                            <p:childTnLst>
+                              <p:par>
+                                <p:cTn id="23" presetID="1" presetClass="entr" presetSubtype="0" fill="hold" nodeType="clickEffect">
+                                  <p:stCondLst>
+                                    <p:cond delay="0"/>
+                                  </p:stCondLst>
+                                  <p:childTnLst>
+                                    <p:set>
+                                      <p:cBhvr>
+                                        <p:cTn id="24" dur="1" fill="hold">
+                                          <p:stCondLst>
+                                            <p:cond delay="0"/>
+                                          </p:stCondLst>
+                                        </p:cTn>
+                                        <p:tgtEl>
+                                          <p:spTgt spid="32">
+                                            <p:txEl>
+                                              <p:pRg st="0" end="0"/>
+                                            </p:txEl>
+                                          </p:spTgt>
+                                        </p:tgtEl>
+                                        <p:attrNameLst>
+                                          <p:attrName>style.visibility</p:attrName>
+                                        </p:attrNameLst>
+                                      </p:cBhvr>
+                                      <p:to>
+                                        <p:strVal val="visible"/>
+                                      </p:to>
+                                    </p:set>
+                                  </p:childTnLst>
+                                </p:cTn>
+                              </p:par>
+                              <p:par>
+                                <p:cTn id="25" presetID="1" presetClass="entr" presetSubtype="0" fill="hold" nodeType="withEffect">
+                                  <p:stCondLst>
+                                    <p:cond delay="0"/>
+                                  </p:stCondLst>
+                                  <p:childTnLst>
+                                    <p:set>
+                                      <p:cBhvr>
+                                        <p:cTn id="26" dur="1" fill="hold">
+                                          <p:stCondLst>
+                                            <p:cond delay="0"/>
+                                          </p:stCondLst>
+                                        </p:cTn>
+                                        <p:tgtEl>
+                                          <p:spTgt spid="32">
+                                            <p:txEl>
+                                              <p:pRg st="1" end="1"/>
+                                            </p:txEl>
+                                          </p:spTgt>
+                                        </p:tgtEl>
+                                        <p:attrNameLst>
+                                          <p:attrName>style.visibility</p:attrName>
+                                        </p:attrNameLst>
+                                      </p:cBhvr>
+                                      <p:to>
+                                        <p:strVal val="visible"/>
+                                      </p:to>
+                                    </p:set>
+                                  </p:childTnLst>
+                                </p:cTn>
+                              </p:par>
+                              <p:par>
+                                <p:cTn id="27" presetID="1" presetClass="entr" presetSubtype="0" fill="hold" nodeType="withEffect">
+                                  <p:stCondLst>
+                                    <p:cond delay="0"/>
+                                  </p:stCondLst>
+                                  <p:childTnLst>
+                                    <p:set>
+                                      <p:cBhvr>
+                                        <p:cTn id="28" dur="1" fill="hold">
+                                          <p:stCondLst>
+                                            <p:cond delay="0"/>
+                                          </p:stCondLst>
+                                        </p:cTn>
+                                        <p:tgtEl>
+                                          <p:spTgt spid="32">
+                                            <p:txEl>
+                                              <p:pRg st="2" end="2"/>
+                                            </p:txEl>
+                                          </p:spTgt>
+                                        </p:tgtEl>
+                                        <p:attrNameLst>
+                                          <p:attrName>style.visibility</p:attrName>
+                                        </p:attrNameLst>
+                                      </p:cBhvr>
+                                      <p:to>
+                                        <p:strVal val="visible"/>
+                                      </p:to>
+                                    </p:set>
+                                  </p:childTnLst>
+                                </p:cTn>
+                              </p:par>
+                              <p:par>
+                                <p:cTn id="29" presetID="1" presetClass="entr" presetSubtype="0" fill="hold" nodeType="withEffect">
+                                  <p:stCondLst>
+                                    <p:cond delay="0"/>
+                                  </p:stCondLst>
+                                  <p:childTnLst>
+                                    <p:set>
+                                      <p:cBhvr>
+                                        <p:cTn id="30" dur="1" fill="hold">
                                           <p:stCondLst>
                                             <p:cond delay="0"/>
                                           </p:stCondLst>
@@ -14000,7 +16443,7 @@
       </p:par>
     </p:tnLst>
     <p:bldLst>
-      <p:bldP spid="32" grpId="0"/>
+      <p:bldP spid="18" grpId="0"/>
     </p:bldLst>
   </p:timing>
 </p:sld>
@@ -14069,13 +16512,13 @@
         </p:nvSpPr>
         <p:spPr>
           <a:xfrm>
-            <a:off x="838200" y="1397330"/>
-            <a:ext cx="10515600" cy="816099"/>
+            <a:off x="838200" y="1397331"/>
+            <a:ext cx="10515600" cy="699670"/>
           </a:xfrm>
         </p:spPr>
         <p:txBody>
           <a:bodyPr>
-            <a:normAutofit lnSpcReduction="10000"/>
+            <a:normAutofit fontScale="92500" lnSpcReduction="20000"/>
           </a:bodyPr>
           <a:lstStyle/>
           <a:p>
@@ -14085,7 +16528,14 @@
             </a:r>
             <a:r>
               <a:rPr lang="en-US" dirty="0"/>
-              <a:t>: Maze with only one final reward for reaching the goal. We learn from the </a:t>
+              <a:t>: Maze with only one final reward for reaching the goal. </a:t>
+            </a:r>
+            <a:br>
+              <a:rPr lang="en-US" dirty="0"/>
+            </a:br>
+            <a:r>
+              <a:rPr lang="en-US" dirty="0"/>
+              <a:t>We learn from the </a:t>
             </a:r>
             <a:r>
               <a:rPr lang="en-US" b="1" dirty="0"/>
@@ -14268,7 +16718,7 @@
             <a:pPr algn="ctr"/>
             <a:r>
               <a:rPr lang="en-US" dirty="0"/>
-              <a:t>State value can be updated with the goal reward even if it is 10 states away.</a:t>
+              <a:t>State value can be updated with the goal reward even if it is up to 10 steps away.</a:t>
             </a:r>
             <a:br>
               <a:rPr lang="en-US" dirty="0"/>
@@ -14330,7 +16780,7 @@
         <p:spPr>
           <a:xfrm>
             <a:off x="965200" y="5230699"/>
-            <a:ext cx="3069772" cy="646331"/>
+            <a:ext cx="3069772" cy="923330"/>
           </a:xfrm>
           <a:prstGeom prst="rect">
             <a:avLst/>
@@ -14346,7 +16796,7 @@
             <a:pPr algn="ctr"/>
             <a:r>
               <a:rPr lang="en-US" dirty="0"/>
-              <a:t>Updates in reverse order all state values on the path.</a:t>
+              <a:t>Updates in reverse order all state values on the path using the goal reward.</a:t>
             </a:r>
           </a:p>
         </p:txBody>
@@ -14382,7 +16832,7 @@
             <a:pPr algn="ctr"/>
             <a:r>
               <a:rPr lang="en-US" dirty="0"/>
-              <a:t>Can only updates one state value.</a:t>
+              <a:t>Can only update one state value with the goal reward.</a:t>
             </a:r>
           </a:p>
         </p:txBody>
@@ -16871,8 +19321,8 @@
           </p:sp>
         </mc:Fallback>
       </mc:AlternateContent>
-      <mc:AlternateContent xmlns:mc="http://schemas.openxmlformats.org/markup-compatibility/2006" xmlns:a14="http://schemas.microsoft.com/office/drawing/2010/main">
-        <mc:Choice Requires="a14">
+      <mc:AlternateContent xmlns:mc="http://schemas.openxmlformats.org/markup-compatibility/2006">
+        <mc:Choice xmlns:a14="http://schemas.microsoft.com/office/drawing/2010/main" Requires="a14">
           <p:sp>
             <p:nvSpPr>
               <p:cNvPr id="26" name="TextBox 25">
@@ -16978,7 +19428,7 @@
                 </a14:m>
                 <a:r>
                   <a:rPr lang="en-US" sz="1400" dirty="0"/>
-                  <a:t>  … the return is calculated from the rewards up to </a:t>
+                  <a:t>  … the </a:t>
                 </a:r>
                 <a14:m>
                   <m:oMath xmlns:m="http://schemas.openxmlformats.org/officeDocument/2006/math">
@@ -16986,31 +19436,45 @@
                       <a:rPr lang="en-US" sz="1400" b="0" i="1" smtClean="0">
                         <a:latin typeface="Cambria Math" panose="02040503050406030204" pitchFamily="18" charset="0"/>
                       </a:rPr>
-                      <m:t>𝑡</m:t>
-                    </m:r>
-                    <m:r>
-                      <a:rPr lang="en-US" sz="1400" b="0" i="1" smtClean="0">
-                        <a:latin typeface="Cambria Math" panose="02040503050406030204" pitchFamily="18" charset="0"/>
-                      </a:rPr>
-                      <m:t>+</m:t>
-                    </m:r>
-                    <m:r>
-                      <a:rPr lang="en-US" sz="1400" b="0" i="1" smtClean="0">
-                        <a:latin typeface="Cambria Math" panose="02040503050406030204" pitchFamily="18" charset="0"/>
-                      </a:rPr>
                       <m:t>𝑛</m:t>
                     </m:r>
                   </m:oMath>
                 </a14:m>
                 <a:r>
                   <a:rPr lang="en-US" sz="1400" dirty="0"/>
-                  <a:t> and the rest is bootstrapped using the value function estimate.</a:t>
+                  <a:t>-step return is calculated from the rewards up to </a:t>
+                </a:r>
+                <a14:m>
+                  <m:oMath xmlns:m="http://schemas.openxmlformats.org/officeDocument/2006/math">
+                    <m:r>
+                      <a:rPr lang="en-US" sz="1400" b="0" i="1" smtClean="0">
+                        <a:latin typeface="Cambria Math" panose="02040503050406030204" pitchFamily="18" charset="0"/>
+                      </a:rPr>
+                      <m:t>𝑡</m:t>
+                    </m:r>
+                    <m:r>
+                      <a:rPr lang="en-US" sz="1400" b="0" i="1" smtClean="0">
+                        <a:latin typeface="Cambria Math" panose="02040503050406030204" pitchFamily="18" charset="0"/>
+                      </a:rPr>
+                      <m:t>+</m:t>
+                    </m:r>
+                    <m:r>
+                      <a:rPr lang="en-US" sz="1400" b="0" i="1" smtClean="0">
+                        <a:latin typeface="Cambria Math" panose="02040503050406030204" pitchFamily="18" charset="0"/>
+                      </a:rPr>
+                      <m:t>𝑛</m:t>
+                    </m:r>
+                  </m:oMath>
+                </a14:m>
+                <a:r>
+                  <a:rPr lang="en-US" sz="1400" dirty="0"/>
+                  <a:t> and the rest is bootstrapped using the value function.</a:t>
                 </a:r>
               </a:p>
             </p:txBody>
           </p:sp>
         </mc:Choice>
-        <mc:Fallback xmlns="">
+        <mc:Fallback>
           <p:sp>
             <p:nvSpPr>
               <p:cNvPr id="26" name="TextBox 25">
@@ -17036,7 +19500,7 @@
               <a:blipFill>
                 <a:blip r:embed="rId10"/>
                 <a:stretch>
-                  <a:fillRect l="-513" r="-769" b="-2597"/>
+                  <a:fillRect l="-513" r="-1026" b="-2597"/>
                 </a:stretch>
               </a:blipFill>
             </p:spPr>
@@ -18042,59 +20506,125 @@
           </p:sp>
         </mc:Fallback>
       </mc:AlternateContent>
-      <p:sp>
-        <p:nvSpPr>
-          <p:cNvPr id="14" name="Speech Bubble: Rectangle with Corners Rounded 13">
-            <a:extLst>
-              <a:ext uri="{FF2B5EF4-FFF2-40B4-BE49-F238E27FC236}">
-                <a16:creationId xmlns:a16="http://schemas.microsoft.com/office/drawing/2014/main" id="{203B6702-D9F1-9CDF-DE51-C7708AD222CA}"/>
-              </a:ext>
-            </a:extLst>
-          </p:cNvPr>
-          <p:cNvSpPr/>
-          <p:nvPr/>
-        </p:nvSpPr>
-        <p:spPr>
-          <a:xfrm>
-            <a:off x="754424" y="5702958"/>
-            <a:ext cx="1458686" cy="338555"/>
-          </a:xfrm>
-          <a:prstGeom prst="wedgeRoundRectCallout">
-            <a:avLst>
-              <a:gd name="adj1" fmla="val 122871"/>
-              <a:gd name="adj2" fmla="val 4627"/>
-              <a:gd name="adj3" fmla="val 16667"/>
-            </a:avLst>
-          </a:prstGeom>
-        </p:spPr>
-        <p:style>
-          <a:lnRef idx="2">
-            <a:schemeClr val="accent1">
-              <a:shade val="15000"/>
-            </a:schemeClr>
-          </a:lnRef>
-          <a:fillRef idx="1">
-            <a:schemeClr val="accent1"/>
-          </a:fillRef>
-          <a:effectRef idx="0">
-            <a:schemeClr val="accent1"/>
-          </a:effectRef>
-          <a:fontRef idx="minor">
-            <a:schemeClr val="lt1"/>
-          </a:fontRef>
-        </p:style>
-        <p:txBody>
-          <a:bodyPr rtlCol="0" anchor="ctr"/>
-          <a:lstStyle/>
-          <a:p>
-            <a:pPr algn="ctr"/>
-            <a:r>
-              <a:rPr lang="en-US" sz="1600" dirty="0"/>
-              <a:t>The update</a:t>
-            </a:r>
-          </a:p>
-        </p:txBody>
-      </p:sp>
+      <mc:AlternateContent xmlns:mc="http://schemas.openxmlformats.org/markup-compatibility/2006">
+        <mc:Choice xmlns:a14="http://schemas.microsoft.com/office/drawing/2010/main" Requires="a14">
+          <p:sp>
+            <p:nvSpPr>
+              <p:cNvPr id="14" name="Speech Bubble: Rectangle with Corners Rounded 13">
+                <a:extLst>
+                  <a:ext uri="{FF2B5EF4-FFF2-40B4-BE49-F238E27FC236}">
+                    <a16:creationId xmlns:a16="http://schemas.microsoft.com/office/drawing/2014/main" id="{203B6702-D9F1-9CDF-DE51-C7708AD222CA}"/>
+                  </a:ext>
+                </a:extLst>
+              </p:cNvPr>
+              <p:cNvSpPr/>
+              <p:nvPr/>
+            </p:nvSpPr>
+            <p:spPr>
+              <a:xfrm>
+                <a:off x="292308" y="5702958"/>
+                <a:ext cx="1920802" cy="645376"/>
+              </a:xfrm>
+              <a:prstGeom prst="wedgeRoundRectCallout">
+                <a:avLst>
+                  <a:gd name="adj1" fmla="val 104922"/>
+                  <a:gd name="adj2" fmla="val -26729"/>
+                  <a:gd name="adj3" fmla="val 16667"/>
+                </a:avLst>
+              </a:prstGeom>
+            </p:spPr>
+            <p:style>
+              <a:lnRef idx="2">
+                <a:schemeClr val="accent1">
+                  <a:shade val="15000"/>
+                </a:schemeClr>
+              </a:lnRef>
+              <a:fillRef idx="1">
+                <a:schemeClr val="accent1"/>
+              </a:fillRef>
+              <a:effectRef idx="0">
+                <a:schemeClr val="accent1"/>
+              </a:effectRef>
+              <a:fontRef idx="minor">
+                <a:schemeClr val="lt1"/>
+              </a:fontRef>
+            </p:style>
+            <p:txBody>
+              <a:bodyPr rtlCol="0" anchor="ctr"/>
+              <a:lstStyle/>
+              <a:p>
+                <a:pPr algn="ctr"/>
+                <a:r>
+                  <a:rPr lang="en-US" sz="1600" dirty="0"/>
+                  <a:t>The update is delayed </a:t>
+                </a:r>
+                <a14:m>
+                  <m:oMath xmlns:m="http://schemas.openxmlformats.org/officeDocument/2006/math">
+                    <m:r>
+                      <a:rPr lang="en-US" sz="1600" b="0" i="1" smtClean="0">
+                        <a:latin typeface="Cambria Math" panose="02040503050406030204" pitchFamily="18" charset="0"/>
+                      </a:rPr>
+                      <m:t>𝑛</m:t>
+                    </m:r>
+                  </m:oMath>
+                </a14:m>
+                <a:r>
+                  <a:rPr lang="en-US" sz="1600" dirty="0"/>
+                  <a:t> steps</a:t>
+                </a:r>
+              </a:p>
+            </p:txBody>
+          </p:sp>
+        </mc:Choice>
+        <mc:Fallback>
+          <p:sp>
+            <p:nvSpPr>
+              <p:cNvPr id="14" name="Speech Bubble: Rectangle with Corners Rounded 13">
+                <a:extLst>
+                  <a:ext uri="{FF2B5EF4-FFF2-40B4-BE49-F238E27FC236}">
+                    <a16:creationId xmlns:a16="http://schemas.microsoft.com/office/drawing/2014/main" id="{203B6702-D9F1-9CDF-DE51-C7708AD222CA}"/>
+                  </a:ext>
+                </a:extLst>
+              </p:cNvPr>
+              <p:cNvSpPr>
+                <a:spLocks noRot="1" noChangeAspect="1" noMove="1" noResize="1" noEditPoints="1" noAdjustHandles="1" noChangeArrowheads="1" noChangeShapeType="1" noTextEdit="1"/>
+              </p:cNvSpPr>
+              <p:nvPr/>
+            </p:nvSpPr>
+            <p:spPr>
+              <a:xfrm>
+                <a:off x="292308" y="5702958"/>
+                <a:ext cx="1920802" cy="645376"/>
+              </a:xfrm>
+              <a:prstGeom prst="wedgeRoundRectCallout">
+                <a:avLst>
+                  <a:gd name="adj1" fmla="val 104922"/>
+                  <a:gd name="adj2" fmla="val -26729"/>
+                  <a:gd name="adj3" fmla="val 16667"/>
+                </a:avLst>
+              </a:prstGeom>
+              <a:blipFill>
+                <a:blip r:embed="rId6"/>
+                <a:stretch>
+                  <a:fillRect b="-5556"/>
+                </a:stretch>
+              </a:blipFill>
+            </p:spPr>
+            <p:txBody>
+              <a:bodyPr/>
+              <a:lstStyle/>
+              <a:p>
+                <a:r>
+                  <a:rPr lang="en-US">
+                    <a:noFill/>
+                  </a:rPr>
+                  <a:t> </a:t>
+                </a:r>
+              </a:p>
+            </p:txBody>
+          </p:sp>
+        </mc:Fallback>
+      </mc:AlternateContent>
       <p:grpSp>
         <p:nvGrpSpPr>
           <p:cNvPr id="20" name="Group 19">
@@ -18252,7 +20782,7 @@
                     <a:avLst/>
                   </a:prstGeom>
                   <a:blipFill>
-                    <a:blip r:embed="rId6"/>
+                    <a:blip r:embed="rId7"/>
                     <a:stretch>
                       <a:fillRect/>
                     </a:stretch>
@@ -18348,7 +20878,7 @@
                     <a:avLst/>
                   </a:prstGeom>
                   <a:blipFill>
-                    <a:blip r:embed="rId7"/>
+                    <a:blip r:embed="rId8"/>
                     <a:stretch>
                       <a:fillRect/>
                     </a:stretch>
@@ -18441,7 +20971,7 @@
                     <a:avLst/>
                   </a:prstGeom>
                   <a:blipFill>
-                    <a:blip r:embed="rId8"/>
+                    <a:blip r:embed="rId9"/>
                     <a:stretch>
                       <a:fillRect t="-8333" b="-28333"/>
                     </a:stretch>
@@ -18638,7 +21168,7 @@
                   <a:avLst/>
                 </a:prstGeom>
                 <a:blipFill>
-                  <a:blip r:embed="rId9"/>
+                  <a:blip r:embed="rId10"/>
                   <a:stretch>
                     <a:fillRect l="-917" t="-3922" b="-19608"/>
                   </a:stretch>
@@ -18718,8 +21248,8 @@
           </a:p>
         </p:txBody>
       </p:sp>
-      <mc:AlternateContent xmlns:mc="http://schemas.openxmlformats.org/markup-compatibility/2006" xmlns:a14="http://schemas.microsoft.com/office/drawing/2010/main">
-        <mc:Choice Requires="a14">
+      <mc:AlternateContent xmlns:mc="http://schemas.openxmlformats.org/markup-compatibility/2006">
+        <mc:Choice xmlns:a14="http://schemas.microsoft.com/office/drawing/2010/main" Requires="a14">
           <p:sp>
             <p:nvSpPr>
               <p:cNvPr id="3" name="Content Placeholder 2">
@@ -18738,13 +21268,13 @@
             </p:nvSpPr>
             <p:spPr>
               <a:xfrm>
-                <a:off x="838200" y="3770851"/>
-                <a:ext cx="10515600" cy="2406112"/>
+                <a:off x="838200" y="3949907"/>
+                <a:ext cx="10515600" cy="2398427"/>
               </a:xfrm>
             </p:spPr>
             <p:txBody>
               <a:bodyPr>
-                <a:normAutofit fontScale="85000" lnSpcReduction="10000"/>
+                <a:normAutofit fontScale="70000" lnSpcReduction="20000"/>
               </a:bodyPr>
               <a:lstStyle/>
               <a:p>
@@ -18757,321 +21287,362 @@
                 </a:r>
                 <a:r>
                   <a:rPr lang="en-US" dirty="0"/>
-                  <a:t>: Using observed rewards (which have in expectation no error) in </a:t>
-                </a:r>
-                <a:endParaRPr lang="en-US" i="1" dirty="0">
-                  <a:latin typeface="Cambria Math" panose="02040503050406030204" pitchFamily="18" charset="0"/>
-                  <a:ea typeface="Cambria Math" panose="02040503050406030204" pitchFamily="18" charset="0"/>
-                </a:endParaRPr>
+                  <a:t>: </a:t>
+                </a:r>
+                <a14:m>
+                  <m:oMath xmlns:m="http://schemas.openxmlformats.org/officeDocument/2006/math">
+                    <m:sSub>
+                      <m:sSubPr>
+                        <m:ctrlPr>
+                          <a:rPr lang="en-US" i="1">
+                            <a:latin typeface="Cambria Math" panose="02040503050406030204" pitchFamily="18" charset="0"/>
+                            <a:ea typeface="Cambria Math" panose="02040503050406030204" pitchFamily="18" charset="0"/>
+                          </a:rPr>
+                        </m:ctrlPr>
+                      </m:sSubPr>
+                      <m:e>
+                        <m:r>
+                          <a:rPr lang="en-US" i="1">
+                            <a:latin typeface="Cambria Math" panose="02040503050406030204" pitchFamily="18" charset="0"/>
+                            <a:ea typeface="Cambria Math" panose="02040503050406030204" pitchFamily="18" charset="0"/>
+                          </a:rPr>
+                          <m:t>𝐺</m:t>
+                        </m:r>
+                      </m:e>
+                      <m:sub>
+                        <m:r>
+                          <a:rPr lang="en-US" i="1">
+                            <a:latin typeface="Cambria Math" panose="02040503050406030204" pitchFamily="18" charset="0"/>
+                            <a:ea typeface="Cambria Math" panose="02040503050406030204" pitchFamily="18" charset="0"/>
+                          </a:rPr>
+                          <m:t>𝑡</m:t>
+                        </m:r>
+                        <m:r>
+                          <a:rPr lang="en-US" i="1">
+                            <a:latin typeface="Cambria Math" panose="02040503050406030204" pitchFamily="18" charset="0"/>
+                            <a:ea typeface="Cambria Math" panose="02040503050406030204" pitchFamily="18" charset="0"/>
+                          </a:rPr>
+                          <m:t>:</m:t>
+                        </m:r>
+                        <m:r>
+                          <a:rPr lang="en-US" i="1">
+                            <a:latin typeface="Cambria Math" panose="02040503050406030204" pitchFamily="18" charset="0"/>
+                            <a:ea typeface="Cambria Math" panose="02040503050406030204" pitchFamily="18" charset="0"/>
+                          </a:rPr>
+                          <m:t>𝑡</m:t>
+                        </m:r>
+                        <m:r>
+                          <a:rPr lang="en-US" i="1">
+                            <a:latin typeface="Cambria Math" panose="02040503050406030204" pitchFamily="18" charset="0"/>
+                            <a:ea typeface="Cambria Math" panose="02040503050406030204" pitchFamily="18" charset="0"/>
+                          </a:rPr>
+                          <m:t>+</m:t>
+                        </m:r>
+                        <m:r>
+                          <a:rPr lang="en-US" i="1">
+                            <a:latin typeface="Cambria Math" panose="02040503050406030204" pitchFamily="18" charset="0"/>
+                            <a:ea typeface="Cambria Math" panose="02040503050406030204" pitchFamily="18" charset="0"/>
+                          </a:rPr>
+                          <m:t>𝑛</m:t>
+                        </m:r>
+                      </m:sub>
+                    </m:sSub>
+                    <m:r>
+                      <a:rPr lang="en-US" i="1">
+                        <a:latin typeface="Cambria Math" panose="02040503050406030204" pitchFamily="18" charset="0"/>
+                      </a:rPr>
+                      <m:t>=</m:t>
+                    </m:r>
+                    <m:sSub>
+                      <m:sSubPr>
+                        <m:ctrlPr>
+                          <a:rPr lang="en-US" i="1">
+                            <a:latin typeface="Cambria Math" panose="02040503050406030204" pitchFamily="18" charset="0"/>
+                          </a:rPr>
+                        </m:ctrlPr>
+                      </m:sSubPr>
+                      <m:e>
+                        <m:r>
+                          <a:rPr lang="en-US" i="1">
+                            <a:latin typeface="Cambria Math" panose="02040503050406030204" pitchFamily="18" charset="0"/>
+                          </a:rPr>
+                          <m:t>𝑅</m:t>
+                        </m:r>
+                      </m:e>
+                      <m:sub>
+                        <m:r>
+                          <a:rPr lang="en-US" i="1">
+                            <a:latin typeface="Cambria Math" panose="02040503050406030204" pitchFamily="18" charset="0"/>
+                          </a:rPr>
+                          <m:t>𝑡</m:t>
+                        </m:r>
+                        <m:r>
+                          <a:rPr lang="en-US" i="1">
+                            <a:latin typeface="Cambria Math" panose="02040503050406030204" pitchFamily="18" charset="0"/>
+                          </a:rPr>
+                          <m:t>+1</m:t>
+                        </m:r>
+                      </m:sub>
+                    </m:sSub>
+                    <m:r>
+                      <a:rPr lang="en-US" i="1">
+                        <a:latin typeface="Cambria Math" panose="02040503050406030204" pitchFamily="18" charset="0"/>
+                      </a:rPr>
+                      <m:t>+</m:t>
+                    </m:r>
+                    <m:r>
+                      <a:rPr lang="en-US" i="1">
+                        <a:latin typeface="Cambria Math" panose="02040503050406030204" pitchFamily="18" charset="0"/>
+                      </a:rPr>
+                      <m:t>𝛾</m:t>
+                    </m:r>
+                    <m:sSub>
+                      <m:sSubPr>
+                        <m:ctrlPr>
+                          <a:rPr lang="en-US" i="1">
+                            <a:latin typeface="Cambria Math" panose="02040503050406030204" pitchFamily="18" charset="0"/>
+                          </a:rPr>
+                        </m:ctrlPr>
+                      </m:sSubPr>
+                      <m:e>
+                        <m:r>
+                          <a:rPr lang="en-US" i="1">
+                            <a:latin typeface="Cambria Math" panose="02040503050406030204" pitchFamily="18" charset="0"/>
+                          </a:rPr>
+                          <m:t>𝑅</m:t>
+                        </m:r>
+                      </m:e>
+                      <m:sub>
+                        <m:r>
+                          <a:rPr lang="en-US" i="1">
+                            <a:latin typeface="Cambria Math" panose="02040503050406030204" pitchFamily="18" charset="0"/>
+                          </a:rPr>
+                          <m:t>𝑡</m:t>
+                        </m:r>
+                        <m:r>
+                          <a:rPr lang="en-US" i="1">
+                            <a:latin typeface="Cambria Math" panose="02040503050406030204" pitchFamily="18" charset="0"/>
+                          </a:rPr>
+                          <m:t>+2</m:t>
+                        </m:r>
+                      </m:sub>
+                    </m:sSub>
+                    <m:r>
+                      <a:rPr lang="en-US" i="1">
+                        <a:latin typeface="Cambria Math" panose="02040503050406030204" pitchFamily="18" charset="0"/>
+                      </a:rPr>
+                      <m:t>+…+</m:t>
+                    </m:r>
+                    <m:sSup>
+                      <m:sSupPr>
+                        <m:ctrlPr>
+                          <a:rPr lang="en-US" i="1">
+                            <a:latin typeface="Cambria Math" panose="02040503050406030204" pitchFamily="18" charset="0"/>
+                          </a:rPr>
+                        </m:ctrlPr>
+                      </m:sSupPr>
+                      <m:e>
+                        <m:r>
+                          <a:rPr lang="en-US" i="1">
+                            <a:latin typeface="Cambria Math" panose="02040503050406030204" pitchFamily="18" charset="0"/>
+                          </a:rPr>
+                          <m:t>𝛾</m:t>
+                        </m:r>
+                      </m:e>
+                      <m:sup>
+                        <m:r>
+                          <a:rPr lang="en-US" i="1">
+                            <a:latin typeface="Cambria Math" panose="02040503050406030204" pitchFamily="18" charset="0"/>
+                          </a:rPr>
+                          <m:t>𝑛</m:t>
+                        </m:r>
+                        <m:r>
+                          <a:rPr lang="en-US" i="1">
+                            <a:latin typeface="Cambria Math" panose="02040503050406030204" pitchFamily="18" charset="0"/>
+                          </a:rPr>
+                          <m:t>−1</m:t>
+                        </m:r>
+                      </m:sup>
+                    </m:sSup>
+                    <m:sSub>
+                      <m:sSubPr>
+                        <m:ctrlPr>
+                          <a:rPr lang="en-US" i="1">
+                            <a:latin typeface="Cambria Math" panose="02040503050406030204" pitchFamily="18" charset="0"/>
+                          </a:rPr>
+                        </m:ctrlPr>
+                      </m:sSubPr>
+                      <m:e>
+                        <m:r>
+                          <a:rPr lang="en-US" i="1">
+                            <a:latin typeface="Cambria Math" panose="02040503050406030204" pitchFamily="18" charset="0"/>
+                          </a:rPr>
+                          <m:t>𝑅</m:t>
+                        </m:r>
+                      </m:e>
+                      <m:sub>
+                        <m:r>
+                          <a:rPr lang="en-US" i="1">
+                            <a:latin typeface="Cambria Math" panose="02040503050406030204" pitchFamily="18" charset="0"/>
+                          </a:rPr>
+                          <m:t>𝑡</m:t>
+                        </m:r>
+                        <m:r>
+                          <a:rPr lang="en-US" i="1">
+                            <a:latin typeface="Cambria Math" panose="02040503050406030204" pitchFamily="18" charset="0"/>
+                          </a:rPr>
+                          <m:t>+</m:t>
+                        </m:r>
+                        <m:r>
+                          <a:rPr lang="en-US" i="1">
+                            <a:latin typeface="Cambria Math" panose="02040503050406030204" pitchFamily="18" charset="0"/>
+                          </a:rPr>
+                          <m:t>𝑛</m:t>
+                        </m:r>
+                      </m:sub>
+                    </m:sSub>
+                    <m:r>
+                      <a:rPr lang="en-US" i="1">
+                        <a:latin typeface="Cambria Math" panose="02040503050406030204" pitchFamily="18" charset="0"/>
+                      </a:rPr>
+                      <m:t>+</m:t>
+                    </m:r>
+                    <m:sSup>
+                      <m:sSupPr>
+                        <m:ctrlPr>
+                          <a:rPr lang="en-US" i="1">
+                            <a:latin typeface="Cambria Math" panose="02040503050406030204" pitchFamily="18" charset="0"/>
+                          </a:rPr>
+                        </m:ctrlPr>
+                      </m:sSupPr>
+                      <m:e>
+                        <m:r>
+                          <a:rPr lang="en-US" i="1">
+                            <a:latin typeface="Cambria Math" panose="02040503050406030204" pitchFamily="18" charset="0"/>
+                          </a:rPr>
+                          <m:t>𝛾</m:t>
+                        </m:r>
+                      </m:e>
+                      <m:sup>
+                        <m:r>
+                          <a:rPr lang="en-US" i="1">
+                            <a:latin typeface="Cambria Math" panose="02040503050406030204" pitchFamily="18" charset="0"/>
+                          </a:rPr>
+                          <m:t>𝑛</m:t>
+                        </m:r>
+                      </m:sup>
+                    </m:sSup>
+                    <m:r>
+                      <a:rPr lang="en-US" i="1">
+                        <a:latin typeface="Cambria Math" panose="02040503050406030204" pitchFamily="18" charset="0"/>
+                      </a:rPr>
+                      <m:t>𝑉</m:t>
+                    </m:r>
+                    <m:d>
+                      <m:dPr>
+                        <m:ctrlPr>
+                          <a:rPr lang="en-US" i="1">
+                            <a:latin typeface="Cambria Math" panose="02040503050406030204" pitchFamily="18" charset="0"/>
+                          </a:rPr>
+                        </m:ctrlPr>
+                      </m:dPr>
+                      <m:e>
+                        <m:sSub>
+                          <m:sSubPr>
+                            <m:ctrlPr>
+                              <a:rPr lang="en-US" i="1">
+                                <a:latin typeface="Cambria Math" panose="02040503050406030204" pitchFamily="18" charset="0"/>
+                              </a:rPr>
+                            </m:ctrlPr>
+                          </m:sSubPr>
+                          <m:e>
+                            <m:r>
+                              <a:rPr lang="en-US" i="1">
+                                <a:latin typeface="Cambria Math" panose="02040503050406030204" pitchFamily="18" charset="0"/>
+                              </a:rPr>
+                              <m:t>𝑆</m:t>
+                            </m:r>
+                          </m:e>
+                          <m:sub>
+                            <m:r>
+                              <a:rPr lang="en-US" i="1">
+                                <a:latin typeface="Cambria Math" panose="02040503050406030204" pitchFamily="18" charset="0"/>
+                              </a:rPr>
+                              <m:t>𝑡</m:t>
+                            </m:r>
+                            <m:r>
+                              <a:rPr lang="en-US" i="1">
+                                <a:latin typeface="Cambria Math" panose="02040503050406030204" pitchFamily="18" charset="0"/>
+                              </a:rPr>
+                              <m:t>+</m:t>
+                            </m:r>
+                            <m:r>
+                              <a:rPr lang="en-US" i="1">
+                                <a:latin typeface="Cambria Math" panose="02040503050406030204" pitchFamily="18" charset="0"/>
+                              </a:rPr>
+                              <m:t>𝑛</m:t>
+                            </m:r>
+                          </m:sub>
+                        </m:sSub>
+                      </m:e>
+                    </m:d>
+                  </m:oMath>
+                </a14:m>
+                <a:endParaRPr lang="en-US" dirty="0"/>
               </a:p>
               <a:p>
-                <a:pPr marL="0" indent="0">
+                <a:pPr lvl="1"/>
+                <a:r>
+                  <a:rPr lang="en-US" dirty="0"/>
+                  <a:t>Observed rewards have in expectation no error.</a:t>
+                </a:r>
+              </a:p>
+              <a:p>
+                <a:pPr lvl="1"/>
+                <a:r>
+                  <a:rPr lang="en-US" dirty="0"/>
+                  <a:t>The error-prone bootstrap estimate is smaller because it is </a:t>
+                </a:r>
+                <a14:m>
+                  <m:oMath xmlns:m="http://schemas.openxmlformats.org/officeDocument/2006/math">
+                    <m:r>
+                      <a:rPr lang="en-US" b="0" i="1" smtClean="0">
+                        <a:latin typeface="Cambria Math" panose="02040503050406030204" pitchFamily="18" charset="0"/>
+                      </a:rPr>
+                      <m:t>𝑛</m:t>
+                    </m:r>
+                  </m:oMath>
+                </a14:m>
+                <a:r>
+                  <a:rPr lang="en-US" dirty="0"/>
+                  <a:t> time steps away and thus discounted.</a:t>
+                </a:r>
+              </a:p>
+              <a:p>
+                <a:pPr lvl="1"/>
+                <a:r>
+                  <a:rPr lang="en-US" dirty="0"/>
+                  <a:t>Increasing </a:t>
+                </a:r>
+                <a14:m>
+                  <m:oMath xmlns:m="http://schemas.openxmlformats.org/officeDocument/2006/math">
+                    <m:r>
+                      <a:rPr lang="en-US" b="0" i="1" smtClean="0">
+                        <a:latin typeface="Cambria Math" panose="02040503050406030204" pitchFamily="18" charset="0"/>
+                      </a:rPr>
+                      <m:t>𝑛</m:t>
+                    </m:r>
+                  </m:oMath>
+                </a14:m>
+                <a:r>
+                  <a:rPr lang="en-US" dirty="0"/>
+                  <a:t> adds more observed rewards decreases the impact of the bootstrapping error. </a:t>
+                </a:r>
+              </a:p>
+              <a:p>
+                <a:pPr marL="0" indent="0" algn="ctr">
                   <a:buNone/>
                 </a:pPr>
-                <a14:m>
-                  <m:oMathPara xmlns:m="http://schemas.openxmlformats.org/officeDocument/2006/math">
-                    <m:oMathParaPr>
-                      <m:jc m:val="centerGroup"/>
-                    </m:oMathParaPr>
-                    <m:oMath xmlns:m="http://schemas.openxmlformats.org/officeDocument/2006/math">
-                      <m:sSub>
-                        <m:sSubPr>
-                          <m:ctrlPr>
-                            <a:rPr lang="en-US" i="1">
-                              <a:latin typeface="Cambria Math" panose="02040503050406030204" pitchFamily="18" charset="0"/>
-                              <a:ea typeface="Cambria Math" panose="02040503050406030204" pitchFamily="18" charset="0"/>
-                            </a:rPr>
-                          </m:ctrlPr>
-                        </m:sSubPr>
-                        <m:e>
-                          <m:r>
-                            <a:rPr lang="en-US" i="1">
-                              <a:latin typeface="Cambria Math" panose="02040503050406030204" pitchFamily="18" charset="0"/>
-                              <a:ea typeface="Cambria Math" panose="02040503050406030204" pitchFamily="18" charset="0"/>
-                            </a:rPr>
-                            <m:t>𝐺</m:t>
-                          </m:r>
-                        </m:e>
-                        <m:sub>
-                          <m:r>
-                            <a:rPr lang="en-US" i="1">
-                              <a:latin typeface="Cambria Math" panose="02040503050406030204" pitchFamily="18" charset="0"/>
-                              <a:ea typeface="Cambria Math" panose="02040503050406030204" pitchFamily="18" charset="0"/>
-                            </a:rPr>
-                            <m:t>𝑡</m:t>
-                          </m:r>
-                          <m:r>
-                            <a:rPr lang="en-US" i="1">
-                              <a:latin typeface="Cambria Math" panose="02040503050406030204" pitchFamily="18" charset="0"/>
-                              <a:ea typeface="Cambria Math" panose="02040503050406030204" pitchFamily="18" charset="0"/>
-                            </a:rPr>
-                            <m:t>:</m:t>
-                          </m:r>
-                          <m:r>
-                            <a:rPr lang="en-US" i="1">
-                              <a:latin typeface="Cambria Math" panose="02040503050406030204" pitchFamily="18" charset="0"/>
-                              <a:ea typeface="Cambria Math" panose="02040503050406030204" pitchFamily="18" charset="0"/>
-                            </a:rPr>
-                            <m:t>𝑡</m:t>
-                          </m:r>
-                          <m:r>
-                            <a:rPr lang="en-US" i="1">
-                              <a:latin typeface="Cambria Math" panose="02040503050406030204" pitchFamily="18" charset="0"/>
-                              <a:ea typeface="Cambria Math" panose="02040503050406030204" pitchFamily="18" charset="0"/>
-                            </a:rPr>
-                            <m:t>+</m:t>
-                          </m:r>
-                          <m:r>
-                            <a:rPr lang="en-US" i="1">
-                              <a:latin typeface="Cambria Math" panose="02040503050406030204" pitchFamily="18" charset="0"/>
-                              <a:ea typeface="Cambria Math" panose="02040503050406030204" pitchFamily="18" charset="0"/>
-                            </a:rPr>
-                            <m:t>𝑛</m:t>
-                          </m:r>
-                        </m:sub>
-                      </m:sSub>
-                      <m:r>
-                        <a:rPr lang="en-US" i="1">
-                          <a:latin typeface="Cambria Math" panose="02040503050406030204" pitchFamily="18" charset="0"/>
-                        </a:rPr>
-                        <m:t>=</m:t>
-                      </m:r>
-                      <m:sSub>
-                        <m:sSubPr>
-                          <m:ctrlPr>
-                            <a:rPr lang="en-US" i="1">
-                              <a:latin typeface="Cambria Math" panose="02040503050406030204" pitchFamily="18" charset="0"/>
-                            </a:rPr>
-                          </m:ctrlPr>
-                        </m:sSubPr>
-                        <m:e>
-                          <m:r>
-                            <a:rPr lang="en-US" i="1">
-                              <a:latin typeface="Cambria Math" panose="02040503050406030204" pitchFamily="18" charset="0"/>
-                            </a:rPr>
-                            <m:t>𝑅</m:t>
-                          </m:r>
-                        </m:e>
-                        <m:sub>
-                          <m:r>
-                            <a:rPr lang="en-US" i="1">
-                              <a:latin typeface="Cambria Math" panose="02040503050406030204" pitchFamily="18" charset="0"/>
-                            </a:rPr>
-                            <m:t>𝑡</m:t>
-                          </m:r>
-                          <m:r>
-                            <a:rPr lang="en-US" i="1">
-                              <a:latin typeface="Cambria Math" panose="02040503050406030204" pitchFamily="18" charset="0"/>
-                            </a:rPr>
-                            <m:t>+1</m:t>
-                          </m:r>
-                        </m:sub>
-                      </m:sSub>
-                      <m:r>
-                        <a:rPr lang="en-US" i="1">
-                          <a:latin typeface="Cambria Math" panose="02040503050406030204" pitchFamily="18" charset="0"/>
-                        </a:rPr>
-                        <m:t>+</m:t>
-                      </m:r>
-                      <m:r>
-                        <a:rPr lang="en-US" i="1">
-                          <a:latin typeface="Cambria Math" panose="02040503050406030204" pitchFamily="18" charset="0"/>
-                        </a:rPr>
-                        <m:t>𝛾</m:t>
-                      </m:r>
-                      <m:sSub>
-                        <m:sSubPr>
-                          <m:ctrlPr>
-                            <a:rPr lang="en-US" i="1">
-                              <a:latin typeface="Cambria Math" panose="02040503050406030204" pitchFamily="18" charset="0"/>
-                            </a:rPr>
-                          </m:ctrlPr>
-                        </m:sSubPr>
-                        <m:e>
-                          <m:r>
-                            <a:rPr lang="en-US" i="1">
-                              <a:latin typeface="Cambria Math" panose="02040503050406030204" pitchFamily="18" charset="0"/>
-                            </a:rPr>
-                            <m:t>𝑅</m:t>
-                          </m:r>
-                        </m:e>
-                        <m:sub>
-                          <m:r>
-                            <a:rPr lang="en-US" i="1">
-                              <a:latin typeface="Cambria Math" panose="02040503050406030204" pitchFamily="18" charset="0"/>
-                            </a:rPr>
-                            <m:t>𝑡</m:t>
-                          </m:r>
-                          <m:r>
-                            <a:rPr lang="en-US" i="1">
-                              <a:latin typeface="Cambria Math" panose="02040503050406030204" pitchFamily="18" charset="0"/>
-                            </a:rPr>
-                            <m:t>+2</m:t>
-                          </m:r>
-                        </m:sub>
-                      </m:sSub>
-                      <m:r>
-                        <a:rPr lang="en-US" i="1">
-                          <a:latin typeface="Cambria Math" panose="02040503050406030204" pitchFamily="18" charset="0"/>
-                        </a:rPr>
-                        <m:t>+…+</m:t>
-                      </m:r>
-                      <m:sSup>
-                        <m:sSupPr>
-                          <m:ctrlPr>
-                            <a:rPr lang="en-US" i="1">
-                              <a:latin typeface="Cambria Math" panose="02040503050406030204" pitchFamily="18" charset="0"/>
-                            </a:rPr>
-                          </m:ctrlPr>
-                        </m:sSupPr>
-                        <m:e>
-                          <m:r>
-                            <a:rPr lang="en-US" i="1">
-                              <a:latin typeface="Cambria Math" panose="02040503050406030204" pitchFamily="18" charset="0"/>
-                            </a:rPr>
-                            <m:t>𝛾</m:t>
-                          </m:r>
-                        </m:e>
-                        <m:sup>
-                          <m:r>
-                            <a:rPr lang="en-US" i="1">
-                              <a:latin typeface="Cambria Math" panose="02040503050406030204" pitchFamily="18" charset="0"/>
-                            </a:rPr>
-                            <m:t>𝑛</m:t>
-                          </m:r>
-                          <m:r>
-                            <a:rPr lang="en-US" i="1">
-                              <a:latin typeface="Cambria Math" panose="02040503050406030204" pitchFamily="18" charset="0"/>
-                            </a:rPr>
-                            <m:t>−1</m:t>
-                          </m:r>
-                        </m:sup>
-                      </m:sSup>
-                      <m:sSub>
-                        <m:sSubPr>
-                          <m:ctrlPr>
-                            <a:rPr lang="en-US" i="1">
-                              <a:latin typeface="Cambria Math" panose="02040503050406030204" pitchFamily="18" charset="0"/>
-                            </a:rPr>
-                          </m:ctrlPr>
-                        </m:sSubPr>
-                        <m:e>
-                          <m:r>
-                            <a:rPr lang="en-US" i="1">
-                              <a:latin typeface="Cambria Math" panose="02040503050406030204" pitchFamily="18" charset="0"/>
-                            </a:rPr>
-                            <m:t>𝑅</m:t>
-                          </m:r>
-                        </m:e>
-                        <m:sub>
-                          <m:r>
-                            <a:rPr lang="en-US" i="1">
-                              <a:latin typeface="Cambria Math" panose="02040503050406030204" pitchFamily="18" charset="0"/>
-                            </a:rPr>
-                            <m:t>𝑡</m:t>
-                          </m:r>
-                          <m:r>
-                            <a:rPr lang="en-US" i="1">
-                              <a:latin typeface="Cambria Math" panose="02040503050406030204" pitchFamily="18" charset="0"/>
-                            </a:rPr>
-                            <m:t>+</m:t>
-                          </m:r>
-                          <m:r>
-                            <a:rPr lang="en-US" i="1">
-                              <a:latin typeface="Cambria Math" panose="02040503050406030204" pitchFamily="18" charset="0"/>
-                            </a:rPr>
-                            <m:t>𝑛</m:t>
-                          </m:r>
-                        </m:sub>
-                      </m:sSub>
-                      <m:r>
-                        <a:rPr lang="en-US" i="1">
-                          <a:latin typeface="Cambria Math" panose="02040503050406030204" pitchFamily="18" charset="0"/>
-                        </a:rPr>
-                        <m:t>+</m:t>
-                      </m:r>
-                      <m:sSup>
-                        <m:sSupPr>
-                          <m:ctrlPr>
-                            <a:rPr lang="en-US" i="1">
-                              <a:latin typeface="Cambria Math" panose="02040503050406030204" pitchFamily="18" charset="0"/>
-                            </a:rPr>
-                          </m:ctrlPr>
-                        </m:sSupPr>
-                        <m:e>
-                          <m:r>
-                            <a:rPr lang="en-US" i="1">
-                              <a:latin typeface="Cambria Math" panose="02040503050406030204" pitchFamily="18" charset="0"/>
-                            </a:rPr>
-                            <m:t>𝛾</m:t>
-                          </m:r>
-                        </m:e>
-                        <m:sup>
-                          <m:r>
-                            <a:rPr lang="en-US" i="1">
-                              <a:latin typeface="Cambria Math" panose="02040503050406030204" pitchFamily="18" charset="0"/>
-                            </a:rPr>
-                            <m:t>𝑛</m:t>
-                          </m:r>
-                        </m:sup>
-                      </m:sSup>
-                      <m:r>
-                        <a:rPr lang="en-US" i="1">
-                          <a:latin typeface="Cambria Math" panose="02040503050406030204" pitchFamily="18" charset="0"/>
-                        </a:rPr>
-                        <m:t>𝑉</m:t>
-                      </m:r>
-                      <m:d>
-                        <m:dPr>
-                          <m:ctrlPr>
-                            <a:rPr lang="en-US" i="1">
-                              <a:latin typeface="Cambria Math" panose="02040503050406030204" pitchFamily="18" charset="0"/>
-                            </a:rPr>
-                          </m:ctrlPr>
-                        </m:dPr>
-                        <m:e>
-                          <m:sSub>
-                            <m:sSubPr>
-                              <m:ctrlPr>
-                                <a:rPr lang="en-US" i="1">
-                                  <a:latin typeface="Cambria Math" panose="02040503050406030204" pitchFamily="18" charset="0"/>
-                                </a:rPr>
-                              </m:ctrlPr>
-                            </m:sSubPr>
-                            <m:e>
-                              <m:r>
-                                <a:rPr lang="en-US" i="1">
-                                  <a:latin typeface="Cambria Math" panose="02040503050406030204" pitchFamily="18" charset="0"/>
-                                </a:rPr>
-                                <m:t>𝑆</m:t>
-                              </m:r>
-                            </m:e>
-                            <m:sub>
-                              <m:r>
-                                <a:rPr lang="en-US" i="1">
-                                  <a:latin typeface="Cambria Math" panose="02040503050406030204" pitchFamily="18" charset="0"/>
-                                </a:rPr>
-                                <m:t>𝑡</m:t>
-                              </m:r>
-                              <m:r>
-                                <a:rPr lang="en-US" i="1">
-                                  <a:latin typeface="Cambria Math" panose="02040503050406030204" pitchFamily="18" charset="0"/>
-                                </a:rPr>
-                                <m:t>+</m:t>
-                              </m:r>
-                              <m:r>
-                                <a:rPr lang="en-US" i="1">
-                                  <a:latin typeface="Cambria Math" panose="02040503050406030204" pitchFamily="18" charset="0"/>
-                                </a:rPr>
-                                <m:t>𝑛</m:t>
-                              </m:r>
-                            </m:sub>
-                          </m:sSub>
-                        </m:e>
-                      </m:d>
-                    </m:oMath>
-                  </m:oMathPara>
-                </a14:m>
                 <a:endParaRPr lang="en-US" dirty="0"/>
               </a:p>
               <a:p>
@@ -19079,88 +21650,23 @@
                   <a:buNone/>
                 </a:pPr>
                 <a:r>
+                  <a:rPr lang="en-US" b="1" dirty="0"/>
+                  <a:t>Note</a:t>
+                </a:r>
+                <a:r>
                   <a:rPr lang="en-US" dirty="0"/>
-                  <a:t>reduces the error compared to using </a:t>
-                </a:r>
-                <a14:m>
-                  <m:oMath xmlns:m="http://schemas.openxmlformats.org/officeDocument/2006/math">
-                    <m:r>
-                      <a:rPr lang="en-US" b="0" i="1" smtClean="0">
-                        <a:latin typeface="Cambria Math" panose="02040503050406030204" pitchFamily="18" charset="0"/>
-                      </a:rPr>
-                      <m:t>𝑉</m:t>
-                    </m:r>
-                    <m:r>
-                      <a:rPr lang="en-US" b="0" i="1" smtClean="0">
-                        <a:latin typeface="Cambria Math" panose="02040503050406030204" pitchFamily="18" charset="0"/>
-                      </a:rPr>
-                      <m:t>(</m:t>
-                    </m:r>
-                    <m:sSub>
-                      <m:sSubPr>
-                        <m:ctrlPr>
-                          <a:rPr lang="en-US" b="0" i="1" smtClean="0">
-                            <a:latin typeface="Cambria Math" panose="02040503050406030204" pitchFamily="18" charset="0"/>
-                          </a:rPr>
-                        </m:ctrlPr>
-                      </m:sSubPr>
-                      <m:e>
-                        <m:r>
-                          <a:rPr lang="en-US" b="0" i="1" smtClean="0">
-                            <a:latin typeface="Cambria Math" panose="02040503050406030204" pitchFamily="18" charset="0"/>
-                          </a:rPr>
-                          <m:t>𝑆</m:t>
-                        </m:r>
-                      </m:e>
-                      <m:sub>
-                        <m:r>
-                          <a:rPr lang="en-US" b="0" i="1" smtClean="0">
-                            <a:latin typeface="Cambria Math" panose="02040503050406030204" pitchFamily="18" charset="0"/>
-                          </a:rPr>
-                          <m:t>𝑡</m:t>
-                        </m:r>
-                      </m:sub>
-                    </m:sSub>
-                    <m:r>
-                      <a:rPr lang="en-US" b="0" i="1" smtClean="0">
-                        <a:latin typeface="Cambria Math" panose="02040503050406030204" pitchFamily="18" charset="0"/>
-                      </a:rPr>
-                      <m:t>)</m:t>
-                    </m:r>
-                  </m:oMath>
-                </a14:m>
-                <a:r>
-                  <a:rPr lang="en-US" dirty="0"/>
-                  <a:t> as a return estimate.</a:t>
-                </a:r>
-              </a:p>
-              <a:p>
-                <a:pPr marL="0" indent="0">
-                  <a:buNone/>
-                </a:pPr>
-                <a:endParaRPr lang="en-US" dirty="0"/>
-              </a:p>
-              <a:p>
-                <a:pPr marL="0" indent="0" algn="ctr">
-                  <a:buNone/>
-                </a:pPr>
-                <a14:m>
-                  <m:oMath xmlns:m="http://schemas.openxmlformats.org/officeDocument/2006/math">
-                    <m:r>
-                      <a:rPr lang="en-US" b="0" i="1" smtClean="0">
-                        <a:latin typeface="Cambria Math" panose="02040503050406030204" pitchFamily="18" charset="0"/>
-                      </a:rPr>
-                      <m:t>→</m:t>
-                    </m:r>
-                  </m:oMath>
-                </a14:m>
-                <a:r>
-                  <a:rPr lang="en-US" dirty="0"/>
-                  <a:t> every update is guaranteed to reduce the expected error. </a:t>
+                  <a:t>: This also means that every update is guaranteed to reduce the expected error and moves the estimate closer to the true value function. </a:t>
                 </a:r>
                 <a:br>
                   <a:rPr lang="en-US" dirty="0"/>
                 </a:br>
+                <a:br>
+                  <a:rPr lang="en-US" dirty="0"/>
+                </a:br>
+                <a:r>
+                  <a:rPr lang="en-US" dirty="0"/>
+                  <a:t>		</a:t>
+                </a:r>
                 <a:r>
                   <a:rPr lang="en-US" b="1" dirty="0"/>
                   <a:t>All </a:t>
@@ -19187,7 +21693,7 @@
             </p:txBody>
           </p:sp>
         </mc:Choice>
-        <mc:Fallback xmlns="">
+        <mc:Fallback>
           <p:sp>
             <p:nvSpPr>
               <p:cNvPr id="3" name="Content Placeholder 2">
@@ -19206,13 +21712,13 @@
             </p:nvSpPr>
             <p:spPr>
               <a:xfrm>
-                <a:off x="838200" y="3770851"/>
-                <a:ext cx="10515600" cy="2406112"/>
+                <a:off x="838200" y="3949907"/>
+                <a:ext cx="10515600" cy="2398427"/>
               </a:xfrm>
               <a:blipFill>
                 <a:blip r:embed="rId2"/>
                 <a:stretch>
-                  <a:fillRect l="-928" t="-4569" b="-761"/>
+                  <a:fillRect l="-638" t="-4580" r="-928" b="-3817"/>
                 </a:stretch>
               </a:blipFill>
             </p:spPr>
@@ -19231,8 +21737,8 @@
           </p:sp>
         </mc:Fallback>
       </mc:AlternateContent>
-      <mc:AlternateContent xmlns:mc="http://schemas.openxmlformats.org/markup-compatibility/2006" xmlns:a14="http://schemas.microsoft.com/office/drawing/2010/main">
-        <mc:Choice Requires="a14">
+      <mc:AlternateContent xmlns:mc="http://schemas.openxmlformats.org/markup-compatibility/2006">
+        <mc:Choice xmlns:a14="http://schemas.microsoft.com/office/drawing/2010/main" Requires="a14">
           <p:sp>
             <p:nvSpPr>
               <p:cNvPr id="5" name="TextBox 4">
@@ -19256,16 +21762,18 @@
             </p:spPr>
             <p:style>
               <a:lnRef idx="2">
-                <a:schemeClr val="accent2"/>
+                <a:schemeClr val="accent3">
+                  <a:shade val="15000"/>
+                </a:schemeClr>
               </a:lnRef>
               <a:fillRef idx="1">
-                <a:schemeClr val="lt1"/>
+                <a:schemeClr val="accent3"/>
               </a:fillRef>
               <a:effectRef idx="0">
-                <a:schemeClr val="accent2"/>
+                <a:schemeClr val="accent3"/>
               </a:effectRef>
               <a:fontRef idx="minor">
-                <a:schemeClr val="dk1"/>
+                <a:schemeClr val="lt1"/>
               </a:fontRef>
             </p:style>
             <p:txBody>
@@ -19316,69 +21824,56 @@
                 </a14:m>
                 <a:r>
                   <a:rPr lang="en-US" sz="2000" dirty="0"/>
-                  <a:t>-step return is guaranteed to be less than or equal to the discounted worst error of using </a:t>
+                  <a:t>-step return is guaranteed to be less than or equal to </a:t>
                 </a:r>
                 <a14:m>
                   <m:oMath xmlns:m="http://schemas.openxmlformats.org/officeDocument/2006/math">
-                    <m:sSub>
-                      <m:sSubPr>
+                    <m:sSup>
+                      <m:sSupPr>
                         <m:ctrlPr>
-                          <a:rPr lang="en-US" sz="2000" i="1">
-                            <a:latin typeface="Cambria Math" panose="02040503050406030204" pitchFamily="18" charset="0"/>
-                            <a:ea typeface="Cambria Math" panose="02040503050406030204" pitchFamily="18" charset="0"/>
+                          <a:rPr lang="en-US" sz="2000" b="0" i="1" smtClean="0">
+                            <a:latin typeface="Cambria Math" panose="02040503050406030204" pitchFamily="18" charset="0"/>
                           </a:rPr>
                         </m:ctrlPr>
-                      </m:sSubPr>
+                      </m:sSupPr>
                       <m:e>
                         <m:r>
-                          <a:rPr lang="en-US" sz="2000" i="1">
-                            <a:latin typeface="Cambria Math" panose="02040503050406030204" pitchFamily="18" charset="0"/>
-                            <a:ea typeface="Cambria Math" panose="02040503050406030204" pitchFamily="18" charset="0"/>
-                          </a:rPr>
-                          <m:t>𝑉</m:t>
+                          <a:rPr lang="en-US" sz="2000" b="0" i="1" smtClean="0">
+                            <a:latin typeface="Cambria Math" panose="02040503050406030204" pitchFamily="18" charset="0"/>
+                          </a:rPr>
+                          <m:t>𝛾</m:t>
                         </m:r>
                       </m:e>
-                      <m:sub>
+                      <m:sup>
                         <m:r>
-                          <a:rPr lang="en-US" sz="2000" i="1">
-                            <a:latin typeface="Cambria Math" panose="02040503050406030204" pitchFamily="18" charset="0"/>
-                            <a:ea typeface="Cambria Math" panose="02040503050406030204" pitchFamily="18" charset="0"/>
-                          </a:rPr>
-                          <m:t>𝑡</m:t>
-                        </m:r>
-                        <m:r>
-                          <a:rPr lang="en-US" sz="2000" i="1">
-                            <a:latin typeface="Cambria Math" panose="02040503050406030204" pitchFamily="18" charset="0"/>
-                            <a:ea typeface="Cambria Math" panose="02040503050406030204" pitchFamily="18" charset="0"/>
-                          </a:rPr>
-                          <m:t>+</m:t>
-                        </m:r>
-                        <m:r>
-                          <a:rPr lang="en-US" sz="2000" i="1">
-                            <a:latin typeface="Cambria Math" panose="02040503050406030204" pitchFamily="18" charset="0"/>
-                            <a:ea typeface="Cambria Math" panose="02040503050406030204" pitchFamily="18" charset="0"/>
+                          <a:rPr lang="en-US" sz="2000" b="0" i="1" smtClean="0">
+                            <a:latin typeface="Cambria Math" panose="02040503050406030204" pitchFamily="18" charset="0"/>
                           </a:rPr>
                           <m:t>𝑛</m:t>
                         </m:r>
-                        <m:r>
-                          <a:rPr lang="en-US" sz="2000" i="1">
-                            <a:latin typeface="Cambria Math" panose="02040503050406030204" pitchFamily="18" charset="0"/>
-                            <a:ea typeface="Cambria Math" panose="02040503050406030204" pitchFamily="18" charset="0"/>
-                          </a:rPr>
-                          <m:t>−1</m:t>
-                        </m:r>
-                      </m:sub>
-                    </m:sSub>
-                    <m:r>
-                      <a:rPr lang="en-US" sz="2000" i="1">
-                        <a:latin typeface="Cambria Math" panose="02040503050406030204" pitchFamily="18" charset="0"/>
-                        <a:ea typeface="Cambria Math" panose="02040503050406030204" pitchFamily="18" charset="0"/>
-                      </a:rPr>
-                      <m:t> </m:t>
-                    </m:r>
+                      </m:sup>
+                    </m:sSup>
                   </m:oMath>
                 </a14:m>
-                <a:endParaRPr lang="en-US" sz="2000" dirty="0"/>
+                <a:r>
+                  <a:rPr lang="en-US" sz="2000" dirty="0"/>
+                  <a:t> times the worst error of using </a:t>
+                </a:r>
+                <a14:m>
+                  <m:oMath xmlns:m="http://schemas.openxmlformats.org/officeDocument/2006/math">
+                    <m:r>
+                      <a:rPr lang="en-US" sz="2000" b="0" i="1" smtClean="0">
+                        <a:latin typeface="Cambria Math" panose="02040503050406030204" pitchFamily="18" charset="0"/>
+                        <a:ea typeface="Cambria Math" panose="02040503050406030204" pitchFamily="18" charset="0"/>
+                      </a:rPr>
+                      <m:t>𝑉</m:t>
+                    </m:r>
+                  </m:oMath>
+                </a14:m>
+                <a:r>
+                  <a:rPr lang="en-US" sz="2000" dirty="0"/>
+                  <a:t>.</a:t>
+                </a:r>
               </a:p>
               <a:p>
                 <a:endParaRPr lang="en-US" sz="2000" dirty="0"/>
@@ -19722,55 +22217,13 @@
                                   </m:ctrlPr>
                                 </m:dPr>
                                 <m:e>
-                                  <m:sSub>
-                                    <m:sSubPr>
-                                      <m:ctrlPr>
-                                        <a:rPr lang="en-US" sz="2000" b="0" i="1" smtClean="0">
-                                          <a:latin typeface="Cambria Math" panose="02040503050406030204" pitchFamily="18" charset="0"/>
-                                          <a:ea typeface="Cambria Math" panose="02040503050406030204" pitchFamily="18" charset="0"/>
-                                        </a:rPr>
-                                      </m:ctrlPr>
-                                    </m:sSubPr>
-                                    <m:e>
-                                      <m:r>
-                                        <a:rPr lang="en-US" sz="2000" b="0" i="1" smtClean="0">
-                                          <a:latin typeface="Cambria Math" panose="02040503050406030204" pitchFamily="18" charset="0"/>
-                                          <a:ea typeface="Cambria Math" panose="02040503050406030204" pitchFamily="18" charset="0"/>
-                                        </a:rPr>
-                                        <m:t>𝑉</m:t>
-                                      </m:r>
-                                    </m:e>
-                                    <m:sub>
-                                      <m:r>
-                                        <a:rPr lang="en-US" sz="2000" b="0" i="1" smtClean="0">
-                                          <a:latin typeface="Cambria Math" panose="02040503050406030204" pitchFamily="18" charset="0"/>
-                                          <a:ea typeface="Cambria Math" panose="02040503050406030204" pitchFamily="18" charset="0"/>
-                                        </a:rPr>
-                                        <m:t>𝑡</m:t>
-                                      </m:r>
-                                      <m:r>
-                                        <a:rPr lang="en-US" sz="2000" b="0" i="1" smtClean="0">
-                                          <a:latin typeface="Cambria Math" panose="02040503050406030204" pitchFamily="18" charset="0"/>
-                                          <a:ea typeface="Cambria Math" panose="02040503050406030204" pitchFamily="18" charset="0"/>
-                                        </a:rPr>
-                                        <m:t>+</m:t>
-                                      </m:r>
-                                      <m:r>
-                                        <a:rPr lang="en-US" sz="2000" b="0" i="1" smtClean="0">
-                                          <a:latin typeface="Cambria Math" panose="02040503050406030204" pitchFamily="18" charset="0"/>
-                                          <a:ea typeface="Cambria Math" panose="02040503050406030204" pitchFamily="18" charset="0"/>
-                                        </a:rPr>
-                                        <m:t>𝑛</m:t>
-                                      </m:r>
-                                      <m:r>
-                                        <a:rPr lang="en-US" sz="2000" b="0" i="1" smtClean="0">
-                                          <a:latin typeface="Cambria Math" panose="02040503050406030204" pitchFamily="18" charset="0"/>
-                                          <a:ea typeface="Cambria Math" panose="02040503050406030204" pitchFamily="18" charset="0"/>
-                                        </a:rPr>
-                                        <m:t>−1</m:t>
-                                      </m:r>
-                                    </m:sub>
-                                  </m:sSub>
+                                  <m:r>
+                                    <a:rPr lang="en-US" sz="2000" b="0" i="1" smtClean="0">
+                                      <a:latin typeface="Cambria Math" panose="02040503050406030204" pitchFamily="18" charset="0"/>
+                                      <a:ea typeface="Cambria Math" panose="02040503050406030204" pitchFamily="18" charset="0"/>
+                                    </a:rPr>
+                                    <m:t>𝑉</m:t>
+                                  </m:r>
                                   <m:d>
                                     <m:dPr>
                                       <m:ctrlPr>
@@ -19860,7 +22313,7 @@
             </p:txBody>
           </p:sp>
         </mc:Choice>
-        <mc:Fallback xmlns="">
+        <mc:Fallback>
           <p:sp>
             <p:nvSpPr>
               <p:cNvPr id="5" name="TextBox 4">

--- a/slides/Lecture_Chapter07.pptx
+++ b/slides/Lecture_Chapter07.pptx
@@ -316,7 +316,7 @@
           <a:p>
             <a:fld id="{3E22BF2E-04DA-469E-97C5-BB68A0368813}" type="datetimeFigureOut">
               <a:rPr lang="en-US" smtClean="0"/>
-              <a:t>2/19/2026</a:t>
+              <a:t>2/23/2026</a:t>
             </a:fld>
             <a:endParaRPr lang="en-US"/>
           </a:p>
@@ -514,7 +514,7 @@
           <a:p>
             <a:fld id="{3E22BF2E-04DA-469E-97C5-BB68A0368813}" type="datetimeFigureOut">
               <a:rPr lang="en-US" smtClean="0"/>
-              <a:t>2/19/2026</a:t>
+              <a:t>2/23/2026</a:t>
             </a:fld>
             <a:endParaRPr lang="en-US"/>
           </a:p>
@@ -722,7 +722,7 @@
           <a:p>
             <a:fld id="{3E22BF2E-04DA-469E-97C5-BB68A0368813}" type="datetimeFigureOut">
               <a:rPr lang="en-US" smtClean="0"/>
-              <a:t>2/19/2026</a:t>
+              <a:t>2/23/2026</a:t>
             </a:fld>
             <a:endParaRPr lang="en-US"/>
           </a:p>
@@ -930,7 +930,7 @@
           <a:p>
             <a:fld id="{3E22BF2E-04DA-469E-97C5-BB68A0368813}" type="datetimeFigureOut">
               <a:rPr lang="en-US" smtClean="0"/>
-              <a:t>2/19/2026</a:t>
+              <a:t>2/23/2026</a:t>
             </a:fld>
             <a:endParaRPr lang="en-US"/>
           </a:p>
@@ -1205,7 +1205,7 @@
           <a:p>
             <a:fld id="{3E22BF2E-04DA-469E-97C5-BB68A0368813}" type="datetimeFigureOut">
               <a:rPr lang="en-US" smtClean="0"/>
-              <a:t>2/19/2026</a:t>
+              <a:t>2/23/2026</a:t>
             </a:fld>
             <a:endParaRPr lang="en-US"/>
           </a:p>
@@ -1470,7 +1470,7 @@
           <a:p>
             <a:fld id="{3E22BF2E-04DA-469E-97C5-BB68A0368813}" type="datetimeFigureOut">
               <a:rPr lang="en-US" smtClean="0"/>
-              <a:t>2/19/2026</a:t>
+              <a:t>2/23/2026</a:t>
             </a:fld>
             <a:endParaRPr lang="en-US"/>
           </a:p>
@@ -1882,7 +1882,7 @@
           <a:p>
             <a:fld id="{3E22BF2E-04DA-469E-97C5-BB68A0368813}" type="datetimeFigureOut">
               <a:rPr lang="en-US" smtClean="0"/>
-              <a:t>2/19/2026</a:t>
+              <a:t>2/23/2026</a:t>
             </a:fld>
             <a:endParaRPr lang="en-US"/>
           </a:p>
@@ -2023,7 +2023,7 @@
           <a:p>
             <a:fld id="{3E22BF2E-04DA-469E-97C5-BB68A0368813}" type="datetimeFigureOut">
               <a:rPr lang="en-US" smtClean="0"/>
-              <a:t>2/19/2026</a:t>
+              <a:t>2/23/2026</a:t>
             </a:fld>
             <a:endParaRPr lang="en-US"/>
           </a:p>
@@ -2136,7 +2136,7 @@
           <a:p>
             <a:fld id="{3E22BF2E-04DA-469E-97C5-BB68A0368813}" type="datetimeFigureOut">
               <a:rPr lang="en-US" smtClean="0"/>
-              <a:t>2/19/2026</a:t>
+              <a:t>2/23/2026</a:t>
             </a:fld>
             <a:endParaRPr lang="en-US"/>
           </a:p>
@@ -2447,7 +2447,7 @@
           <a:p>
             <a:fld id="{3E22BF2E-04DA-469E-97C5-BB68A0368813}" type="datetimeFigureOut">
               <a:rPr lang="en-US" smtClean="0"/>
-              <a:t>2/19/2026</a:t>
+              <a:t>2/23/2026</a:t>
             </a:fld>
             <a:endParaRPr lang="en-US"/>
           </a:p>
@@ -2735,7 +2735,7 @@
           <a:p>
             <a:fld id="{3E22BF2E-04DA-469E-97C5-BB68A0368813}" type="datetimeFigureOut">
               <a:rPr lang="en-US" smtClean="0"/>
-              <a:t>2/19/2026</a:t>
+              <a:t>2/23/2026</a:t>
             </a:fld>
             <a:endParaRPr lang="en-US"/>
           </a:p>
@@ -2976,7 +2976,7 @@
           <a:p>
             <a:fld id="{3E22BF2E-04DA-469E-97C5-BB68A0368813}" type="datetimeFigureOut">
               <a:rPr lang="en-US" smtClean="0"/>
-              <a:t>2/19/2026</a:t>
+              <a:t>2/23/2026</a:t>
             </a:fld>
             <a:endParaRPr lang="en-US"/>
           </a:p>
@@ -4367,8 +4367,8 @@
           </p:sp>
         </mc:Fallback>
       </mc:AlternateContent>
-      <mc:AlternateContent xmlns:mc="http://schemas.openxmlformats.org/markup-compatibility/2006">
-        <mc:Choice xmlns:a14="http://schemas.microsoft.com/office/drawing/2010/main" Requires="a14">
+      <mc:AlternateContent xmlns:mc="http://schemas.openxmlformats.org/markup-compatibility/2006" xmlns:a14="http://schemas.microsoft.com/office/drawing/2010/main">
+        <mc:Choice Requires="a14">
           <p:sp>
             <p:nvSpPr>
               <p:cNvPr id="3" name="Content Placeholder 2">
@@ -5216,7 +5216,7 @@
             </p:txBody>
           </p:sp>
         </mc:Choice>
-        <mc:Fallback>
+        <mc:Fallback xmlns="">
           <p:sp>
             <p:nvSpPr>
               <p:cNvPr id="3" name="Content Placeholder 2">
@@ -5260,8 +5260,8 @@
           </p:sp>
         </mc:Fallback>
       </mc:AlternateContent>
-      <mc:AlternateContent xmlns:mc="http://schemas.openxmlformats.org/markup-compatibility/2006">
-        <mc:Choice xmlns:a14="http://schemas.microsoft.com/office/drawing/2010/main" Requires="a14">
+      <mc:AlternateContent xmlns:mc="http://schemas.openxmlformats.org/markup-compatibility/2006" xmlns:a14="http://schemas.microsoft.com/office/drawing/2010/main">
+        <mc:Choice Requires="a14">
           <p:sp>
             <p:nvSpPr>
               <p:cNvPr id="4" name="Speech Bubble: Rectangle with Corners Rounded 3">
@@ -5340,7 +5340,7 @@
             </p:txBody>
           </p:sp>
         </mc:Choice>
-        <mc:Fallback>
+        <mc:Fallback xmlns="">
           <p:sp>
             <p:nvSpPr>
               <p:cNvPr id="4" name="Speech Bubble: Rectangle with Corners Rounded 3">
@@ -5658,8 +5658,8 @@
             </a:fontRef>
           </p:style>
         </p:cxnSp>
-        <mc:AlternateContent xmlns:mc="http://schemas.openxmlformats.org/markup-compatibility/2006">
-          <mc:Choice xmlns:a14="http://schemas.microsoft.com/office/drawing/2010/main" Requires="a14">
+        <mc:AlternateContent xmlns:mc="http://schemas.openxmlformats.org/markup-compatibility/2006" xmlns:a14="http://schemas.microsoft.com/office/drawing/2010/main">
+          <mc:Choice Requires="a14">
             <p:sp>
               <p:nvSpPr>
                 <p:cNvPr id="9" name="TextBox 8">
@@ -5739,7 +5739,7 @@
                             </a:solidFill>
                             <a:latin typeface="Cambria Math" panose="02040503050406030204" pitchFamily="18" charset="0"/>
                           </a:rPr>
-                          <m:t>-</m:t>
+                          <m:t>−</m:t>
                         </m:r>
                         <m:r>
                           <m:rPr>
@@ -5792,7 +5792,7 @@
               </p:txBody>
             </p:sp>
           </mc:Choice>
-          <mc:Fallback>
+          <mc:Fallback xmlns="">
             <p:sp>
               <p:nvSpPr>
                 <p:cNvPr id="9" name="TextBox 8">
@@ -5837,8 +5837,8 @@
             </p:sp>
           </mc:Fallback>
         </mc:AlternateContent>
-        <mc:AlternateContent xmlns:mc="http://schemas.openxmlformats.org/markup-compatibility/2006">
-          <mc:Choice xmlns:a14="http://schemas.microsoft.com/office/drawing/2010/main" Requires="a14">
+        <mc:AlternateContent xmlns:mc="http://schemas.openxmlformats.org/markup-compatibility/2006" xmlns:a14="http://schemas.microsoft.com/office/drawing/2010/main">
+          <mc:Choice Requires="a14">
             <p:sp>
               <p:nvSpPr>
                 <p:cNvPr id="10" name="TextBox 9">
@@ -5892,7 +5892,7 @@
               </p:txBody>
             </p:sp>
           </mc:Choice>
-          <mc:Fallback>
+          <mc:Fallback xmlns="">
             <p:sp>
               <p:nvSpPr>
                 <p:cNvPr id="10" name="TextBox 9">
@@ -7167,8 +7167,8 @@
           <a:chExt cx="0" cy="0"/>
         </a:xfrm>
       </p:grpSpPr>
-      <mc:AlternateContent xmlns:mc="http://schemas.openxmlformats.org/markup-compatibility/2006">
-        <mc:Choice xmlns:a14="http://schemas.microsoft.com/office/drawing/2010/main" Requires="a14">
+      <mc:AlternateContent xmlns:mc="http://schemas.openxmlformats.org/markup-compatibility/2006" xmlns:a14="http://schemas.microsoft.com/office/drawing/2010/main">
+        <mc:Choice Requires="a14">
           <p:sp>
             <p:nvSpPr>
               <p:cNvPr id="4" name="Title 3">
@@ -7208,7 +7208,7 @@
             </p:txBody>
           </p:sp>
         </mc:Choice>
-        <mc:Fallback>
+        <mc:Fallback xmlns="">
           <p:sp>
             <p:nvSpPr>
               <p:cNvPr id="4" name="Title 3">
@@ -7306,8 +7306,8 @@
           <a:chExt cx="0" cy="0"/>
         </a:xfrm>
       </p:grpSpPr>
-      <mc:AlternateContent xmlns:mc="http://schemas.openxmlformats.org/markup-compatibility/2006">
-        <mc:Choice xmlns:a14="http://schemas.microsoft.com/office/drawing/2010/main" Requires="a14">
+      <mc:AlternateContent xmlns:mc="http://schemas.openxmlformats.org/markup-compatibility/2006" xmlns:a14="http://schemas.microsoft.com/office/drawing/2010/main">
+        <mc:Choice Requires="a14">
           <p:sp>
             <p:nvSpPr>
               <p:cNvPr id="2" name="Title 1">
@@ -7347,7 +7347,7 @@
             </p:txBody>
           </p:sp>
         </mc:Choice>
-        <mc:Fallback>
+        <mc:Fallback xmlns="">
           <p:sp>
             <p:nvSpPr>
               <p:cNvPr id="2" name="Title 1">
@@ -7387,8 +7387,8 @@
           </p:sp>
         </mc:Fallback>
       </mc:AlternateContent>
-      <mc:AlternateContent xmlns:mc="http://schemas.openxmlformats.org/markup-compatibility/2006">
-        <mc:Choice xmlns:a14="http://schemas.microsoft.com/office/drawing/2010/main" Requires="a14">
+      <mc:AlternateContent xmlns:mc="http://schemas.openxmlformats.org/markup-compatibility/2006" xmlns:a14="http://schemas.microsoft.com/office/drawing/2010/main">
+        <mc:Choice Requires="a14">
           <p:sp>
             <p:nvSpPr>
               <p:cNvPr id="3" name="Content Placeholder 2">
@@ -8225,7 +8225,7 @@
                       <a:rPr lang="en-US" b="0" i="0" smtClean="0">
                         <a:latin typeface="Cambria Math" panose="02040503050406030204" pitchFamily="18" charset="0"/>
                       </a:rPr>
-                      <m:t>-</m:t>
+                      <m:t>−</m:t>
                     </m:r>
                     <m:r>
                       <m:rPr>
@@ -8284,7 +8284,7 @@
             </p:txBody>
           </p:sp>
         </mc:Choice>
-        <mc:Fallback>
+        <mc:Fallback xmlns="">
           <p:sp>
             <p:nvSpPr>
               <p:cNvPr id="3" name="Content Placeholder 2">
@@ -9288,8 +9288,8 @@
           </a:p>
         </p:txBody>
       </p:sp>
-      <mc:AlternateContent xmlns:mc="http://schemas.openxmlformats.org/markup-compatibility/2006">
-        <mc:Choice xmlns:a14="http://schemas.microsoft.com/office/drawing/2010/main" Requires="a14">
+      <mc:AlternateContent xmlns:mc="http://schemas.openxmlformats.org/markup-compatibility/2006" xmlns:a14="http://schemas.microsoft.com/office/drawing/2010/main">
+        <mc:Choice Requires="a14">
           <p:sp>
             <p:nvSpPr>
               <p:cNvPr id="22" name="Speech Bubble: Rectangle with Corners Rounded 21">
@@ -9367,7 +9367,7 @@
                       <a:rPr lang="en-US" sz="1600" b="0" i="0" smtClean="0">
                         <a:latin typeface="Cambria Math" panose="02040503050406030204" pitchFamily="18" charset="0"/>
                       </a:rPr>
-                      <m:t>-</m:t>
+                      <m:t>−</m:t>
                     </m:r>
                     <m:r>
                       <m:rPr>
@@ -9403,7 +9403,7 @@
             </p:txBody>
           </p:sp>
         </mc:Choice>
-        <mc:Fallback>
+        <mc:Fallback xmlns="">
           <p:sp>
             <p:nvSpPr>
               <p:cNvPr id="22" name="Speech Bubble: Rectangle with Corners Rounded 21">
@@ -9642,8 +9642,8 @@
           </a:extLst>
         </p:spPr>
       </p:pic>
-      <mc:AlternateContent xmlns:mc="http://schemas.openxmlformats.org/markup-compatibility/2006">
-        <mc:Choice xmlns:a14="http://schemas.microsoft.com/office/drawing/2010/main" Requires="a14">
+      <mc:AlternateContent xmlns:mc="http://schemas.openxmlformats.org/markup-compatibility/2006" xmlns:a14="http://schemas.microsoft.com/office/drawing/2010/main">
+        <mc:Choice Requires="a14">
           <p:sp>
             <p:nvSpPr>
               <p:cNvPr id="3" name="Content Placeholder 2">
@@ -9815,7 +9815,7 @@
             </p:txBody>
           </p:sp>
         </mc:Choice>
-        <mc:Fallback>
+        <mc:Fallback xmlns="">
           <p:sp>
             <p:nvSpPr>
               <p:cNvPr id="3" name="Content Placeholder 2">
@@ -13517,8 +13517,8 @@
           </p:sp>
         </mc:Fallback>
       </mc:AlternateContent>
-      <mc:AlternateContent xmlns:mc="http://schemas.openxmlformats.org/markup-compatibility/2006">
-        <mc:Choice xmlns:a14="http://schemas.microsoft.com/office/drawing/2010/main" Requires="a14">
+      <mc:AlternateContent xmlns:mc="http://schemas.openxmlformats.org/markup-compatibility/2006" xmlns:a14="http://schemas.microsoft.com/office/drawing/2010/main">
+        <mc:Choice Requires="a14">
           <p:sp>
             <p:nvSpPr>
               <p:cNvPr id="4" name="Content Placeholder 2">
@@ -14073,7 +14073,7 @@
             </p:txBody>
           </p:sp>
         </mc:Choice>
-        <mc:Fallback>
+        <mc:Fallback xmlns="">
           <p:sp>
             <p:nvSpPr>
               <p:cNvPr id="4" name="Content Placeholder 2">
@@ -14148,8 +14148,8 @@
           <a:chExt cx="0" cy="0"/>
         </a:xfrm>
       </p:grpSpPr>
-      <mc:AlternateContent xmlns:mc="http://schemas.openxmlformats.org/markup-compatibility/2006">
-        <mc:Choice xmlns:a14="http://schemas.microsoft.com/office/drawing/2010/main" Requires="a14">
+      <mc:AlternateContent xmlns:mc="http://schemas.openxmlformats.org/markup-compatibility/2006" xmlns:a14="http://schemas.microsoft.com/office/drawing/2010/main">
+        <mc:Choice Requires="a14">
           <p:sp>
             <p:nvSpPr>
               <p:cNvPr id="2" name="Title 1">
@@ -14195,7 +14195,7 @@
             </p:txBody>
           </p:sp>
         </mc:Choice>
-        <mc:Fallback>
+        <mc:Fallback xmlns="">
           <p:sp>
             <p:nvSpPr>
               <p:cNvPr id="2" name="Title 1">
@@ -14256,7 +14256,7 @@
             <p:spPr>
               <a:xfrm>
                 <a:off x="838200" y="1192292"/>
-                <a:ext cx="10515600" cy="2129036"/>
+                <a:ext cx="10515600" cy="1831065"/>
               </a:xfrm>
             </p:spPr>
             <p:txBody>
@@ -14269,123 +14269,57 @@
                   <a:buNone/>
                 </a:pPr>
                 <a:r>
-                  <a:rPr lang="en-US" sz="1400" b="1" dirty="0"/>
-                  <a:t>Remember</a:t>
-                </a:r>
-                <a:r>
-                  <a:rPr lang="en-US" sz="1400" dirty="0"/>
-                  <a:t>: Policy evaluation estimates the value function. </a:t>
-                </a:r>
-                <a:br>
-                  <a:rPr lang="en-US" sz="1400" dirty="0"/>
-                </a:br>
-                <a:r>
-                  <a:rPr lang="en-US" sz="1400" dirty="0"/>
-                  <a:t>The state value is the expected return from following the policy from a state.</a:t>
-                </a:r>
+                  <a:rPr lang="en-US" sz="1800" b="1" dirty="0"/>
+                  <a:t>Question</a:t>
+                </a:r>
+                <a:r>
+                  <a:rPr lang="en-US" sz="1800" dirty="0"/>
+                  <a:t>: How far ahead in the sampled episode do we look to estimate the return?</a:t>
+                </a:r>
+                <a:endParaRPr lang="en-US" sz="1800" b="1" dirty="0"/>
               </a:p>
               <a:p>
                 <a:pPr marL="0" indent="0">
                   <a:buNone/>
                 </a:pPr>
-                <a:r>
-                  <a:rPr lang="en-US" sz="1400" b="1" dirty="0"/>
-                  <a:t>Question</a:t>
-                </a:r>
-                <a:r>
-                  <a:rPr lang="en-US" sz="1400" dirty="0"/>
-                  <a:t>: How far do we look ahead in the sampled episode to estimate the return?</a:t>
-                </a:r>
-                <a:endParaRPr lang="en-US" sz="1400" b="1" dirty="0"/>
+                <a:endParaRPr lang="en-US" sz="1800" b="1" dirty="0"/>
               </a:p>
               <a:p>
-                <a:pPr marL="0" indent="0">
-                  <a:buNone/>
-                </a:pPr>
-                <a:endParaRPr lang="en-US" sz="1400" b="1" dirty="0"/>
+                <a:r>
+                  <a:rPr lang="en-US" sz="1800" b="1" dirty="0"/>
+                  <a:t>MC: </a:t>
+                </a:r>
+                <a:r>
+                  <a:rPr lang="en-US" sz="1800" dirty="0"/>
+                  <a:t>We use the whole episode.</a:t>
+                </a:r>
+                <a:endParaRPr lang="en-US" sz="1800" b="1" dirty="0"/>
               </a:p>
               <a:p>
-                <a:pPr marL="0" indent="0">
-                  <a:buNone/>
-                </a:pPr>
-                <a:r>
-                  <a:rPr lang="en-US" sz="1400" b="1" dirty="0"/>
-                  <a:t>1-step DT</a:t>
-                </a:r>
-              </a:p>
-              <a:p>
-                <a:pPr lvl="1"/>
-                <a:r>
-                  <a:rPr lang="en-US" sz="1400" dirty="0"/>
-                  <a:t>We have already discussed 1-step TD in TD(0) and control algorithms like Q-Learning, Sarsa</a:t>
-                </a:r>
-              </a:p>
-              <a:p>
-                <a:pPr lvl="1"/>
-                <a:r>
-                  <a:rPr lang="en-US" sz="1400" dirty="0"/>
-                  <a:t>We only observe the next step and its reward. The remaining return is </a:t>
-                </a:r>
-                <a:r>
-                  <a:rPr lang="en-US" sz="1400" b="1" dirty="0"/>
+                <a:r>
+                  <a:rPr lang="en-US" sz="1800" b="1" dirty="0"/>
+                  <a:t>1-step TD: </a:t>
+                </a:r>
+                <a:r>
+                  <a:rPr lang="en-US" sz="1800" dirty="0"/>
+                  <a:t>We only observe the </a:t>
+                </a:r>
+                <a:r>
+                  <a:rPr lang="en-US" sz="1800" b="1" dirty="0"/>
+                  <a:t>next step </a:t>
+                </a:r>
+                <a:r>
+                  <a:rPr lang="en-US" sz="1800" dirty="0"/>
+                  <a:t>and its reward. The remaining return is </a:t>
+                </a:r>
+                <a:r>
+                  <a:rPr lang="en-US" sz="1800" b="1" dirty="0"/>
                   <a:t>bootstrapped</a:t>
-                </a:r>
-                <a:r>
-                  <a:rPr lang="en-US" sz="1400" dirty="0"/>
-                  <a:t> using the estimate of the next state’s value </a:t>
                 </a:r>
                 <a14:m>
                   <m:oMath xmlns:m="http://schemas.openxmlformats.org/officeDocument/2006/math">
                     <m:r>
-                      <a:rPr lang="en-US" sz="1400" i="1">
-                        <a:latin typeface="Cambria Math" panose="02040503050406030204" pitchFamily="18" charset="0"/>
-                      </a:rPr>
-                      <m:t>𝑉</m:t>
-                    </m:r>
-                    <m:d>
-                      <m:dPr>
-                        <m:ctrlPr>
-                          <a:rPr lang="en-US" sz="1400" i="1">
-                            <a:latin typeface="Cambria Math" panose="02040503050406030204" pitchFamily="18" charset="0"/>
-                          </a:rPr>
-                        </m:ctrlPr>
-                      </m:dPr>
-                      <m:e>
-                        <m:sSub>
-                          <m:sSubPr>
-                            <m:ctrlPr>
-                              <a:rPr lang="en-US" sz="1400" i="1">
-                                <a:latin typeface="Cambria Math" panose="02040503050406030204" pitchFamily="18" charset="0"/>
-                              </a:rPr>
-                            </m:ctrlPr>
-                          </m:sSubPr>
-                          <m:e>
-                            <m:r>
-                              <a:rPr lang="en-US" sz="1400" i="1">
-                                <a:latin typeface="Cambria Math" panose="02040503050406030204" pitchFamily="18" charset="0"/>
-                              </a:rPr>
-                              <m:t>𝑆</m:t>
-                            </m:r>
-                          </m:e>
-                          <m:sub>
-                            <m:r>
-                              <a:rPr lang="en-US" sz="1400" i="1">
-                                <a:latin typeface="Cambria Math" panose="02040503050406030204" pitchFamily="18" charset="0"/>
-                              </a:rPr>
-                              <m:t>𝑡</m:t>
-                            </m:r>
-                            <m:r>
-                              <a:rPr lang="en-US" sz="1400" i="1">
-                                <a:latin typeface="Cambria Math" panose="02040503050406030204" pitchFamily="18" charset="0"/>
-                              </a:rPr>
-                              <m:t>+1</m:t>
-                            </m:r>
-                          </m:sub>
-                        </m:sSub>
-                      </m:e>
-                    </m:d>
-                    <m:r>
-                      <a:rPr lang="en-US" sz="1400" b="0" i="0" smtClean="0">
+                      <a:rPr lang="en-US" sz="1800" b="0" i="0" smtClean="0">
                         <a:latin typeface="Cambria Math" panose="02040503050406030204" pitchFamily="18" charset="0"/>
                       </a:rPr>
                       <m:t>.</m:t>
@@ -14393,18 +14327,18 @@
                   </m:oMath>
                 </a14:m>
                 <a:r>
-                  <a:rPr lang="en-US" sz="1400" dirty="0"/>
+                  <a:rPr lang="en-US" sz="1800" dirty="0"/>
                   <a:t> This </a:t>
                 </a:r>
                 <a:r>
-                  <a:rPr lang="en-US" sz="1400" b="1" dirty="0"/>
+                  <a:rPr lang="en-US" sz="1800" b="1" dirty="0"/>
                   <a:t>propagates state value errors</a:t>
                 </a:r>
                 <a:r>
-                  <a:rPr lang="en-US" sz="1400" dirty="0"/>
+                  <a:rPr lang="en-US" sz="1800" dirty="0"/>
                   <a:t>!</a:t>
                 </a:r>
-                <a:endParaRPr lang="en-US" sz="1400" i="1" dirty="0">
+                <a:endParaRPr lang="en-US" sz="1800" i="1" dirty="0">
                   <a:latin typeface="Cambria Math" panose="02040503050406030204" pitchFamily="18" charset="0"/>
                 </a:endParaRPr>
               </a:p>
@@ -14412,7 +14346,7 @@
                 <a:pPr marL="0" indent="0">
                   <a:buNone/>
                 </a:pPr>
-                <a:endParaRPr lang="en-US" sz="1400" b="1" i="1" dirty="0">
+                <a:endParaRPr lang="en-US" sz="1600" b="1" i="1" dirty="0">
                   <a:latin typeface="Cambria Math" panose="02040503050406030204" pitchFamily="18" charset="0"/>
                 </a:endParaRPr>
               </a:p>
@@ -14420,7 +14354,7 @@
                 <a:pPr marL="0" indent="0">
                   <a:buNone/>
                 </a:pPr>
-                <a:endParaRPr lang="en-US" sz="1400" b="1" i="1" dirty="0">
+                <a:endParaRPr lang="en-US" sz="1600" b="1" i="1" dirty="0">
                   <a:latin typeface="Cambria Math" panose="02040503050406030204" pitchFamily="18" charset="0"/>
                 </a:endParaRPr>
               </a:p>
@@ -14428,7 +14362,7 @@
                 <a:pPr marL="0" indent="0">
                   <a:buNone/>
                 </a:pPr>
-                <a:endParaRPr lang="en-US" sz="1400" b="1" i="1" dirty="0">
+                <a:endParaRPr lang="en-US" sz="1600" b="1" i="1" dirty="0">
                   <a:latin typeface="Cambria Math" panose="02040503050406030204" pitchFamily="18" charset="0"/>
                 </a:endParaRPr>
               </a:p>
@@ -14436,7 +14370,7 @@
                 <a:pPr marL="0" indent="0">
                   <a:buNone/>
                 </a:pPr>
-                <a:endParaRPr lang="en-US" sz="1400" b="1" i="1" dirty="0">
+                <a:endParaRPr lang="en-US" sz="1600" b="1" i="1" dirty="0">
                   <a:latin typeface="Cambria Math" panose="02040503050406030204" pitchFamily="18" charset="0"/>
                 </a:endParaRPr>
               </a:p>
@@ -14463,12 +14397,12 @@
             <p:spPr>
               <a:xfrm>
                 <a:off x="838200" y="1192292"/>
-                <a:ext cx="10515600" cy="2129036"/>
+                <a:ext cx="10515600" cy="1831065"/>
               </a:xfrm>
               <a:blipFill>
                 <a:blip r:embed="rId3"/>
                 <a:stretch>
-                  <a:fillRect l="-174" t="-1433" r="-406" b="-3438"/>
+                  <a:fillRect l="-522" t="-3333"/>
                 </a:stretch>
               </a:blipFill>
             </p:spPr>
@@ -14503,8 +14437,8 @@
             </p:nvSpPr>
             <p:spPr>
               <a:xfrm>
-                <a:off x="893238" y="4851304"/>
-                <a:ext cx="10610054" cy="954107"/>
+                <a:off x="942099" y="4644434"/>
+                <a:ext cx="10610054" cy="1200329"/>
               </a:xfrm>
               <a:prstGeom prst="rect">
                 <a:avLst/>
@@ -14517,13 +14451,14 @@
               </a:bodyPr>
               <a:lstStyle/>
               <a:p>
-                <a:pPr marL="0" indent="0">
-                  <a:buNone/>
+                <a:pPr marL="285750" indent="-285750">
+                  <a:buFont typeface="Arial" panose="020B0604020202020204" pitchFamily="34" charset="0"/>
+                  <a:buChar char="•"/>
                 </a:pPr>
                 <a14:m>
                   <m:oMath xmlns:m="http://schemas.openxmlformats.org/officeDocument/2006/math">
                     <m:r>
-                      <a:rPr lang="en-US" sz="1400" b="1" i="1" smtClean="0">
+                      <a:rPr lang="en-US" b="1" i="1" smtClean="0">
                         <a:latin typeface="Cambria Math" panose="02040503050406030204" pitchFamily="18" charset="0"/>
                       </a:rPr>
                       <m:t>𝒏</m:t>
@@ -14531,8 +14466,8 @@
                   </m:oMath>
                 </a14:m>
                 <a:r>
-                  <a:rPr lang="en-US" sz="1400" b="1" dirty="0"/>
-                  <a:t>-step DT</a:t>
+                  <a:rPr lang="en-US" b="1" dirty="0"/>
+                  <a:t>-step TD</a:t>
                 </a:r>
               </a:p>
               <a:p>
@@ -14541,13 +14476,13 @@
                   <a:buChar char="•"/>
                 </a:pPr>
                 <a:r>
-                  <a:rPr lang="en-US" sz="1400" dirty="0"/>
+                  <a:rPr lang="en-US" dirty="0"/>
                   <a:t>Looks </a:t>
                 </a:r>
                 <a14:m>
                   <m:oMath xmlns:m="http://schemas.openxmlformats.org/officeDocument/2006/math">
                     <m:r>
-                      <a:rPr lang="en-US" sz="1400" b="0" i="1" smtClean="0">
+                      <a:rPr lang="en-US" b="0" i="1" smtClean="0">
                         <a:latin typeface="Cambria Math" panose="02040503050406030204" pitchFamily="18" charset="0"/>
                       </a:rPr>
                       <m:t>𝑛</m:t>
@@ -14555,11 +14490,11 @@
                   </m:oMath>
                 </a14:m>
                 <a:r>
-                  <a:rPr lang="en-US" sz="1400" dirty="0"/>
+                  <a:rPr lang="en-US" dirty="0"/>
                   <a:t> time steps ahead and bootstraps the rest. Using more observed rewards should help to </a:t>
                 </a:r>
                 <a:r>
-                  <a:rPr lang="en-US" sz="1400" b="1" dirty="0"/>
+                  <a:rPr lang="en-US" b="1" dirty="0"/>
                   <a:t>reduce the bootstrapping error.</a:t>
                 </a:r>
               </a:p>
@@ -14569,7 +14504,7 @@
                   <a:buChar char="•"/>
                 </a:pPr>
                 <a:r>
-                  <a:rPr lang="en-US" sz="1400" dirty="0"/>
+                  <a:rPr lang="en-US" dirty="0"/>
                   <a:t>TD unifies and generalizes MC and one-step TD.</a:t>
                 </a:r>
               </a:p>
@@ -14593,8 +14528,8 @@
             </p:nvSpPr>
             <p:spPr>
               <a:xfrm>
-                <a:off x="893238" y="4851304"/>
-                <a:ext cx="10610054" cy="954107"/>
+                <a:off x="942099" y="4644434"/>
+                <a:ext cx="10610054" cy="1200329"/>
               </a:xfrm>
               <a:prstGeom prst="rect">
                 <a:avLst/>
@@ -14602,7 +14537,7 @@
               <a:blipFill>
                 <a:blip r:embed="rId4"/>
                 <a:stretch>
-                  <a:fillRect t="-1282" b="-5769"/>
+                  <a:fillRect l="-402" t="-2538" b="-7614"/>
                 </a:stretch>
               </a:blipFill>
             </p:spPr>
@@ -14635,10 +14570,10 @@
         </p:nvGrpSpPr>
         <p:grpSpPr>
           <a:xfrm>
-            <a:off x="1468447" y="3291395"/>
-            <a:ext cx="5965095" cy="1634099"/>
+            <a:off x="2745815" y="3029566"/>
+            <a:ext cx="5965095" cy="1634100"/>
             <a:chOff x="2637816" y="2832616"/>
-            <a:chExt cx="5965095" cy="1634099"/>
+            <a:chExt cx="5965095" cy="1634100"/>
           </a:xfrm>
         </p:grpSpPr>
         <p:grpSp>
@@ -15196,8 +15131,8 @@
             </p:txBody>
           </p:sp>
         </p:grpSp>
-        <mc:AlternateContent xmlns:mc="http://schemas.openxmlformats.org/markup-compatibility/2006" xmlns:a14="http://schemas.microsoft.com/office/drawing/2010/main">
-          <mc:Choice Requires="a14">
+        <mc:AlternateContent xmlns:mc="http://schemas.openxmlformats.org/markup-compatibility/2006">
+          <mc:Choice xmlns:a14="http://schemas.microsoft.com/office/drawing/2010/main" Requires="a14">
             <p:sp>
               <p:nvSpPr>
                 <p:cNvPr id="34" name="Speech Bubble: Rectangle with Corners Rounded 33">
@@ -15212,13 +15147,13 @@
               </p:nvSpPr>
               <p:spPr>
                 <a:xfrm>
-                  <a:off x="5452585" y="4041516"/>
-                  <a:ext cx="2651371" cy="425199"/>
+                  <a:off x="5452585" y="3967462"/>
+                  <a:ext cx="2801639" cy="499254"/>
                 </a:xfrm>
                 <a:prstGeom prst="wedgeRoundRectCallout">
                   <a:avLst>
-                    <a:gd name="adj1" fmla="val -75683"/>
-                    <a:gd name="adj2" fmla="val -67167"/>
+                    <a:gd name="adj1" fmla="val -69704"/>
+                    <a:gd name="adj2" fmla="val -50390"/>
                     <a:gd name="adj3" fmla="val 16667"/>
                   </a:avLst>
                 </a:prstGeom>
@@ -15245,7 +15180,7 @@
                 <a:p>
                   <a:pPr algn="ctr"/>
                   <a:r>
-                    <a:rPr lang="en-US" sz="1200" dirty="0"/>
+                    <a:rPr lang="en-US" sz="1600" dirty="0"/>
                     <a:t>Used to bootstrap estimate of the remaining return </a:t>
                   </a:r>
                   <a14:m>
@@ -15253,14 +15188,14 @@
                       <m:sSub>
                         <m:sSubPr>
                           <m:ctrlPr>
-                            <a:rPr lang="en-US" sz="1200" b="0" i="1" smtClean="0">
+                            <a:rPr lang="en-US" sz="1600" b="0" i="1" smtClean="0">
                               <a:latin typeface="Cambria Math" panose="02040503050406030204" pitchFamily="18" charset="0"/>
                             </a:rPr>
                           </m:ctrlPr>
                         </m:sSubPr>
                         <m:e>
                           <m:r>
-                            <a:rPr lang="en-US" sz="1200" b="0" i="1" smtClean="0">
+                            <a:rPr lang="en-US" sz="1600" b="0" i="1" smtClean="0">
                               <a:latin typeface="Cambria Math" panose="02040503050406030204" pitchFamily="18" charset="0"/>
                             </a:rPr>
                             <m:t>𝐺</m:t>
@@ -15268,13 +15203,13 @@
                         </m:e>
                         <m:sub>
                           <m:r>
-                            <a:rPr lang="en-US" sz="1200" b="0" i="1" smtClean="0">
+                            <a:rPr lang="en-US" sz="1600" b="0" i="1" smtClean="0">
                               <a:latin typeface="Cambria Math" panose="02040503050406030204" pitchFamily="18" charset="0"/>
                             </a:rPr>
                             <m:t>𝑡</m:t>
                           </m:r>
                           <m:r>
-                            <a:rPr lang="en-US" sz="1200" b="0" i="1" smtClean="0">
+                            <a:rPr lang="en-US" sz="1600" b="0" i="1" smtClean="0">
                               <a:latin typeface="Cambria Math" panose="02040503050406030204" pitchFamily="18" charset="0"/>
                             </a:rPr>
                             <m:t>+1</m:t>
@@ -15283,12 +15218,12 @@
                       </m:sSub>
                     </m:oMath>
                   </a14:m>
-                  <a:endParaRPr lang="en-US" sz="1200" dirty="0"/>
+                  <a:endParaRPr lang="en-US" sz="1600" dirty="0"/>
                 </a:p>
               </p:txBody>
             </p:sp>
           </mc:Choice>
-          <mc:Fallback xmlns="">
+          <mc:Fallback>
             <p:sp>
               <p:nvSpPr>
                 <p:cNvPr id="34" name="Speech Bubble: Rectangle with Corners Rounded 33">
@@ -15305,20 +15240,20 @@
               </p:nvSpPr>
               <p:spPr>
                 <a:xfrm>
-                  <a:off x="5452585" y="4041516"/>
-                  <a:ext cx="2651371" cy="425199"/>
+                  <a:off x="5452585" y="3967462"/>
+                  <a:ext cx="2801639" cy="499254"/>
                 </a:xfrm>
                 <a:prstGeom prst="wedgeRoundRectCallout">
                   <a:avLst>
-                    <a:gd name="adj1" fmla="val -75683"/>
-                    <a:gd name="adj2" fmla="val -67167"/>
+                    <a:gd name="adj1" fmla="val -69704"/>
+                    <a:gd name="adj2" fmla="val -50390"/>
                     <a:gd name="adj3" fmla="val 16667"/>
                   </a:avLst>
                 </a:prstGeom>
                 <a:blipFill>
                   <a:blip r:embed="rId8"/>
                   <a:stretch>
-                    <a:fillRect b="-9091"/>
+                    <a:fillRect t="-5682" b="-20455"/>
                   </a:stretch>
                 </a:blipFill>
               </p:spPr>
@@ -15352,10 +15287,10 @@
         </p:nvGrpSpPr>
         <p:grpSpPr>
           <a:xfrm>
-            <a:off x="5842341" y="5539571"/>
-            <a:ext cx="5403210" cy="832369"/>
-            <a:chOff x="3084949" y="5522208"/>
-            <a:chExt cx="5403210" cy="832369"/>
+            <a:off x="3541531" y="5788233"/>
+            <a:ext cx="5623139" cy="893096"/>
+            <a:chOff x="2888293" y="5522210"/>
+            <a:chExt cx="5623139" cy="893096"/>
           </a:xfrm>
         </p:grpSpPr>
         <p:grpSp>
@@ -15372,18 +15307,18 @@
           </p:nvGrpSpPr>
           <p:grpSpPr>
             <a:xfrm>
-              <a:off x="3084949" y="5522208"/>
-              <a:ext cx="5403210" cy="832369"/>
-              <a:chOff x="3245492" y="5722123"/>
-              <a:chExt cx="5403210" cy="832369"/>
+              <a:off x="2888293" y="5522210"/>
+              <a:ext cx="5623139" cy="893096"/>
+              <a:chOff x="3048836" y="5722125"/>
+              <a:chExt cx="5623139" cy="893096"/>
             </a:xfrm>
           </p:grpSpPr>
           <p:grpSp>
             <p:nvGrpSpPr>
-              <p:cNvPr id="12" name="Group 11">
+              <p:cNvPr id="10" name="Group 9">
                 <a:extLst>
                   <a:ext uri="{FF2B5EF4-FFF2-40B4-BE49-F238E27FC236}">
-                    <a16:creationId xmlns:a16="http://schemas.microsoft.com/office/drawing/2014/main" id="{C25B38B9-8EEE-3230-C9A7-D1B5877AC90A}"/>
+                    <a16:creationId xmlns:a16="http://schemas.microsoft.com/office/drawing/2014/main" id="{E7470490-29F2-50C7-075E-7377CEFC4DB5}"/>
                   </a:ext>
                 </a:extLst>
               </p:cNvPr>
@@ -15392,242 +15327,150 @@
             </p:nvGrpSpPr>
             <p:grpSpPr>
               <a:xfrm>
-                <a:off x="3245492" y="5722123"/>
-                <a:ext cx="4870596" cy="666396"/>
-                <a:chOff x="2879313" y="2782204"/>
-                <a:chExt cx="5439985" cy="879847"/>
+                <a:off x="3048836" y="5722125"/>
+                <a:ext cx="5067252" cy="477986"/>
+                <a:chOff x="2659667" y="2782204"/>
+                <a:chExt cx="5659631" cy="631088"/>
               </a:xfrm>
             </p:grpSpPr>
-            <p:grpSp>
-              <p:nvGrpSpPr>
-                <p:cNvPr id="10" name="Group 9">
+            <p:sp>
+              <p:nvSpPr>
+                <p:cNvPr id="4" name="Oval 3">
                   <a:extLst>
                     <a:ext uri="{FF2B5EF4-FFF2-40B4-BE49-F238E27FC236}">
-                      <a16:creationId xmlns:a16="http://schemas.microsoft.com/office/drawing/2014/main" id="{E7470490-29F2-50C7-075E-7377CEFC4DB5}"/>
+                      <a16:creationId xmlns:a16="http://schemas.microsoft.com/office/drawing/2014/main" id="{B94B77C9-C9AA-6F5D-D56B-315043DD70EF}"/>
                     </a:ext>
                   </a:extLst>
                 </p:cNvPr>
-                <p:cNvGrpSpPr/>
+                <p:cNvSpPr/>
                 <p:nvPr/>
-              </p:nvGrpSpPr>
-              <p:grpSpPr>
+              </p:nvSpPr>
+              <p:spPr>
                 <a:xfrm>
-                  <a:off x="2879313" y="2782204"/>
-                  <a:ext cx="5439985" cy="631088"/>
-                  <a:chOff x="2879313" y="2782204"/>
-                  <a:chExt cx="5439985" cy="631088"/>
+                  <a:off x="3378394" y="3224828"/>
+                  <a:ext cx="174504" cy="188464"/>
                 </a:xfrm>
-              </p:grpSpPr>
-              <p:sp>
-                <p:nvSpPr>
-                  <p:cNvPr id="4" name="Oval 3">
-                    <a:extLst>
-                      <a:ext uri="{FF2B5EF4-FFF2-40B4-BE49-F238E27FC236}">
-                        <a16:creationId xmlns:a16="http://schemas.microsoft.com/office/drawing/2014/main" id="{B94B77C9-C9AA-6F5D-D56B-315043DD70EF}"/>
-                      </a:ext>
-                    </a:extLst>
-                  </p:cNvPr>
-                  <p:cNvSpPr/>
-                  <p:nvPr/>
-                </p:nvSpPr>
-                <p:spPr>
-                  <a:xfrm>
-                    <a:off x="3378394" y="3224828"/>
-                    <a:ext cx="174504" cy="188464"/>
-                  </a:xfrm>
-                  <a:prstGeom prst="ellipse">
-                    <a:avLst/>
-                  </a:prstGeom>
-                </p:spPr>
-                <p:style>
-                  <a:lnRef idx="2">
-                    <a:schemeClr val="accent1">
-                      <a:shade val="15000"/>
-                    </a:schemeClr>
-                  </a:lnRef>
-                  <a:fillRef idx="1">
-                    <a:schemeClr val="accent1"/>
-                  </a:fillRef>
-                  <a:effectRef idx="0">
-                    <a:schemeClr val="accent1"/>
-                  </a:effectRef>
-                  <a:fontRef idx="minor">
-                    <a:schemeClr val="lt1"/>
-                  </a:fontRef>
-                </p:style>
-                <p:txBody>
-                  <a:bodyPr rtlCol="0" anchor="ctr"/>
-                  <a:lstStyle/>
-                  <a:p>
-                    <a:pPr algn="ctr"/>
-                    <a:endParaRPr lang="en-US" sz="1400"/>
-                  </a:p>
-                </p:txBody>
-              </p:sp>
-              <p:sp>
-                <p:nvSpPr>
-                  <p:cNvPr id="5" name="Oval 4">
-                    <a:extLst>
-                      <a:ext uri="{FF2B5EF4-FFF2-40B4-BE49-F238E27FC236}">
-                        <a16:creationId xmlns:a16="http://schemas.microsoft.com/office/drawing/2014/main" id="{8EAB5D2C-C971-DEFC-52FE-D0987A0552AA}"/>
-                      </a:ext>
-                    </a:extLst>
-                  </p:cNvPr>
-                  <p:cNvSpPr/>
-                  <p:nvPr/>
-                </p:nvSpPr>
-                <p:spPr>
-                  <a:xfrm>
-                    <a:off x="7907350" y="3224828"/>
-                    <a:ext cx="174504" cy="188464"/>
-                  </a:xfrm>
-                  <a:prstGeom prst="ellipse">
-                    <a:avLst/>
-                  </a:prstGeom>
-                </p:spPr>
-                <p:style>
-                  <a:lnRef idx="2">
-                    <a:schemeClr val="accent1">
-                      <a:shade val="15000"/>
-                    </a:schemeClr>
-                  </a:lnRef>
-                  <a:fillRef idx="1">
-                    <a:schemeClr val="accent1"/>
-                  </a:fillRef>
-                  <a:effectRef idx="0">
-                    <a:schemeClr val="accent1"/>
-                  </a:effectRef>
-                  <a:fontRef idx="minor">
-                    <a:schemeClr val="lt1"/>
-                  </a:fontRef>
-                </p:style>
-                <p:txBody>
-                  <a:bodyPr rtlCol="0" anchor="ctr"/>
-                  <a:lstStyle/>
-                  <a:p>
-                    <a:pPr algn="ctr"/>
-                    <a:endParaRPr lang="en-US" sz="1400"/>
-                  </a:p>
-                </p:txBody>
-              </p:sp>
-              <p:cxnSp>
-                <p:nvCxnSpPr>
-                  <p:cNvPr id="7" name="Straight Arrow Connector 6">
-                    <a:extLst>
-                      <a:ext uri="{FF2B5EF4-FFF2-40B4-BE49-F238E27FC236}">
-                        <a16:creationId xmlns:a16="http://schemas.microsoft.com/office/drawing/2014/main" id="{0F54933B-23C4-19A8-0DB4-85CED3BAE1BB}"/>
-                      </a:ext>
-                    </a:extLst>
-                  </p:cNvPr>
-                  <p:cNvCxnSpPr/>
-                  <p:nvPr/>
-                </p:nvCxnSpPr>
-                <p:spPr>
-                  <a:xfrm>
-                    <a:off x="3664580" y="3319060"/>
-                    <a:ext cx="4132251" cy="0"/>
-                  </a:xfrm>
-                  <a:prstGeom prst="straightConnector1">
-                    <a:avLst/>
-                  </a:prstGeom>
-                  <a:ln w="57150">
-                    <a:headEnd type="triangle" w="med" len="med"/>
-                    <a:tailEnd type="triangle" w="med" len="med"/>
-                  </a:ln>
-                </p:spPr>
-                <p:style>
-                  <a:lnRef idx="2">
-                    <a:schemeClr val="accent1"/>
-                  </a:lnRef>
-                  <a:fillRef idx="0">
-                    <a:schemeClr val="accent1"/>
-                  </a:fillRef>
-                  <a:effectRef idx="1">
-                    <a:schemeClr val="accent1"/>
-                  </a:effectRef>
-                  <a:fontRef idx="minor">
-                    <a:schemeClr val="tx1"/>
-                  </a:fontRef>
-                </p:style>
-              </p:cxnSp>
-              <p:sp>
-                <p:nvSpPr>
-                  <p:cNvPr id="8" name="TextBox 7">
-                    <a:extLst>
-                      <a:ext uri="{FF2B5EF4-FFF2-40B4-BE49-F238E27FC236}">
-                        <a16:creationId xmlns:a16="http://schemas.microsoft.com/office/drawing/2014/main" id="{141C27E2-D7A4-5F48-644A-B5DB89090844}"/>
-                      </a:ext>
-                    </a:extLst>
-                  </p:cNvPr>
-                  <p:cNvSpPr txBox="1"/>
-                  <p:nvPr/>
-                </p:nvSpPr>
-                <p:spPr>
-                  <a:xfrm>
-                    <a:off x="2879313" y="2782204"/>
-                    <a:ext cx="1172665" cy="307777"/>
-                  </a:xfrm>
-                  <a:prstGeom prst="rect">
-                    <a:avLst/>
-                  </a:prstGeom>
-                  <a:noFill/>
-                </p:spPr>
-                <p:txBody>
-                  <a:bodyPr wrap="square" rtlCol="0">
-                    <a:spAutoFit/>
-                  </a:bodyPr>
-                  <a:lstStyle/>
-                  <a:p>
-                    <a:r>
-                      <a:rPr lang="en-US" sz="1400" dirty="0"/>
-                      <a:t>1-step TD</a:t>
-                    </a:r>
-                  </a:p>
-                </p:txBody>
-              </p:sp>
-              <p:sp>
-                <p:nvSpPr>
-                  <p:cNvPr id="9" name="TextBox 8">
-                    <a:extLst>
-                      <a:ext uri="{FF2B5EF4-FFF2-40B4-BE49-F238E27FC236}">
-                        <a16:creationId xmlns:a16="http://schemas.microsoft.com/office/drawing/2014/main" id="{183257FD-880A-AF81-88C4-FE4114583699}"/>
-                      </a:ext>
-                    </a:extLst>
-                  </p:cNvPr>
-                  <p:cNvSpPr txBox="1"/>
-                  <p:nvPr/>
-                </p:nvSpPr>
-                <p:spPr>
-                  <a:xfrm>
-                    <a:off x="7669904" y="2798160"/>
-                    <a:ext cx="649394" cy="406360"/>
-                  </a:xfrm>
-                  <a:prstGeom prst="rect">
-                    <a:avLst/>
-                  </a:prstGeom>
-                  <a:noFill/>
-                </p:spPr>
-                <p:txBody>
-                  <a:bodyPr wrap="square" rtlCol="0">
-                    <a:spAutoFit/>
-                  </a:bodyPr>
-                  <a:lstStyle/>
-                  <a:p>
-                    <a:pPr algn="ctr"/>
-                    <a:r>
-                      <a:rPr lang="en-US" sz="1400" dirty="0"/>
-                      <a:t>MC </a:t>
-                    </a:r>
-                  </a:p>
-                </p:txBody>
-              </p:sp>
-            </p:grpSp>
+                <a:prstGeom prst="ellipse">
+                  <a:avLst/>
+                </a:prstGeom>
+              </p:spPr>
+              <p:style>
+                <a:lnRef idx="2">
+                  <a:schemeClr val="accent1">
+                    <a:shade val="15000"/>
+                  </a:schemeClr>
+                </a:lnRef>
+                <a:fillRef idx="1">
+                  <a:schemeClr val="accent1"/>
+                </a:fillRef>
+                <a:effectRef idx="0">
+                  <a:schemeClr val="accent1"/>
+                </a:effectRef>
+                <a:fontRef idx="minor">
+                  <a:schemeClr val="lt1"/>
+                </a:fontRef>
+              </p:style>
+              <p:txBody>
+                <a:bodyPr rtlCol="0" anchor="ctr"/>
+                <a:lstStyle/>
+                <a:p>
+                  <a:pPr algn="ctr"/>
+                  <a:endParaRPr lang="en-US"/>
+                </a:p>
+              </p:txBody>
+            </p:sp>
             <p:sp>
               <p:nvSpPr>
-                <p:cNvPr id="11" name="TextBox 10">
+                <p:cNvPr id="5" name="Oval 4">
                   <a:extLst>
                     <a:ext uri="{FF2B5EF4-FFF2-40B4-BE49-F238E27FC236}">
-                      <a16:creationId xmlns:a16="http://schemas.microsoft.com/office/drawing/2014/main" id="{222D92CF-821B-F68A-10A5-9F501334710E}"/>
+                      <a16:creationId xmlns:a16="http://schemas.microsoft.com/office/drawing/2014/main" id="{8EAB5D2C-C971-DEFC-52FE-D0987A0552AA}"/>
+                    </a:ext>
+                  </a:extLst>
+                </p:cNvPr>
+                <p:cNvSpPr/>
+                <p:nvPr/>
+              </p:nvSpPr>
+              <p:spPr>
+                <a:xfrm>
+                  <a:off x="7907350" y="3224828"/>
+                  <a:ext cx="174504" cy="188464"/>
+                </a:xfrm>
+                <a:prstGeom prst="ellipse">
+                  <a:avLst/>
+                </a:prstGeom>
+              </p:spPr>
+              <p:style>
+                <a:lnRef idx="2">
+                  <a:schemeClr val="accent1">
+                    <a:shade val="15000"/>
+                  </a:schemeClr>
+                </a:lnRef>
+                <a:fillRef idx="1">
+                  <a:schemeClr val="accent1"/>
+                </a:fillRef>
+                <a:effectRef idx="0">
+                  <a:schemeClr val="accent1"/>
+                </a:effectRef>
+                <a:fontRef idx="minor">
+                  <a:schemeClr val="lt1"/>
+                </a:fontRef>
+              </p:style>
+              <p:txBody>
+                <a:bodyPr rtlCol="0" anchor="ctr"/>
+                <a:lstStyle/>
+                <a:p>
+                  <a:pPr algn="ctr"/>
+                  <a:endParaRPr lang="en-US"/>
+                </a:p>
+              </p:txBody>
+            </p:sp>
+            <p:cxnSp>
+              <p:nvCxnSpPr>
+                <p:cNvPr id="7" name="Straight Arrow Connector 6">
+                  <a:extLst>
+                    <a:ext uri="{FF2B5EF4-FFF2-40B4-BE49-F238E27FC236}">
+                      <a16:creationId xmlns:a16="http://schemas.microsoft.com/office/drawing/2014/main" id="{0F54933B-23C4-19A8-0DB4-85CED3BAE1BB}"/>
+                    </a:ext>
+                  </a:extLst>
+                </p:cNvPr>
+                <p:cNvCxnSpPr/>
+                <p:nvPr/>
+              </p:nvCxnSpPr>
+              <p:spPr>
+                <a:xfrm>
+                  <a:off x="3664580" y="3319060"/>
+                  <a:ext cx="4132251" cy="0"/>
+                </a:xfrm>
+                <a:prstGeom prst="straightConnector1">
+                  <a:avLst/>
+                </a:prstGeom>
+                <a:ln w="57150">
+                  <a:headEnd type="triangle" w="med" len="med"/>
+                  <a:tailEnd type="triangle" w="med" len="med"/>
+                </a:ln>
+              </p:spPr>
+              <p:style>
+                <a:lnRef idx="2">
+                  <a:schemeClr val="accent1"/>
+                </a:lnRef>
+                <a:fillRef idx="0">
+                  <a:schemeClr val="accent1"/>
+                </a:fillRef>
+                <a:effectRef idx="1">
+                  <a:schemeClr val="accent1"/>
+                </a:effectRef>
+                <a:fontRef idx="minor">
+                  <a:schemeClr val="tx1"/>
+                </a:fontRef>
+              </p:style>
+            </p:cxnSp>
+            <p:sp>
+              <p:nvSpPr>
+                <p:cNvPr id="8" name="TextBox 7">
+                  <a:extLst>
+                    <a:ext uri="{FF2B5EF4-FFF2-40B4-BE49-F238E27FC236}">
+                      <a16:creationId xmlns:a16="http://schemas.microsoft.com/office/drawing/2014/main" id="{141C27E2-D7A4-5F48-644A-B5DB89090844}"/>
                     </a:ext>
                   </a:extLst>
                 </p:cNvPr>
@@ -15636,8 +15479,8 @@
               </p:nvSpPr>
               <p:spPr>
                 <a:xfrm>
-                  <a:off x="5090858" y="3354274"/>
-                  <a:ext cx="1172665" cy="307777"/>
+                  <a:off x="2659667" y="2782204"/>
+                  <a:ext cx="1392309" cy="487631"/>
                 </a:xfrm>
                 <a:prstGeom prst="rect">
                   <a:avLst/>
@@ -15651,8 +15494,44 @@
                 <a:lstStyle/>
                 <a:p>
                   <a:r>
-                    <a:rPr lang="en-US" sz="1400" dirty="0"/>
-                    <a:t>Spectrum</a:t>
+                    <a:rPr lang="en-US" dirty="0"/>
+                    <a:t>1-step TD</a:t>
+                  </a:r>
+                </a:p>
+              </p:txBody>
+            </p:sp>
+            <p:sp>
+              <p:nvSpPr>
+                <p:cNvPr id="9" name="TextBox 8">
+                  <a:extLst>
+                    <a:ext uri="{FF2B5EF4-FFF2-40B4-BE49-F238E27FC236}">
+                      <a16:creationId xmlns:a16="http://schemas.microsoft.com/office/drawing/2014/main" id="{183257FD-880A-AF81-88C4-FE4114583699}"/>
+                    </a:ext>
+                  </a:extLst>
+                </p:cNvPr>
+                <p:cNvSpPr txBox="1"/>
+                <p:nvPr/>
+              </p:nvSpPr>
+              <p:spPr>
+                <a:xfrm>
+                  <a:off x="7669904" y="2798160"/>
+                  <a:ext cx="649394" cy="487631"/>
+                </a:xfrm>
+                <a:prstGeom prst="rect">
+                  <a:avLst/>
+                </a:prstGeom>
+                <a:noFill/>
+              </p:spPr>
+              <p:txBody>
+                <a:bodyPr wrap="square" rtlCol="0">
+                  <a:spAutoFit/>
+                </a:bodyPr>
+                <a:lstStyle/>
+                <a:p>
+                  <a:pPr algn="ctr"/>
+                  <a:r>
+                    <a:rPr lang="en-US" dirty="0"/>
+                    <a:t>MC </a:t>
                   </a:r>
                 </a:p>
               </p:txBody>
@@ -15672,8 +15551,8 @@
             </p:nvSpPr>
             <p:spPr>
               <a:xfrm>
-                <a:off x="7079259" y="6246715"/>
-                <a:ext cx="1569443" cy="307777"/>
+                <a:off x="6822540" y="6245889"/>
+                <a:ext cx="1849435" cy="369332"/>
               </a:xfrm>
               <a:prstGeom prst="rect">
                 <a:avLst/>
@@ -15688,15 +15567,15 @@
               <a:p>
                 <a:pPr algn="ctr"/>
                 <a:r>
-                  <a:rPr lang="en-US" sz="1400" dirty="0"/>
+                  <a:rPr lang="en-US" dirty="0"/>
                   <a:t>(whole episode)</a:t>
                 </a:r>
               </a:p>
             </p:txBody>
           </p:sp>
         </p:grpSp>
-        <mc:AlternateContent xmlns:mc="http://schemas.openxmlformats.org/markup-compatibility/2006" xmlns:a14="http://schemas.microsoft.com/office/drawing/2010/main">
-          <mc:Choice Requires="a14">
+        <mc:AlternateContent xmlns:mc="http://schemas.openxmlformats.org/markup-compatibility/2006">
+          <mc:Choice xmlns:a14="http://schemas.microsoft.com/office/drawing/2010/main" Requires="a14">
             <p:sp>
               <p:nvSpPr>
                 <p:cNvPr id="16" name="TextBox 15">
@@ -15712,7 +15591,7 @@
               <p:spPr>
                 <a:xfrm>
                   <a:off x="5171964" y="5534292"/>
-                  <a:ext cx="1246582" cy="307777"/>
+                  <a:ext cx="1246582" cy="369332"/>
                 </a:xfrm>
                 <a:prstGeom prst="rect">
                   <a:avLst/>
@@ -15728,7 +15607,7 @@
                   <a14:m>
                     <m:oMath xmlns:m="http://schemas.openxmlformats.org/officeDocument/2006/math">
                       <m:r>
-                        <a:rPr lang="en-US" sz="1400" i="1" dirty="0" smtClean="0">
+                        <a:rPr lang="en-US" i="1" dirty="0" smtClean="0">
                           <a:latin typeface="Cambria Math" panose="02040503050406030204" pitchFamily="18" charset="0"/>
                         </a:rPr>
                         <m:t>𝑛</m:t>
@@ -15736,14 +15615,14 @@
                     </m:oMath>
                   </a14:m>
                   <a:r>
-                    <a:rPr lang="en-US" sz="1400" dirty="0"/>
+                    <a:rPr lang="en-US" dirty="0"/>
                     <a:t>-step TD </a:t>
                   </a:r>
                 </a:p>
               </p:txBody>
             </p:sp>
           </mc:Choice>
-          <mc:Fallback xmlns="">
+          <mc:Fallback>
             <p:sp>
               <p:nvSpPr>
                 <p:cNvPr id="16" name="TextBox 15">
@@ -15761,7 +15640,7 @@
               <p:spPr>
                 <a:xfrm>
                   <a:off x="5171964" y="5534292"/>
-                  <a:ext cx="1246582" cy="307777"/>
+                  <a:ext cx="1246582" cy="369332"/>
                 </a:xfrm>
                 <a:prstGeom prst="rect">
                   <a:avLst/>
@@ -15769,7 +15648,7 @@
                 <a:blipFill>
                   <a:blip r:embed="rId9"/>
                   <a:stretch>
-                    <a:fillRect t="-4000" b="-20000"/>
+                    <a:fillRect t="-6557" b="-26230"/>
                   </a:stretch>
                 </a:blipFill>
               </p:spPr>
@@ -15789,237 +15668,6 @@
           </mc:Fallback>
         </mc:AlternateContent>
       </p:grpSp>
-      <mc:AlternateContent xmlns:mc="http://schemas.openxmlformats.org/markup-compatibility/2006">
-        <mc:Choice xmlns:a14="http://schemas.microsoft.com/office/drawing/2010/main" Requires="a14">
-          <p:sp>
-            <p:nvSpPr>
-              <p:cNvPr id="18" name="TextBox 17">
-                <a:extLst>
-                  <a:ext uri="{FF2B5EF4-FFF2-40B4-BE49-F238E27FC236}">
-                    <a16:creationId xmlns:a16="http://schemas.microsoft.com/office/drawing/2014/main" id="{2FE06CAD-D1C8-994B-C32F-E08E4BB15968}"/>
-                  </a:ext>
-                </a:extLst>
-              </p:cNvPr>
-              <p:cNvSpPr txBox="1"/>
-              <p:nvPr/>
-            </p:nvSpPr>
-            <p:spPr>
-              <a:xfrm>
-                <a:off x="7516908" y="3782654"/>
-                <a:ext cx="2849647" cy="369332"/>
-              </a:xfrm>
-              <a:prstGeom prst="rect">
-                <a:avLst/>
-              </a:prstGeom>
-              <a:noFill/>
-            </p:spPr>
-            <p:txBody>
-              <a:bodyPr wrap="square">
-                <a:spAutoFit/>
-              </a:bodyPr>
-              <a:lstStyle/>
-              <a:p>
-                <a:pPr/>
-                <a14:m>
-                  <m:oMathPara xmlns:m="http://schemas.openxmlformats.org/officeDocument/2006/math">
-                    <m:oMathParaPr>
-                      <m:jc m:val="centerGroup"/>
-                    </m:oMathParaPr>
-                    <m:oMath xmlns:m="http://schemas.openxmlformats.org/officeDocument/2006/math">
-                      <m:sSub>
-                        <m:sSubPr>
-                          <m:ctrlPr>
-                            <a:rPr lang="en-US" sz="1800" b="0" i="1" smtClean="0">
-                              <a:latin typeface="Cambria Math" panose="02040503050406030204" pitchFamily="18" charset="0"/>
-                            </a:rPr>
-                          </m:ctrlPr>
-                        </m:sSubPr>
-                        <m:e>
-                          <m:r>
-                            <a:rPr lang="en-US" sz="1800" b="0" i="1" smtClean="0">
-                              <a:latin typeface="Cambria Math" panose="02040503050406030204" pitchFamily="18" charset="0"/>
-                            </a:rPr>
-                            <m:t>𝐺</m:t>
-                          </m:r>
-                        </m:e>
-                        <m:sub>
-                          <m:r>
-                            <a:rPr lang="en-US" sz="1800" b="0" i="1" smtClean="0">
-                              <a:latin typeface="Cambria Math" panose="02040503050406030204" pitchFamily="18" charset="0"/>
-                            </a:rPr>
-                            <m:t>𝑡</m:t>
-                          </m:r>
-                          <m:r>
-                            <a:rPr lang="en-US" sz="1800" b="0" i="1" smtClean="0">
-                              <a:latin typeface="Cambria Math" panose="02040503050406030204" pitchFamily="18" charset="0"/>
-                            </a:rPr>
-                            <m:t>:</m:t>
-                          </m:r>
-                          <m:r>
-                            <a:rPr lang="en-US" sz="1800" b="0" i="1" smtClean="0">
-                              <a:latin typeface="Cambria Math" panose="02040503050406030204" pitchFamily="18" charset="0"/>
-                            </a:rPr>
-                            <m:t>𝑡</m:t>
-                          </m:r>
-                          <m:r>
-                            <a:rPr lang="en-US" sz="1800" b="0" i="1" smtClean="0">
-                              <a:latin typeface="Cambria Math" panose="02040503050406030204" pitchFamily="18" charset="0"/>
-                            </a:rPr>
-                            <m:t>+1</m:t>
-                          </m:r>
-                        </m:sub>
-                      </m:sSub>
-                      <m:r>
-                        <a:rPr lang="en-US" sz="1800" b="0" i="1" smtClean="0">
-                          <a:latin typeface="Cambria Math" panose="02040503050406030204" pitchFamily="18" charset="0"/>
-                        </a:rPr>
-                        <m:t>=</m:t>
-                      </m:r>
-                      <m:sSub>
-                        <m:sSubPr>
-                          <m:ctrlPr>
-                            <a:rPr lang="en-US" sz="1800" b="0" i="1" smtClean="0">
-                              <a:latin typeface="Cambria Math" panose="02040503050406030204" pitchFamily="18" charset="0"/>
-                            </a:rPr>
-                          </m:ctrlPr>
-                        </m:sSubPr>
-                        <m:e>
-                          <m:r>
-                            <a:rPr lang="en-US" sz="1800" b="0" i="1" smtClean="0">
-                              <a:latin typeface="Cambria Math" panose="02040503050406030204" pitchFamily="18" charset="0"/>
-                            </a:rPr>
-                            <m:t>𝑅</m:t>
-                          </m:r>
-                        </m:e>
-                        <m:sub>
-                          <m:r>
-                            <a:rPr lang="en-US" sz="1800" b="0" i="1" smtClean="0">
-                              <a:latin typeface="Cambria Math" panose="02040503050406030204" pitchFamily="18" charset="0"/>
-                            </a:rPr>
-                            <m:t>𝑡</m:t>
-                          </m:r>
-                          <m:r>
-                            <a:rPr lang="en-US" sz="1800" b="0" i="1" smtClean="0">
-                              <a:latin typeface="Cambria Math" panose="02040503050406030204" pitchFamily="18" charset="0"/>
-                            </a:rPr>
-                            <m:t>+1</m:t>
-                          </m:r>
-                        </m:sub>
-                      </m:sSub>
-                      <m:r>
-                        <a:rPr lang="en-US" sz="1800" b="0" i="1" smtClean="0">
-                          <a:latin typeface="Cambria Math" panose="02040503050406030204" pitchFamily="18" charset="0"/>
-                        </a:rPr>
-                        <m:t>+</m:t>
-                      </m:r>
-                      <m:r>
-                        <a:rPr lang="en-US" sz="1800" b="0" i="1" smtClean="0">
-                          <a:latin typeface="Cambria Math" panose="02040503050406030204" pitchFamily="18" charset="0"/>
-                        </a:rPr>
-                        <m:t>𝛾</m:t>
-                      </m:r>
-                      <m:r>
-                        <a:rPr lang="en-US" sz="1800" b="0" i="1" smtClean="0">
-                          <a:latin typeface="Cambria Math" panose="02040503050406030204" pitchFamily="18" charset="0"/>
-                        </a:rPr>
-                        <m:t>𝑉</m:t>
-                      </m:r>
-                      <m:r>
-                        <a:rPr lang="en-US" sz="1800" b="0" i="1" smtClean="0">
-                          <a:latin typeface="Cambria Math" panose="02040503050406030204" pitchFamily="18" charset="0"/>
-                        </a:rPr>
-                        <m:t>(</m:t>
-                      </m:r>
-                      <m:sSub>
-                        <m:sSubPr>
-                          <m:ctrlPr>
-                            <a:rPr lang="en-US" sz="1800" b="0" i="1" smtClean="0">
-                              <a:latin typeface="Cambria Math" panose="02040503050406030204" pitchFamily="18" charset="0"/>
-                            </a:rPr>
-                          </m:ctrlPr>
-                        </m:sSubPr>
-                        <m:e>
-                          <m:r>
-                            <a:rPr lang="en-US" sz="1800" b="0" i="1" smtClean="0">
-                              <a:latin typeface="Cambria Math" panose="02040503050406030204" pitchFamily="18" charset="0"/>
-                            </a:rPr>
-                            <m:t>𝑆</m:t>
-                          </m:r>
-                        </m:e>
-                        <m:sub>
-                          <m:r>
-                            <a:rPr lang="en-US" sz="1800" b="0" i="1" smtClean="0">
-                              <a:latin typeface="Cambria Math" panose="02040503050406030204" pitchFamily="18" charset="0"/>
-                            </a:rPr>
-                            <m:t>𝑡</m:t>
-                          </m:r>
-                          <m:r>
-                            <a:rPr lang="en-US" sz="1800" b="0" i="1" smtClean="0">
-                              <a:latin typeface="Cambria Math" panose="02040503050406030204" pitchFamily="18" charset="0"/>
-                            </a:rPr>
-                            <m:t>+1</m:t>
-                          </m:r>
-                        </m:sub>
-                      </m:sSub>
-                      <m:r>
-                        <a:rPr lang="en-US" sz="1800" b="0" i="1" smtClean="0">
-                          <a:latin typeface="Cambria Math" panose="02040503050406030204" pitchFamily="18" charset="0"/>
-                        </a:rPr>
-                        <m:t>)</m:t>
-                      </m:r>
-                    </m:oMath>
-                  </m:oMathPara>
-                </a14:m>
-                <a:endParaRPr lang="en-US" sz="1800" dirty="0"/>
-              </a:p>
-            </p:txBody>
-          </p:sp>
-        </mc:Choice>
-        <mc:Fallback>
-          <p:sp>
-            <p:nvSpPr>
-              <p:cNvPr id="18" name="TextBox 17">
-                <a:extLst>
-                  <a:ext uri="{FF2B5EF4-FFF2-40B4-BE49-F238E27FC236}">
-                    <a16:creationId xmlns:a16="http://schemas.microsoft.com/office/drawing/2014/main" id="{2FE06CAD-D1C8-994B-C32F-E08E4BB15968}"/>
-                  </a:ext>
-                </a:extLst>
-              </p:cNvPr>
-              <p:cNvSpPr txBox="1">
-                <a:spLocks noRot="1" noChangeAspect="1" noMove="1" noResize="1" noEditPoints="1" noAdjustHandles="1" noChangeArrowheads="1" noChangeShapeType="1" noTextEdit="1"/>
-              </p:cNvSpPr>
-              <p:nvPr/>
-            </p:nvSpPr>
-            <p:spPr>
-              <a:xfrm>
-                <a:off x="7516908" y="3782654"/>
-                <a:ext cx="2849647" cy="369332"/>
-              </a:xfrm>
-              <a:prstGeom prst="rect">
-                <a:avLst/>
-              </a:prstGeom>
-              <a:blipFill>
-                <a:blip r:embed="rId10"/>
-                <a:stretch>
-                  <a:fillRect b="-13333"/>
-                </a:stretch>
-              </a:blipFill>
-            </p:spPr>
-            <p:txBody>
-              <a:bodyPr/>
-              <a:lstStyle/>
-              <a:p>
-                <a:r>
-                  <a:rPr lang="en-US">
-                    <a:noFill/>
-                  </a:rPr>
-                  <a:t> </a:t>
-                </a:r>
-              </a:p>
-            </p:txBody>
-          </p:sp>
-        </mc:Fallback>
-      </mc:AlternateContent>
     </p:spTree>
     <p:extLst>
       <p:ext uri="{BB962C8B-B14F-4D97-AF65-F5344CB8AC3E}">
@@ -16042,6 +15690,9 @@
                     <p:cTn id="3" fill="hold">
                       <p:stCondLst>
                         <p:cond delay="indefinite"/>
+                        <p:cond evt="onBegin" delay="0">
+                          <p:tn val="2"/>
+                        </p:cond>
                       </p:stCondLst>
                       <p:childTnLst>
                         <p:par>
@@ -16051,7 +15702,7 @@
                             </p:stCondLst>
                             <p:childTnLst>
                               <p:par>
-                                <p:cTn id="5" presetID="1" presetClass="entr" presetSubtype="0" fill="hold" nodeType="clickEffect">
+                                <p:cTn id="5" presetID="1" presetClass="entr" presetSubtype="0" fill="hold" nodeType="withEffect">
                                   <p:stCondLst>
                                     <p:cond delay="0"/>
                                   </p:stCondLst>
@@ -16097,7 +15748,7 @@
                                         <p:tgtEl>
                                           <p:spTgt spid="3">
                                             <p:txEl>
-                                              <p:pRg st="1" end="1"/>
+                                              <p:pRg st="2" end="2"/>
                                             </p:txEl>
                                           </p:spTgt>
                                         </p:tgtEl>
@@ -16175,96 +15826,7 @@
                                           </p:stCondLst>
                                         </p:cTn>
                                         <p:tgtEl>
-                                          <p:spTgt spid="3">
-                                            <p:txEl>
-                                              <p:pRg st="4" end="4"/>
-                                            </p:txEl>
-                                          </p:spTgt>
-                                        </p:tgtEl>
-                                        <p:attrNameLst>
-                                          <p:attrName>style.visibility</p:attrName>
-                                        </p:attrNameLst>
-                                      </p:cBhvr>
-                                      <p:to>
-                                        <p:strVal val="visible"/>
-                                      </p:to>
-                                    </p:set>
-                                  </p:childTnLst>
-                                </p:cTn>
-                              </p:par>
-                              <p:par>
-                                <p:cTn id="15" presetID="1" presetClass="entr" presetSubtype="0" fill="hold" nodeType="withEffect">
-                                  <p:stCondLst>
-                                    <p:cond delay="0"/>
-                                  </p:stCondLst>
-                                  <p:childTnLst>
-                                    <p:set>
-                                      <p:cBhvr>
-                                        <p:cTn id="16" dur="1" fill="hold">
-                                          <p:stCondLst>
-                                            <p:cond delay="0"/>
-                                          </p:stCondLst>
-                                        </p:cTn>
-                                        <p:tgtEl>
-                                          <p:spTgt spid="3">
-                                            <p:txEl>
-                                              <p:pRg st="5" end="5"/>
-                                            </p:txEl>
-                                          </p:spTgt>
-                                        </p:tgtEl>
-                                        <p:attrNameLst>
-                                          <p:attrName>style.visibility</p:attrName>
-                                        </p:attrNameLst>
-                                      </p:cBhvr>
-                                      <p:to>
-                                        <p:strVal val="visible"/>
-                                      </p:to>
-                                    </p:set>
-                                  </p:childTnLst>
-                                </p:cTn>
-                              </p:par>
-                              <p:par>
-                                <p:cTn id="17" presetID="1" presetClass="entr" presetSubtype="0" fill="hold" nodeType="withEffect">
-                                  <p:stCondLst>
-                                    <p:cond delay="0"/>
-                                  </p:stCondLst>
-                                  <p:childTnLst>
-                                    <p:set>
-                                      <p:cBhvr>
-                                        <p:cTn id="18" dur="1" fill="hold">
-                                          <p:stCondLst>
-                                            <p:cond delay="0"/>
-                                          </p:stCondLst>
-                                        </p:cTn>
-                                        <p:tgtEl>
                                           <p:spTgt spid="6"/>
-                                        </p:tgtEl>
-                                        <p:attrNameLst>
-                                          <p:attrName>style.visibility</p:attrName>
-                                        </p:attrNameLst>
-                                      </p:cBhvr>
-                                      <p:to>
-                                        <p:strVal val="visible"/>
-                                      </p:to>
-                                    </p:set>
-                                  </p:childTnLst>
-                                </p:cTn>
-                              </p:par>
-                              <p:par>
-                                <p:cTn id="19" presetID="1" presetClass="entr" presetSubtype="0" fill="hold" grpId="0" nodeType="withEffect">
-                                  <p:stCondLst>
-                                    <p:cond delay="0"/>
-                                  </p:stCondLst>
-                                  <p:childTnLst>
-                                    <p:set>
-                                      <p:cBhvr>
-                                        <p:cTn id="20" dur="1" fill="hold">
-                                          <p:stCondLst>
-                                            <p:cond delay="0"/>
-                                          </p:stCondLst>
-                                        </p:cTn>
-                                        <p:tgtEl>
-                                          <p:spTgt spid="18"/>
                                         </p:tgtEl>
                                         <p:attrNameLst>
                                           <p:attrName>style.visibility</p:attrName>
@@ -16284,26 +15846,26 @@
                     </p:cTn>
                   </p:par>
                   <p:par>
-                    <p:cTn id="21" fill="hold">
+                    <p:cTn id="15" fill="hold">
                       <p:stCondLst>
                         <p:cond delay="indefinite"/>
                       </p:stCondLst>
                       <p:childTnLst>
                         <p:par>
-                          <p:cTn id="22" fill="hold">
+                          <p:cTn id="16" fill="hold">
                             <p:stCondLst>
                               <p:cond delay="0"/>
                             </p:stCondLst>
                             <p:childTnLst>
                               <p:par>
-                                <p:cTn id="23" presetID="1" presetClass="entr" presetSubtype="0" fill="hold" nodeType="clickEffect">
+                                <p:cTn id="17" presetID="1" presetClass="entr" presetSubtype="0" fill="hold" nodeType="clickEffect">
                                   <p:stCondLst>
                                     <p:cond delay="0"/>
                                   </p:stCondLst>
                                   <p:childTnLst>
                                     <p:set>
                                       <p:cBhvr>
-                                        <p:cTn id="24" dur="1" fill="hold">
+                                        <p:cTn id="18" dur="1" fill="hold">
                                           <p:stCondLst>
                                             <p:cond delay="0"/>
                                           </p:stCondLst>
@@ -16327,14 +15889,14 @@
                                 </p:cTn>
                               </p:par>
                               <p:par>
-                                <p:cTn id="25" presetID="1" presetClass="entr" presetSubtype="0" fill="hold" nodeType="withEffect">
+                                <p:cTn id="19" presetID="1" presetClass="entr" presetSubtype="0" fill="hold" nodeType="withEffect">
                                   <p:stCondLst>
                                     <p:cond delay="0"/>
                                   </p:stCondLst>
                                   <p:childTnLst>
                                     <p:set>
                                       <p:cBhvr>
-                                        <p:cTn id="26" dur="1" fill="hold">
+                                        <p:cTn id="20" dur="1" fill="hold">
                                           <p:stCondLst>
                                             <p:cond delay="0"/>
                                           </p:stCondLst>
@@ -16358,14 +15920,14 @@
                                 </p:cTn>
                               </p:par>
                               <p:par>
-                                <p:cTn id="27" presetID="1" presetClass="entr" presetSubtype="0" fill="hold" nodeType="withEffect">
+                                <p:cTn id="21" presetID="1" presetClass="entr" presetSubtype="0" fill="hold" nodeType="withEffect">
                                   <p:stCondLst>
                                     <p:cond delay="0"/>
                                   </p:stCondLst>
                                   <p:childTnLst>
                                     <p:set>
                                       <p:cBhvr>
-                                        <p:cTn id="28" dur="1" fill="hold">
+                                        <p:cTn id="22" dur="1" fill="hold">
                                           <p:stCondLst>
                                             <p:cond delay="0"/>
                                           </p:stCondLst>
@@ -16389,14 +15951,14 @@
                                 </p:cTn>
                               </p:par>
                               <p:par>
-                                <p:cTn id="29" presetID="1" presetClass="entr" presetSubtype="0" fill="hold" nodeType="withEffect">
+                                <p:cTn id="23" presetID="1" presetClass="entr" presetSubtype="0" fill="hold" nodeType="withEffect">
                                   <p:stCondLst>
                                     <p:cond delay="0"/>
                                   </p:stCondLst>
                                   <p:childTnLst>
                                     <p:set>
                                       <p:cBhvr>
-                                        <p:cTn id="30" dur="1" fill="hold">
+                                        <p:cTn id="24" dur="1" fill="hold">
                                           <p:stCondLst>
                                             <p:cond delay="0"/>
                                           </p:stCondLst>
@@ -16442,9 +16004,6 @@
         </p:cTn>
       </p:par>
     </p:tnLst>
-    <p:bldLst>
-      <p:bldP spid="18" grpId="0"/>
-    </p:bldLst>
   </p:timing>
 </p:sld>
 </file>
@@ -19321,8 +18880,8 @@
           </p:sp>
         </mc:Fallback>
       </mc:AlternateContent>
-      <mc:AlternateContent xmlns:mc="http://schemas.openxmlformats.org/markup-compatibility/2006">
-        <mc:Choice xmlns:a14="http://schemas.microsoft.com/office/drawing/2010/main" Requires="a14">
+      <mc:AlternateContent xmlns:mc="http://schemas.openxmlformats.org/markup-compatibility/2006" xmlns:a14="http://schemas.microsoft.com/office/drawing/2010/main">
+        <mc:Choice Requires="a14">
           <p:sp>
             <p:nvSpPr>
               <p:cNvPr id="26" name="TextBox 25">
@@ -19474,7 +19033,7 @@
             </p:txBody>
           </p:sp>
         </mc:Choice>
-        <mc:Fallback>
+        <mc:Fallback xmlns="">
           <p:sp>
             <p:nvSpPr>
               <p:cNvPr id="26" name="TextBox 25">
@@ -20506,8 +20065,8 @@
           </p:sp>
         </mc:Fallback>
       </mc:AlternateContent>
-      <mc:AlternateContent xmlns:mc="http://schemas.openxmlformats.org/markup-compatibility/2006">
-        <mc:Choice xmlns:a14="http://schemas.microsoft.com/office/drawing/2010/main" Requires="a14">
+      <mc:AlternateContent xmlns:mc="http://schemas.openxmlformats.org/markup-compatibility/2006" xmlns:a14="http://schemas.microsoft.com/office/drawing/2010/main">
+        <mc:Choice Requires="a14">
           <p:sp>
             <p:nvSpPr>
               <p:cNvPr id="14" name="Speech Bubble: Rectangle with Corners Rounded 13">
@@ -20576,7 +20135,7 @@
             </p:txBody>
           </p:sp>
         </mc:Choice>
-        <mc:Fallback>
+        <mc:Fallback xmlns="">
           <p:sp>
             <p:nvSpPr>
               <p:cNvPr id="14" name="Speech Bubble: Rectangle with Corners Rounded 13">
@@ -21248,8 +20807,8 @@
           </a:p>
         </p:txBody>
       </p:sp>
-      <mc:AlternateContent xmlns:mc="http://schemas.openxmlformats.org/markup-compatibility/2006">
-        <mc:Choice xmlns:a14="http://schemas.microsoft.com/office/drawing/2010/main" Requires="a14">
+      <mc:AlternateContent xmlns:mc="http://schemas.openxmlformats.org/markup-compatibility/2006" xmlns:a14="http://schemas.microsoft.com/office/drawing/2010/main">
+        <mc:Choice Requires="a14">
           <p:sp>
             <p:nvSpPr>
               <p:cNvPr id="3" name="Content Placeholder 2">
@@ -21693,7 +21252,7 @@
             </p:txBody>
           </p:sp>
         </mc:Choice>
-        <mc:Fallback>
+        <mc:Fallback xmlns="">
           <p:sp>
             <p:nvSpPr>
               <p:cNvPr id="3" name="Content Placeholder 2">
@@ -21737,8 +21296,8 @@
           </p:sp>
         </mc:Fallback>
       </mc:AlternateContent>
-      <mc:AlternateContent xmlns:mc="http://schemas.openxmlformats.org/markup-compatibility/2006">
-        <mc:Choice xmlns:a14="http://schemas.microsoft.com/office/drawing/2010/main" Requires="a14">
+      <mc:AlternateContent xmlns:mc="http://schemas.openxmlformats.org/markup-compatibility/2006" xmlns:a14="http://schemas.microsoft.com/office/drawing/2010/main">
+        <mc:Choice Requires="a14">
           <p:sp>
             <p:nvSpPr>
               <p:cNvPr id="5" name="TextBox 4">
@@ -22313,7 +21872,7 @@
             </p:txBody>
           </p:sp>
         </mc:Choice>
-        <mc:Fallback>
+        <mc:Fallback xmlns="">
           <p:sp>
             <p:nvSpPr>
               <p:cNvPr id="5" name="TextBox 4">

--- a/slides/Lecture_Chapter07.pptx
+++ b/slides/Lecture_Chapter07.pptx
@@ -316,7 +316,7 @@
           <a:p>
             <a:fld id="{3E22BF2E-04DA-469E-97C5-BB68A0368813}" type="datetimeFigureOut">
               <a:rPr lang="en-US" smtClean="0"/>
-              <a:t>2/23/2026</a:t>
+              <a:t>2/25/2026</a:t>
             </a:fld>
             <a:endParaRPr lang="en-US"/>
           </a:p>
@@ -514,7 +514,7 @@
           <a:p>
             <a:fld id="{3E22BF2E-04DA-469E-97C5-BB68A0368813}" type="datetimeFigureOut">
               <a:rPr lang="en-US" smtClean="0"/>
-              <a:t>2/23/2026</a:t>
+              <a:t>2/25/2026</a:t>
             </a:fld>
             <a:endParaRPr lang="en-US"/>
           </a:p>
@@ -722,7 +722,7 @@
           <a:p>
             <a:fld id="{3E22BF2E-04DA-469E-97C5-BB68A0368813}" type="datetimeFigureOut">
               <a:rPr lang="en-US" smtClean="0"/>
-              <a:t>2/23/2026</a:t>
+              <a:t>2/25/2026</a:t>
             </a:fld>
             <a:endParaRPr lang="en-US"/>
           </a:p>
@@ -930,7 +930,7 @@
           <a:p>
             <a:fld id="{3E22BF2E-04DA-469E-97C5-BB68A0368813}" type="datetimeFigureOut">
               <a:rPr lang="en-US" smtClean="0"/>
-              <a:t>2/23/2026</a:t>
+              <a:t>2/25/2026</a:t>
             </a:fld>
             <a:endParaRPr lang="en-US"/>
           </a:p>
@@ -1205,7 +1205,7 @@
           <a:p>
             <a:fld id="{3E22BF2E-04DA-469E-97C5-BB68A0368813}" type="datetimeFigureOut">
               <a:rPr lang="en-US" smtClean="0"/>
-              <a:t>2/23/2026</a:t>
+              <a:t>2/25/2026</a:t>
             </a:fld>
             <a:endParaRPr lang="en-US"/>
           </a:p>
@@ -1470,7 +1470,7 @@
           <a:p>
             <a:fld id="{3E22BF2E-04DA-469E-97C5-BB68A0368813}" type="datetimeFigureOut">
               <a:rPr lang="en-US" smtClean="0"/>
-              <a:t>2/23/2026</a:t>
+              <a:t>2/25/2026</a:t>
             </a:fld>
             <a:endParaRPr lang="en-US"/>
           </a:p>
@@ -1882,7 +1882,7 @@
           <a:p>
             <a:fld id="{3E22BF2E-04DA-469E-97C5-BB68A0368813}" type="datetimeFigureOut">
               <a:rPr lang="en-US" smtClean="0"/>
-              <a:t>2/23/2026</a:t>
+              <a:t>2/25/2026</a:t>
             </a:fld>
             <a:endParaRPr lang="en-US"/>
           </a:p>
@@ -2023,7 +2023,7 @@
           <a:p>
             <a:fld id="{3E22BF2E-04DA-469E-97C5-BB68A0368813}" type="datetimeFigureOut">
               <a:rPr lang="en-US" smtClean="0"/>
-              <a:t>2/23/2026</a:t>
+              <a:t>2/25/2026</a:t>
             </a:fld>
             <a:endParaRPr lang="en-US"/>
           </a:p>
@@ -2136,7 +2136,7 @@
           <a:p>
             <a:fld id="{3E22BF2E-04DA-469E-97C5-BB68A0368813}" type="datetimeFigureOut">
               <a:rPr lang="en-US" smtClean="0"/>
-              <a:t>2/23/2026</a:t>
+              <a:t>2/25/2026</a:t>
             </a:fld>
             <a:endParaRPr lang="en-US"/>
           </a:p>
@@ -2447,7 +2447,7 @@
           <a:p>
             <a:fld id="{3E22BF2E-04DA-469E-97C5-BB68A0368813}" type="datetimeFigureOut">
               <a:rPr lang="en-US" smtClean="0"/>
-              <a:t>2/23/2026</a:t>
+              <a:t>2/25/2026</a:t>
             </a:fld>
             <a:endParaRPr lang="en-US"/>
           </a:p>
@@ -2735,7 +2735,7 @@
           <a:p>
             <a:fld id="{3E22BF2E-04DA-469E-97C5-BB68A0368813}" type="datetimeFigureOut">
               <a:rPr lang="en-US" smtClean="0"/>
-              <a:t>2/23/2026</a:t>
+              <a:t>2/25/2026</a:t>
             </a:fld>
             <a:endParaRPr lang="en-US"/>
           </a:p>
@@ -2976,7 +2976,7 @@
           <a:p>
             <a:fld id="{3E22BF2E-04DA-469E-97C5-BB68A0368813}" type="datetimeFigureOut">
               <a:rPr lang="en-US" smtClean="0"/>
-              <a:t>2/23/2026</a:t>
+              <a:t>2/25/2026</a:t>
             </a:fld>
             <a:endParaRPr lang="en-US"/>
           </a:p>
@@ -7387,8 +7387,8 @@
           </p:sp>
         </mc:Fallback>
       </mc:AlternateContent>
-      <mc:AlternateContent xmlns:mc="http://schemas.openxmlformats.org/markup-compatibility/2006" xmlns:a14="http://schemas.microsoft.com/office/drawing/2010/main">
-        <mc:Choice Requires="a14">
+      <mc:AlternateContent xmlns:mc="http://schemas.openxmlformats.org/markup-compatibility/2006">
+        <mc:Choice xmlns:a14="http://schemas.microsoft.com/office/drawing/2010/main" Requires="a14">
           <p:sp>
             <p:nvSpPr>
               <p:cNvPr id="3" name="Content Placeholder 2">
@@ -7408,7 +7408,7 @@
             <p:spPr/>
             <p:txBody>
               <a:bodyPr>
-                <a:normAutofit fontScale="62500" lnSpcReduction="20000"/>
+                <a:normAutofit fontScale="70000" lnSpcReduction="20000"/>
               </a:bodyPr>
               <a:lstStyle/>
               <a:p>
@@ -7448,9 +7448,6 @@
                   <a:rPr lang="en-US" dirty="0"/>
                   <a:t>.</a:t>
                 </a:r>
-              </a:p>
-              <a:p>
-                <a:endParaRPr lang="en-US" dirty="0"/>
               </a:p>
               <a:p>
                 <a:r>
@@ -8140,29 +8137,11 @@
               <a:p>
                 <a:r>
                   <a:rPr lang="en-US" b="1" dirty="0"/>
-                  <a:t>Notes</a:t>
+                  <a:t>Sample efficiency issue</a:t>
                 </a:r>
                 <a:r>
                   <a:rPr lang="en-US" dirty="0"/>
-                  <a:t>: </a:t>
-                </a:r>
-              </a:p>
-              <a:p>
-                <a:pPr lvl="1"/>
-                <a:r>
-                  <a:rPr lang="en-US" dirty="0"/>
-                  <a:t>Since the soft behavioral policy provides exploration, we can learn the optimal deterministic policy!</a:t>
-                </a:r>
-              </a:p>
-              <a:p>
-                <a:pPr lvl="1"/>
-                <a:r>
-                  <a:rPr lang="en-US" b="1" dirty="0"/>
-                  <a:t>Sample efficiency</a:t>
-                </a:r>
-                <a:r>
-                  <a:rPr lang="en-US" dirty="0"/>
-                  <a:t>: Can only learn from data where the sampled actions for the </a:t>
+                  <a:t>: Can only learn (i.e., </a:t>
                 </a:r>
                 <a14:m>
                   <m:oMath xmlns:m="http://schemas.openxmlformats.org/officeDocument/2006/math">
@@ -8170,13 +8149,19 @@
                       <a:rPr lang="en-US" b="0" i="1" smtClean="0">
                         <a:latin typeface="Cambria Math" panose="02040503050406030204" pitchFamily="18" charset="0"/>
                       </a:rPr>
-                      <m:t>𝑛</m:t>
+                      <m:t>𝜌</m:t>
+                    </m:r>
+                    <m:r>
+                      <a:rPr lang="en-US" b="0" i="1" smtClean="0">
+                        <a:latin typeface="Cambria Math" panose="02040503050406030204" pitchFamily="18" charset="0"/>
+                      </a:rPr>
+                      <m:t>&gt;0</m:t>
                     </m:r>
                   </m:oMath>
                 </a14:m>
                 <a:r>
                   <a:rPr lang="en-US" dirty="0"/>
-                  <a:t>-steps are compatible with </a:t>
+                  <a:t>) from data where the sampled actions for the </a:t>
                 </a:r>
                 <a14:m>
                   <m:oMath xmlns:m="http://schemas.openxmlformats.org/officeDocument/2006/math">
@@ -8184,13 +8169,34 @@
                       <a:rPr lang="en-US" b="0" i="1" smtClean="0">
                         <a:latin typeface="Cambria Math" panose="02040503050406030204" pitchFamily="18" charset="0"/>
                       </a:rPr>
-                      <m:t>𝜋</m:t>
+                      <m:t>𝑛</m:t>
                     </m:r>
                   </m:oMath>
                 </a14:m>
                 <a:r>
                   <a:rPr lang="en-US" dirty="0"/>
-                  <a:t>. Updating the behaviot policy </a:t>
+                  <a:t>-steps are compatible with </a:t>
+                </a:r>
+                <a14:m>
+                  <m:oMath xmlns:m="http://schemas.openxmlformats.org/officeDocument/2006/math">
+                    <m:r>
+                      <a:rPr lang="en-US" b="0" i="1" smtClean="0">
+                        <a:latin typeface="Cambria Math" panose="02040503050406030204" pitchFamily="18" charset="0"/>
+                      </a:rPr>
+                      <m:t>𝜋</m:t>
+                    </m:r>
+                  </m:oMath>
+                </a14:m>
+                <a:r>
+                  <a:rPr lang="en-US" dirty="0"/>
+                  <a:t>. </a:t>
+                </a:r>
+                <a:br>
+                  <a:rPr lang="en-US" dirty="0"/>
+                </a:br>
+                <a:r>
+                  <a:rPr lang="en-US" dirty="0"/>
+                  <a:t>Updating the behavior policy </a:t>
                 </a:r>
                 <a14:m>
                   <m:oMath xmlns:m="http://schemas.openxmlformats.org/officeDocument/2006/math">
@@ -8284,7 +8290,7 @@
             </p:txBody>
           </p:sp>
         </mc:Choice>
-        <mc:Fallback xmlns="">
+        <mc:Fallback>
           <p:sp>
             <p:nvSpPr>
               <p:cNvPr id="3" name="Content Placeholder 2">
@@ -8305,7 +8311,7 @@
               <a:blipFill>
                 <a:blip r:embed="rId3"/>
                 <a:stretch>
-                  <a:fillRect l="-406" t="-1913" b="-510"/>
+                  <a:fillRect l="-522" t="-2168"/>
                 </a:stretch>
               </a:blipFill>
             </p:spPr>
@@ -8324,8 +8330,8 @@
           </p:sp>
         </mc:Fallback>
       </mc:AlternateContent>
-      <mc:AlternateContent xmlns:mc="http://schemas.openxmlformats.org/markup-compatibility/2006" xmlns:a14="http://schemas.microsoft.com/office/drawing/2010/main">
-        <mc:Choice Requires="a14">
+      <mc:AlternateContent xmlns:mc="http://schemas.openxmlformats.org/markup-compatibility/2006">
+        <mc:Choice xmlns:a14="http://schemas.microsoft.com/office/drawing/2010/main" Requires="a14">
           <p:sp>
             <p:nvSpPr>
               <p:cNvPr id="4" name="Speech Bubble: Rectangle with Corners Rounded 3">
@@ -8340,7 +8346,7 @@
             </p:nvSpPr>
             <p:spPr>
               <a:xfrm>
-                <a:off x="8690693" y="3478420"/>
+                <a:off x="8669721" y="3130277"/>
                 <a:ext cx="2118220" cy="1044429"/>
               </a:xfrm>
               <a:prstGeom prst="wedgeRoundRectCallout">
@@ -8394,7 +8400,7 @@
             </p:txBody>
           </p:sp>
         </mc:Choice>
-        <mc:Fallback xmlns="">
+        <mc:Fallback>
           <p:sp>
             <p:nvSpPr>
               <p:cNvPr id="4" name="Speech Bubble: Rectangle with Corners Rounded 3">
@@ -8411,7 +8417,7 @@
             </p:nvSpPr>
             <p:spPr>
               <a:xfrm>
-                <a:off x="8690693" y="3478420"/>
+                <a:off x="8669721" y="3130277"/>
                 <a:ext cx="2118220" cy="1044429"/>
               </a:xfrm>
               <a:prstGeom prst="wedgeRoundRectCallout">
@@ -8424,7 +8430,7 @@
               <a:blipFill>
                 <a:blip r:embed="rId4"/>
                 <a:stretch>
-                  <a:fillRect b="-2299"/>
+                  <a:fillRect b="-2286"/>
                 </a:stretch>
               </a:blipFill>
             </p:spPr>
@@ -8689,9 +8695,9 @@
         <p:grpSpPr>
           <a:xfrm>
             <a:off x="5659709" y="1062757"/>
-            <a:ext cx="6430497" cy="5673149"/>
+            <a:ext cx="6430496" cy="5089359"/>
             <a:chOff x="5659709" y="1062757"/>
-            <a:chExt cx="6430497" cy="5673149"/>
+            <a:chExt cx="6430496" cy="5089359"/>
           </a:xfrm>
         </p:grpSpPr>
         <p:grpSp>
@@ -8709,9 +8715,9 @@
           <p:grpSpPr>
             <a:xfrm>
               <a:off x="5659709" y="1062757"/>
-              <a:ext cx="6430497" cy="5673149"/>
+              <a:ext cx="6430496" cy="5089359"/>
               <a:chOff x="5659709" y="1062757"/>
-              <a:chExt cx="6430497" cy="5673149"/>
+              <a:chExt cx="6430496" cy="5089359"/>
             </a:xfrm>
           </p:grpSpPr>
           <p:pic>
@@ -8858,13 +8864,13 @@
             </p:nvSpPr>
             <p:spPr>
               <a:xfrm>
-                <a:off x="10366107" y="4418437"/>
+                <a:off x="10366106" y="4198999"/>
                 <a:ext cx="1724099" cy="543806"/>
               </a:xfrm>
               <a:prstGeom prst="wedgeRoundRectCallout">
                 <a:avLst>
-                  <a:gd name="adj1" fmla="val -109818"/>
-                  <a:gd name="adj2" fmla="val 158139"/>
+                  <a:gd name="adj1" fmla="val -109575"/>
+                  <a:gd name="adj2" fmla="val 199019"/>
                   <a:gd name="adj3" fmla="val 16667"/>
                 </a:avLst>
               </a:prstGeom>
@@ -8988,57 +8994,6 @@
               <a:p>
                 <a:pPr algn="ctr"/>
                 <a:endParaRPr lang="en-US"/>
-              </a:p>
-            </p:txBody>
-          </p:sp>
-          <p:sp>
-            <p:nvSpPr>
-              <p:cNvPr id="12" name="TextBox 11">
-                <a:extLst>
-                  <a:ext uri="{FF2B5EF4-FFF2-40B4-BE49-F238E27FC236}">
-                    <a16:creationId xmlns:a16="http://schemas.microsoft.com/office/drawing/2014/main" id="{62AEA7A5-93F3-FE1D-2FF9-E7F3208BA93C}"/>
-                  </a:ext>
-                </a:extLst>
-              </p:cNvPr>
-              <p:cNvSpPr txBox="1"/>
-              <p:nvPr/>
-            </p:nvSpPr>
-            <p:spPr>
-              <a:xfrm>
-                <a:off x="5942112" y="6151131"/>
-                <a:ext cx="5458761" cy="584775"/>
-              </a:xfrm>
-              <a:prstGeom prst="rect">
-                <a:avLst/>
-              </a:prstGeom>
-            </p:spPr>
-            <p:style>
-              <a:lnRef idx="2">
-                <a:schemeClr val="accent2">
-                  <a:shade val="15000"/>
-                </a:schemeClr>
-              </a:lnRef>
-              <a:fillRef idx="1">
-                <a:schemeClr val="accent2"/>
-              </a:fillRef>
-              <a:effectRef idx="0">
-                <a:schemeClr val="accent2"/>
-              </a:effectRef>
-              <a:fontRef idx="minor">
-                <a:schemeClr val="lt1"/>
-              </a:fontRef>
-            </p:style>
-            <p:txBody>
-              <a:bodyPr wrap="square" rtlCol="0">
-                <a:spAutoFit/>
-              </a:bodyPr>
-              <a:lstStyle/>
-              <a:p>
-                <a:pPr algn="ctr"/>
-                <a:r>
-                  <a:rPr lang="en-US" sz="1600" dirty="0"/>
-                  <a:t>Off-Policy: The behavioral policy provides exploration so we can learn a deterministic policy!</a:t>
-                </a:r>
               </a:p>
             </p:txBody>
           </p:sp>
@@ -9642,8 +9597,8 @@
           </a:extLst>
         </p:spPr>
       </p:pic>
-      <mc:AlternateContent xmlns:mc="http://schemas.openxmlformats.org/markup-compatibility/2006" xmlns:a14="http://schemas.microsoft.com/office/drawing/2010/main">
-        <mc:Choice Requires="a14">
+      <mc:AlternateContent xmlns:mc="http://schemas.openxmlformats.org/markup-compatibility/2006">
+        <mc:Choice xmlns:a14="http://schemas.microsoft.com/office/drawing/2010/main" Requires="a14">
           <p:sp>
             <p:nvSpPr>
               <p:cNvPr id="3" name="Content Placeholder 2">
@@ -9662,13 +9617,13 @@
             </p:nvSpPr>
             <p:spPr>
               <a:xfrm>
-                <a:off x="6289657" y="691912"/>
-                <a:ext cx="5506608" cy="5755780"/>
+                <a:off x="6207456" y="482600"/>
+                <a:ext cx="5628944" cy="5965092"/>
               </a:xfrm>
             </p:spPr>
             <p:txBody>
               <a:bodyPr anchor="ctr">
-                <a:normAutofit fontScale="92500" lnSpcReduction="10000"/>
+                <a:normAutofit lnSpcReduction="10000"/>
               </a:bodyPr>
               <a:lstStyle/>
               <a:p>
@@ -9815,7 +9770,7 @@
             </p:txBody>
           </p:sp>
         </mc:Choice>
-        <mc:Fallback xmlns="">
+        <mc:Fallback>
           <p:sp>
             <p:nvSpPr>
               <p:cNvPr id="3" name="Content Placeholder 2">
@@ -9834,13 +9789,13 @@
             </p:nvSpPr>
             <p:spPr>
               <a:xfrm>
-                <a:off x="6289657" y="691912"/>
-                <a:ext cx="5506608" cy="5755780"/>
+                <a:off x="6207456" y="482600"/>
+                <a:ext cx="5628944" cy="5965092"/>
               </a:xfrm>
               <a:blipFill>
                 <a:blip r:embed="rId3"/>
                 <a:stretch>
-                  <a:fillRect l="-775" t="-2860" r="-1218"/>
+                  <a:fillRect l="-866" t="-3575" r="-974"/>
                 </a:stretch>
               </a:blipFill>
             </p:spPr>
@@ -14235,8 +14190,8 @@
           </p:sp>
         </mc:Fallback>
       </mc:AlternateContent>
-      <mc:AlternateContent xmlns:mc="http://schemas.openxmlformats.org/markup-compatibility/2006">
-        <mc:Choice xmlns:a14="http://schemas.microsoft.com/office/drawing/2010/main" Requires="a14">
+      <mc:AlternateContent xmlns:mc="http://schemas.openxmlformats.org/markup-compatibility/2006" xmlns:a14="http://schemas.microsoft.com/office/drawing/2010/main">
+        <mc:Choice Requires="a14">
           <p:sp>
             <p:nvSpPr>
               <p:cNvPr id="3" name="Content Placeholder 2">
@@ -14377,7 +14332,7 @@
             </p:txBody>
           </p:sp>
         </mc:Choice>
-        <mc:Fallback>
+        <mc:Fallback xmlns="">
           <p:sp>
             <p:nvSpPr>
               <p:cNvPr id="3" name="Content Placeholder 2">
@@ -14421,8 +14376,8 @@
           </p:sp>
         </mc:Fallback>
       </mc:AlternateContent>
-      <mc:AlternateContent xmlns:mc="http://schemas.openxmlformats.org/markup-compatibility/2006">
-        <mc:Choice xmlns:a14="http://schemas.microsoft.com/office/drawing/2010/main" Requires="a14">
+      <mc:AlternateContent xmlns:mc="http://schemas.openxmlformats.org/markup-compatibility/2006" xmlns:a14="http://schemas.microsoft.com/office/drawing/2010/main">
+        <mc:Choice Requires="a14">
           <p:sp>
             <p:nvSpPr>
               <p:cNvPr id="32" name="TextBox 31">
@@ -14511,7 +14466,7 @@
             </p:txBody>
           </p:sp>
         </mc:Choice>
-        <mc:Fallback>
+        <mc:Fallback xmlns="">
           <p:sp>
             <p:nvSpPr>
               <p:cNvPr id="32" name="TextBox 31">
@@ -15131,8 +15086,8 @@
             </p:txBody>
           </p:sp>
         </p:grpSp>
-        <mc:AlternateContent xmlns:mc="http://schemas.openxmlformats.org/markup-compatibility/2006">
-          <mc:Choice xmlns:a14="http://schemas.microsoft.com/office/drawing/2010/main" Requires="a14">
+        <mc:AlternateContent xmlns:mc="http://schemas.openxmlformats.org/markup-compatibility/2006" xmlns:a14="http://schemas.microsoft.com/office/drawing/2010/main">
+          <mc:Choice Requires="a14">
             <p:sp>
               <p:nvSpPr>
                 <p:cNvPr id="34" name="Speech Bubble: Rectangle with Corners Rounded 33">
@@ -15223,7 +15178,7 @@
               </p:txBody>
             </p:sp>
           </mc:Choice>
-          <mc:Fallback>
+          <mc:Fallback xmlns="">
             <p:sp>
               <p:nvSpPr>
                 <p:cNvPr id="34" name="Speech Bubble: Rectangle with Corners Rounded 33">
@@ -15574,8 +15529,8 @@
             </p:txBody>
           </p:sp>
         </p:grpSp>
-        <mc:AlternateContent xmlns:mc="http://schemas.openxmlformats.org/markup-compatibility/2006">
-          <mc:Choice xmlns:a14="http://schemas.microsoft.com/office/drawing/2010/main" Requires="a14">
+        <mc:AlternateContent xmlns:mc="http://schemas.openxmlformats.org/markup-compatibility/2006" xmlns:a14="http://schemas.microsoft.com/office/drawing/2010/main">
+          <mc:Choice Requires="a14">
             <p:sp>
               <p:nvSpPr>
                 <p:cNvPr id="16" name="TextBox 15">
@@ -15622,7 +15577,7 @@
               </p:txBody>
             </p:sp>
           </mc:Choice>
-          <mc:Fallback>
+          <mc:Fallback xmlns="">
             <p:sp>
               <p:nvSpPr>
                 <p:cNvPr id="16" name="TextBox 15">
@@ -20807,8 +20762,8 @@
           </a:p>
         </p:txBody>
       </p:sp>
-      <mc:AlternateContent xmlns:mc="http://schemas.openxmlformats.org/markup-compatibility/2006" xmlns:a14="http://schemas.microsoft.com/office/drawing/2010/main">
-        <mc:Choice Requires="a14">
+      <mc:AlternateContent xmlns:mc="http://schemas.openxmlformats.org/markup-compatibility/2006">
+        <mc:Choice xmlns:a14="http://schemas.microsoft.com/office/drawing/2010/main" Requires="a14">
           <p:sp>
             <p:nvSpPr>
               <p:cNvPr id="3" name="Content Placeholder 2">
@@ -20827,13 +20782,13 @@
             </p:nvSpPr>
             <p:spPr>
               <a:xfrm>
-                <a:off x="838200" y="3949907"/>
-                <a:ext cx="10515600" cy="2398427"/>
+                <a:off x="770466" y="3606799"/>
+                <a:ext cx="10515600" cy="2844801"/>
               </a:xfrm>
             </p:spPr>
             <p:txBody>
               <a:bodyPr>
-                <a:normAutofit fontScale="70000" lnSpcReduction="20000"/>
+                <a:noAutofit/>
               </a:bodyPr>
               <a:lstStyle/>
               <a:p>
@@ -20841,11 +20796,11 @@
                   <a:buNone/>
                 </a:pPr>
                 <a:r>
-                  <a:rPr lang="en-US" b="1" dirty="0"/>
+                  <a:rPr lang="en-US" sz="2000" b="1" dirty="0"/>
                   <a:t>Explanation</a:t>
                 </a:r>
                 <a:r>
-                  <a:rPr lang="en-US" dirty="0"/>
+                  <a:rPr lang="en-US" sz="2000" dirty="0"/>
                   <a:t>: </a:t>
                 </a:r>
                 <a14:m>
@@ -20853,7 +20808,7 @@
                     <m:sSub>
                       <m:sSubPr>
                         <m:ctrlPr>
-                          <a:rPr lang="en-US" i="1">
+                          <a:rPr lang="en-US" sz="2000" i="1">
                             <a:latin typeface="Cambria Math" panose="02040503050406030204" pitchFamily="18" charset="0"/>
                             <a:ea typeface="Cambria Math" panose="02040503050406030204" pitchFamily="18" charset="0"/>
                           </a:rPr>
@@ -20861,7 +20816,7 @@
                       </m:sSubPr>
                       <m:e>
                         <m:r>
-                          <a:rPr lang="en-US" i="1">
+                          <a:rPr lang="en-US" sz="2000" i="1">
                             <a:latin typeface="Cambria Math" panose="02040503050406030204" pitchFamily="18" charset="0"/>
                             <a:ea typeface="Cambria Math" panose="02040503050406030204" pitchFamily="18" charset="0"/>
                           </a:rPr>
@@ -20870,35 +20825,35 @@
                       </m:e>
                       <m:sub>
                         <m:r>
-                          <a:rPr lang="en-US" i="1">
+                          <a:rPr lang="en-US" sz="2000" i="1">
                             <a:latin typeface="Cambria Math" panose="02040503050406030204" pitchFamily="18" charset="0"/>
                             <a:ea typeface="Cambria Math" panose="02040503050406030204" pitchFamily="18" charset="0"/>
                           </a:rPr>
                           <m:t>𝑡</m:t>
                         </m:r>
                         <m:r>
-                          <a:rPr lang="en-US" i="1">
+                          <a:rPr lang="en-US" sz="2000" i="1">
                             <a:latin typeface="Cambria Math" panose="02040503050406030204" pitchFamily="18" charset="0"/>
                             <a:ea typeface="Cambria Math" panose="02040503050406030204" pitchFamily="18" charset="0"/>
                           </a:rPr>
                           <m:t>:</m:t>
                         </m:r>
                         <m:r>
-                          <a:rPr lang="en-US" i="1">
+                          <a:rPr lang="en-US" sz="2000" i="1">
                             <a:latin typeface="Cambria Math" panose="02040503050406030204" pitchFamily="18" charset="0"/>
                             <a:ea typeface="Cambria Math" panose="02040503050406030204" pitchFamily="18" charset="0"/>
                           </a:rPr>
                           <m:t>𝑡</m:t>
                         </m:r>
                         <m:r>
-                          <a:rPr lang="en-US" i="1">
+                          <a:rPr lang="en-US" sz="2000" i="1">
                             <a:latin typeface="Cambria Math" panose="02040503050406030204" pitchFamily="18" charset="0"/>
                             <a:ea typeface="Cambria Math" panose="02040503050406030204" pitchFamily="18" charset="0"/>
                           </a:rPr>
                           <m:t>+</m:t>
                         </m:r>
                         <m:r>
-                          <a:rPr lang="en-US" i="1">
+                          <a:rPr lang="en-US" sz="2000" i="1">
                             <a:latin typeface="Cambria Math" panose="02040503050406030204" pitchFamily="18" charset="0"/>
                             <a:ea typeface="Cambria Math" panose="02040503050406030204" pitchFamily="18" charset="0"/>
                           </a:rPr>
@@ -20907,7 +20862,7 @@
                       </m:sub>
                     </m:sSub>
                     <m:r>
-                      <a:rPr lang="en-US" i="1">
+                      <a:rPr lang="en-US" sz="2000" i="1">
                         <a:latin typeface="Cambria Math" panose="02040503050406030204" pitchFamily="18" charset="0"/>
                       </a:rPr>
                       <m:t>=</m:t>
@@ -20915,14 +20870,14 @@
                     <m:sSub>
                       <m:sSubPr>
                         <m:ctrlPr>
-                          <a:rPr lang="en-US" i="1">
+                          <a:rPr lang="en-US" sz="2000" i="1">
                             <a:latin typeface="Cambria Math" panose="02040503050406030204" pitchFamily="18" charset="0"/>
                           </a:rPr>
                         </m:ctrlPr>
                       </m:sSubPr>
                       <m:e>
                         <m:r>
-                          <a:rPr lang="en-US" i="1">
+                          <a:rPr lang="en-US" sz="2000" i="1">
                             <a:latin typeface="Cambria Math" panose="02040503050406030204" pitchFamily="18" charset="0"/>
                           </a:rPr>
                           <m:t>𝑅</m:t>
@@ -20930,13 +20885,13 @@
                       </m:e>
                       <m:sub>
                         <m:r>
-                          <a:rPr lang="en-US" i="1">
+                          <a:rPr lang="en-US" sz="2000" i="1">
                             <a:latin typeface="Cambria Math" panose="02040503050406030204" pitchFamily="18" charset="0"/>
                           </a:rPr>
                           <m:t>𝑡</m:t>
                         </m:r>
                         <m:r>
-                          <a:rPr lang="en-US" i="1">
+                          <a:rPr lang="en-US" sz="2000" i="1">
                             <a:latin typeface="Cambria Math" panose="02040503050406030204" pitchFamily="18" charset="0"/>
                           </a:rPr>
                           <m:t>+1</m:t>
@@ -20944,13 +20899,13 @@
                       </m:sub>
                     </m:sSub>
                     <m:r>
-                      <a:rPr lang="en-US" i="1">
+                      <a:rPr lang="en-US" sz="2000" i="1">
                         <a:latin typeface="Cambria Math" panose="02040503050406030204" pitchFamily="18" charset="0"/>
                       </a:rPr>
                       <m:t>+</m:t>
                     </m:r>
                     <m:r>
-                      <a:rPr lang="en-US" i="1">
+                      <a:rPr lang="en-US" sz="2000" i="1">
                         <a:latin typeface="Cambria Math" panose="02040503050406030204" pitchFamily="18" charset="0"/>
                       </a:rPr>
                       <m:t>𝛾</m:t>
@@ -20958,14 +20913,14 @@
                     <m:sSub>
                       <m:sSubPr>
                         <m:ctrlPr>
-                          <a:rPr lang="en-US" i="1">
+                          <a:rPr lang="en-US" sz="2000" i="1">
                             <a:latin typeface="Cambria Math" panose="02040503050406030204" pitchFamily="18" charset="0"/>
                           </a:rPr>
                         </m:ctrlPr>
                       </m:sSubPr>
                       <m:e>
                         <m:r>
-                          <a:rPr lang="en-US" i="1">
+                          <a:rPr lang="en-US" sz="2000" i="1">
                             <a:latin typeface="Cambria Math" panose="02040503050406030204" pitchFamily="18" charset="0"/>
                           </a:rPr>
                           <m:t>𝑅</m:t>
@@ -20973,13 +20928,13 @@
                       </m:e>
                       <m:sub>
                         <m:r>
-                          <a:rPr lang="en-US" i="1">
+                          <a:rPr lang="en-US" sz="2000" i="1">
                             <a:latin typeface="Cambria Math" panose="02040503050406030204" pitchFamily="18" charset="0"/>
                           </a:rPr>
                           <m:t>𝑡</m:t>
                         </m:r>
                         <m:r>
-                          <a:rPr lang="en-US" i="1">
+                          <a:rPr lang="en-US" sz="2000" i="1">
                             <a:latin typeface="Cambria Math" panose="02040503050406030204" pitchFamily="18" charset="0"/>
                           </a:rPr>
                           <m:t>+2</m:t>
@@ -20987,7 +20942,7 @@
                       </m:sub>
                     </m:sSub>
                     <m:r>
-                      <a:rPr lang="en-US" i="1">
+                      <a:rPr lang="en-US" sz="2000" i="1">
                         <a:latin typeface="Cambria Math" panose="02040503050406030204" pitchFamily="18" charset="0"/>
                       </a:rPr>
                       <m:t>+…+</m:t>
@@ -20995,14 +20950,14 @@
                     <m:sSup>
                       <m:sSupPr>
                         <m:ctrlPr>
-                          <a:rPr lang="en-US" i="1">
+                          <a:rPr lang="en-US" sz="2000" i="1">
                             <a:latin typeface="Cambria Math" panose="02040503050406030204" pitchFamily="18" charset="0"/>
                           </a:rPr>
                         </m:ctrlPr>
                       </m:sSupPr>
                       <m:e>
                         <m:r>
-                          <a:rPr lang="en-US" i="1">
+                          <a:rPr lang="en-US" sz="2000" i="1">
                             <a:latin typeface="Cambria Math" panose="02040503050406030204" pitchFamily="18" charset="0"/>
                           </a:rPr>
                           <m:t>𝛾</m:t>
@@ -21010,13 +20965,13 @@
                       </m:e>
                       <m:sup>
                         <m:r>
-                          <a:rPr lang="en-US" i="1">
+                          <a:rPr lang="en-US" sz="2000" i="1">
                             <a:latin typeface="Cambria Math" panose="02040503050406030204" pitchFamily="18" charset="0"/>
                           </a:rPr>
                           <m:t>𝑛</m:t>
                         </m:r>
                         <m:r>
-                          <a:rPr lang="en-US" i="1">
+                          <a:rPr lang="en-US" sz="2000" i="1">
                             <a:latin typeface="Cambria Math" panose="02040503050406030204" pitchFamily="18" charset="0"/>
                           </a:rPr>
                           <m:t>−1</m:t>
@@ -21026,14 +20981,14 @@
                     <m:sSub>
                       <m:sSubPr>
                         <m:ctrlPr>
-                          <a:rPr lang="en-US" i="1">
+                          <a:rPr lang="en-US" sz="2000" i="1">
                             <a:latin typeface="Cambria Math" panose="02040503050406030204" pitchFamily="18" charset="0"/>
                           </a:rPr>
                         </m:ctrlPr>
                       </m:sSubPr>
                       <m:e>
                         <m:r>
-                          <a:rPr lang="en-US" i="1">
+                          <a:rPr lang="en-US" sz="2000" i="1">
                             <a:latin typeface="Cambria Math" panose="02040503050406030204" pitchFamily="18" charset="0"/>
                           </a:rPr>
                           <m:t>𝑅</m:t>
@@ -21041,19 +20996,19 @@
                       </m:e>
                       <m:sub>
                         <m:r>
-                          <a:rPr lang="en-US" i="1">
+                          <a:rPr lang="en-US" sz="2000" i="1">
                             <a:latin typeface="Cambria Math" panose="02040503050406030204" pitchFamily="18" charset="0"/>
                           </a:rPr>
                           <m:t>𝑡</m:t>
                         </m:r>
                         <m:r>
-                          <a:rPr lang="en-US" i="1">
+                          <a:rPr lang="en-US" sz="2000" i="1">
                             <a:latin typeface="Cambria Math" panose="02040503050406030204" pitchFamily="18" charset="0"/>
                           </a:rPr>
                           <m:t>+</m:t>
                         </m:r>
                         <m:r>
-                          <a:rPr lang="en-US" i="1">
+                          <a:rPr lang="en-US" sz="2000" i="1">
                             <a:latin typeface="Cambria Math" panose="02040503050406030204" pitchFamily="18" charset="0"/>
                           </a:rPr>
                           <m:t>𝑛</m:t>
@@ -21061,7 +21016,7 @@
                       </m:sub>
                     </m:sSub>
                     <m:r>
-                      <a:rPr lang="en-US" i="1">
+                      <a:rPr lang="en-US" sz="2000" i="1">
                         <a:latin typeface="Cambria Math" panose="02040503050406030204" pitchFamily="18" charset="0"/>
                       </a:rPr>
                       <m:t>+</m:t>
@@ -21069,14 +21024,14 @@
                     <m:sSup>
                       <m:sSupPr>
                         <m:ctrlPr>
-                          <a:rPr lang="en-US" i="1">
+                          <a:rPr lang="en-US" sz="2000" i="1">
                             <a:latin typeface="Cambria Math" panose="02040503050406030204" pitchFamily="18" charset="0"/>
                           </a:rPr>
                         </m:ctrlPr>
                       </m:sSupPr>
                       <m:e>
                         <m:r>
-                          <a:rPr lang="en-US" i="1">
+                          <a:rPr lang="en-US" sz="2000" i="1">
                             <a:latin typeface="Cambria Math" panose="02040503050406030204" pitchFamily="18" charset="0"/>
                           </a:rPr>
                           <m:t>𝛾</m:t>
@@ -21084,7 +21039,7 @@
                       </m:e>
                       <m:sup>
                         <m:r>
-                          <a:rPr lang="en-US" i="1">
+                          <a:rPr lang="en-US" sz="2000" i="1">
                             <a:latin typeface="Cambria Math" panose="02040503050406030204" pitchFamily="18" charset="0"/>
                           </a:rPr>
                           <m:t>𝑛</m:t>
@@ -21092,7 +21047,7 @@
                       </m:sup>
                     </m:sSup>
                     <m:r>
-                      <a:rPr lang="en-US" i="1">
+                      <a:rPr lang="en-US" sz="2000" i="1">
                         <a:latin typeface="Cambria Math" panose="02040503050406030204" pitchFamily="18" charset="0"/>
                       </a:rPr>
                       <m:t>𝑉</m:t>
@@ -21100,7 +21055,7 @@
                     <m:d>
                       <m:dPr>
                         <m:ctrlPr>
-                          <a:rPr lang="en-US" i="1">
+                          <a:rPr lang="en-US" sz="2000" i="1">
                             <a:latin typeface="Cambria Math" panose="02040503050406030204" pitchFamily="18" charset="0"/>
                           </a:rPr>
                         </m:ctrlPr>
@@ -21109,14 +21064,14 @@
                         <m:sSub>
                           <m:sSubPr>
                             <m:ctrlPr>
-                              <a:rPr lang="en-US" i="1">
+                              <a:rPr lang="en-US" sz="2000" i="1">
                                 <a:latin typeface="Cambria Math" panose="02040503050406030204" pitchFamily="18" charset="0"/>
                               </a:rPr>
                             </m:ctrlPr>
                           </m:sSubPr>
                           <m:e>
                             <m:r>
-                              <a:rPr lang="en-US" i="1">
+                              <a:rPr lang="en-US" sz="2000" i="1">
                                 <a:latin typeface="Cambria Math" panose="02040503050406030204" pitchFamily="18" charset="0"/>
                               </a:rPr>
                               <m:t>𝑆</m:t>
@@ -21124,19 +21079,19 @@
                           </m:e>
                           <m:sub>
                             <m:r>
-                              <a:rPr lang="en-US" i="1">
+                              <a:rPr lang="en-US" sz="2000" i="1">
                                 <a:latin typeface="Cambria Math" panose="02040503050406030204" pitchFamily="18" charset="0"/>
                               </a:rPr>
                               <m:t>𝑡</m:t>
                             </m:r>
                             <m:r>
-                              <a:rPr lang="en-US" i="1">
+                              <a:rPr lang="en-US" sz="2000" i="1">
                                 <a:latin typeface="Cambria Math" panose="02040503050406030204" pitchFamily="18" charset="0"/>
                               </a:rPr>
                               <m:t>+</m:t>
                             </m:r>
                             <m:r>
-                              <a:rPr lang="en-US" i="1">
+                              <a:rPr lang="en-US" sz="2000" i="1">
                                 <a:latin typeface="Cambria Math" panose="02040503050406030204" pitchFamily="18" charset="0"/>
                               </a:rPr>
                               <m:t>𝑛</m:t>
@@ -21147,25 +21102,25 @@
                     </m:d>
                   </m:oMath>
                 </a14:m>
-                <a:endParaRPr lang="en-US" dirty="0"/>
+                <a:endParaRPr lang="en-US" sz="2000" dirty="0"/>
               </a:p>
               <a:p>
                 <a:pPr lvl="1"/>
                 <a:r>
-                  <a:rPr lang="en-US" dirty="0"/>
+                  <a:rPr lang="en-US" sz="1600" dirty="0"/>
                   <a:t>Observed rewards have in expectation no error.</a:t>
                 </a:r>
               </a:p>
               <a:p>
                 <a:pPr lvl="1"/>
                 <a:r>
-                  <a:rPr lang="en-US" dirty="0"/>
+                  <a:rPr lang="en-US" sz="1600" dirty="0"/>
                   <a:t>The error-prone bootstrap estimate is smaller because it is </a:t>
                 </a:r>
                 <a14:m>
                   <m:oMath xmlns:m="http://schemas.openxmlformats.org/officeDocument/2006/math">
                     <m:r>
-                      <a:rPr lang="en-US" b="0" i="1" smtClean="0">
+                      <a:rPr lang="en-US" sz="1600" b="0" i="1" smtClean="0">
                         <a:latin typeface="Cambria Math" panose="02040503050406030204" pitchFamily="18" charset="0"/>
                       </a:rPr>
                       <m:t>𝑛</m:t>
@@ -21173,20 +21128,20 @@
                   </m:oMath>
                 </a14:m>
                 <a:r>
-                  <a:rPr lang="en-US" dirty="0"/>
+                  <a:rPr lang="en-US" sz="1600" dirty="0"/>
                   <a:t> time steps away and thus discounted.</a:t>
                 </a:r>
               </a:p>
               <a:p>
                 <a:pPr lvl="1"/>
                 <a:r>
-                  <a:rPr lang="en-US" dirty="0"/>
+                  <a:rPr lang="en-US" sz="1600" dirty="0"/>
                   <a:t>Increasing </a:t>
                 </a:r>
                 <a14:m>
                   <m:oMath xmlns:m="http://schemas.openxmlformats.org/officeDocument/2006/math">
                     <m:r>
-                      <a:rPr lang="en-US" b="0" i="1" smtClean="0">
+                      <a:rPr lang="en-US" sz="1600" b="0" i="1" smtClean="0">
                         <a:latin typeface="Cambria Math" panose="02040503050406030204" pitchFamily="18" charset="0"/>
                       </a:rPr>
                       <m:t>𝑛</m:t>
@@ -21194,7 +21149,7 @@
                   </m:oMath>
                 </a14:m>
                 <a:r>
-                  <a:rPr lang="en-US" dirty="0"/>
+                  <a:rPr lang="en-US" sz="1600" dirty="0"/>
                   <a:t> adds more observed rewards decreases the impact of the bootstrapping error. </a:t>
                 </a:r>
               </a:p>
@@ -21202,38 +21157,38 @@
                 <a:pPr marL="0" indent="0" algn="ctr">
                   <a:buNone/>
                 </a:pPr>
-                <a:endParaRPr lang="en-US" dirty="0"/>
+                <a:endParaRPr lang="en-US" sz="2000" dirty="0"/>
               </a:p>
               <a:p>
                 <a:pPr marL="0" indent="0">
                   <a:buNone/>
                 </a:pPr>
                 <a:r>
-                  <a:rPr lang="en-US" b="1" dirty="0"/>
+                  <a:rPr lang="en-US" sz="2000" b="1" dirty="0"/>
                   <a:t>Note</a:t>
                 </a:r>
                 <a:r>
-                  <a:rPr lang="en-US" dirty="0"/>
+                  <a:rPr lang="en-US" sz="2000" dirty="0"/>
                   <a:t>: This also means that every update is guaranteed to reduce the expected error and moves the estimate closer to the true value function. </a:t>
                 </a:r>
                 <a:br>
-                  <a:rPr lang="en-US" dirty="0"/>
+                  <a:rPr lang="en-US" sz="2000" dirty="0"/>
                 </a:br>
                 <a:br>
-                  <a:rPr lang="en-US" dirty="0"/>
+                  <a:rPr lang="en-US" sz="2000" dirty="0"/>
                 </a:br>
                 <a:r>
-                  <a:rPr lang="en-US" dirty="0"/>
+                  <a:rPr lang="en-US" sz="2000" dirty="0"/>
                   <a:t>		</a:t>
                 </a:r>
                 <a:r>
-                  <a:rPr lang="en-US" b="1" dirty="0"/>
+                  <a:rPr lang="en-US" sz="2000" b="1" dirty="0"/>
                   <a:t>All </a:t>
                 </a:r>
                 <a14:m>
                   <m:oMath xmlns:m="http://schemas.openxmlformats.org/officeDocument/2006/math">
                     <m:r>
-                      <a:rPr lang="en-US" b="1" i="1" dirty="0">
+                      <a:rPr lang="en-US" sz="2000" b="1" i="1" dirty="0">
                         <a:latin typeface="Cambria Math" panose="02040503050406030204" pitchFamily="18" charset="0"/>
                       </a:rPr>
                       <m:t>𝒏</m:t>
@@ -21241,18 +21196,18 @@
                   </m:oMath>
                 </a14:m>
                 <a:r>
-                  <a:rPr lang="en-US" b="1" dirty="0"/>
+                  <a:rPr lang="en-US" sz="2000" b="1" dirty="0"/>
                   <a:t>-step methods (including 1-step and MC) converge</a:t>
                 </a:r>
                 <a:r>
-                  <a:rPr lang="en-US" dirty="0"/>
+                  <a:rPr lang="en-US" sz="2000" dirty="0"/>
                   <a:t>!</a:t>
                 </a:r>
               </a:p>
             </p:txBody>
           </p:sp>
         </mc:Choice>
-        <mc:Fallback xmlns="">
+        <mc:Fallback>
           <p:sp>
             <p:nvSpPr>
               <p:cNvPr id="3" name="Content Placeholder 2">
@@ -21271,13 +21226,13 @@
             </p:nvSpPr>
             <p:spPr>
               <a:xfrm>
-                <a:off x="838200" y="3949907"/>
-                <a:ext cx="10515600" cy="2398427"/>
+                <a:off x="770466" y="3606799"/>
+                <a:ext cx="10515600" cy="2844801"/>
               </a:xfrm>
               <a:blipFill>
                 <a:blip r:embed="rId2"/>
                 <a:stretch>
-                  <a:fillRect l="-638" t="-4580" r="-928" b="-3817"/>
+                  <a:fillRect l="-580" t="-2146" r="-986" b="-4077"/>
                 </a:stretch>
               </a:blipFill>
             </p:spPr>
@@ -21296,8 +21251,8 @@
           </p:sp>
         </mc:Fallback>
       </mc:AlternateContent>
-      <mc:AlternateContent xmlns:mc="http://schemas.openxmlformats.org/markup-compatibility/2006" xmlns:a14="http://schemas.microsoft.com/office/drawing/2010/main">
-        <mc:Choice Requires="a14">
+      <mc:AlternateContent xmlns:mc="http://schemas.openxmlformats.org/markup-compatibility/2006">
+        <mc:Choice xmlns:a14="http://schemas.microsoft.com/office/drawing/2010/main" Requires="a14">
           <p:sp>
             <p:nvSpPr>
               <p:cNvPr id="5" name="TextBox 4">
@@ -21312,8 +21267,8 @@
             </p:nvSpPr>
             <p:spPr>
               <a:xfrm>
-                <a:off x="2382473" y="1392572"/>
-                <a:ext cx="7231310" cy="2033827"/>
+                <a:off x="2142066" y="1252872"/>
+                <a:ext cx="7467483" cy="2033827"/>
               </a:xfrm>
               <a:prstGeom prst="rect">
                 <a:avLst/>
@@ -21872,7 +21827,7 @@
             </p:txBody>
           </p:sp>
         </mc:Choice>
-        <mc:Fallback xmlns="">
+        <mc:Fallback>
           <p:sp>
             <p:nvSpPr>
               <p:cNvPr id="5" name="TextBox 4">
@@ -21889,8 +21844,8 @@
             </p:nvSpPr>
             <p:spPr>
               <a:xfrm>
-                <a:off x="2382473" y="1392572"/>
-                <a:ext cx="7231310" cy="2033827"/>
+                <a:off x="2142066" y="1252872"/>
+                <a:ext cx="7467483" cy="2033827"/>
               </a:xfrm>
               <a:prstGeom prst="rect">
                 <a:avLst/>
@@ -21898,7 +21853,7 @@
               <a:blipFill>
                 <a:blip r:embed="rId3"/>
                 <a:stretch>
-                  <a:fillRect l="-841" t="-890" r="-673"/>
+                  <a:fillRect l="-733" t="-1190"/>
                 </a:stretch>
               </a:blipFill>
             </p:spPr>

--- a/slides/Lecture_Chapter07.pptx
+++ b/slides/Lecture_Chapter07.pptx
@@ -14,14 +14,15 @@
     <p:sldId id="386" r:id="rId8"/>
     <p:sldId id="387" r:id="rId9"/>
     <p:sldId id="388" r:id="rId10"/>
-    <p:sldId id="392" r:id="rId11"/>
-    <p:sldId id="391" r:id="rId12"/>
-    <p:sldId id="394" r:id="rId13"/>
-    <p:sldId id="393" r:id="rId14"/>
-    <p:sldId id="389" r:id="rId15"/>
-    <p:sldId id="390" r:id="rId16"/>
-    <p:sldId id="395" r:id="rId17"/>
-    <p:sldId id="397" r:id="rId18"/>
+    <p:sldId id="480" r:id="rId11"/>
+    <p:sldId id="392" r:id="rId12"/>
+    <p:sldId id="391" r:id="rId13"/>
+    <p:sldId id="394" r:id="rId14"/>
+    <p:sldId id="393" r:id="rId15"/>
+    <p:sldId id="389" r:id="rId16"/>
+    <p:sldId id="390" r:id="rId17"/>
+    <p:sldId id="395" r:id="rId18"/>
+    <p:sldId id="397" r:id="rId19"/>
   </p:sldIdLst>
   <p:sldSz cx="12192000" cy="6858000"/>
   <p:notesSz cx="6858000" cy="9144000"/>
@@ -142,6 +143,7 @@
             <p14:sldId id="386"/>
             <p14:sldId id="387"/>
             <p14:sldId id="388"/>
+            <p14:sldId id="480"/>
           </p14:sldIdLst>
         </p14:section>
         <p14:section name="On-Policy Control" id="{6A91EB9B-FC66-4409-8B96-60AEBB5F5225}">
@@ -316,7 +318,7 @@
           <a:p>
             <a:fld id="{3E22BF2E-04DA-469E-97C5-BB68A0368813}" type="datetimeFigureOut">
               <a:rPr lang="en-US" smtClean="0"/>
-              <a:t>2/25/2026</a:t>
+              <a:t>3/3/2026</a:t>
             </a:fld>
             <a:endParaRPr lang="en-US"/>
           </a:p>
@@ -514,7 +516,7 @@
           <a:p>
             <a:fld id="{3E22BF2E-04DA-469E-97C5-BB68A0368813}" type="datetimeFigureOut">
               <a:rPr lang="en-US" smtClean="0"/>
-              <a:t>2/25/2026</a:t>
+              <a:t>3/3/2026</a:t>
             </a:fld>
             <a:endParaRPr lang="en-US"/>
           </a:p>
@@ -722,7 +724,7 @@
           <a:p>
             <a:fld id="{3E22BF2E-04DA-469E-97C5-BB68A0368813}" type="datetimeFigureOut">
               <a:rPr lang="en-US" smtClean="0"/>
-              <a:t>2/25/2026</a:t>
+              <a:t>3/3/2026</a:t>
             </a:fld>
             <a:endParaRPr lang="en-US"/>
           </a:p>
@@ -930,7 +932,7 @@
           <a:p>
             <a:fld id="{3E22BF2E-04DA-469E-97C5-BB68A0368813}" type="datetimeFigureOut">
               <a:rPr lang="en-US" smtClean="0"/>
-              <a:t>2/25/2026</a:t>
+              <a:t>3/3/2026</a:t>
             </a:fld>
             <a:endParaRPr lang="en-US"/>
           </a:p>
@@ -1205,7 +1207,7 @@
           <a:p>
             <a:fld id="{3E22BF2E-04DA-469E-97C5-BB68A0368813}" type="datetimeFigureOut">
               <a:rPr lang="en-US" smtClean="0"/>
-              <a:t>2/25/2026</a:t>
+              <a:t>3/3/2026</a:t>
             </a:fld>
             <a:endParaRPr lang="en-US"/>
           </a:p>
@@ -1470,7 +1472,7 @@
           <a:p>
             <a:fld id="{3E22BF2E-04DA-469E-97C5-BB68A0368813}" type="datetimeFigureOut">
               <a:rPr lang="en-US" smtClean="0"/>
-              <a:t>2/25/2026</a:t>
+              <a:t>3/3/2026</a:t>
             </a:fld>
             <a:endParaRPr lang="en-US"/>
           </a:p>
@@ -1882,7 +1884,7 @@
           <a:p>
             <a:fld id="{3E22BF2E-04DA-469E-97C5-BB68A0368813}" type="datetimeFigureOut">
               <a:rPr lang="en-US" smtClean="0"/>
-              <a:t>2/25/2026</a:t>
+              <a:t>3/3/2026</a:t>
             </a:fld>
             <a:endParaRPr lang="en-US"/>
           </a:p>
@@ -2023,7 +2025,7 @@
           <a:p>
             <a:fld id="{3E22BF2E-04DA-469E-97C5-BB68A0368813}" type="datetimeFigureOut">
               <a:rPr lang="en-US" smtClean="0"/>
-              <a:t>2/25/2026</a:t>
+              <a:t>3/3/2026</a:t>
             </a:fld>
             <a:endParaRPr lang="en-US"/>
           </a:p>
@@ -2136,7 +2138,7 @@
           <a:p>
             <a:fld id="{3E22BF2E-04DA-469E-97C5-BB68A0368813}" type="datetimeFigureOut">
               <a:rPr lang="en-US" smtClean="0"/>
-              <a:t>2/25/2026</a:t>
+              <a:t>3/3/2026</a:t>
             </a:fld>
             <a:endParaRPr lang="en-US"/>
           </a:p>
@@ -2447,7 +2449,7 @@
           <a:p>
             <a:fld id="{3E22BF2E-04DA-469E-97C5-BB68A0368813}" type="datetimeFigureOut">
               <a:rPr lang="en-US" smtClean="0"/>
-              <a:t>2/25/2026</a:t>
+              <a:t>3/3/2026</a:t>
             </a:fld>
             <a:endParaRPr lang="en-US"/>
           </a:p>
@@ -2735,7 +2737,7 @@
           <a:p>
             <a:fld id="{3E22BF2E-04DA-469E-97C5-BB68A0368813}" type="datetimeFigureOut">
               <a:rPr lang="en-US" smtClean="0"/>
-              <a:t>2/25/2026</a:t>
+              <a:t>3/3/2026</a:t>
             </a:fld>
             <a:endParaRPr lang="en-US"/>
           </a:p>
@@ -2976,7 +2978,7 @@
           <a:p>
             <a:fld id="{3E22BF2E-04DA-469E-97C5-BB68A0368813}" type="datetimeFigureOut">
               <a:rPr lang="en-US" smtClean="0"/>
-              <a:t>2/25/2026</a:t>
+              <a:t>3/3/2026</a:t>
             </a:fld>
             <a:endParaRPr lang="en-US"/>
           </a:p>
@@ -4090,6 +4092,2846 @@
           <a:chExt cx="0" cy="0"/>
         </a:xfrm>
       </p:grpSpPr>
+      <p:sp>
+        <p:nvSpPr>
+          <p:cNvPr id="2" name="Title 1">
+            <a:extLst>
+              <a:ext uri="{FF2B5EF4-FFF2-40B4-BE49-F238E27FC236}">
+                <a16:creationId xmlns:a16="http://schemas.microsoft.com/office/drawing/2014/main" id="{568BE528-C1DE-F2F1-563E-D757ECA4F863}"/>
+              </a:ext>
+            </a:extLst>
+          </p:cNvPr>
+          <p:cNvSpPr>
+            <a:spLocks noGrp="1"/>
+          </p:cNvSpPr>
+          <p:nvPr>
+            <p:ph type="title"/>
+          </p:nvPr>
+        </p:nvSpPr>
+        <p:spPr/>
+        <p:txBody>
+          <a:bodyPr>
+            <a:normAutofit/>
+          </a:bodyPr>
+          <a:lstStyle/>
+          <a:p>
+            <a:r>
+              <a:rPr lang="en-US" dirty="0"/>
+              <a:t>Bias-Variance Tradeoff in RL</a:t>
+            </a:r>
+          </a:p>
+        </p:txBody>
+      </p:sp>
+      <mc:AlternateContent xmlns:mc="http://schemas.openxmlformats.org/markup-compatibility/2006" xmlns:a14="http://schemas.microsoft.com/office/drawing/2010/main">
+        <mc:Choice Requires="a14">
+          <p:sp>
+            <p:nvSpPr>
+              <p:cNvPr id="3" name="Content Placeholder 2">
+                <a:extLst>
+                  <a:ext uri="{FF2B5EF4-FFF2-40B4-BE49-F238E27FC236}">
+                    <a16:creationId xmlns:a16="http://schemas.microsoft.com/office/drawing/2014/main" id="{F30E30F0-5B7A-2004-2D0B-63D151A5BE42}"/>
+                  </a:ext>
+                </a:extLst>
+              </p:cNvPr>
+              <p:cNvSpPr>
+                <a:spLocks noGrp="1"/>
+              </p:cNvSpPr>
+              <p:nvPr>
+                <p:ph idx="1"/>
+              </p:nvPr>
+            </p:nvSpPr>
+            <p:spPr>
+              <a:xfrm>
+                <a:off x="838200" y="1002818"/>
+                <a:ext cx="10515600" cy="3755299"/>
+              </a:xfrm>
+            </p:spPr>
+            <p:txBody>
+              <a:bodyPr>
+                <a:normAutofit fontScale="62500" lnSpcReduction="20000"/>
+              </a:bodyPr>
+              <a:lstStyle/>
+              <a:p>
+                <a:pPr>
+                  <a:lnSpc>
+                    <a:spcPct val="120000"/>
+                  </a:lnSpc>
+                </a:pPr>
+                <a:r>
+                  <a:rPr lang="en-US" dirty="0"/>
+                  <a:t>We use a set of return estimates/samples </a:t>
+                </a:r>
+                <a14:m>
+                  <m:oMath xmlns:m="http://schemas.openxmlformats.org/officeDocument/2006/math">
+                    <m:r>
+                      <a:rPr lang="en-US" b="0" i="1" smtClean="0">
+                        <a:latin typeface="Cambria Math" panose="02040503050406030204" pitchFamily="18" charset="0"/>
+                      </a:rPr>
+                      <m:t>𝐺</m:t>
+                    </m:r>
+                  </m:oMath>
+                </a14:m>
+                <a:r>
+                  <a:rPr lang="en-US" dirty="0"/>
+                  <a:t> starting at a state s </a:t>
+                </a:r>
+                <a14:m>
+                  <m:oMath xmlns:m="http://schemas.openxmlformats.org/officeDocument/2006/math">
+                    <m:r>
+                      <a:rPr lang="en-US" b="0" i="1" smtClean="0">
+                        <a:latin typeface="Cambria Math" panose="02040503050406030204" pitchFamily="18" charset="0"/>
+                      </a:rPr>
+                      <m:t>𝑠</m:t>
+                    </m:r>
+                  </m:oMath>
+                </a14:m>
+                <a:r>
+                  <a:rPr lang="en-US" dirty="0"/>
+                  <a:t> following </a:t>
+                </a:r>
+                <a14:m>
+                  <m:oMath xmlns:m="http://schemas.openxmlformats.org/officeDocument/2006/math">
+                    <m:r>
+                      <a:rPr lang="en-US" b="0" i="1" smtClean="0">
+                        <a:latin typeface="Cambria Math" panose="02040503050406030204" pitchFamily="18" charset="0"/>
+                      </a:rPr>
+                      <m:t>𝜋</m:t>
+                    </m:r>
+                  </m:oMath>
+                </a14:m>
+                <a:r>
+                  <a:rPr lang="en-US" dirty="0"/>
+                  <a:t> as the training set </a:t>
+                </a:r>
+                <a:br>
+                  <a:rPr lang="en-US" dirty="0"/>
+                </a:br>
+                <a14:m>
+                  <m:oMath xmlns:m="http://schemas.openxmlformats.org/officeDocument/2006/math">
+                    <m:r>
+                      <a:rPr lang="en-US" b="0" i="1" smtClean="0">
+                        <a:latin typeface="Cambria Math" panose="02040503050406030204" pitchFamily="18" charset="0"/>
+                      </a:rPr>
+                      <m:t>𝐷</m:t>
+                    </m:r>
+                    <m:r>
+                      <a:rPr lang="en-US" b="0" i="1" smtClean="0">
+                        <a:latin typeface="Cambria Math" panose="02040503050406030204" pitchFamily="18" charset="0"/>
+                      </a:rPr>
+                      <m:t>=</m:t>
+                    </m:r>
+                    <m:d>
+                      <m:dPr>
+                        <m:begChr m:val="{"/>
+                        <m:ctrlPr>
+                          <a:rPr lang="en-US" b="0" i="1" smtClean="0">
+                            <a:latin typeface="Cambria Math" panose="02040503050406030204" pitchFamily="18" charset="0"/>
+                          </a:rPr>
+                        </m:ctrlPr>
+                      </m:dPr>
+                      <m:e>
+                        <m:sSub>
+                          <m:sSubPr>
+                            <m:ctrlPr>
+                              <a:rPr lang="en-US" b="0" i="1" smtClean="0">
+                                <a:latin typeface="Cambria Math" panose="02040503050406030204" pitchFamily="18" charset="0"/>
+                              </a:rPr>
+                            </m:ctrlPr>
+                          </m:sSubPr>
+                          <m:e>
+                            <m:r>
+                              <a:rPr lang="en-US" b="0" i="1" smtClean="0">
+                                <a:latin typeface="Cambria Math" panose="02040503050406030204" pitchFamily="18" charset="0"/>
+                              </a:rPr>
+                              <m:t>(</m:t>
+                            </m:r>
+                            <m:r>
+                              <a:rPr lang="en-US" b="0" i="1" smtClean="0">
+                                <a:latin typeface="Cambria Math" panose="02040503050406030204" pitchFamily="18" charset="0"/>
+                              </a:rPr>
+                              <m:t>𝑠</m:t>
+                            </m:r>
+                          </m:e>
+                          <m:sub>
+                            <m:r>
+                              <a:rPr lang="en-US" b="0" i="1" smtClean="0">
+                                <a:latin typeface="Cambria Math" panose="02040503050406030204" pitchFamily="18" charset="0"/>
+                              </a:rPr>
+                              <m:t>1</m:t>
+                            </m:r>
+                          </m:sub>
+                        </m:sSub>
+                        <m:r>
+                          <a:rPr lang="en-US" b="0" i="1" smtClean="0">
+                            <a:latin typeface="Cambria Math" panose="02040503050406030204" pitchFamily="18" charset="0"/>
+                          </a:rPr>
+                          <m:t>,</m:t>
+                        </m:r>
+                        <m:sSub>
+                          <m:sSubPr>
+                            <m:ctrlPr>
+                              <a:rPr lang="en-US" b="0" i="1" smtClean="0">
+                                <a:latin typeface="Cambria Math" panose="02040503050406030204" pitchFamily="18" charset="0"/>
+                              </a:rPr>
+                            </m:ctrlPr>
+                          </m:sSubPr>
+                          <m:e>
+                            <m:r>
+                              <a:rPr lang="en-US" b="0" i="1" smtClean="0">
+                                <a:latin typeface="Cambria Math" panose="02040503050406030204" pitchFamily="18" charset="0"/>
+                              </a:rPr>
+                              <m:t>𝐺</m:t>
+                            </m:r>
+                          </m:e>
+                          <m:sub>
+                            <m:r>
+                              <a:rPr lang="en-US" b="0" i="1" smtClean="0">
+                                <a:latin typeface="Cambria Math" panose="02040503050406030204" pitchFamily="18" charset="0"/>
+                              </a:rPr>
+                              <m:t>1</m:t>
+                            </m:r>
+                          </m:sub>
+                        </m:sSub>
+                      </m:e>
+                    </m:d>
+                    <m:r>
+                      <a:rPr lang="en-US" b="0" i="1" smtClean="0">
+                        <a:latin typeface="Cambria Math" panose="02040503050406030204" pitchFamily="18" charset="0"/>
+                      </a:rPr>
+                      <m:t>, …,(</m:t>
+                    </m:r>
+                    <m:sSub>
+                      <m:sSubPr>
+                        <m:ctrlPr>
+                          <a:rPr lang="en-US" b="0" i="1" smtClean="0">
+                            <a:latin typeface="Cambria Math" panose="02040503050406030204" pitchFamily="18" charset="0"/>
+                          </a:rPr>
+                        </m:ctrlPr>
+                      </m:sSubPr>
+                      <m:e>
+                        <m:r>
+                          <a:rPr lang="en-US" b="0" i="1" smtClean="0">
+                            <a:latin typeface="Cambria Math" panose="02040503050406030204" pitchFamily="18" charset="0"/>
+                          </a:rPr>
+                          <m:t>𝑠</m:t>
+                        </m:r>
+                      </m:e>
+                      <m:sub>
+                        <m:r>
+                          <a:rPr lang="en-US" b="0" i="1" smtClean="0">
+                            <a:latin typeface="Cambria Math" panose="02040503050406030204" pitchFamily="18" charset="0"/>
+                          </a:rPr>
+                          <m:t>𝑛</m:t>
+                        </m:r>
+                      </m:sub>
+                    </m:sSub>
+                    <m:r>
+                      <a:rPr lang="en-US" b="0" i="1" smtClean="0">
+                        <a:latin typeface="Cambria Math" panose="02040503050406030204" pitchFamily="18" charset="0"/>
+                      </a:rPr>
+                      <m:t>,</m:t>
+                    </m:r>
+                    <m:sSub>
+                      <m:sSubPr>
+                        <m:ctrlPr>
+                          <a:rPr lang="en-US" b="0" i="1" smtClean="0">
+                            <a:latin typeface="Cambria Math" panose="02040503050406030204" pitchFamily="18" charset="0"/>
+                          </a:rPr>
+                        </m:ctrlPr>
+                      </m:sSubPr>
+                      <m:e>
+                        <m:r>
+                          <a:rPr lang="en-US" b="0" i="1" smtClean="0">
+                            <a:latin typeface="Cambria Math" panose="02040503050406030204" pitchFamily="18" charset="0"/>
+                          </a:rPr>
+                          <m:t>𝐺</m:t>
+                        </m:r>
+                      </m:e>
+                      <m:sub>
+                        <m:r>
+                          <a:rPr lang="en-US" b="0" i="1" smtClean="0">
+                            <a:latin typeface="Cambria Math" panose="02040503050406030204" pitchFamily="18" charset="0"/>
+                          </a:rPr>
+                          <m:t>𝑛</m:t>
+                        </m:r>
+                      </m:sub>
+                    </m:sSub>
+                    <m:r>
+                      <a:rPr lang="en-US" b="0" i="1" smtClean="0">
+                        <a:latin typeface="Cambria Math" panose="02040503050406030204" pitchFamily="18" charset="0"/>
+                      </a:rPr>
+                      <m:t>)}</m:t>
+                    </m:r>
+                    <m:r>
+                      <a:rPr lang="en-US" b="0" i="0" smtClean="0">
+                        <a:latin typeface="Cambria Math" panose="02040503050406030204" pitchFamily="18" charset="0"/>
+                      </a:rPr>
+                      <m:t> </m:t>
+                    </m:r>
+                  </m:oMath>
+                </a14:m>
+                <a:r>
+                  <a:rPr lang="en-US" dirty="0"/>
+                  <a:t>to learn a value function estimate </a:t>
+                </a:r>
+                <a14:m>
+                  <m:oMath xmlns:m="http://schemas.openxmlformats.org/officeDocument/2006/math">
+                    <m:sSub>
+                      <m:sSubPr>
+                        <m:ctrlPr>
+                          <a:rPr lang="en-US" b="0" i="1" dirty="0" smtClean="0">
+                            <a:latin typeface="Cambria Math" panose="02040503050406030204" pitchFamily="18" charset="0"/>
+                            <a:ea typeface="Cambria Math" panose="02040503050406030204" pitchFamily="18" charset="0"/>
+                          </a:rPr>
+                        </m:ctrlPr>
+                      </m:sSubPr>
+                      <m:e>
+                        <m:acc>
+                          <m:accPr>
+                            <m:chr m:val="̂"/>
+                            <m:ctrlPr>
+                              <a:rPr lang="en-US" b="0" i="1" dirty="0" smtClean="0">
+                                <a:latin typeface="Cambria Math" panose="02040503050406030204" pitchFamily="18" charset="0"/>
+                                <a:ea typeface="Cambria Math" panose="02040503050406030204" pitchFamily="18" charset="0"/>
+                              </a:rPr>
+                            </m:ctrlPr>
+                          </m:accPr>
+                          <m:e>
+                            <m:r>
+                              <a:rPr lang="en-US" b="0" i="1" dirty="0" smtClean="0">
+                                <a:latin typeface="Cambria Math" panose="02040503050406030204" pitchFamily="18" charset="0"/>
+                                <a:ea typeface="Cambria Math" panose="02040503050406030204" pitchFamily="18" charset="0"/>
+                              </a:rPr>
+                              <m:t>𝑣</m:t>
+                            </m:r>
+                          </m:e>
+                        </m:acc>
+                      </m:e>
+                      <m:sub>
+                        <m:r>
+                          <a:rPr lang="en-US" b="0" i="1" dirty="0" smtClean="0">
+                            <a:latin typeface="Cambria Math" panose="02040503050406030204" pitchFamily="18" charset="0"/>
+                          </a:rPr>
+                          <m:t>𝜋</m:t>
+                        </m:r>
+                      </m:sub>
+                    </m:sSub>
+                    <m:d>
+                      <m:dPr>
+                        <m:ctrlPr>
+                          <a:rPr lang="en-US" b="0" i="1" dirty="0" smtClean="0">
+                            <a:latin typeface="Cambria Math" panose="02040503050406030204" pitchFamily="18" charset="0"/>
+                            <a:ea typeface="Cambria Math" panose="02040503050406030204" pitchFamily="18" charset="0"/>
+                          </a:rPr>
+                        </m:ctrlPr>
+                      </m:dPr>
+                      <m:e>
+                        <m:r>
+                          <a:rPr lang="en-US" i="1">
+                            <a:latin typeface="Cambria Math" panose="02040503050406030204" pitchFamily="18" charset="0"/>
+                            <a:ea typeface="Cambria Math" panose="02040503050406030204" pitchFamily="18" charset="0"/>
+                          </a:rPr>
+                          <m:t>𝑠</m:t>
+                        </m:r>
+                      </m:e>
+                    </m:d>
+                  </m:oMath>
+                </a14:m>
+                <a:r>
+                  <a:rPr lang="en-US" dirty="0"/>
+                  <a:t> using the tabular updating rule </a:t>
+                </a:r>
+                <a:br>
+                  <a:rPr lang="en-US" dirty="0"/>
+                </a:br>
+                <a14:m>
+                  <m:oMath xmlns:m="http://schemas.openxmlformats.org/officeDocument/2006/math">
+                    <m:r>
+                      <a:rPr lang="en-US" b="0" i="1" smtClean="0">
+                        <a:latin typeface="Cambria Math" panose="02040503050406030204" pitchFamily="18" charset="0"/>
+                      </a:rPr>
+                      <m:t>𝑉</m:t>
+                    </m:r>
+                    <m:d>
+                      <m:dPr>
+                        <m:ctrlPr>
+                          <a:rPr lang="en-US" b="0" i="1" smtClean="0">
+                            <a:latin typeface="Cambria Math" panose="02040503050406030204" pitchFamily="18" charset="0"/>
+                          </a:rPr>
+                        </m:ctrlPr>
+                      </m:dPr>
+                      <m:e>
+                        <m:r>
+                          <a:rPr lang="en-US" b="0" i="1" smtClean="0">
+                            <a:latin typeface="Cambria Math" panose="02040503050406030204" pitchFamily="18" charset="0"/>
+                          </a:rPr>
+                          <m:t>𝑠</m:t>
+                        </m:r>
+                      </m:e>
+                    </m:d>
+                    <m:r>
+                      <a:rPr lang="en-US" b="0" i="1" smtClean="0">
+                        <a:latin typeface="Cambria Math" panose="02040503050406030204" pitchFamily="18" charset="0"/>
+                      </a:rPr>
+                      <m:t>←</m:t>
+                    </m:r>
+                    <m:r>
+                      <a:rPr lang="en-US" b="0" i="1" smtClean="0">
+                        <a:latin typeface="Cambria Math" panose="02040503050406030204" pitchFamily="18" charset="0"/>
+                      </a:rPr>
+                      <m:t>𝑉</m:t>
+                    </m:r>
+                    <m:d>
+                      <m:dPr>
+                        <m:ctrlPr>
+                          <a:rPr lang="en-US" b="0" i="1" smtClean="0">
+                            <a:latin typeface="Cambria Math" panose="02040503050406030204" pitchFamily="18" charset="0"/>
+                          </a:rPr>
+                        </m:ctrlPr>
+                      </m:dPr>
+                      <m:e>
+                        <m:r>
+                          <a:rPr lang="en-US" b="0" i="1" smtClean="0">
+                            <a:latin typeface="Cambria Math" panose="02040503050406030204" pitchFamily="18" charset="0"/>
+                          </a:rPr>
+                          <m:t>𝑠</m:t>
+                        </m:r>
+                      </m:e>
+                    </m:d>
+                    <m:r>
+                      <a:rPr lang="en-US" b="0" i="1" smtClean="0">
+                        <a:latin typeface="Cambria Math" panose="02040503050406030204" pitchFamily="18" charset="0"/>
+                      </a:rPr>
+                      <m:t>+</m:t>
+                    </m:r>
+                    <m:r>
+                      <a:rPr lang="en-US" b="0" i="1" smtClean="0">
+                        <a:latin typeface="Cambria Math" panose="02040503050406030204" pitchFamily="18" charset="0"/>
+                      </a:rPr>
+                      <m:t>𝛼</m:t>
+                    </m:r>
+                    <m:r>
+                      <a:rPr lang="en-US" b="0" i="1" smtClean="0">
+                        <a:latin typeface="Cambria Math" panose="02040503050406030204" pitchFamily="18" charset="0"/>
+                      </a:rPr>
+                      <m:t>(</m:t>
+                    </m:r>
+                    <m:sSub>
+                      <m:sSubPr>
+                        <m:ctrlPr>
+                          <a:rPr lang="en-US" b="0" i="1" smtClean="0">
+                            <a:latin typeface="Cambria Math" panose="02040503050406030204" pitchFamily="18" charset="0"/>
+                          </a:rPr>
+                        </m:ctrlPr>
+                      </m:sSubPr>
+                      <m:e>
+                        <m:r>
+                          <a:rPr lang="en-US" b="0" i="1" smtClean="0">
+                            <a:latin typeface="Cambria Math" panose="02040503050406030204" pitchFamily="18" charset="0"/>
+                          </a:rPr>
+                          <m:t>𝐺</m:t>
+                        </m:r>
+                      </m:e>
+                      <m:sub>
+                        <m:r>
+                          <a:rPr lang="en-US" b="0" i="1" smtClean="0">
+                            <a:latin typeface="Cambria Math" panose="02040503050406030204" pitchFamily="18" charset="0"/>
+                          </a:rPr>
+                          <m:t>𝑡</m:t>
+                        </m:r>
+                      </m:sub>
+                    </m:sSub>
+                    <m:r>
+                      <a:rPr lang="en-US" b="0" i="1" smtClean="0">
+                        <a:latin typeface="Cambria Math" panose="02040503050406030204" pitchFamily="18" charset="0"/>
+                      </a:rPr>
+                      <m:t>−</m:t>
+                    </m:r>
+                    <m:r>
+                      <a:rPr lang="en-US" b="0" i="1" smtClean="0">
+                        <a:latin typeface="Cambria Math" panose="02040503050406030204" pitchFamily="18" charset="0"/>
+                      </a:rPr>
+                      <m:t>𝑉</m:t>
+                    </m:r>
+                    <m:r>
+                      <a:rPr lang="en-US" b="0" i="1" smtClean="0">
+                        <a:latin typeface="Cambria Math" panose="02040503050406030204" pitchFamily="18" charset="0"/>
+                      </a:rPr>
+                      <m:t>(</m:t>
+                    </m:r>
+                    <m:r>
+                      <a:rPr lang="en-US" b="0" i="1" smtClean="0">
+                        <a:latin typeface="Cambria Math" panose="02040503050406030204" pitchFamily="18" charset="0"/>
+                      </a:rPr>
+                      <m:t>𝑠</m:t>
+                    </m:r>
+                    <m:r>
+                      <a:rPr lang="en-US" b="0" i="1" smtClean="0">
+                        <a:latin typeface="Cambria Math" panose="02040503050406030204" pitchFamily="18" charset="0"/>
+                      </a:rPr>
+                      <m:t>))</m:t>
+                    </m:r>
+                  </m:oMath>
+                </a14:m>
+                <a:r>
+                  <a:rPr lang="en-US" i="1" dirty="0"/>
+                  <a:t>.</a:t>
+                </a:r>
+              </a:p>
+              <a:p>
+                <a:pPr marL="0" indent="0">
+                  <a:buNone/>
+                </a:pPr>
+                <a:endParaRPr lang="en-US" dirty="0"/>
+              </a:p>
+              <a:p>
+                <a:r>
+                  <a:rPr lang="en-US" b="1" dirty="0"/>
+                  <a:t>Bias</a:t>
+                </a:r>
+                <a:r>
+                  <a:rPr lang="en-US" dirty="0"/>
+                  <a:t>: How far is the average prediction from the truth?</a:t>
+                </a:r>
+                <a:br>
+                  <a:rPr lang="en-US" dirty="0"/>
+                </a:br>
+                <a:br>
+                  <a:rPr lang="en-US" dirty="0"/>
+                </a:br>
+                <a14:m>
+                  <m:oMath xmlns:m="http://schemas.openxmlformats.org/officeDocument/2006/math">
+                    <m:sSub>
+                      <m:sSubPr>
+                        <m:ctrlPr>
+                          <a:rPr lang="en-US" b="0" i="1" smtClean="0">
+                            <a:latin typeface="Cambria Math" panose="02040503050406030204" pitchFamily="18" charset="0"/>
+                          </a:rPr>
+                        </m:ctrlPr>
+                      </m:sSubPr>
+                      <m:e>
+                        <m:r>
+                          <m:rPr>
+                            <m:nor/>
+                          </m:rPr>
+                          <a:rPr lang="en-US" b="0" i="0" smtClean="0">
+                            <a:latin typeface="Cambria Math" panose="02040503050406030204" pitchFamily="18" charset="0"/>
+                          </a:rPr>
+                          <m:t>Bias</m:t>
+                        </m:r>
+                      </m:e>
+                      <m:sub>
+                        <m:r>
+                          <a:rPr lang="en-US" b="0" i="1" smtClean="0">
+                            <a:latin typeface="Cambria Math" panose="02040503050406030204" pitchFamily="18" charset="0"/>
+                          </a:rPr>
+                          <m:t>𝐷</m:t>
+                        </m:r>
+                      </m:sub>
+                    </m:sSub>
+                    <m:d>
+                      <m:dPr>
+                        <m:begChr m:val="["/>
+                        <m:endChr m:val="]"/>
+                        <m:ctrlPr>
+                          <a:rPr lang="en-US" b="0" i="1" smtClean="0">
+                            <a:latin typeface="Cambria Math" panose="02040503050406030204" pitchFamily="18" charset="0"/>
+                          </a:rPr>
+                        </m:ctrlPr>
+                      </m:dPr>
+                      <m:e>
+                        <m:sSub>
+                          <m:sSubPr>
+                            <m:ctrlPr>
+                              <a:rPr lang="en-US" b="0" i="1" smtClean="0">
+                                <a:latin typeface="Cambria Math" panose="02040503050406030204" pitchFamily="18" charset="0"/>
+                                <a:ea typeface="Cambria Math" panose="02040503050406030204" pitchFamily="18" charset="0"/>
+                              </a:rPr>
+                            </m:ctrlPr>
+                          </m:sSubPr>
+                          <m:e>
+                            <m:acc>
+                              <m:accPr>
+                                <m:chr m:val="̂"/>
+                                <m:ctrlPr>
+                                  <a:rPr lang="en-US" i="1">
+                                    <a:latin typeface="Cambria Math" panose="02040503050406030204" pitchFamily="18" charset="0"/>
+                                    <a:ea typeface="Cambria Math" panose="02040503050406030204" pitchFamily="18" charset="0"/>
+                                  </a:rPr>
+                                </m:ctrlPr>
+                              </m:accPr>
+                              <m:e>
+                                <m:r>
+                                  <a:rPr lang="en-US" i="1">
+                                    <a:latin typeface="Cambria Math" panose="02040503050406030204" pitchFamily="18" charset="0"/>
+                                    <a:ea typeface="Cambria Math" panose="02040503050406030204" pitchFamily="18" charset="0"/>
+                                  </a:rPr>
+                                  <m:t>𝑣</m:t>
+                                </m:r>
+                              </m:e>
+                            </m:acc>
+                          </m:e>
+                          <m:sub>
+                            <m:r>
+                              <a:rPr lang="en-US" b="0" i="1" smtClean="0">
+                                <a:latin typeface="Cambria Math" panose="02040503050406030204" pitchFamily="18" charset="0"/>
+                                <a:ea typeface="Cambria Math" panose="02040503050406030204" pitchFamily="18" charset="0"/>
+                              </a:rPr>
+                              <m:t>𝜋</m:t>
+                            </m:r>
+                          </m:sub>
+                        </m:sSub>
+                        <m:d>
+                          <m:dPr>
+                            <m:ctrlPr>
+                              <a:rPr lang="en-US" i="1">
+                                <a:latin typeface="Cambria Math" panose="02040503050406030204" pitchFamily="18" charset="0"/>
+                                <a:ea typeface="Cambria Math" panose="02040503050406030204" pitchFamily="18" charset="0"/>
+                              </a:rPr>
+                            </m:ctrlPr>
+                          </m:dPr>
+                          <m:e>
+                            <m:r>
+                              <a:rPr lang="en-US" i="1">
+                                <a:latin typeface="Cambria Math" panose="02040503050406030204" pitchFamily="18" charset="0"/>
+                              </a:rPr>
+                              <m:t>𝑠</m:t>
+                            </m:r>
+                          </m:e>
+                        </m:d>
+                      </m:e>
+                    </m:d>
+                    <m:r>
+                      <a:rPr lang="en-US" b="0" i="1" smtClean="0">
+                        <a:latin typeface="Cambria Math" panose="02040503050406030204" pitchFamily="18" charset="0"/>
+                      </a:rPr>
+                      <m:t> </m:t>
+                    </m:r>
+                    <m:r>
+                      <a:rPr lang="en-US" i="1">
+                        <a:latin typeface="Cambria Math" panose="02040503050406030204" pitchFamily="18" charset="0"/>
+                      </a:rPr>
+                      <m:t>=</m:t>
+                    </m:r>
+                    <m:sSub>
+                      <m:sSubPr>
+                        <m:ctrlPr>
+                          <a:rPr lang="en-US" b="0" i="1" smtClean="0">
+                            <a:latin typeface="Cambria Math" panose="02040503050406030204" pitchFamily="18" charset="0"/>
+                            <a:ea typeface="Cambria Math" panose="02040503050406030204" pitchFamily="18" charset="0"/>
+                          </a:rPr>
+                        </m:ctrlPr>
+                      </m:sSubPr>
+                      <m:e>
+                        <m:r>
+                          <a:rPr lang="en-US" i="1" smtClean="0">
+                            <a:latin typeface="Cambria Math" panose="02040503050406030204" pitchFamily="18" charset="0"/>
+                            <a:ea typeface="Cambria Math" panose="02040503050406030204" pitchFamily="18" charset="0"/>
+                          </a:rPr>
+                          <m:t>𝔼</m:t>
+                        </m:r>
+                      </m:e>
+                      <m:sub>
+                        <m:r>
+                          <a:rPr lang="en-US" b="0" i="1" smtClean="0">
+                            <a:latin typeface="Cambria Math" panose="02040503050406030204" pitchFamily="18" charset="0"/>
+                            <a:ea typeface="Cambria Math" panose="02040503050406030204" pitchFamily="18" charset="0"/>
+                          </a:rPr>
+                          <m:t>𝐷</m:t>
+                        </m:r>
+                      </m:sub>
+                    </m:sSub>
+                    <m:d>
+                      <m:dPr>
+                        <m:begChr m:val="["/>
+                        <m:endChr m:val="]"/>
+                        <m:ctrlPr>
+                          <a:rPr lang="en-US" b="0" i="1" smtClean="0">
+                            <a:latin typeface="Cambria Math" panose="02040503050406030204" pitchFamily="18" charset="0"/>
+                            <a:ea typeface="Cambria Math" panose="02040503050406030204" pitchFamily="18" charset="0"/>
+                          </a:rPr>
+                        </m:ctrlPr>
+                      </m:dPr>
+                      <m:e>
+                        <m:sSub>
+                          <m:sSubPr>
+                            <m:ctrlPr>
+                              <a:rPr lang="en-US" b="0" i="1" smtClean="0">
+                                <a:latin typeface="Cambria Math" panose="02040503050406030204" pitchFamily="18" charset="0"/>
+                                <a:ea typeface="Cambria Math" panose="02040503050406030204" pitchFamily="18" charset="0"/>
+                              </a:rPr>
+                            </m:ctrlPr>
+                          </m:sSubPr>
+                          <m:e>
+                            <m:acc>
+                              <m:accPr>
+                                <m:chr m:val="̂"/>
+                                <m:ctrlPr>
+                                  <a:rPr lang="en-US" i="1">
+                                    <a:latin typeface="Cambria Math" panose="02040503050406030204" pitchFamily="18" charset="0"/>
+                                    <a:ea typeface="Cambria Math" panose="02040503050406030204" pitchFamily="18" charset="0"/>
+                                  </a:rPr>
+                                </m:ctrlPr>
+                              </m:accPr>
+                              <m:e>
+                                <m:r>
+                                  <a:rPr lang="en-US" i="1">
+                                    <a:latin typeface="Cambria Math" panose="02040503050406030204" pitchFamily="18" charset="0"/>
+                                    <a:ea typeface="Cambria Math" panose="02040503050406030204" pitchFamily="18" charset="0"/>
+                                  </a:rPr>
+                                  <m:t>𝑣</m:t>
+                                </m:r>
+                              </m:e>
+                            </m:acc>
+                          </m:e>
+                          <m:sub>
+                            <m:r>
+                              <a:rPr lang="en-US" b="0" i="1" smtClean="0">
+                                <a:latin typeface="Cambria Math" panose="02040503050406030204" pitchFamily="18" charset="0"/>
+                                <a:ea typeface="Cambria Math" panose="02040503050406030204" pitchFamily="18" charset="0"/>
+                              </a:rPr>
+                              <m:t>𝜋</m:t>
+                            </m:r>
+                          </m:sub>
+                        </m:sSub>
+                        <m:d>
+                          <m:dPr>
+                            <m:ctrlPr>
+                              <a:rPr lang="en-US" i="1">
+                                <a:latin typeface="Cambria Math" panose="02040503050406030204" pitchFamily="18" charset="0"/>
+                                <a:ea typeface="Cambria Math" panose="02040503050406030204" pitchFamily="18" charset="0"/>
+                              </a:rPr>
+                            </m:ctrlPr>
+                          </m:dPr>
+                          <m:e>
+                            <m:r>
+                              <a:rPr lang="en-US" i="1">
+                                <a:latin typeface="Cambria Math" panose="02040503050406030204" pitchFamily="18" charset="0"/>
+                              </a:rPr>
+                              <m:t>𝑠</m:t>
+                            </m:r>
+                          </m:e>
+                        </m:d>
+                        <m:r>
+                          <a:rPr lang="en-US" b="0" i="0" smtClean="0">
+                            <a:latin typeface="Cambria Math" panose="02040503050406030204" pitchFamily="18" charset="0"/>
+                            <a:ea typeface="Cambria Math" panose="02040503050406030204" pitchFamily="18" charset="0"/>
+                          </a:rPr>
+                          <m:t>−</m:t>
+                        </m:r>
+                        <m:sSub>
+                          <m:sSubPr>
+                            <m:ctrlPr>
+                              <a:rPr lang="en-US" b="0" i="1" smtClean="0">
+                                <a:latin typeface="Cambria Math" panose="02040503050406030204" pitchFamily="18" charset="0"/>
+                                <a:ea typeface="Cambria Math" panose="02040503050406030204" pitchFamily="18" charset="0"/>
+                              </a:rPr>
+                            </m:ctrlPr>
+                          </m:sSubPr>
+                          <m:e>
+                            <m:r>
+                              <a:rPr lang="en-US" b="0" i="1" smtClean="0">
+                                <a:latin typeface="Cambria Math" panose="02040503050406030204" pitchFamily="18" charset="0"/>
+                                <a:ea typeface="Cambria Math" panose="02040503050406030204" pitchFamily="18" charset="0"/>
+                              </a:rPr>
+                              <m:t>𝑣</m:t>
+                            </m:r>
+                          </m:e>
+                          <m:sub>
+                            <m:r>
+                              <a:rPr lang="en-US" b="0" i="1" smtClean="0">
+                                <a:latin typeface="Cambria Math" panose="02040503050406030204" pitchFamily="18" charset="0"/>
+                                <a:ea typeface="Cambria Math" panose="02040503050406030204" pitchFamily="18" charset="0"/>
+                              </a:rPr>
+                              <m:t>𝜋</m:t>
+                            </m:r>
+                          </m:sub>
+                        </m:sSub>
+                        <m:d>
+                          <m:dPr>
+                            <m:ctrlPr>
+                              <a:rPr lang="en-US" b="0" i="1" smtClean="0">
+                                <a:latin typeface="Cambria Math" panose="02040503050406030204" pitchFamily="18" charset="0"/>
+                                <a:ea typeface="Cambria Math" panose="02040503050406030204" pitchFamily="18" charset="0"/>
+                              </a:rPr>
+                            </m:ctrlPr>
+                          </m:dPr>
+                          <m:e>
+                            <m:r>
+                              <m:rPr>
+                                <m:sty m:val="p"/>
+                              </m:rPr>
+                              <a:rPr lang="en-US" b="0" i="0" smtClean="0">
+                                <a:latin typeface="Cambria Math" panose="02040503050406030204" pitchFamily="18" charset="0"/>
+                                <a:ea typeface="Cambria Math" panose="02040503050406030204" pitchFamily="18" charset="0"/>
+                              </a:rPr>
+                              <m:t>s</m:t>
+                            </m:r>
+                          </m:e>
+                        </m:d>
+                      </m:e>
+                    </m:d>
+                    <m:r>
+                      <a:rPr lang="en-US" b="0" i="0" smtClean="0">
+                        <a:latin typeface="Cambria Math" panose="02040503050406030204" pitchFamily="18" charset="0"/>
+                        <a:ea typeface="Cambria Math" panose="02040503050406030204" pitchFamily="18" charset="0"/>
+                      </a:rPr>
+                      <m:t>=</m:t>
+                    </m:r>
+                    <m:sSub>
+                      <m:sSubPr>
+                        <m:ctrlPr>
+                          <a:rPr lang="en-US" i="1">
+                            <a:latin typeface="Cambria Math" panose="02040503050406030204" pitchFamily="18" charset="0"/>
+                            <a:ea typeface="Cambria Math" panose="02040503050406030204" pitchFamily="18" charset="0"/>
+                          </a:rPr>
+                        </m:ctrlPr>
+                      </m:sSubPr>
+                      <m:e>
+                        <m:r>
+                          <a:rPr lang="en-US" i="1">
+                            <a:latin typeface="Cambria Math" panose="02040503050406030204" pitchFamily="18" charset="0"/>
+                            <a:ea typeface="Cambria Math" panose="02040503050406030204" pitchFamily="18" charset="0"/>
+                          </a:rPr>
+                          <m:t>𝔼</m:t>
+                        </m:r>
+                      </m:e>
+                      <m:sub>
+                        <m:r>
+                          <a:rPr lang="en-US" i="1">
+                            <a:latin typeface="Cambria Math" panose="02040503050406030204" pitchFamily="18" charset="0"/>
+                            <a:ea typeface="Cambria Math" panose="02040503050406030204" pitchFamily="18" charset="0"/>
+                          </a:rPr>
+                          <m:t>𝐷</m:t>
+                        </m:r>
+                      </m:sub>
+                    </m:sSub>
+                    <m:d>
+                      <m:dPr>
+                        <m:begChr m:val="["/>
+                        <m:endChr m:val="]"/>
+                        <m:ctrlPr>
+                          <a:rPr lang="en-US" i="1" smtClean="0">
+                            <a:latin typeface="Cambria Math" panose="02040503050406030204" pitchFamily="18" charset="0"/>
+                            <a:ea typeface="Cambria Math" panose="02040503050406030204" pitchFamily="18" charset="0"/>
+                          </a:rPr>
+                        </m:ctrlPr>
+                      </m:dPr>
+                      <m:e>
+                        <m:sSub>
+                          <m:sSubPr>
+                            <m:ctrlPr>
+                              <a:rPr lang="en-US" b="0" i="1" smtClean="0">
+                                <a:latin typeface="Cambria Math" panose="02040503050406030204" pitchFamily="18" charset="0"/>
+                                <a:ea typeface="Cambria Math" panose="02040503050406030204" pitchFamily="18" charset="0"/>
+                              </a:rPr>
+                            </m:ctrlPr>
+                          </m:sSubPr>
+                          <m:e>
+                            <m:acc>
+                              <m:accPr>
+                                <m:chr m:val="̂"/>
+                                <m:ctrlPr>
+                                  <a:rPr lang="en-US" i="1">
+                                    <a:latin typeface="Cambria Math" panose="02040503050406030204" pitchFamily="18" charset="0"/>
+                                    <a:ea typeface="Cambria Math" panose="02040503050406030204" pitchFamily="18" charset="0"/>
+                                  </a:rPr>
+                                </m:ctrlPr>
+                              </m:accPr>
+                              <m:e>
+                                <m:r>
+                                  <a:rPr lang="en-US" i="1">
+                                    <a:latin typeface="Cambria Math" panose="02040503050406030204" pitchFamily="18" charset="0"/>
+                                    <a:ea typeface="Cambria Math" panose="02040503050406030204" pitchFamily="18" charset="0"/>
+                                  </a:rPr>
+                                  <m:t>𝑣</m:t>
+                                </m:r>
+                              </m:e>
+                            </m:acc>
+                          </m:e>
+                          <m:sub>
+                            <m:r>
+                              <a:rPr lang="en-US" b="0" i="1" smtClean="0">
+                                <a:latin typeface="Cambria Math" panose="02040503050406030204" pitchFamily="18" charset="0"/>
+                                <a:ea typeface="Cambria Math" panose="02040503050406030204" pitchFamily="18" charset="0"/>
+                              </a:rPr>
+                              <m:t>𝜋</m:t>
+                            </m:r>
+                          </m:sub>
+                        </m:sSub>
+                        <m:d>
+                          <m:dPr>
+                            <m:ctrlPr>
+                              <a:rPr lang="en-US" i="1">
+                                <a:latin typeface="Cambria Math" panose="02040503050406030204" pitchFamily="18" charset="0"/>
+                                <a:ea typeface="Cambria Math" panose="02040503050406030204" pitchFamily="18" charset="0"/>
+                              </a:rPr>
+                            </m:ctrlPr>
+                          </m:dPr>
+                          <m:e>
+                            <m:r>
+                              <a:rPr lang="en-US" i="1">
+                                <a:latin typeface="Cambria Math" panose="02040503050406030204" pitchFamily="18" charset="0"/>
+                              </a:rPr>
+                              <m:t>𝑠</m:t>
+                            </m:r>
+                          </m:e>
+                        </m:d>
+                      </m:e>
+                    </m:d>
+                    <m:r>
+                      <a:rPr lang="en-US" b="0" i="1" smtClean="0">
+                        <a:latin typeface="Cambria Math" panose="02040503050406030204" pitchFamily="18" charset="0"/>
+                      </a:rPr>
+                      <m:t>−</m:t>
+                    </m:r>
+                    <m:sSub>
+                      <m:sSubPr>
+                        <m:ctrlPr>
+                          <a:rPr lang="en-US" i="1">
+                            <a:latin typeface="Cambria Math" panose="02040503050406030204" pitchFamily="18" charset="0"/>
+                            <a:ea typeface="Cambria Math" panose="02040503050406030204" pitchFamily="18" charset="0"/>
+                          </a:rPr>
+                        </m:ctrlPr>
+                      </m:sSubPr>
+                      <m:e>
+                        <m:r>
+                          <a:rPr lang="en-US" i="1">
+                            <a:latin typeface="Cambria Math" panose="02040503050406030204" pitchFamily="18" charset="0"/>
+                            <a:ea typeface="Cambria Math" panose="02040503050406030204" pitchFamily="18" charset="0"/>
+                          </a:rPr>
+                          <m:t>𝑣</m:t>
+                        </m:r>
+                      </m:e>
+                      <m:sub>
+                        <m:r>
+                          <a:rPr lang="en-US" i="1">
+                            <a:latin typeface="Cambria Math" panose="02040503050406030204" pitchFamily="18" charset="0"/>
+                            <a:ea typeface="Cambria Math" panose="02040503050406030204" pitchFamily="18" charset="0"/>
+                          </a:rPr>
+                          <m:t>𝜋</m:t>
+                        </m:r>
+                      </m:sub>
+                    </m:sSub>
+                    <m:r>
+                      <a:rPr lang="en-US">
+                        <a:latin typeface="Cambria Math" panose="02040503050406030204" pitchFamily="18" charset="0"/>
+                        <a:ea typeface="Cambria Math" panose="02040503050406030204" pitchFamily="18" charset="0"/>
+                      </a:rPr>
+                      <m:t>(</m:t>
+                    </m:r>
+                    <m:r>
+                      <m:rPr>
+                        <m:sty m:val="p"/>
+                      </m:rPr>
+                      <a:rPr lang="en-US">
+                        <a:latin typeface="Cambria Math" panose="02040503050406030204" pitchFamily="18" charset="0"/>
+                        <a:ea typeface="Cambria Math" panose="02040503050406030204" pitchFamily="18" charset="0"/>
+                      </a:rPr>
+                      <m:t>s</m:t>
+                    </m:r>
+                    <m:r>
+                      <a:rPr lang="en-US">
+                        <a:latin typeface="Cambria Math" panose="02040503050406030204" pitchFamily="18" charset="0"/>
+                        <a:ea typeface="Cambria Math" panose="02040503050406030204" pitchFamily="18" charset="0"/>
+                      </a:rPr>
+                      <m:t>)</m:t>
+                    </m:r>
+                  </m:oMath>
+                </a14:m>
+                <a:endParaRPr lang="en-US" dirty="0"/>
+              </a:p>
+              <a:p>
+                <a:endParaRPr lang="en-US" dirty="0"/>
+              </a:p>
+              <a:p>
+                <a:r>
+                  <a:rPr lang="en-US" b="1" dirty="0"/>
+                  <a:t>Variance</a:t>
+                </a:r>
+                <a:r>
+                  <a:rPr lang="en-US" dirty="0"/>
+                  <a:t>: How much do predictions fluctuate?</a:t>
+                </a:r>
+                <a:br>
+                  <a:rPr lang="en-US" dirty="0"/>
+                </a:br>
+                <a:br>
+                  <a:rPr lang="en-US" dirty="0"/>
+                </a:br>
+                <a14:m>
+                  <m:oMath xmlns:m="http://schemas.openxmlformats.org/officeDocument/2006/math">
+                    <m:sSub>
+                      <m:sSubPr>
+                        <m:ctrlPr>
+                          <a:rPr lang="en-US" b="0" i="1" smtClean="0">
+                            <a:latin typeface="Cambria Math" panose="02040503050406030204" pitchFamily="18" charset="0"/>
+                          </a:rPr>
+                        </m:ctrlPr>
+                      </m:sSubPr>
+                      <m:e>
+                        <m:r>
+                          <m:rPr>
+                            <m:sty m:val="p"/>
+                          </m:rPr>
+                          <a:rPr lang="en-US" b="0" i="0" smtClean="0">
+                            <a:latin typeface="Cambria Math" panose="02040503050406030204" pitchFamily="18" charset="0"/>
+                          </a:rPr>
+                          <m:t>Var</m:t>
+                        </m:r>
+                      </m:e>
+                      <m:sub>
+                        <m:r>
+                          <a:rPr lang="en-US" b="0" i="1" smtClean="0">
+                            <a:latin typeface="Cambria Math" panose="02040503050406030204" pitchFamily="18" charset="0"/>
+                          </a:rPr>
+                          <m:t>𝐷</m:t>
+                        </m:r>
+                      </m:sub>
+                    </m:sSub>
+                    <m:d>
+                      <m:dPr>
+                        <m:begChr m:val="["/>
+                        <m:endChr m:val="]"/>
+                        <m:ctrlPr>
+                          <a:rPr lang="en-US" i="1">
+                            <a:latin typeface="Cambria Math" panose="02040503050406030204" pitchFamily="18" charset="0"/>
+                          </a:rPr>
+                        </m:ctrlPr>
+                      </m:dPr>
+                      <m:e>
+                        <m:sSub>
+                          <m:sSubPr>
+                            <m:ctrlPr>
+                              <a:rPr lang="en-US" b="0" i="1" smtClean="0">
+                                <a:latin typeface="Cambria Math" panose="02040503050406030204" pitchFamily="18" charset="0"/>
+                                <a:ea typeface="Cambria Math" panose="02040503050406030204" pitchFamily="18" charset="0"/>
+                              </a:rPr>
+                            </m:ctrlPr>
+                          </m:sSubPr>
+                          <m:e>
+                            <m:acc>
+                              <m:accPr>
+                                <m:chr m:val="̂"/>
+                                <m:ctrlPr>
+                                  <a:rPr lang="en-US" i="1">
+                                    <a:latin typeface="Cambria Math" panose="02040503050406030204" pitchFamily="18" charset="0"/>
+                                    <a:ea typeface="Cambria Math" panose="02040503050406030204" pitchFamily="18" charset="0"/>
+                                  </a:rPr>
+                                </m:ctrlPr>
+                              </m:accPr>
+                              <m:e>
+                                <m:r>
+                                  <a:rPr lang="en-US" i="1">
+                                    <a:latin typeface="Cambria Math" panose="02040503050406030204" pitchFamily="18" charset="0"/>
+                                    <a:ea typeface="Cambria Math" panose="02040503050406030204" pitchFamily="18" charset="0"/>
+                                  </a:rPr>
+                                  <m:t>𝑣</m:t>
+                                </m:r>
+                              </m:e>
+                            </m:acc>
+                          </m:e>
+                          <m:sub>
+                            <m:r>
+                              <a:rPr lang="en-US" b="0" i="1" smtClean="0">
+                                <a:latin typeface="Cambria Math" panose="02040503050406030204" pitchFamily="18" charset="0"/>
+                                <a:ea typeface="Cambria Math" panose="02040503050406030204" pitchFamily="18" charset="0"/>
+                              </a:rPr>
+                              <m:t>𝜋</m:t>
+                            </m:r>
+                          </m:sub>
+                        </m:sSub>
+                        <m:d>
+                          <m:dPr>
+                            <m:ctrlPr>
+                              <a:rPr lang="en-US" i="1">
+                                <a:latin typeface="Cambria Math" panose="02040503050406030204" pitchFamily="18" charset="0"/>
+                                <a:ea typeface="Cambria Math" panose="02040503050406030204" pitchFamily="18" charset="0"/>
+                              </a:rPr>
+                            </m:ctrlPr>
+                          </m:dPr>
+                          <m:e>
+                            <m:r>
+                              <a:rPr lang="en-US" i="1">
+                                <a:latin typeface="Cambria Math" panose="02040503050406030204" pitchFamily="18" charset="0"/>
+                              </a:rPr>
+                              <m:t>𝑠</m:t>
+                            </m:r>
+                          </m:e>
+                        </m:d>
+                      </m:e>
+                    </m:d>
+                    <m:r>
+                      <a:rPr lang="en-US" b="0" i="1" smtClean="0">
+                        <a:latin typeface="Cambria Math" panose="02040503050406030204" pitchFamily="18" charset="0"/>
+                      </a:rPr>
+                      <m:t>=</m:t>
+                    </m:r>
+                    <m:sSub>
+                      <m:sSubPr>
+                        <m:ctrlPr>
+                          <a:rPr lang="en-US" b="0" i="1" smtClean="0">
+                            <a:latin typeface="Cambria Math" panose="02040503050406030204" pitchFamily="18" charset="0"/>
+                            <a:ea typeface="Cambria Math" panose="02040503050406030204" pitchFamily="18" charset="0"/>
+                          </a:rPr>
+                        </m:ctrlPr>
+                      </m:sSubPr>
+                      <m:e>
+                        <m:r>
+                          <a:rPr lang="en-US" i="1">
+                            <a:latin typeface="Cambria Math" panose="02040503050406030204" pitchFamily="18" charset="0"/>
+                            <a:ea typeface="Cambria Math" panose="02040503050406030204" pitchFamily="18" charset="0"/>
+                          </a:rPr>
+                          <m:t>𝔼</m:t>
+                        </m:r>
+                      </m:e>
+                      <m:sub>
+                        <m:r>
+                          <a:rPr lang="en-US" b="0" i="1" smtClean="0">
+                            <a:latin typeface="Cambria Math" panose="02040503050406030204" pitchFamily="18" charset="0"/>
+                            <a:ea typeface="Cambria Math" panose="02040503050406030204" pitchFamily="18" charset="0"/>
+                          </a:rPr>
+                          <m:t>𝐷</m:t>
+                        </m:r>
+                      </m:sub>
+                    </m:sSub>
+                    <m:d>
+                      <m:dPr>
+                        <m:begChr m:val="["/>
+                        <m:endChr m:val="]"/>
+                        <m:ctrlPr>
+                          <a:rPr lang="en-US" i="1" smtClean="0">
+                            <a:latin typeface="Cambria Math" panose="02040503050406030204" pitchFamily="18" charset="0"/>
+                            <a:ea typeface="Cambria Math" panose="02040503050406030204" pitchFamily="18" charset="0"/>
+                          </a:rPr>
+                        </m:ctrlPr>
+                      </m:dPr>
+                      <m:e>
+                        <m:sSup>
+                          <m:sSupPr>
+                            <m:ctrlPr>
+                              <a:rPr lang="en-US" i="1">
+                                <a:latin typeface="Cambria Math" panose="02040503050406030204" pitchFamily="18" charset="0"/>
+                                <a:ea typeface="Cambria Math" panose="02040503050406030204" pitchFamily="18" charset="0"/>
+                              </a:rPr>
+                            </m:ctrlPr>
+                          </m:sSupPr>
+                          <m:e>
+                            <m:d>
+                              <m:dPr>
+                                <m:ctrlPr>
+                                  <a:rPr lang="en-US" i="1">
+                                    <a:latin typeface="Cambria Math" panose="02040503050406030204" pitchFamily="18" charset="0"/>
+                                    <a:ea typeface="Cambria Math" panose="02040503050406030204" pitchFamily="18" charset="0"/>
+                                  </a:rPr>
+                                </m:ctrlPr>
+                              </m:dPr>
+                              <m:e>
+                                <m:sSub>
+                                  <m:sSubPr>
+                                    <m:ctrlPr>
+                                      <a:rPr lang="en-US" i="1">
+                                        <a:latin typeface="Cambria Math" panose="02040503050406030204" pitchFamily="18" charset="0"/>
+                                        <a:ea typeface="Cambria Math" panose="02040503050406030204" pitchFamily="18" charset="0"/>
+                                      </a:rPr>
+                                    </m:ctrlPr>
+                                  </m:sSubPr>
+                                  <m:e>
+                                    <m:r>
+                                      <a:rPr lang="en-US" i="1">
+                                        <a:latin typeface="Cambria Math" panose="02040503050406030204" pitchFamily="18" charset="0"/>
+                                        <a:ea typeface="Cambria Math" panose="02040503050406030204" pitchFamily="18" charset="0"/>
+                                      </a:rPr>
+                                      <m:t>𝔼</m:t>
+                                    </m:r>
+                                  </m:e>
+                                  <m:sub>
+                                    <m:r>
+                                      <a:rPr lang="en-US" b="0" i="1" smtClean="0">
+                                        <a:latin typeface="Cambria Math" panose="02040503050406030204" pitchFamily="18" charset="0"/>
+                                        <a:ea typeface="Cambria Math" panose="02040503050406030204" pitchFamily="18" charset="0"/>
+                                      </a:rPr>
+                                      <m:t>𝐷</m:t>
+                                    </m:r>
+                                  </m:sub>
+                                </m:sSub>
+                                <m:d>
+                                  <m:dPr>
+                                    <m:begChr m:val="["/>
+                                    <m:endChr m:val="]"/>
+                                    <m:ctrlPr>
+                                      <a:rPr lang="en-US" i="1">
+                                        <a:latin typeface="Cambria Math" panose="02040503050406030204" pitchFamily="18" charset="0"/>
+                                        <a:ea typeface="Cambria Math" panose="02040503050406030204" pitchFamily="18" charset="0"/>
+                                      </a:rPr>
+                                    </m:ctrlPr>
+                                  </m:dPr>
+                                  <m:e>
+                                    <m:sSub>
+                                      <m:sSubPr>
+                                        <m:ctrlPr>
+                                          <a:rPr lang="en-US" b="0" i="1" smtClean="0">
+                                            <a:latin typeface="Cambria Math" panose="02040503050406030204" pitchFamily="18" charset="0"/>
+                                            <a:ea typeface="Cambria Math" panose="02040503050406030204" pitchFamily="18" charset="0"/>
+                                          </a:rPr>
+                                        </m:ctrlPr>
+                                      </m:sSubPr>
+                                      <m:e>
+                                        <m:acc>
+                                          <m:accPr>
+                                            <m:chr m:val="̂"/>
+                                            <m:ctrlPr>
+                                              <a:rPr lang="en-US" i="1">
+                                                <a:latin typeface="Cambria Math" panose="02040503050406030204" pitchFamily="18" charset="0"/>
+                                                <a:ea typeface="Cambria Math" panose="02040503050406030204" pitchFamily="18" charset="0"/>
+                                              </a:rPr>
+                                            </m:ctrlPr>
+                                          </m:accPr>
+                                          <m:e>
+                                            <m:r>
+                                              <a:rPr lang="en-US" i="1">
+                                                <a:latin typeface="Cambria Math" panose="02040503050406030204" pitchFamily="18" charset="0"/>
+                                                <a:ea typeface="Cambria Math" panose="02040503050406030204" pitchFamily="18" charset="0"/>
+                                              </a:rPr>
+                                              <m:t>𝑣</m:t>
+                                            </m:r>
+                                          </m:e>
+                                        </m:acc>
+                                      </m:e>
+                                      <m:sub>
+                                        <m:r>
+                                          <a:rPr lang="en-US" b="0" i="1" smtClean="0">
+                                            <a:latin typeface="Cambria Math" panose="02040503050406030204" pitchFamily="18" charset="0"/>
+                                            <a:ea typeface="Cambria Math" panose="02040503050406030204" pitchFamily="18" charset="0"/>
+                                          </a:rPr>
+                                          <m:t>𝜋</m:t>
+                                        </m:r>
+                                      </m:sub>
+                                    </m:sSub>
+                                    <m:d>
+                                      <m:dPr>
+                                        <m:ctrlPr>
+                                          <a:rPr lang="en-US" i="1">
+                                            <a:latin typeface="Cambria Math" panose="02040503050406030204" pitchFamily="18" charset="0"/>
+                                            <a:ea typeface="Cambria Math" panose="02040503050406030204" pitchFamily="18" charset="0"/>
+                                          </a:rPr>
+                                        </m:ctrlPr>
+                                      </m:dPr>
+                                      <m:e>
+                                        <m:r>
+                                          <a:rPr lang="en-US" i="1">
+                                            <a:latin typeface="Cambria Math" panose="02040503050406030204" pitchFamily="18" charset="0"/>
+                                          </a:rPr>
+                                          <m:t>𝑠</m:t>
+                                        </m:r>
+                                      </m:e>
+                                    </m:d>
+                                  </m:e>
+                                </m:d>
+                                <m:r>
+                                  <a:rPr lang="en-US" b="0" i="1" smtClean="0">
+                                    <a:latin typeface="Cambria Math" panose="02040503050406030204" pitchFamily="18" charset="0"/>
+                                    <a:ea typeface="Cambria Math" panose="02040503050406030204" pitchFamily="18" charset="0"/>
+                                  </a:rPr>
+                                  <m:t>−</m:t>
+                                </m:r>
+                                <m:sSub>
+                                  <m:sSubPr>
+                                    <m:ctrlPr>
+                                      <a:rPr lang="en-US" b="0" i="1" smtClean="0">
+                                        <a:latin typeface="Cambria Math" panose="02040503050406030204" pitchFamily="18" charset="0"/>
+                                        <a:ea typeface="Cambria Math" panose="02040503050406030204" pitchFamily="18" charset="0"/>
+                                      </a:rPr>
+                                    </m:ctrlPr>
+                                  </m:sSubPr>
+                                  <m:e>
+                                    <m:acc>
+                                      <m:accPr>
+                                        <m:chr m:val="̂"/>
+                                        <m:ctrlPr>
+                                          <a:rPr lang="en-US" i="1">
+                                            <a:latin typeface="Cambria Math" panose="02040503050406030204" pitchFamily="18" charset="0"/>
+                                            <a:ea typeface="Cambria Math" panose="02040503050406030204" pitchFamily="18" charset="0"/>
+                                          </a:rPr>
+                                        </m:ctrlPr>
+                                      </m:accPr>
+                                      <m:e>
+                                        <m:r>
+                                          <a:rPr lang="en-US" i="1">
+                                            <a:latin typeface="Cambria Math" panose="02040503050406030204" pitchFamily="18" charset="0"/>
+                                            <a:ea typeface="Cambria Math" panose="02040503050406030204" pitchFamily="18" charset="0"/>
+                                          </a:rPr>
+                                          <m:t>𝑣</m:t>
+                                        </m:r>
+                                      </m:e>
+                                    </m:acc>
+                                  </m:e>
+                                  <m:sub>
+                                    <m:r>
+                                      <a:rPr lang="en-US" b="0" i="1" smtClean="0">
+                                        <a:latin typeface="Cambria Math" panose="02040503050406030204" pitchFamily="18" charset="0"/>
+                                        <a:ea typeface="Cambria Math" panose="02040503050406030204" pitchFamily="18" charset="0"/>
+                                      </a:rPr>
+                                      <m:t>𝜋</m:t>
+                                    </m:r>
+                                  </m:sub>
+                                </m:sSub>
+                                <m:d>
+                                  <m:dPr>
+                                    <m:ctrlPr>
+                                      <a:rPr lang="en-US" i="1">
+                                        <a:latin typeface="Cambria Math" panose="02040503050406030204" pitchFamily="18" charset="0"/>
+                                        <a:ea typeface="Cambria Math" panose="02040503050406030204" pitchFamily="18" charset="0"/>
+                                      </a:rPr>
+                                    </m:ctrlPr>
+                                  </m:dPr>
+                                  <m:e>
+                                    <m:r>
+                                      <a:rPr lang="en-US" i="1">
+                                        <a:latin typeface="Cambria Math" panose="02040503050406030204" pitchFamily="18" charset="0"/>
+                                      </a:rPr>
+                                      <m:t>𝑠</m:t>
+                                    </m:r>
+                                  </m:e>
+                                </m:d>
+                              </m:e>
+                            </m:d>
+                          </m:e>
+                          <m:sup>
+                            <m:r>
+                              <a:rPr lang="en-US" i="1">
+                                <a:latin typeface="Cambria Math" panose="02040503050406030204" pitchFamily="18" charset="0"/>
+                                <a:ea typeface="Cambria Math" panose="02040503050406030204" pitchFamily="18" charset="0"/>
+                              </a:rPr>
+                              <m:t>2</m:t>
+                            </m:r>
+                          </m:sup>
+                        </m:sSup>
+                      </m:e>
+                    </m:d>
+                  </m:oMath>
+                </a14:m>
+                <a:endParaRPr lang="en-US" dirty="0"/>
+              </a:p>
+              <a:p>
+                <a:endParaRPr lang="en-US" dirty="0"/>
+              </a:p>
+              <a:p>
+                <a:r>
+                  <a:rPr lang="en-US" b="1" dirty="0"/>
+                  <a:t>Total error (means-squared error)</a:t>
+                </a:r>
+                <a:r>
+                  <a:rPr lang="en-US" dirty="0"/>
+                  <a:t>:      </a:t>
+                </a:r>
+                <a14:m>
+                  <m:oMath xmlns:m="http://schemas.openxmlformats.org/officeDocument/2006/math">
+                    <m:r>
+                      <m:rPr>
+                        <m:nor/>
+                      </m:rPr>
+                      <a:rPr lang="en-US" i="0" dirty="0" smtClean="0">
+                        <a:latin typeface="Cambria Math" panose="02040503050406030204" pitchFamily="18" charset="0"/>
+                      </a:rPr>
+                      <m:t>Total</m:t>
+                    </m:r>
+                    <m:r>
+                      <m:rPr>
+                        <m:nor/>
+                      </m:rPr>
+                      <a:rPr lang="en-US" i="0" dirty="0" smtClean="0">
+                        <a:latin typeface="Cambria Math" panose="02040503050406030204" pitchFamily="18" charset="0"/>
+                      </a:rPr>
+                      <m:t> </m:t>
+                    </m:r>
+                    <m:r>
+                      <m:rPr>
+                        <m:nor/>
+                      </m:rPr>
+                      <a:rPr lang="en-US" b="0" i="0" dirty="0" smtClean="0">
+                        <a:latin typeface="Cambria Math" panose="02040503050406030204" pitchFamily="18" charset="0"/>
+                      </a:rPr>
+                      <m:t>E</m:t>
+                    </m:r>
+                    <m:r>
+                      <m:rPr>
+                        <m:nor/>
+                      </m:rPr>
+                      <a:rPr lang="en-US" i="0" dirty="0" smtClean="0">
+                        <a:latin typeface="Cambria Math" panose="02040503050406030204" pitchFamily="18" charset="0"/>
+                      </a:rPr>
+                      <m:t>rror</m:t>
+                    </m:r>
+                    <m:r>
+                      <m:rPr>
+                        <m:nor/>
+                      </m:rPr>
+                      <a:rPr lang="en-US" i="0" dirty="0" smtClean="0">
+                        <a:latin typeface="Cambria Math" panose="02040503050406030204" pitchFamily="18" charset="0"/>
+                      </a:rPr>
+                      <m:t> </m:t>
+                    </m:r>
+                    <m:r>
+                      <a:rPr lang="en-US" i="1" dirty="0" smtClean="0">
+                        <a:latin typeface="Cambria Math" panose="02040503050406030204" pitchFamily="18" charset="0"/>
+                      </a:rPr>
+                      <m:t>= </m:t>
+                    </m:r>
+                    <m:r>
+                      <m:rPr>
+                        <m:nor/>
+                      </m:rPr>
+                      <a:rPr lang="en-US" b="0" i="0" dirty="0" smtClean="0">
+                        <a:latin typeface="Cambria Math" panose="02040503050406030204" pitchFamily="18" charset="0"/>
+                      </a:rPr>
+                      <m:t>B</m:t>
+                    </m:r>
+                    <m:r>
+                      <m:rPr>
+                        <m:nor/>
+                      </m:rPr>
+                      <a:rPr lang="en-US" i="0" dirty="0" smtClean="0">
+                        <a:latin typeface="Cambria Math" panose="02040503050406030204" pitchFamily="18" charset="0"/>
+                      </a:rPr>
+                      <m:t>ia</m:t>
+                    </m:r>
+                    <m:sSup>
+                      <m:sSupPr>
+                        <m:ctrlPr>
+                          <a:rPr lang="en-US" i="1" dirty="0" smtClean="0">
+                            <a:latin typeface="Cambria Math" panose="02040503050406030204" pitchFamily="18" charset="0"/>
+                          </a:rPr>
+                        </m:ctrlPr>
+                      </m:sSupPr>
+                      <m:e>
+                        <m:r>
+                          <m:rPr>
+                            <m:nor/>
+                          </m:rPr>
+                          <a:rPr lang="en-US" i="0" dirty="0" smtClean="0">
+                            <a:latin typeface="Cambria Math" panose="02040503050406030204" pitchFamily="18" charset="0"/>
+                          </a:rPr>
+                          <m:t>s</m:t>
+                        </m:r>
+                      </m:e>
+                      <m:sup>
+                        <m:r>
+                          <m:rPr>
+                            <m:nor/>
+                          </m:rPr>
+                          <a:rPr lang="en-US" i="0" dirty="0" smtClean="0">
+                            <a:latin typeface="Cambria Math" panose="02040503050406030204" pitchFamily="18" charset="0"/>
+                          </a:rPr>
+                          <m:t>2</m:t>
+                        </m:r>
+                      </m:sup>
+                    </m:sSup>
+                    <m:r>
+                      <m:rPr>
+                        <m:nor/>
+                      </m:rPr>
+                      <a:rPr lang="en-US" i="0" dirty="0" smtClean="0">
+                        <a:latin typeface="Cambria Math" panose="02040503050406030204" pitchFamily="18" charset="0"/>
+                      </a:rPr>
+                      <m:t> </m:t>
+                    </m:r>
+                    <m:r>
+                      <a:rPr lang="en-US" i="1" dirty="0" smtClean="0">
+                        <a:latin typeface="Cambria Math" panose="02040503050406030204" pitchFamily="18" charset="0"/>
+                      </a:rPr>
+                      <m:t>+ </m:t>
+                    </m:r>
+                    <m:r>
+                      <m:rPr>
+                        <m:nor/>
+                      </m:rPr>
+                      <a:rPr lang="en-US" b="0" i="0" dirty="0" smtClean="0">
+                        <a:latin typeface="Cambria Math" panose="02040503050406030204" pitchFamily="18" charset="0"/>
+                      </a:rPr>
+                      <m:t>V</m:t>
+                    </m:r>
+                    <m:r>
+                      <m:rPr>
+                        <m:nor/>
+                      </m:rPr>
+                      <a:rPr lang="en-US" i="0" dirty="0" smtClean="0">
+                        <a:latin typeface="Cambria Math" panose="02040503050406030204" pitchFamily="18" charset="0"/>
+                      </a:rPr>
+                      <m:t>ar</m:t>
+                    </m:r>
+                    <m:r>
+                      <a:rPr lang="en-US" i="1" dirty="0" smtClean="0">
+                        <a:latin typeface="Cambria Math" panose="02040503050406030204" pitchFamily="18" charset="0"/>
+                      </a:rPr>
+                      <m:t> +</m:t>
+                    </m:r>
+                    <m:r>
+                      <m:rPr>
+                        <m:nor/>
+                      </m:rPr>
+                      <a:rPr lang="en-US" b="0" i="0" dirty="0" smtClean="0">
+                        <a:latin typeface="Cambria Math" panose="02040503050406030204" pitchFamily="18" charset="0"/>
+                      </a:rPr>
+                      <m:t>I</m:t>
+                    </m:r>
+                    <m:r>
+                      <m:rPr>
+                        <m:nor/>
+                      </m:rPr>
+                      <a:rPr lang="en-US" i="0" dirty="0" smtClean="0">
+                        <a:latin typeface="Cambria Math" panose="02040503050406030204" pitchFamily="18" charset="0"/>
+                      </a:rPr>
+                      <m:t>rreducible</m:t>
+                    </m:r>
+                    <m:r>
+                      <m:rPr>
+                        <m:nor/>
+                      </m:rPr>
+                      <a:rPr lang="en-US" i="0" dirty="0" smtClean="0">
+                        <a:latin typeface="Cambria Math" panose="02040503050406030204" pitchFamily="18" charset="0"/>
+                      </a:rPr>
+                      <m:t> </m:t>
+                    </m:r>
+                    <m:r>
+                      <m:rPr>
+                        <m:nor/>
+                      </m:rPr>
+                      <a:rPr lang="en-US" b="0" i="0" dirty="0" smtClean="0">
+                        <a:latin typeface="Cambria Math" panose="02040503050406030204" pitchFamily="18" charset="0"/>
+                      </a:rPr>
+                      <m:t>N</m:t>
+                    </m:r>
+                    <m:r>
+                      <m:rPr>
+                        <m:nor/>
+                      </m:rPr>
+                      <a:rPr lang="en-US" i="0" dirty="0" smtClean="0">
+                        <a:latin typeface="Cambria Math" panose="02040503050406030204" pitchFamily="18" charset="0"/>
+                      </a:rPr>
+                      <m:t>oise</m:t>
+                    </m:r>
+                  </m:oMath>
+                </a14:m>
+                <a:endParaRPr lang="en-US" dirty="0"/>
+              </a:p>
+            </p:txBody>
+          </p:sp>
+        </mc:Choice>
+        <mc:Fallback xmlns="">
+          <p:sp>
+            <p:nvSpPr>
+              <p:cNvPr id="3" name="Content Placeholder 2">
+                <a:extLst>
+                  <a:ext uri="{FF2B5EF4-FFF2-40B4-BE49-F238E27FC236}">
+                    <a16:creationId xmlns:a16="http://schemas.microsoft.com/office/drawing/2014/main" id="{F30E30F0-5B7A-2004-2D0B-63D151A5BE42}"/>
+                  </a:ext>
+                </a:extLst>
+              </p:cNvPr>
+              <p:cNvSpPr>
+                <a:spLocks noGrp="1" noRot="1" noChangeAspect="1" noMove="1" noResize="1" noEditPoints="1" noAdjustHandles="1" noChangeArrowheads="1" noChangeShapeType="1" noTextEdit="1"/>
+              </p:cNvSpPr>
+              <p:nvPr>
+                <p:ph idx="1"/>
+              </p:nvPr>
+            </p:nvSpPr>
+            <p:spPr>
+              <a:xfrm>
+                <a:off x="838200" y="1002818"/>
+                <a:ext cx="10515600" cy="3755299"/>
+              </a:xfrm>
+              <a:blipFill>
+                <a:blip r:embed="rId2"/>
+                <a:stretch>
+                  <a:fillRect l="-406" t="-812" b="-2110"/>
+                </a:stretch>
+              </a:blipFill>
+            </p:spPr>
+            <p:txBody>
+              <a:bodyPr/>
+              <a:lstStyle/>
+              <a:p>
+                <a:r>
+                  <a:rPr lang="en-US">
+                    <a:noFill/>
+                  </a:rPr>
+                  <a:t> </a:t>
+                </a:r>
+              </a:p>
+            </p:txBody>
+          </p:sp>
+        </mc:Fallback>
+      </mc:AlternateContent>
+      <mc:AlternateContent xmlns:mc="http://schemas.openxmlformats.org/markup-compatibility/2006" xmlns:a14="http://schemas.microsoft.com/office/drawing/2010/main">
+        <mc:Choice Requires="a14">
+          <p:graphicFrame>
+            <p:nvGraphicFramePr>
+              <p:cNvPr id="4" name="Table 3">
+                <a:extLst>
+                  <a:ext uri="{FF2B5EF4-FFF2-40B4-BE49-F238E27FC236}">
+                    <a16:creationId xmlns:a16="http://schemas.microsoft.com/office/drawing/2014/main" id="{312CB263-077E-07CB-B5DD-A047F28225DD}"/>
+                  </a:ext>
+                </a:extLst>
+              </p:cNvPr>
+              <p:cNvGraphicFramePr>
+                <a:graphicFrameLocks noGrp="1"/>
+              </p:cNvGraphicFramePr>
+              <p:nvPr>
+                <p:extLst>
+                  <p:ext uri="{D42A27DB-BD31-4B8C-83A1-F6EECF244321}">
+                    <p14:modId xmlns:p14="http://schemas.microsoft.com/office/powerpoint/2010/main" val="4043007359"/>
+                  </p:ext>
+                </p:extLst>
+              </p:nvPr>
+            </p:nvGraphicFramePr>
+            <p:xfrm>
+              <a:off x="938001" y="4962210"/>
+              <a:ext cx="9450597" cy="1620520"/>
+            </p:xfrm>
+            <a:graphic>
+              <a:graphicData uri="http://schemas.openxmlformats.org/drawingml/2006/table">
+                <a:tbl>
+                  <a:tblPr firstRow="1" bandRow="1">
+                    <a:tableStyleId>{5C22544A-7EE6-4342-B048-85BDC9FD1C3A}</a:tableStyleId>
+                  </a:tblPr>
+                  <a:tblGrid>
+                    <a:gridCol w="1245274">
+                      <a:extLst>
+                        <a:ext uri="{9D8B030D-6E8A-4147-A177-3AD203B41FA5}">
+                          <a16:colId xmlns:a16="http://schemas.microsoft.com/office/drawing/2014/main" val="585080336"/>
+                        </a:ext>
+                      </a:extLst>
+                    </a:gridCol>
+                    <a:gridCol w="4385884">
+                      <a:extLst>
+                        <a:ext uri="{9D8B030D-6E8A-4147-A177-3AD203B41FA5}">
+                          <a16:colId xmlns:a16="http://schemas.microsoft.com/office/drawing/2014/main" val="1752107938"/>
+                        </a:ext>
+                      </a:extLst>
+                    </a:gridCol>
+                    <a:gridCol w="3819439">
+                      <a:extLst>
+                        <a:ext uri="{9D8B030D-6E8A-4147-A177-3AD203B41FA5}">
+                          <a16:colId xmlns:a16="http://schemas.microsoft.com/office/drawing/2014/main" val="3538857757"/>
+                        </a:ext>
+                      </a:extLst>
+                    </a:gridCol>
+                  </a:tblGrid>
+                  <a:tr h="0">
+                    <a:tc>
+                      <a:txBody>
+                        <a:bodyPr/>
+                        <a:lstStyle/>
+                        <a:p>
+                          <a:r>
+                            <a:rPr lang="en-US" sz="1600" dirty="0"/>
+                            <a:t>Method</a:t>
+                          </a:r>
+                        </a:p>
+                      </a:txBody>
+                      <a:tcPr/>
+                    </a:tc>
+                    <a:tc>
+                      <a:txBody>
+                        <a:bodyPr/>
+                        <a:lstStyle/>
+                        <a:p>
+                          <a:r>
+                            <a:rPr lang="en-US" sz="1600" dirty="0"/>
+                            <a:t>Bias</a:t>
+                          </a:r>
+                        </a:p>
+                      </a:txBody>
+                      <a:tcPr/>
+                    </a:tc>
+                    <a:tc>
+                      <a:txBody>
+                        <a:bodyPr/>
+                        <a:lstStyle/>
+                        <a:p>
+                          <a:r>
+                            <a:rPr lang="en-US" sz="1600" dirty="0"/>
+                            <a:t>Variance</a:t>
+                          </a:r>
+                        </a:p>
+                      </a:txBody>
+                      <a:tcPr/>
+                    </a:tc>
+                    <a:extLst>
+                      <a:ext uri="{0D108BD9-81ED-4DB2-BD59-A6C34878D82A}">
+                        <a16:rowId xmlns:a16="http://schemas.microsoft.com/office/drawing/2014/main" val="4062016133"/>
+                      </a:ext>
+                    </a:extLst>
+                  </a:tr>
+                  <a:tr h="370840">
+                    <a:tc>
+                      <a:txBody>
+                        <a:bodyPr/>
+                        <a:lstStyle/>
+                        <a:p>
+                          <a:r>
+                            <a:rPr lang="en-US" sz="1600" dirty="0"/>
+                            <a:t>MC</a:t>
+                          </a:r>
+                        </a:p>
+                      </a:txBody>
+                      <a:tcPr/>
+                    </a:tc>
+                    <a:tc>
+                      <a:txBody>
+                        <a:bodyPr/>
+                        <a:lstStyle/>
+                        <a:p>
+                          <a:r>
+                            <a:rPr lang="en-US" sz="1600" dirty="0"/>
+                            <a:t>No bias (</a:t>
+                          </a:r>
+                          <a14:m>
+                            <m:oMath xmlns:m="http://schemas.openxmlformats.org/officeDocument/2006/math">
+                              <m:sSub>
+                                <m:sSubPr>
+                                  <m:ctrlPr>
+                                    <a:rPr lang="en-US" sz="1600" b="0" i="1" smtClean="0">
+                                      <a:latin typeface="Cambria Math" panose="02040503050406030204" pitchFamily="18" charset="0"/>
+                                    </a:rPr>
+                                  </m:ctrlPr>
+                                </m:sSubPr>
+                                <m:e>
+                                  <m:r>
+                                    <a:rPr lang="en-US" sz="1600" b="0" i="1" smtClean="0">
+                                      <a:latin typeface="Cambria Math" panose="02040503050406030204" pitchFamily="18" charset="0"/>
+                                    </a:rPr>
+                                    <m:t>𝐺</m:t>
+                                  </m:r>
+                                </m:e>
+                                <m:sub>
+                                  <m:r>
+                                    <a:rPr lang="en-US" sz="1600" b="0" i="1" smtClean="0">
+                                      <a:latin typeface="Cambria Math" panose="02040503050406030204" pitchFamily="18" charset="0"/>
+                                    </a:rPr>
+                                    <m:t>𝑡</m:t>
+                                  </m:r>
+                                </m:sub>
+                              </m:sSub>
+                            </m:oMath>
+                          </a14:m>
+                          <a:r>
+                            <a:rPr lang="en-US" sz="1600" dirty="0"/>
+                            <a:t> is</a:t>
+                          </a:r>
+                          <a:r>
+                            <a:rPr lang="en-US" sz="1600" baseline="0" dirty="0"/>
+                            <a:t> an unbiased sample</a:t>
+                          </a:r>
+                          <a:r>
+                            <a:rPr lang="en-US" sz="1600" dirty="0"/>
+                            <a:t>)</a:t>
+                          </a:r>
+                        </a:p>
+                      </a:txBody>
+                      <a:tcPr/>
+                    </a:tc>
+                    <a:tc>
+                      <a:txBody>
+                        <a:bodyPr/>
+                        <a:lstStyle/>
+                        <a:p>
+                          <a:r>
+                            <a:rPr lang="en-US" sz="1600" dirty="0"/>
+                            <a:t>High (between sample returns), falls with sample size.</a:t>
+                          </a:r>
+                        </a:p>
+                      </a:txBody>
+                      <a:tcPr/>
+                    </a:tc>
+                    <a:extLst>
+                      <a:ext uri="{0D108BD9-81ED-4DB2-BD59-A6C34878D82A}">
+                        <a16:rowId xmlns:a16="http://schemas.microsoft.com/office/drawing/2014/main" val="1308207269"/>
+                      </a:ext>
+                    </a:extLst>
+                  </a:tr>
+                  <a:tr h="370840">
+                    <a:tc>
+                      <a:txBody>
+                        <a:bodyPr/>
+                        <a:lstStyle/>
+                        <a:p>
+                          <a14:m>
+                            <m:oMath xmlns:m="http://schemas.openxmlformats.org/officeDocument/2006/math">
+                              <m:r>
+                                <a:rPr lang="en-US" sz="1600" i="1" dirty="0" smtClean="0">
+                                  <a:latin typeface="Cambria Math" panose="02040503050406030204" pitchFamily="18" charset="0"/>
+                                </a:rPr>
+                                <m:t>𝑛</m:t>
+                              </m:r>
+                            </m:oMath>
+                          </a14:m>
+                          <a:r>
+                            <a:rPr lang="en-US" sz="1600" dirty="0"/>
+                            <a:t>-step</a:t>
+                          </a:r>
+                        </a:p>
+                      </a:txBody>
+                      <a:tcPr/>
+                    </a:tc>
+                    <a:tc>
+                      <a:txBody>
+                        <a:bodyPr/>
+                        <a:lstStyle/>
+                        <a:p>
+                          <a:r>
+                            <a:rPr lang="en-US" sz="1600" dirty="0"/>
+                            <a:t>Increased bias</a:t>
+                          </a:r>
+                        </a:p>
+                      </a:txBody>
+                      <a:tcPr/>
+                    </a:tc>
+                    <a:tc>
+                      <a:txBody>
+                        <a:bodyPr/>
+                        <a:lstStyle/>
+                        <a:p>
+                          <a:r>
+                            <a:rPr lang="en-US" sz="1600" dirty="0"/>
+                            <a:t>Reduced</a:t>
+                          </a:r>
+                        </a:p>
+                      </a:txBody>
+                      <a:tcPr/>
+                    </a:tc>
+                    <a:extLst>
+                      <a:ext uri="{0D108BD9-81ED-4DB2-BD59-A6C34878D82A}">
+                        <a16:rowId xmlns:a16="http://schemas.microsoft.com/office/drawing/2014/main" val="4225300392"/>
+                      </a:ext>
+                    </a:extLst>
+                  </a:tr>
+                  <a:tr h="0">
+                    <a:tc>
+                      <a:txBody>
+                        <a:bodyPr/>
+                        <a:lstStyle/>
+                        <a:p>
+                          <a:r>
+                            <a:rPr lang="en-US" sz="1600" dirty="0"/>
+                            <a:t>TD</a:t>
+                          </a:r>
+                        </a:p>
+                      </a:txBody>
+                      <a:tcPr/>
+                    </a:tc>
+                    <a:tc>
+                      <a:txBody>
+                        <a:bodyPr/>
+                        <a:lstStyle/>
+                        <a:p>
+                          <a:r>
+                            <a:rPr lang="en-US" sz="1600" dirty="0"/>
+                            <a:t>High bias (</a:t>
+                          </a:r>
+                          <a14:m>
+                            <m:oMath xmlns:m="http://schemas.openxmlformats.org/officeDocument/2006/math">
+                              <m:sSub>
+                                <m:sSubPr>
+                                  <m:ctrlPr>
+                                    <a:rPr lang="en-US" sz="1600" b="0" i="1" smtClean="0">
+                                      <a:latin typeface="Cambria Math" panose="02040503050406030204" pitchFamily="18" charset="0"/>
+                                    </a:rPr>
+                                  </m:ctrlPr>
+                                </m:sSubPr>
+                                <m:e>
+                                  <m:r>
+                                    <a:rPr lang="en-US" sz="1600" b="0" i="1" smtClean="0">
+                                      <a:latin typeface="Cambria Math" panose="02040503050406030204" pitchFamily="18" charset="0"/>
+                                    </a:rPr>
+                                    <m:t>𝐺</m:t>
+                                  </m:r>
+                                </m:e>
+                                <m:sub>
+                                  <m:r>
+                                    <a:rPr lang="en-US" sz="1600" b="0" i="1" smtClean="0">
+                                      <a:latin typeface="Cambria Math" panose="02040503050406030204" pitchFamily="18" charset="0"/>
+                                    </a:rPr>
+                                    <m:t>𝑡</m:t>
+                                  </m:r>
+                                </m:sub>
+                              </m:sSub>
+                            </m:oMath>
+                          </a14:m>
+                          <a:r>
+                            <a:rPr lang="en-US" sz="1600" dirty="0"/>
+                            <a:t> is bootstrapped)</a:t>
+                          </a:r>
+                        </a:p>
+                      </a:txBody>
+                      <a:tcPr/>
+                    </a:tc>
+                    <a:tc>
+                      <a:txBody>
+                        <a:bodyPr/>
+                        <a:lstStyle/>
+                        <a:p>
+                          <a:r>
+                            <a:rPr lang="en-US" sz="1600" dirty="0"/>
+                            <a:t>Low (only one reward is sampled)</a:t>
+                          </a:r>
+                        </a:p>
+                      </a:txBody>
+                      <a:tcPr/>
+                    </a:tc>
+                    <a:extLst>
+                      <a:ext uri="{0D108BD9-81ED-4DB2-BD59-A6C34878D82A}">
+                        <a16:rowId xmlns:a16="http://schemas.microsoft.com/office/drawing/2014/main" val="952062867"/>
+                      </a:ext>
+                    </a:extLst>
+                  </a:tr>
+                </a:tbl>
+              </a:graphicData>
+            </a:graphic>
+          </p:graphicFrame>
+        </mc:Choice>
+        <mc:Fallback xmlns="">
+          <p:graphicFrame>
+            <p:nvGraphicFramePr>
+              <p:cNvPr id="4" name="Table 3">
+                <a:extLst>
+                  <a:ext uri="{FF2B5EF4-FFF2-40B4-BE49-F238E27FC236}">
+                    <a16:creationId xmlns:a16="http://schemas.microsoft.com/office/drawing/2014/main" id="{312CB263-077E-07CB-B5DD-A047F28225DD}"/>
+                  </a:ext>
+                </a:extLst>
+              </p:cNvPr>
+              <p:cNvGraphicFramePr>
+                <a:graphicFrameLocks noGrp="1"/>
+              </p:cNvGraphicFramePr>
+              <p:nvPr>
+                <p:extLst>
+                  <p:ext uri="{D42A27DB-BD31-4B8C-83A1-F6EECF244321}">
+                    <p14:modId xmlns:p14="http://schemas.microsoft.com/office/powerpoint/2010/main" val="4043007359"/>
+                  </p:ext>
+                </p:extLst>
+              </p:nvPr>
+            </p:nvGraphicFramePr>
+            <p:xfrm>
+              <a:off x="938001" y="4962210"/>
+              <a:ext cx="9450597" cy="1620520"/>
+            </p:xfrm>
+            <a:graphic>
+              <a:graphicData uri="http://schemas.openxmlformats.org/drawingml/2006/table">
+                <a:tbl>
+                  <a:tblPr firstRow="1" bandRow="1">
+                    <a:tableStyleId>{5C22544A-7EE6-4342-B048-85BDC9FD1C3A}</a:tableStyleId>
+                  </a:tblPr>
+                  <a:tblGrid>
+                    <a:gridCol w="1245274">
+                      <a:extLst>
+                        <a:ext uri="{9D8B030D-6E8A-4147-A177-3AD203B41FA5}">
+                          <a16:colId xmlns:a16="http://schemas.microsoft.com/office/drawing/2014/main" val="585080336"/>
+                        </a:ext>
+                      </a:extLst>
+                    </a:gridCol>
+                    <a:gridCol w="4385884">
+                      <a:extLst>
+                        <a:ext uri="{9D8B030D-6E8A-4147-A177-3AD203B41FA5}">
+                          <a16:colId xmlns:a16="http://schemas.microsoft.com/office/drawing/2014/main" val="1752107938"/>
+                        </a:ext>
+                      </a:extLst>
+                    </a:gridCol>
+                    <a:gridCol w="3819439">
+                      <a:extLst>
+                        <a:ext uri="{9D8B030D-6E8A-4147-A177-3AD203B41FA5}">
+                          <a16:colId xmlns:a16="http://schemas.microsoft.com/office/drawing/2014/main" val="3538857757"/>
+                        </a:ext>
+                      </a:extLst>
+                    </a:gridCol>
+                  </a:tblGrid>
+                  <a:tr h="335280">
+                    <a:tc>
+                      <a:txBody>
+                        <a:bodyPr/>
+                        <a:lstStyle/>
+                        <a:p>
+                          <a:r>
+                            <a:rPr lang="en-US" sz="1600" dirty="0"/>
+                            <a:t>Method</a:t>
+                          </a:r>
+                        </a:p>
+                      </a:txBody>
+                      <a:tcPr/>
+                    </a:tc>
+                    <a:tc>
+                      <a:txBody>
+                        <a:bodyPr/>
+                        <a:lstStyle/>
+                        <a:p>
+                          <a:r>
+                            <a:rPr lang="en-US" sz="1600" dirty="0"/>
+                            <a:t>Bias</a:t>
+                          </a:r>
+                        </a:p>
+                      </a:txBody>
+                      <a:tcPr/>
+                    </a:tc>
+                    <a:tc>
+                      <a:txBody>
+                        <a:bodyPr/>
+                        <a:lstStyle/>
+                        <a:p>
+                          <a:r>
+                            <a:rPr lang="en-US" sz="1600" dirty="0"/>
+                            <a:t>Variance</a:t>
+                          </a:r>
+                        </a:p>
+                      </a:txBody>
+                      <a:tcPr/>
+                    </a:tc>
+                    <a:extLst>
+                      <a:ext uri="{0D108BD9-81ED-4DB2-BD59-A6C34878D82A}">
+                        <a16:rowId xmlns:a16="http://schemas.microsoft.com/office/drawing/2014/main" val="4062016133"/>
+                      </a:ext>
+                    </a:extLst>
+                  </a:tr>
+                  <a:tr h="579120">
+                    <a:tc>
+                      <a:txBody>
+                        <a:bodyPr/>
+                        <a:lstStyle/>
+                        <a:p>
+                          <a:r>
+                            <a:rPr lang="en-US" sz="1600" dirty="0"/>
+                            <a:t>MC</a:t>
+                          </a:r>
+                        </a:p>
+                      </a:txBody>
+                      <a:tcPr/>
+                    </a:tc>
+                    <a:tc>
+                      <a:txBody>
+                        <a:bodyPr/>
+                        <a:lstStyle/>
+                        <a:p>
+                          <a:endParaRPr lang="en-US"/>
+                        </a:p>
+                      </a:txBody>
+                      <a:tcPr>
+                        <a:blipFill>
+                          <a:blip r:embed="rId3"/>
+                          <a:stretch>
+                            <a:fillRect l="-28611" t="-61053" r="-87639" b="-135789"/>
+                          </a:stretch>
+                        </a:blipFill>
+                      </a:tcPr>
+                    </a:tc>
+                    <a:tc>
+                      <a:txBody>
+                        <a:bodyPr/>
+                        <a:lstStyle/>
+                        <a:p>
+                          <a:r>
+                            <a:rPr lang="en-US" sz="1600" dirty="0"/>
+                            <a:t>High (between sample returns), falls with sample size.</a:t>
+                          </a:r>
+                        </a:p>
+                      </a:txBody>
+                      <a:tcPr/>
+                    </a:tc>
+                    <a:extLst>
+                      <a:ext uri="{0D108BD9-81ED-4DB2-BD59-A6C34878D82A}">
+                        <a16:rowId xmlns:a16="http://schemas.microsoft.com/office/drawing/2014/main" val="1308207269"/>
+                      </a:ext>
+                    </a:extLst>
+                  </a:tr>
+                  <a:tr h="370840">
+                    <a:tc>
+                      <a:txBody>
+                        <a:bodyPr/>
+                        <a:lstStyle/>
+                        <a:p>
+                          <a:endParaRPr lang="en-US"/>
+                        </a:p>
+                      </a:txBody>
+                      <a:tcPr>
+                        <a:blipFill>
+                          <a:blip r:embed="rId3"/>
+                          <a:stretch>
+                            <a:fillRect l="-488" t="-250820" r="-659024" b="-111475"/>
+                          </a:stretch>
+                        </a:blipFill>
+                      </a:tcPr>
+                    </a:tc>
+                    <a:tc>
+                      <a:txBody>
+                        <a:bodyPr/>
+                        <a:lstStyle/>
+                        <a:p>
+                          <a:r>
+                            <a:rPr lang="en-US" sz="1600" dirty="0"/>
+                            <a:t>Increased bias</a:t>
+                          </a:r>
+                        </a:p>
+                      </a:txBody>
+                      <a:tcPr/>
+                    </a:tc>
+                    <a:tc>
+                      <a:txBody>
+                        <a:bodyPr/>
+                        <a:lstStyle/>
+                        <a:p>
+                          <a:r>
+                            <a:rPr lang="en-US" sz="1600" dirty="0"/>
+                            <a:t>Reduced</a:t>
+                          </a:r>
+                        </a:p>
+                      </a:txBody>
+                      <a:tcPr/>
+                    </a:tc>
+                    <a:extLst>
+                      <a:ext uri="{0D108BD9-81ED-4DB2-BD59-A6C34878D82A}">
+                        <a16:rowId xmlns:a16="http://schemas.microsoft.com/office/drawing/2014/main" val="4225300392"/>
+                      </a:ext>
+                    </a:extLst>
+                  </a:tr>
+                  <a:tr h="335280">
+                    <a:tc>
+                      <a:txBody>
+                        <a:bodyPr/>
+                        <a:lstStyle/>
+                        <a:p>
+                          <a:r>
+                            <a:rPr lang="en-US" sz="1600" dirty="0"/>
+                            <a:t>TD</a:t>
+                          </a:r>
+                        </a:p>
+                      </a:txBody>
+                      <a:tcPr/>
+                    </a:tc>
+                    <a:tc>
+                      <a:txBody>
+                        <a:bodyPr/>
+                        <a:lstStyle/>
+                        <a:p>
+                          <a:endParaRPr lang="en-US"/>
+                        </a:p>
+                      </a:txBody>
+                      <a:tcPr>
+                        <a:blipFill>
+                          <a:blip r:embed="rId3"/>
+                          <a:stretch>
+                            <a:fillRect l="-28611" t="-389091" r="-87639" b="-23636"/>
+                          </a:stretch>
+                        </a:blipFill>
+                      </a:tcPr>
+                    </a:tc>
+                    <a:tc>
+                      <a:txBody>
+                        <a:bodyPr/>
+                        <a:lstStyle/>
+                        <a:p>
+                          <a:r>
+                            <a:rPr lang="en-US" sz="1600" dirty="0"/>
+                            <a:t>Low (only one reward is sampled)</a:t>
+                          </a:r>
+                        </a:p>
+                      </a:txBody>
+                      <a:tcPr/>
+                    </a:tc>
+                    <a:extLst>
+                      <a:ext uri="{0D108BD9-81ED-4DB2-BD59-A6C34878D82A}">
+                        <a16:rowId xmlns:a16="http://schemas.microsoft.com/office/drawing/2014/main" val="952062867"/>
+                      </a:ext>
+                    </a:extLst>
+                  </a:tr>
+                </a:tbl>
+              </a:graphicData>
+            </a:graphic>
+          </p:graphicFrame>
+        </mc:Fallback>
+      </mc:AlternateContent>
+      <mc:AlternateContent xmlns:mc="http://schemas.openxmlformats.org/markup-compatibility/2006" xmlns:a14="http://schemas.microsoft.com/office/drawing/2010/main">
+        <mc:Choice Requires="a14">
+          <p:sp>
+            <p:nvSpPr>
+              <p:cNvPr id="5" name="Speech Bubble: Rectangle with Corners Rounded 4">
+                <a:extLst>
+                  <a:ext uri="{FF2B5EF4-FFF2-40B4-BE49-F238E27FC236}">
+                    <a16:creationId xmlns:a16="http://schemas.microsoft.com/office/drawing/2014/main" id="{6D520CA9-6577-C63A-6358-12DBF667D9B0}"/>
+                  </a:ext>
+                </a:extLst>
+              </p:cNvPr>
+              <p:cNvSpPr/>
+              <p:nvPr/>
+            </p:nvSpPr>
+            <p:spPr>
+              <a:xfrm>
+                <a:off x="7979419" y="1957972"/>
+                <a:ext cx="3730429" cy="400854"/>
+              </a:xfrm>
+              <a:prstGeom prst="wedgeRoundRectCallout">
+                <a:avLst>
+                  <a:gd name="adj1" fmla="val -53980"/>
+                  <a:gd name="adj2" fmla="val 123524"/>
+                  <a:gd name="adj3" fmla="val 16667"/>
+                </a:avLst>
+              </a:prstGeom>
+            </p:spPr>
+            <p:style>
+              <a:lnRef idx="2">
+                <a:schemeClr val="accent2">
+                  <a:shade val="15000"/>
+                </a:schemeClr>
+              </a:lnRef>
+              <a:fillRef idx="1">
+                <a:schemeClr val="accent2"/>
+              </a:fillRef>
+              <a:effectRef idx="0">
+                <a:schemeClr val="accent2"/>
+              </a:effectRef>
+              <a:fontRef idx="minor">
+                <a:schemeClr val="lt1"/>
+              </a:fontRef>
+            </p:style>
+            <p:txBody>
+              <a:bodyPr rtlCol="0" anchor="ctr"/>
+              <a:lstStyle/>
+              <a:p>
+                <a:pPr algn="ctr"/>
+                <a14:m>
+                  <m:oMath xmlns:m="http://schemas.openxmlformats.org/officeDocument/2006/math">
+                    <m:acc>
+                      <m:accPr>
+                        <m:chr m:val="̂"/>
+                        <m:ctrlPr>
+                          <a:rPr lang="en-US" sz="1600" i="1" smtClean="0">
+                            <a:latin typeface="Cambria Math" panose="02040503050406030204" pitchFamily="18" charset="0"/>
+                            <a:ea typeface="Cambria Math" panose="02040503050406030204" pitchFamily="18" charset="0"/>
+                          </a:rPr>
+                        </m:ctrlPr>
+                      </m:accPr>
+                      <m:e>
+                        <m:r>
+                          <a:rPr lang="en-US" sz="1600" i="1">
+                            <a:latin typeface="Cambria Math" panose="02040503050406030204" pitchFamily="18" charset="0"/>
+                            <a:ea typeface="Cambria Math" panose="02040503050406030204" pitchFamily="18" charset="0"/>
+                          </a:rPr>
+                          <m:t>𝑣</m:t>
+                        </m:r>
+                      </m:e>
+                    </m:acc>
+                    <m:d>
+                      <m:dPr>
+                        <m:ctrlPr>
+                          <a:rPr lang="en-US" sz="1600" i="1">
+                            <a:latin typeface="Cambria Math" panose="02040503050406030204" pitchFamily="18" charset="0"/>
+                            <a:ea typeface="Cambria Math" panose="02040503050406030204" pitchFamily="18" charset="0"/>
+                          </a:rPr>
+                        </m:ctrlPr>
+                      </m:dPr>
+                      <m:e>
+                        <m:r>
+                          <a:rPr lang="en-US" sz="1600" i="1">
+                            <a:latin typeface="Cambria Math" panose="02040503050406030204" pitchFamily="18" charset="0"/>
+                          </a:rPr>
+                          <m:t>𝑠</m:t>
+                        </m:r>
+                      </m:e>
+                    </m:d>
+                  </m:oMath>
+                </a14:m>
+                <a:r>
+                  <a:rPr lang="en-US" sz="1600" dirty="0"/>
+                  <a:t> is biased if </a:t>
+                </a:r>
+                <a14:m>
+                  <m:oMath xmlns:m="http://schemas.openxmlformats.org/officeDocument/2006/math">
+                    <m:r>
+                      <a:rPr lang="en-US" sz="1600" b="0" i="1" smtClean="0">
+                        <a:latin typeface="Cambria Math" panose="02040503050406030204" pitchFamily="18" charset="0"/>
+                      </a:rPr>
+                      <m:t>𝐺</m:t>
+                    </m:r>
+                  </m:oMath>
+                </a14:m>
+                <a:r>
+                  <a:rPr lang="en-US" sz="1600" dirty="0"/>
+                  <a:t> samples are biased!</a:t>
+                </a:r>
+              </a:p>
+            </p:txBody>
+          </p:sp>
+        </mc:Choice>
+        <mc:Fallback xmlns="">
+          <p:sp>
+            <p:nvSpPr>
+              <p:cNvPr id="5" name="Speech Bubble: Rectangle with Corners Rounded 4">
+                <a:extLst>
+                  <a:ext uri="{FF2B5EF4-FFF2-40B4-BE49-F238E27FC236}">
+                    <a16:creationId xmlns:a16="http://schemas.microsoft.com/office/drawing/2014/main" id="{6D520CA9-6577-C63A-6358-12DBF667D9B0}"/>
+                  </a:ext>
+                </a:extLst>
+              </p:cNvPr>
+              <p:cNvSpPr>
+                <a:spLocks noRot="1" noChangeAspect="1" noMove="1" noResize="1" noEditPoints="1" noAdjustHandles="1" noChangeArrowheads="1" noChangeShapeType="1" noTextEdit="1"/>
+              </p:cNvSpPr>
+              <p:nvPr/>
+            </p:nvSpPr>
+            <p:spPr>
+              <a:xfrm>
+                <a:off x="7979419" y="1957972"/>
+                <a:ext cx="3730429" cy="400854"/>
+              </a:xfrm>
+              <a:prstGeom prst="wedgeRoundRectCallout">
+                <a:avLst>
+                  <a:gd name="adj1" fmla="val -53980"/>
+                  <a:gd name="adj2" fmla="val 123524"/>
+                  <a:gd name="adj3" fmla="val 16667"/>
+                </a:avLst>
+              </a:prstGeom>
+              <a:blipFill>
+                <a:blip r:embed="rId4"/>
+                <a:stretch>
+                  <a:fillRect/>
+                </a:stretch>
+              </a:blipFill>
+            </p:spPr>
+            <p:txBody>
+              <a:bodyPr/>
+              <a:lstStyle/>
+              <a:p>
+                <a:r>
+                  <a:rPr lang="en-US">
+                    <a:noFill/>
+                  </a:rPr>
+                  <a:t> </a:t>
+                </a:r>
+              </a:p>
+            </p:txBody>
+          </p:sp>
+        </mc:Fallback>
+      </mc:AlternateContent>
+      <mc:AlternateContent xmlns:mc="http://schemas.openxmlformats.org/markup-compatibility/2006" xmlns:a14="http://schemas.microsoft.com/office/drawing/2010/main">
+        <mc:Choice Requires="a14">
+          <p:sp>
+            <p:nvSpPr>
+              <p:cNvPr id="6" name="Speech Bubble: Rectangle with Corners Rounded 5">
+                <a:extLst>
+                  <a:ext uri="{FF2B5EF4-FFF2-40B4-BE49-F238E27FC236}">
+                    <a16:creationId xmlns:a16="http://schemas.microsoft.com/office/drawing/2014/main" id="{9DCE014B-FB5A-7A33-3523-AF031A6C3493}"/>
+                  </a:ext>
+                </a:extLst>
+              </p:cNvPr>
+              <p:cNvSpPr/>
+              <p:nvPr/>
+            </p:nvSpPr>
+            <p:spPr>
+              <a:xfrm>
+                <a:off x="7979419" y="2985961"/>
+                <a:ext cx="3730429" cy="636309"/>
+              </a:xfrm>
+              <a:prstGeom prst="wedgeRoundRectCallout">
+                <a:avLst>
+                  <a:gd name="adj1" fmla="val -82831"/>
+                  <a:gd name="adj2" fmla="val 57494"/>
+                  <a:gd name="adj3" fmla="val 16667"/>
+                </a:avLst>
+              </a:prstGeom>
+            </p:spPr>
+            <p:style>
+              <a:lnRef idx="2">
+                <a:schemeClr val="accent2">
+                  <a:shade val="15000"/>
+                </a:schemeClr>
+              </a:lnRef>
+              <a:fillRef idx="1">
+                <a:schemeClr val="accent2"/>
+              </a:fillRef>
+              <a:effectRef idx="0">
+                <a:schemeClr val="accent2"/>
+              </a:effectRef>
+              <a:fontRef idx="minor">
+                <a:schemeClr val="lt1"/>
+              </a:fontRef>
+            </p:style>
+            <p:txBody>
+              <a:bodyPr rtlCol="0" anchor="ctr"/>
+              <a:lstStyle/>
+              <a:p>
+                <a:pPr algn="ctr"/>
+                <a14:m>
+                  <m:oMath xmlns:m="http://schemas.openxmlformats.org/officeDocument/2006/math">
+                    <m:acc>
+                      <m:accPr>
+                        <m:chr m:val="̂"/>
+                        <m:ctrlPr>
+                          <a:rPr lang="en-US" sz="1600" i="1" smtClean="0">
+                            <a:latin typeface="Cambria Math" panose="02040503050406030204" pitchFamily="18" charset="0"/>
+                            <a:ea typeface="Cambria Math" panose="02040503050406030204" pitchFamily="18" charset="0"/>
+                          </a:rPr>
+                        </m:ctrlPr>
+                      </m:accPr>
+                      <m:e>
+                        <m:r>
+                          <a:rPr lang="en-US" sz="1600" i="1">
+                            <a:latin typeface="Cambria Math" panose="02040503050406030204" pitchFamily="18" charset="0"/>
+                            <a:ea typeface="Cambria Math" panose="02040503050406030204" pitchFamily="18" charset="0"/>
+                          </a:rPr>
+                          <m:t>𝑣</m:t>
+                        </m:r>
+                      </m:e>
+                    </m:acc>
+                    <m:d>
+                      <m:dPr>
+                        <m:ctrlPr>
+                          <a:rPr lang="en-US" sz="1600" i="1">
+                            <a:latin typeface="Cambria Math" panose="02040503050406030204" pitchFamily="18" charset="0"/>
+                            <a:ea typeface="Cambria Math" panose="02040503050406030204" pitchFamily="18" charset="0"/>
+                          </a:rPr>
+                        </m:ctrlPr>
+                      </m:dPr>
+                      <m:e>
+                        <m:r>
+                          <a:rPr lang="en-US" sz="1600" i="1">
+                            <a:latin typeface="Cambria Math" panose="02040503050406030204" pitchFamily="18" charset="0"/>
+                          </a:rPr>
+                          <m:t>𝑠</m:t>
+                        </m:r>
+                      </m:e>
+                    </m:d>
+                  </m:oMath>
+                </a14:m>
+                <a:r>
+                  <a:rPr lang="en-US" sz="1600" dirty="0"/>
+                  <a:t> has high variance if </a:t>
+                </a:r>
+                <a14:m>
+                  <m:oMath xmlns:m="http://schemas.openxmlformats.org/officeDocument/2006/math">
+                    <m:r>
+                      <a:rPr lang="en-US" sz="1600" b="0" i="1" smtClean="0">
+                        <a:latin typeface="Cambria Math" panose="02040503050406030204" pitchFamily="18" charset="0"/>
+                      </a:rPr>
+                      <m:t>𝐺</m:t>
+                    </m:r>
+                  </m:oMath>
+                </a14:m>
+                <a:r>
+                  <a:rPr lang="en-US" sz="1600" dirty="0"/>
+                  <a:t> samples have a high variance due to sampling.</a:t>
+                </a:r>
+              </a:p>
+            </p:txBody>
+          </p:sp>
+        </mc:Choice>
+        <mc:Fallback xmlns="">
+          <p:sp>
+            <p:nvSpPr>
+              <p:cNvPr id="6" name="Speech Bubble: Rectangle with Corners Rounded 5">
+                <a:extLst>
+                  <a:ext uri="{FF2B5EF4-FFF2-40B4-BE49-F238E27FC236}">
+                    <a16:creationId xmlns:a16="http://schemas.microsoft.com/office/drawing/2014/main" id="{9DCE014B-FB5A-7A33-3523-AF031A6C3493}"/>
+                  </a:ext>
+                </a:extLst>
+              </p:cNvPr>
+              <p:cNvSpPr>
+                <a:spLocks noRot="1" noChangeAspect="1" noMove="1" noResize="1" noEditPoints="1" noAdjustHandles="1" noChangeArrowheads="1" noChangeShapeType="1" noTextEdit="1"/>
+              </p:cNvSpPr>
+              <p:nvPr/>
+            </p:nvSpPr>
+            <p:spPr>
+              <a:xfrm>
+                <a:off x="7979419" y="2985961"/>
+                <a:ext cx="3730429" cy="636309"/>
+              </a:xfrm>
+              <a:prstGeom prst="wedgeRoundRectCallout">
+                <a:avLst>
+                  <a:gd name="adj1" fmla="val -82831"/>
+                  <a:gd name="adj2" fmla="val 57494"/>
+                  <a:gd name="adj3" fmla="val 16667"/>
+                </a:avLst>
+              </a:prstGeom>
+              <a:blipFill>
+                <a:blip r:embed="rId5"/>
+                <a:stretch>
+                  <a:fillRect/>
+                </a:stretch>
+              </a:blipFill>
+            </p:spPr>
+            <p:txBody>
+              <a:bodyPr/>
+              <a:lstStyle/>
+              <a:p>
+                <a:r>
+                  <a:rPr lang="en-US">
+                    <a:noFill/>
+                  </a:rPr>
+                  <a:t> </a:t>
+                </a:r>
+              </a:p>
+            </p:txBody>
+          </p:sp>
+        </mc:Fallback>
+      </mc:AlternateContent>
+      <mc:AlternateContent xmlns:mc="http://schemas.openxmlformats.org/markup-compatibility/2006" xmlns:a14="http://schemas.microsoft.com/office/drawing/2010/main">
+        <mc:Choice Requires="a14">
+          <p:sp>
+            <p:nvSpPr>
+              <p:cNvPr id="7" name="Speech Bubble: Rectangle with Corners Rounded 6">
+                <a:extLst>
+                  <a:ext uri="{FF2B5EF4-FFF2-40B4-BE49-F238E27FC236}">
+                    <a16:creationId xmlns:a16="http://schemas.microsoft.com/office/drawing/2014/main" id="{57A52B42-B55C-ECD3-E799-EB8EB07C314A}"/>
+                  </a:ext>
+                </a:extLst>
+              </p:cNvPr>
+              <p:cNvSpPr/>
+              <p:nvPr/>
+            </p:nvSpPr>
+            <p:spPr>
+              <a:xfrm>
+                <a:off x="10537515" y="5267915"/>
+                <a:ext cx="1325409" cy="1215074"/>
+              </a:xfrm>
+              <a:prstGeom prst="wedgeRoundRectCallout">
+                <a:avLst>
+                  <a:gd name="adj1" fmla="val -92431"/>
+                  <a:gd name="adj2" fmla="val 18181"/>
+                  <a:gd name="adj3" fmla="val 16667"/>
+                </a:avLst>
+              </a:prstGeom>
+            </p:spPr>
+            <p:style>
+              <a:lnRef idx="2">
+                <a:schemeClr val="accent2">
+                  <a:shade val="15000"/>
+                </a:schemeClr>
+              </a:lnRef>
+              <a:fillRef idx="1">
+                <a:schemeClr val="accent2"/>
+              </a:fillRef>
+              <a:effectRef idx="0">
+                <a:schemeClr val="accent2"/>
+              </a:effectRef>
+              <a:fontRef idx="minor">
+                <a:schemeClr val="lt1"/>
+              </a:fontRef>
+            </p:style>
+            <p:txBody>
+              <a:bodyPr rtlCol="0" anchor="ctr"/>
+              <a:lstStyle/>
+              <a:p>
+                <a:pPr algn="ctr"/>
+                <a:r>
+                  <a:rPr lang="en-US" sz="1600" dirty="0"/>
+                  <a:t>Total error becomes min. for some </a:t>
+                </a:r>
+                <a14:m>
+                  <m:oMath xmlns:m="http://schemas.openxmlformats.org/officeDocument/2006/math">
+                    <m:r>
+                      <a:rPr lang="en-US" sz="1600" b="0" i="1" smtClean="0">
+                        <a:latin typeface="Cambria Math" panose="02040503050406030204" pitchFamily="18" charset="0"/>
+                      </a:rPr>
+                      <m:t>𝑛</m:t>
+                    </m:r>
+                  </m:oMath>
+                </a14:m>
+                <a:r>
+                  <a:rPr lang="en-US" sz="1600" dirty="0"/>
+                  <a:t>.</a:t>
+                </a:r>
+              </a:p>
+            </p:txBody>
+          </p:sp>
+        </mc:Choice>
+        <mc:Fallback xmlns="">
+          <p:sp>
+            <p:nvSpPr>
+              <p:cNvPr id="7" name="Speech Bubble: Rectangle with Corners Rounded 6">
+                <a:extLst>
+                  <a:ext uri="{FF2B5EF4-FFF2-40B4-BE49-F238E27FC236}">
+                    <a16:creationId xmlns:a16="http://schemas.microsoft.com/office/drawing/2014/main" id="{57A52B42-B55C-ECD3-E799-EB8EB07C314A}"/>
+                  </a:ext>
+                </a:extLst>
+              </p:cNvPr>
+              <p:cNvSpPr>
+                <a:spLocks noRot="1" noChangeAspect="1" noMove="1" noResize="1" noEditPoints="1" noAdjustHandles="1" noChangeArrowheads="1" noChangeShapeType="1" noTextEdit="1"/>
+              </p:cNvSpPr>
+              <p:nvPr/>
+            </p:nvSpPr>
+            <p:spPr>
+              <a:xfrm>
+                <a:off x="10537515" y="5267915"/>
+                <a:ext cx="1325409" cy="1215074"/>
+              </a:xfrm>
+              <a:prstGeom prst="wedgeRoundRectCallout">
+                <a:avLst>
+                  <a:gd name="adj1" fmla="val -92431"/>
+                  <a:gd name="adj2" fmla="val 18181"/>
+                  <a:gd name="adj3" fmla="val 16667"/>
+                </a:avLst>
+              </a:prstGeom>
+              <a:blipFill>
+                <a:blip r:embed="rId6"/>
+                <a:stretch>
+                  <a:fillRect/>
+                </a:stretch>
+              </a:blipFill>
+            </p:spPr>
+            <p:txBody>
+              <a:bodyPr/>
+              <a:lstStyle/>
+              <a:p>
+                <a:r>
+                  <a:rPr lang="en-US">
+                    <a:noFill/>
+                  </a:rPr>
+                  <a:t> </a:t>
+                </a:r>
+              </a:p>
+            </p:txBody>
+          </p:sp>
+        </mc:Fallback>
+      </mc:AlternateContent>
+    </p:spTree>
+    <p:extLst>
+      <p:ext uri="{BB962C8B-B14F-4D97-AF65-F5344CB8AC3E}">
+        <p14:creationId xmlns:p14="http://schemas.microsoft.com/office/powerpoint/2010/main" val="960111673"/>
+      </p:ext>
+    </p:extLst>
+  </p:cSld>
+  <p:clrMapOvr>
+    <a:masterClrMapping/>
+  </p:clrMapOvr>
+  <p:timing>
+    <p:tnLst>
+      <p:par>
+        <p:cTn id="1" dur="indefinite" restart="never" nodeType="tmRoot">
+          <p:childTnLst>
+            <p:seq concurrent="1" nextAc="seek">
+              <p:cTn id="2" dur="indefinite" nodeType="mainSeq">
+                <p:childTnLst>
+                  <p:par>
+                    <p:cTn id="3" fill="hold">
+                      <p:stCondLst>
+                        <p:cond delay="indefinite"/>
+                      </p:stCondLst>
+                      <p:childTnLst>
+                        <p:par>
+                          <p:cTn id="4" fill="hold">
+                            <p:stCondLst>
+                              <p:cond delay="0"/>
+                            </p:stCondLst>
+                            <p:childTnLst>
+                              <p:par>
+                                <p:cTn id="5" presetID="1" presetClass="entr" presetSubtype="0" fill="hold" grpId="0" nodeType="clickEffect">
+                                  <p:stCondLst>
+                                    <p:cond delay="0"/>
+                                  </p:stCondLst>
+                                  <p:childTnLst>
+                                    <p:set>
+                                      <p:cBhvr>
+                                        <p:cTn id="6" dur="1" fill="hold">
+                                          <p:stCondLst>
+                                            <p:cond delay="0"/>
+                                          </p:stCondLst>
+                                        </p:cTn>
+                                        <p:tgtEl>
+                                          <p:spTgt spid="5"/>
+                                        </p:tgtEl>
+                                        <p:attrNameLst>
+                                          <p:attrName>style.visibility</p:attrName>
+                                        </p:attrNameLst>
+                                      </p:cBhvr>
+                                      <p:to>
+                                        <p:strVal val="visible"/>
+                                      </p:to>
+                                    </p:set>
+                                  </p:childTnLst>
+                                </p:cTn>
+                              </p:par>
+                            </p:childTnLst>
+                          </p:cTn>
+                        </p:par>
+                      </p:childTnLst>
+                    </p:cTn>
+                  </p:par>
+                  <p:par>
+                    <p:cTn id="7" fill="hold">
+                      <p:stCondLst>
+                        <p:cond delay="indefinite"/>
+                      </p:stCondLst>
+                      <p:childTnLst>
+                        <p:par>
+                          <p:cTn id="8" fill="hold">
+                            <p:stCondLst>
+                              <p:cond delay="0"/>
+                            </p:stCondLst>
+                            <p:childTnLst>
+                              <p:par>
+                                <p:cTn id="9" presetID="1" presetClass="entr" presetSubtype="0" fill="hold" grpId="0" nodeType="clickEffect">
+                                  <p:stCondLst>
+                                    <p:cond delay="0"/>
+                                  </p:stCondLst>
+                                  <p:childTnLst>
+                                    <p:set>
+                                      <p:cBhvr>
+                                        <p:cTn id="10" dur="1" fill="hold">
+                                          <p:stCondLst>
+                                            <p:cond delay="0"/>
+                                          </p:stCondLst>
+                                        </p:cTn>
+                                        <p:tgtEl>
+                                          <p:spTgt spid="6"/>
+                                        </p:tgtEl>
+                                        <p:attrNameLst>
+                                          <p:attrName>style.visibility</p:attrName>
+                                        </p:attrNameLst>
+                                      </p:cBhvr>
+                                      <p:to>
+                                        <p:strVal val="visible"/>
+                                      </p:to>
+                                    </p:set>
+                                  </p:childTnLst>
+                                </p:cTn>
+                              </p:par>
+                            </p:childTnLst>
+                          </p:cTn>
+                        </p:par>
+                      </p:childTnLst>
+                    </p:cTn>
+                  </p:par>
+                  <p:par>
+                    <p:cTn id="11" fill="hold">
+                      <p:stCondLst>
+                        <p:cond delay="indefinite"/>
+                      </p:stCondLst>
+                      <p:childTnLst>
+                        <p:par>
+                          <p:cTn id="12" fill="hold">
+                            <p:stCondLst>
+                              <p:cond delay="0"/>
+                            </p:stCondLst>
+                            <p:childTnLst>
+                              <p:par>
+                                <p:cTn id="13" presetID="1" presetClass="entr" presetSubtype="0" fill="hold" nodeType="clickEffect">
+                                  <p:stCondLst>
+                                    <p:cond delay="0"/>
+                                  </p:stCondLst>
+                                  <p:childTnLst>
+                                    <p:set>
+                                      <p:cBhvr>
+                                        <p:cTn id="14" dur="1" fill="hold">
+                                          <p:stCondLst>
+                                            <p:cond delay="0"/>
+                                          </p:stCondLst>
+                                        </p:cTn>
+                                        <p:tgtEl>
+                                          <p:spTgt spid="4"/>
+                                        </p:tgtEl>
+                                        <p:attrNameLst>
+                                          <p:attrName>style.visibility</p:attrName>
+                                        </p:attrNameLst>
+                                      </p:cBhvr>
+                                      <p:to>
+                                        <p:strVal val="visible"/>
+                                      </p:to>
+                                    </p:set>
+                                  </p:childTnLst>
+                                </p:cTn>
+                              </p:par>
+                            </p:childTnLst>
+                          </p:cTn>
+                        </p:par>
+                      </p:childTnLst>
+                    </p:cTn>
+                  </p:par>
+                  <p:par>
+                    <p:cTn id="15" fill="hold">
+                      <p:stCondLst>
+                        <p:cond delay="indefinite"/>
+                      </p:stCondLst>
+                      <p:childTnLst>
+                        <p:par>
+                          <p:cTn id="16" fill="hold">
+                            <p:stCondLst>
+                              <p:cond delay="0"/>
+                            </p:stCondLst>
+                            <p:childTnLst>
+                              <p:par>
+                                <p:cTn id="17" presetID="1" presetClass="entr" presetSubtype="0" fill="hold" grpId="0" nodeType="clickEffect">
+                                  <p:stCondLst>
+                                    <p:cond delay="0"/>
+                                  </p:stCondLst>
+                                  <p:childTnLst>
+                                    <p:set>
+                                      <p:cBhvr>
+                                        <p:cTn id="18" dur="1" fill="hold">
+                                          <p:stCondLst>
+                                            <p:cond delay="0"/>
+                                          </p:stCondLst>
+                                        </p:cTn>
+                                        <p:tgtEl>
+                                          <p:spTgt spid="7"/>
+                                        </p:tgtEl>
+                                        <p:attrNameLst>
+                                          <p:attrName>style.visibility</p:attrName>
+                                        </p:attrNameLst>
+                                      </p:cBhvr>
+                                      <p:to>
+                                        <p:strVal val="visible"/>
+                                      </p:to>
+                                    </p:set>
+                                  </p:childTnLst>
+                                </p:cTn>
+                              </p:par>
+                            </p:childTnLst>
+                          </p:cTn>
+                        </p:par>
+                      </p:childTnLst>
+                    </p:cTn>
+                  </p:par>
+                </p:childTnLst>
+              </p:cTn>
+              <p:prevCondLst>
+                <p:cond evt="onPrev" delay="0">
+                  <p:tgtEl>
+                    <p:sldTgt/>
+                  </p:tgtEl>
+                </p:cond>
+              </p:prevCondLst>
+              <p:nextCondLst>
+                <p:cond evt="onNext" delay="0">
+                  <p:tgtEl>
+                    <p:sldTgt/>
+                  </p:tgtEl>
+                </p:cond>
+              </p:nextCondLst>
+            </p:seq>
+          </p:childTnLst>
+        </p:cTn>
+      </p:par>
+    </p:tnLst>
+    <p:bldLst>
+      <p:bldP spid="5" grpId="0" animBg="1"/>
+      <p:bldP spid="6" grpId="0" animBg="1"/>
+      <p:bldP spid="7" grpId="0" animBg="1"/>
+    </p:bldLst>
+  </p:timing>
+</p:sld>
+</file>
+
+<file path=ppt/slides/slide11.xml><?xml version="1.0" encoding="utf-8"?>
+<p:sld xmlns:a="http://schemas.openxmlformats.org/drawingml/2006/main" xmlns:r="http://schemas.openxmlformats.org/officeDocument/2006/relationships" xmlns:p="http://schemas.openxmlformats.org/presentationml/2006/main">
+  <p:cSld>
+    <p:spTree>
+      <p:nvGrpSpPr>
+        <p:cNvPr id="1" name=""/>
+        <p:cNvGrpSpPr/>
+        <p:nvPr/>
+      </p:nvGrpSpPr>
+      <p:grpSpPr>
+        <a:xfrm>
+          <a:off x="0" y="0"/>
+          <a:ext cx="0" cy="0"/>
+          <a:chOff x="0" y="0"/>
+          <a:chExt cx="0" cy="0"/>
+        </a:xfrm>
+      </p:grpSpPr>
       <mc:AlternateContent xmlns:mc="http://schemas.openxmlformats.org/markup-compatibility/2006" xmlns:a14="http://schemas.microsoft.com/office/drawing/2010/main">
         <mc:Choice Requires="a14">
           <p:sp>
@@ -4269,7 +7111,7 @@
 </p:sld>
 </file>
 
-<file path=ppt/slides/slide11.xml><?xml version="1.0" encoding="utf-8"?>
+<file path=ppt/slides/slide12.xml><?xml version="1.0" encoding="utf-8"?>
 <p:sld xmlns:a="http://schemas.openxmlformats.org/drawingml/2006/main" xmlns:r="http://schemas.openxmlformats.org/officeDocument/2006/relationships" xmlns:p="http://schemas.openxmlformats.org/presentationml/2006/main">
   <p:cSld>
     <p:spTree>
@@ -6004,7 +8846,7 @@
 </p:sld>
 </file>
 
-<file path=ppt/slides/slide12.xml><?xml version="1.0" encoding="utf-8"?>
+<file path=ppt/slides/slide13.xml><?xml version="1.0" encoding="utf-8"?>
 <p:sld xmlns:a="http://schemas.openxmlformats.org/drawingml/2006/main" xmlns:r="http://schemas.openxmlformats.org/officeDocument/2006/relationships" xmlns:p="http://schemas.openxmlformats.org/presentationml/2006/main">
   <p:cSld>
     <p:spTree>
@@ -6244,7 +9086,7 @@
 </p:sld>
 </file>
 
-<file path=ppt/slides/slide13.xml><?xml version="1.0" encoding="utf-8"?>
+<file path=ppt/slides/slide14.xml><?xml version="1.0" encoding="utf-8"?>
 <p:sld xmlns:a="http://schemas.openxmlformats.org/drawingml/2006/main" xmlns:r="http://schemas.openxmlformats.org/officeDocument/2006/relationships" xmlns:p="http://schemas.openxmlformats.org/presentationml/2006/main">
   <p:cSld>
     <p:spTree>
@@ -7150,7 +9992,7 @@
 </p:sld>
 </file>
 
-<file path=ppt/slides/slide14.xml><?xml version="1.0" encoding="utf-8"?>
+<file path=ppt/slides/slide15.xml><?xml version="1.0" encoding="utf-8"?>
 <p:sld xmlns:a="http://schemas.openxmlformats.org/drawingml/2006/main" xmlns:r="http://schemas.openxmlformats.org/officeDocument/2006/relationships" xmlns:p="http://schemas.openxmlformats.org/presentationml/2006/main">
   <p:cSld>
     <p:spTree>
@@ -7289,7 +10131,7 @@
 </p:sld>
 </file>
 
-<file path=ppt/slides/slide15.xml><?xml version="1.0" encoding="utf-8"?>
+<file path=ppt/slides/slide16.xml><?xml version="1.0" encoding="utf-8"?>
 <p:sld xmlns:a="http://schemas.openxmlformats.org/drawingml/2006/main" xmlns:r="http://schemas.openxmlformats.org/officeDocument/2006/relationships" xmlns:p="http://schemas.openxmlformats.org/presentationml/2006/main">
   <p:cSld>
     <p:spTree>
@@ -7387,8 +10229,8 @@
           </p:sp>
         </mc:Fallback>
       </mc:AlternateContent>
-      <mc:AlternateContent xmlns:mc="http://schemas.openxmlformats.org/markup-compatibility/2006">
-        <mc:Choice xmlns:a14="http://schemas.microsoft.com/office/drawing/2010/main" Requires="a14">
+      <mc:AlternateContent xmlns:mc="http://schemas.openxmlformats.org/markup-compatibility/2006" xmlns:a14="http://schemas.microsoft.com/office/drawing/2010/main">
+        <mc:Choice Requires="a14">
           <p:sp>
             <p:nvSpPr>
               <p:cNvPr id="3" name="Content Placeholder 2">
@@ -8290,7 +11132,7 @@
             </p:txBody>
           </p:sp>
         </mc:Choice>
-        <mc:Fallback>
+        <mc:Fallback xmlns="">
           <p:sp>
             <p:nvSpPr>
               <p:cNvPr id="3" name="Content Placeholder 2">
@@ -8330,8 +11172,8 @@
           </p:sp>
         </mc:Fallback>
       </mc:AlternateContent>
-      <mc:AlternateContent xmlns:mc="http://schemas.openxmlformats.org/markup-compatibility/2006">
-        <mc:Choice xmlns:a14="http://schemas.microsoft.com/office/drawing/2010/main" Requires="a14">
+      <mc:AlternateContent xmlns:mc="http://schemas.openxmlformats.org/markup-compatibility/2006" xmlns:a14="http://schemas.microsoft.com/office/drawing/2010/main">
+        <mc:Choice Requires="a14">
           <p:sp>
             <p:nvSpPr>
               <p:cNvPr id="4" name="Speech Bubble: Rectangle with Corners Rounded 3">
@@ -8400,7 +11242,7 @@
             </p:txBody>
           </p:sp>
         </mc:Choice>
-        <mc:Fallback>
+        <mc:Fallback xmlns="">
           <p:sp>
             <p:nvSpPr>
               <p:cNvPr id="4" name="Speech Bubble: Rectangle with Corners Rounded 3">
@@ -8462,7 +11304,7 @@
 </p:sld>
 </file>
 
-<file path=ppt/slides/slide16.xml><?xml version="1.0" encoding="utf-8"?>
+<file path=ppt/slides/slide17.xml><?xml version="1.0" encoding="utf-8"?>
 <p:sld xmlns:a="http://schemas.openxmlformats.org/drawingml/2006/main" xmlns:r="http://schemas.openxmlformats.org/officeDocument/2006/relationships" xmlns:p="http://schemas.openxmlformats.org/presentationml/2006/main">
   <p:cSld>
     <p:spTree>
@@ -9420,7 +12262,7 @@
 </p:sld>
 </file>
 
-<file path=ppt/slides/slide17.xml><?xml version="1.0" encoding="utf-8"?>
+<file path=ppt/slides/slide18.xml><?xml version="1.0" encoding="utf-8"?>
 <p:sld xmlns:a="http://schemas.openxmlformats.org/drawingml/2006/main" xmlns:r="http://schemas.openxmlformats.org/officeDocument/2006/relationships" xmlns:p="http://schemas.openxmlformats.org/presentationml/2006/main">
   <p:cSld>
     <p:bg>
@@ -9623,7 +12465,7 @@
             </p:spPr>
             <p:txBody>
               <a:bodyPr anchor="ctr">
-                <a:normAutofit lnSpcReduction="10000"/>
+                <a:normAutofit fontScale="92500" lnSpcReduction="10000"/>
               </a:bodyPr>
               <a:lstStyle/>
               <a:p>
@@ -9648,7 +12490,7 @@
               <a:p>
                 <a:r>
                   <a:rPr lang="en-US" sz="1800" dirty="0"/>
-                  <a:t>Advantage: </a:t>
+                  <a:t>Advantage over one-step methods: </a:t>
                 </a:r>
               </a:p>
               <a:p>
@@ -9670,7 +12512,23 @@
                 </a:r>
                 <a:r>
                   <a:rPr lang="en-US" sz="1800" dirty="0"/>
-                  <a:t>: Significantly reduces the bootstrapping error.</a:t>
+                  <a:t>: Significantly reduces the bootstrapping error (</a:t>
+                </a:r>
+                <a:r>
+                  <a:rPr lang="en-US" sz="1800" b="1" dirty="0"/>
+                  <a:t>bias</a:t>
+                </a:r>
+                <a:r>
+                  <a:rPr lang="en-US" sz="1800" dirty="0"/>
+                  <a:t>) at the cost of increased </a:t>
+                </a:r>
+                <a:r>
+                  <a:rPr lang="en-US" sz="1800" b="1" dirty="0"/>
+                  <a:t>variance</a:t>
+                </a:r>
+                <a:r>
+                  <a:rPr lang="en-US" sz="1800" dirty="0"/>
+                  <a:t>. </a:t>
                 </a:r>
               </a:p>
               <a:p>
@@ -9795,7 +12653,7 @@
               <a:blipFill>
                 <a:blip r:embed="rId3"/>
                 <a:stretch>
-                  <a:fillRect l="-866" t="-3575" r="-974"/>
+                  <a:fillRect l="-649" t="-919"/>
                 </a:stretch>
               </a:blipFill>
             </p:spPr>
@@ -20762,8 +23620,8 @@
           </a:p>
         </p:txBody>
       </p:sp>
-      <mc:AlternateContent xmlns:mc="http://schemas.openxmlformats.org/markup-compatibility/2006">
-        <mc:Choice xmlns:a14="http://schemas.microsoft.com/office/drawing/2010/main" Requires="a14">
+      <mc:AlternateContent xmlns:mc="http://schemas.openxmlformats.org/markup-compatibility/2006" xmlns:a14="http://schemas.microsoft.com/office/drawing/2010/main">
+        <mc:Choice Requires="a14">
           <p:sp>
             <p:nvSpPr>
               <p:cNvPr id="3" name="Content Placeholder 2">
@@ -21207,7 +24065,7 @@
             </p:txBody>
           </p:sp>
         </mc:Choice>
-        <mc:Fallback>
+        <mc:Fallback xmlns="">
           <p:sp>
             <p:nvSpPr>
               <p:cNvPr id="3" name="Content Placeholder 2">
@@ -21251,8 +24109,8 @@
           </p:sp>
         </mc:Fallback>
       </mc:AlternateContent>
-      <mc:AlternateContent xmlns:mc="http://schemas.openxmlformats.org/markup-compatibility/2006">
-        <mc:Choice xmlns:a14="http://schemas.microsoft.com/office/drawing/2010/main" Requires="a14">
+      <mc:AlternateContent xmlns:mc="http://schemas.openxmlformats.org/markup-compatibility/2006" xmlns:a14="http://schemas.microsoft.com/office/drawing/2010/main">
+        <mc:Choice Requires="a14">
           <p:sp>
             <p:nvSpPr>
               <p:cNvPr id="5" name="TextBox 4">
@@ -21827,7 +24685,7 @@
             </p:txBody>
           </p:sp>
         </mc:Choice>
-        <mc:Fallback>
+        <mc:Fallback xmlns="">
           <p:sp>
             <p:nvSpPr>
               <p:cNvPr id="5" name="TextBox 4">

--- a/slides/Lecture_Chapter07.pptx
+++ b/slides/Lecture_Chapter07.pptx
@@ -318,7 +318,7 @@
           <a:p>
             <a:fld id="{3E22BF2E-04DA-469E-97C5-BB68A0368813}" type="datetimeFigureOut">
               <a:rPr lang="en-US" smtClean="0"/>
-              <a:t>3/3/2026</a:t>
+              <a:t>3/22/2026</a:t>
             </a:fld>
             <a:endParaRPr lang="en-US"/>
           </a:p>
@@ -516,7 +516,7 @@
           <a:p>
             <a:fld id="{3E22BF2E-04DA-469E-97C5-BB68A0368813}" type="datetimeFigureOut">
               <a:rPr lang="en-US" smtClean="0"/>
-              <a:t>3/3/2026</a:t>
+              <a:t>3/22/2026</a:t>
             </a:fld>
             <a:endParaRPr lang="en-US"/>
           </a:p>
@@ -724,7 +724,7 @@
           <a:p>
             <a:fld id="{3E22BF2E-04DA-469E-97C5-BB68A0368813}" type="datetimeFigureOut">
               <a:rPr lang="en-US" smtClean="0"/>
-              <a:t>3/3/2026</a:t>
+              <a:t>3/22/2026</a:t>
             </a:fld>
             <a:endParaRPr lang="en-US"/>
           </a:p>
@@ -932,7 +932,7 @@
           <a:p>
             <a:fld id="{3E22BF2E-04DA-469E-97C5-BB68A0368813}" type="datetimeFigureOut">
               <a:rPr lang="en-US" smtClean="0"/>
-              <a:t>3/3/2026</a:t>
+              <a:t>3/22/2026</a:t>
             </a:fld>
             <a:endParaRPr lang="en-US"/>
           </a:p>
@@ -1207,7 +1207,7 @@
           <a:p>
             <a:fld id="{3E22BF2E-04DA-469E-97C5-BB68A0368813}" type="datetimeFigureOut">
               <a:rPr lang="en-US" smtClean="0"/>
-              <a:t>3/3/2026</a:t>
+              <a:t>3/22/2026</a:t>
             </a:fld>
             <a:endParaRPr lang="en-US"/>
           </a:p>
@@ -1472,7 +1472,7 @@
           <a:p>
             <a:fld id="{3E22BF2E-04DA-469E-97C5-BB68A0368813}" type="datetimeFigureOut">
               <a:rPr lang="en-US" smtClean="0"/>
-              <a:t>3/3/2026</a:t>
+              <a:t>3/22/2026</a:t>
             </a:fld>
             <a:endParaRPr lang="en-US"/>
           </a:p>
@@ -1884,7 +1884,7 @@
           <a:p>
             <a:fld id="{3E22BF2E-04DA-469E-97C5-BB68A0368813}" type="datetimeFigureOut">
               <a:rPr lang="en-US" smtClean="0"/>
-              <a:t>3/3/2026</a:t>
+              <a:t>3/22/2026</a:t>
             </a:fld>
             <a:endParaRPr lang="en-US"/>
           </a:p>
@@ -2025,7 +2025,7 @@
           <a:p>
             <a:fld id="{3E22BF2E-04DA-469E-97C5-BB68A0368813}" type="datetimeFigureOut">
               <a:rPr lang="en-US" smtClean="0"/>
-              <a:t>3/3/2026</a:t>
+              <a:t>3/22/2026</a:t>
             </a:fld>
             <a:endParaRPr lang="en-US"/>
           </a:p>
@@ -2138,7 +2138,7 @@
           <a:p>
             <a:fld id="{3E22BF2E-04DA-469E-97C5-BB68A0368813}" type="datetimeFigureOut">
               <a:rPr lang="en-US" smtClean="0"/>
-              <a:t>3/3/2026</a:t>
+              <a:t>3/22/2026</a:t>
             </a:fld>
             <a:endParaRPr lang="en-US"/>
           </a:p>
@@ -2449,7 +2449,7 @@
           <a:p>
             <a:fld id="{3E22BF2E-04DA-469E-97C5-BB68A0368813}" type="datetimeFigureOut">
               <a:rPr lang="en-US" smtClean="0"/>
-              <a:t>3/3/2026</a:t>
+              <a:t>3/22/2026</a:t>
             </a:fld>
             <a:endParaRPr lang="en-US"/>
           </a:p>
@@ -2737,7 +2737,7 @@
           <a:p>
             <a:fld id="{3E22BF2E-04DA-469E-97C5-BB68A0368813}" type="datetimeFigureOut">
               <a:rPr lang="en-US" smtClean="0"/>
-              <a:t>3/3/2026</a:t>
+              <a:t>3/22/2026</a:t>
             </a:fld>
             <a:endParaRPr lang="en-US"/>
           </a:p>
@@ -2978,7 +2978,7 @@
           <a:p>
             <a:fld id="{3E22BF2E-04DA-469E-97C5-BB68A0368813}" type="datetimeFigureOut">
               <a:rPr lang="en-US" smtClean="0"/>
-              <a:t>3/3/2026</a:t>
+              <a:t>3/22/2026</a:t>
             </a:fld>
             <a:endParaRPr lang="en-US"/>
           </a:p>
@@ -4122,8 +4122,8 @@
           </a:p>
         </p:txBody>
       </p:sp>
-      <mc:AlternateContent xmlns:mc="http://schemas.openxmlformats.org/markup-compatibility/2006" xmlns:a14="http://schemas.microsoft.com/office/drawing/2010/main">
-        <mc:Choice Requires="a14">
+      <mc:AlternateContent xmlns:mc="http://schemas.openxmlformats.org/markup-compatibility/2006">
+        <mc:Choice xmlns:a14="http://schemas.microsoft.com/office/drawing/2010/main" Requires="a14">
           <p:sp>
             <p:nvSpPr>
               <p:cNvPr id="3" name="Content Placeholder 2">
@@ -4143,7 +4143,7 @@
             <p:spPr>
               <a:xfrm>
                 <a:off x="838200" y="1002818"/>
-                <a:ext cx="10515600" cy="3755299"/>
+                <a:ext cx="10515600" cy="3846966"/>
               </a:xfrm>
             </p:spPr>
             <p:txBody>
@@ -4173,7 +4173,7 @@
                 </a14:m>
                 <a:r>
                   <a:rPr lang="en-US" dirty="0"/>
-                  <a:t> starting at a state s </a:t>
+                  <a:t> starting at state </a:t>
                 </a:r>
                 <a14:m>
                   <m:oMath xmlns:m="http://schemas.openxmlformats.org/officeDocument/2006/math">
@@ -4372,7 +4372,7 @@
                 </a14:m>
                 <a:r>
                   <a:rPr lang="en-US" dirty="0"/>
-                  <a:t>to learn a value function estimate </a:t>
+                  <a:t>to learn a value function </a:t>
                 </a:r>
                 <a14:m>
                   <m:oMath xmlns:m="http://schemas.openxmlformats.org/officeDocument/2006/math">
@@ -5618,7 +5618,7 @@
             </p:txBody>
           </p:sp>
         </mc:Choice>
-        <mc:Fallback xmlns="">
+        <mc:Fallback>
           <p:sp>
             <p:nvSpPr>
               <p:cNvPr id="3" name="Content Placeholder 2">
@@ -5638,12 +5638,12 @@
             <p:spPr>
               <a:xfrm>
                 <a:off x="838200" y="1002818"/>
-                <a:ext cx="10515600" cy="3755299"/>
+                <a:ext cx="10515600" cy="3846966"/>
               </a:xfrm>
               <a:blipFill>
                 <a:blip r:embed="rId2"/>
                 <a:stretch>
-                  <a:fillRect l="-406" t="-812" b="-2110"/>
+                  <a:fillRect l="-406" t="-792"/>
                 </a:stretch>
               </a:blipFill>
             </p:spPr>
@@ -5662,8 +5662,8 @@
           </p:sp>
         </mc:Fallback>
       </mc:AlternateContent>
-      <mc:AlternateContent xmlns:mc="http://schemas.openxmlformats.org/markup-compatibility/2006" xmlns:a14="http://schemas.microsoft.com/office/drawing/2010/main">
-        <mc:Choice Requires="a14">
+      <mc:AlternateContent xmlns:mc="http://schemas.openxmlformats.org/markup-compatibility/2006">
+        <mc:Choice xmlns:a14="http://schemas.microsoft.com/office/drawing/2010/main" Requires="a14">
           <p:graphicFrame>
             <p:nvGraphicFramePr>
               <p:cNvPr id="4" name="Table 3">
@@ -5679,14 +5679,14 @@
               <p:nvPr>
                 <p:extLst>
                   <p:ext uri="{D42A27DB-BD31-4B8C-83A1-F6EECF244321}">
-                    <p14:modId xmlns:p14="http://schemas.microsoft.com/office/powerpoint/2010/main" val="4043007359"/>
+                    <p14:modId xmlns:p14="http://schemas.microsoft.com/office/powerpoint/2010/main" val="892151477"/>
                   </p:ext>
                 </p:extLst>
               </p:nvPr>
             </p:nvGraphicFramePr>
             <p:xfrm>
-              <a:off x="938001" y="4962210"/>
-              <a:ext cx="9450597" cy="1620520"/>
+              <a:off x="1290270" y="4849784"/>
+              <a:ext cx="9450597" cy="1864360"/>
             </p:xfrm>
             <a:graphic>
               <a:graphicData uri="http://schemas.openxmlformats.org/drawingml/2006/table">
@@ -5738,7 +5738,7 @@
                         <a:p>
                           <a:r>
                             <a:rPr lang="en-US" sz="1600" dirty="0"/>
-                            <a:t>Bias</a:t>
+                            <a:t>Bias of Estimate</a:t>
                           </a:r>
                         </a:p>
                       </a:txBody>
@@ -5751,7 +5751,7 @@
                         <a:p>
                           <a:r>
                             <a:rPr lang="en-US" sz="1600" dirty="0"/>
-                            <a:t>Variance</a:t>
+                            <a:t>Variance of Estimate</a:t>
                           </a:r>
                         </a:p>
                       </a:txBody>
@@ -5783,8 +5783,12 @@
                         <a:lstStyle/>
                         <a:p>
                           <a:r>
-                            <a:rPr lang="en-US" sz="1600" dirty="0"/>
-                            <a:t>No bias (</a:t>
+                            <a:rPr lang="en-US" sz="1600" b="1" dirty="0"/>
+                            <a:t>No bias:</a:t>
+                          </a:r>
+                          <a:r>
+                            <a:rPr lang="en-US" sz="1600" b="1" baseline="0" dirty="0"/>
+                            <a:t> </a:t>
                           </a:r>
                           <a14:m>
                             <m:oMath xmlns:m="http://schemas.openxmlformats.org/officeDocument/2006/math">
@@ -5823,10 +5827,7 @@
                             <a:rPr lang="en-US" sz="1600" baseline="0" dirty="0"/>
                             <a:t> an unbiased sample</a:t>
                           </a:r>
-                          <a:r>
-                            <a:rPr lang="en-US" sz="1600" dirty="0"/>
-                            <a:t>)</a:t>
-                          </a:r>
+                          <a:endParaRPr lang="en-US" sz="1600" dirty="0"/>
                         </a:p>
                       </a:txBody>
                       <a:tcPr/>
@@ -5837,8 +5838,12 @@
                         <a:lstStyle/>
                         <a:p>
                           <a:r>
+                            <a:rPr lang="en-US" sz="1600" b="1" dirty="0"/>
+                            <a:t>High</a:t>
+                          </a:r>
+                          <a:r>
                             <a:rPr lang="en-US" sz="1600" dirty="0"/>
-                            <a:t>High (between sample returns), falls with sample size.</a:t>
+                            <a:t>: difference between sample returns; falls with sample size.</a:t>
                           </a:r>
                         </a:p>
                       </a:txBody>
@@ -5926,8 +5931,16 @@
                         <a:lstStyle/>
                         <a:p>
                           <a:r>
+                            <a:rPr lang="en-US" sz="1600" b="1" dirty="0"/>
+                            <a:t>High bias</a:t>
+                          </a:r>
+                          <a:r>
                             <a:rPr lang="en-US" sz="1600" dirty="0"/>
-                            <a:t>High bias (</a:t>
+                            <a:t>:</a:t>
+                          </a:r>
+                          <a:r>
+                            <a:rPr lang="en-US" sz="1600" baseline="0" dirty="0"/>
+                            <a:t> </a:t>
                           </a:r>
                           <a14:m>
                             <m:oMath xmlns:m="http://schemas.openxmlformats.org/officeDocument/2006/math">
@@ -5960,7 +5973,7 @@
                           </a14:m>
                           <a:r>
                             <a:rPr lang="en-US" sz="1600" dirty="0"/>
-                            <a:t> is bootstrapped)</a:t>
+                            <a:t> is bootstrapped; falls when getting close to the optimal value function.</a:t>
                           </a:r>
                         </a:p>
                       </a:txBody>
@@ -5972,8 +5985,12 @@
                         <a:lstStyle/>
                         <a:p>
                           <a:r>
+                            <a:rPr lang="en-US" sz="1600" b="1" dirty="0"/>
+                            <a:t>Low: </a:t>
+                          </a:r>
+                          <a:r>
                             <a:rPr lang="en-US" sz="1600" dirty="0"/>
-                            <a:t>Low (only one reward is sampled)</a:t>
+                            <a:t>only one reward is sampled</a:t>
                           </a:r>
                         </a:p>
                       </a:txBody>
@@ -5990,7 +6007,7 @@
             </a:graphic>
           </p:graphicFrame>
         </mc:Choice>
-        <mc:Fallback xmlns="">
+        <mc:Fallback>
           <p:graphicFrame>
             <p:nvGraphicFramePr>
               <p:cNvPr id="4" name="Table 3">
@@ -6006,14 +6023,14 @@
               <p:nvPr>
                 <p:extLst>
                   <p:ext uri="{D42A27DB-BD31-4B8C-83A1-F6EECF244321}">
-                    <p14:modId xmlns:p14="http://schemas.microsoft.com/office/powerpoint/2010/main" val="4043007359"/>
+                    <p14:modId xmlns:p14="http://schemas.microsoft.com/office/powerpoint/2010/main" val="892151477"/>
                   </p:ext>
                 </p:extLst>
               </p:nvPr>
             </p:nvGraphicFramePr>
             <p:xfrm>
-              <a:off x="938001" y="4962210"/>
-              <a:ext cx="9450597" cy="1620520"/>
+              <a:off x="1290270" y="4849784"/>
+              <a:ext cx="9450597" cy="1864360"/>
             </p:xfrm>
             <a:graphic>
               <a:graphicData uri="http://schemas.openxmlformats.org/drawingml/2006/table">
@@ -6065,7 +6082,7 @@
                         <a:p>
                           <a:r>
                             <a:rPr lang="en-US" sz="1600" dirty="0"/>
-                            <a:t>Bias</a:t>
+                            <a:t>Bias of Estimate</a:t>
                           </a:r>
                         </a:p>
                       </a:txBody>
@@ -6078,7 +6095,7 @@
                         <a:p>
                           <a:r>
                             <a:rPr lang="en-US" sz="1600" dirty="0"/>
-                            <a:t>Variance</a:t>
+                            <a:t>Variance of Estimate</a:t>
                           </a:r>
                         </a:p>
                       </a:txBody>
@@ -6116,7 +6133,7 @@
                         <a:blipFill>
                           <a:blip r:embed="rId3"/>
                           <a:stretch>
-                            <a:fillRect l="-28611" t="-61053" r="-87639" b="-135789"/>
+                            <a:fillRect l="-28472" t="-59375" r="-87778" b="-175000"/>
                           </a:stretch>
                         </a:blipFill>
                       </a:tcPr>
@@ -6127,8 +6144,12 @@
                         <a:lstStyle/>
                         <a:p>
                           <a:r>
+                            <a:rPr lang="en-US" sz="1600" b="1" dirty="0"/>
+                            <a:t>High</a:t>
+                          </a:r>
+                          <a:r>
                             <a:rPr lang="en-US" sz="1600" dirty="0"/>
-                            <a:t>High (between sample returns), falls with sample size.</a:t>
+                            <a:t>: difference between sample returns; falls with sample size.</a:t>
                           </a:r>
                         </a:p>
                       </a:txBody>
@@ -6153,7 +6174,7 @@
                         <a:blipFill>
                           <a:blip r:embed="rId3"/>
                           <a:stretch>
-                            <a:fillRect l="-488" t="-250820" r="-659024" b="-111475"/>
+                            <a:fillRect l="-490" t="-250820" r="-662745" b="-175410"/>
                           </a:stretch>
                         </a:blipFill>
                       </a:tcPr>
@@ -6190,7 +6211,7 @@
                       </a:ext>
                     </a:extLst>
                   </a:tr>
-                  <a:tr h="335280">
+                  <a:tr h="579120">
                     <a:tc>
                       <a:txBody>
                         <a:bodyPr/>
@@ -6216,7 +6237,7 @@
                         <a:blipFill>
                           <a:blip r:embed="rId3"/>
                           <a:stretch>
-                            <a:fillRect l="-28611" t="-389091" r="-87639" b="-23636"/>
+                            <a:fillRect l="-28472" t="-225263" r="-87778" b="-12632"/>
                           </a:stretch>
                         </a:blipFill>
                       </a:tcPr>
@@ -6227,8 +6248,12 @@
                         <a:lstStyle/>
                         <a:p>
                           <a:r>
+                            <a:rPr lang="en-US" sz="1600" b="1" dirty="0"/>
+                            <a:t>Low: </a:t>
+                          </a:r>
+                          <a:r>
                             <a:rPr lang="en-US" sz="1600" dirty="0"/>
-                            <a:t>Low (only one reward is sampled)</a:t>
+                            <a:t>only one reward is sampled</a:t>
                           </a:r>
                         </a:p>
                       </a:txBody>
@@ -6246,8 +6271,8 @@
           </p:graphicFrame>
         </mc:Fallback>
       </mc:AlternateContent>
-      <mc:AlternateContent xmlns:mc="http://schemas.openxmlformats.org/markup-compatibility/2006" xmlns:a14="http://schemas.microsoft.com/office/drawing/2010/main">
-        <mc:Choice Requires="a14">
+      <mc:AlternateContent xmlns:mc="http://schemas.openxmlformats.org/markup-compatibility/2006">
+        <mc:Choice xmlns:a14="http://schemas.microsoft.com/office/drawing/2010/main" Requires="a14">
           <p:sp>
             <p:nvSpPr>
               <p:cNvPr id="5" name="Speech Bubble: Rectangle with Corners Rounded 4">
@@ -6262,13 +6287,13 @@
             </p:nvSpPr>
             <p:spPr>
               <a:xfrm>
-                <a:off x="7979419" y="1957972"/>
-                <a:ext cx="3730429" cy="400854"/>
+                <a:off x="8686800" y="1957972"/>
+                <a:ext cx="3023048" cy="400854"/>
               </a:xfrm>
               <a:prstGeom prst="wedgeRoundRectCallout">
                 <a:avLst>
-                  <a:gd name="adj1" fmla="val -53980"/>
-                  <a:gd name="adj2" fmla="val 123524"/>
+                  <a:gd name="adj1" fmla="val -74492"/>
+                  <a:gd name="adj2" fmla="val 112305"/>
                   <a:gd name="adj3" fmla="val 16667"/>
                 </a:avLst>
               </a:prstGeom>
@@ -6296,26 +6321,47 @@
                 <a:pPr algn="ctr"/>
                 <a14:m>
                   <m:oMath xmlns:m="http://schemas.openxmlformats.org/officeDocument/2006/math">
-                    <m:acc>
-                      <m:accPr>
-                        <m:chr m:val="̂"/>
+                    <m:sSub>
+                      <m:sSubPr>
                         <m:ctrlPr>
-                          <a:rPr lang="en-US" sz="1600" i="1" smtClean="0">
+                          <a:rPr lang="en-US" sz="1600" b="0" i="1" smtClean="0">
                             <a:latin typeface="Cambria Math" panose="02040503050406030204" pitchFamily="18" charset="0"/>
                             <a:ea typeface="Cambria Math" panose="02040503050406030204" pitchFamily="18" charset="0"/>
                           </a:rPr>
                         </m:ctrlPr>
-                      </m:accPr>
+                      </m:sSubPr>
                       <m:e>
+                        <m:acc>
+                          <m:accPr>
+                            <m:chr m:val="̂"/>
+                            <m:ctrlPr>
+                              <a:rPr lang="en-US" sz="1600" i="1" smtClean="0">
+                                <a:latin typeface="Cambria Math" panose="02040503050406030204" pitchFamily="18" charset="0"/>
+                                <a:ea typeface="Cambria Math" panose="02040503050406030204" pitchFamily="18" charset="0"/>
+                              </a:rPr>
+                            </m:ctrlPr>
+                          </m:accPr>
+                          <m:e>
+                            <m:r>
+                              <a:rPr lang="en-US" sz="1600" i="1">
+                                <a:latin typeface="Cambria Math" panose="02040503050406030204" pitchFamily="18" charset="0"/>
+                                <a:ea typeface="Cambria Math" panose="02040503050406030204" pitchFamily="18" charset="0"/>
+                              </a:rPr>
+                              <m:t>𝑣</m:t>
+                            </m:r>
+                          </m:e>
+                        </m:acc>
+                      </m:e>
+                      <m:sub>
                         <m:r>
-                          <a:rPr lang="en-US" sz="1600" i="1">
+                          <a:rPr lang="en-US" sz="1600" b="0" i="1" smtClean="0">
                             <a:latin typeface="Cambria Math" panose="02040503050406030204" pitchFamily="18" charset="0"/>
                             <a:ea typeface="Cambria Math" panose="02040503050406030204" pitchFamily="18" charset="0"/>
                           </a:rPr>
-                          <m:t>𝑣</m:t>
+                          <m:t>𝜋</m:t>
                         </m:r>
-                      </m:e>
-                    </m:acc>
+                      </m:sub>
+                    </m:sSub>
                     <m:d>
                       <m:dPr>
                         <m:ctrlPr>
@@ -6352,13 +6398,13 @@
                 </a14:m>
                 <a:r>
                   <a:rPr lang="en-US" sz="1600" dirty="0"/>
-                  <a:t> samples are biased!</a:t>
+                  <a:t>s are biased!</a:t>
                 </a:r>
               </a:p>
             </p:txBody>
           </p:sp>
         </mc:Choice>
-        <mc:Fallback xmlns="">
+        <mc:Fallback>
           <p:sp>
             <p:nvSpPr>
               <p:cNvPr id="5" name="Speech Bubble: Rectangle with Corners Rounded 4">
@@ -6375,13 +6421,13 @@
             </p:nvSpPr>
             <p:spPr>
               <a:xfrm>
-                <a:off x="7979419" y="1957972"/>
-                <a:ext cx="3730429" cy="400854"/>
+                <a:off x="8686800" y="1957972"/>
+                <a:ext cx="3023048" cy="400854"/>
               </a:xfrm>
               <a:prstGeom prst="wedgeRoundRectCallout">
                 <a:avLst>
-                  <a:gd name="adj1" fmla="val -53980"/>
-                  <a:gd name="adj2" fmla="val 123524"/>
+                  <a:gd name="adj1" fmla="val -74492"/>
+                  <a:gd name="adj2" fmla="val 112305"/>
                   <a:gd name="adj3" fmla="val 16667"/>
                 </a:avLst>
               </a:prstGeom>
@@ -6407,8 +6453,8 @@
           </p:sp>
         </mc:Fallback>
       </mc:AlternateContent>
-      <mc:AlternateContent xmlns:mc="http://schemas.openxmlformats.org/markup-compatibility/2006" xmlns:a14="http://schemas.microsoft.com/office/drawing/2010/main">
-        <mc:Choice Requires="a14">
+      <mc:AlternateContent xmlns:mc="http://schemas.openxmlformats.org/markup-compatibility/2006">
+        <mc:Choice xmlns:a14="http://schemas.microsoft.com/office/drawing/2010/main" Requires="a14">
           <p:sp>
             <p:nvSpPr>
               <p:cNvPr id="6" name="Speech Bubble: Rectangle with Corners Rounded 5">
@@ -6423,13 +6469,13 @@
             </p:nvSpPr>
             <p:spPr>
               <a:xfrm>
-                <a:off x="7979419" y="2985961"/>
-                <a:ext cx="3730429" cy="636309"/>
+                <a:off x="7757411" y="2985961"/>
+                <a:ext cx="4159770" cy="636309"/>
               </a:xfrm>
               <a:prstGeom prst="wedgeRoundRectCallout">
                 <a:avLst>
-                  <a:gd name="adj1" fmla="val -82831"/>
-                  <a:gd name="adj2" fmla="val 57494"/>
+                  <a:gd name="adj1" fmla="val -79588"/>
+                  <a:gd name="adj2" fmla="val 61028"/>
                   <a:gd name="adj3" fmla="val 16667"/>
                 </a:avLst>
               </a:prstGeom>
@@ -6457,26 +6503,47 @@
                 <a:pPr algn="ctr"/>
                 <a14:m>
                   <m:oMath xmlns:m="http://schemas.openxmlformats.org/officeDocument/2006/math">
-                    <m:acc>
-                      <m:accPr>
-                        <m:chr m:val="̂"/>
+                    <m:sSub>
+                      <m:sSubPr>
                         <m:ctrlPr>
-                          <a:rPr lang="en-US" sz="1600" i="1" smtClean="0">
+                          <a:rPr lang="en-US" sz="1600" i="1">
                             <a:latin typeface="Cambria Math" panose="02040503050406030204" pitchFamily="18" charset="0"/>
                             <a:ea typeface="Cambria Math" panose="02040503050406030204" pitchFamily="18" charset="0"/>
                           </a:rPr>
                         </m:ctrlPr>
-                      </m:accPr>
+                      </m:sSubPr>
                       <m:e>
+                        <m:acc>
+                          <m:accPr>
+                            <m:chr m:val="̂"/>
+                            <m:ctrlPr>
+                              <a:rPr lang="en-US" sz="1600" i="1">
+                                <a:latin typeface="Cambria Math" panose="02040503050406030204" pitchFamily="18" charset="0"/>
+                                <a:ea typeface="Cambria Math" panose="02040503050406030204" pitchFamily="18" charset="0"/>
+                              </a:rPr>
+                            </m:ctrlPr>
+                          </m:accPr>
+                          <m:e>
+                            <m:r>
+                              <a:rPr lang="en-US" sz="1600" i="1">
+                                <a:latin typeface="Cambria Math" panose="02040503050406030204" pitchFamily="18" charset="0"/>
+                                <a:ea typeface="Cambria Math" panose="02040503050406030204" pitchFamily="18" charset="0"/>
+                              </a:rPr>
+                              <m:t>𝑣</m:t>
+                            </m:r>
+                          </m:e>
+                        </m:acc>
+                      </m:e>
+                      <m:sub>
                         <m:r>
                           <a:rPr lang="en-US" sz="1600" i="1">
                             <a:latin typeface="Cambria Math" panose="02040503050406030204" pitchFamily="18" charset="0"/>
                             <a:ea typeface="Cambria Math" panose="02040503050406030204" pitchFamily="18" charset="0"/>
                           </a:rPr>
-                          <m:t>𝑣</m:t>
+                          <m:t>𝜋</m:t>
                         </m:r>
-                      </m:e>
-                    </m:acc>
+                      </m:sub>
+                    </m:sSub>
                     <m:d>
                       <m:dPr>
                         <m:ctrlPr>
@@ -6499,7 +6566,7 @@
                 </a14:m>
                 <a:r>
                   <a:rPr lang="en-US" sz="1600" dirty="0"/>
-                  <a:t> has high variance if </a:t>
+                  <a:t> has initially high variance if </a:t>
                 </a:r>
                 <a14:m>
                   <m:oMath xmlns:m="http://schemas.openxmlformats.org/officeDocument/2006/math">
@@ -6513,13 +6580,13 @@
                 </a14:m>
                 <a:r>
                   <a:rPr lang="en-US" sz="1600" dirty="0"/>
-                  <a:t> samples have a high variance due to sampling.</a:t>
+                  <a:t>s have a high variance due to sampling.</a:t>
                 </a:r>
               </a:p>
             </p:txBody>
           </p:sp>
         </mc:Choice>
-        <mc:Fallback xmlns="">
+        <mc:Fallback>
           <p:sp>
             <p:nvSpPr>
               <p:cNvPr id="6" name="Speech Bubble: Rectangle with Corners Rounded 5">
@@ -6536,13 +6603,13 @@
             </p:nvSpPr>
             <p:spPr>
               <a:xfrm>
-                <a:off x="7979419" y="2985961"/>
-                <a:ext cx="3730429" cy="636309"/>
+                <a:off x="7757411" y="2985961"/>
+                <a:ext cx="4159770" cy="636309"/>
               </a:xfrm>
               <a:prstGeom prst="wedgeRoundRectCallout">
                 <a:avLst>
-                  <a:gd name="adj1" fmla="val -82831"/>
-                  <a:gd name="adj2" fmla="val 57494"/>
+                  <a:gd name="adj1" fmla="val -79588"/>
+                  <a:gd name="adj2" fmla="val 61028"/>
                   <a:gd name="adj3" fmla="val 16667"/>
                 </a:avLst>
               </a:prstGeom>
@@ -6568,8 +6635,8 @@
           </p:sp>
         </mc:Fallback>
       </mc:AlternateContent>
-      <mc:AlternateContent xmlns:mc="http://schemas.openxmlformats.org/markup-compatibility/2006" xmlns:a14="http://schemas.microsoft.com/office/drawing/2010/main">
-        <mc:Choice Requires="a14">
+      <mc:AlternateContent xmlns:mc="http://schemas.openxmlformats.org/markup-compatibility/2006">
+        <mc:Choice xmlns:a14="http://schemas.microsoft.com/office/drawing/2010/main" Requires="a14">
           <p:sp>
             <p:nvSpPr>
               <p:cNvPr id="7" name="Speech Bubble: Rectangle with Corners Rounded 6">
@@ -6584,13 +6651,13 @@
             </p:nvSpPr>
             <p:spPr>
               <a:xfrm>
-                <a:off x="10537515" y="5267915"/>
-                <a:ext cx="1325409" cy="1215074"/>
+                <a:off x="10784588" y="4699416"/>
+                <a:ext cx="1325409" cy="2012131"/>
               </a:xfrm>
               <a:prstGeom prst="wedgeRoundRectCallout">
                 <a:avLst>
-                  <a:gd name="adj1" fmla="val -92431"/>
-                  <a:gd name="adj2" fmla="val 18181"/>
+                  <a:gd name="adj1" fmla="val -83383"/>
+                  <a:gd name="adj2" fmla="val 8869"/>
                   <a:gd name="adj3" fmla="val 16667"/>
                 </a:avLst>
               </a:prstGeom>
@@ -6618,6 +6685,13 @@
                 <a:pPr algn="ctr"/>
                 <a:r>
                   <a:rPr lang="en-US" sz="1600" dirty="0"/>
+                  <a:t>With limited data: </a:t>
+                </a:r>
+              </a:p>
+              <a:p>
+                <a:pPr algn="ctr"/>
+                <a:r>
+                  <a:rPr lang="en-US" sz="1600" dirty="0"/>
                   <a:t>Total error becomes min. for some </a:t>
                 </a:r>
                 <a14:m>
@@ -6638,7 +6712,7 @@
             </p:txBody>
           </p:sp>
         </mc:Choice>
-        <mc:Fallback xmlns="">
+        <mc:Fallback>
           <p:sp>
             <p:nvSpPr>
               <p:cNvPr id="7" name="Speech Bubble: Rectangle with Corners Rounded 6">
@@ -6655,13 +6729,13 @@
             </p:nvSpPr>
             <p:spPr>
               <a:xfrm>
-                <a:off x="10537515" y="5267915"/>
-                <a:ext cx="1325409" cy="1215074"/>
+                <a:off x="10784588" y="4699416"/>
+                <a:ext cx="1325409" cy="2012131"/>
               </a:xfrm>
               <a:prstGeom prst="wedgeRoundRectCallout">
                 <a:avLst>
-                  <a:gd name="adj1" fmla="val -92431"/>
-                  <a:gd name="adj2" fmla="val 18181"/>
+                  <a:gd name="adj1" fmla="val -83383"/>
+                  <a:gd name="adj2" fmla="val 8869"/>
                   <a:gd name="adj3" fmla="val 16667"/>
                 </a:avLst>
               </a:prstGeom>
@@ -6718,7 +6792,7 @@
                             </p:stCondLst>
                             <p:childTnLst>
                               <p:par>
-                                <p:cTn id="5" presetID="1" presetClass="entr" presetSubtype="0" fill="hold" grpId="0" nodeType="clickEffect">
+                                <p:cTn id="5" presetID="1" presetClass="entr" presetSubtype="0" fill="hold" nodeType="clickEffect">
                                   <p:stCondLst>
                                     <p:cond delay="0"/>
                                   </p:stCondLst>
@@ -6731,7 +6805,11 @@
                                           </p:stCondLst>
                                         </p:cTn>
                                         <p:tgtEl>
-                                          <p:spTgt spid="5"/>
+                                          <p:spTgt spid="3">
+                                            <p:txEl>
+                                              <p:pRg st="2" end="2"/>
+                                            </p:txEl>
+                                          </p:spTgt>
                                         </p:tgtEl>
                                         <p:attrNameLst>
                                           <p:attrName>style.visibility</p:attrName>
@@ -6776,7 +6854,7 @@
                                           </p:stCondLst>
                                         </p:cTn>
                                         <p:tgtEl>
-                                          <p:spTgt spid="6"/>
+                                          <p:spTgt spid="5"/>
                                         </p:tgtEl>
                                         <p:attrNameLst>
                                           <p:attrName>style.visibility</p:attrName>
@@ -6821,7 +6899,11 @@
                                           </p:stCondLst>
                                         </p:cTn>
                                         <p:tgtEl>
-                                          <p:spTgt spid="4"/>
+                                          <p:spTgt spid="3">
+                                            <p:txEl>
+                                              <p:pRg st="4" end="4"/>
+                                            </p:txEl>
+                                          </p:spTgt>
                                         </p:tgtEl>
                                         <p:attrNameLst>
                                           <p:attrName>style.visibility</p:attrName>
@@ -6861,6 +6943,145 @@
                                     <p:set>
                                       <p:cBhvr>
                                         <p:cTn id="18" dur="1" fill="hold">
+                                          <p:stCondLst>
+                                            <p:cond delay="0"/>
+                                          </p:stCondLst>
+                                        </p:cTn>
+                                        <p:tgtEl>
+                                          <p:spTgt spid="6"/>
+                                        </p:tgtEl>
+                                        <p:attrNameLst>
+                                          <p:attrName>style.visibility</p:attrName>
+                                        </p:attrNameLst>
+                                      </p:cBhvr>
+                                      <p:to>
+                                        <p:strVal val="visible"/>
+                                      </p:to>
+                                    </p:set>
+                                  </p:childTnLst>
+                                </p:cTn>
+                              </p:par>
+                            </p:childTnLst>
+                          </p:cTn>
+                        </p:par>
+                      </p:childTnLst>
+                    </p:cTn>
+                  </p:par>
+                  <p:par>
+                    <p:cTn id="19" fill="hold">
+                      <p:stCondLst>
+                        <p:cond delay="indefinite"/>
+                      </p:stCondLst>
+                      <p:childTnLst>
+                        <p:par>
+                          <p:cTn id="20" fill="hold">
+                            <p:stCondLst>
+                              <p:cond delay="0"/>
+                            </p:stCondLst>
+                            <p:childTnLst>
+                              <p:par>
+                                <p:cTn id="21" presetID="1" presetClass="entr" presetSubtype="0" fill="hold" nodeType="clickEffect">
+                                  <p:stCondLst>
+                                    <p:cond delay="0"/>
+                                  </p:stCondLst>
+                                  <p:childTnLst>
+                                    <p:set>
+                                      <p:cBhvr>
+                                        <p:cTn id="22" dur="1" fill="hold">
+                                          <p:stCondLst>
+                                            <p:cond delay="0"/>
+                                          </p:stCondLst>
+                                        </p:cTn>
+                                        <p:tgtEl>
+                                          <p:spTgt spid="3">
+                                            <p:txEl>
+                                              <p:pRg st="6" end="6"/>
+                                            </p:txEl>
+                                          </p:spTgt>
+                                        </p:tgtEl>
+                                        <p:attrNameLst>
+                                          <p:attrName>style.visibility</p:attrName>
+                                        </p:attrNameLst>
+                                      </p:cBhvr>
+                                      <p:to>
+                                        <p:strVal val="visible"/>
+                                      </p:to>
+                                    </p:set>
+                                  </p:childTnLst>
+                                </p:cTn>
+                              </p:par>
+                            </p:childTnLst>
+                          </p:cTn>
+                        </p:par>
+                      </p:childTnLst>
+                    </p:cTn>
+                  </p:par>
+                  <p:par>
+                    <p:cTn id="23" fill="hold">
+                      <p:stCondLst>
+                        <p:cond delay="indefinite"/>
+                      </p:stCondLst>
+                      <p:childTnLst>
+                        <p:par>
+                          <p:cTn id="24" fill="hold">
+                            <p:stCondLst>
+                              <p:cond delay="0"/>
+                            </p:stCondLst>
+                            <p:childTnLst>
+                              <p:par>
+                                <p:cTn id="25" presetID="1" presetClass="entr" presetSubtype="0" fill="hold" nodeType="clickEffect">
+                                  <p:stCondLst>
+                                    <p:cond delay="0"/>
+                                  </p:stCondLst>
+                                  <p:childTnLst>
+                                    <p:set>
+                                      <p:cBhvr>
+                                        <p:cTn id="26" dur="1" fill="hold">
+                                          <p:stCondLst>
+                                            <p:cond delay="0"/>
+                                          </p:stCondLst>
+                                        </p:cTn>
+                                        <p:tgtEl>
+                                          <p:spTgt spid="4"/>
+                                        </p:tgtEl>
+                                        <p:attrNameLst>
+                                          <p:attrName>style.visibility</p:attrName>
+                                        </p:attrNameLst>
+                                      </p:cBhvr>
+                                      <p:to>
+                                        <p:strVal val="visible"/>
+                                      </p:to>
+                                    </p:set>
+                                  </p:childTnLst>
+                                </p:cTn>
+                              </p:par>
+                            </p:childTnLst>
+                          </p:cTn>
+                        </p:par>
+                      </p:childTnLst>
+                    </p:cTn>
+                  </p:par>
+                  <p:par>
+                    <p:cTn id="27" fill="hold">
+                      <p:stCondLst>
+                        <p:cond delay="indefinite"/>
+                      </p:stCondLst>
+                      <p:childTnLst>
+                        <p:par>
+                          <p:cTn id="28" fill="hold">
+                            <p:stCondLst>
+                              <p:cond delay="0"/>
+                            </p:stCondLst>
+                            <p:childTnLst>
+                              <p:par>
+                                <p:cTn id="29" presetID="1" presetClass="entr" presetSubtype="0" fill="hold" grpId="0" nodeType="clickEffect">
+                                  <p:stCondLst>
+                                    <p:cond delay="0"/>
+                                  </p:stCondLst>
+                                  <p:childTnLst>
+                                    <p:set>
+                                      <p:cBhvr>
+                                        <p:cTn id="30" dur="1" fill="hold">
                                           <p:stCondLst>
                                             <p:cond delay="0"/>
                                           </p:stCondLst>
@@ -12539,11 +12760,11 @@
                 </a:r>
                 <a:r>
                   <a:rPr lang="en-US" sz="1800" b="1" dirty="0"/>
-                  <a:t>performs better </a:t>
+                  <a:t>performs better</a:t>
                 </a:r>
                 <a:r>
                   <a:rPr lang="en-US" sz="1800" dirty="0"/>
-                  <a:t>than the one-step and MC extremes. </a:t>
+                  <a:t> in terms of the variance/bias tradeoff than the one-step and MC extremes. </a:t>
                 </a:r>
                 <a14:m>
                   <m:oMath xmlns:m="http://schemas.openxmlformats.org/officeDocument/2006/math">

--- a/slides/Lecture_Chapter07.pptx
+++ b/slides/Lecture_Chapter07.pptx
@@ -318,7 +318,7 @@
           <a:p>
             <a:fld id="{3E22BF2E-04DA-469E-97C5-BB68A0368813}" type="datetimeFigureOut">
               <a:rPr lang="en-US" smtClean="0"/>
-              <a:t>3/22/2026</a:t>
+              <a:t>3/30/2026</a:t>
             </a:fld>
             <a:endParaRPr lang="en-US"/>
           </a:p>
@@ -516,7 +516,7 @@
           <a:p>
             <a:fld id="{3E22BF2E-04DA-469E-97C5-BB68A0368813}" type="datetimeFigureOut">
               <a:rPr lang="en-US" smtClean="0"/>
-              <a:t>3/22/2026</a:t>
+              <a:t>3/30/2026</a:t>
             </a:fld>
             <a:endParaRPr lang="en-US"/>
           </a:p>
@@ -724,7 +724,7 @@
           <a:p>
             <a:fld id="{3E22BF2E-04DA-469E-97C5-BB68A0368813}" type="datetimeFigureOut">
               <a:rPr lang="en-US" smtClean="0"/>
-              <a:t>3/22/2026</a:t>
+              <a:t>3/30/2026</a:t>
             </a:fld>
             <a:endParaRPr lang="en-US"/>
           </a:p>
@@ -932,7 +932,7 @@
           <a:p>
             <a:fld id="{3E22BF2E-04DA-469E-97C5-BB68A0368813}" type="datetimeFigureOut">
               <a:rPr lang="en-US" smtClean="0"/>
-              <a:t>3/22/2026</a:t>
+              <a:t>3/30/2026</a:t>
             </a:fld>
             <a:endParaRPr lang="en-US"/>
           </a:p>
@@ -1207,7 +1207,7 @@
           <a:p>
             <a:fld id="{3E22BF2E-04DA-469E-97C5-BB68A0368813}" type="datetimeFigureOut">
               <a:rPr lang="en-US" smtClean="0"/>
-              <a:t>3/22/2026</a:t>
+              <a:t>3/30/2026</a:t>
             </a:fld>
             <a:endParaRPr lang="en-US"/>
           </a:p>
@@ -1472,7 +1472,7 @@
           <a:p>
             <a:fld id="{3E22BF2E-04DA-469E-97C5-BB68A0368813}" type="datetimeFigureOut">
               <a:rPr lang="en-US" smtClean="0"/>
-              <a:t>3/22/2026</a:t>
+              <a:t>3/30/2026</a:t>
             </a:fld>
             <a:endParaRPr lang="en-US"/>
           </a:p>
@@ -1884,7 +1884,7 @@
           <a:p>
             <a:fld id="{3E22BF2E-04DA-469E-97C5-BB68A0368813}" type="datetimeFigureOut">
               <a:rPr lang="en-US" smtClean="0"/>
-              <a:t>3/22/2026</a:t>
+              <a:t>3/30/2026</a:t>
             </a:fld>
             <a:endParaRPr lang="en-US"/>
           </a:p>
@@ -2025,7 +2025,7 @@
           <a:p>
             <a:fld id="{3E22BF2E-04DA-469E-97C5-BB68A0368813}" type="datetimeFigureOut">
               <a:rPr lang="en-US" smtClean="0"/>
-              <a:t>3/22/2026</a:t>
+              <a:t>3/30/2026</a:t>
             </a:fld>
             <a:endParaRPr lang="en-US"/>
           </a:p>
@@ -2138,7 +2138,7 @@
           <a:p>
             <a:fld id="{3E22BF2E-04DA-469E-97C5-BB68A0368813}" type="datetimeFigureOut">
               <a:rPr lang="en-US" smtClean="0"/>
-              <a:t>3/22/2026</a:t>
+              <a:t>3/30/2026</a:t>
             </a:fld>
             <a:endParaRPr lang="en-US"/>
           </a:p>
@@ -2449,7 +2449,7 @@
           <a:p>
             <a:fld id="{3E22BF2E-04DA-469E-97C5-BB68A0368813}" type="datetimeFigureOut">
               <a:rPr lang="en-US" smtClean="0"/>
-              <a:t>3/22/2026</a:t>
+              <a:t>3/30/2026</a:t>
             </a:fld>
             <a:endParaRPr lang="en-US"/>
           </a:p>
@@ -2737,7 +2737,7 @@
           <a:p>
             <a:fld id="{3E22BF2E-04DA-469E-97C5-BB68A0368813}" type="datetimeFigureOut">
               <a:rPr lang="en-US" smtClean="0"/>
-              <a:t>3/22/2026</a:t>
+              <a:t>3/30/2026</a:t>
             </a:fld>
             <a:endParaRPr lang="en-US"/>
           </a:p>
@@ -2978,7 +2978,7 @@
           <a:p>
             <a:fld id="{3E22BF2E-04DA-469E-97C5-BB68A0368813}" type="datetimeFigureOut">
               <a:rPr lang="en-US" smtClean="0"/>
-              <a:t>3/22/2026</a:t>
+              <a:t>3/30/2026</a:t>
             </a:fld>
             <a:endParaRPr lang="en-US"/>
           </a:p>
@@ -4062,6 +4062,87 @@
           </a:extLst>
         </p:spPr>
       </p:pic>
+      <p:grpSp>
+        <p:nvGrpSpPr>
+          <p:cNvPr id="7" name="Group 6">
+            <a:extLst>
+              <a:ext uri="{FF2B5EF4-FFF2-40B4-BE49-F238E27FC236}">
+                <a16:creationId xmlns:a16="http://schemas.microsoft.com/office/drawing/2014/main" id="{DA1C6744-BD97-2C10-F393-A0B726F71E7A}"/>
+              </a:ext>
+            </a:extLst>
+          </p:cNvPr>
+          <p:cNvGrpSpPr/>
+          <p:nvPr/>
+        </p:nvGrpSpPr>
+        <p:grpSpPr>
+          <a:xfrm>
+            <a:off x="10961015" y="4798687"/>
+            <a:ext cx="1037459" cy="1303078"/>
+            <a:chOff x="5248582" y="2401735"/>
+            <a:chExt cx="1694835" cy="2054530"/>
+          </a:xfrm>
+        </p:grpSpPr>
+        <p:pic>
+          <p:nvPicPr>
+            <p:cNvPr id="8" name="Picture 7">
+              <a:extLst>
+                <a:ext uri="{FF2B5EF4-FFF2-40B4-BE49-F238E27FC236}">
+                  <a16:creationId xmlns:a16="http://schemas.microsoft.com/office/drawing/2014/main" id="{2F5FC233-1ACF-0EE9-5B1F-F0A29270EECF}"/>
+                </a:ext>
+              </a:extLst>
+            </p:cNvPr>
+            <p:cNvPicPr>
+              <a:picLocks noChangeAspect="1"/>
+            </p:cNvPicPr>
+            <p:nvPr/>
+          </p:nvPicPr>
+          <p:blipFill>
+            <a:blip r:embed="rId7"/>
+            <a:stretch>
+              <a:fillRect/>
+            </a:stretch>
+          </p:blipFill>
+          <p:spPr>
+            <a:xfrm>
+              <a:off x="5248582" y="2401735"/>
+              <a:ext cx="1694835" cy="2054530"/>
+            </a:xfrm>
+            <a:prstGeom prst="rect">
+              <a:avLst/>
+            </a:prstGeom>
+          </p:spPr>
+        </p:pic>
+        <p:pic>
+          <p:nvPicPr>
+            <p:cNvPr id="9" name="Picture 8">
+              <a:extLst>
+                <a:ext uri="{FF2B5EF4-FFF2-40B4-BE49-F238E27FC236}">
+                  <a16:creationId xmlns:a16="http://schemas.microsoft.com/office/drawing/2014/main" id="{26CB3135-CE78-1137-FBA3-29AA8592D8FA}"/>
+                </a:ext>
+              </a:extLst>
+            </p:cNvPr>
+            <p:cNvPicPr>
+              <a:picLocks noChangeAspect="1"/>
+            </p:cNvPicPr>
+            <p:nvPr/>
+          </p:nvPicPr>
+          <p:blipFill>
+            <a:blip r:embed="rId8"/>
+            <a:stretch>
+              <a:fillRect/>
+            </a:stretch>
+          </p:blipFill>
+          <p:spPr>
+            <a:xfrm>
+              <a:off x="5315643" y="2435129"/>
+              <a:ext cx="1560711" cy="1560711"/>
+            </a:xfrm>
+            <a:prstGeom prst="rect">
+              <a:avLst/>
+            </a:prstGeom>
+          </p:spPr>
+        </p:pic>
+      </p:grpSp>
     </p:spTree>
     <p:extLst>
       <p:ext uri="{BB962C8B-B14F-4D97-AF65-F5344CB8AC3E}">
@@ -4122,8 +4203,8 @@
           </a:p>
         </p:txBody>
       </p:sp>
-      <mc:AlternateContent xmlns:mc="http://schemas.openxmlformats.org/markup-compatibility/2006">
-        <mc:Choice xmlns:a14="http://schemas.microsoft.com/office/drawing/2010/main" Requires="a14">
+      <mc:AlternateContent xmlns:mc="http://schemas.openxmlformats.org/markup-compatibility/2006" xmlns:a14="http://schemas.microsoft.com/office/drawing/2010/main">
+        <mc:Choice Requires="a14">
           <p:sp>
             <p:nvSpPr>
               <p:cNvPr id="3" name="Content Placeholder 2">
@@ -5618,7 +5699,7 @@
             </p:txBody>
           </p:sp>
         </mc:Choice>
-        <mc:Fallback>
+        <mc:Fallback xmlns="">
           <p:sp>
             <p:nvSpPr>
               <p:cNvPr id="3" name="Content Placeholder 2">
@@ -5662,8 +5743,8 @@
           </p:sp>
         </mc:Fallback>
       </mc:AlternateContent>
-      <mc:AlternateContent xmlns:mc="http://schemas.openxmlformats.org/markup-compatibility/2006">
-        <mc:Choice xmlns:a14="http://schemas.microsoft.com/office/drawing/2010/main" Requires="a14">
+      <mc:AlternateContent xmlns:mc="http://schemas.openxmlformats.org/markup-compatibility/2006" xmlns:a14="http://schemas.microsoft.com/office/drawing/2010/main">
+        <mc:Choice Requires="a14">
           <p:graphicFrame>
             <p:nvGraphicFramePr>
               <p:cNvPr id="4" name="Table 3">
@@ -6007,7 +6088,7 @@
             </a:graphic>
           </p:graphicFrame>
         </mc:Choice>
-        <mc:Fallback>
+        <mc:Fallback xmlns="">
           <p:graphicFrame>
             <p:nvGraphicFramePr>
               <p:cNvPr id="4" name="Table 3">
@@ -6271,8 +6352,8 @@
           </p:graphicFrame>
         </mc:Fallback>
       </mc:AlternateContent>
-      <mc:AlternateContent xmlns:mc="http://schemas.openxmlformats.org/markup-compatibility/2006">
-        <mc:Choice xmlns:a14="http://schemas.microsoft.com/office/drawing/2010/main" Requires="a14">
+      <mc:AlternateContent xmlns:mc="http://schemas.openxmlformats.org/markup-compatibility/2006" xmlns:a14="http://schemas.microsoft.com/office/drawing/2010/main">
+        <mc:Choice Requires="a14">
           <p:sp>
             <p:nvSpPr>
               <p:cNvPr id="5" name="Speech Bubble: Rectangle with Corners Rounded 4">
@@ -6404,7 +6485,7 @@
             </p:txBody>
           </p:sp>
         </mc:Choice>
-        <mc:Fallback>
+        <mc:Fallback xmlns="">
           <p:sp>
             <p:nvSpPr>
               <p:cNvPr id="5" name="Speech Bubble: Rectangle with Corners Rounded 4">
@@ -6453,8 +6534,8 @@
           </p:sp>
         </mc:Fallback>
       </mc:AlternateContent>
-      <mc:AlternateContent xmlns:mc="http://schemas.openxmlformats.org/markup-compatibility/2006">
-        <mc:Choice xmlns:a14="http://schemas.microsoft.com/office/drawing/2010/main" Requires="a14">
+      <mc:AlternateContent xmlns:mc="http://schemas.openxmlformats.org/markup-compatibility/2006" xmlns:a14="http://schemas.microsoft.com/office/drawing/2010/main">
+        <mc:Choice Requires="a14">
           <p:sp>
             <p:nvSpPr>
               <p:cNvPr id="6" name="Speech Bubble: Rectangle with Corners Rounded 5">
@@ -6586,7 +6667,7 @@
             </p:txBody>
           </p:sp>
         </mc:Choice>
-        <mc:Fallback>
+        <mc:Fallback xmlns="">
           <p:sp>
             <p:nvSpPr>
               <p:cNvPr id="6" name="Speech Bubble: Rectangle with Corners Rounded 5">
@@ -6635,8 +6716,8 @@
           </p:sp>
         </mc:Fallback>
       </mc:AlternateContent>
-      <mc:AlternateContent xmlns:mc="http://schemas.openxmlformats.org/markup-compatibility/2006">
-        <mc:Choice xmlns:a14="http://schemas.microsoft.com/office/drawing/2010/main" Requires="a14">
+      <mc:AlternateContent xmlns:mc="http://schemas.openxmlformats.org/markup-compatibility/2006" xmlns:a14="http://schemas.microsoft.com/office/drawing/2010/main">
+        <mc:Choice Requires="a14">
           <p:sp>
             <p:nvSpPr>
               <p:cNvPr id="7" name="Speech Bubble: Rectangle with Corners Rounded 6">
@@ -6712,7 +6793,7 @@
             </p:txBody>
           </p:sp>
         </mc:Choice>
-        <mc:Fallback>
+        <mc:Fallback xmlns="">
           <p:sp>
             <p:nvSpPr>
               <p:cNvPr id="7" name="Speech Bubble: Rectangle with Corners Rounded 6">
@@ -12660,8 +12741,8 @@
           </a:extLst>
         </p:spPr>
       </p:pic>
-      <mc:AlternateContent xmlns:mc="http://schemas.openxmlformats.org/markup-compatibility/2006">
-        <mc:Choice xmlns:a14="http://schemas.microsoft.com/office/drawing/2010/main" Requires="a14">
+      <mc:AlternateContent xmlns:mc="http://schemas.openxmlformats.org/markup-compatibility/2006" xmlns:a14="http://schemas.microsoft.com/office/drawing/2010/main">
+        <mc:Choice Requires="a14">
           <p:sp>
             <p:nvSpPr>
               <p:cNvPr id="3" name="Content Placeholder 2">
@@ -12849,7 +12930,7 @@
             </p:txBody>
           </p:sp>
         </mc:Choice>
-        <mc:Fallback>
+        <mc:Fallback xmlns="">
           <p:sp>
             <p:nvSpPr>
               <p:cNvPr id="3" name="Content Placeholder 2">
